--- a/selfcafe-miraiya-trial-deck/selfcafe-miraiya-trial-deck.pptx
+++ b/selfcafe-miraiya-trial-deck/selfcafe-miraiya-trial-deck.pptx
@@ -11,9 +11,10 @@
     <p:sldId id="259" r:id="rId5"/>
     <p:sldId id="260" r:id="rId6"/>
     <p:sldId id="261" r:id="rId7"/>
+    <p:sldId id="262" r:id="rId8"/>
   </p:sldIdLst>
   <p:notesMasterIdLst>
-    <p:notesMasterId r:id="rId8"/>
+    <p:notesMasterId r:id="rId9"/>
   </p:notesMasterIdLst>
   <p:sldSz cx="12192000" cy="6858000"/>
   <p:notesSz cx="6858000" cy="12192000"/>
@@ -971,6 +972,94 @@
             <a:fld id="{F7021451-1387-4CA6-816F-3879F97B5CBC}" type="slidenum">
               <a:rPr lang="en-US"/>
               <a:t>6</a:t>
+            </a:fld>
+            <a:endParaRPr lang="en-US"/>
+          </a:p>
+        </p:txBody>
+      </p:sp>
+    </p:spTree>
+    <p:extLst>
+      <p:ext uri="{BB962C8B-B14F-4D97-AF65-F5344CB8AC3E}">
+        <p14:creationId xmlns:p14="http://schemas.microsoft.com/office/powerpoint/2010/main" val="1024086991"/>
+      </p:ext>
+    </p:extLst>
+  </p:cSld>
+  <p:clrMapOvr>
+    <a:masterClrMapping/>
+  </p:clrMapOvr>
+</p:notes>
+</file>
+
+<file path=ppt/notesSlides/notesSlide7.xml><?xml version="1.0" encoding="utf-8"?>
+<p:notes xmlns:a="http://schemas.openxmlformats.org/drawingml/2006/main" xmlns:r="http://schemas.openxmlformats.org/officeDocument/2006/relationships" xmlns:p="http://schemas.openxmlformats.org/presentationml/2006/main">
+  <p:cSld>
+    <p:spTree>
+      <p:nvGrpSpPr>
+        <p:cNvPr id="1" name=""/>
+        <p:cNvGrpSpPr/>
+        <p:nvPr/>
+      </p:nvGrpSpPr>
+      <p:grpSpPr>
+        <a:xfrm>
+          <a:off x="0" y="0"/>
+          <a:ext cx="0" cy="0"/>
+          <a:chOff x="0" y="0"/>
+          <a:chExt cx="0" cy="0"/>
+        </a:xfrm>
+      </p:grpSpPr>
+      <p:sp>
+        <p:nvSpPr>
+          <p:cNvPr id="2" name="Slide Image Placeholder 1"/>
+          <p:cNvSpPr>
+            <a:spLocks noGrp="1" noRot="1" noChangeAspect="1"/>
+          </p:cNvSpPr>
+          <p:nvPr>
+            <p:ph type="sldImg"/>
+          </p:nvPr>
+        </p:nvSpPr>
+        <p:spPr/>
+      </p:sp>
+      <p:sp>
+        <p:nvSpPr>
+          <p:cNvPr id="3" name="Notes Placeholder 2"/>
+          <p:cNvSpPr>
+            <a:spLocks noGrp="1"/>
+          </p:cNvSpPr>
+          <p:nvPr>
+            <p:ph type="body" idx="1"/>
+          </p:nvPr>
+        </p:nvSpPr>
+        <p:spPr/>
+        <p:txBody>
+          <a:bodyPr/>
+          <a:lstStyle/>
+          <a:p>
+            <a:r>
+              <a:rPr lang="en-US" dirty="0"/>
+              <a:t/>
+            </a:r>
+            <a:endParaRPr lang="en-US" dirty="0"/>
+          </a:p>
+        </p:txBody>
+      </p:sp>
+      <p:sp>
+        <p:nvSpPr>
+          <p:cNvPr id="4" name="Slide Number Placeholder 3"/>
+          <p:cNvSpPr>
+            <a:spLocks noGrp="1"/>
+          </p:cNvSpPr>
+          <p:nvPr>
+            <p:ph type="sldNum" sz="quarter" idx="10"/>
+          </p:nvPr>
+        </p:nvSpPr>
+        <p:spPr/>
+        <p:txBody>
+          <a:bodyPr/>
+          <a:lstStyle/>
+          <a:p>
+            <a:fld id="{F7021451-1387-4CA6-816F-3879F97B5CBC}" type="slidenum">
+              <a:rPr lang="en-US"/>
+              <a:t>7</a:t>
             </a:fld>
             <a:endParaRPr lang="en-US"/>
           </a:p>
@@ -1414,7 +1503,7 @@
                 <a:ea typeface="Arial" pitchFamily="34" charset="-122"/>
                 <a:cs typeface="Arial" pitchFamily="34" charset="-120"/>
               </a:rPr>
-              <a:t>TRIAL — SPECIAL TERMS</a:t>
+              <a:t>TRIAL PROGRAM</a:t>
             </a:r>
             <a:endParaRPr lang="en-US" sz="1050" dirty="0"/>
           </a:p>
@@ -1492,7 +1581,7 @@
                 <a:ea typeface="Yu Gothic" pitchFamily="34" charset="-122"/>
                 <a:cs typeface="Yu Gothic" pitchFamily="34" charset="-120"/>
               </a:rPr>
-              <a:t>トライアル導入 特別条件のご提案</a:t>
+              <a:t>トライアル導入のご提案</a:t>
             </a:r>
             <a:endParaRPr lang="en-US" sz="4200" dirty="0"/>
           </a:p>
@@ -1678,7 +1767,7 @@
         <p:spPr>
           <a:xfrm>
             <a:off x="4114800" y="5742432"/>
-            <a:ext cx="2926080" cy="381305"/>
+            <a:ext cx="3291840" cy="381305"/>
           </a:xfrm>
           <a:prstGeom prst="rect">
             <a:avLst/>
@@ -1713,7 +1802,7 @@
                 <a:ea typeface="Yu Gothic" pitchFamily="34" charset="-122"/>
                 <a:cs typeface="Yu Gothic" pitchFamily="34" charset="-120"/>
               </a:rPr>
-              <a:t> ％</a:t>
+              <a:t> ％ ＋ 月額5万円</a:t>
             </a:r>
             <a:endParaRPr lang="en-US" sz="2600" dirty="0"/>
           </a:p>
@@ -1728,7 +1817,7 @@
         <p:spPr>
           <a:xfrm>
             <a:off x="4114800" y="6144768"/>
-            <a:ext cx="3291840" cy="165506"/>
+            <a:ext cx="3657600" cy="165506"/>
           </a:xfrm>
           <a:prstGeom prst="rect">
             <a:avLst/>
@@ -1752,7 +1841,7 @@
                 <a:ea typeface="Yu Gothic" pitchFamily="34" charset="-122"/>
                 <a:cs typeface="Yu Gothic" pitchFamily="34" charset="-120"/>
               </a:rPr>
-              <a:t>セルフカフェ売上の歩合</a:t>
+              <a:t>御社の毎月のお受取</a:t>
             </a:r>
             <a:endParaRPr lang="en-US" sz="950" dirty="0"/>
           </a:p>
@@ -1766,7 +1855,7 @@
         </p:nvSpPr>
         <p:spPr>
           <a:xfrm>
-            <a:off x="7406640" y="5742432"/>
+            <a:off x="7863840" y="5742432"/>
             <a:ext cx="2926080" cy="381305"/>
           </a:xfrm>
           <a:prstGeom prst="rect">
@@ -1805,7 +1894,7 @@
         </p:nvSpPr>
         <p:spPr>
           <a:xfrm>
-            <a:off x="7406640" y="6144768"/>
+            <a:off x="7863840" y="6144768"/>
             <a:ext cx="3291840" cy="165506"/>
           </a:xfrm>
           <a:prstGeom prst="rect">
@@ -1864,7 +1953,7 @@
         </p:nvSpPr>
         <p:spPr>
           <a:xfrm>
-            <a:off x="7004304" y="5769864"/>
+            <a:off x="7461504" y="5769864"/>
             <a:ext cx="11887" cy="533095"/>
           </a:xfrm>
           <a:prstGeom prst="rect">
@@ -2011,7 +2100,7 @@
                 <a:ea typeface="Yu Gothic" pitchFamily="34" charset="-122"/>
                 <a:cs typeface="Yu Gothic" pitchFamily="34" charset="-120"/>
               </a:rPr>
-              <a:t>   トライアル特別条件</a:t>
+              <a:t>   トライアル条件</a:t>
             </a:r>
             <a:endParaRPr lang="en-US" sz="1050" dirty="0"/>
           </a:p>
@@ -2050,7 +2139,7 @@
                 <a:ea typeface="Yu Gothic" pitchFamily="34" charset="-122"/>
                 <a:cs typeface="Yu Gothic" pitchFamily="34" charset="-120"/>
               </a:rPr>
-              <a:t>通常条件とは別の、トライアル条件です。</a:t>
+              <a:t>トライアル導入の条件をご提案します。</a:t>
             </a:r>
             <a:endParaRPr lang="en-US" sz="2900" dirty="0"/>
           </a:p>
@@ -2152,7 +2241,7 @@
                 <a:ea typeface="Yu Gothic" pitchFamily="34" charset="-122"/>
                 <a:cs typeface="Yu Gothic" pitchFamily="34" charset="-120"/>
               </a:rPr>
-              <a:t>セルフカフェ × 未来屋書店 トライアル導入 特別条件</a:t>
+              <a:t>セルフカフェ × 未来屋書店 トライアル導入のご提案</a:t>
             </a:r>
             <a:endParaRPr lang="en-US" sz="900" dirty="0"/>
           </a:p>
@@ -2206,11 +2295,11 @@
         <p:spPr>
           <a:xfrm>
             <a:off x="660197" y="1651406"/>
-            <a:ext cx="6858000" cy="749808"/>
+            <a:ext cx="6858000" cy="621792"/>
           </a:xfrm>
           <a:prstGeom prst="roundRect">
             <a:avLst>
-              <a:gd name="adj" fmla="val 7317"/>
+              <a:gd name="adj" fmla="val 8824"/>
             </a:avLst>
           </a:prstGeom>
           <a:solidFill>
@@ -2240,7 +2329,7 @@
         </p:blipFill>
         <p:spPr>
           <a:xfrm>
-            <a:off x="916229" y="1861718"/>
+            <a:off x="916229" y="1797710"/>
             <a:ext cx="329184" cy="329184"/>
           </a:xfrm>
           <a:prstGeom prst="rect">
@@ -2256,8 +2345,8 @@
         </p:nvSpPr>
         <p:spPr>
           <a:xfrm>
-            <a:off x="1373429" y="1742846"/>
-            <a:ext cx="5888736" cy="256032"/>
+            <a:off x="1373429" y="1706270"/>
+            <a:ext cx="5888736" cy="237744"/>
           </a:xfrm>
           <a:prstGeom prst="rect">
             <a:avLst/>
@@ -2295,8 +2384,8 @@
         </p:nvSpPr>
         <p:spPr>
           <a:xfrm>
-            <a:off x="1373429" y="2017166"/>
-            <a:ext cx="5888736" cy="292608"/>
+            <a:off x="1373429" y="1962302"/>
+            <a:ext cx="5888736" cy="256032"/>
           </a:xfrm>
           <a:prstGeom prst="rect">
             <a:avLst/>
@@ -2334,12 +2423,12 @@
         </p:nvSpPr>
         <p:spPr>
           <a:xfrm>
-            <a:off x="660197" y="2510942"/>
-            <a:ext cx="6858000" cy="749808"/>
+            <a:off x="660197" y="2364638"/>
+            <a:ext cx="6858000" cy="621792"/>
           </a:xfrm>
           <a:prstGeom prst="roundRect">
             <a:avLst>
-              <a:gd name="adj" fmla="val 7317"/>
+              <a:gd name="adj" fmla="val 8824"/>
             </a:avLst>
           </a:prstGeom>
           <a:solidFill>
@@ -2369,7 +2458,7 @@
         </p:blipFill>
         <p:spPr>
           <a:xfrm>
-            <a:off x="916229" y="2721254"/>
+            <a:off x="916229" y="2510942"/>
             <a:ext cx="329184" cy="329184"/>
           </a:xfrm>
           <a:prstGeom prst="rect">
@@ -2385,8 +2474,8 @@
         </p:nvSpPr>
         <p:spPr>
           <a:xfrm>
-            <a:off x="1373429" y="2602382"/>
-            <a:ext cx="5888736" cy="256032"/>
+            <a:off x="1373429" y="2419502"/>
+            <a:ext cx="5888736" cy="237744"/>
           </a:xfrm>
           <a:prstGeom prst="rect">
             <a:avLst/>
@@ -2424,8 +2513,8 @@
         </p:nvSpPr>
         <p:spPr>
           <a:xfrm>
-            <a:off x="1373429" y="2876702"/>
-            <a:ext cx="5888736" cy="292608"/>
+            <a:off x="1373429" y="2675534"/>
+            <a:ext cx="5888736" cy="256032"/>
           </a:xfrm>
           <a:prstGeom prst="rect">
             <a:avLst/>
@@ -2463,12 +2552,12 @@
         </p:nvSpPr>
         <p:spPr>
           <a:xfrm>
-            <a:off x="660197" y="3370478"/>
-            <a:ext cx="6858000" cy="749808"/>
+            <a:off x="660197" y="3077870"/>
+            <a:ext cx="6858000" cy="621792"/>
           </a:xfrm>
           <a:prstGeom prst="roundRect">
             <a:avLst>
-              <a:gd name="adj" fmla="val 7317"/>
+              <a:gd name="adj" fmla="val 8824"/>
             </a:avLst>
           </a:prstGeom>
           <a:solidFill>
@@ -2498,7 +2587,7 @@
         </p:blipFill>
         <p:spPr>
           <a:xfrm>
-            <a:off x="916229" y="3580790"/>
+            <a:off x="916229" y="3224174"/>
             <a:ext cx="329184" cy="329184"/>
           </a:xfrm>
           <a:prstGeom prst="rect">
@@ -2514,8 +2603,8 @@
         </p:nvSpPr>
         <p:spPr>
           <a:xfrm>
-            <a:off x="1373429" y="3461918"/>
-            <a:ext cx="5888736" cy="256032"/>
+            <a:off x="1373429" y="3132734"/>
+            <a:ext cx="5888736" cy="237744"/>
           </a:xfrm>
           <a:prstGeom prst="rect">
             <a:avLst/>
@@ -2553,8 +2642,8 @@
         </p:nvSpPr>
         <p:spPr>
           <a:xfrm>
-            <a:off x="1373429" y="3736238"/>
-            <a:ext cx="5888736" cy="292608"/>
+            <a:off x="1373429" y="3388766"/>
+            <a:ext cx="5888736" cy="256032"/>
           </a:xfrm>
           <a:prstGeom prst="rect">
             <a:avLst/>
@@ -2592,12 +2681,12 @@
         </p:nvSpPr>
         <p:spPr>
           <a:xfrm>
-            <a:off x="660197" y="4230014"/>
-            <a:ext cx="6858000" cy="749808"/>
+            <a:off x="660197" y="3791102"/>
+            <a:ext cx="6858000" cy="621792"/>
           </a:xfrm>
           <a:prstGeom prst="roundRect">
             <a:avLst>
-              <a:gd name="adj" fmla="val 7317"/>
+              <a:gd name="adj" fmla="val 8824"/>
             </a:avLst>
           </a:prstGeom>
           <a:solidFill>
@@ -2627,7 +2716,7 @@
         </p:blipFill>
         <p:spPr>
           <a:xfrm>
-            <a:off x="916229" y="4440326"/>
+            <a:off x="916229" y="3937406"/>
             <a:ext cx="329184" cy="329184"/>
           </a:xfrm>
           <a:prstGeom prst="rect">
@@ -2643,8 +2732,8 @@
         </p:nvSpPr>
         <p:spPr>
           <a:xfrm>
-            <a:off x="1373429" y="4321454"/>
-            <a:ext cx="5888736" cy="256032"/>
+            <a:off x="1373429" y="3845966"/>
+            <a:ext cx="5888736" cy="237744"/>
           </a:xfrm>
           <a:prstGeom prst="rect">
             <a:avLst/>
@@ -2668,7 +2757,7 @@
                 <a:ea typeface="Yu Gothic" pitchFamily="34" charset="-122"/>
                 <a:cs typeface="Yu Gothic" pitchFamily="34" charset="-120"/>
               </a:rPr>
-              <a:t>歩合</a:t>
+              <a:t>お支払い</a:t>
             </a:r>
             <a:endParaRPr lang="en-US" sz="1150" dirty="0"/>
           </a:p>
@@ -2682,8 +2771,8 @@
         </p:nvSpPr>
         <p:spPr>
           <a:xfrm>
-            <a:off x="1373429" y="4595774"/>
-            <a:ext cx="5888736" cy="292608"/>
+            <a:off x="1373429" y="4101998"/>
+            <a:ext cx="5888736" cy="256032"/>
           </a:xfrm>
           <a:prstGeom prst="rect">
             <a:avLst/>
@@ -2707,7 +2796,7 @@
                 <a:ea typeface="Yu Gothic" pitchFamily="34" charset="-122"/>
                 <a:cs typeface="Yu Gothic" pitchFamily="34" charset="-120"/>
               </a:rPr>
-              <a:t>セルフカフェ売上の25％を御社へお支払い</a:t>
+              <a:t>セルフカフェ売上の25％ ＋ 月額固定5万円</a:t>
             </a:r>
             <a:endParaRPr lang="en-US" sz="1050" dirty="0"/>
           </a:p>
@@ -2721,12 +2810,12 @@
         </p:nvSpPr>
         <p:spPr>
           <a:xfrm>
-            <a:off x="660197" y="5089550"/>
-            <a:ext cx="6858000" cy="749808"/>
+            <a:off x="660197" y="4504334"/>
+            <a:ext cx="6858000" cy="621792"/>
           </a:xfrm>
           <a:prstGeom prst="roundRect">
             <a:avLst>
-              <a:gd name="adj" fmla="val 7317"/>
+              <a:gd name="adj" fmla="val 8824"/>
             </a:avLst>
           </a:prstGeom>
           <a:solidFill>
@@ -2742,7 +2831,7 @@
       </p:sp>
       <p:pic>
         <p:nvPicPr>
-          <p:cNvPr id="26" name="Image 5" descr="/home/user/suzuki-ceo/selfcafe-miraiya-trial-deck/assets/icons/LuKeyRound-green.png">    </p:cNvPr>
+          <p:cNvPr id="26" name="Image 5" descr="/home/user/suzuki-ceo/selfcafe-miraiya-trial-deck/assets/icons/LuCalendarCheck-green.png">    </p:cNvPr>
           <p:cNvPicPr>
             <a:picLocks noChangeAspect="1"/>
           </p:cNvPicPr>
@@ -2756,7 +2845,7 @@
         </p:blipFill>
         <p:spPr>
           <a:xfrm>
-            <a:off x="916229" y="5299862"/>
+            <a:off x="916229" y="4650638"/>
             <a:ext cx="329184" cy="329184"/>
           </a:xfrm>
           <a:prstGeom prst="rect">
@@ -2772,8 +2861,8 @@
         </p:nvSpPr>
         <p:spPr>
           <a:xfrm>
-            <a:off x="1373429" y="5180990"/>
-            <a:ext cx="5888736" cy="256032"/>
+            <a:off x="1373429" y="4559198"/>
+            <a:ext cx="5888736" cy="237744"/>
           </a:xfrm>
           <a:prstGeom prst="rect">
             <a:avLst/>
@@ -2797,7 +2886,7 @@
                 <a:ea typeface="Yu Gothic" pitchFamily="34" charset="-122"/>
                 <a:cs typeface="Yu Gothic" pitchFamily="34" charset="-120"/>
               </a:rPr>
-              <a:t>原状回復義務</a:t>
+              <a:t>契約期間</a:t>
             </a:r>
             <a:endParaRPr lang="en-US" sz="1150" dirty="0"/>
           </a:p>
@@ -2811,8 +2900,8 @@
         </p:nvSpPr>
         <p:spPr>
           <a:xfrm>
-            <a:off x="1373429" y="5455310"/>
-            <a:ext cx="5888736" cy="292608"/>
+            <a:off x="1373429" y="4815230"/>
+            <a:ext cx="5888736" cy="256032"/>
           </a:xfrm>
           <a:prstGeom prst="rect">
             <a:avLst/>
@@ -2836,7 +2925,7 @@
                 <a:ea typeface="Yu Gothic" pitchFamily="34" charset="-122"/>
                 <a:cs typeface="Yu Gothic" pitchFamily="34" charset="-120"/>
               </a:rPr>
-              <a:t>なし（当社のマシン・カメラ等のみ撤去します）</a:t>
+              <a:t>基本3年〜／特約により最低2年〜でも同条件</a:t>
             </a:r>
             <a:endParaRPr lang="en-US" sz="1050" dirty="0"/>
           </a:p>
@@ -2850,212 +2939,12 @@
         </p:nvSpPr>
         <p:spPr>
           <a:xfrm>
-            <a:off x="7902245" y="1651406"/>
-            <a:ext cx="3629254" cy="1737360"/>
+            <a:off x="660197" y="5217566"/>
+            <a:ext cx="6858000" cy="621792"/>
           </a:xfrm>
           <a:prstGeom prst="roundRect">
             <a:avLst>
-              <a:gd name="adj" fmla="val 3158"/>
-            </a:avLst>
-          </a:prstGeom>
-          <a:solidFill>
-            <a:srgbClr val="0C5230"/>
-          </a:solidFill>
-          <a:ln/>
-        </p:spPr>
-      </p:sp>
-      <p:sp>
-        <p:nvSpPr>
-          <p:cNvPr id="30" name="Text 22"/>
-          <p:cNvSpPr/>
-          <p:nvPr/>
-        </p:nvSpPr>
-        <p:spPr>
-          <a:xfrm>
-            <a:off x="8158277" y="1870862"/>
-            <a:ext cx="2377440" cy="164592"/>
-          </a:xfrm>
-          <a:prstGeom prst="rect">
-            <a:avLst/>
-          </a:prstGeom>
-          <a:noFill/>
-          <a:ln/>
-        </p:spPr>
-        <p:txBody>
-          <a:bodyPr wrap="square" lIns="0" tIns="0" rIns="0" bIns="0" rtlCol="0" anchor="ctr"/>
-          <a:lstStyle/>
-          <a:p>
-            <a:pPr indent="0" marL="0">
-              <a:buNone/>
-            </a:pPr>
-            <a:r>
-              <a:rPr lang="en-US" sz="900" b="1" spc="150" kern="0" dirty="0">
-                <a:solidFill>
-                  <a:srgbClr val="8CC5A5"/>
-                </a:solidFill>
-                <a:latin typeface="Arial" pitchFamily="34" charset="0"/>
-                <a:ea typeface="Arial" pitchFamily="34" charset="-122"/>
-                <a:cs typeface="Arial" pitchFamily="34" charset="-120"/>
-              </a:rPr>
-              <a:t>REVENUE SHARE</a:t>
-            </a:r>
-            <a:endParaRPr lang="en-US" sz="900" dirty="0"/>
-          </a:p>
-        </p:txBody>
-      </p:sp>
-      <p:sp>
-        <p:nvSpPr>
-          <p:cNvPr id="31" name="Text 23"/>
-          <p:cNvSpPr/>
-          <p:nvPr/>
-        </p:nvSpPr>
-        <p:spPr>
-          <a:xfrm>
-            <a:off x="8158277" y="2108606"/>
-            <a:ext cx="3117190" cy="256032"/>
-          </a:xfrm>
-          <a:prstGeom prst="rect">
-            <a:avLst/>
-          </a:prstGeom>
-          <a:noFill/>
-          <a:ln/>
-        </p:spPr>
-        <p:txBody>
-          <a:bodyPr wrap="square" lIns="0" tIns="0" rIns="0" bIns="0" rtlCol="0" anchor="ctr"/>
-          <a:lstStyle/>
-          <a:p>
-            <a:pPr indent="0" marL="0">
-              <a:buNone/>
-            </a:pPr>
-            <a:r>
-              <a:rPr lang="en-US" sz="1100" dirty="0">
-                <a:solidFill>
-                  <a:srgbClr val="AFC2B8"/>
-                </a:solidFill>
-                <a:latin typeface="Yu Gothic" pitchFamily="34" charset="0"/>
-                <a:ea typeface="Yu Gothic" pitchFamily="34" charset="-122"/>
-                <a:cs typeface="Yu Gothic" pitchFamily="34" charset="-120"/>
-              </a:rPr>
-              <a:t>御社へのお支払い</a:t>
-            </a:r>
-            <a:endParaRPr lang="en-US" sz="1100" dirty="0"/>
-          </a:p>
-        </p:txBody>
-      </p:sp>
-      <p:sp>
-        <p:nvSpPr>
-          <p:cNvPr id="32" name="Text 24"/>
-          <p:cNvSpPr/>
-          <p:nvPr/>
-        </p:nvSpPr>
-        <p:spPr>
-          <a:xfrm>
-            <a:off x="8158277" y="2401214"/>
-            <a:ext cx="3117190" cy="640080"/>
-          </a:xfrm>
-          <a:prstGeom prst="rect">
-            <a:avLst/>
-          </a:prstGeom>
-          <a:noFill/>
-          <a:ln/>
-        </p:spPr>
-        <p:txBody>
-          <a:bodyPr wrap="square" lIns="0" tIns="0" rIns="0" bIns="0" rtlCol="0" anchor="ctr"/>
-          <a:lstStyle/>
-          <a:p>
-            <a:pPr indent="0" marL="0">
-              <a:buNone/>
-            </a:pPr>
-            <a:r>
-              <a:rPr lang="en-US" sz="1300" dirty="0">
-                <a:solidFill>
-                  <a:srgbClr val="FFFFFF"/>
-                </a:solidFill>
-                <a:latin typeface="Yu Gothic" pitchFamily="34" charset="0"/>
-                <a:ea typeface="Yu Gothic" pitchFamily="34" charset="-122"/>
-                <a:cs typeface="Yu Gothic" pitchFamily="34" charset="-120"/>
-              </a:rPr>
-              <a:t>売上の </a:t>
-            </a:r>
-            <a:r>
-              <a:rPr lang="en-US" sz="3400" b="1" dirty="0">
-                <a:solidFill>
-                  <a:srgbClr val="F0C05A"/>
-                </a:solidFill>
-                <a:latin typeface="Arial" pitchFamily="34" charset="0"/>
-                <a:ea typeface="Arial" pitchFamily="34" charset="-122"/>
-                <a:cs typeface="Arial" pitchFamily="34" charset="-120"/>
-              </a:rPr>
-              <a:t>25</a:t>
-            </a:r>
-            <a:r>
-              <a:rPr lang="en-US" sz="1500" b="1" dirty="0">
-                <a:solidFill>
-                  <a:srgbClr val="F0C05A"/>
-                </a:solidFill>
-                <a:latin typeface="Yu Gothic" pitchFamily="34" charset="0"/>
-                <a:ea typeface="Yu Gothic" pitchFamily="34" charset="-122"/>
-                <a:cs typeface="Yu Gothic" pitchFamily="34" charset="-120"/>
-              </a:rPr>
-              <a:t> ％</a:t>
-            </a:r>
-            <a:endParaRPr lang="en-US" sz="1300" dirty="0"/>
-          </a:p>
-        </p:txBody>
-      </p:sp>
-      <p:sp>
-        <p:nvSpPr>
-          <p:cNvPr id="33" name="Text 25"/>
-          <p:cNvSpPr/>
-          <p:nvPr/>
-        </p:nvSpPr>
-        <p:spPr>
-          <a:xfrm>
-            <a:off x="8158277" y="3023006"/>
-            <a:ext cx="3117190" cy="256032"/>
-          </a:xfrm>
-          <a:prstGeom prst="rect">
-            <a:avLst/>
-          </a:prstGeom>
-          <a:noFill/>
-          <a:ln/>
-        </p:spPr>
-        <p:txBody>
-          <a:bodyPr wrap="square" lIns="0" tIns="0" rIns="0" bIns="0" rtlCol="0" anchor="ctr"/>
-          <a:lstStyle/>
-          <a:p>
-            <a:pPr indent="0" marL="0">
-              <a:buNone/>
-            </a:pPr>
-            <a:r>
-              <a:rPr lang="en-US" sz="950" dirty="0">
-                <a:solidFill>
-                  <a:srgbClr val="AFC2B8"/>
-                </a:solidFill>
-                <a:latin typeface="Yu Gothic" pitchFamily="34" charset="0"/>
-                <a:ea typeface="Yu Gothic" pitchFamily="34" charset="-122"/>
-                <a:cs typeface="Yu Gothic" pitchFamily="34" charset="-120"/>
-              </a:rPr>
-              <a:t>毎月お支払いします（税抜）</a:t>
-            </a:r>
-            <a:endParaRPr lang="en-US" sz="950" dirty="0"/>
-          </a:p>
-        </p:txBody>
-      </p:sp>
-      <p:sp>
-        <p:nvSpPr>
-          <p:cNvPr id="34" name="Shape 26"/>
-          <p:cNvSpPr/>
-          <p:nvPr/>
-        </p:nvSpPr>
-        <p:spPr>
-          <a:xfrm>
-            <a:off x="7902245" y="3535070"/>
-            <a:ext cx="3629254" cy="1188720"/>
-          </a:xfrm>
-          <a:prstGeom prst="roundRect">
-            <a:avLst>
-              <a:gd name="adj" fmla="val 4615"/>
+              <a:gd name="adj" fmla="val 8824"/>
             </a:avLst>
           </a:prstGeom>
           <a:solidFill>
@@ -3069,16 +2958,40 @@
           </a:ln>
         </p:spPr>
       </p:sp>
-      <p:sp>
-        <p:nvSpPr>
-          <p:cNvPr id="35" name="Text 27"/>
-          <p:cNvSpPr/>
-          <p:nvPr/>
-        </p:nvSpPr>
-        <p:spPr>
-          <a:xfrm>
-            <a:off x="8158277" y="3699662"/>
-            <a:ext cx="3117190" cy="237744"/>
+      <p:pic>
+        <p:nvPicPr>
+          <p:cNvPr id="30" name="Image 6" descr="/home/user/suzuki-ceo/selfcafe-miraiya-trial-deck/assets/icons/LuKeyRound-green.png">    </p:cNvPr>
+          <p:cNvPicPr>
+            <a:picLocks noChangeAspect="1"/>
+          </p:cNvPicPr>
+          <p:nvPr/>
+        </p:nvPicPr>
+        <p:blipFill>
+          <a:blip r:embed="rId7"/>
+          <a:stretch>
+            <a:fillRect/>
+          </a:stretch>
+        </p:blipFill>
+        <p:spPr>
+          <a:xfrm>
+            <a:off x="916229" y="5363870"/>
+            <a:ext cx="329184" cy="329184"/>
+          </a:xfrm>
+          <a:prstGeom prst="rect">
+            <a:avLst/>
+          </a:prstGeom>
+        </p:spPr>
+      </p:pic>
+      <p:sp>
+        <p:nvSpPr>
+          <p:cNvPr id="31" name="Text 22"/>
+          <p:cNvSpPr/>
+          <p:nvPr/>
+        </p:nvSpPr>
+        <p:spPr>
+          <a:xfrm>
+            <a:off x="1373429" y="5272430"/>
+            <a:ext cx="5888736" cy="237744"/>
           </a:xfrm>
           <a:prstGeom prst="rect">
             <a:avLst/>
@@ -3094,7 +3007,7 @@
               <a:buNone/>
             </a:pPr>
             <a:r>
-              <a:rPr lang="en-US" sz="1050" b="1" dirty="0">
+              <a:rPr lang="en-US" sz="1150" b="1" dirty="0">
                 <a:solidFill>
                   <a:srgbClr val="106838"/>
                 </a:solidFill>
@@ -3102,6 +3015,333 @@
                 <a:ea typeface="Yu Gothic" pitchFamily="34" charset="-122"/>
                 <a:cs typeface="Yu Gothic" pitchFamily="34" charset="-120"/>
               </a:rPr>
+              <a:t>原状回復義務</a:t>
+            </a:r>
+            <a:endParaRPr lang="en-US" sz="1150" dirty="0"/>
+          </a:p>
+        </p:txBody>
+      </p:sp>
+      <p:sp>
+        <p:nvSpPr>
+          <p:cNvPr id="32" name="Text 23"/>
+          <p:cNvSpPr/>
+          <p:nvPr/>
+        </p:nvSpPr>
+        <p:spPr>
+          <a:xfrm>
+            <a:off x="1373429" y="5528462"/>
+            <a:ext cx="5888736" cy="256032"/>
+          </a:xfrm>
+          <a:prstGeom prst="rect">
+            <a:avLst/>
+          </a:prstGeom>
+          <a:noFill/>
+          <a:ln/>
+        </p:spPr>
+        <p:txBody>
+          <a:bodyPr wrap="square" lIns="0" tIns="0" rIns="0" bIns="0" rtlCol="0" anchor="ctr"/>
+          <a:lstStyle/>
+          <a:p>
+            <a:pPr indent="0" marL="0">
+              <a:buNone/>
+            </a:pPr>
+            <a:r>
+              <a:rPr lang="en-US" sz="1050" dirty="0">
+                <a:solidFill>
+                  <a:srgbClr val="0A3D23"/>
+                </a:solidFill>
+                <a:latin typeface="Yu Gothic" pitchFamily="34" charset="0"/>
+                <a:ea typeface="Yu Gothic" pitchFamily="34" charset="-122"/>
+                <a:cs typeface="Yu Gothic" pitchFamily="34" charset="-120"/>
+              </a:rPr>
+              <a:t>なし（当社のマシン・カメラ等のみ撤去します）</a:t>
+            </a:r>
+            <a:endParaRPr lang="en-US" sz="1050" dirty="0"/>
+          </a:p>
+        </p:txBody>
+      </p:sp>
+      <p:sp>
+        <p:nvSpPr>
+          <p:cNvPr id="33" name="Shape 24"/>
+          <p:cNvSpPr/>
+          <p:nvPr/>
+        </p:nvSpPr>
+        <p:spPr>
+          <a:xfrm>
+            <a:off x="7902245" y="1651406"/>
+            <a:ext cx="3629254" cy="1737360"/>
+          </a:xfrm>
+          <a:prstGeom prst="roundRect">
+            <a:avLst>
+              <a:gd name="adj" fmla="val 3158"/>
+            </a:avLst>
+          </a:prstGeom>
+          <a:solidFill>
+            <a:srgbClr val="0C5230"/>
+          </a:solidFill>
+          <a:ln/>
+        </p:spPr>
+      </p:sp>
+      <p:sp>
+        <p:nvSpPr>
+          <p:cNvPr id="34" name="Text 25"/>
+          <p:cNvSpPr/>
+          <p:nvPr/>
+        </p:nvSpPr>
+        <p:spPr>
+          <a:xfrm>
+            <a:off x="8158277" y="1870862"/>
+            <a:ext cx="2377440" cy="164592"/>
+          </a:xfrm>
+          <a:prstGeom prst="rect">
+            <a:avLst/>
+          </a:prstGeom>
+          <a:noFill/>
+          <a:ln/>
+        </p:spPr>
+        <p:txBody>
+          <a:bodyPr wrap="square" lIns="0" tIns="0" rIns="0" bIns="0" rtlCol="0" anchor="ctr"/>
+          <a:lstStyle/>
+          <a:p>
+            <a:pPr indent="0" marL="0">
+              <a:buNone/>
+            </a:pPr>
+            <a:r>
+              <a:rPr lang="en-US" sz="900" b="1" spc="150" kern="0" dirty="0">
+                <a:solidFill>
+                  <a:srgbClr val="8CC5A5"/>
+                </a:solidFill>
+                <a:latin typeface="Arial" pitchFamily="34" charset="0"/>
+                <a:ea typeface="Arial" pitchFamily="34" charset="-122"/>
+                <a:cs typeface="Arial" pitchFamily="34" charset="-120"/>
+              </a:rPr>
+              <a:t>REVENUE SHARE</a:t>
+            </a:r>
+            <a:endParaRPr lang="en-US" sz="900" dirty="0"/>
+          </a:p>
+        </p:txBody>
+      </p:sp>
+      <p:sp>
+        <p:nvSpPr>
+          <p:cNvPr id="35" name="Text 26"/>
+          <p:cNvSpPr/>
+          <p:nvPr/>
+        </p:nvSpPr>
+        <p:spPr>
+          <a:xfrm>
+            <a:off x="8158277" y="2108606"/>
+            <a:ext cx="3117190" cy="256032"/>
+          </a:xfrm>
+          <a:prstGeom prst="rect">
+            <a:avLst/>
+          </a:prstGeom>
+          <a:noFill/>
+          <a:ln/>
+        </p:spPr>
+        <p:txBody>
+          <a:bodyPr wrap="square" lIns="0" tIns="0" rIns="0" bIns="0" rtlCol="0" anchor="ctr"/>
+          <a:lstStyle/>
+          <a:p>
+            <a:pPr indent="0" marL="0">
+              <a:buNone/>
+            </a:pPr>
+            <a:r>
+              <a:rPr lang="en-US" sz="1100" dirty="0">
+                <a:solidFill>
+                  <a:srgbClr val="AFC2B8"/>
+                </a:solidFill>
+                <a:latin typeface="Yu Gothic" pitchFamily="34" charset="0"/>
+                <a:ea typeface="Yu Gothic" pitchFamily="34" charset="-122"/>
+                <a:cs typeface="Yu Gothic" pitchFamily="34" charset="-120"/>
+              </a:rPr>
+              <a:t>御社へのお支払い</a:t>
+            </a:r>
+            <a:endParaRPr lang="en-US" sz="1100" dirty="0"/>
+          </a:p>
+        </p:txBody>
+      </p:sp>
+      <p:sp>
+        <p:nvSpPr>
+          <p:cNvPr id="36" name="Text 27"/>
+          <p:cNvSpPr/>
+          <p:nvPr/>
+        </p:nvSpPr>
+        <p:spPr>
+          <a:xfrm>
+            <a:off x="8158277" y="2364638"/>
+            <a:ext cx="3117190" cy="566928"/>
+          </a:xfrm>
+          <a:prstGeom prst="rect">
+            <a:avLst/>
+          </a:prstGeom>
+          <a:noFill/>
+          <a:ln/>
+        </p:spPr>
+        <p:txBody>
+          <a:bodyPr wrap="square" lIns="0" tIns="0" rIns="0" bIns="0" rtlCol="0" anchor="ctr"/>
+          <a:lstStyle/>
+          <a:p>
+            <a:pPr indent="0" marL="0">
+              <a:buNone/>
+            </a:pPr>
+            <a:r>
+              <a:rPr lang="en-US" sz="1300" dirty="0">
+                <a:solidFill>
+                  <a:srgbClr val="FFFFFF"/>
+                </a:solidFill>
+                <a:latin typeface="Yu Gothic" pitchFamily="34" charset="0"/>
+                <a:ea typeface="Yu Gothic" pitchFamily="34" charset="-122"/>
+                <a:cs typeface="Yu Gothic" pitchFamily="34" charset="-120"/>
+              </a:rPr>
+              <a:t>売上の </a:t>
+            </a:r>
+            <a:r>
+              <a:rPr lang="en-US" sz="3200" b="1" dirty="0">
+                <a:solidFill>
+                  <a:srgbClr val="F0C05A"/>
+                </a:solidFill>
+                <a:latin typeface="Arial" pitchFamily="34" charset="0"/>
+                <a:ea typeface="Arial" pitchFamily="34" charset="-122"/>
+                <a:cs typeface="Arial" pitchFamily="34" charset="-120"/>
+              </a:rPr>
+              <a:t>25</a:t>
+            </a:r>
+            <a:r>
+              <a:rPr lang="en-US" sz="1500" b="1" dirty="0">
+                <a:solidFill>
+                  <a:srgbClr val="F0C05A"/>
+                </a:solidFill>
+                <a:latin typeface="Yu Gothic" pitchFamily="34" charset="0"/>
+                <a:ea typeface="Yu Gothic" pitchFamily="34" charset="-122"/>
+                <a:cs typeface="Yu Gothic" pitchFamily="34" charset="-120"/>
+              </a:rPr>
+              <a:t> ％</a:t>
+            </a:r>
+            <a:endParaRPr lang="en-US" sz="1300" dirty="0"/>
+          </a:p>
+        </p:txBody>
+      </p:sp>
+      <p:sp>
+        <p:nvSpPr>
+          <p:cNvPr id="37" name="Text 28"/>
+          <p:cNvSpPr/>
+          <p:nvPr/>
+        </p:nvSpPr>
+        <p:spPr>
+          <a:xfrm>
+            <a:off x="8158277" y="2913278"/>
+            <a:ext cx="3117190" cy="347472"/>
+          </a:xfrm>
+          <a:prstGeom prst="rect">
+            <a:avLst/>
+          </a:prstGeom>
+          <a:noFill/>
+          <a:ln/>
+        </p:spPr>
+        <p:txBody>
+          <a:bodyPr wrap="square" lIns="0" tIns="0" rIns="0" bIns="0" rtlCol="0" anchor="ctr"/>
+          <a:lstStyle/>
+          <a:p>
+            <a:pPr indent="0" marL="0">
+              <a:buNone/>
+            </a:pPr>
+            <a:r>
+              <a:rPr lang="en-US" sz="1200" dirty="0">
+                <a:solidFill>
+                  <a:srgbClr val="FFFFFF"/>
+                </a:solidFill>
+                <a:latin typeface="Yu Gothic" pitchFamily="34" charset="0"/>
+                <a:ea typeface="Yu Gothic" pitchFamily="34" charset="-122"/>
+                <a:cs typeface="Yu Gothic" pitchFamily="34" charset="-120"/>
+              </a:rPr>
+              <a:t>＋ 月額固定 </a:t>
+            </a:r>
+            <a:r>
+              <a:rPr lang="en-US" sz="1800" b="1" dirty="0">
+                <a:solidFill>
+                  <a:srgbClr val="F0C05A"/>
+                </a:solidFill>
+                <a:latin typeface="Arial" pitchFamily="34" charset="0"/>
+                <a:ea typeface="Arial" pitchFamily="34" charset="-122"/>
+                <a:cs typeface="Arial" pitchFamily="34" charset="-120"/>
+              </a:rPr>
+              <a:t>5</a:t>
+            </a:r>
+            <a:r>
+              <a:rPr lang="en-US" sz="1200" b="1" dirty="0">
+                <a:solidFill>
+                  <a:srgbClr val="F0C05A"/>
+                </a:solidFill>
+                <a:latin typeface="Yu Gothic" pitchFamily="34" charset="0"/>
+                <a:ea typeface="Yu Gothic" pitchFamily="34" charset="-122"/>
+                <a:cs typeface="Yu Gothic" pitchFamily="34" charset="-120"/>
+              </a:rPr>
+              <a:t> 万円</a:t>
+            </a:r>
+            <a:endParaRPr lang="en-US" sz="1200" dirty="0"/>
+          </a:p>
+        </p:txBody>
+      </p:sp>
+      <p:sp>
+        <p:nvSpPr>
+          <p:cNvPr id="38" name="Shape 29"/>
+          <p:cNvSpPr/>
+          <p:nvPr/>
+        </p:nvSpPr>
+        <p:spPr>
+          <a:xfrm>
+            <a:off x="7902245" y="3535070"/>
+            <a:ext cx="3629254" cy="1188720"/>
+          </a:xfrm>
+          <a:prstGeom prst="roundRect">
+            <a:avLst>
+              <a:gd name="adj" fmla="val 4615"/>
+            </a:avLst>
+          </a:prstGeom>
+          <a:solidFill>
+            <a:srgbClr val="F1F8F3"/>
+          </a:solidFill>
+          <a:ln w="9525">
+            <a:solidFill>
+              <a:srgbClr val="D2E7DA"/>
+            </a:solidFill>
+            <a:prstDash val="solid"/>
+          </a:ln>
+        </p:spPr>
+      </p:sp>
+      <p:sp>
+        <p:nvSpPr>
+          <p:cNvPr id="39" name="Text 30"/>
+          <p:cNvSpPr/>
+          <p:nvPr/>
+        </p:nvSpPr>
+        <p:spPr>
+          <a:xfrm>
+            <a:off x="8158277" y="3699662"/>
+            <a:ext cx="3117190" cy="237744"/>
+          </a:xfrm>
+          <a:prstGeom prst="rect">
+            <a:avLst/>
+          </a:prstGeom>
+          <a:noFill/>
+          <a:ln/>
+        </p:spPr>
+        <p:txBody>
+          <a:bodyPr wrap="square" lIns="0" tIns="0" rIns="0" bIns="0" rtlCol="0" anchor="ctr"/>
+          <a:lstStyle/>
+          <a:p>
+            <a:pPr indent="0" marL="0">
+              <a:buNone/>
+            </a:pPr>
+            <a:r>
+              <a:rPr lang="en-US" sz="1050" b="1" dirty="0">
+                <a:solidFill>
+                  <a:srgbClr val="106838"/>
+                </a:solidFill>
+                <a:latin typeface="Yu Gothic" pitchFamily="34" charset="0"/>
+                <a:ea typeface="Yu Gothic" pitchFamily="34" charset="-122"/>
+                <a:cs typeface="Yu Gothic" pitchFamily="34" charset="-120"/>
+              </a:rPr>
               <a:t>御社のご負担</a:t>
             </a:r>
             <a:endParaRPr lang="en-US" sz="1050" dirty="0"/>
@@ -3110,7 +3350,7 @@
       </p:sp>
       <p:sp>
         <p:nvSpPr>
-          <p:cNvPr id="36" name="Text 28"/>
+          <p:cNvPr id="40" name="Text 31"/>
           <p:cNvSpPr/>
           <p:nvPr/>
         </p:nvSpPr>
@@ -3172,7 +3412,7 @@
       </p:sp>
       <p:sp>
         <p:nvSpPr>
-          <p:cNvPr id="37" name="Shape 29"/>
+          <p:cNvPr id="41" name="Shape 32"/>
           <p:cNvSpPr/>
           <p:nvPr/>
         </p:nvSpPr>
@@ -3199,14 +3439,14 @@
       </p:sp>
       <p:pic>
         <p:nvPicPr>
-          <p:cNvPr id="38" name="Image 6" descr="/home/user/suzuki-ceo/selfcafe-miraiya-trial-deck/assets/icons/LuShieldCheck-green.png">    </p:cNvPr>
+          <p:cNvPr id="42" name="Image 7" descr="/home/user/suzuki-ceo/selfcafe-miraiya-trial-deck/assets/icons/LuShieldCheck-green.png">    </p:cNvPr>
           <p:cNvPicPr>
             <a:picLocks noChangeAspect="1"/>
           </p:cNvPicPr>
           <p:nvPr/>
         </p:nvPicPr>
         <p:blipFill>
-          <a:blip r:embed="rId7"/>
+          <a:blip r:embed="rId8"/>
           <a:stretch>
             <a:fillRect/>
           </a:stretch>
@@ -3223,7 +3463,7 @@
       </p:pic>
       <p:sp>
         <p:nvSpPr>
-          <p:cNvPr id="39" name="Text 30"/>
+          <p:cNvPr id="43" name="Text 33"/>
           <p:cNvSpPr/>
           <p:nvPr/>
         </p:nvSpPr>
@@ -3262,7 +3502,7 @@
       </p:sp>
       <p:sp>
         <p:nvSpPr>
-          <p:cNvPr id="40" name="Text 31"/>
+          <p:cNvPr id="44" name="Text 34"/>
           <p:cNvSpPr/>
           <p:nvPr/>
         </p:nvSpPr>
@@ -3304,7 +3544,7 @@
       </p:sp>
       <p:sp>
         <p:nvSpPr>
-          <p:cNvPr id="41" name="Text 32"/>
+          <p:cNvPr id="45" name="Text 35"/>
           <p:cNvSpPr/>
           <p:nvPr/>
         </p:nvSpPr>
@@ -3335,7 +3575,7 @@
                 <a:ea typeface="Yu Gothic" pitchFamily="34" charset="-122"/>
                 <a:cs typeface="Yu Gothic" pitchFamily="34" charset="-120"/>
               </a:rPr>
-              <a:t>※ 金額はすべて税抜。トライアルの期間・対象店舗はご相談のうえ決定させていただきます。</a:t>
+              <a:t>※ 金額はすべて税抜。対象店舗はご相談のうえ決定させていただきます。契約期間の考え方は次ページに記載しています。</a:t>
             </a:r>
             <a:endParaRPr lang="en-US" sz="850" dirty="0"/>
           </a:p>
@@ -3437,7 +3677,7 @@
                 <a:ea typeface="Yu Gothic" pitchFamily="34" charset="-122"/>
                 <a:cs typeface="Yu Gothic" pitchFamily="34" charset="-120"/>
               </a:rPr>
-              <a:t>   費用と所有の区分</a:t>
+              <a:t>   契約期間の考え方</a:t>
             </a:r>
             <a:endParaRPr lang="en-US" sz="1050" dirty="0"/>
           </a:p>
@@ -3476,7 +3716,7 @@
                 <a:ea typeface="Yu Gothic" pitchFamily="34" charset="-122"/>
                 <a:cs typeface="Yu Gothic" pitchFamily="34" charset="-120"/>
               </a:rPr>
-              <a:t>どちらが何を用意し、終了後どうなるか。</a:t>
+              <a:t>トライアル1年、その先は2年からでも同条件で。</a:t>
             </a:r>
             <a:endParaRPr lang="en-US" sz="2900" dirty="0"/>
           </a:p>
@@ -3515,7 +3755,7 @@
                 <a:ea typeface="Yu Gothic" pitchFamily="34" charset="-122"/>
                 <a:cs typeface="Yu Gothic" pitchFamily="34" charset="-120"/>
               </a:rPr>
-              <a:t>トライアル期間中の費用負担と、終了後にそれがどう扱われるかを整理しました。</a:t>
+              <a:t>内装工事費を当社が負担するため、基本契約は3年以上とさせていただいています。</a:t>
             </a:r>
             <a:endParaRPr lang="en-US" sz="1250" dirty="0"/>
           </a:p>
@@ -3578,7 +3818,7 @@
                 <a:ea typeface="Yu Gothic" pitchFamily="34" charset="-122"/>
                 <a:cs typeface="Yu Gothic" pitchFamily="34" charset="-120"/>
               </a:rPr>
-              <a:t>セルフカフェ × 未来屋書店 トライアル導入 特別条件</a:t>
+              <a:t>セルフカフェ × 未来屋書店 トライアル導入のご提案</a:t>
             </a:r>
             <a:endParaRPr lang="en-US" sz="900" dirty="0"/>
           </a:p>
@@ -3623,9 +3863,1044 @@
           </a:p>
         </p:txBody>
       </p:sp>
+      <p:sp>
+        <p:nvSpPr>
+          <p:cNvPr id="9" name="Shape 6"/>
+          <p:cNvSpPr/>
+          <p:nvPr/>
+        </p:nvSpPr>
+        <p:spPr>
+          <a:xfrm>
+            <a:off x="660197" y="1651406"/>
+            <a:ext cx="3440887" cy="2926080"/>
+          </a:xfrm>
+          <a:prstGeom prst="roundRect">
+            <a:avLst>
+              <a:gd name="adj" fmla="val 1875"/>
+            </a:avLst>
+          </a:prstGeom>
+          <a:solidFill>
+            <a:srgbClr val="FFFFFF"/>
+          </a:solidFill>
+          <a:ln w="9525">
+            <a:solidFill>
+              <a:srgbClr val="EFEAE0"/>
+            </a:solidFill>
+            <a:prstDash val="solid"/>
+          </a:ln>
+        </p:spPr>
+      </p:sp>
+      <p:pic>
+        <p:nvPicPr>
+          <p:cNvPr id="10" name="Image 1" descr="/home/user/suzuki-ceo/selfcafe-miraiya-trial-deck/assets/icons/LuTimer-green.png">    </p:cNvPr>
+          <p:cNvPicPr>
+            <a:picLocks noChangeAspect="1"/>
+          </p:cNvPicPr>
+          <p:nvPr/>
+        </p:nvPicPr>
+        <p:blipFill>
+          <a:blip r:embed="rId2"/>
+          <a:stretch>
+            <a:fillRect/>
+          </a:stretch>
+        </p:blipFill>
+        <p:spPr>
+          <a:xfrm>
+            <a:off x="934517" y="1925726"/>
+            <a:ext cx="365760" cy="365760"/>
+          </a:xfrm>
+          <a:prstGeom prst="rect">
+            <a:avLst/>
+          </a:prstGeom>
+        </p:spPr>
+      </p:pic>
+      <p:sp>
+        <p:nvSpPr>
+          <p:cNvPr id="11" name="Text 7"/>
+          <p:cNvSpPr/>
+          <p:nvPr/>
+        </p:nvSpPr>
+        <p:spPr>
+          <a:xfrm>
+            <a:off x="934517" y="2437790"/>
+            <a:ext cx="2892247" cy="256032"/>
+          </a:xfrm>
+          <a:prstGeom prst="rect">
+            <a:avLst/>
+          </a:prstGeom>
+          <a:noFill/>
+          <a:ln/>
+        </p:spPr>
+        <p:txBody>
+          <a:bodyPr wrap="square" lIns="0" tIns="0" rIns="0" bIns="0" rtlCol="0" anchor="ctr"/>
+          <a:lstStyle/>
+          <a:p>
+            <a:pPr indent="0" marL="0">
+              <a:buNone/>
+            </a:pPr>
+            <a:r>
+              <a:rPr lang="en-US" sz="1100" b="1" dirty="0">
+                <a:solidFill>
+                  <a:srgbClr val="7E8882"/>
+                </a:solidFill>
+                <a:latin typeface="Yu Gothic" pitchFamily="34" charset="0"/>
+                <a:ea typeface="Yu Gothic" pitchFamily="34" charset="-122"/>
+                <a:cs typeface="Yu Gothic" pitchFamily="34" charset="-120"/>
+              </a:rPr>
+              <a:t>トライアル期間</a:t>
+            </a:r>
+            <a:endParaRPr lang="en-US" sz="1100" dirty="0"/>
+          </a:p>
+        </p:txBody>
+      </p:sp>
+      <p:sp>
+        <p:nvSpPr>
+          <p:cNvPr id="12" name="Text 8"/>
+          <p:cNvSpPr/>
+          <p:nvPr/>
+        </p:nvSpPr>
+        <p:spPr>
+          <a:xfrm>
+            <a:off x="934517" y="2712110"/>
+            <a:ext cx="2892247" cy="676656"/>
+          </a:xfrm>
+          <a:prstGeom prst="rect">
+            <a:avLst/>
+          </a:prstGeom>
+          <a:noFill/>
+          <a:ln/>
+        </p:spPr>
+        <p:txBody>
+          <a:bodyPr wrap="square" lIns="0" tIns="0" rIns="0" bIns="0" rtlCol="0" anchor="ctr"/>
+          <a:lstStyle/>
+          <a:p>
+            <a:pPr indent="0" marL="0">
+              <a:buNone/>
+            </a:pPr>
+            <a:r>
+              <a:rPr lang="en-US" sz="4000" b="1" dirty="0">
+                <a:solidFill>
+                  <a:srgbClr val="106838"/>
+                </a:solidFill>
+                <a:latin typeface="Arial" pitchFamily="34" charset="0"/>
+                <a:ea typeface="Arial" pitchFamily="34" charset="-122"/>
+                <a:cs typeface="Arial" pitchFamily="34" charset="-120"/>
+              </a:rPr>
+              <a:t>1</a:t>
+            </a:r>
+            <a:r>
+              <a:rPr lang="en-US" sz="1600" b="1" dirty="0">
+                <a:solidFill>
+                  <a:srgbClr val="106838"/>
+                </a:solidFill>
+                <a:latin typeface="Yu Gothic" pitchFamily="34" charset="0"/>
+                <a:ea typeface="Yu Gothic" pitchFamily="34" charset="-122"/>
+                <a:cs typeface="Yu Gothic" pitchFamily="34" charset="-120"/>
+              </a:rPr>
+              <a:t> 年</a:t>
+            </a:r>
+            <a:endParaRPr lang="en-US" sz="4000" dirty="0"/>
+          </a:p>
+        </p:txBody>
+      </p:sp>
+      <p:sp>
+        <p:nvSpPr>
+          <p:cNvPr id="13" name="Shape 9"/>
+          <p:cNvSpPr/>
+          <p:nvPr/>
+        </p:nvSpPr>
+        <p:spPr>
+          <a:xfrm>
+            <a:off x="934517" y="3480206"/>
+            <a:ext cx="2892247" cy="10058"/>
+          </a:xfrm>
+          <a:prstGeom prst="rect">
+            <a:avLst/>
+          </a:prstGeom>
+          <a:solidFill>
+            <a:srgbClr val="EFEAE0"/>
+          </a:solidFill>
+          <a:ln/>
+        </p:spPr>
+      </p:sp>
+      <p:sp>
+        <p:nvSpPr>
+          <p:cNvPr id="14" name="Text 10"/>
+          <p:cNvSpPr/>
+          <p:nvPr/>
+        </p:nvSpPr>
+        <p:spPr>
+          <a:xfrm>
+            <a:off x="934517" y="3626510"/>
+            <a:ext cx="2892247" cy="859536"/>
+          </a:xfrm>
+          <a:prstGeom prst="rect">
+            <a:avLst/>
+          </a:prstGeom>
+          <a:noFill/>
+          <a:ln/>
+        </p:spPr>
+        <p:txBody>
+          <a:bodyPr wrap="square" lIns="0" tIns="0" rIns="0" bIns="0" rtlCol="0" anchor="t"/>
+          <a:lstStyle/>
+          <a:p>
+            <a:pPr indent="0" marL="0">
+              <a:lnSpc>
+                <a:spcPct val="140000"/>
+              </a:lnSpc>
+              <a:buNone/>
+            </a:pPr>
+            <a:r>
+              <a:rPr lang="en-US" sz="1000" dirty="0">
+                <a:solidFill>
+                  <a:srgbClr val="4B5550"/>
+                </a:solidFill>
+                <a:latin typeface="Yu Gothic" pitchFamily="34" charset="0"/>
+                <a:ea typeface="Yu Gothic" pitchFamily="34" charset="-122"/>
+                <a:cs typeface="Yu Gothic" pitchFamily="34" charset="-120"/>
+              </a:rPr>
+              <a:t>実際の販売杯数と、清掃・補充の運営負荷をご確認いただく期間として1年を想定しています。</a:t>
+            </a:r>
+            <a:endParaRPr lang="en-US" sz="1000" dirty="0"/>
+          </a:p>
+        </p:txBody>
+      </p:sp>
+      <p:sp>
+        <p:nvSpPr>
+          <p:cNvPr id="15" name="Shape 11"/>
+          <p:cNvSpPr/>
+          <p:nvPr/>
+        </p:nvSpPr>
+        <p:spPr>
+          <a:xfrm>
+            <a:off x="4375404" y="1651406"/>
+            <a:ext cx="3440887" cy="2926080"/>
+          </a:xfrm>
+          <a:prstGeom prst="roundRect">
+            <a:avLst>
+              <a:gd name="adj" fmla="val 1875"/>
+            </a:avLst>
+          </a:prstGeom>
+          <a:solidFill>
+            <a:srgbClr val="FFFFFF"/>
+          </a:solidFill>
+          <a:ln w="9525">
+            <a:solidFill>
+              <a:srgbClr val="EFEAE0"/>
+            </a:solidFill>
+            <a:prstDash val="solid"/>
+          </a:ln>
+        </p:spPr>
+      </p:sp>
+      <p:pic>
+        <p:nvPicPr>
+          <p:cNvPr id="16" name="Image 2" descr="/home/user/suzuki-ceo/selfcafe-miraiya-trial-deck/assets/icons/LuFileCheck-green.png">    </p:cNvPr>
+          <p:cNvPicPr>
+            <a:picLocks noChangeAspect="1"/>
+          </p:cNvPicPr>
+          <p:nvPr/>
+        </p:nvPicPr>
+        <p:blipFill>
+          <a:blip r:embed="rId3"/>
+          <a:stretch>
+            <a:fillRect/>
+          </a:stretch>
+        </p:blipFill>
+        <p:spPr>
+          <a:xfrm>
+            <a:off x="4649724" y="1925726"/>
+            <a:ext cx="365760" cy="365760"/>
+          </a:xfrm>
+          <a:prstGeom prst="rect">
+            <a:avLst/>
+          </a:prstGeom>
+        </p:spPr>
+      </p:pic>
+      <p:sp>
+        <p:nvSpPr>
+          <p:cNvPr id="17" name="Text 12"/>
+          <p:cNvSpPr/>
+          <p:nvPr/>
+        </p:nvSpPr>
+        <p:spPr>
+          <a:xfrm>
+            <a:off x="4649724" y="2437790"/>
+            <a:ext cx="2892247" cy="256032"/>
+          </a:xfrm>
+          <a:prstGeom prst="rect">
+            <a:avLst/>
+          </a:prstGeom>
+          <a:noFill/>
+          <a:ln/>
+        </p:spPr>
+        <p:txBody>
+          <a:bodyPr wrap="square" lIns="0" tIns="0" rIns="0" bIns="0" rtlCol="0" anchor="ctr"/>
+          <a:lstStyle/>
+          <a:p>
+            <a:pPr indent="0" marL="0">
+              <a:buNone/>
+            </a:pPr>
+            <a:r>
+              <a:rPr lang="en-US" sz="1100" b="1" dirty="0">
+                <a:solidFill>
+                  <a:srgbClr val="7E8882"/>
+                </a:solidFill>
+                <a:latin typeface="Yu Gothic" pitchFamily="34" charset="0"/>
+                <a:ea typeface="Yu Gothic" pitchFamily="34" charset="-122"/>
+                <a:cs typeface="Yu Gothic" pitchFamily="34" charset="-120"/>
+              </a:rPr>
+              <a:t>基本契約</a:t>
+            </a:r>
+            <a:endParaRPr lang="en-US" sz="1100" dirty="0"/>
+          </a:p>
+        </p:txBody>
+      </p:sp>
+      <p:sp>
+        <p:nvSpPr>
+          <p:cNvPr id="18" name="Text 13"/>
+          <p:cNvSpPr/>
+          <p:nvPr/>
+        </p:nvSpPr>
+        <p:spPr>
+          <a:xfrm>
+            <a:off x="4649724" y="2712110"/>
+            <a:ext cx="2892247" cy="676656"/>
+          </a:xfrm>
+          <a:prstGeom prst="rect">
+            <a:avLst/>
+          </a:prstGeom>
+          <a:noFill/>
+          <a:ln/>
+        </p:spPr>
+        <p:txBody>
+          <a:bodyPr wrap="square" lIns="0" tIns="0" rIns="0" bIns="0" rtlCol="0" anchor="ctr"/>
+          <a:lstStyle/>
+          <a:p>
+            <a:pPr indent="0" marL="0">
+              <a:buNone/>
+            </a:pPr>
+            <a:r>
+              <a:rPr lang="en-US" sz="4000" b="1" dirty="0">
+                <a:solidFill>
+                  <a:srgbClr val="106838"/>
+                </a:solidFill>
+                <a:latin typeface="Arial" pitchFamily="34" charset="0"/>
+                <a:ea typeface="Arial" pitchFamily="34" charset="-122"/>
+                <a:cs typeface="Arial" pitchFamily="34" charset="-120"/>
+              </a:rPr>
+              <a:t>3</a:t>
+            </a:r>
+            <a:r>
+              <a:rPr lang="en-US" sz="1600" b="1" dirty="0">
+                <a:solidFill>
+                  <a:srgbClr val="106838"/>
+                </a:solidFill>
+                <a:latin typeface="Yu Gothic" pitchFamily="34" charset="0"/>
+                <a:ea typeface="Yu Gothic" pitchFamily="34" charset="-122"/>
+                <a:cs typeface="Yu Gothic" pitchFamily="34" charset="-120"/>
+              </a:rPr>
+              <a:t> 年〜</a:t>
+            </a:r>
+            <a:endParaRPr lang="en-US" sz="4000" dirty="0"/>
+          </a:p>
+        </p:txBody>
+      </p:sp>
+      <p:sp>
+        <p:nvSpPr>
+          <p:cNvPr id="19" name="Shape 14"/>
+          <p:cNvSpPr/>
+          <p:nvPr/>
+        </p:nvSpPr>
+        <p:spPr>
+          <a:xfrm>
+            <a:off x="4649724" y="3480206"/>
+            <a:ext cx="2892247" cy="10058"/>
+          </a:xfrm>
+          <a:prstGeom prst="rect">
+            <a:avLst/>
+          </a:prstGeom>
+          <a:solidFill>
+            <a:srgbClr val="EFEAE0"/>
+          </a:solidFill>
+          <a:ln/>
+        </p:spPr>
+      </p:sp>
+      <p:sp>
+        <p:nvSpPr>
+          <p:cNvPr id="20" name="Text 15"/>
+          <p:cNvSpPr/>
+          <p:nvPr/>
+        </p:nvSpPr>
+        <p:spPr>
+          <a:xfrm>
+            <a:off x="4649724" y="3626510"/>
+            <a:ext cx="2892247" cy="859536"/>
+          </a:xfrm>
+          <a:prstGeom prst="rect">
+            <a:avLst/>
+          </a:prstGeom>
+          <a:noFill/>
+          <a:ln/>
+        </p:spPr>
+        <p:txBody>
+          <a:bodyPr wrap="square" lIns="0" tIns="0" rIns="0" bIns="0" rtlCol="0" anchor="t"/>
+          <a:lstStyle/>
+          <a:p>
+            <a:pPr indent="0" marL="0">
+              <a:lnSpc>
+                <a:spcPct val="140000"/>
+              </a:lnSpc>
+              <a:buNone/>
+            </a:pPr>
+            <a:r>
+              <a:rPr lang="en-US" sz="1000" dirty="0">
+                <a:solidFill>
+                  <a:srgbClr val="4B5550"/>
+                </a:solidFill>
+                <a:latin typeface="Yu Gothic" pitchFamily="34" charset="0"/>
+                <a:ea typeface="Yu Gothic" pitchFamily="34" charset="-122"/>
+                <a:cs typeface="Yu Gothic" pitchFamily="34" charset="-120"/>
+              </a:rPr>
+              <a:t>内装工事費は当社が負担するため、回収に一定の期間が必要です。通常は3年以上でお願いしています。</a:t>
+            </a:r>
+            <a:endParaRPr lang="en-US" sz="1000" dirty="0"/>
+          </a:p>
+        </p:txBody>
+      </p:sp>
+      <p:sp>
+        <p:nvSpPr>
+          <p:cNvPr id="21" name="Shape 16"/>
+          <p:cNvSpPr/>
+          <p:nvPr/>
+        </p:nvSpPr>
+        <p:spPr>
+          <a:xfrm>
+            <a:off x="8090611" y="1651406"/>
+            <a:ext cx="3440887" cy="2926080"/>
+          </a:xfrm>
+          <a:prstGeom prst="roundRect">
+            <a:avLst>
+              <a:gd name="adj" fmla="val 1875"/>
+            </a:avLst>
+          </a:prstGeom>
+          <a:solidFill>
+            <a:srgbClr val="FBF4E4"/>
+          </a:solidFill>
+          <a:ln w="9525">
+            <a:solidFill>
+              <a:srgbClr val="E7D3A8"/>
+            </a:solidFill>
+            <a:prstDash val="solid"/>
+          </a:ln>
+        </p:spPr>
+      </p:sp>
+      <p:pic>
+        <p:nvPicPr>
+          <p:cNvPr id="22" name="Image 3" descr="/home/user/suzuki-ceo/selfcafe-miraiya-trial-deck/assets/icons/LuBadgeCheck-gold.png">    </p:cNvPr>
+          <p:cNvPicPr>
+            <a:picLocks noChangeAspect="1"/>
+          </p:cNvPicPr>
+          <p:nvPr/>
+        </p:nvPicPr>
+        <p:blipFill>
+          <a:blip r:embed="rId4"/>
+          <a:stretch>
+            <a:fillRect/>
+          </a:stretch>
+        </p:blipFill>
+        <p:spPr>
+          <a:xfrm>
+            <a:off x="8364931" y="1925726"/>
+            <a:ext cx="365760" cy="365760"/>
+          </a:xfrm>
+          <a:prstGeom prst="rect">
+            <a:avLst/>
+          </a:prstGeom>
+        </p:spPr>
+      </p:pic>
+      <p:sp>
+        <p:nvSpPr>
+          <p:cNvPr id="23" name="Text 17"/>
+          <p:cNvSpPr/>
+          <p:nvPr/>
+        </p:nvSpPr>
+        <p:spPr>
+          <a:xfrm>
+            <a:off x="8364931" y="2437790"/>
+            <a:ext cx="2892247" cy="256032"/>
+          </a:xfrm>
+          <a:prstGeom prst="rect">
+            <a:avLst/>
+          </a:prstGeom>
+          <a:noFill/>
+          <a:ln/>
+        </p:spPr>
+        <p:txBody>
+          <a:bodyPr wrap="square" lIns="0" tIns="0" rIns="0" bIns="0" rtlCol="0" anchor="ctr"/>
+          <a:lstStyle/>
+          <a:p>
+            <a:pPr indent="0" marL="0">
+              <a:buNone/>
+            </a:pPr>
+            <a:r>
+              <a:rPr lang="en-US" sz="1100" b="1" dirty="0">
+                <a:solidFill>
+                  <a:srgbClr val="A8761F"/>
+                </a:solidFill>
+                <a:latin typeface="Yu Gothic" pitchFamily="34" charset="0"/>
+                <a:ea typeface="Yu Gothic" pitchFamily="34" charset="-122"/>
+                <a:cs typeface="Yu Gothic" pitchFamily="34" charset="-120"/>
+              </a:rPr>
+              <a:t>今回の特約</a:t>
+            </a:r>
+            <a:endParaRPr lang="en-US" sz="1100" dirty="0"/>
+          </a:p>
+        </p:txBody>
+      </p:sp>
+      <p:sp>
+        <p:nvSpPr>
+          <p:cNvPr id="24" name="Text 18"/>
+          <p:cNvSpPr/>
+          <p:nvPr/>
+        </p:nvSpPr>
+        <p:spPr>
+          <a:xfrm>
+            <a:off x="8364931" y="2712110"/>
+            <a:ext cx="2892247" cy="676656"/>
+          </a:xfrm>
+          <a:prstGeom prst="rect">
+            <a:avLst/>
+          </a:prstGeom>
+          <a:noFill/>
+          <a:ln/>
+        </p:spPr>
+        <p:txBody>
+          <a:bodyPr wrap="square" lIns="0" tIns="0" rIns="0" bIns="0" rtlCol="0" anchor="ctr"/>
+          <a:lstStyle/>
+          <a:p>
+            <a:pPr indent="0" marL="0">
+              <a:buNone/>
+            </a:pPr>
+            <a:r>
+              <a:rPr lang="en-US" sz="4000" b="1" dirty="0">
+                <a:solidFill>
+                  <a:srgbClr val="A8761F"/>
+                </a:solidFill>
+                <a:latin typeface="Arial" pitchFamily="34" charset="0"/>
+                <a:ea typeface="Arial" pitchFamily="34" charset="-122"/>
+                <a:cs typeface="Arial" pitchFamily="34" charset="-120"/>
+              </a:rPr>
+              <a:t>2</a:t>
+            </a:r>
+            <a:r>
+              <a:rPr lang="en-US" sz="1600" b="1" dirty="0">
+                <a:solidFill>
+                  <a:srgbClr val="A8761F"/>
+                </a:solidFill>
+                <a:latin typeface="Yu Gothic" pitchFamily="34" charset="0"/>
+                <a:ea typeface="Yu Gothic" pitchFamily="34" charset="-122"/>
+                <a:cs typeface="Yu Gothic" pitchFamily="34" charset="-120"/>
+              </a:rPr>
+              <a:t> 年〜</a:t>
+            </a:r>
+            <a:endParaRPr lang="en-US" sz="4000" dirty="0"/>
+          </a:p>
+        </p:txBody>
+      </p:sp>
+      <p:sp>
+        <p:nvSpPr>
+          <p:cNvPr id="25" name="Shape 19"/>
+          <p:cNvSpPr/>
+          <p:nvPr/>
+        </p:nvSpPr>
+        <p:spPr>
+          <a:xfrm>
+            <a:off x="8364931" y="3480206"/>
+            <a:ext cx="2892247" cy="10058"/>
+          </a:xfrm>
+          <a:prstGeom prst="rect">
+            <a:avLst/>
+          </a:prstGeom>
+          <a:solidFill>
+            <a:srgbClr val="E7D3A8"/>
+          </a:solidFill>
+          <a:ln/>
+        </p:spPr>
+      </p:sp>
+      <p:sp>
+        <p:nvSpPr>
+          <p:cNvPr id="26" name="Text 20"/>
+          <p:cNvSpPr/>
+          <p:nvPr/>
+        </p:nvSpPr>
+        <p:spPr>
+          <a:xfrm>
+            <a:off x="8364931" y="3626510"/>
+            <a:ext cx="2892247" cy="859536"/>
+          </a:xfrm>
+          <a:prstGeom prst="rect">
+            <a:avLst/>
+          </a:prstGeom>
+          <a:noFill/>
+          <a:ln/>
+        </p:spPr>
+        <p:txBody>
+          <a:bodyPr wrap="square" lIns="0" tIns="0" rIns="0" bIns="0" rtlCol="0" anchor="t"/>
+          <a:lstStyle/>
+          <a:p>
+            <a:pPr indent="0" marL="0">
+              <a:lnSpc>
+                <a:spcPct val="140000"/>
+              </a:lnSpc>
+              <a:buNone/>
+            </a:pPr>
+            <a:r>
+              <a:rPr lang="en-US" sz="1000" dirty="0">
+                <a:solidFill>
+                  <a:srgbClr val="4B5550"/>
+                </a:solidFill>
+                <a:latin typeface="Yu Gothic" pitchFamily="34" charset="0"/>
+                <a:ea typeface="Yu Gothic" pitchFamily="34" charset="-122"/>
+                <a:cs typeface="Yu Gothic" pitchFamily="34" charset="-120"/>
+              </a:rPr>
+              <a:t>今回は特約として、最低2年からでも3年以上と同じ条件でお受けします。</a:t>
+            </a:r>
+            <a:endParaRPr lang="en-US" sz="1000" dirty="0"/>
+          </a:p>
+        </p:txBody>
+      </p:sp>
+      <p:sp>
+        <p:nvSpPr>
+          <p:cNvPr id="27" name="Shape 21"/>
+          <p:cNvSpPr/>
+          <p:nvPr/>
+        </p:nvSpPr>
+        <p:spPr>
+          <a:xfrm>
+            <a:off x="660197" y="4718304"/>
+            <a:ext cx="10871302" cy="1005840"/>
+          </a:xfrm>
+          <a:prstGeom prst="roundRect">
+            <a:avLst>
+              <a:gd name="adj" fmla="val 5455"/>
+            </a:avLst>
+          </a:prstGeom>
+          <a:solidFill>
+            <a:srgbClr val="0C5230"/>
+          </a:solidFill>
+          <a:ln/>
+        </p:spPr>
+      </p:sp>
+      <p:pic>
+        <p:nvPicPr>
+          <p:cNvPr id="28" name="Image 4" descr="/home/user/suzuki-ceo/selfcafe-miraiya-trial-deck/assets/icons/LuHandCoins-pale.png">    </p:cNvPr>
+          <p:cNvPicPr>
+            <a:picLocks noChangeAspect="1"/>
+          </p:cNvPicPr>
+          <p:nvPr/>
+        </p:nvPicPr>
+        <p:blipFill>
+          <a:blip r:embed="rId5"/>
+          <a:stretch>
+            <a:fillRect/>
+          </a:stretch>
+        </p:blipFill>
+        <p:spPr>
+          <a:xfrm>
+            <a:off x="1007669" y="4992624"/>
+            <a:ext cx="402336" cy="402336"/>
+          </a:xfrm>
+          <a:prstGeom prst="rect">
+            <a:avLst/>
+          </a:prstGeom>
+        </p:spPr>
+      </p:pic>
+      <p:sp>
+        <p:nvSpPr>
+          <p:cNvPr id="29" name="Text 22"/>
+          <p:cNvSpPr/>
+          <p:nvPr/>
+        </p:nvSpPr>
+        <p:spPr>
+          <a:xfrm>
+            <a:off x="1574597" y="4718304"/>
+            <a:ext cx="9591142" cy="1005840"/>
+          </a:xfrm>
+          <a:prstGeom prst="rect">
+            <a:avLst/>
+          </a:prstGeom>
+          <a:noFill/>
+          <a:ln/>
+        </p:spPr>
+        <p:txBody>
+          <a:bodyPr wrap="square" lIns="0" tIns="0" rIns="0" bIns="0" rtlCol="0" anchor="ctr"/>
+          <a:lstStyle/>
+          <a:p>
+            <a:pPr indent="0" marL="0">
+              <a:lnSpc>
+                <a:spcPct val="125000"/>
+              </a:lnSpc>
+              <a:buNone/>
+            </a:pPr>
+            <a:r>
+              <a:rPr lang="en-US" sz="1400" b="1" dirty="0">
+                <a:solidFill>
+                  <a:srgbClr val="FFFFFF"/>
+                </a:solidFill>
+                <a:latin typeface="Yu Gothic" pitchFamily="34" charset="0"/>
+                <a:ea typeface="Yu Gothic" pitchFamily="34" charset="-122"/>
+                <a:cs typeface="Yu Gothic" pitchFamily="34" charset="-120"/>
+              </a:rPr>
+              <a:t>通常は3年以上が条件ですが、今回は2年からでも同じ条件でお受けします。</a:t>
+            </a:r>
+            <a:endParaRPr lang="en-US" sz="1400" dirty="0"/>
+          </a:p>
+          <a:p>
+            <a:pPr indent="0" marL="0">
+              <a:lnSpc>
+                <a:spcPct val="125000"/>
+              </a:lnSpc>
+              <a:buNone/>
+            </a:pPr>
+            <a:r>
+              <a:rPr lang="en-US" sz="1100" dirty="0">
+                <a:solidFill>
+                  <a:srgbClr val="AFC2B8"/>
+                </a:solidFill>
+                <a:latin typeface="Yu Gothic" pitchFamily="34" charset="0"/>
+                <a:ea typeface="Yu Gothic" pitchFamily="34" charset="-122"/>
+                <a:cs typeface="Yu Gothic" pitchFamily="34" charset="-120"/>
+              </a:rPr>
+              <a:t>工事費は当社が負担し、原状回復もいただかないため、御社側の期間リスクは小さく抑えられます。</a:t>
+            </a:r>
+            <a:endParaRPr lang="en-US" sz="1400" dirty="0"/>
+          </a:p>
+        </p:txBody>
+      </p:sp>
+      <p:sp>
+        <p:nvSpPr>
+          <p:cNvPr id="30" name="Text 23"/>
+          <p:cNvSpPr/>
+          <p:nvPr/>
+        </p:nvSpPr>
+        <p:spPr>
+          <a:xfrm>
+            <a:off x="660197" y="5888736"/>
+            <a:ext cx="10871302" cy="182880"/>
+          </a:xfrm>
+          <a:prstGeom prst="rect">
+            <a:avLst/>
+          </a:prstGeom>
+          <a:noFill/>
+          <a:ln/>
+        </p:spPr>
+        <p:txBody>
+          <a:bodyPr wrap="square" lIns="0" tIns="0" rIns="0" bIns="0" rtlCol="0" anchor="ctr"/>
+          <a:lstStyle/>
+          <a:p>
+            <a:pPr indent="0" marL="0">
+              <a:buNone/>
+            </a:pPr>
+            <a:r>
+              <a:rPr lang="en-US" sz="850" dirty="0">
+                <a:solidFill>
+                  <a:srgbClr val="A8B0AA"/>
+                </a:solidFill>
+                <a:latin typeface="Yu Gothic" pitchFamily="34" charset="0"/>
+                <a:ea typeface="Yu Gothic" pitchFamily="34" charset="-122"/>
+                <a:cs typeface="Yu Gothic" pitchFamily="34" charset="-120"/>
+              </a:rPr>
+              <a:t>※ トライアル期間（1年）と基本契約期間の通算の扱いは、契約書にて明記させていただきます。</a:t>
+            </a:r>
+            <a:endParaRPr lang="en-US" sz="850" dirty="0"/>
+          </a:p>
+        </p:txBody>
+      </p:sp>
+    </p:spTree>
+  </p:cSld>
+  <p:clrMapOvr>
+    <a:masterClrMapping/>
+  </p:clrMapOvr>
+</p:sld>
+</file>
+
+<file path=ppt/slides/slide4.xml><?xml version="1.0" encoding="utf-8"?>
+<p:sld xmlns:a="http://schemas.openxmlformats.org/drawingml/2006/main" xmlns:r="http://schemas.openxmlformats.org/officeDocument/2006/relationships" xmlns:p="http://schemas.openxmlformats.org/presentationml/2006/main">
+  <p:cSld name="Slide 4">
+    <p:bg>
+      <p:bgPr>
+        <a:solidFill>
+          <a:srgbClr val="FFFDF7"/>
+        </a:solidFill>
+      </p:bgPr>
+    </p:bg>
+    <p:spTree>
+      <p:nvGrpSpPr>
+        <p:cNvPr id="1" name=""/>
+        <p:cNvGrpSpPr/>
+        <p:nvPr/>
+      </p:nvGrpSpPr>
+      <p:grpSpPr>
+        <a:xfrm>
+          <a:off x="0" y="0"/>
+          <a:ext cx="0" cy="0"/>
+          <a:chOff x="0" y="0"/>
+          <a:chExt cx="0" cy="0"/>
+        </a:xfrm>
+      </p:grpSpPr>
+      <p:sp>
+        <p:nvSpPr>
+          <p:cNvPr id="2" name="Shape 0"/>
+          <p:cNvSpPr/>
+          <p:nvPr/>
+        </p:nvSpPr>
+        <p:spPr>
+          <a:xfrm>
+            <a:off x="660197" y="545897"/>
+            <a:ext cx="202997" cy="25603"/>
+          </a:xfrm>
+          <a:prstGeom prst="rect">
+            <a:avLst/>
+          </a:prstGeom>
+          <a:solidFill>
+            <a:srgbClr val="106838"/>
+          </a:solidFill>
+          <a:ln/>
+        </p:spPr>
+      </p:sp>
+      <p:sp>
+        <p:nvSpPr>
+          <p:cNvPr id="3" name="Text 1"/>
+          <p:cNvSpPr/>
+          <p:nvPr/>
+        </p:nvSpPr>
+        <p:spPr>
+          <a:xfrm>
+            <a:off x="952805" y="444398"/>
+            <a:ext cx="6400800" cy="177394"/>
+          </a:xfrm>
+          <a:prstGeom prst="rect">
+            <a:avLst/>
+          </a:prstGeom>
+          <a:noFill/>
+          <a:ln/>
+        </p:spPr>
+        <p:txBody>
+          <a:bodyPr wrap="square" lIns="0" tIns="0" rIns="0" bIns="0" rtlCol="0" anchor="ctr"/>
+          <a:lstStyle/>
+          <a:p>
+            <a:pPr indent="0" marL="0">
+              <a:buNone/>
+            </a:pPr>
+            <a:r>
+              <a:rPr lang="en-US" sz="1050" b="1" dirty="0">
+                <a:solidFill>
+                  <a:srgbClr val="A8761F"/>
+                </a:solidFill>
+                <a:latin typeface="Arial" pitchFamily="34" charset="0"/>
+                <a:ea typeface="Arial" pitchFamily="34" charset="-122"/>
+                <a:cs typeface="Arial" pitchFamily="34" charset="-120"/>
+              </a:rPr>
+              <a:t>03</a:t>
+            </a:r>
+            <a:r>
+              <a:rPr lang="en-US" sz="1050" b="1" dirty="0">
+                <a:solidFill>
+                  <a:srgbClr val="1B8149"/>
+                </a:solidFill>
+                <a:latin typeface="Yu Gothic" pitchFamily="34" charset="0"/>
+                <a:ea typeface="Yu Gothic" pitchFamily="34" charset="-122"/>
+                <a:cs typeface="Yu Gothic" pitchFamily="34" charset="-120"/>
+              </a:rPr>
+              <a:t>   費用と所有の区分</a:t>
+            </a:r>
+            <a:endParaRPr lang="en-US" sz="1050" dirty="0"/>
+          </a:p>
+        </p:txBody>
+      </p:sp>
+      <p:sp>
+        <p:nvSpPr>
+          <p:cNvPr id="4" name="Text 2"/>
+          <p:cNvSpPr/>
+          <p:nvPr/>
+        </p:nvSpPr>
+        <p:spPr>
+          <a:xfrm>
+            <a:off x="660197" y="660197"/>
+            <a:ext cx="8889797" cy="508406"/>
+          </a:xfrm>
+          <a:prstGeom prst="rect">
+            <a:avLst/>
+          </a:prstGeom>
+          <a:noFill/>
+          <a:ln/>
+        </p:spPr>
+        <p:txBody>
+          <a:bodyPr wrap="square" lIns="0" tIns="0" rIns="0" bIns="0" rtlCol="0" anchor="ctr"/>
+          <a:lstStyle/>
+          <a:p>
+            <a:pPr indent="0" marL="0">
+              <a:buNone/>
+            </a:pPr>
+            <a:r>
+              <a:rPr lang="en-US" sz="2900" b="1" dirty="0">
+                <a:solidFill>
+                  <a:srgbClr val="0A3D23"/>
+                </a:solidFill>
+                <a:latin typeface="Yu Gothic" pitchFamily="34" charset="0"/>
+                <a:ea typeface="Yu Gothic" pitchFamily="34" charset="-122"/>
+                <a:cs typeface="Yu Gothic" pitchFamily="34" charset="-120"/>
+              </a:rPr>
+              <a:t>どちらが何を用意し、終了後どうなるか。</a:t>
+            </a:r>
+            <a:endParaRPr lang="en-US" sz="2900" dirty="0"/>
+          </a:p>
+        </p:txBody>
+      </p:sp>
+      <p:sp>
+        <p:nvSpPr>
+          <p:cNvPr id="5" name="Text 3"/>
+          <p:cNvSpPr/>
+          <p:nvPr/>
+        </p:nvSpPr>
+        <p:spPr>
+          <a:xfrm>
+            <a:off x="660197" y="1308506"/>
+            <a:ext cx="10032797" cy="228600"/>
+          </a:xfrm>
+          <a:prstGeom prst="rect">
+            <a:avLst/>
+          </a:prstGeom>
+          <a:noFill/>
+          <a:ln/>
+        </p:spPr>
+        <p:txBody>
+          <a:bodyPr wrap="square" lIns="0" tIns="0" rIns="0" bIns="0" rtlCol="0" anchor="ctr"/>
+          <a:lstStyle/>
+          <a:p>
+            <a:pPr indent="0" marL="0">
+              <a:buNone/>
+            </a:pPr>
+            <a:r>
+              <a:rPr lang="en-US" sz="1250" dirty="0">
+                <a:solidFill>
+                  <a:srgbClr val="4B5550"/>
+                </a:solidFill>
+                <a:latin typeface="Yu Gothic" pitchFamily="34" charset="0"/>
+                <a:ea typeface="Yu Gothic" pitchFamily="34" charset="-122"/>
+                <a:cs typeface="Yu Gothic" pitchFamily="34" charset="-120"/>
+              </a:rPr>
+              <a:t>トライアル期間中の費用負担と、終了後にそれがどう扱われるかを整理しました。</a:t>
+            </a:r>
+            <a:endParaRPr lang="en-US" sz="1250" dirty="0"/>
+          </a:p>
+        </p:txBody>
+      </p:sp>
+      <p:pic>
+        <p:nvPicPr>
+          <p:cNvPr id="6" name="Image 0" descr="/home/user/suzuki-ceo/selfcafe-miraiya-trial-deck/assets/logo-green.png">    </p:cNvPr>
+          <p:cNvPicPr>
+            <a:picLocks noChangeAspect="1"/>
+          </p:cNvPicPr>
+          <p:nvPr/>
+        </p:nvPicPr>
+        <p:blipFill>
+          <a:blip r:embed="rId1"/>
+          <a:stretch>
+            <a:fillRect/>
+          </a:stretch>
+        </p:blipFill>
+        <p:spPr>
+          <a:xfrm>
+            <a:off x="9855403" y="482803"/>
+            <a:ext cx="1676095" cy="238658"/>
+          </a:xfrm>
+          <a:prstGeom prst="rect">
+            <a:avLst/>
+          </a:prstGeom>
+        </p:spPr>
+      </p:pic>
+      <p:sp>
+        <p:nvSpPr>
+          <p:cNvPr id="7" name="Text 4"/>
+          <p:cNvSpPr/>
+          <p:nvPr/>
+        </p:nvSpPr>
+        <p:spPr>
+          <a:xfrm>
+            <a:off x="660197" y="6476695"/>
+            <a:ext cx="5080406" cy="152705"/>
+          </a:xfrm>
+          <a:prstGeom prst="rect">
+            <a:avLst/>
+          </a:prstGeom>
+          <a:noFill/>
+          <a:ln/>
+        </p:spPr>
+        <p:txBody>
+          <a:bodyPr wrap="square" lIns="0" tIns="0" rIns="0" bIns="0" rtlCol="0" anchor="ctr"/>
+          <a:lstStyle/>
+          <a:p>
+            <a:pPr indent="0" marL="0">
+              <a:buNone/>
+            </a:pPr>
+            <a:r>
+              <a:rPr lang="en-US" sz="900" dirty="0">
+                <a:solidFill>
+                  <a:srgbClr val="A8B0AA"/>
+                </a:solidFill>
+                <a:latin typeface="Yu Gothic" pitchFamily="34" charset="0"/>
+                <a:ea typeface="Yu Gothic" pitchFamily="34" charset="-122"/>
+                <a:cs typeface="Yu Gothic" pitchFamily="34" charset="-120"/>
+              </a:rPr>
+              <a:t>セルフカフェ × 未来屋書店 トライアル導入のご提案</a:t>
+            </a:r>
+            <a:endParaRPr lang="en-US" sz="900" dirty="0"/>
+          </a:p>
+        </p:txBody>
+      </p:sp>
+      <p:sp>
+        <p:nvSpPr>
+          <p:cNvPr id="8" name="Text 5"/>
+          <p:cNvSpPr/>
+          <p:nvPr/>
+        </p:nvSpPr>
+        <p:spPr>
+          <a:xfrm>
+            <a:off x="10261397" y="6463894"/>
+            <a:ext cx="1270102" cy="152705"/>
+          </a:xfrm>
+          <a:prstGeom prst="rect">
+            <a:avLst/>
+          </a:prstGeom>
+          <a:noFill/>
+          <a:ln/>
+        </p:spPr>
+        <p:txBody>
+          <a:bodyPr wrap="square" lIns="0" tIns="0" rIns="0" bIns="0" rtlCol="0" anchor="ctr"/>
+          <a:lstStyle/>
+          <a:p>
+            <a:pPr algn="r" indent="0" marL="0">
+              <a:buNone/>
+            </a:pPr>
+            <a:r>
+              <a:rPr lang="en-US" sz="1000" b="1" dirty="0">
+                <a:solidFill>
+                  <a:srgbClr val="7E8882"/>
+                </a:solidFill>
+                <a:latin typeface="Arial" pitchFamily="34" charset="0"/>
+                <a:ea typeface="Arial" pitchFamily="34" charset="-122"/>
+                <a:cs typeface="Arial" pitchFamily="34" charset="-120"/>
+              </a:rPr>
+              <a:t>04</a:t>
+            </a:r>
+            <a:endParaRPr lang="en-US" sz="1000" dirty="0"/>
+          </a:p>
+        </p:txBody>
+      </p:sp>
       <p:graphicFrame>
         <p:nvGraphicFramePr>
-          <p:cNvPr id="4" name="Table 0"/>
+          <p:cNvPr id="5" name="Table 0"/>
           <p:cNvGraphicFramePr>
             <a:graphicFrameLocks noGrp="1"/>
           </p:cNvGraphicFramePr>
@@ -5421,1117 +6696,6 @@
 </p:sld>
 </file>
 
-<file path=ppt/slides/slide4.xml><?xml version="1.0" encoding="utf-8"?>
-<p:sld xmlns:a="http://schemas.openxmlformats.org/drawingml/2006/main" xmlns:r="http://schemas.openxmlformats.org/officeDocument/2006/relationships" xmlns:p="http://schemas.openxmlformats.org/presentationml/2006/main">
-  <p:cSld name="Slide 4">
-    <p:bg>
-      <p:bgPr>
-        <a:solidFill>
-          <a:srgbClr val="FFFDF7"/>
-        </a:solidFill>
-      </p:bgPr>
-    </p:bg>
-    <p:spTree>
-      <p:nvGrpSpPr>
-        <p:cNvPr id="1" name=""/>
-        <p:cNvGrpSpPr/>
-        <p:nvPr/>
-      </p:nvGrpSpPr>
-      <p:grpSpPr>
-        <a:xfrm>
-          <a:off x="0" y="0"/>
-          <a:ext cx="0" cy="0"/>
-          <a:chOff x="0" y="0"/>
-          <a:chExt cx="0" cy="0"/>
-        </a:xfrm>
-      </p:grpSpPr>
-      <p:sp>
-        <p:nvSpPr>
-          <p:cNvPr id="2" name="Shape 0"/>
-          <p:cNvSpPr/>
-          <p:nvPr/>
-        </p:nvSpPr>
-        <p:spPr>
-          <a:xfrm>
-            <a:off x="660197" y="545897"/>
-            <a:ext cx="202997" cy="25603"/>
-          </a:xfrm>
-          <a:prstGeom prst="rect">
-            <a:avLst/>
-          </a:prstGeom>
-          <a:solidFill>
-            <a:srgbClr val="106838"/>
-          </a:solidFill>
-          <a:ln/>
-        </p:spPr>
-      </p:sp>
-      <p:sp>
-        <p:nvSpPr>
-          <p:cNvPr id="3" name="Text 1"/>
-          <p:cNvSpPr/>
-          <p:nvPr/>
-        </p:nvSpPr>
-        <p:spPr>
-          <a:xfrm>
-            <a:off x="952805" y="444398"/>
-            <a:ext cx="6400800" cy="177394"/>
-          </a:xfrm>
-          <a:prstGeom prst="rect">
-            <a:avLst/>
-          </a:prstGeom>
-          <a:noFill/>
-          <a:ln/>
-        </p:spPr>
-        <p:txBody>
-          <a:bodyPr wrap="square" lIns="0" tIns="0" rIns="0" bIns="0" rtlCol="0" anchor="ctr"/>
-          <a:lstStyle/>
-          <a:p>
-            <a:pPr indent="0" marL="0">
-              <a:buNone/>
-            </a:pPr>
-            <a:r>
-              <a:rPr lang="en-US" sz="1050" b="1" dirty="0">
-                <a:solidFill>
-                  <a:srgbClr val="A8761F"/>
-                </a:solidFill>
-                <a:latin typeface="Arial" pitchFamily="34" charset="0"/>
-                <a:ea typeface="Arial" pitchFamily="34" charset="-122"/>
-                <a:cs typeface="Arial" pitchFamily="34" charset="-120"/>
-              </a:rPr>
-              <a:t>03</a:t>
-            </a:r>
-            <a:r>
-              <a:rPr lang="en-US" sz="1050" b="1" dirty="0">
-                <a:solidFill>
-                  <a:srgbClr val="1B8149"/>
-                </a:solidFill>
-                <a:latin typeface="Yu Gothic" pitchFamily="34" charset="0"/>
-                <a:ea typeface="Yu Gothic" pitchFamily="34" charset="-122"/>
-                <a:cs typeface="Yu Gothic" pitchFamily="34" charset="-120"/>
-              </a:rPr>
-              <a:t>   終了時の扱い</a:t>
-            </a:r>
-            <a:endParaRPr lang="en-US" sz="1050" dirty="0"/>
-          </a:p>
-        </p:txBody>
-      </p:sp>
-      <p:sp>
-        <p:nvSpPr>
-          <p:cNvPr id="4" name="Text 2"/>
-          <p:cNvSpPr/>
-          <p:nvPr/>
-        </p:nvSpPr>
-        <p:spPr>
-          <a:xfrm>
-            <a:off x="660197" y="660197"/>
-            <a:ext cx="8889797" cy="508406"/>
-          </a:xfrm>
-          <a:prstGeom prst="rect">
-            <a:avLst/>
-          </a:prstGeom>
-          <a:noFill/>
-          <a:ln/>
-        </p:spPr>
-        <p:txBody>
-          <a:bodyPr wrap="square" lIns="0" tIns="0" rIns="0" bIns="0" rtlCol="0" anchor="ctr"/>
-          <a:lstStyle/>
-          <a:p>
-            <a:pPr indent="0" marL="0">
-              <a:buNone/>
-            </a:pPr>
-            <a:r>
-              <a:rPr lang="en-US" sz="2900" b="1" dirty="0">
-                <a:solidFill>
-                  <a:srgbClr val="0A3D23"/>
-                </a:solidFill>
-                <a:latin typeface="Yu Gothic" pitchFamily="34" charset="0"/>
-                <a:ea typeface="Yu Gothic" pitchFamily="34" charset="-122"/>
-                <a:cs typeface="Yu Gothic" pitchFamily="34" charset="-120"/>
-              </a:rPr>
-              <a:t>原状回復は不要。撤去するのは当社の機器だけです。</a:t>
-            </a:r>
-            <a:endParaRPr lang="en-US" sz="2900" dirty="0"/>
-          </a:p>
-        </p:txBody>
-      </p:sp>
-      <p:sp>
-        <p:nvSpPr>
-          <p:cNvPr id="5" name="Text 3"/>
-          <p:cNvSpPr/>
-          <p:nvPr/>
-        </p:nvSpPr>
-        <p:spPr>
-          <a:xfrm>
-            <a:off x="660197" y="1308506"/>
-            <a:ext cx="10032797" cy="228600"/>
-          </a:xfrm>
-          <a:prstGeom prst="rect">
-            <a:avLst/>
-          </a:prstGeom>
-          <a:noFill/>
-          <a:ln/>
-        </p:spPr>
-        <p:txBody>
-          <a:bodyPr wrap="square" lIns="0" tIns="0" rIns="0" bIns="0" rtlCol="0" anchor="ctr"/>
-          <a:lstStyle/>
-          <a:p>
-            <a:pPr indent="0" marL="0">
-              <a:buNone/>
-            </a:pPr>
-            <a:r>
-              <a:rPr lang="en-US" sz="1250" dirty="0">
-                <a:solidFill>
-                  <a:srgbClr val="4B5550"/>
-                </a:solidFill>
-                <a:latin typeface="Yu Gothic" pitchFamily="34" charset="0"/>
-                <a:ea typeface="Yu Gothic" pitchFamily="34" charset="-122"/>
-                <a:cs typeface="Yu Gothic" pitchFamily="34" charset="-120"/>
-              </a:rPr>
-              <a:t>トライアルを終了される場合も、内装を元に戻していただく必要はありません。</a:t>
-            </a:r>
-            <a:endParaRPr lang="en-US" sz="1250" dirty="0"/>
-          </a:p>
-        </p:txBody>
-      </p:sp>
-      <p:pic>
-        <p:nvPicPr>
-          <p:cNvPr id="6" name="Image 0" descr="/home/user/suzuki-ceo/selfcafe-miraiya-trial-deck/assets/logo-green.png">    </p:cNvPr>
-          <p:cNvPicPr>
-            <a:picLocks noChangeAspect="1"/>
-          </p:cNvPicPr>
-          <p:nvPr/>
-        </p:nvPicPr>
-        <p:blipFill>
-          <a:blip r:embed="rId1"/>
-          <a:stretch>
-            <a:fillRect/>
-          </a:stretch>
-        </p:blipFill>
-        <p:spPr>
-          <a:xfrm>
-            <a:off x="9855403" y="482803"/>
-            <a:ext cx="1676095" cy="238658"/>
-          </a:xfrm>
-          <a:prstGeom prst="rect">
-            <a:avLst/>
-          </a:prstGeom>
-        </p:spPr>
-      </p:pic>
-      <p:sp>
-        <p:nvSpPr>
-          <p:cNvPr id="7" name="Text 4"/>
-          <p:cNvSpPr/>
-          <p:nvPr/>
-        </p:nvSpPr>
-        <p:spPr>
-          <a:xfrm>
-            <a:off x="660197" y="6476695"/>
-            <a:ext cx="5080406" cy="152705"/>
-          </a:xfrm>
-          <a:prstGeom prst="rect">
-            <a:avLst/>
-          </a:prstGeom>
-          <a:noFill/>
-          <a:ln/>
-        </p:spPr>
-        <p:txBody>
-          <a:bodyPr wrap="square" lIns="0" tIns="0" rIns="0" bIns="0" rtlCol="0" anchor="ctr"/>
-          <a:lstStyle/>
-          <a:p>
-            <a:pPr indent="0" marL="0">
-              <a:buNone/>
-            </a:pPr>
-            <a:r>
-              <a:rPr lang="en-US" sz="900" dirty="0">
-                <a:solidFill>
-                  <a:srgbClr val="A8B0AA"/>
-                </a:solidFill>
-                <a:latin typeface="Yu Gothic" pitchFamily="34" charset="0"/>
-                <a:ea typeface="Yu Gothic" pitchFamily="34" charset="-122"/>
-                <a:cs typeface="Yu Gothic" pitchFamily="34" charset="-120"/>
-              </a:rPr>
-              <a:t>セルフカフェ × 未来屋書店 トライアル導入 特別条件</a:t>
-            </a:r>
-            <a:endParaRPr lang="en-US" sz="900" dirty="0"/>
-          </a:p>
-        </p:txBody>
-      </p:sp>
-      <p:sp>
-        <p:nvSpPr>
-          <p:cNvPr id="8" name="Text 5"/>
-          <p:cNvSpPr/>
-          <p:nvPr/>
-        </p:nvSpPr>
-        <p:spPr>
-          <a:xfrm>
-            <a:off x="10261397" y="6463894"/>
-            <a:ext cx="1270102" cy="152705"/>
-          </a:xfrm>
-          <a:prstGeom prst="rect">
-            <a:avLst/>
-          </a:prstGeom>
-          <a:noFill/>
-          <a:ln/>
-        </p:spPr>
-        <p:txBody>
-          <a:bodyPr wrap="square" lIns="0" tIns="0" rIns="0" bIns="0" rtlCol="0" anchor="ctr"/>
-          <a:lstStyle/>
-          <a:p>
-            <a:pPr algn="r" indent="0" marL="0">
-              <a:buNone/>
-            </a:pPr>
-            <a:r>
-              <a:rPr lang="en-US" sz="1000" b="1" dirty="0">
-                <a:solidFill>
-                  <a:srgbClr val="7E8882"/>
-                </a:solidFill>
-                <a:latin typeface="Arial" pitchFamily="34" charset="0"/>
-                <a:ea typeface="Arial" pitchFamily="34" charset="-122"/>
-                <a:cs typeface="Arial" pitchFamily="34" charset="-120"/>
-              </a:rPr>
-              <a:t>04</a:t>
-            </a:r>
-            <a:endParaRPr lang="en-US" sz="1000" dirty="0"/>
-          </a:p>
-        </p:txBody>
-      </p:sp>
-      <p:sp>
-        <p:nvSpPr>
-          <p:cNvPr id="9" name="Shape 6"/>
-          <p:cNvSpPr/>
-          <p:nvPr/>
-        </p:nvSpPr>
-        <p:spPr>
-          <a:xfrm>
-            <a:off x="660197" y="1651406"/>
-            <a:ext cx="5243627" cy="2926080"/>
-          </a:xfrm>
-          <a:prstGeom prst="roundRect">
-            <a:avLst>
-              <a:gd name="adj" fmla="val 1875"/>
-            </a:avLst>
-          </a:prstGeom>
-          <a:solidFill>
-            <a:srgbClr val="F1F8F3"/>
-          </a:solidFill>
-          <a:ln w="9525">
-            <a:solidFill>
-              <a:srgbClr val="D2E7DA"/>
-            </a:solidFill>
-            <a:prstDash val="solid"/>
-          </a:ln>
-        </p:spPr>
-      </p:sp>
-      <p:pic>
-        <p:nvPicPr>
-          <p:cNvPr id="10" name="Image 1" descr="/home/user/suzuki-ceo/selfcafe-miraiya-trial-deck/assets/icons/LuHouse-green.png">    </p:cNvPr>
-          <p:cNvPicPr>
-            <a:picLocks noChangeAspect="1"/>
-          </p:cNvPicPr>
-          <p:nvPr/>
-        </p:nvPicPr>
-        <p:blipFill>
-          <a:blip r:embed="rId2"/>
-          <a:stretch>
-            <a:fillRect/>
-          </a:stretch>
-        </p:blipFill>
-        <p:spPr>
-          <a:xfrm>
-            <a:off x="934517" y="1889150"/>
-            <a:ext cx="329184" cy="329184"/>
-          </a:xfrm>
-          <a:prstGeom prst="rect">
-            <a:avLst/>
-          </a:prstGeom>
-        </p:spPr>
-      </p:pic>
-      <p:sp>
-        <p:nvSpPr>
-          <p:cNvPr id="11" name="Text 7"/>
-          <p:cNvSpPr/>
-          <p:nvPr/>
-        </p:nvSpPr>
-        <p:spPr>
-          <a:xfrm>
-            <a:off x="1391717" y="1834286"/>
-            <a:ext cx="4237787" cy="384048"/>
-          </a:xfrm>
-          <a:prstGeom prst="rect">
-            <a:avLst/>
-          </a:prstGeom>
-          <a:noFill/>
-          <a:ln/>
-        </p:spPr>
-        <p:txBody>
-          <a:bodyPr wrap="square" lIns="0" tIns="0" rIns="0" bIns="0" rtlCol="0" anchor="ctr"/>
-          <a:lstStyle/>
-          <a:p>
-            <a:pPr indent="0" marL="0">
-              <a:buNone/>
-            </a:pPr>
-            <a:r>
-              <a:rPr lang="en-US" sz="1400" b="1" dirty="0">
-                <a:solidFill>
-                  <a:srgbClr val="106838"/>
-                </a:solidFill>
-                <a:latin typeface="Yu Gothic" pitchFamily="34" charset="0"/>
-                <a:ea typeface="Yu Gothic" pitchFamily="34" charset="-122"/>
-                <a:cs typeface="Yu Gothic" pitchFamily="34" charset="-120"/>
-              </a:rPr>
-              <a:t>そのまま残るもの</a:t>
-            </a:r>
-            <a:endParaRPr lang="en-US" sz="1400" dirty="0"/>
-          </a:p>
-        </p:txBody>
-      </p:sp>
-      <p:sp>
-        <p:nvSpPr>
-          <p:cNvPr id="12" name="Shape 8"/>
-          <p:cNvSpPr/>
-          <p:nvPr/>
-        </p:nvSpPr>
-        <p:spPr>
-          <a:xfrm>
-            <a:off x="934517" y="2364638"/>
-            <a:ext cx="4694987" cy="10058"/>
-          </a:xfrm>
-          <a:prstGeom prst="rect">
-            <a:avLst/>
-          </a:prstGeom>
-          <a:solidFill>
-            <a:srgbClr val="D2E7DA"/>
-          </a:solidFill>
-          <a:ln/>
-        </p:spPr>
-      </p:sp>
-      <p:pic>
-        <p:nvPicPr>
-          <p:cNvPr id="13" name="Image 2" descr="/home/user/suzuki-ceo/selfcafe-miraiya-trial-deck/assets/icons/LuCheck-green.png">    </p:cNvPr>
-          <p:cNvPicPr>
-            <a:picLocks noChangeAspect="1"/>
-          </p:cNvPicPr>
-          <p:nvPr/>
-        </p:nvPicPr>
-        <p:blipFill>
-          <a:blip r:embed="rId3"/>
-          <a:stretch>
-            <a:fillRect/>
-          </a:stretch>
-        </p:blipFill>
-        <p:spPr>
-          <a:xfrm>
-            <a:off x="952805" y="2593238"/>
-            <a:ext cx="182880" cy="182880"/>
-          </a:xfrm>
-          <a:prstGeom prst="rect">
-            <a:avLst/>
-          </a:prstGeom>
-        </p:spPr>
-      </p:pic>
-      <p:sp>
-        <p:nvSpPr>
-          <p:cNvPr id="14" name="Text 9"/>
-          <p:cNvSpPr/>
-          <p:nvPr/>
-        </p:nvSpPr>
-        <p:spPr>
-          <a:xfrm>
-            <a:off x="1281989" y="2529230"/>
-            <a:ext cx="4329227" cy="310896"/>
-          </a:xfrm>
-          <a:prstGeom prst="rect">
-            <a:avLst/>
-          </a:prstGeom>
-          <a:noFill/>
-          <a:ln/>
-        </p:spPr>
-        <p:txBody>
-          <a:bodyPr wrap="square" lIns="0" tIns="0" rIns="0" bIns="0" rtlCol="0" anchor="ctr"/>
-          <a:lstStyle/>
-          <a:p>
-            <a:pPr indent="0" marL="0">
-              <a:buNone/>
-            </a:pPr>
-            <a:r>
-              <a:rPr lang="en-US" sz="1100" dirty="0">
-                <a:solidFill>
-                  <a:srgbClr val="0A3D23"/>
-                </a:solidFill>
-                <a:latin typeface="Yu Gothic" pitchFamily="34" charset="0"/>
-                <a:ea typeface="Yu Gothic" pitchFamily="34" charset="-122"/>
-                <a:cs typeface="Yu Gothic" pitchFamily="34" charset="-120"/>
-              </a:rPr>
-              <a:t>内装工事（造作・床・サイン）</a:t>
-            </a:r>
-            <a:endParaRPr lang="en-US" sz="1100" dirty="0"/>
-          </a:p>
-        </p:txBody>
-      </p:sp>
-      <p:pic>
-        <p:nvPicPr>
-          <p:cNvPr id="15" name="Image 3" descr="/home/user/suzuki-ceo/selfcafe-miraiya-trial-deck/assets/icons/LuCheck-green.png">    </p:cNvPr>
-          <p:cNvPicPr>
-            <a:picLocks noChangeAspect="1"/>
-          </p:cNvPicPr>
-          <p:nvPr/>
-        </p:nvPicPr>
-        <p:blipFill>
-          <a:blip r:embed="rId4"/>
-          <a:stretch>
-            <a:fillRect/>
-          </a:stretch>
-        </p:blipFill>
-        <p:spPr>
-          <a:xfrm>
-            <a:off x="952805" y="3013862"/>
-            <a:ext cx="182880" cy="182880"/>
-          </a:xfrm>
-          <a:prstGeom prst="rect">
-            <a:avLst/>
-          </a:prstGeom>
-        </p:spPr>
-      </p:pic>
-      <p:sp>
-        <p:nvSpPr>
-          <p:cNvPr id="16" name="Text 10"/>
-          <p:cNvSpPr/>
-          <p:nvPr/>
-        </p:nvSpPr>
-        <p:spPr>
-          <a:xfrm>
-            <a:off x="1281989" y="2949854"/>
-            <a:ext cx="4329227" cy="310896"/>
-          </a:xfrm>
-          <a:prstGeom prst="rect">
-            <a:avLst/>
-          </a:prstGeom>
-          <a:noFill/>
-          <a:ln/>
-        </p:spPr>
-        <p:txBody>
-          <a:bodyPr wrap="square" lIns="0" tIns="0" rIns="0" bIns="0" rtlCol="0" anchor="ctr"/>
-          <a:lstStyle/>
-          <a:p>
-            <a:pPr indent="0" marL="0">
-              <a:buNone/>
-            </a:pPr>
-            <a:r>
-              <a:rPr lang="en-US" sz="1100" dirty="0">
-                <a:solidFill>
-                  <a:srgbClr val="0A3D23"/>
-                </a:solidFill>
-                <a:latin typeface="Yu Gothic" pitchFamily="34" charset="0"/>
-                <a:ea typeface="Yu Gothic" pitchFamily="34" charset="-122"/>
-                <a:cs typeface="Yu Gothic" pitchFamily="34" charset="-120"/>
-              </a:rPr>
-              <a:t>家具・什器（テーブル・椅子・植栽 等）</a:t>
-            </a:r>
-            <a:endParaRPr lang="en-US" sz="1100" dirty="0"/>
-          </a:p>
-        </p:txBody>
-      </p:sp>
-      <p:pic>
-        <p:nvPicPr>
-          <p:cNvPr id="17" name="Image 4" descr="/home/user/suzuki-ceo/selfcafe-miraiya-trial-deck/assets/icons/LuCheck-green.png">    </p:cNvPr>
-          <p:cNvPicPr>
-            <a:picLocks noChangeAspect="1"/>
-          </p:cNvPicPr>
-          <p:nvPr/>
-        </p:nvPicPr>
-        <p:blipFill>
-          <a:blip r:embed="rId5"/>
-          <a:stretch>
-            <a:fillRect/>
-          </a:stretch>
-        </p:blipFill>
-        <p:spPr>
-          <a:xfrm>
-            <a:off x="952805" y="3434486"/>
-            <a:ext cx="182880" cy="182880"/>
-          </a:xfrm>
-          <a:prstGeom prst="rect">
-            <a:avLst/>
-          </a:prstGeom>
-        </p:spPr>
-      </p:pic>
-      <p:sp>
-        <p:nvSpPr>
-          <p:cNvPr id="18" name="Text 11"/>
-          <p:cNvSpPr/>
-          <p:nvPr/>
-        </p:nvSpPr>
-        <p:spPr>
-          <a:xfrm>
-            <a:off x="1281989" y="3370478"/>
-            <a:ext cx="4329227" cy="310896"/>
-          </a:xfrm>
-          <a:prstGeom prst="rect">
-            <a:avLst/>
-          </a:prstGeom>
-          <a:noFill/>
-          <a:ln/>
-        </p:spPr>
-        <p:txBody>
-          <a:bodyPr wrap="square" lIns="0" tIns="0" rIns="0" bIns="0" rtlCol="0" anchor="ctr"/>
-          <a:lstStyle/>
-          <a:p>
-            <a:pPr indent="0" marL="0">
-              <a:buNone/>
-            </a:pPr>
-            <a:r>
-              <a:rPr lang="en-US" sz="1100" dirty="0">
-                <a:solidFill>
-                  <a:srgbClr val="0A3D23"/>
-                </a:solidFill>
-                <a:latin typeface="Yu Gothic" pitchFamily="34" charset="0"/>
-                <a:ea typeface="Yu Gothic" pitchFamily="34" charset="-122"/>
-                <a:cs typeface="Yu Gothic" pitchFamily="34" charset="-120"/>
-              </a:rPr>
-              <a:t>書店側の売場・動線</a:t>
-            </a:r>
-            <a:endParaRPr lang="en-US" sz="1100" dirty="0"/>
-          </a:p>
-        </p:txBody>
-      </p:sp>
-      <p:sp>
-        <p:nvSpPr>
-          <p:cNvPr id="19" name="Text 12"/>
-          <p:cNvSpPr/>
-          <p:nvPr/>
-        </p:nvSpPr>
-        <p:spPr>
-          <a:xfrm>
-            <a:off x="934517" y="3919118"/>
-            <a:ext cx="4694987" cy="512064"/>
-          </a:xfrm>
-          <a:prstGeom prst="rect">
-            <a:avLst/>
-          </a:prstGeom>
-          <a:noFill/>
-          <a:ln/>
-        </p:spPr>
-        <p:txBody>
-          <a:bodyPr wrap="square" lIns="0" tIns="0" rIns="0" bIns="0" rtlCol="0" anchor="t"/>
-          <a:lstStyle/>
-          <a:p>
-            <a:pPr indent="0" marL="0">
-              <a:lnSpc>
-                <a:spcPct val="130000"/>
-              </a:lnSpc>
-              <a:buNone/>
-            </a:pPr>
-            <a:r>
-              <a:rPr lang="en-US" sz="950" dirty="0">
-                <a:solidFill>
-                  <a:srgbClr val="7E8882"/>
-                </a:solidFill>
-                <a:latin typeface="Yu Gothic" pitchFamily="34" charset="0"/>
-                <a:ea typeface="Yu Gothic" pitchFamily="34" charset="-122"/>
-                <a:cs typeface="Yu Gothic" pitchFamily="34" charset="-120"/>
-              </a:rPr>
-              <a:t>工事部分は当社負担で施工しますが、撤去はいたしません。</a:t>
-            </a:r>
-            <a:endParaRPr lang="en-US" sz="950" dirty="0"/>
-          </a:p>
-        </p:txBody>
-      </p:sp>
-      <p:sp>
-        <p:nvSpPr>
-          <p:cNvPr id="20" name="Shape 13"/>
-          <p:cNvSpPr/>
-          <p:nvPr/>
-        </p:nvSpPr>
-        <p:spPr>
-          <a:xfrm>
-            <a:off x="6287872" y="1651406"/>
-            <a:ext cx="5243627" cy="2926080"/>
-          </a:xfrm>
-          <a:prstGeom prst="roundRect">
-            <a:avLst>
-              <a:gd name="adj" fmla="val 1875"/>
-            </a:avLst>
-          </a:prstGeom>
-          <a:solidFill>
-            <a:srgbClr val="FFFFFF"/>
-          </a:solidFill>
-          <a:ln w="9525">
-            <a:solidFill>
-              <a:srgbClr val="EFEAE0"/>
-            </a:solidFill>
-            <a:prstDash val="solid"/>
-          </a:ln>
-        </p:spPr>
-      </p:sp>
-      <p:pic>
-        <p:nvPicPr>
-          <p:cNvPr id="21" name="Image 5" descr="/home/user/suzuki-ceo/selfcafe-miraiya-trial-deck/assets/icons/LuMinus-green.png">    </p:cNvPr>
-          <p:cNvPicPr>
-            <a:picLocks noChangeAspect="1"/>
-          </p:cNvPicPr>
-          <p:nvPr/>
-        </p:nvPicPr>
-        <p:blipFill>
-          <a:blip r:embed="rId6"/>
-          <a:stretch>
-            <a:fillRect/>
-          </a:stretch>
-        </p:blipFill>
-        <p:spPr>
-          <a:xfrm>
-            <a:off x="6562192" y="1889150"/>
-            <a:ext cx="329184" cy="329184"/>
-          </a:xfrm>
-          <a:prstGeom prst="rect">
-            <a:avLst/>
-          </a:prstGeom>
-        </p:spPr>
-      </p:pic>
-      <p:sp>
-        <p:nvSpPr>
-          <p:cNvPr id="22" name="Text 14"/>
-          <p:cNvSpPr/>
-          <p:nvPr/>
-        </p:nvSpPr>
-        <p:spPr>
-          <a:xfrm>
-            <a:off x="7019392" y="1834286"/>
-            <a:ext cx="4237787" cy="384048"/>
-          </a:xfrm>
-          <a:prstGeom prst="rect">
-            <a:avLst/>
-          </a:prstGeom>
-          <a:noFill/>
-          <a:ln/>
-        </p:spPr>
-        <p:txBody>
-          <a:bodyPr wrap="square" lIns="0" tIns="0" rIns="0" bIns="0" rtlCol="0" anchor="ctr"/>
-          <a:lstStyle/>
-          <a:p>
-            <a:pPr indent="0" marL="0">
-              <a:buNone/>
-            </a:pPr>
-            <a:r>
-              <a:rPr lang="en-US" sz="1400" b="1" dirty="0">
-                <a:solidFill>
-                  <a:srgbClr val="0A3D23"/>
-                </a:solidFill>
-                <a:latin typeface="Yu Gothic" pitchFamily="34" charset="0"/>
-                <a:ea typeface="Yu Gothic" pitchFamily="34" charset="-122"/>
-                <a:cs typeface="Yu Gothic" pitchFamily="34" charset="-120"/>
-              </a:rPr>
-              <a:t>当社が撤去するもの</a:t>
-            </a:r>
-            <a:endParaRPr lang="en-US" sz="1400" dirty="0"/>
-          </a:p>
-        </p:txBody>
-      </p:sp>
-      <p:sp>
-        <p:nvSpPr>
-          <p:cNvPr id="23" name="Shape 15"/>
-          <p:cNvSpPr/>
-          <p:nvPr/>
-        </p:nvSpPr>
-        <p:spPr>
-          <a:xfrm>
-            <a:off x="6562192" y="2364638"/>
-            <a:ext cx="4694987" cy="10058"/>
-          </a:xfrm>
-          <a:prstGeom prst="rect">
-            <a:avLst/>
-          </a:prstGeom>
-          <a:solidFill>
-            <a:srgbClr val="EFEAE0"/>
-          </a:solidFill>
-          <a:ln/>
-        </p:spPr>
-      </p:sp>
-      <p:pic>
-        <p:nvPicPr>
-          <p:cNvPr id="24" name="Image 6" descr="/home/user/suzuki-ceo/selfcafe-miraiya-trial-deck/assets/icons/LuX-muted.png">    </p:cNvPr>
-          <p:cNvPicPr>
-            <a:picLocks noChangeAspect="1"/>
-          </p:cNvPicPr>
-          <p:nvPr/>
-        </p:nvPicPr>
-        <p:blipFill>
-          <a:blip r:embed="rId7"/>
-          <a:stretch>
-            <a:fillRect/>
-          </a:stretch>
-        </p:blipFill>
-        <p:spPr>
-          <a:xfrm>
-            <a:off x="6580480" y="2593238"/>
-            <a:ext cx="182880" cy="182880"/>
-          </a:xfrm>
-          <a:prstGeom prst="rect">
-            <a:avLst/>
-          </a:prstGeom>
-        </p:spPr>
-      </p:pic>
-      <p:sp>
-        <p:nvSpPr>
-          <p:cNvPr id="25" name="Text 16"/>
-          <p:cNvSpPr/>
-          <p:nvPr/>
-        </p:nvSpPr>
-        <p:spPr>
-          <a:xfrm>
-            <a:off x="6909664" y="2529230"/>
-            <a:ext cx="4329227" cy="310896"/>
-          </a:xfrm>
-          <a:prstGeom prst="rect">
-            <a:avLst/>
-          </a:prstGeom>
-          <a:noFill/>
-          <a:ln/>
-        </p:spPr>
-        <p:txBody>
-          <a:bodyPr wrap="square" lIns="0" tIns="0" rIns="0" bIns="0" rtlCol="0" anchor="ctr"/>
-          <a:lstStyle/>
-          <a:p>
-            <a:pPr indent="0" marL="0">
-              <a:buNone/>
-            </a:pPr>
-            <a:r>
-              <a:rPr lang="en-US" sz="1100" dirty="0">
-                <a:solidFill>
-                  <a:srgbClr val="0A3D23"/>
-                </a:solidFill>
-                <a:latin typeface="Yu Gothic" pitchFamily="34" charset="0"/>
-                <a:ea typeface="Yu Gothic" pitchFamily="34" charset="-122"/>
-                <a:cs typeface="Yu Gothic" pitchFamily="34" charset="-120"/>
-              </a:rPr>
-              <a:t>ドリンクマシン</a:t>
-            </a:r>
-            <a:endParaRPr lang="en-US" sz="1100" dirty="0"/>
-          </a:p>
-        </p:txBody>
-      </p:sp>
-      <p:pic>
-        <p:nvPicPr>
-          <p:cNvPr id="26" name="Image 7" descr="/home/user/suzuki-ceo/selfcafe-miraiya-trial-deck/assets/icons/LuX-muted.png">    </p:cNvPr>
-          <p:cNvPicPr>
-            <a:picLocks noChangeAspect="1"/>
-          </p:cNvPicPr>
-          <p:nvPr/>
-        </p:nvPicPr>
-        <p:blipFill>
-          <a:blip r:embed="rId8"/>
-          <a:stretch>
-            <a:fillRect/>
-          </a:stretch>
-        </p:blipFill>
-        <p:spPr>
-          <a:xfrm>
-            <a:off x="6580480" y="3013862"/>
-            <a:ext cx="182880" cy="182880"/>
-          </a:xfrm>
-          <a:prstGeom prst="rect">
-            <a:avLst/>
-          </a:prstGeom>
-        </p:spPr>
-      </p:pic>
-      <p:sp>
-        <p:nvSpPr>
-          <p:cNvPr id="27" name="Text 17"/>
-          <p:cNvSpPr/>
-          <p:nvPr/>
-        </p:nvSpPr>
-        <p:spPr>
-          <a:xfrm>
-            <a:off x="6909664" y="2949854"/>
-            <a:ext cx="4329227" cy="310896"/>
-          </a:xfrm>
-          <a:prstGeom prst="rect">
-            <a:avLst/>
-          </a:prstGeom>
-          <a:noFill/>
-          <a:ln/>
-        </p:spPr>
-        <p:txBody>
-          <a:bodyPr wrap="square" lIns="0" tIns="0" rIns="0" bIns="0" rtlCol="0" anchor="ctr"/>
-          <a:lstStyle/>
-          <a:p>
-            <a:pPr indent="0" marL="0">
-              <a:buNone/>
-            </a:pPr>
-            <a:r>
-              <a:rPr lang="en-US" sz="1100" dirty="0">
-                <a:solidFill>
-                  <a:srgbClr val="0A3D23"/>
-                </a:solidFill>
-                <a:latin typeface="Yu Gothic" pitchFamily="34" charset="0"/>
-                <a:ea typeface="Yu Gothic" pitchFamily="34" charset="-122"/>
-                <a:cs typeface="Yu Gothic" pitchFamily="34" charset="-120"/>
-              </a:rPr>
-              <a:t>決済端末</a:t>
-            </a:r>
-            <a:endParaRPr lang="en-US" sz="1100" dirty="0"/>
-          </a:p>
-        </p:txBody>
-      </p:sp>
-      <p:pic>
-        <p:nvPicPr>
-          <p:cNvPr id="28" name="Image 8" descr="/home/user/suzuki-ceo/selfcafe-miraiya-trial-deck/assets/icons/LuX-muted.png">    </p:cNvPr>
-          <p:cNvPicPr>
-            <a:picLocks noChangeAspect="1"/>
-          </p:cNvPicPr>
-          <p:nvPr/>
-        </p:nvPicPr>
-        <p:blipFill>
-          <a:blip r:embed="rId9"/>
-          <a:stretch>
-            <a:fillRect/>
-          </a:stretch>
-        </p:blipFill>
-        <p:spPr>
-          <a:xfrm>
-            <a:off x="6580480" y="3434486"/>
-            <a:ext cx="182880" cy="182880"/>
-          </a:xfrm>
-          <a:prstGeom prst="rect">
-            <a:avLst/>
-          </a:prstGeom>
-        </p:spPr>
-      </p:pic>
-      <p:sp>
-        <p:nvSpPr>
-          <p:cNvPr id="29" name="Text 18"/>
-          <p:cNvSpPr/>
-          <p:nvPr/>
-        </p:nvSpPr>
-        <p:spPr>
-          <a:xfrm>
-            <a:off x="6909664" y="3370478"/>
-            <a:ext cx="4329227" cy="310896"/>
-          </a:xfrm>
-          <a:prstGeom prst="rect">
-            <a:avLst/>
-          </a:prstGeom>
-          <a:noFill/>
-          <a:ln/>
-        </p:spPr>
-        <p:txBody>
-          <a:bodyPr wrap="square" lIns="0" tIns="0" rIns="0" bIns="0" rtlCol="0" anchor="ctr"/>
-          <a:lstStyle/>
-          <a:p>
-            <a:pPr indent="0" marL="0">
-              <a:buNone/>
-            </a:pPr>
-            <a:r>
-              <a:rPr lang="en-US" sz="1100" dirty="0">
-                <a:solidFill>
-                  <a:srgbClr val="0A3D23"/>
-                </a:solidFill>
-                <a:latin typeface="Yu Gothic" pitchFamily="34" charset="0"/>
-                <a:ea typeface="Yu Gothic" pitchFamily="34" charset="-122"/>
-                <a:cs typeface="Yu Gothic" pitchFamily="34" charset="-120"/>
-              </a:rPr>
-              <a:t>防犯カメラ・通信機器</a:t>
-            </a:r>
-            <a:endParaRPr lang="en-US" sz="1100" dirty="0"/>
-          </a:p>
-        </p:txBody>
-      </p:sp>
-      <p:sp>
-        <p:nvSpPr>
-          <p:cNvPr id="30" name="Text 19"/>
-          <p:cNvSpPr/>
-          <p:nvPr/>
-        </p:nvSpPr>
-        <p:spPr>
-          <a:xfrm>
-            <a:off x="6562192" y="3919118"/>
-            <a:ext cx="4694987" cy="512064"/>
-          </a:xfrm>
-          <a:prstGeom prst="rect">
-            <a:avLst/>
-          </a:prstGeom>
-          <a:noFill/>
-          <a:ln/>
-        </p:spPr>
-        <p:txBody>
-          <a:bodyPr wrap="square" lIns="0" tIns="0" rIns="0" bIns="0" rtlCol="0" anchor="t"/>
-          <a:lstStyle/>
-          <a:p>
-            <a:pPr indent="0" marL="0">
-              <a:lnSpc>
-                <a:spcPct val="130000"/>
-              </a:lnSpc>
-              <a:buNone/>
-            </a:pPr>
-            <a:r>
-              <a:rPr lang="en-US" sz="950" dirty="0">
-                <a:solidFill>
-                  <a:srgbClr val="7E8882"/>
-                </a:solidFill>
-                <a:latin typeface="Yu Gothic" pitchFamily="34" charset="0"/>
-                <a:ea typeface="Yu Gothic" pitchFamily="34" charset="-122"/>
-                <a:cs typeface="Yu Gothic" pitchFamily="34" charset="-120"/>
-              </a:rPr>
-              <a:t>撤去費用は当社が負担します。跡の補修も当社で対応します。</a:t>
-            </a:r>
-            <a:endParaRPr lang="en-US" sz="950" dirty="0"/>
-          </a:p>
-        </p:txBody>
-      </p:sp>
-      <p:sp>
-        <p:nvSpPr>
-          <p:cNvPr id="31" name="Shape 20"/>
-          <p:cNvSpPr/>
-          <p:nvPr/>
-        </p:nvSpPr>
-        <p:spPr>
-          <a:xfrm>
-            <a:off x="660197" y="4718304"/>
-            <a:ext cx="10871302" cy="1005840"/>
-          </a:xfrm>
-          <a:prstGeom prst="roundRect">
-            <a:avLst>
-              <a:gd name="adj" fmla="val 5455"/>
-            </a:avLst>
-          </a:prstGeom>
-          <a:solidFill>
-            <a:srgbClr val="0C5230"/>
-          </a:solidFill>
-          <a:ln/>
-        </p:spPr>
-      </p:sp>
-      <p:pic>
-        <p:nvPicPr>
-          <p:cNvPr id="32" name="Image 9" descr="/home/user/suzuki-ceo/selfcafe-miraiya-trial-deck/assets/icons/LuBadgeCheck-pale.png">    </p:cNvPr>
-          <p:cNvPicPr>
-            <a:picLocks noChangeAspect="1"/>
-          </p:cNvPicPr>
-          <p:nvPr/>
-        </p:nvPicPr>
-        <p:blipFill>
-          <a:blip r:embed="rId10"/>
-          <a:stretch>
-            <a:fillRect/>
-          </a:stretch>
-        </p:blipFill>
-        <p:spPr>
-          <a:xfrm>
-            <a:off x="1007669" y="4992624"/>
-            <a:ext cx="402336" cy="402336"/>
-          </a:xfrm>
-          <a:prstGeom prst="rect">
-            <a:avLst/>
-          </a:prstGeom>
-        </p:spPr>
-      </p:pic>
-      <p:sp>
-        <p:nvSpPr>
-          <p:cNvPr id="33" name="Text 21"/>
-          <p:cNvSpPr/>
-          <p:nvPr/>
-        </p:nvSpPr>
-        <p:spPr>
-          <a:xfrm>
-            <a:off x="1574597" y="4718304"/>
-            <a:ext cx="9591142" cy="1005840"/>
-          </a:xfrm>
-          <a:prstGeom prst="rect">
-            <a:avLst/>
-          </a:prstGeom>
-          <a:noFill/>
-          <a:ln/>
-        </p:spPr>
-        <p:txBody>
-          <a:bodyPr wrap="square" lIns="0" tIns="0" rIns="0" bIns="0" rtlCol="0" anchor="ctr"/>
-          <a:lstStyle/>
-          <a:p>
-            <a:pPr indent="0" marL="0">
-              <a:lnSpc>
-                <a:spcPct val="125000"/>
-              </a:lnSpc>
-              <a:buNone/>
-            </a:pPr>
-            <a:r>
-              <a:rPr lang="en-US" sz="1400" b="1" dirty="0">
-                <a:solidFill>
-                  <a:srgbClr val="FFFFFF"/>
-                </a:solidFill>
-                <a:latin typeface="Yu Gothic" pitchFamily="34" charset="0"/>
-                <a:ea typeface="Yu Gothic" pitchFamily="34" charset="-122"/>
-                <a:cs typeface="Yu Gothic" pitchFamily="34" charset="-120"/>
-              </a:rPr>
-              <a:t>トライアル後は、基本そのまま残す形を想定しています。</a:t>
-            </a:r>
-            <a:endParaRPr lang="en-US" sz="1400" dirty="0"/>
-          </a:p>
-          <a:p>
-            <a:pPr indent="0" marL="0">
-              <a:lnSpc>
-                <a:spcPct val="125000"/>
-              </a:lnSpc>
-              <a:buNone/>
-            </a:pPr>
-            <a:r>
-              <a:rPr lang="en-US" sz="1100" dirty="0">
-                <a:solidFill>
-                  <a:srgbClr val="AFC2B8"/>
-                </a:solidFill>
-                <a:latin typeface="Yu Gothic" pitchFamily="34" charset="0"/>
-                <a:ea typeface="Yu Gothic" pitchFamily="34" charset="-122"/>
-                <a:cs typeface="Yu Gothic" pitchFamily="34" charset="-120"/>
-              </a:rPr>
-              <a:t>内装も什器も残るため、継続いただく場合は追加の工事なくそのまま運営を続けられます。</a:t>
-            </a:r>
-            <a:endParaRPr lang="en-US" sz="1400" dirty="0"/>
-          </a:p>
-        </p:txBody>
-      </p:sp>
-      <p:sp>
-        <p:nvSpPr>
-          <p:cNvPr id="34" name="Text 22"/>
-          <p:cNvSpPr/>
-          <p:nvPr/>
-        </p:nvSpPr>
-        <p:spPr>
-          <a:xfrm>
-            <a:off x="660197" y="5888736"/>
-            <a:ext cx="10871302" cy="182880"/>
-          </a:xfrm>
-          <a:prstGeom prst="rect">
-            <a:avLst/>
-          </a:prstGeom>
-          <a:noFill/>
-          <a:ln/>
-        </p:spPr>
-        <p:txBody>
-          <a:bodyPr wrap="square" lIns="0" tIns="0" rIns="0" bIns="0" rtlCol="0" anchor="ctr"/>
-          <a:lstStyle/>
-          <a:p>
-            <a:pPr indent="0" marL="0">
-              <a:buNone/>
-            </a:pPr>
-            <a:r>
-              <a:rPr lang="en-US" sz="850" dirty="0">
-                <a:solidFill>
-                  <a:srgbClr val="A8B0AA"/>
-                </a:solidFill>
-                <a:latin typeface="Yu Gothic" pitchFamily="34" charset="0"/>
-                <a:ea typeface="Yu Gothic" pitchFamily="34" charset="-122"/>
-                <a:cs typeface="Yu Gothic" pitchFamily="34" charset="-120"/>
-              </a:rPr>
-              <a:t>※ 撤去の範囲・時期は事前にお打ち合わせのうえ決定します。什器の再利用可否は現地確認時にご相談させてください。</a:t>
-            </a:r>
-            <a:endParaRPr lang="en-US" sz="850" dirty="0"/>
-          </a:p>
-        </p:txBody>
-      </p:sp>
-    </p:spTree>
-  </p:cSld>
-  <p:clrMapOvr>
-    <a:masterClrMapping/>
-  </p:clrMapOvr>
-</p:sld>
-</file>
-
 <file path=ppt/slides/slide5.xml><?xml version="1.0" encoding="utf-8"?>
 <p:sld xmlns:a="http://schemas.openxmlformats.org/drawingml/2006/main" xmlns:r="http://schemas.openxmlformats.org/officeDocument/2006/relationships" xmlns:p="http://schemas.openxmlformats.org/presentationml/2006/main">
   <p:cSld name="Slide 5">
@@ -6620,7 +6784,7 @@
                 <a:ea typeface="Yu Gothic" pitchFamily="34" charset="-122"/>
                 <a:cs typeface="Yu Gothic" pitchFamily="34" charset="-120"/>
               </a:rPr>
-              <a:t>   家具・什器の考え方</a:t>
+              <a:t>   終了時の扱い</a:t>
             </a:r>
             <a:endParaRPr lang="en-US" sz="1050" dirty="0"/>
           </a:p>
@@ -6659,7 +6823,7 @@
                 <a:ea typeface="Yu Gothic" pitchFamily="34" charset="-122"/>
                 <a:cs typeface="Yu Gothic" pitchFamily="34" charset="-120"/>
               </a:rPr>
-              <a:t>家具は御社ご所有のほうがよい、と判断しました。</a:t>
+              <a:t>原状回復は不要。撤去するのは当社の機器だけです。</a:t>
             </a:r>
             <a:endParaRPr lang="en-US" sz="2900" dirty="0"/>
           </a:p>
@@ -6698,7 +6862,7 @@
                 <a:ea typeface="Yu Gothic" pitchFamily="34" charset="-122"/>
                 <a:cs typeface="Yu Gothic" pitchFamily="34" charset="-120"/>
               </a:rPr>
-              <a:t>トライアル後もそのまま残す前提で考えると、御社の資産にしておくのが最も無駄がありません。</a:t>
+              <a:t>ご契約を終了される場合も、内装を元に戻していただく必要はありません。</a:t>
             </a:r>
             <a:endParaRPr lang="en-US" sz="1250" dirty="0"/>
           </a:p>
@@ -6761,7 +6925,7 @@
                 <a:ea typeface="Yu Gothic" pitchFamily="34" charset="-122"/>
                 <a:cs typeface="Yu Gothic" pitchFamily="34" charset="-120"/>
               </a:rPr>
-              <a:t>セルフカフェ × 未来屋書店 トライアル導入 特別条件</a:t>
+              <a:t>セルフカフェ × 未来屋書店 トライアル導入のご提案</a:t>
             </a:r>
             <a:endParaRPr lang="en-US" sz="900" dirty="0"/>
           </a:p>
@@ -6815,11 +6979,352 @@
         <p:spPr>
           <a:xfrm>
             <a:off x="660197" y="1651406"/>
-            <a:ext cx="3440887" cy="3017520"/>
+            <a:ext cx="5243627" cy="2926080"/>
           </a:xfrm>
           <a:prstGeom prst="roundRect">
             <a:avLst>
-              <a:gd name="adj" fmla="val 1818"/>
+              <a:gd name="adj" fmla="val 1875"/>
+            </a:avLst>
+          </a:prstGeom>
+          <a:solidFill>
+            <a:srgbClr val="F1F8F3"/>
+          </a:solidFill>
+          <a:ln w="9525">
+            <a:solidFill>
+              <a:srgbClr val="D2E7DA"/>
+            </a:solidFill>
+            <a:prstDash val="solid"/>
+          </a:ln>
+        </p:spPr>
+      </p:sp>
+      <p:pic>
+        <p:nvPicPr>
+          <p:cNvPr id="10" name="Image 1" descr="/home/user/suzuki-ceo/selfcafe-miraiya-trial-deck/assets/icons/LuHouse-green.png">    </p:cNvPr>
+          <p:cNvPicPr>
+            <a:picLocks noChangeAspect="1"/>
+          </p:cNvPicPr>
+          <p:nvPr/>
+        </p:nvPicPr>
+        <p:blipFill>
+          <a:blip r:embed="rId2"/>
+          <a:stretch>
+            <a:fillRect/>
+          </a:stretch>
+        </p:blipFill>
+        <p:spPr>
+          <a:xfrm>
+            <a:off x="934517" y="1889150"/>
+            <a:ext cx="329184" cy="329184"/>
+          </a:xfrm>
+          <a:prstGeom prst="rect">
+            <a:avLst/>
+          </a:prstGeom>
+        </p:spPr>
+      </p:pic>
+      <p:sp>
+        <p:nvSpPr>
+          <p:cNvPr id="11" name="Text 7"/>
+          <p:cNvSpPr/>
+          <p:nvPr/>
+        </p:nvSpPr>
+        <p:spPr>
+          <a:xfrm>
+            <a:off x="1391717" y="1834286"/>
+            <a:ext cx="4237787" cy="384048"/>
+          </a:xfrm>
+          <a:prstGeom prst="rect">
+            <a:avLst/>
+          </a:prstGeom>
+          <a:noFill/>
+          <a:ln/>
+        </p:spPr>
+        <p:txBody>
+          <a:bodyPr wrap="square" lIns="0" tIns="0" rIns="0" bIns="0" rtlCol="0" anchor="ctr"/>
+          <a:lstStyle/>
+          <a:p>
+            <a:pPr indent="0" marL="0">
+              <a:buNone/>
+            </a:pPr>
+            <a:r>
+              <a:rPr lang="en-US" sz="1400" b="1" dirty="0">
+                <a:solidFill>
+                  <a:srgbClr val="106838"/>
+                </a:solidFill>
+                <a:latin typeface="Yu Gothic" pitchFamily="34" charset="0"/>
+                <a:ea typeface="Yu Gothic" pitchFamily="34" charset="-122"/>
+                <a:cs typeface="Yu Gothic" pitchFamily="34" charset="-120"/>
+              </a:rPr>
+              <a:t>そのまま残るもの</a:t>
+            </a:r>
+            <a:endParaRPr lang="en-US" sz="1400" dirty="0"/>
+          </a:p>
+        </p:txBody>
+      </p:sp>
+      <p:sp>
+        <p:nvSpPr>
+          <p:cNvPr id="12" name="Shape 8"/>
+          <p:cNvSpPr/>
+          <p:nvPr/>
+        </p:nvSpPr>
+        <p:spPr>
+          <a:xfrm>
+            <a:off x="934517" y="2364638"/>
+            <a:ext cx="4694987" cy="10058"/>
+          </a:xfrm>
+          <a:prstGeom prst="rect">
+            <a:avLst/>
+          </a:prstGeom>
+          <a:solidFill>
+            <a:srgbClr val="D2E7DA"/>
+          </a:solidFill>
+          <a:ln/>
+        </p:spPr>
+      </p:sp>
+      <p:pic>
+        <p:nvPicPr>
+          <p:cNvPr id="13" name="Image 2" descr="/home/user/suzuki-ceo/selfcafe-miraiya-trial-deck/assets/icons/LuCheck-green.png">    </p:cNvPr>
+          <p:cNvPicPr>
+            <a:picLocks noChangeAspect="1"/>
+          </p:cNvPicPr>
+          <p:nvPr/>
+        </p:nvPicPr>
+        <p:blipFill>
+          <a:blip r:embed="rId3"/>
+          <a:stretch>
+            <a:fillRect/>
+          </a:stretch>
+        </p:blipFill>
+        <p:spPr>
+          <a:xfrm>
+            <a:off x="952805" y="2593238"/>
+            <a:ext cx="182880" cy="182880"/>
+          </a:xfrm>
+          <a:prstGeom prst="rect">
+            <a:avLst/>
+          </a:prstGeom>
+        </p:spPr>
+      </p:pic>
+      <p:sp>
+        <p:nvSpPr>
+          <p:cNvPr id="14" name="Text 9"/>
+          <p:cNvSpPr/>
+          <p:nvPr/>
+        </p:nvSpPr>
+        <p:spPr>
+          <a:xfrm>
+            <a:off x="1281989" y="2529230"/>
+            <a:ext cx="4329227" cy="310896"/>
+          </a:xfrm>
+          <a:prstGeom prst="rect">
+            <a:avLst/>
+          </a:prstGeom>
+          <a:noFill/>
+          <a:ln/>
+        </p:spPr>
+        <p:txBody>
+          <a:bodyPr wrap="square" lIns="0" tIns="0" rIns="0" bIns="0" rtlCol="0" anchor="ctr"/>
+          <a:lstStyle/>
+          <a:p>
+            <a:pPr indent="0" marL="0">
+              <a:buNone/>
+            </a:pPr>
+            <a:r>
+              <a:rPr lang="en-US" sz="1100" dirty="0">
+                <a:solidFill>
+                  <a:srgbClr val="0A3D23"/>
+                </a:solidFill>
+                <a:latin typeface="Yu Gothic" pitchFamily="34" charset="0"/>
+                <a:ea typeface="Yu Gothic" pitchFamily="34" charset="-122"/>
+                <a:cs typeface="Yu Gothic" pitchFamily="34" charset="-120"/>
+              </a:rPr>
+              <a:t>内装工事（造作・床・サイン）</a:t>
+            </a:r>
+            <a:endParaRPr lang="en-US" sz="1100" dirty="0"/>
+          </a:p>
+        </p:txBody>
+      </p:sp>
+      <p:pic>
+        <p:nvPicPr>
+          <p:cNvPr id="15" name="Image 3" descr="/home/user/suzuki-ceo/selfcafe-miraiya-trial-deck/assets/icons/LuCheck-green.png">    </p:cNvPr>
+          <p:cNvPicPr>
+            <a:picLocks noChangeAspect="1"/>
+          </p:cNvPicPr>
+          <p:nvPr/>
+        </p:nvPicPr>
+        <p:blipFill>
+          <a:blip r:embed="rId4"/>
+          <a:stretch>
+            <a:fillRect/>
+          </a:stretch>
+        </p:blipFill>
+        <p:spPr>
+          <a:xfrm>
+            <a:off x="952805" y="3013862"/>
+            <a:ext cx="182880" cy="182880"/>
+          </a:xfrm>
+          <a:prstGeom prst="rect">
+            <a:avLst/>
+          </a:prstGeom>
+        </p:spPr>
+      </p:pic>
+      <p:sp>
+        <p:nvSpPr>
+          <p:cNvPr id="16" name="Text 10"/>
+          <p:cNvSpPr/>
+          <p:nvPr/>
+        </p:nvSpPr>
+        <p:spPr>
+          <a:xfrm>
+            <a:off x="1281989" y="2949854"/>
+            <a:ext cx="4329227" cy="310896"/>
+          </a:xfrm>
+          <a:prstGeom prst="rect">
+            <a:avLst/>
+          </a:prstGeom>
+          <a:noFill/>
+          <a:ln/>
+        </p:spPr>
+        <p:txBody>
+          <a:bodyPr wrap="square" lIns="0" tIns="0" rIns="0" bIns="0" rtlCol="0" anchor="ctr"/>
+          <a:lstStyle/>
+          <a:p>
+            <a:pPr indent="0" marL="0">
+              <a:buNone/>
+            </a:pPr>
+            <a:r>
+              <a:rPr lang="en-US" sz="1100" dirty="0">
+                <a:solidFill>
+                  <a:srgbClr val="0A3D23"/>
+                </a:solidFill>
+                <a:latin typeface="Yu Gothic" pitchFamily="34" charset="0"/>
+                <a:ea typeface="Yu Gothic" pitchFamily="34" charset="-122"/>
+                <a:cs typeface="Yu Gothic" pitchFamily="34" charset="-120"/>
+              </a:rPr>
+              <a:t>家具・什器（テーブル・椅子・植栽 等）</a:t>
+            </a:r>
+            <a:endParaRPr lang="en-US" sz="1100" dirty="0"/>
+          </a:p>
+        </p:txBody>
+      </p:sp>
+      <p:pic>
+        <p:nvPicPr>
+          <p:cNvPr id="17" name="Image 4" descr="/home/user/suzuki-ceo/selfcafe-miraiya-trial-deck/assets/icons/LuCheck-green.png">    </p:cNvPr>
+          <p:cNvPicPr>
+            <a:picLocks noChangeAspect="1"/>
+          </p:cNvPicPr>
+          <p:nvPr/>
+        </p:nvPicPr>
+        <p:blipFill>
+          <a:blip r:embed="rId5"/>
+          <a:stretch>
+            <a:fillRect/>
+          </a:stretch>
+        </p:blipFill>
+        <p:spPr>
+          <a:xfrm>
+            <a:off x="952805" y="3434486"/>
+            <a:ext cx="182880" cy="182880"/>
+          </a:xfrm>
+          <a:prstGeom prst="rect">
+            <a:avLst/>
+          </a:prstGeom>
+        </p:spPr>
+      </p:pic>
+      <p:sp>
+        <p:nvSpPr>
+          <p:cNvPr id="18" name="Text 11"/>
+          <p:cNvSpPr/>
+          <p:nvPr/>
+        </p:nvSpPr>
+        <p:spPr>
+          <a:xfrm>
+            <a:off x="1281989" y="3370478"/>
+            <a:ext cx="4329227" cy="310896"/>
+          </a:xfrm>
+          <a:prstGeom prst="rect">
+            <a:avLst/>
+          </a:prstGeom>
+          <a:noFill/>
+          <a:ln/>
+        </p:spPr>
+        <p:txBody>
+          <a:bodyPr wrap="square" lIns="0" tIns="0" rIns="0" bIns="0" rtlCol="0" anchor="ctr"/>
+          <a:lstStyle/>
+          <a:p>
+            <a:pPr indent="0" marL="0">
+              <a:buNone/>
+            </a:pPr>
+            <a:r>
+              <a:rPr lang="en-US" sz="1100" dirty="0">
+                <a:solidFill>
+                  <a:srgbClr val="0A3D23"/>
+                </a:solidFill>
+                <a:latin typeface="Yu Gothic" pitchFamily="34" charset="0"/>
+                <a:ea typeface="Yu Gothic" pitchFamily="34" charset="-122"/>
+                <a:cs typeface="Yu Gothic" pitchFamily="34" charset="-120"/>
+              </a:rPr>
+              <a:t>書店側の売場・動線</a:t>
+            </a:r>
+            <a:endParaRPr lang="en-US" sz="1100" dirty="0"/>
+          </a:p>
+        </p:txBody>
+      </p:sp>
+      <p:sp>
+        <p:nvSpPr>
+          <p:cNvPr id="19" name="Text 12"/>
+          <p:cNvSpPr/>
+          <p:nvPr/>
+        </p:nvSpPr>
+        <p:spPr>
+          <a:xfrm>
+            <a:off x="934517" y="3919118"/>
+            <a:ext cx="4694987" cy="512064"/>
+          </a:xfrm>
+          <a:prstGeom prst="rect">
+            <a:avLst/>
+          </a:prstGeom>
+          <a:noFill/>
+          <a:ln/>
+        </p:spPr>
+        <p:txBody>
+          <a:bodyPr wrap="square" lIns="0" tIns="0" rIns="0" bIns="0" rtlCol="0" anchor="t"/>
+          <a:lstStyle/>
+          <a:p>
+            <a:pPr indent="0" marL="0">
+              <a:lnSpc>
+                <a:spcPct val="130000"/>
+              </a:lnSpc>
+              <a:buNone/>
+            </a:pPr>
+            <a:r>
+              <a:rPr lang="en-US" sz="950" dirty="0">
+                <a:solidFill>
+                  <a:srgbClr val="7E8882"/>
+                </a:solidFill>
+                <a:latin typeface="Yu Gothic" pitchFamily="34" charset="0"/>
+                <a:ea typeface="Yu Gothic" pitchFamily="34" charset="-122"/>
+                <a:cs typeface="Yu Gothic" pitchFamily="34" charset="-120"/>
+              </a:rPr>
+              <a:t>工事部分は当社負担で施工しますが、撤去はいたしません。</a:t>
+            </a:r>
+            <a:endParaRPr lang="en-US" sz="950" dirty="0"/>
+          </a:p>
+        </p:txBody>
+      </p:sp>
+      <p:sp>
+        <p:nvSpPr>
+          <p:cNvPr id="20" name="Shape 13"/>
+          <p:cNvSpPr/>
+          <p:nvPr/>
+        </p:nvSpPr>
+        <p:spPr>
+          <a:xfrm>
+            <a:off x="6287872" y="1651406"/>
+            <a:ext cx="5243627" cy="2926080"/>
+          </a:xfrm>
+          <a:prstGeom prst="roundRect">
+            <a:avLst>
+              <a:gd name="adj" fmla="val 1875"/>
             </a:avLst>
           </a:prstGeom>
           <a:solidFill>
@@ -6835,22 +7340,22 @@
       </p:sp>
       <p:pic>
         <p:nvPicPr>
-          <p:cNvPr id="10" name="Image 1" descr="/home/user/suzuki-ceo/selfcafe-miraiya-trial-deck/assets/icons/LuStore-green.png">    </p:cNvPr>
+          <p:cNvPr id="21" name="Image 5" descr="/home/user/suzuki-ceo/selfcafe-miraiya-trial-deck/assets/icons/LuMinus-green.png">    </p:cNvPr>
           <p:cNvPicPr>
             <a:picLocks noChangeAspect="1"/>
           </p:cNvPicPr>
           <p:nvPr/>
         </p:nvPicPr>
         <p:blipFill>
-          <a:blip r:embed="rId2"/>
+          <a:blip r:embed="rId6"/>
           <a:stretch>
             <a:fillRect/>
           </a:stretch>
         </p:blipFill>
         <p:spPr>
           <a:xfrm>
-            <a:off x="934517" y="1925726"/>
-            <a:ext cx="365760" cy="365760"/>
+            <a:off x="6562192" y="1889150"/>
+            <a:ext cx="329184" cy="329184"/>
           </a:xfrm>
           <a:prstGeom prst="rect">
             <a:avLst/>
@@ -6859,33 +7364,30 @@
       </p:pic>
       <p:sp>
         <p:nvSpPr>
-          <p:cNvPr id="11" name="Text 7"/>
-          <p:cNvSpPr/>
-          <p:nvPr/>
-        </p:nvSpPr>
-        <p:spPr>
-          <a:xfrm>
-            <a:off x="934517" y="2456078"/>
-            <a:ext cx="2892247" cy="548640"/>
-          </a:xfrm>
-          <a:prstGeom prst="rect">
-            <a:avLst/>
-          </a:prstGeom>
-          <a:noFill/>
-          <a:ln/>
-        </p:spPr>
-        <p:txBody>
-          <a:bodyPr wrap="square" lIns="0" tIns="0" rIns="0" bIns="0" rtlCol="0" anchor="t"/>
-          <a:lstStyle/>
-          <a:p>
-            <a:pPr indent="0" marL="0">
-              <a:lnSpc>
-                <a:spcPct val="120000"/>
-              </a:lnSpc>
-              <a:buNone/>
-            </a:pPr>
-            <a:r>
-              <a:rPr lang="en-US" sz="1300" b="1" dirty="0">
+          <p:cNvPr id="22" name="Text 14"/>
+          <p:cNvSpPr/>
+          <p:nvPr/>
+        </p:nvSpPr>
+        <p:spPr>
+          <a:xfrm>
+            <a:off x="7019392" y="1834286"/>
+            <a:ext cx="4237787" cy="384048"/>
+          </a:xfrm>
+          <a:prstGeom prst="rect">
+            <a:avLst/>
+          </a:prstGeom>
+          <a:noFill/>
+          <a:ln/>
+        </p:spPr>
+        <p:txBody>
+          <a:bodyPr wrap="square" lIns="0" tIns="0" rIns="0" bIns="0" rtlCol="0" anchor="ctr"/>
+          <a:lstStyle/>
+          <a:p>
+            <a:pPr indent="0" marL="0">
+              <a:buNone/>
+            </a:pPr>
+            <a:r>
+              <a:rPr lang="en-US" sz="1400" b="1" dirty="0">
                 <a:solidFill>
                   <a:srgbClr val="0A3D23"/>
                 </a:solidFill>
@@ -6893,22 +7395,22 @@
                 <a:ea typeface="Yu Gothic" pitchFamily="34" charset="-122"/>
                 <a:cs typeface="Yu Gothic" pitchFamily="34" charset="-120"/>
               </a:rPr>
-              <a:t>そのまま使い続けられる</a:t>
-            </a:r>
-            <a:endParaRPr lang="en-US" sz="1300" dirty="0"/>
-          </a:p>
-        </p:txBody>
-      </p:sp>
-      <p:sp>
-        <p:nvSpPr>
-          <p:cNvPr id="12" name="Shape 8"/>
-          <p:cNvSpPr/>
-          <p:nvPr/>
-        </p:nvSpPr>
-        <p:spPr>
-          <a:xfrm>
-            <a:off x="934517" y="3096158"/>
-            <a:ext cx="2892247" cy="10058"/>
+              <a:t>当社が撤去するもの</a:t>
+            </a:r>
+            <a:endParaRPr lang="en-US" sz="1400" dirty="0"/>
+          </a:p>
+        </p:txBody>
+      </p:sp>
+      <p:sp>
+        <p:nvSpPr>
+          <p:cNvPr id="23" name="Shape 15"/>
+          <p:cNvSpPr/>
+          <p:nvPr/>
+        </p:nvSpPr>
+        <p:spPr>
+          <a:xfrm>
+            <a:off x="6562192" y="2364638"/>
+            <a:ext cx="4694987" cy="10058"/>
           </a:xfrm>
           <a:prstGeom prst="rect">
             <a:avLst/>
@@ -6919,93 +7421,24 @@
           <a:ln/>
         </p:spPr>
       </p:sp>
-      <p:sp>
-        <p:nvSpPr>
-          <p:cNvPr id="13" name="Text 9"/>
-          <p:cNvSpPr/>
-          <p:nvPr/>
-        </p:nvSpPr>
-        <p:spPr>
-          <a:xfrm>
-            <a:off x="934517" y="3242462"/>
-            <a:ext cx="2892247" cy="1280160"/>
-          </a:xfrm>
-          <a:prstGeom prst="rect">
-            <a:avLst/>
-          </a:prstGeom>
-          <a:noFill/>
-          <a:ln/>
-        </p:spPr>
-        <p:txBody>
-          <a:bodyPr wrap="square" lIns="0" tIns="0" rIns="0" bIns="0" rtlCol="0" anchor="t"/>
-          <a:lstStyle/>
-          <a:p>
-            <a:pPr indent="0" marL="0">
-              <a:lnSpc>
-                <a:spcPct val="140000"/>
-              </a:lnSpc>
-              <a:buNone/>
-            </a:pPr>
-            <a:r>
-              <a:rPr lang="en-US" sz="1000" dirty="0">
-                <a:solidFill>
-                  <a:srgbClr val="4B5550"/>
-                </a:solidFill>
-                <a:latin typeface="Yu Gothic" pitchFamily="34" charset="0"/>
-                <a:ea typeface="Yu Gothic" pitchFamily="34" charset="-122"/>
-                <a:cs typeface="Yu Gothic" pitchFamily="34" charset="-120"/>
-              </a:rPr>
-              <a:t>トライアル後に継続される場合、什器の入れ替えも買い直しも発生しません。設えを変えずに運営を続けられます。</a:t>
-            </a:r>
-            <a:endParaRPr lang="en-US" sz="1000" dirty="0"/>
-          </a:p>
-        </p:txBody>
-      </p:sp>
-      <p:sp>
-        <p:nvSpPr>
-          <p:cNvPr id="14" name="Shape 10"/>
-          <p:cNvSpPr/>
-          <p:nvPr/>
-        </p:nvSpPr>
-        <p:spPr>
-          <a:xfrm>
-            <a:off x="4375404" y="1651406"/>
-            <a:ext cx="3440887" cy="3017520"/>
-          </a:xfrm>
-          <a:prstGeom prst="roundRect">
-            <a:avLst>
-              <a:gd name="adj" fmla="val 1818"/>
-            </a:avLst>
-          </a:prstGeom>
-          <a:solidFill>
-            <a:srgbClr val="FFFFFF"/>
-          </a:solidFill>
-          <a:ln w="9525">
-            <a:solidFill>
-              <a:srgbClr val="EFEAE0"/>
-            </a:solidFill>
-            <a:prstDash val="solid"/>
-          </a:ln>
-        </p:spPr>
-      </p:sp>
       <p:pic>
         <p:nvPicPr>
-          <p:cNvPr id="15" name="Image 2" descr="/home/user/suzuki-ceo/selfcafe-miraiya-trial-deck/assets/icons/LuShieldCheck-green.png">    </p:cNvPr>
+          <p:cNvPr id="24" name="Image 6" descr="/home/user/suzuki-ceo/selfcafe-miraiya-trial-deck/assets/icons/LuX-muted.png">    </p:cNvPr>
           <p:cNvPicPr>
             <a:picLocks noChangeAspect="1"/>
           </p:cNvPicPr>
           <p:nvPr/>
         </p:nvPicPr>
         <p:blipFill>
-          <a:blip r:embed="rId3"/>
+          <a:blip r:embed="rId7"/>
           <a:stretch>
             <a:fillRect/>
           </a:stretch>
         </p:blipFill>
         <p:spPr>
           <a:xfrm>
-            <a:off x="4649724" y="1925726"/>
-            <a:ext cx="365760" cy="365760"/>
+            <a:off x="6580480" y="2593238"/>
+            <a:ext cx="182880" cy="182880"/>
           </a:xfrm>
           <a:prstGeom prst="rect">
             <a:avLst/>
@@ -7014,33 +7447,30 @@
       </p:pic>
       <p:sp>
         <p:nvSpPr>
-          <p:cNvPr id="16" name="Text 11"/>
-          <p:cNvSpPr/>
-          <p:nvPr/>
-        </p:nvSpPr>
-        <p:spPr>
-          <a:xfrm>
-            <a:off x="4649724" y="2456078"/>
-            <a:ext cx="2892247" cy="548640"/>
-          </a:xfrm>
-          <a:prstGeom prst="rect">
-            <a:avLst/>
-          </a:prstGeom>
-          <a:noFill/>
-          <a:ln/>
-        </p:spPr>
-        <p:txBody>
-          <a:bodyPr wrap="square" lIns="0" tIns="0" rIns="0" bIns="0" rtlCol="0" anchor="t"/>
-          <a:lstStyle/>
-          <a:p>
-            <a:pPr indent="0" marL="0">
-              <a:lnSpc>
-                <a:spcPct val="120000"/>
-              </a:lnSpc>
-              <a:buNone/>
-            </a:pPr>
-            <a:r>
-              <a:rPr lang="en-US" sz="1300" b="1" dirty="0">
+          <p:cNvPr id="25" name="Text 16"/>
+          <p:cNvSpPr/>
+          <p:nvPr/>
+        </p:nvSpPr>
+        <p:spPr>
+          <a:xfrm>
+            <a:off x="6909664" y="2529230"/>
+            <a:ext cx="4329227" cy="310896"/>
+          </a:xfrm>
+          <a:prstGeom prst="rect">
+            <a:avLst/>
+          </a:prstGeom>
+          <a:noFill/>
+          <a:ln/>
+        </p:spPr>
+        <p:txBody>
+          <a:bodyPr wrap="square" lIns="0" tIns="0" rIns="0" bIns="0" rtlCol="0" anchor="ctr"/>
+          <a:lstStyle/>
+          <a:p>
+            <a:pPr indent="0" marL="0">
+              <a:buNone/>
+            </a:pPr>
+            <a:r>
+              <a:rPr lang="en-US" sz="1100" dirty="0">
                 <a:solidFill>
                   <a:srgbClr val="0A3D23"/>
                 </a:solidFill>
@@ -7048,119 +7478,30 @@
                 <a:ea typeface="Yu Gothic" pitchFamily="34" charset="-122"/>
                 <a:cs typeface="Yu Gothic" pitchFamily="34" charset="-120"/>
               </a:rPr>
-              <a:t>御社の資産として残る</a:t>
-            </a:r>
-            <a:endParaRPr lang="en-US" sz="1300" dirty="0"/>
-          </a:p>
-        </p:txBody>
-      </p:sp>
-      <p:sp>
-        <p:nvSpPr>
-          <p:cNvPr id="17" name="Shape 12"/>
-          <p:cNvSpPr/>
-          <p:nvPr/>
-        </p:nvSpPr>
-        <p:spPr>
-          <a:xfrm>
-            <a:off x="4649724" y="3096158"/>
-            <a:ext cx="2892247" cy="10058"/>
-          </a:xfrm>
-          <a:prstGeom prst="rect">
-            <a:avLst/>
-          </a:prstGeom>
-          <a:solidFill>
-            <a:srgbClr val="EFEAE0"/>
-          </a:solidFill>
-          <a:ln/>
-        </p:spPr>
-      </p:sp>
-      <p:sp>
-        <p:nvSpPr>
-          <p:cNvPr id="18" name="Text 13"/>
-          <p:cNvSpPr/>
-          <p:nvPr/>
-        </p:nvSpPr>
-        <p:spPr>
-          <a:xfrm>
-            <a:off x="4649724" y="3242462"/>
-            <a:ext cx="2892247" cy="1280160"/>
-          </a:xfrm>
-          <a:prstGeom prst="rect">
-            <a:avLst/>
-          </a:prstGeom>
-          <a:noFill/>
-          <a:ln/>
-        </p:spPr>
-        <p:txBody>
-          <a:bodyPr wrap="square" lIns="0" tIns="0" rIns="0" bIns="0" rtlCol="0" anchor="t"/>
-          <a:lstStyle/>
-          <a:p>
-            <a:pPr indent="0" marL="0">
-              <a:lnSpc>
-                <a:spcPct val="140000"/>
-              </a:lnSpc>
-              <a:buNone/>
-            </a:pPr>
-            <a:r>
-              <a:rPr lang="en-US" sz="1000" dirty="0">
-                <a:solidFill>
-                  <a:srgbClr val="4B5550"/>
-                </a:solidFill>
-                <a:latin typeface="Yu Gothic" pitchFamily="34" charset="0"/>
-                <a:ea typeface="Yu Gothic" pitchFamily="34" charset="-122"/>
-                <a:cs typeface="Yu Gothic" pitchFamily="34" charset="-120"/>
-              </a:rPr>
-              <a:t>当社所有にすると、契約が終わる際に引き上げか買取かの整理が必要になります。はじめから御社ご所有であれば、その論点自体がなくなります。</a:t>
-            </a:r>
-            <a:endParaRPr lang="en-US" sz="1000" dirty="0"/>
-          </a:p>
-        </p:txBody>
-      </p:sp>
-      <p:sp>
-        <p:nvSpPr>
-          <p:cNvPr id="19" name="Shape 14"/>
-          <p:cNvSpPr/>
-          <p:nvPr/>
-        </p:nvSpPr>
-        <p:spPr>
-          <a:xfrm>
-            <a:off x="8090611" y="1651406"/>
-            <a:ext cx="3440887" cy="3017520"/>
-          </a:xfrm>
-          <a:prstGeom prst="roundRect">
-            <a:avLst>
-              <a:gd name="adj" fmla="val 1818"/>
-            </a:avLst>
-          </a:prstGeom>
-          <a:solidFill>
-            <a:srgbClr val="FFFFFF"/>
-          </a:solidFill>
-          <a:ln w="9525">
-            <a:solidFill>
-              <a:srgbClr val="EFEAE0"/>
-            </a:solidFill>
-            <a:prstDash val="solid"/>
-          </a:ln>
-        </p:spPr>
+              <a:t>ドリンクマシン</a:t>
+            </a:r>
+            <a:endParaRPr lang="en-US" sz="1100" dirty="0"/>
+          </a:p>
+        </p:txBody>
       </p:sp>
       <p:pic>
         <p:nvPicPr>
-          <p:cNvPr id="20" name="Image 3" descr="/home/user/suzuki-ceo/selfcafe-miraiya-trial-deck/assets/icons/LuPenLine-green.png">    </p:cNvPr>
+          <p:cNvPr id="26" name="Image 7" descr="/home/user/suzuki-ceo/selfcafe-miraiya-trial-deck/assets/icons/LuX-muted.png">    </p:cNvPr>
           <p:cNvPicPr>
             <a:picLocks noChangeAspect="1"/>
           </p:cNvPicPr>
           <p:nvPr/>
         </p:nvPicPr>
         <p:blipFill>
-          <a:blip r:embed="rId4"/>
+          <a:blip r:embed="rId8"/>
           <a:stretch>
             <a:fillRect/>
           </a:stretch>
         </p:blipFill>
         <p:spPr>
           <a:xfrm>
-            <a:off x="8364931" y="1925726"/>
-            <a:ext cx="365760" cy="365760"/>
+            <a:off x="6580480" y="3013862"/>
+            <a:ext cx="182880" cy="182880"/>
           </a:xfrm>
           <a:prstGeom prst="rect">
             <a:avLst/>
@@ -7169,33 +7510,30 @@
       </p:pic>
       <p:sp>
         <p:nvSpPr>
-          <p:cNvPr id="21" name="Text 15"/>
-          <p:cNvSpPr/>
-          <p:nvPr/>
-        </p:nvSpPr>
-        <p:spPr>
-          <a:xfrm>
-            <a:off x="8364931" y="2456078"/>
-            <a:ext cx="2892247" cy="548640"/>
-          </a:xfrm>
-          <a:prstGeom prst="rect">
-            <a:avLst/>
-          </a:prstGeom>
-          <a:noFill/>
-          <a:ln/>
-        </p:spPr>
-        <p:txBody>
-          <a:bodyPr wrap="square" lIns="0" tIns="0" rIns="0" bIns="0" rtlCol="0" anchor="t"/>
-          <a:lstStyle/>
-          <a:p>
-            <a:pPr indent="0" marL="0">
-              <a:lnSpc>
-                <a:spcPct val="120000"/>
-              </a:lnSpc>
-              <a:buNone/>
-            </a:pPr>
-            <a:r>
-              <a:rPr lang="en-US" sz="1300" b="1" dirty="0">
+          <p:cNvPr id="27" name="Text 17"/>
+          <p:cNvSpPr/>
+          <p:nvPr/>
+        </p:nvSpPr>
+        <p:spPr>
+          <a:xfrm>
+            <a:off x="6909664" y="2949854"/>
+            <a:ext cx="4329227" cy="310896"/>
+          </a:xfrm>
+          <a:prstGeom prst="rect">
+            <a:avLst/>
+          </a:prstGeom>
+          <a:noFill/>
+          <a:ln/>
+        </p:spPr>
+        <p:txBody>
+          <a:bodyPr wrap="square" lIns="0" tIns="0" rIns="0" bIns="0" rtlCol="0" anchor="ctr"/>
+          <a:lstStyle/>
+          <a:p>
+            <a:pPr indent="0" marL="0">
+              <a:buNone/>
+            </a:pPr>
+            <a:r>
+              <a:rPr lang="en-US" sz="1100" dirty="0">
                 <a:solidFill>
                   <a:srgbClr val="0A3D23"/>
                 </a:solidFill>
@@ -7203,119 +7541,30 @@
                 <a:ea typeface="Yu Gothic" pitchFamily="34" charset="-122"/>
                 <a:cs typeface="Yu Gothic" pitchFamily="34" charset="-120"/>
               </a:rPr>
-              <a:t>仕様を御社で選べる</a:t>
-            </a:r>
-            <a:endParaRPr lang="en-US" sz="1300" dirty="0"/>
-          </a:p>
-        </p:txBody>
-      </p:sp>
-      <p:sp>
-        <p:nvSpPr>
-          <p:cNvPr id="22" name="Shape 16"/>
-          <p:cNvSpPr/>
-          <p:nvPr/>
-        </p:nvSpPr>
-        <p:spPr>
-          <a:xfrm>
-            <a:off x="8364931" y="3096158"/>
-            <a:ext cx="2892247" cy="10058"/>
-          </a:xfrm>
-          <a:prstGeom prst="rect">
-            <a:avLst/>
-          </a:prstGeom>
-          <a:solidFill>
-            <a:srgbClr val="EFEAE0"/>
-          </a:solidFill>
-          <a:ln/>
-        </p:spPr>
-      </p:sp>
-      <p:sp>
-        <p:nvSpPr>
-          <p:cNvPr id="23" name="Text 17"/>
-          <p:cNvSpPr/>
-          <p:nvPr/>
-        </p:nvSpPr>
-        <p:spPr>
-          <a:xfrm>
-            <a:off x="8364931" y="3242462"/>
-            <a:ext cx="2892247" cy="1280160"/>
-          </a:xfrm>
-          <a:prstGeom prst="rect">
-            <a:avLst/>
-          </a:prstGeom>
-          <a:noFill/>
-          <a:ln/>
-        </p:spPr>
-        <p:txBody>
-          <a:bodyPr wrap="square" lIns="0" tIns="0" rIns="0" bIns="0" rtlCol="0" anchor="t"/>
-          <a:lstStyle/>
-          <a:p>
-            <a:pPr indent="0" marL="0">
-              <a:lnSpc>
-                <a:spcPct val="140000"/>
-              </a:lnSpc>
-              <a:buNone/>
-            </a:pPr>
-            <a:r>
-              <a:rPr lang="en-US" sz="1000" dirty="0">
-                <a:solidFill>
-                  <a:srgbClr val="4B5550"/>
-                </a:solidFill>
-                <a:latin typeface="Yu Gothic" pitchFamily="34" charset="0"/>
-                <a:ea typeface="Yu Gothic" pitchFamily="34" charset="-122"/>
-                <a:cs typeface="Yu Gothic" pitchFamily="34" charset="-120"/>
-              </a:rPr>
-              <a:t>テーブル・椅子・植栽は店舗の雰囲気を大きく左右します。書店の売場に合わせて御社側でお選びいただけます。</a:t>
-            </a:r>
-            <a:endParaRPr lang="en-US" sz="1000" dirty="0"/>
-          </a:p>
-        </p:txBody>
-      </p:sp>
-      <p:sp>
-        <p:nvSpPr>
-          <p:cNvPr id="24" name="Shape 18"/>
-          <p:cNvSpPr/>
-          <p:nvPr/>
-        </p:nvSpPr>
-        <p:spPr>
-          <a:xfrm>
-            <a:off x="660197" y="4809744"/>
-            <a:ext cx="10871302" cy="914400"/>
-          </a:xfrm>
-          <a:prstGeom prst="roundRect">
-            <a:avLst>
-              <a:gd name="adj" fmla="val 6000"/>
-            </a:avLst>
-          </a:prstGeom>
-          <a:solidFill>
-            <a:srgbClr val="F1F8F3"/>
-          </a:solidFill>
-          <a:ln w="9525">
-            <a:solidFill>
-              <a:srgbClr val="D2E7DA"/>
-            </a:solidFill>
-            <a:prstDash val="solid"/>
-          </a:ln>
-        </p:spPr>
+              <a:t>決済端末</a:t>
+            </a:r>
+            <a:endParaRPr lang="en-US" sz="1100" dirty="0"/>
+          </a:p>
+        </p:txBody>
       </p:sp>
       <p:pic>
         <p:nvPicPr>
-          <p:cNvPr id="25" name="Image 4" descr="/home/user/suzuki-ceo/selfcafe-miraiya-trial-deck/assets/icons/LuMessagesSquare-green.png">    </p:cNvPr>
+          <p:cNvPr id="28" name="Image 8" descr="/home/user/suzuki-ceo/selfcafe-miraiya-trial-deck/assets/icons/LuX-muted.png">    </p:cNvPr>
           <p:cNvPicPr>
             <a:picLocks noChangeAspect="1"/>
           </p:cNvPicPr>
           <p:nvPr/>
         </p:nvPicPr>
         <p:blipFill>
-          <a:blip r:embed="rId5"/>
+          <a:blip r:embed="rId9"/>
           <a:stretch>
             <a:fillRect/>
           </a:stretch>
         </p:blipFill>
         <p:spPr>
           <a:xfrm>
-            <a:off x="971093" y="5084064"/>
-            <a:ext cx="365760" cy="365760"/>
+            <a:off x="6580480" y="3434486"/>
+            <a:ext cx="182880" cy="182880"/>
           </a:xfrm>
           <a:prstGeom prst="rect">
             <a:avLst/>
@@ -7324,14 +7573,14 @@
       </p:pic>
       <p:sp>
         <p:nvSpPr>
-          <p:cNvPr id="26" name="Text 19"/>
-          <p:cNvSpPr/>
-          <p:nvPr/>
-        </p:nvSpPr>
-        <p:spPr>
-          <a:xfrm>
-            <a:off x="1501445" y="4809744"/>
-            <a:ext cx="9682582" cy="914400"/>
+          <p:cNvPr id="29" name="Text 18"/>
+          <p:cNvSpPr/>
+          <p:nvPr/>
+        </p:nvSpPr>
+        <p:spPr>
+          <a:xfrm>
+            <a:off x="6909664" y="3370478"/>
+            <a:ext cx="4329227" cy="310896"/>
           </a:xfrm>
           <a:prstGeom prst="rect">
             <a:avLst/>
@@ -7344,13 +7593,10 @@
           <a:lstStyle/>
           <a:p>
             <a:pPr indent="0" marL="0">
-              <a:lnSpc>
-                <a:spcPct val="135000"/>
-              </a:lnSpc>
-              <a:buNone/>
-            </a:pPr>
-            <a:r>
-              <a:rPr lang="en-US" sz="1050" dirty="0">
+              <a:buNone/>
+            </a:pPr>
+            <a:r>
+              <a:rPr lang="en-US" sz="1100" dirty="0">
                 <a:solidFill>
                   <a:srgbClr val="0A3D23"/>
                 </a:solidFill>
@@ -7358,46 +7604,196 @@
                 <a:ea typeface="Yu Gothic" pitchFamily="34" charset="-122"/>
                 <a:cs typeface="Yu Gothic" pitchFamily="34" charset="-120"/>
               </a:rPr>
-              <a:t>当社側で家具・什器を手配することも可能です。その場合は当社の資産となるため、トライアル終了時に引き上げ・買取のご相談が必要になります。ご希望があればその形でもお受けします。</a:t>
-            </a:r>
-            <a:endParaRPr lang="en-US" sz="1050" dirty="0"/>
-          </a:p>
-        </p:txBody>
-      </p:sp>
-      <p:sp>
-        <p:nvSpPr>
-          <p:cNvPr id="27" name="Text 20"/>
-          <p:cNvSpPr/>
-          <p:nvPr/>
-        </p:nvSpPr>
-        <p:spPr>
-          <a:xfrm>
-            <a:off x="660197" y="5888736"/>
-            <a:ext cx="10871302" cy="182880"/>
-          </a:xfrm>
-          <a:prstGeom prst="rect">
-            <a:avLst/>
-          </a:prstGeom>
-          <a:noFill/>
-          <a:ln/>
-        </p:spPr>
-        <p:txBody>
-          <a:bodyPr wrap="square" lIns="0" tIns="0" rIns="0" bIns="0" rtlCol="0" anchor="ctr"/>
-          <a:lstStyle/>
-          <a:p>
-            <a:pPr indent="0" marL="0">
-              <a:buNone/>
-            </a:pPr>
-            <a:r>
-              <a:rPr lang="en-US" sz="850" dirty="0">
-                <a:solidFill>
-                  <a:srgbClr val="A8B0AA"/>
+              <a:t>防犯カメラ・通信機器</a:t>
+            </a:r>
+            <a:endParaRPr lang="en-US" sz="1100" dirty="0"/>
+          </a:p>
+        </p:txBody>
+      </p:sp>
+      <p:sp>
+        <p:nvSpPr>
+          <p:cNvPr id="30" name="Text 19"/>
+          <p:cNvSpPr/>
+          <p:nvPr/>
+        </p:nvSpPr>
+        <p:spPr>
+          <a:xfrm>
+            <a:off x="6562192" y="3919118"/>
+            <a:ext cx="4694987" cy="512064"/>
+          </a:xfrm>
+          <a:prstGeom prst="rect">
+            <a:avLst/>
+          </a:prstGeom>
+          <a:noFill/>
+          <a:ln/>
+        </p:spPr>
+        <p:txBody>
+          <a:bodyPr wrap="square" lIns="0" tIns="0" rIns="0" bIns="0" rtlCol="0" anchor="t"/>
+          <a:lstStyle/>
+          <a:p>
+            <a:pPr indent="0" marL="0">
+              <a:lnSpc>
+                <a:spcPct val="130000"/>
+              </a:lnSpc>
+              <a:buNone/>
+            </a:pPr>
+            <a:r>
+              <a:rPr lang="en-US" sz="950" dirty="0">
+                <a:solidFill>
+                  <a:srgbClr val="7E8882"/>
                 </a:solidFill>
                 <a:latin typeface="Yu Gothic" pitchFamily="34" charset="0"/>
                 <a:ea typeface="Yu Gothic" pitchFamily="34" charset="-122"/>
                 <a:cs typeface="Yu Gothic" pitchFamily="34" charset="-120"/>
               </a:rPr>
-              <a:t>※ 什器の概算費用は、レイアウト確定後にお見積りをお出しします。既存什器を再利用できる場合は、その分ご負担が減ります。</a:t>
+              <a:t>撤去費用は当社が負担します。跡の補修も当社で対応します。</a:t>
+            </a:r>
+            <a:endParaRPr lang="en-US" sz="950" dirty="0"/>
+          </a:p>
+        </p:txBody>
+      </p:sp>
+      <p:sp>
+        <p:nvSpPr>
+          <p:cNvPr id="31" name="Shape 20"/>
+          <p:cNvSpPr/>
+          <p:nvPr/>
+        </p:nvSpPr>
+        <p:spPr>
+          <a:xfrm>
+            <a:off x="660197" y="4718304"/>
+            <a:ext cx="10871302" cy="1005840"/>
+          </a:xfrm>
+          <a:prstGeom prst="roundRect">
+            <a:avLst>
+              <a:gd name="adj" fmla="val 5455"/>
+            </a:avLst>
+          </a:prstGeom>
+          <a:solidFill>
+            <a:srgbClr val="0C5230"/>
+          </a:solidFill>
+          <a:ln/>
+        </p:spPr>
+      </p:sp>
+      <p:pic>
+        <p:nvPicPr>
+          <p:cNvPr id="32" name="Image 9" descr="/home/user/suzuki-ceo/selfcafe-miraiya-trial-deck/assets/icons/LuBadgeCheck-pale.png">    </p:cNvPr>
+          <p:cNvPicPr>
+            <a:picLocks noChangeAspect="1"/>
+          </p:cNvPicPr>
+          <p:nvPr/>
+        </p:nvPicPr>
+        <p:blipFill>
+          <a:blip r:embed="rId10"/>
+          <a:stretch>
+            <a:fillRect/>
+          </a:stretch>
+        </p:blipFill>
+        <p:spPr>
+          <a:xfrm>
+            <a:off x="1007669" y="4992624"/>
+            <a:ext cx="402336" cy="402336"/>
+          </a:xfrm>
+          <a:prstGeom prst="rect">
+            <a:avLst/>
+          </a:prstGeom>
+        </p:spPr>
+      </p:pic>
+      <p:sp>
+        <p:nvSpPr>
+          <p:cNvPr id="33" name="Text 21"/>
+          <p:cNvSpPr/>
+          <p:nvPr/>
+        </p:nvSpPr>
+        <p:spPr>
+          <a:xfrm>
+            <a:off x="1574597" y="4718304"/>
+            <a:ext cx="9591142" cy="1005840"/>
+          </a:xfrm>
+          <a:prstGeom prst="rect">
+            <a:avLst/>
+          </a:prstGeom>
+          <a:noFill/>
+          <a:ln/>
+        </p:spPr>
+        <p:txBody>
+          <a:bodyPr wrap="square" lIns="0" tIns="0" rIns="0" bIns="0" rtlCol="0" anchor="ctr"/>
+          <a:lstStyle/>
+          <a:p>
+            <a:pPr indent="0" marL="0">
+              <a:lnSpc>
+                <a:spcPct val="125000"/>
+              </a:lnSpc>
+              <a:buNone/>
+            </a:pPr>
+            <a:r>
+              <a:rPr lang="en-US" sz="1400" b="1" dirty="0">
+                <a:solidFill>
+                  <a:srgbClr val="FFFFFF"/>
+                </a:solidFill>
+                <a:latin typeface="Yu Gothic" pitchFamily="34" charset="0"/>
+                <a:ea typeface="Yu Gothic" pitchFamily="34" charset="-122"/>
+                <a:cs typeface="Yu Gothic" pitchFamily="34" charset="-120"/>
+              </a:rPr>
+              <a:t>トライアル後は、基本そのまま残す形を想定しています。</a:t>
+            </a:r>
+            <a:endParaRPr lang="en-US" sz="1400" dirty="0"/>
+          </a:p>
+          <a:p>
+            <a:pPr indent="0" marL="0">
+              <a:lnSpc>
+                <a:spcPct val="125000"/>
+              </a:lnSpc>
+              <a:buNone/>
+            </a:pPr>
+            <a:r>
+              <a:rPr lang="en-US" sz="1100" dirty="0">
+                <a:solidFill>
+                  <a:srgbClr val="AFC2B8"/>
+                </a:solidFill>
+                <a:latin typeface="Yu Gothic" pitchFamily="34" charset="0"/>
+                <a:ea typeface="Yu Gothic" pitchFamily="34" charset="-122"/>
+                <a:cs typeface="Yu Gothic" pitchFamily="34" charset="-120"/>
+              </a:rPr>
+              <a:t>内装も什器も残るため、継続いただく場合は追加の工事なくそのまま運営を続けられます。</a:t>
+            </a:r>
+            <a:endParaRPr lang="en-US" sz="1400" dirty="0"/>
+          </a:p>
+        </p:txBody>
+      </p:sp>
+      <p:sp>
+        <p:nvSpPr>
+          <p:cNvPr id="34" name="Text 22"/>
+          <p:cNvSpPr/>
+          <p:nvPr/>
+        </p:nvSpPr>
+        <p:spPr>
+          <a:xfrm>
+            <a:off x="660197" y="5888736"/>
+            <a:ext cx="10871302" cy="182880"/>
+          </a:xfrm>
+          <a:prstGeom prst="rect">
+            <a:avLst/>
+          </a:prstGeom>
+          <a:noFill/>
+          <a:ln/>
+        </p:spPr>
+        <p:txBody>
+          <a:bodyPr wrap="square" lIns="0" tIns="0" rIns="0" bIns="0" rtlCol="0" anchor="ctr"/>
+          <a:lstStyle/>
+          <a:p>
+            <a:pPr indent="0" marL="0">
+              <a:buNone/>
+            </a:pPr>
+            <a:r>
+              <a:rPr lang="en-US" sz="850" dirty="0">
+                <a:solidFill>
+                  <a:srgbClr val="A8B0AA"/>
+                </a:solidFill>
+                <a:latin typeface="Yu Gothic" pitchFamily="34" charset="0"/>
+                <a:ea typeface="Yu Gothic" pitchFamily="34" charset="-122"/>
+                <a:cs typeface="Yu Gothic" pitchFamily="34" charset="-120"/>
+              </a:rPr>
+              <a:t>※ 撤去の範囲・時期は事前にお打ち合わせのうえ決定します。什器の再利用可否は現地確認時にご相談させてください。</a:t>
             </a:r>
             <a:endParaRPr lang="en-US" sz="850" dirty="0"/>
           </a:p>
@@ -7499,7 +7895,7 @@
                 <a:ea typeface="Yu Gothic" pitchFamily="34" charset="-122"/>
                 <a:cs typeface="Yu Gothic" pitchFamily="34" charset="-120"/>
               </a:rPr>
-              <a:t>   今後の進め方</a:t>
+              <a:t>   家具・什器の考え方</a:t>
             </a:r>
             <a:endParaRPr lang="en-US" sz="1050" dirty="0"/>
           </a:p>
@@ -7538,7 +7934,7 @@
                 <a:ea typeface="Yu Gothic" pitchFamily="34" charset="-122"/>
                 <a:cs typeface="Yu Gothic" pitchFamily="34" charset="-120"/>
               </a:rPr>
-              <a:t>現地確認から、最短2〜3ヶ月で開始できます。</a:t>
+              <a:t>家具は御社ご所有のほうがよい、と判断しました。</a:t>
             </a:r>
             <a:endParaRPr lang="en-US" sz="2900" dirty="0"/>
           </a:p>
@@ -7577,7 +7973,7 @@
                 <a:ea typeface="Yu Gothic" pitchFamily="34" charset="-122"/>
                 <a:cs typeface="Yu Gothic" pitchFamily="34" charset="-120"/>
               </a:rPr>
-              <a:t>まずは対象店舗と期間のすり合わせ、現地確認からお願いできればと存じます。</a:t>
+              <a:t>トライアル後もそのまま残す前提で考えると、御社の資産にしておくのが最も無駄がありません。</a:t>
             </a:r>
             <a:endParaRPr lang="en-US" sz="1250" dirty="0"/>
           </a:p>
@@ -7640,7 +8036,7 @@
                 <a:ea typeface="Yu Gothic" pitchFamily="34" charset="-122"/>
                 <a:cs typeface="Yu Gothic" pitchFamily="34" charset="-120"/>
               </a:rPr>
-              <a:t>セルフカフェ × 未来屋書店 トライアル導入 特別条件</a:t>
+              <a:t>セルフカフェ × 未来屋書店 トライアル導入のご提案</a:t>
             </a:r>
             <a:endParaRPr lang="en-US" sz="900" dirty="0"/>
           </a:p>
@@ -7680,6 +8076,885 @@
                 <a:cs typeface="Arial" pitchFamily="34" charset="-120"/>
               </a:rPr>
               <a:t>06</a:t>
+            </a:r>
+            <a:endParaRPr lang="en-US" sz="1000" dirty="0"/>
+          </a:p>
+        </p:txBody>
+      </p:sp>
+      <p:sp>
+        <p:nvSpPr>
+          <p:cNvPr id="9" name="Shape 6"/>
+          <p:cNvSpPr/>
+          <p:nvPr/>
+        </p:nvSpPr>
+        <p:spPr>
+          <a:xfrm>
+            <a:off x="660197" y="1651406"/>
+            <a:ext cx="3440887" cy="3017520"/>
+          </a:xfrm>
+          <a:prstGeom prst="roundRect">
+            <a:avLst>
+              <a:gd name="adj" fmla="val 1818"/>
+            </a:avLst>
+          </a:prstGeom>
+          <a:solidFill>
+            <a:srgbClr val="FFFFFF"/>
+          </a:solidFill>
+          <a:ln w="9525">
+            <a:solidFill>
+              <a:srgbClr val="EFEAE0"/>
+            </a:solidFill>
+            <a:prstDash val="solid"/>
+          </a:ln>
+        </p:spPr>
+      </p:sp>
+      <p:pic>
+        <p:nvPicPr>
+          <p:cNvPr id="10" name="Image 1" descr="/home/user/suzuki-ceo/selfcafe-miraiya-trial-deck/assets/icons/LuStore-green.png">    </p:cNvPr>
+          <p:cNvPicPr>
+            <a:picLocks noChangeAspect="1"/>
+          </p:cNvPicPr>
+          <p:nvPr/>
+        </p:nvPicPr>
+        <p:blipFill>
+          <a:blip r:embed="rId2"/>
+          <a:stretch>
+            <a:fillRect/>
+          </a:stretch>
+        </p:blipFill>
+        <p:spPr>
+          <a:xfrm>
+            <a:off x="934517" y="1925726"/>
+            <a:ext cx="365760" cy="365760"/>
+          </a:xfrm>
+          <a:prstGeom prst="rect">
+            <a:avLst/>
+          </a:prstGeom>
+        </p:spPr>
+      </p:pic>
+      <p:sp>
+        <p:nvSpPr>
+          <p:cNvPr id="11" name="Text 7"/>
+          <p:cNvSpPr/>
+          <p:nvPr/>
+        </p:nvSpPr>
+        <p:spPr>
+          <a:xfrm>
+            <a:off x="934517" y="2456078"/>
+            <a:ext cx="2892247" cy="548640"/>
+          </a:xfrm>
+          <a:prstGeom prst="rect">
+            <a:avLst/>
+          </a:prstGeom>
+          <a:noFill/>
+          <a:ln/>
+        </p:spPr>
+        <p:txBody>
+          <a:bodyPr wrap="square" lIns="0" tIns="0" rIns="0" bIns="0" rtlCol="0" anchor="t"/>
+          <a:lstStyle/>
+          <a:p>
+            <a:pPr indent="0" marL="0">
+              <a:lnSpc>
+                <a:spcPct val="120000"/>
+              </a:lnSpc>
+              <a:buNone/>
+            </a:pPr>
+            <a:r>
+              <a:rPr lang="en-US" sz="1300" b="1" dirty="0">
+                <a:solidFill>
+                  <a:srgbClr val="0A3D23"/>
+                </a:solidFill>
+                <a:latin typeface="Yu Gothic" pitchFamily="34" charset="0"/>
+                <a:ea typeface="Yu Gothic" pitchFamily="34" charset="-122"/>
+                <a:cs typeface="Yu Gothic" pitchFamily="34" charset="-120"/>
+              </a:rPr>
+              <a:t>そのまま使い続けられる</a:t>
+            </a:r>
+            <a:endParaRPr lang="en-US" sz="1300" dirty="0"/>
+          </a:p>
+        </p:txBody>
+      </p:sp>
+      <p:sp>
+        <p:nvSpPr>
+          <p:cNvPr id="12" name="Shape 8"/>
+          <p:cNvSpPr/>
+          <p:nvPr/>
+        </p:nvSpPr>
+        <p:spPr>
+          <a:xfrm>
+            <a:off x="934517" y="3096158"/>
+            <a:ext cx="2892247" cy="10058"/>
+          </a:xfrm>
+          <a:prstGeom prst="rect">
+            <a:avLst/>
+          </a:prstGeom>
+          <a:solidFill>
+            <a:srgbClr val="EFEAE0"/>
+          </a:solidFill>
+          <a:ln/>
+        </p:spPr>
+      </p:sp>
+      <p:sp>
+        <p:nvSpPr>
+          <p:cNvPr id="13" name="Text 9"/>
+          <p:cNvSpPr/>
+          <p:nvPr/>
+        </p:nvSpPr>
+        <p:spPr>
+          <a:xfrm>
+            <a:off x="934517" y="3242462"/>
+            <a:ext cx="2892247" cy="1280160"/>
+          </a:xfrm>
+          <a:prstGeom prst="rect">
+            <a:avLst/>
+          </a:prstGeom>
+          <a:noFill/>
+          <a:ln/>
+        </p:spPr>
+        <p:txBody>
+          <a:bodyPr wrap="square" lIns="0" tIns="0" rIns="0" bIns="0" rtlCol="0" anchor="t"/>
+          <a:lstStyle/>
+          <a:p>
+            <a:pPr indent="0" marL="0">
+              <a:lnSpc>
+                <a:spcPct val="140000"/>
+              </a:lnSpc>
+              <a:buNone/>
+            </a:pPr>
+            <a:r>
+              <a:rPr lang="en-US" sz="1000" dirty="0">
+                <a:solidFill>
+                  <a:srgbClr val="4B5550"/>
+                </a:solidFill>
+                <a:latin typeface="Yu Gothic" pitchFamily="34" charset="0"/>
+                <a:ea typeface="Yu Gothic" pitchFamily="34" charset="-122"/>
+                <a:cs typeface="Yu Gothic" pitchFamily="34" charset="-120"/>
+              </a:rPr>
+              <a:t>トライアル後に継続される場合、什器の入れ替えも買い直しも発生しません。設えを変えずに運営を続けられます。</a:t>
+            </a:r>
+            <a:endParaRPr lang="en-US" sz="1000" dirty="0"/>
+          </a:p>
+        </p:txBody>
+      </p:sp>
+      <p:sp>
+        <p:nvSpPr>
+          <p:cNvPr id="14" name="Shape 10"/>
+          <p:cNvSpPr/>
+          <p:nvPr/>
+        </p:nvSpPr>
+        <p:spPr>
+          <a:xfrm>
+            <a:off x="4375404" y="1651406"/>
+            <a:ext cx="3440887" cy="3017520"/>
+          </a:xfrm>
+          <a:prstGeom prst="roundRect">
+            <a:avLst>
+              <a:gd name="adj" fmla="val 1818"/>
+            </a:avLst>
+          </a:prstGeom>
+          <a:solidFill>
+            <a:srgbClr val="FFFFFF"/>
+          </a:solidFill>
+          <a:ln w="9525">
+            <a:solidFill>
+              <a:srgbClr val="EFEAE0"/>
+            </a:solidFill>
+            <a:prstDash val="solid"/>
+          </a:ln>
+        </p:spPr>
+      </p:sp>
+      <p:pic>
+        <p:nvPicPr>
+          <p:cNvPr id="15" name="Image 2" descr="/home/user/suzuki-ceo/selfcafe-miraiya-trial-deck/assets/icons/LuShieldCheck-green.png">    </p:cNvPr>
+          <p:cNvPicPr>
+            <a:picLocks noChangeAspect="1"/>
+          </p:cNvPicPr>
+          <p:nvPr/>
+        </p:nvPicPr>
+        <p:blipFill>
+          <a:blip r:embed="rId3"/>
+          <a:stretch>
+            <a:fillRect/>
+          </a:stretch>
+        </p:blipFill>
+        <p:spPr>
+          <a:xfrm>
+            <a:off x="4649724" y="1925726"/>
+            <a:ext cx="365760" cy="365760"/>
+          </a:xfrm>
+          <a:prstGeom prst="rect">
+            <a:avLst/>
+          </a:prstGeom>
+        </p:spPr>
+      </p:pic>
+      <p:sp>
+        <p:nvSpPr>
+          <p:cNvPr id="16" name="Text 11"/>
+          <p:cNvSpPr/>
+          <p:nvPr/>
+        </p:nvSpPr>
+        <p:spPr>
+          <a:xfrm>
+            <a:off x="4649724" y="2456078"/>
+            <a:ext cx="2892247" cy="548640"/>
+          </a:xfrm>
+          <a:prstGeom prst="rect">
+            <a:avLst/>
+          </a:prstGeom>
+          <a:noFill/>
+          <a:ln/>
+        </p:spPr>
+        <p:txBody>
+          <a:bodyPr wrap="square" lIns="0" tIns="0" rIns="0" bIns="0" rtlCol="0" anchor="t"/>
+          <a:lstStyle/>
+          <a:p>
+            <a:pPr indent="0" marL="0">
+              <a:lnSpc>
+                <a:spcPct val="120000"/>
+              </a:lnSpc>
+              <a:buNone/>
+            </a:pPr>
+            <a:r>
+              <a:rPr lang="en-US" sz="1300" b="1" dirty="0">
+                <a:solidFill>
+                  <a:srgbClr val="0A3D23"/>
+                </a:solidFill>
+                <a:latin typeface="Yu Gothic" pitchFamily="34" charset="0"/>
+                <a:ea typeface="Yu Gothic" pitchFamily="34" charset="-122"/>
+                <a:cs typeface="Yu Gothic" pitchFamily="34" charset="-120"/>
+              </a:rPr>
+              <a:t>御社の資産として残る</a:t>
+            </a:r>
+            <a:endParaRPr lang="en-US" sz="1300" dirty="0"/>
+          </a:p>
+        </p:txBody>
+      </p:sp>
+      <p:sp>
+        <p:nvSpPr>
+          <p:cNvPr id="17" name="Shape 12"/>
+          <p:cNvSpPr/>
+          <p:nvPr/>
+        </p:nvSpPr>
+        <p:spPr>
+          <a:xfrm>
+            <a:off x="4649724" y="3096158"/>
+            <a:ext cx="2892247" cy="10058"/>
+          </a:xfrm>
+          <a:prstGeom prst="rect">
+            <a:avLst/>
+          </a:prstGeom>
+          <a:solidFill>
+            <a:srgbClr val="EFEAE0"/>
+          </a:solidFill>
+          <a:ln/>
+        </p:spPr>
+      </p:sp>
+      <p:sp>
+        <p:nvSpPr>
+          <p:cNvPr id="18" name="Text 13"/>
+          <p:cNvSpPr/>
+          <p:nvPr/>
+        </p:nvSpPr>
+        <p:spPr>
+          <a:xfrm>
+            <a:off x="4649724" y="3242462"/>
+            <a:ext cx="2892247" cy="1280160"/>
+          </a:xfrm>
+          <a:prstGeom prst="rect">
+            <a:avLst/>
+          </a:prstGeom>
+          <a:noFill/>
+          <a:ln/>
+        </p:spPr>
+        <p:txBody>
+          <a:bodyPr wrap="square" lIns="0" tIns="0" rIns="0" bIns="0" rtlCol="0" anchor="t"/>
+          <a:lstStyle/>
+          <a:p>
+            <a:pPr indent="0" marL="0">
+              <a:lnSpc>
+                <a:spcPct val="140000"/>
+              </a:lnSpc>
+              <a:buNone/>
+            </a:pPr>
+            <a:r>
+              <a:rPr lang="en-US" sz="1000" dirty="0">
+                <a:solidFill>
+                  <a:srgbClr val="4B5550"/>
+                </a:solidFill>
+                <a:latin typeface="Yu Gothic" pitchFamily="34" charset="0"/>
+                <a:ea typeface="Yu Gothic" pitchFamily="34" charset="-122"/>
+                <a:cs typeface="Yu Gothic" pitchFamily="34" charset="-120"/>
+              </a:rPr>
+              <a:t>当社所有にすると、契約が終わる際に引き上げか買取かの整理が必要になります。はじめから御社ご所有であれば、その論点自体がなくなります。</a:t>
+            </a:r>
+            <a:endParaRPr lang="en-US" sz="1000" dirty="0"/>
+          </a:p>
+        </p:txBody>
+      </p:sp>
+      <p:sp>
+        <p:nvSpPr>
+          <p:cNvPr id="19" name="Shape 14"/>
+          <p:cNvSpPr/>
+          <p:nvPr/>
+        </p:nvSpPr>
+        <p:spPr>
+          <a:xfrm>
+            <a:off x="8090611" y="1651406"/>
+            <a:ext cx="3440887" cy="3017520"/>
+          </a:xfrm>
+          <a:prstGeom prst="roundRect">
+            <a:avLst>
+              <a:gd name="adj" fmla="val 1818"/>
+            </a:avLst>
+          </a:prstGeom>
+          <a:solidFill>
+            <a:srgbClr val="FFFFFF"/>
+          </a:solidFill>
+          <a:ln w="9525">
+            <a:solidFill>
+              <a:srgbClr val="EFEAE0"/>
+            </a:solidFill>
+            <a:prstDash val="solid"/>
+          </a:ln>
+        </p:spPr>
+      </p:sp>
+      <p:pic>
+        <p:nvPicPr>
+          <p:cNvPr id="20" name="Image 3" descr="/home/user/suzuki-ceo/selfcafe-miraiya-trial-deck/assets/icons/LuPenLine-green.png">    </p:cNvPr>
+          <p:cNvPicPr>
+            <a:picLocks noChangeAspect="1"/>
+          </p:cNvPicPr>
+          <p:nvPr/>
+        </p:nvPicPr>
+        <p:blipFill>
+          <a:blip r:embed="rId4"/>
+          <a:stretch>
+            <a:fillRect/>
+          </a:stretch>
+        </p:blipFill>
+        <p:spPr>
+          <a:xfrm>
+            <a:off x="8364931" y="1925726"/>
+            <a:ext cx="365760" cy="365760"/>
+          </a:xfrm>
+          <a:prstGeom prst="rect">
+            <a:avLst/>
+          </a:prstGeom>
+        </p:spPr>
+      </p:pic>
+      <p:sp>
+        <p:nvSpPr>
+          <p:cNvPr id="21" name="Text 15"/>
+          <p:cNvSpPr/>
+          <p:nvPr/>
+        </p:nvSpPr>
+        <p:spPr>
+          <a:xfrm>
+            <a:off x="8364931" y="2456078"/>
+            <a:ext cx="2892247" cy="548640"/>
+          </a:xfrm>
+          <a:prstGeom prst="rect">
+            <a:avLst/>
+          </a:prstGeom>
+          <a:noFill/>
+          <a:ln/>
+        </p:spPr>
+        <p:txBody>
+          <a:bodyPr wrap="square" lIns="0" tIns="0" rIns="0" bIns="0" rtlCol="0" anchor="t"/>
+          <a:lstStyle/>
+          <a:p>
+            <a:pPr indent="0" marL="0">
+              <a:lnSpc>
+                <a:spcPct val="120000"/>
+              </a:lnSpc>
+              <a:buNone/>
+            </a:pPr>
+            <a:r>
+              <a:rPr lang="en-US" sz="1300" b="1" dirty="0">
+                <a:solidFill>
+                  <a:srgbClr val="0A3D23"/>
+                </a:solidFill>
+                <a:latin typeface="Yu Gothic" pitchFamily="34" charset="0"/>
+                <a:ea typeface="Yu Gothic" pitchFamily="34" charset="-122"/>
+                <a:cs typeface="Yu Gothic" pitchFamily="34" charset="-120"/>
+              </a:rPr>
+              <a:t>仕様を御社で選べる</a:t>
+            </a:r>
+            <a:endParaRPr lang="en-US" sz="1300" dirty="0"/>
+          </a:p>
+        </p:txBody>
+      </p:sp>
+      <p:sp>
+        <p:nvSpPr>
+          <p:cNvPr id="22" name="Shape 16"/>
+          <p:cNvSpPr/>
+          <p:nvPr/>
+        </p:nvSpPr>
+        <p:spPr>
+          <a:xfrm>
+            <a:off x="8364931" y="3096158"/>
+            <a:ext cx="2892247" cy="10058"/>
+          </a:xfrm>
+          <a:prstGeom prst="rect">
+            <a:avLst/>
+          </a:prstGeom>
+          <a:solidFill>
+            <a:srgbClr val="EFEAE0"/>
+          </a:solidFill>
+          <a:ln/>
+        </p:spPr>
+      </p:sp>
+      <p:sp>
+        <p:nvSpPr>
+          <p:cNvPr id="23" name="Text 17"/>
+          <p:cNvSpPr/>
+          <p:nvPr/>
+        </p:nvSpPr>
+        <p:spPr>
+          <a:xfrm>
+            <a:off x="8364931" y="3242462"/>
+            <a:ext cx="2892247" cy="1280160"/>
+          </a:xfrm>
+          <a:prstGeom prst="rect">
+            <a:avLst/>
+          </a:prstGeom>
+          <a:noFill/>
+          <a:ln/>
+        </p:spPr>
+        <p:txBody>
+          <a:bodyPr wrap="square" lIns="0" tIns="0" rIns="0" bIns="0" rtlCol="0" anchor="t"/>
+          <a:lstStyle/>
+          <a:p>
+            <a:pPr indent="0" marL="0">
+              <a:lnSpc>
+                <a:spcPct val="140000"/>
+              </a:lnSpc>
+              <a:buNone/>
+            </a:pPr>
+            <a:r>
+              <a:rPr lang="en-US" sz="1000" dirty="0">
+                <a:solidFill>
+                  <a:srgbClr val="4B5550"/>
+                </a:solidFill>
+                <a:latin typeface="Yu Gothic" pitchFamily="34" charset="0"/>
+                <a:ea typeface="Yu Gothic" pitchFamily="34" charset="-122"/>
+                <a:cs typeface="Yu Gothic" pitchFamily="34" charset="-120"/>
+              </a:rPr>
+              <a:t>テーブル・椅子・植栽は店舗の雰囲気を大きく左右します。書店の売場に合わせて御社側でお選びいただけます。</a:t>
+            </a:r>
+            <a:endParaRPr lang="en-US" sz="1000" dirty="0"/>
+          </a:p>
+        </p:txBody>
+      </p:sp>
+      <p:sp>
+        <p:nvSpPr>
+          <p:cNvPr id="24" name="Shape 18"/>
+          <p:cNvSpPr/>
+          <p:nvPr/>
+        </p:nvSpPr>
+        <p:spPr>
+          <a:xfrm>
+            <a:off x="660197" y="4809744"/>
+            <a:ext cx="10871302" cy="914400"/>
+          </a:xfrm>
+          <a:prstGeom prst="roundRect">
+            <a:avLst>
+              <a:gd name="adj" fmla="val 6000"/>
+            </a:avLst>
+          </a:prstGeom>
+          <a:solidFill>
+            <a:srgbClr val="F1F8F3"/>
+          </a:solidFill>
+          <a:ln w="9525">
+            <a:solidFill>
+              <a:srgbClr val="D2E7DA"/>
+            </a:solidFill>
+            <a:prstDash val="solid"/>
+          </a:ln>
+        </p:spPr>
+      </p:sp>
+      <p:pic>
+        <p:nvPicPr>
+          <p:cNvPr id="25" name="Image 4" descr="/home/user/suzuki-ceo/selfcafe-miraiya-trial-deck/assets/icons/LuMessagesSquare-green.png">    </p:cNvPr>
+          <p:cNvPicPr>
+            <a:picLocks noChangeAspect="1"/>
+          </p:cNvPicPr>
+          <p:nvPr/>
+        </p:nvPicPr>
+        <p:blipFill>
+          <a:blip r:embed="rId5"/>
+          <a:stretch>
+            <a:fillRect/>
+          </a:stretch>
+        </p:blipFill>
+        <p:spPr>
+          <a:xfrm>
+            <a:off x="971093" y="5084064"/>
+            <a:ext cx="365760" cy="365760"/>
+          </a:xfrm>
+          <a:prstGeom prst="rect">
+            <a:avLst/>
+          </a:prstGeom>
+        </p:spPr>
+      </p:pic>
+      <p:sp>
+        <p:nvSpPr>
+          <p:cNvPr id="26" name="Text 19"/>
+          <p:cNvSpPr/>
+          <p:nvPr/>
+        </p:nvSpPr>
+        <p:spPr>
+          <a:xfrm>
+            <a:off x="1501445" y="4809744"/>
+            <a:ext cx="9682582" cy="914400"/>
+          </a:xfrm>
+          <a:prstGeom prst="rect">
+            <a:avLst/>
+          </a:prstGeom>
+          <a:noFill/>
+          <a:ln/>
+        </p:spPr>
+        <p:txBody>
+          <a:bodyPr wrap="square" lIns="0" tIns="0" rIns="0" bIns="0" rtlCol="0" anchor="ctr"/>
+          <a:lstStyle/>
+          <a:p>
+            <a:pPr indent="0" marL="0">
+              <a:lnSpc>
+                <a:spcPct val="135000"/>
+              </a:lnSpc>
+              <a:buNone/>
+            </a:pPr>
+            <a:r>
+              <a:rPr lang="en-US" sz="1050" dirty="0">
+                <a:solidFill>
+                  <a:srgbClr val="0A3D23"/>
+                </a:solidFill>
+                <a:latin typeface="Yu Gothic" pitchFamily="34" charset="0"/>
+                <a:ea typeface="Yu Gothic" pitchFamily="34" charset="-122"/>
+                <a:cs typeface="Yu Gothic" pitchFamily="34" charset="-120"/>
+              </a:rPr>
+              <a:t>当社側で家具・什器を手配することも可能です。その場合は当社の資産となるため、トライアル終了時に引き上げ・買取のご相談が必要になります。ご希望があればその形でもお受けします。</a:t>
+            </a:r>
+            <a:endParaRPr lang="en-US" sz="1050" dirty="0"/>
+          </a:p>
+        </p:txBody>
+      </p:sp>
+      <p:sp>
+        <p:nvSpPr>
+          <p:cNvPr id="27" name="Text 20"/>
+          <p:cNvSpPr/>
+          <p:nvPr/>
+        </p:nvSpPr>
+        <p:spPr>
+          <a:xfrm>
+            <a:off x="660197" y="5888736"/>
+            <a:ext cx="10871302" cy="182880"/>
+          </a:xfrm>
+          <a:prstGeom prst="rect">
+            <a:avLst/>
+          </a:prstGeom>
+          <a:noFill/>
+          <a:ln/>
+        </p:spPr>
+        <p:txBody>
+          <a:bodyPr wrap="square" lIns="0" tIns="0" rIns="0" bIns="0" rtlCol="0" anchor="ctr"/>
+          <a:lstStyle/>
+          <a:p>
+            <a:pPr indent="0" marL="0">
+              <a:buNone/>
+            </a:pPr>
+            <a:r>
+              <a:rPr lang="en-US" sz="850" dirty="0">
+                <a:solidFill>
+                  <a:srgbClr val="A8B0AA"/>
+                </a:solidFill>
+                <a:latin typeface="Yu Gothic" pitchFamily="34" charset="0"/>
+                <a:ea typeface="Yu Gothic" pitchFamily="34" charset="-122"/>
+                <a:cs typeface="Yu Gothic" pitchFamily="34" charset="-120"/>
+              </a:rPr>
+              <a:t>※ 什器の概算費用は、レイアウト確定後にお見積りをお出しします。既存什器を再利用できる場合は、その分ご負担が減ります。</a:t>
+            </a:r>
+            <a:endParaRPr lang="en-US" sz="850" dirty="0"/>
+          </a:p>
+        </p:txBody>
+      </p:sp>
+    </p:spTree>
+  </p:cSld>
+  <p:clrMapOvr>
+    <a:masterClrMapping/>
+  </p:clrMapOvr>
+</p:sld>
+</file>
+
+<file path=ppt/slides/slide7.xml><?xml version="1.0" encoding="utf-8"?>
+<p:sld xmlns:a="http://schemas.openxmlformats.org/drawingml/2006/main" xmlns:r="http://schemas.openxmlformats.org/officeDocument/2006/relationships" xmlns:p="http://schemas.openxmlformats.org/presentationml/2006/main">
+  <p:cSld name="Slide 7">
+    <p:bg>
+      <p:bgPr>
+        <a:solidFill>
+          <a:srgbClr val="FFFDF7"/>
+        </a:solidFill>
+      </p:bgPr>
+    </p:bg>
+    <p:spTree>
+      <p:nvGrpSpPr>
+        <p:cNvPr id="1" name=""/>
+        <p:cNvGrpSpPr/>
+        <p:nvPr/>
+      </p:nvGrpSpPr>
+      <p:grpSpPr>
+        <a:xfrm>
+          <a:off x="0" y="0"/>
+          <a:ext cx="0" cy="0"/>
+          <a:chOff x="0" y="0"/>
+          <a:chExt cx="0" cy="0"/>
+        </a:xfrm>
+      </p:grpSpPr>
+      <p:sp>
+        <p:nvSpPr>
+          <p:cNvPr id="2" name="Shape 0"/>
+          <p:cNvSpPr/>
+          <p:nvPr/>
+        </p:nvSpPr>
+        <p:spPr>
+          <a:xfrm>
+            <a:off x="660197" y="545897"/>
+            <a:ext cx="202997" cy="25603"/>
+          </a:xfrm>
+          <a:prstGeom prst="rect">
+            <a:avLst/>
+          </a:prstGeom>
+          <a:solidFill>
+            <a:srgbClr val="106838"/>
+          </a:solidFill>
+          <a:ln/>
+        </p:spPr>
+      </p:sp>
+      <p:sp>
+        <p:nvSpPr>
+          <p:cNvPr id="3" name="Text 1"/>
+          <p:cNvSpPr/>
+          <p:nvPr/>
+        </p:nvSpPr>
+        <p:spPr>
+          <a:xfrm>
+            <a:off x="952805" y="444398"/>
+            <a:ext cx="6400800" cy="177394"/>
+          </a:xfrm>
+          <a:prstGeom prst="rect">
+            <a:avLst/>
+          </a:prstGeom>
+          <a:noFill/>
+          <a:ln/>
+        </p:spPr>
+        <p:txBody>
+          <a:bodyPr wrap="square" lIns="0" tIns="0" rIns="0" bIns="0" rtlCol="0" anchor="ctr"/>
+          <a:lstStyle/>
+          <a:p>
+            <a:pPr indent="0" marL="0">
+              <a:buNone/>
+            </a:pPr>
+            <a:r>
+              <a:rPr lang="en-US" sz="1050" b="1" dirty="0">
+                <a:solidFill>
+                  <a:srgbClr val="A8761F"/>
+                </a:solidFill>
+                <a:latin typeface="Arial" pitchFamily="34" charset="0"/>
+                <a:ea typeface="Arial" pitchFamily="34" charset="-122"/>
+                <a:cs typeface="Arial" pitchFamily="34" charset="-120"/>
+              </a:rPr>
+              <a:t>06</a:t>
+            </a:r>
+            <a:r>
+              <a:rPr lang="en-US" sz="1050" b="1" dirty="0">
+                <a:solidFill>
+                  <a:srgbClr val="1B8149"/>
+                </a:solidFill>
+                <a:latin typeface="Yu Gothic" pitchFamily="34" charset="0"/>
+                <a:ea typeface="Yu Gothic" pitchFamily="34" charset="-122"/>
+                <a:cs typeface="Yu Gothic" pitchFamily="34" charset="-120"/>
+              </a:rPr>
+              <a:t>   今後の進め方</a:t>
+            </a:r>
+            <a:endParaRPr lang="en-US" sz="1050" dirty="0"/>
+          </a:p>
+        </p:txBody>
+      </p:sp>
+      <p:sp>
+        <p:nvSpPr>
+          <p:cNvPr id="4" name="Text 2"/>
+          <p:cNvSpPr/>
+          <p:nvPr/>
+        </p:nvSpPr>
+        <p:spPr>
+          <a:xfrm>
+            <a:off x="660197" y="660197"/>
+            <a:ext cx="8889797" cy="508406"/>
+          </a:xfrm>
+          <a:prstGeom prst="rect">
+            <a:avLst/>
+          </a:prstGeom>
+          <a:noFill/>
+          <a:ln/>
+        </p:spPr>
+        <p:txBody>
+          <a:bodyPr wrap="square" lIns="0" tIns="0" rIns="0" bIns="0" rtlCol="0" anchor="ctr"/>
+          <a:lstStyle/>
+          <a:p>
+            <a:pPr indent="0" marL="0">
+              <a:buNone/>
+            </a:pPr>
+            <a:r>
+              <a:rPr lang="en-US" sz="2900" b="1" dirty="0">
+                <a:solidFill>
+                  <a:srgbClr val="0A3D23"/>
+                </a:solidFill>
+                <a:latin typeface="Yu Gothic" pitchFamily="34" charset="0"/>
+                <a:ea typeface="Yu Gothic" pitchFamily="34" charset="-122"/>
+                <a:cs typeface="Yu Gothic" pitchFamily="34" charset="-120"/>
+              </a:rPr>
+              <a:t>現地確認から、最短2〜3ヶ月で開始できます。</a:t>
+            </a:r>
+            <a:endParaRPr lang="en-US" sz="2900" dirty="0"/>
+          </a:p>
+        </p:txBody>
+      </p:sp>
+      <p:sp>
+        <p:nvSpPr>
+          <p:cNvPr id="5" name="Text 3"/>
+          <p:cNvSpPr/>
+          <p:nvPr/>
+        </p:nvSpPr>
+        <p:spPr>
+          <a:xfrm>
+            <a:off x="660197" y="1308506"/>
+            <a:ext cx="10032797" cy="228600"/>
+          </a:xfrm>
+          <a:prstGeom prst="rect">
+            <a:avLst/>
+          </a:prstGeom>
+          <a:noFill/>
+          <a:ln/>
+        </p:spPr>
+        <p:txBody>
+          <a:bodyPr wrap="square" lIns="0" tIns="0" rIns="0" bIns="0" rtlCol="0" anchor="ctr"/>
+          <a:lstStyle/>
+          <a:p>
+            <a:pPr indent="0" marL="0">
+              <a:buNone/>
+            </a:pPr>
+            <a:r>
+              <a:rPr lang="en-US" sz="1250" dirty="0">
+                <a:solidFill>
+                  <a:srgbClr val="4B5550"/>
+                </a:solidFill>
+                <a:latin typeface="Yu Gothic" pitchFamily="34" charset="0"/>
+                <a:ea typeface="Yu Gothic" pitchFamily="34" charset="-122"/>
+                <a:cs typeface="Yu Gothic" pitchFamily="34" charset="-120"/>
+              </a:rPr>
+              <a:t>まずは対象店舗と期間のすり合わせ、現地確認からお願いできればと存じます。</a:t>
+            </a:r>
+            <a:endParaRPr lang="en-US" sz="1250" dirty="0"/>
+          </a:p>
+        </p:txBody>
+      </p:sp>
+      <p:pic>
+        <p:nvPicPr>
+          <p:cNvPr id="6" name="Image 0" descr="/home/user/suzuki-ceo/selfcafe-miraiya-trial-deck/assets/logo-green.png">    </p:cNvPr>
+          <p:cNvPicPr>
+            <a:picLocks noChangeAspect="1"/>
+          </p:cNvPicPr>
+          <p:nvPr/>
+        </p:nvPicPr>
+        <p:blipFill>
+          <a:blip r:embed="rId1"/>
+          <a:stretch>
+            <a:fillRect/>
+          </a:stretch>
+        </p:blipFill>
+        <p:spPr>
+          <a:xfrm>
+            <a:off x="9855403" y="482803"/>
+            <a:ext cx="1676095" cy="238658"/>
+          </a:xfrm>
+          <a:prstGeom prst="rect">
+            <a:avLst/>
+          </a:prstGeom>
+        </p:spPr>
+      </p:pic>
+      <p:sp>
+        <p:nvSpPr>
+          <p:cNvPr id="7" name="Text 4"/>
+          <p:cNvSpPr/>
+          <p:nvPr/>
+        </p:nvSpPr>
+        <p:spPr>
+          <a:xfrm>
+            <a:off x="660197" y="6476695"/>
+            <a:ext cx="5080406" cy="152705"/>
+          </a:xfrm>
+          <a:prstGeom prst="rect">
+            <a:avLst/>
+          </a:prstGeom>
+          <a:noFill/>
+          <a:ln/>
+        </p:spPr>
+        <p:txBody>
+          <a:bodyPr wrap="square" lIns="0" tIns="0" rIns="0" bIns="0" rtlCol="0" anchor="ctr"/>
+          <a:lstStyle/>
+          <a:p>
+            <a:pPr indent="0" marL="0">
+              <a:buNone/>
+            </a:pPr>
+            <a:r>
+              <a:rPr lang="en-US" sz="900" dirty="0">
+                <a:solidFill>
+                  <a:srgbClr val="A8B0AA"/>
+                </a:solidFill>
+                <a:latin typeface="Yu Gothic" pitchFamily="34" charset="0"/>
+                <a:ea typeface="Yu Gothic" pitchFamily="34" charset="-122"/>
+                <a:cs typeface="Yu Gothic" pitchFamily="34" charset="-120"/>
+              </a:rPr>
+              <a:t>セルフカフェ × 未来屋書店 トライアル導入のご提案</a:t>
+            </a:r>
+            <a:endParaRPr lang="en-US" sz="900" dirty="0"/>
+          </a:p>
+        </p:txBody>
+      </p:sp>
+      <p:sp>
+        <p:nvSpPr>
+          <p:cNvPr id="8" name="Text 5"/>
+          <p:cNvSpPr/>
+          <p:nvPr/>
+        </p:nvSpPr>
+        <p:spPr>
+          <a:xfrm>
+            <a:off x="10261397" y="6463894"/>
+            <a:ext cx="1270102" cy="152705"/>
+          </a:xfrm>
+          <a:prstGeom prst="rect">
+            <a:avLst/>
+          </a:prstGeom>
+          <a:noFill/>
+          <a:ln/>
+        </p:spPr>
+        <p:txBody>
+          <a:bodyPr wrap="square" lIns="0" tIns="0" rIns="0" bIns="0" rtlCol="0" anchor="ctr"/>
+          <a:lstStyle/>
+          <a:p>
+            <a:pPr algn="r" indent="0" marL="0">
+              <a:buNone/>
+            </a:pPr>
+            <a:r>
+              <a:rPr lang="en-US" sz="1000" b="1" dirty="0">
+                <a:solidFill>
+                  <a:srgbClr val="7E8882"/>
+                </a:solidFill>
+                <a:latin typeface="Arial" pitchFamily="34" charset="0"/>
+                <a:ea typeface="Arial" pitchFamily="34" charset="-122"/>
+                <a:cs typeface="Arial" pitchFamily="34" charset="-120"/>
+              </a:rPr>
+              <a:t>07</a:t>
             </a:r>
             <a:endParaRPr lang="en-US" sz="1000" dirty="0"/>
           </a:p>

--- a/selfcafe-miraiya-trial-deck/selfcafe-miraiya-trial-deck.pptx
+++ b/selfcafe-miraiya-trial-deck/selfcafe-miraiya-trial-deck.pptx
@@ -1767,7 +1767,7 @@
         <p:spPr>
           <a:xfrm>
             <a:off x="4114800" y="5742432"/>
-            <a:ext cx="3291840" cy="381305"/>
+            <a:ext cx="2926080" cy="381305"/>
           </a:xfrm>
           <a:prstGeom prst="rect">
             <a:avLst/>
@@ -1802,7 +1802,7 @@
                 <a:ea typeface="Yu Gothic" pitchFamily="34" charset="-122"/>
                 <a:cs typeface="Yu Gothic" pitchFamily="34" charset="-120"/>
               </a:rPr>
-              <a:t> ％ ＋ 月額5万円</a:t>
+              <a:t> ％</a:t>
             </a:r>
             <a:endParaRPr lang="en-US" sz="2600" dirty="0"/>
           </a:p>
@@ -1817,7 +1817,7 @@
         <p:spPr>
           <a:xfrm>
             <a:off x="4114800" y="6144768"/>
-            <a:ext cx="3657600" cy="165506"/>
+            <a:ext cx="3291840" cy="165506"/>
           </a:xfrm>
           <a:prstGeom prst="rect">
             <a:avLst/>
@@ -1841,7 +1841,7 @@
                 <a:ea typeface="Yu Gothic" pitchFamily="34" charset="-122"/>
                 <a:cs typeface="Yu Gothic" pitchFamily="34" charset="-120"/>
               </a:rPr>
-              <a:t>御社の毎月のお受取</a:t>
+              <a:t>トライアル期間中のお受取</a:t>
             </a:r>
             <a:endParaRPr lang="en-US" sz="950" dirty="0"/>
           </a:p>
@@ -1855,7 +1855,7 @@
         </p:nvSpPr>
         <p:spPr>
           <a:xfrm>
-            <a:off x="7863840" y="5742432"/>
+            <a:off x="7406640" y="5742432"/>
             <a:ext cx="2926080" cy="381305"/>
           </a:xfrm>
           <a:prstGeom prst="rect">
@@ -1894,7 +1894,7 @@
         </p:nvSpPr>
         <p:spPr>
           <a:xfrm>
-            <a:off x="7863840" y="6144768"/>
+            <a:off x="7406640" y="6144768"/>
             <a:ext cx="3291840" cy="165506"/>
           </a:xfrm>
           <a:prstGeom prst="rect">
@@ -1953,7 +1953,7 @@
         </p:nvSpPr>
         <p:spPr>
           <a:xfrm>
-            <a:off x="7461504" y="5769864"/>
+            <a:off x="7004304" y="5769864"/>
             <a:ext cx="11887" cy="533095"/>
           </a:xfrm>
           <a:prstGeom prst="rect">
@@ -2796,7 +2796,7 @@
                 <a:ea typeface="Yu Gothic" pitchFamily="34" charset="-122"/>
                 <a:cs typeface="Yu Gothic" pitchFamily="34" charset="-120"/>
               </a:rPr>
-              <a:t>セルフカフェ売上の25％ ＋ 月額固定5万円</a:t>
+              <a:t>トライアル中は売上の25％／2年目以降は＋月額5万円</a:t>
             </a:r>
             <a:endParaRPr lang="en-US" sz="1050" dirty="0"/>
           </a:p>
@@ -2925,7 +2925,7 @@
                 <a:ea typeface="Yu Gothic" pitchFamily="34" charset="-122"/>
                 <a:cs typeface="Yu Gothic" pitchFamily="34" charset="-120"/>
               </a:rPr>
-              <a:t>基本3年〜／特約により最低2年〜でも同条件</a:t>
+              <a:t>基本3年〜（トライアル1年を含む）／特約で最低2年〜</a:t>
             </a:r>
             <a:endParaRPr lang="en-US" sz="1050" dirty="0"/>
           </a:p>
@@ -3069,11 +3069,11 @@
         <p:spPr>
           <a:xfrm>
             <a:off x="7902245" y="1651406"/>
-            <a:ext cx="3629254" cy="1737360"/>
+            <a:ext cx="3629254" cy="2103120"/>
           </a:xfrm>
           <a:prstGeom prst="roundRect">
             <a:avLst>
-              <a:gd name="adj" fmla="val 3158"/>
+              <a:gd name="adj" fmla="val 2609"/>
             </a:avLst>
           </a:prstGeom>
           <a:solidFill>
@@ -3090,7 +3090,7 @@
         </p:nvSpPr>
         <p:spPr>
           <a:xfrm>
-            <a:off x="8158277" y="1870862"/>
+            <a:off x="8158277" y="1834286"/>
             <a:ext cx="2377440" cy="164592"/>
           </a:xfrm>
           <a:prstGeom prst="rect">
@@ -3129,8 +3129,8 @@
         </p:nvSpPr>
         <p:spPr>
           <a:xfrm>
-            <a:off x="8158277" y="2108606"/>
-            <a:ext cx="3117190" cy="256032"/>
+            <a:off x="8158277" y="2053742"/>
+            <a:ext cx="3117190" cy="219456"/>
           </a:xfrm>
           <a:prstGeom prst="rect">
             <a:avLst/>
@@ -3146,7 +3146,7 @@
               <a:buNone/>
             </a:pPr>
             <a:r>
-              <a:rPr lang="en-US" sz="1100" dirty="0">
+              <a:rPr lang="en-US" sz="950" dirty="0">
                 <a:solidFill>
                   <a:srgbClr val="AFC2B8"/>
                 </a:solidFill>
@@ -3154,9 +3154,9 @@
                 <a:ea typeface="Yu Gothic" pitchFamily="34" charset="-122"/>
                 <a:cs typeface="Yu Gothic" pitchFamily="34" charset="-120"/>
               </a:rPr>
-              <a:t>御社へのお支払い</a:t>
-            </a:r>
-            <a:endParaRPr lang="en-US" sz="1100" dirty="0"/>
+              <a:t>トライアル期間（1年目）</a:t>
+            </a:r>
+            <a:endParaRPr lang="en-US" sz="950" dirty="0"/>
           </a:p>
         </p:txBody>
       </p:sp>
@@ -3168,8 +3168,8 @@
         </p:nvSpPr>
         <p:spPr>
           <a:xfrm>
-            <a:off x="8158277" y="2364638"/>
-            <a:ext cx="3117190" cy="566928"/>
+            <a:off x="8158277" y="2273198"/>
+            <a:ext cx="3117190" cy="530352"/>
           </a:xfrm>
           <a:prstGeom prst="rect">
             <a:avLst/>
@@ -3196,7 +3196,7 @@
               <a:t>売上の </a:t>
             </a:r>
             <a:r>
-              <a:rPr lang="en-US" sz="3200" b="1" dirty="0">
+              <a:rPr lang="en-US" sz="3000" b="1" dirty="0">
                 <a:solidFill>
                   <a:srgbClr val="F0C05A"/>
                 </a:solidFill>
@@ -3223,14 +3223,34 @@
       </p:sp>
       <p:sp>
         <p:nvSpPr>
-          <p:cNvPr id="37" name="Text 28"/>
-          <p:cNvSpPr/>
-          <p:nvPr/>
-        </p:nvSpPr>
-        <p:spPr>
-          <a:xfrm>
-            <a:off x="8158277" y="2913278"/>
-            <a:ext cx="3117190" cy="347472"/>
+          <p:cNvPr id="37" name="Shape 28"/>
+          <p:cNvSpPr/>
+          <p:nvPr/>
+        </p:nvSpPr>
+        <p:spPr>
+          <a:xfrm>
+            <a:off x="8158277" y="2876702"/>
+            <a:ext cx="3117190" cy="10058"/>
+          </a:xfrm>
+          <a:prstGeom prst="rect">
+            <a:avLst/>
+          </a:prstGeom>
+          <a:solidFill>
+            <a:srgbClr val="2A7A4E"/>
+          </a:solidFill>
+          <a:ln/>
+        </p:spPr>
+      </p:sp>
+      <p:sp>
+        <p:nvSpPr>
+          <p:cNvPr id="38" name="Text 29"/>
+          <p:cNvSpPr/>
+          <p:nvPr/>
+        </p:nvSpPr>
+        <p:spPr>
+          <a:xfrm>
+            <a:off x="8158277" y="2968142"/>
+            <a:ext cx="3117190" cy="219456"/>
           </a:xfrm>
           <a:prstGeom prst="rect">
             <a:avLst/>
@@ -3246,7 +3266,46 @@
               <a:buNone/>
             </a:pPr>
             <a:r>
-              <a:rPr lang="en-US" sz="1200" dirty="0">
+              <a:rPr lang="en-US" sz="950" dirty="0">
+                <a:solidFill>
+                  <a:srgbClr val="AFC2B8"/>
+                </a:solidFill>
+                <a:latin typeface="Yu Gothic" pitchFamily="34" charset="0"/>
+                <a:ea typeface="Yu Gothic" pitchFamily="34" charset="-122"/>
+                <a:cs typeface="Yu Gothic" pitchFamily="34" charset="-120"/>
+              </a:rPr>
+              <a:t>2年目以降</a:t>
+            </a:r>
+            <a:endParaRPr lang="en-US" sz="950" dirty="0"/>
+          </a:p>
+        </p:txBody>
+      </p:sp>
+      <p:sp>
+        <p:nvSpPr>
+          <p:cNvPr id="39" name="Text 30"/>
+          <p:cNvSpPr/>
+          <p:nvPr/>
+        </p:nvSpPr>
+        <p:spPr>
+          <a:xfrm>
+            <a:off x="8158277" y="3205886"/>
+            <a:ext cx="3117190" cy="420624"/>
+          </a:xfrm>
+          <a:prstGeom prst="rect">
+            <a:avLst/>
+          </a:prstGeom>
+          <a:noFill/>
+          <a:ln/>
+        </p:spPr>
+        <p:txBody>
+          <a:bodyPr wrap="square" lIns="0" tIns="0" rIns="0" bIns="0" rtlCol="0" anchor="ctr"/>
+          <a:lstStyle/>
+          <a:p>
+            <a:pPr indent="0" marL="0">
+              <a:buNone/>
+            </a:pPr>
+            <a:r>
+              <a:rPr lang="en-US" sz="1200" b="1" dirty="0">
                 <a:solidFill>
                   <a:srgbClr val="FFFFFF"/>
                 </a:solidFill>
@@ -3254,29 +3313,18 @@
                 <a:ea typeface="Yu Gothic" pitchFamily="34" charset="-122"/>
                 <a:cs typeface="Yu Gothic" pitchFamily="34" charset="-120"/>
               </a:rPr>
-              <a:t>＋ 月額固定 </a:t>
-            </a:r>
-            <a:r>
-              <a:rPr lang="en-US" sz="1800" b="1" dirty="0">
+              <a:t>売上の25％ </a:t>
+            </a:r>
+            <a:r>
+              <a:rPr lang="en-US" sz="1250" b="1" dirty="0">
                 <a:solidFill>
                   <a:srgbClr val="F0C05A"/>
                 </a:solidFill>
-                <a:latin typeface="Arial" pitchFamily="34" charset="0"/>
-                <a:ea typeface="Arial" pitchFamily="34" charset="-122"/>
-                <a:cs typeface="Arial" pitchFamily="34" charset="-120"/>
-              </a:rPr>
-              <a:t>5</a:t>
-            </a:r>
-            <a:r>
-              <a:rPr lang="en-US" sz="1200" b="1" dirty="0">
-                <a:solidFill>
-                  <a:srgbClr val="F0C05A"/>
-                </a:solidFill>
-                <a:latin typeface="Yu Gothic" pitchFamily="34" charset="0"/>
-                <a:ea typeface="Yu Gothic" pitchFamily="34" charset="-122"/>
-                <a:cs typeface="Yu Gothic" pitchFamily="34" charset="-120"/>
-              </a:rPr>
-              <a:t> 万円</a:t>
+                <a:latin typeface="Yu Gothic" pitchFamily="34" charset="0"/>
+                <a:ea typeface="Yu Gothic" pitchFamily="34" charset="-122"/>
+                <a:cs typeface="Yu Gothic" pitchFamily="34" charset="-120"/>
+              </a:rPr>
+              <a:t>＋ 月額固定 5万円</a:t>
             </a:r>
             <a:endParaRPr lang="en-US" sz="1200" dirty="0"/>
           </a:p>
@@ -3284,18 +3332,18 @@
       </p:sp>
       <p:sp>
         <p:nvSpPr>
-          <p:cNvPr id="38" name="Shape 29"/>
-          <p:cNvSpPr/>
-          <p:nvPr/>
-        </p:nvSpPr>
-        <p:spPr>
-          <a:xfrm>
-            <a:off x="7902245" y="3535070"/>
-            <a:ext cx="3629254" cy="1188720"/>
+          <p:cNvPr id="40" name="Shape 31"/>
+          <p:cNvSpPr/>
+          <p:nvPr/>
+        </p:nvSpPr>
+        <p:spPr>
+          <a:xfrm>
+            <a:off x="7902245" y="3882542"/>
+            <a:ext cx="3629254" cy="1060704"/>
           </a:xfrm>
           <a:prstGeom prst="roundRect">
             <a:avLst>
-              <a:gd name="adj" fmla="val 4615"/>
+              <a:gd name="adj" fmla="val 5172"/>
             </a:avLst>
           </a:prstGeom>
           <a:solidFill>
@@ -3311,13 +3359,13 @@
       </p:sp>
       <p:sp>
         <p:nvSpPr>
-          <p:cNvPr id="39" name="Text 30"/>
-          <p:cNvSpPr/>
-          <p:nvPr/>
-        </p:nvSpPr>
-        <p:spPr>
-          <a:xfrm>
-            <a:off x="8158277" y="3699662"/>
+          <p:cNvPr id="41" name="Text 32"/>
+          <p:cNvSpPr/>
+          <p:nvPr/>
+        </p:nvSpPr>
+        <p:spPr>
+          <a:xfrm>
+            <a:off x="8158277" y="4010558"/>
             <a:ext cx="3117190" cy="237744"/>
           </a:xfrm>
           <a:prstGeom prst="rect">
@@ -3350,14 +3398,14 @@
       </p:sp>
       <p:sp>
         <p:nvSpPr>
-          <p:cNvPr id="40" name="Text 31"/>
-          <p:cNvSpPr/>
-          <p:nvPr/>
-        </p:nvSpPr>
-        <p:spPr>
-          <a:xfrm>
-            <a:off x="8158277" y="3973982"/>
-            <a:ext cx="3117190" cy="640080"/>
+          <p:cNvPr id="42" name="Text 33"/>
+          <p:cNvSpPr/>
+          <p:nvPr/>
+        </p:nvSpPr>
+        <p:spPr>
+          <a:xfrm>
+            <a:off x="8158277" y="4266590"/>
+            <a:ext cx="3117190" cy="585216"/>
           </a:xfrm>
           <a:prstGeom prst="rect">
             <a:avLst/>
@@ -3376,7 +3424,7 @@
               <a:buNone/>
             </a:pPr>
             <a:r>
-              <a:rPr lang="en-US" sz="1050" dirty="0">
+              <a:rPr lang="en-US" sz="1000" dirty="0">
                 <a:solidFill>
                   <a:srgbClr val="0A3D23"/>
                 </a:solidFill>
@@ -3386,7 +3434,7 @@
               </a:rPr>
               <a:t>家具・什器のご手配のみです。</a:t>
             </a:r>
-            <a:endParaRPr lang="en-US" sz="1050" dirty="0"/>
+            <a:endParaRPr lang="en-US" sz="1000" dirty="0"/>
           </a:p>
           <a:p>
             <a:pPr indent="0" marL="0">
@@ -3396,7 +3444,7 @@
               <a:buNone/>
             </a:pPr>
             <a:r>
-              <a:rPr lang="en-US" sz="1050" dirty="0">
+              <a:rPr lang="en-US" sz="1000" dirty="0">
                 <a:solidFill>
                   <a:srgbClr val="0A3D23"/>
                 </a:solidFill>
@@ -3406,24 +3454,24 @@
               </a:rPr>
               <a:t>内装工事費のご負担はありません。</a:t>
             </a:r>
-            <a:endParaRPr lang="en-US" sz="1050" dirty="0"/>
-          </a:p>
-        </p:txBody>
-      </p:sp>
-      <p:sp>
-        <p:nvSpPr>
-          <p:cNvPr id="41" name="Shape 32"/>
-          <p:cNvSpPr/>
-          <p:nvPr/>
-        </p:nvSpPr>
-        <p:spPr>
-          <a:xfrm>
-            <a:off x="7902245" y="4851806"/>
-            <a:ext cx="3629254" cy="987552"/>
+            <a:endParaRPr lang="en-US" sz="1000" dirty="0"/>
+          </a:p>
+        </p:txBody>
+      </p:sp>
+      <p:sp>
+        <p:nvSpPr>
+          <p:cNvPr id="43" name="Shape 34"/>
+          <p:cNvSpPr/>
+          <p:nvPr/>
+        </p:nvSpPr>
+        <p:spPr>
+          <a:xfrm>
+            <a:off x="7902245" y="5071262"/>
+            <a:ext cx="3629254" cy="768096"/>
           </a:xfrm>
           <a:prstGeom prst="roundRect">
             <a:avLst>
-              <a:gd name="adj" fmla="val 5556"/>
+              <a:gd name="adj" fmla="val 7143"/>
             </a:avLst>
           </a:prstGeom>
           <a:solidFill>
@@ -3439,7 +3487,7 @@
       </p:sp>
       <p:pic>
         <p:nvPicPr>
-          <p:cNvPr id="42" name="Image 7" descr="/home/user/suzuki-ceo/selfcafe-miraiya-trial-deck/assets/icons/LuShieldCheck-green.png">    </p:cNvPr>
+          <p:cNvPr id="44" name="Image 7" descr="/home/user/suzuki-ceo/selfcafe-miraiya-trial-deck/assets/icons/LuShieldCheck-green.png">    </p:cNvPr>
           <p:cNvPicPr>
             <a:picLocks noChangeAspect="1"/>
           </p:cNvPicPr>
@@ -3453,8 +3501,8 @@
         </p:blipFill>
         <p:spPr>
           <a:xfrm>
-            <a:off x="8139989" y="5071262"/>
-            <a:ext cx="310896" cy="310896"/>
+            <a:off x="8139989" y="5217566"/>
+            <a:ext cx="292608" cy="292608"/>
           </a:xfrm>
           <a:prstGeom prst="rect">
             <a:avLst/>
@@ -3463,14 +3511,14 @@
       </p:pic>
       <p:sp>
         <p:nvSpPr>
-          <p:cNvPr id="43" name="Text 33"/>
-          <p:cNvSpPr/>
-          <p:nvPr/>
-        </p:nvSpPr>
-        <p:spPr>
-          <a:xfrm>
-            <a:off x="8560613" y="4998110"/>
-            <a:ext cx="2733142" cy="256032"/>
+          <p:cNvPr id="45" name="Text 35"/>
+          <p:cNvSpPr/>
+          <p:nvPr/>
+        </p:nvSpPr>
+        <p:spPr>
+          <a:xfrm>
+            <a:off x="8524037" y="5144414"/>
+            <a:ext cx="2769718" cy="237744"/>
           </a:xfrm>
           <a:prstGeom prst="rect">
             <a:avLst/>
@@ -3502,14 +3550,14 @@
       </p:sp>
       <p:sp>
         <p:nvSpPr>
-          <p:cNvPr id="44" name="Text 34"/>
-          <p:cNvSpPr/>
-          <p:nvPr/>
-        </p:nvSpPr>
-        <p:spPr>
-          <a:xfrm>
-            <a:off x="8560613" y="5272430"/>
-            <a:ext cx="2733142" cy="420624"/>
+          <p:cNvPr id="46" name="Text 36"/>
+          <p:cNvSpPr/>
+          <p:nvPr/>
+        </p:nvSpPr>
+        <p:spPr>
+          <a:xfrm>
+            <a:off x="8524037" y="5382158"/>
+            <a:ext cx="2769718" cy="365760"/>
           </a:xfrm>
           <a:prstGeom prst="rect">
             <a:avLst/>
@@ -3523,12 +3571,12 @@
           <a:p>
             <a:pPr indent="0" marL="0">
               <a:lnSpc>
-                <a:spcPct val="125000"/>
+                <a:spcPct val="120000"/>
               </a:lnSpc>
               <a:buNone/>
             </a:pPr>
             <a:r>
-              <a:rPr lang="en-US" sz="950" dirty="0">
+              <a:rPr lang="en-US" sz="900" dirty="0">
                 <a:solidFill>
                   <a:srgbClr val="0A3D23"/>
                 </a:solidFill>
@@ -3538,13 +3586,13 @@
               </a:rPr>
               <a:t>終了時も内装を元に戻す必要はありません。</a:t>
             </a:r>
-            <a:endParaRPr lang="en-US" sz="950" dirty="0"/>
-          </a:p>
-        </p:txBody>
-      </p:sp>
-      <p:sp>
-        <p:nvSpPr>
-          <p:cNvPr id="45" name="Text 35"/>
+            <a:endParaRPr lang="en-US" sz="900" dirty="0"/>
+          </a:p>
+        </p:txBody>
+      </p:sp>
+      <p:sp>
+        <p:nvSpPr>
+          <p:cNvPr id="47" name="Text 37"/>
           <p:cNvSpPr/>
           <p:nvPr/>
         </p:nvSpPr>
@@ -3575,7 +3623,7 @@
                 <a:ea typeface="Yu Gothic" pitchFamily="34" charset="-122"/>
                 <a:cs typeface="Yu Gothic" pitchFamily="34" charset="-120"/>
               </a:rPr>
-              <a:t>※ 金額はすべて税抜。対象店舗はご相談のうえ決定させていただきます。契約期間の考え方は次ページに記載しています。</a:t>
+              <a:t>※ 金額はすべて税抜。トライアル期間（1年）は契約期間に含みます。対象店舗はご相談のうえ決定させていただきます。</a:t>
             </a:r>
             <a:endParaRPr lang="en-US" sz="850" dirty="0"/>
           </a:p>
@@ -3716,7 +3764,7 @@
                 <a:ea typeface="Yu Gothic" pitchFamily="34" charset="-122"/>
                 <a:cs typeface="Yu Gothic" pitchFamily="34" charset="-120"/>
               </a:rPr>
-              <a:t>トライアル1年、その先は2年からでも同条件で。</a:t>
+              <a:t>トライアルの1年も、契約期間に含みます。</a:t>
             </a:r>
             <a:endParaRPr lang="en-US" sz="2900" dirty="0"/>
           </a:p>
@@ -3865,26 +3913,575 @@
       </p:sp>
       <p:sp>
         <p:nvSpPr>
-          <p:cNvPr id="9" name="Shape 6"/>
+          <p:cNvPr id="9" name="Text 6"/>
           <p:cNvSpPr/>
           <p:nvPr/>
         </p:nvSpPr>
         <p:spPr>
           <a:xfrm>
             <a:off x="660197" y="1651406"/>
-            <a:ext cx="3440887" cy="2926080"/>
+            <a:ext cx="3550615" cy="219456"/>
+          </a:xfrm>
+          <a:prstGeom prst="rect">
+            <a:avLst/>
+          </a:prstGeom>
+          <a:noFill/>
+          <a:ln/>
+        </p:spPr>
+        <p:txBody>
+          <a:bodyPr wrap="square" lIns="0" tIns="0" rIns="0" bIns="0" rtlCol="0" anchor="ctr"/>
+          <a:lstStyle/>
+          <a:p>
+            <a:pPr indent="0" marL="0">
+              <a:buNone/>
+            </a:pPr>
+            <a:r>
+              <a:rPr lang="en-US" sz="1000" b="1" dirty="0">
+                <a:solidFill>
+                  <a:srgbClr val="7E8882"/>
+                </a:solidFill>
+                <a:latin typeface="Yu Gothic" pitchFamily="34" charset="0"/>
+                <a:ea typeface="Yu Gothic" pitchFamily="34" charset="-122"/>
+                <a:cs typeface="Yu Gothic" pitchFamily="34" charset="-120"/>
+              </a:rPr>
+              <a:t>1年目</a:t>
+            </a:r>
+            <a:endParaRPr lang="en-US" sz="1000" dirty="0"/>
+          </a:p>
+        </p:txBody>
+      </p:sp>
+      <p:sp>
+        <p:nvSpPr>
+          <p:cNvPr id="10" name="Shape 7"/>
+          <p:cNvSpPr/>
+          <p:nvPr/>
+        </p:nvSpPr>
+        <p:spPr>
+          <a:xfrm>
+            <a:off x="660197" y="1925726"/>
+            <a:ext cx="3550615" cy="786384"/>
           </a:xfrm>
           <a:prstGeom prst="roundRect">
             <a:avLst>
-              <a:gd name="adj" fmla="val 1875"/>
+              <a:gd name="adj" fmla="val 6977"/>
             </a:avLst>
           </a:prstGeom>
           <a:solidFill>
-            <a:srgbClr val="FFFFFF"/>
+            <a:srgbClr val="A8761F"/>
+          </a:solidFill>
+          <a:ln/>
+        </p:spPr>
+      </p:sp>
+      <p:sp>
+        <p:nvSpPr>
+          <p:cNvPr id="11" name="Text 8"/>
+          <p:cNvSpPr/>
+          <p:nvPr/>
+        </p:nvSpPr>
+        <p:spPr>
+          <a:xfrm>
+            <a:off x="879653" y="1998878"/>
+            <a:ext cx="3111703" cy="256032"/>
+          </a:xfrm>
+          <a:prstGeom prst="rect">
+            <a:avLst/>
+          </a:prstGeom>
+          <a:noFill/>
+          <a:ln/>
+        </p:spPr>
+        <p:txBody>
+          <a:bodyPr wrap="square" lIns="0" tIns="0" rIns="0" bIns="0" rtlCol="0" anchor="ctr"/>
+          <a:lstStyle/>
+          <a:p>
+            <a:pPr indent="0" marL="0">
+              <a:buNone/>
+            </a:pPr>
+            <a:r>
+              <a:rPr lang="en-US" sz="1100" b="1" dirty="0">
+                <a:solidFill>
+                  <a:srgbClr val="FFF3DC"/>
+                </a:solidFill>
+                <a:latin typeface="Yu Gothic" pitchFamily="34" charset="0"/>
+                <a:ea typeface="Yu Gothic" pitchFamily="34" charset="-122"/>
+                <a:cs typeface="Yu Gothic" pitchFamily="34" charset="-120"/>
+              </a:rPr>
+              <a:t>トライアル期間</a:t>
+            </a:r>
+            <a:endParaRPr lang="en-US" sz="1100" dirty="0"/>
+          </a:p>
+        </p:txBody>
+      </p:sp>
+      <p:sp>
+        <p:nvSpPr>
+          <p:cNvPr id="12" name="Text 9"/>
+          <p:cNvSpPr/>
+          <p:nvPr/>
+        </p:nvSpPr>
+        <p:spPr>
+          <a:xfrm>
+            <a:off x="879653" y="2254910"/>
+            <a:ext cx="3111703" cy="292608"/>
+          </a:xfrm>
+          <a:prstGeom prst="rect">
+            <a:avLst/>
+          </a:prstGeom>
+          <a:noFill/>
+          <a:ln/>
+        </p:spPr>
+        <p:txBody>
+          <a:bodyPr wrap="square" lIns="0" tIns="0" rIns="0" bIns="0" rtlCol="0" anchor="ctr"/>
+          <a:lstStyle/>
+          <a:p>
+            <a:pPr indent="0" marL="0">
+              <a:buNone/>
+            </a:pPr>
+            <a:r>
+              <a:rPr lang="en-US" sz="1250" b="1" dirty="0">
+                <a:solidFill>
+                  <a:srgbClr val="FFFFFF"/>
+                </a:solidFill>
+                <a:latin typeface="Yu Gothic" pitchFamily="34" charset="0"/>
+                <a:ea typeface="Yu Gothic" pitchFamily="34" charset="-122"/>
+                <a:cs typeface="Yu Gothic" pitchFamily="34" charset="-120"/>
+              </a:rPr>
+              <a:t>売上の25％</a:t>
+            </a:r>
+            <a:endParaRPr lang="en-US" sz="1250" dirty="0"/>
+          </a:p>
+        </p:txBody>
+      </p:sp>
+      <p:sp>
+        <p:nvSpPr>
+          <p:cNvPr id="13" name="Text 10"/>
+          <p:cNvSpPr/>
+          <p:nvPr/>
+        </p:nvSpPr>
+        <p:spPr>
+          <a:xfrm>
+            <a:off x="4320540" y="1651406"/>
+            <a:ext cx="3550615" cy="219456"/>
+          </a:xfrm>
+          <a:prstGeom prst="rect">
+            <a:avLst/>
+          </a:prstGeom>
+          <a:noFill/>
+          <a:ln/>
+        </p:spPr>
+        <p:txBody>
+          <a:bodyPr wrap="square" lIns="0" tIns="0" rIns="0" bIns="0" rtlCol="0" anchor="ctr"/>
+          <a:lstStyle/>
+          <a:p>
+            <a:pPr indent="0" marL="0">
+              <a:buNone/>
+            </a:pPr>
+            <a:r>
+              <a:rPr lang="en-US" sz="1000" b="1" dirty="0">
+                <a:solidFill>
+                  <a:srgbClr val="7E8882"/>
+                </a:solidFill>
+                <a:latin typeface="Yu Gothic" pitchFamily="34" charset="0"/>
+                <a:ea typeface="Yu Gothic" pitchFamily="34" charset="-122"/>
+                <a:cs typeface="Yu Gothic" pitchFamily="34" charset="-120"/>
+              </a:rPr>
+              <a:t>2年目</a:t>
+            </a:r>
+            <a:endParaRPr lang="en-US" sz="1000" dirty="0"/>
+          </a:p>
+        </p:txBody>
+      </p:sp>
+      <p:sp>
+        <p:nvSpPr>
+          <p:cNvPr id="14" name="Shape 11"/>
+          <p:cNvSpPr/>
+          <p:nvPr/>
+        </p:nvSpPr>
+        <p:spPr>
+          <a:xfrm>
+            <a:off x="4320540" y="1925726"/>
+            <a:ext cx="3550615" cy="786384"/>
+          </a:xfrm>
+          <a:prstGeom prst="roundRect">
+            <a:avLst>
+              <a:gd name="adj" fmla="val 6977"/>
+            </a:avLst>
+          </a:prstGeom>
+          <a:solidFill>
+            <a:srgbClr val="0C5230"/>
+          </a:solidFill>
+          <a:ln/>
+        </p:spPr>
+      </p:sp>
+      <p:sp>
+        <p:nvSpPr>
+          <p:cNvPr id="15" name="Text 12"/>
+          <p:cNvSpPr/>
+          <p:nvPr/>
+        </p:nvSpPr>
+        <p:spPr>
+          <a:xfrm>
+            <a:off x="4539996" y="1998878"/>
+            <a:ext cx="3111703" cy="256032"/>
+          </a:xfrm>
+          <a:prstGeom prst="rect">
+            <a:avLst/>
+          </a:prstGeom>
+          <a:noFill/>
+          <a:ln/>
+        </p:spPr>
+        <p:txBody>
+          <a:bodyPr wrap="square" lIns="0" tIns="0" rIns="0" bIns="0" rtlCol="0" anchor="ctr"/>
+          <a:lstStyle/>
+          <a:p>
+            <a:pPr indent="0" marL="0">
+              <a:buNone/>
+            </a:pPr>
+            <a:r>
+              <a:rPr lang="en-US" sz="1100" b="1" dirty="0">
+                <a:solidFill>
+                  <a:srgbClr val="8CC5A5"/>
+                </a:solidFill>
+                <a:latin typeface="Yu Gothic" pitchFamily="34" charset="0"/>
+                <a:ea typeface="Yu Gothic" pitchFamily="34" charset="-122"/>
+                <a:cs typeface="Yu Gothic" pitchFamily="34" charset="-120"/>
+              </a:rPr>
+              <a:t>本格運用</a:t>
+            </a:r>
+            <a:endParaRPr lang="en-US" sz="1100" dirty="0"/>
+          </a:p>
+        </p:txBody>
+      </p:sp>
+      <p:sp>
+        <p:nvSpPr>
+          <p:cNvPr id="16" name="Text 13"/>
+          <p:cNvSpPr/>
+          <p:nvPr/>
+        </p:nvSpPr>
+        <p:spPr>
+          <a:xfrm>
+            <a:off x="4539996" y="2254910"/>
+            <a:ext cx="3111703" cy="292608"/>
+          </a:xfrm>
+          <a:prstGeom prst="rect">
+            <a:avLst/>
+          </a:prstGeom>
+          <a:noFill/>
+          <a:ln/>
+        </p:spPr>
+        <p:txBody>
+          <a:bodyPr wrap="square" lIns="0" tIns="0" rIns="0" bIns="0" rtlCol="0" anchor="ctr"/>
+          <a:lstStyle/>
+          <a:p>
+            <a:pPr indent="0" marL="0">
+              <a:buNone/>
+            </a:pPr>
+            <a:r>
+              <a:rPr lang="en-US" sz="1250" b="1" dirty="0">
+                <a:solidFill>
+                  <a:srgbClr val="FFFFFF"/>
+                </a:solidFill>
+                <a:latin typeface="Yu Gothic" pitchFamily="34" charset="0"/>
+                <a:ea typeface="Yu Gothic" pitchFamily="34" charset="-122"/>
+                <a:cs typeface="Yu Gothic" pitchFamily="34" charset="-120"/>
+              </a:rPr>
+              <a:t>売上の25％ ＋ 月額5万円</a:t>
+            </a:r>
+            <a:endParaRPr lang="en-US" sz="1250" dirty="0"/>
+          </a:p>
+        </p:txBody>
+      </p:sp>
+      <p:sp>
+        <p:nvSpPr>
+          <p:cNvPr id="17" name="Text 14"/>
+          <p:cNvSpPr/>
+          <p:nvPr/>
+        </p:nvSpPr>
+        <p:spPr>
+          <a:xfrm>
+            <a:off x="7980883" y="1651406"/>
+            <a:ext cx="3550615" cy="219456"/>
+          </a:xfrm>
+          <a:prstGeom prst="rect">
+            <a:avLst/>
+          </a:prstGeom>
+          <a:noFill/>
+          <a:ln/>
+        </p:spPr>
+        <p:txBody>
+          <a:bodyPr wrap="square" lIns="0" tIns="0" rIns="0" bIns="0" rtlCol="0" anchor="ctr"/>
+          <a:lstStyle/>
+          <a:p>
+            <a:pPr indent="0" marL="0">
+              <a:buNone/>
+            </a:pPr>
+            <a:r>
+              <a:rPr lang="en-US" sz="1000" b="1" dirty="0">
+                <a:solidFill>
+                  <a:srgbClr val="7E8882"/>
+                </a:solidFill>
+                <a:latin typeface="Yu Gothic" pitchFamily="34" charset="0"/>
+                <a:ea typeface="Yu Gothic" pitchFamily="34" charset="-122"/>
+                <a:cs typeface="Yu Gothic" pitchFamily="34" charset="-120"/>
+              </a:rPr>
+              <a:t>3年目</a:t>
+            </a:r>
+            <a:endParaRPr lang="en-US" sz="1000" dirty="0"/>
+          </a:p>
+        </p:txBody>
+      </p:sp>
+      <p:sp>
+        <p:nvSpPr>
+          <p:cNvPr id="18" name="Shape 15"/>
+          <p:cNvSpPr/>
+          <p:nvPr/>
+        </p:nvSpPr>
+        <p:spPr>
+          <a:xfrm>
+            <a:off x="7980883" y="1925726"/>
+            <a:ext cx="3550615" cy="786384"/>
+          </a:xfrm>
+          <a:prstGeom prst="roundRect">
+            <a:avLst>
+              <a:gd name="adj" fmla="val 6977"/>
+            </a:avLst>
+          </a:prstGeom>
+          <a:solidFill>
+            <a:srgbClr val="0C5230"/>
+          </a:solidFill>
+          <a:ln/>
+        </p:spPr>
+      </p:sp>
+      <p:sp>
+        <p:nvSpPr>
+          <p:cNvPr id="19" name="Text 16"/>
+          <p:cNvSpPr/>
+          <p:nvPr/>
+        </p:nvSpPr>
+        <p:spPr>
+          <a:xfrm>
+            <a:off x="8200339" y="1998878"/>
+            <a:ext cx="3111703" cy="256032"/>
+          </a:xfrm>
+          <a:prstGeom prst="rect">
+            <a:avLst/>
+          </a:prstGeom>
+          <a:noFill/>
+          <a:ln/>
+        </p:spPr>
+        <p:txBody>
+          <a:bodyPr wrap="square" lIns="0" tIns="0" rIns="0" bIns="0" rtlCol="0" anchor="ctr"/>
+          <a:lstStyle/>
+          <a:p>
+            <a:pPr indent="0" marL="0">
+              <a:buNone/>
+            </a:pPr>
+            <a:r>
+              <a:rPr lang="en-US" sz="1100" b="1" dirty="0">
+                <a:solidFill>
+                  <a:srgbClr val="8CC5A5"/>
+                </a:solidFill>
+                <a:latin typeface="Yu Gothic" pitchFamily="34" charset="0"/>
+                <a:ea typeface="Yu Gothic" pitchFamily="34" charset="-122"/>
+                <a:cs typeface="Yu Gothic" pitchFamily="34" charset="-120"/>
+              </a:rPr>
+              <a:t>本格運用</a:t>
+            </a:r>
+            <a:endParaRPr lang="en-US" sz="1100" dirty="0"/>
+          </a:p>
+        </p:txBody>
+      </p:sp>
+      <p:sp>
+        <p:nvSpPr>
+          <p:cNvPr id="20" name="Text 17"/>
+          <p:cNvSpPr/>
+          <p:nvPr/>
+        </p:nvSpPr>
+        <p:spPr>
+          <a:xfrm>
+            <a:off x="8200339" y="2254910"/>
+            <a:ext cx="3111703" cy="292608"/>
+          </a:xfrm>
+          <a:prstGeom prst="rect">
+            <a:avLst/>
+          </a:prstGeom>
+          <a:noFill/>
+          <a:ln/>
+        </p:spPr>
+        <p:txBody>
+          <a:bodyPr wrap="square" lIns="0" tIns="0" rIns="0" bIns="0" rtlCol="0" anchor="ctr"/>
+          <a:lstStyle/>
+          <a:p>
+            <a:pPr indent="0" marL="0">
+              <a:buNone/>
+            </a:pPr>
+            <a:r>
+              <a:rPr lang="en-US" sz="1250" b="1" dirty="0">
+                <a:solidFill>
+                  <a:srgbClr val="FFFFFF"/>
+                </a:solidFill>
+                <a:latin typeface="Yu Gothic" pitchFamily="34" charset="0"/>
+                <a:ea typeface="Yu Gothic" pitchFamily="34" charset="-122"/>
+                <a:cs typeface="Yu Gothic" pitchFamily="34" charset="-120"/>
+              </a:rPr>
+              <a:t>売上の25％ ＋ 月額5万円</a:t>
+            </a:r>
+            <a:endParaRPr lang="en-US" sz="1250" dirty="0"/>
+          </a:p>
+        </p:txBody>
+      </p:sp>
+      <p:sp>
+        <p:nvSpPr>
+          <p:cNvPr id="21" name="Shape 18"/>
+          <p:cNvSpPr/>
+          <p:nvPr/>
+        </p:nvSpPr>
+        <p:spPr>
+          <a:xfrm>
+            <a:off x="660197" y="2840126"/>
+            <a:ext cx="7210958" cy="384048"/>
+          </a:xfrm>
+          <a:prstGeom prst="roundRect">
+            <a:avLst>
+              <a:gd name="adj" fmla="val 11905"/>
+            </a:avLst>
+          </a:prstGeom>
+          <a:solidFill>
+            <a:srgbClr val="FBF4E4"/>
+          </a:solidFill>
+          <a:ln w="12700">
+            <a:solidFill>
+              <a:srgbClr val="E7D3A8"/>
+            </a:solidFill>
+            <a:prstDash val="solid"/>
+          </a:ln>
+        </p:spPr>
+      </p:sp>
+      <p:sp>
+        <p:nvSpPr>
+          <p:cNvPr id="22" name="Text 19"/>
+          <p:cNvSpPr/>
+          <p:nvPr/>
+        </p:nvSpPr>
+        <p:spPr>
+          <a:xfrm>
+            <a:off x="879653" y="2840126"/>
+            <a:ext cx="6772046" cy="384048"/>
+          </a:xfrm>
+          <a:prstGeom prst="rect">
+            <a:avLst/>
+          </a:prstGeom>
+          <a:noFill/>
+          <a:ln/>
+        </p:spPr>
+        <p:txBody>
+          <a:bodyPr wrap="square" lIns="0" tIns="0" rIns="0" bIns="0" rtlCol="0" anchor="ctr"/>
+          <a:lstStyle/>
+          <a:p>
+            <a:pPr indent="0" marL="0">
+              <a:buNone/>
+            </a:pPr>
+            <a:r>
+              <a:rPr lang="en-US" sz="1050" b="1" dirty="0">
+                <a:solidFill>
+                  <a:srgbClr val="A8761F"/>
+                </a:solidFill>
+                <a:latin typeface="Yu Gothic" pitchFamily="34" charset="0"/>
+                <a:ea typeface="Yu Gothic" pitchFamily="34" charset="-122"/>
+                <a:cs typeface="Yu Gothic" pitchFamily="34" charset="-120"/>
+              </a:rPr>
+              <a:t>今回の特約：最低2年〜　3年以上と同じ条件でお受けします</a:t>
+            </a:r>
+            <a:endParaRPr lang="en-US" sz="1050" dirty="0"/>
+          </a:p>
+        </p:txBody>
+      </p:sp>
+      <p:sp>
+        <p:nvSpPr>
+          <p:cNvPr id="23" name="Shape 20"/>
+          <p:cNvSpPr/>
+          <p:nvPr/>
+        </p:nvSpPr>
+        <p:spPr>
+          <a:xfrm>
+            <a:off x="660197" y="3333902"/>
+            <a:ext cx="10871302" cy="384048"/>
+          </a:xfrm>
+          <a:prstGeom prst="roundRect">
+            <a:avLst>
+              <a:gd name="adj" fmla="val 11905"/>
+            </a:avLst>
+          </a:prstGeom>
+          <a:solidFill>
+            <a:srgbClr val="F1F8F3"/>
+          </a:solidFill>
+          <a:ln w="12700">
+            <a:solidFill>
+              <a:srgbClr val="D2E7DA"/>
+            </a:solidFill>
+            <a:prstDash val="solid"/>
+          </a:ln>
+        </p:spPr>
+      </p:sp>
+      <p:sp>
+        <p:nvSpPr>
+          <p:cNvPr id="24" name="Text 21"/>
+          <p:cNvSpPr/>
+          <p:nvPr/>
+        </p:nvSpPr>
+        <p:spPr>
+          <a:xfrm>
+            <a:off x="879653" y="3333902"/>
+            <a:ext cx="10432390" cy="384048"/>
+          </a:xfrm>
+          <a:prstGeom prst="rect">
+            <a:avLst/>
+          </a:prstGeom>
+          <a:noFill/>
+          <a:ln/>
+        </p:spPr>
+        <p:txBody>
+          <a:bodyPr wrap="square" lIns="0" tIns="0" rIns="0" bIns="0" rtlCol="0" anchor="ctr"/>
+          <a:lstStyle/>
+          <a:p>
+            <a:pPr indent="0" marL="0">
+              <a:buNone/>
+            </a:pPr>
+            <a:r>
+              <a:rPr lang="en-US" sz="1050" b="1" dirty="0">
+                <a:solidFill>
+                  <a:srgbClr val="106838"/>
+                </a:solidFill>
+                <a:latin typeface="Yu Gothic" pitchFamily="34" charset="0"/>
+                <a:ea typeface="Yu Gothic" pitchFamily="34" charset="-122"/>
+                <a:cs typeface="Yu Gothic" pitchFamily="34" charset="-120"/>
+              </a:rPr>
+              <a:t>基本契約：3年〜　トライアルの1年を含めて通算します</a:t>
+            </a:r>
+            <a:endParaRPr lang="en-US" sz="1050" dirty="0"/>
+          </a:p>
+        </p:txBody>
+      </p:sp>
+      <p:sp>
+        <p:nvSpPr>
+          <p:cNvPr id="25" name="Shape 22"/>
+          <p:cNvSpPr/>
+          <p:nvPr/>
+        </p:nvSpPr>
+        <p:spPr>
+          <a:xfrm>
+            <a:off x="660197" y="3877056"/>
+            <a:ext cx="3440887" cy="1847088"/>
+          </a:xfrm>
+          <a:prstGeom prst="roundRect">
+            <a:avLst>
+              <a:gd name="adj" fmla="val 2970"/>
+            </a:avLst>
+          </a:prstGeom>
+          <a:solidFill>
+            <a:srgbClr val="F1F8F3"/>
           </a:solidFill>
           <a:ln w="9525">
             <a:solidFill>
-              <a:srgbClr val="EFEAE0"/>
+              <a:srgbClr val="D2E7DA"/>
             </a:solidFill>
             <a:prstDash val="solid"/>
           </a:ln>
@@ -3892,7 +4489,7 @@
       </p:sp>
       <p:pic>
         <p:nvPicPr>
-          <p:cNvPr id="10" name="Image 1" descr="/home/user/suzuki-ceo/selfcafe-miraiya-trial-deck/assets/icons/LuTimer-green.png">    </p:cNvPr>
+          <p:cNvPr id="26" name="Image 1" descr="/home/user/suzuki-ceo/selfcafe-miraiya-trial-deck/assets/icons/LuTimer-green.png">    </p:cNvPr>
           <p:cNvPicPr>
             <a:picLocks noChangeAspect="1"/>
           </p:cNvPicPr>
@@ -3906,8 +4503,8 @@
         </p:blipFill>
         <p:spPr>
           <a:xfrm>
-            <a:off x="934517" y="1925726"/>
-            <a:ext cx="365760" cy="365760"/>
+            <a:off x="916229" y="4078224"/>
+            <a:ext cx="329184" cy="329184"/>
           </a:xfrm>
           <a:prstGeom prst="rect">
             <a:avLst/>
@@ -3916,123 +4513,14 @@
       </p:pic>
       <p:sp>
         <p:nvSpPr>
-          <p:cNvPr id="11" name="Text 7"/>
-          <p:cNvSpPr/>
-          <p:nvPr/>
-        </p:nvSpPr>
-        <p:spPr>
-          <a:xfrm>
-            <a:off x="934517" y="2437790"/>
-            <a:ext cx="2892247" cy="256032"/>
-          </a:xfrm>
-          <a:prstGeom prst="rect">
-            <a:avLst/>
-          </a:prstGeom>
-          <a:noFill/>
-          <a:ln/>
-        </p:spPr>
-        <p:txBody>
-          <a:bodyPr wrap="square" lIns="0" tIns="0" rIns="0" bIns="0" rtlCol="0" anchor="ctr"/>
-          <a:lstStyle/>
-          <a:p>
-            <a:pPr indent="0" marL="0">
-              <a:buNone/>
-            </a:pPr>
-            <a:r>
-              <a:rPr lang="en-US" sz="1100" b="1" dirty="0">
-                <a:solidFill>
-                  <a:srgbClr val="7E8882"/>
-                </a:solidFill>
-                <a:latin typeface="Yu Gothic" pitchFamily="34" charset="0"/>
-                <a:ea typeface="Yu Gothic" pitchFamily="34" charset="-122"/>
-                <a:cs typeface="Yu Gothic" pitchFamily="34" charset="-120"/>
-              </a:rPr>
-              <a:t>トライアル期間</a:t>
-            </a:r>
-            <a:endParaRPr lang="en-US" sz="1100" dirty="0"/>
-          </a:p>
-        </p:txBody>
-      </p:sp>
-      <p:sp>
-        <p:nvSpPr>
-          <p:cNvPr id="12" name="Text 8"/>
-          <p:cNvSpPr/>
-          <p:nvPr/>
-        </p:nvSpPr>
-        <p:spPr>
-          <a:xfrm>
-            <a:off x="934517" y="2712110"/>
-            <a:ext cx="2892247" cy="676656"/>
-          </a:xfrm>
-          <a:prstGeom prst="rect">
-            <a:avLst/>
-          </a:prstGeom>
-          <a:noFill/>
-          <a:ln/>
-        </p:spPr>
-        <p:txBody>
-          <a:bodyPr wrap="square" lIns="0" tIns="0" rIns="0" bIns="0" rtlCol="0" anchor="ctr"/>
-          <a:lstStyle/>
-          <a:p>
-            <a:pPr indent="0" marL="0">
-              <a:buNone/>
-            </a:pPr>
-            <a:r>
-              <a:rPr lang="en-US" sz="4000" b="1" dirty="0">
-                <a:solidFill>
-                  <a:srgbClr val="106838"/>
-                </a:solidFill>
-                <a:latin typeface="Arial" pitchFamily="34" charset="0"/>
-                <a:ea typeface="Arial" pitchFamily="34" charset="-122"/>
-                <a:cs typeface="Arial" pitchFamily="34" charset="-120"/>
-              </a:rPr>
-              <a:t>1</a:t>
-            </a:r>
-            <a:r>
-              <a:rPr lang="en-US" sz="1600" b="1" dirty="0">
-                <a:solidFill>
-                  <a:srgbClr val="106838"/>
-                </a:solidFill>
-                <a:latin typeface="Yu Gothic" pitchFamily="34" charset="0"/>
-                <a:ea typeface="Yu Gothic" pitchFamily="34" charset="-122"/>
-                <a:cs typeface="Yu Gothic" pitchFamily="34" charset="-120"/>
-              </a:rPr>
-              <a:t> 年</a:t>
-            </a:r>
-            <a:endParaRPr lang="en-US" sz="4000" dirty="0"/>
-          </a:p>
-        </p:txBody>
-      </p:sp>
-      <p:sp>
-        <p:nvSpPr>
-          <p:cNvPr id="13" name="Shape 9"/>
-          <p:cNvSpPr/>
-          <p:nvPr/>
-        </p:nvSpPr>
-        <p:spPr>
-          <a:xfrm>
-            <a:off x="934517" y="3480206"/>
-            <a:ext cx="2892247" cy="10058"/>
-          </a:xfrm>
-          <a:prstGeom prst="rect">
-            <a:avLst/>
-          </a:prstGeom>
-          <a:solidFill>
-            <a:srgbClr val="EFEAE0"/>
-          </a:solidFill>
-          <a:ln/>
-        </p:spPr>
-      </p:sp>
-      <p:sp>
-        <p:nvSpPr>
-          <p:cNvPr id="14" name="Text 10"/>
-          <p:cNvSpPr/>
-          <p:nvPr/>
-        </p:nvSpPr>
-        <p:spPr>
-          <a:xfrm>
-            <a:off x="934517" y="3626510"/>
-            <a:ext cx="2892247" cy="859536"/>
+          <p:cNvPr id="27" name="Text 23"/>
+          <p:cNvSpPr/>
+          <p:nvPr/>
+        </p:nvSpPr>
+        <p:spPr>
+          <a:xfrm>
+            <a:off x="916229" y="4517136"/>
+            <a:ext cx="2928823" cy="457200"/>
           </a:xfrm>
           <a:prstGeom prst="rect">
             <a:avLst/>
@@ -4046,12 +4534,54 @@
           <a:p>
             <a:pPr indent="0" marL="0">
               <a:lnSpc>
-                <a:spcPct val="140000"/>
+                <a:spcPct val="120000"/>
               </a:lnSpc>
               <a:buNone/>
             </a:pPr>
             <a:r>
-              <a:rPr lang="en-US" sz="1000" dirty="0">
+              <a:rPr lang="en-US" sz="1200" b="1" dirty="0">
+                <a:solidFill>
+                  <a:srgbClr val="0A3D23"/>
+                </a:solidFill>
+                <a:latin typeface="Yu Gothic" pitchFamily="34" charset="0"/>
+                <a:ea typeface="Yu Gothic" pitchFamily="34" charset="-122"/>
+                <a:cs typeface="Yu Gothic" pitchFamily="34" charset="-120"/>
+              </a:rPr>
+              <a:t>1年目はトライアル</a:t>
+            </a:r>
+            <a:endParaRPr lang="en-US" sz="1200" dirty="0"/>
+          </a:p>
+        </p:txBody>
+      </p:sp>
+      <p:sp>
+        <p:nvSpPr>
+          <p:cNvPr id="28" name="Text 24"/>
+          <p:cNvSpPr/>
+          <p:nvPr/>
+        </p:nvSpPr>
+        <p:spPr>
+          <a:xfrm>
+            <a:off x="916229" y="5029200"/>
+            <a:ext cx="2928823" cy="603504"/>
+          </a:xfrm>
+          <a:prstGeom prst="rect">
+            <a:avLst/>
+          </a:prstGeom>
+          <a:noFill/>
+          <a:ln/>
+        </p:spPr>
+        <p:txBody>
+          <a:bodyPr wrap="square" lIns="0" tIns="0" rIns="0" bIns="0" rtlCol="0" anchor="t"/>
+          <a:lstStyle/>
+          <a:p>
+            <a:pPr indent="0" marL="0">
+              <a:lnSpc>
+                <a:spcPct val="135000"/>
+              </a:lnSpc>
+              <a:buNone/>
+            </a:pPr>
+            <a:r>
+              <a:rPr lang="en-US" sz="950" dirty="0">
                 <a:solidFill>
                   <a:srgbClr val="4B5550"/>
                 </a:solidFill>
@@ -4059,34 +4589,34 @@
                 <a:ea typeface="Yu Gothic" pitchFamily="34" charset="-122"/>
                 <a:cs typeface="Yu Gothic" pitchFamily="34" charset="-120"/>
               </a:rPr>
-              <a:t>実際の販売杯数と、清掃・補充の運営負荷をご確認いただく期間として1年を想定しています。</a:t>
-            </a:r>
-            <a:endParaRPr lang="en-US" sz="1000" dirty="0"/>
-          </a:p>
-        </p:txBody>
-      </p:sp>
-      <p:sp>
-        <p:nvSpPr>
-          <p:cNvPr id="15" name="Shape 11"/>
-          <p:cNvSpPr/>
-          <p:nvPr/>
-        </p:nvSpPr>
-        <p:spPr>
-          <a:xfrm>
-            <a:off x="4375404" y="1651406"/>
-            <a:ext cx="3440887" cy="2926080"/>
+              <a:t>実際の販売杯数と、清掃・補充の運営負荷をご確認いただく期間です。お支払いは売上の25％のみとなります。</a:t>
+            </a:r>
+            <a:endParaRPr lang="en-US" sz="950" dirty="0"/>
+          </a:p>
+        </p:txBody>
+      </p:sp>
+      <p:sp>
+        <p:nvSpPr>
+          <p:cNvPr id="29" name="Shape 25"/>
+          <p:cNvSpPr/>
+          <p:nvPr/>
+        </p:nvSpPr>
+        <p:spPr>
+          <a:xfrm>
+            <a:off x="4375404" y="3877056"/>
+            <a:ext cx="3440887" cy="1847088"/>
           </a:xfrm>
           <a:prstGeom prst="roundRect">
             <a:avLst>
-              <a:gd name="adj" fmla="val 1875"/>
+              <a:gd name="adj" fmla="val 2970"/>
             </a:avLst>
           </a:prstGeom>
           <a:solidFill>
-            <a:srgbClr val="FFFFFF"/>
+            <a:srgbClr val="F1F8F3"/>
           </a:solidFill>
           <a:ln w="9525">
             <a:solidFill>
-              <a:srgbClr val="EFEAE0"/>
+              <a:srgbClr val="D2E7DA"/>
             </a:solidFill>
             <a:prstDash val="solid"/>
           </a:ln>
@@ -4094,7 +4624,7 @@
       </p:sp>
       <p:pic>
         <p:nvPicPr>
-          <p:cNvPr id="16" name="Image 2" descr="/home/user/suzuki-ceo/selfcafe-miraiya-trial-deck/assets/icons/LuFileCheck-green.png">    </p:cNvPr>
+          <p:cNvPr id="30" name="Image 2" descr="/home/user/suzuki-ceo/selfcafe-miraiya-trial-deck/assets/icons/LuHandCoins-green.png">    </p:cNvPr>
           <p:cNvPicPr>
             <a:picLocks noChangeAspect="1"/>
           </p:cNvPicPr>
@@ -4108,8 +4638,8 @@
         </p:blipFill>
         <p:spPr>
           <a:xfrm>
-            <a:off x="4649724" y="1925726"/>
-            <a:ext cx="365760" cy="365760"/>
+            <a:off x="4631436" y="4078224"/>
+            <a:ext cx="329184" cy="329184"/>
           </a:xfrm>
           <a:prstGeom prst="rect">
             <a:avLst/>
@@ -4118,123 +4648,14 @@
       </p:pic>
       <p:sp>
         <p:nvSpPr>
-          <p:cNvPr id="17" name="Text 12"/>
-          <p:cNvSpPr/>
-          <p:nvPr/>
-        </p:nvSpPr>
-        <p:spPr>
-          <a:xfrm>
-            <a:off x="4649724" y="2437790"/>
-            <a:ext cx="2892247" cy="256032"/>
-          </a:xfrm>
-          <a:prstGeom prst="rect">
-            <a:avLst/>
-          </a:prstGeom>
-          <a:noFill/>
-          <a:ln/>
-        </p:spPr>
-        <p:txBody>
-          <a:bodyPr wrap="square" lIns="0" tIns="0" rIns="0" bIns="0" rtlCol="0" anchor="ctr"/>
-          <a:lstStyle/>
-          <a:p>
-            <a:pPr indent="0" marL="0">
-              <a:buNone/>
-            </a:pPr>
-            <a:r>
-              <a:rPr lang="en-US" sz="1100" b="1" dirty="0">
-                <a:solidFill>
-                  <a:srgbClr val="7E8882"/>
-                </a:solidFill>
-                <a:latin typeface="Yu Gothic" pitchFamily="34" charset="0"/>
-                <a:ea typeface="Yu Gothic" pitchFamily="34" charset="-122"/>
-                <a:cs typeface="Yu Gothic" pitchFamily="34" charset="-120"/>
-              </a:rPr>
-              <a:t>基本契約</a:t>
-            </a:r>
-            <a:endParaRPr lang="en-US" sz="1100" dirty="0"/>
-          </a:p>
-        </p:txBody>
-      </p:sp>
-      <p:sp>
-        <p:nvSpPr>
-          <p:cNvPr id="18" name="Text 13"/>
-          <p:cNvSpPr/>
-          <p:nvPr/>
-        </p:nvSpPr>
-        <p:spPr>
-          <a:xfrm>
-            <a:off x="4649724" y="2712110"/>
-            <a:ext cx="2892247" cy="676656"/>
-          </a:xfrm>
-          <a:prstGeom prst="rect">
-            <a:avLst/>
-          </a:prstGeom>
-          <a:noFill/>
-          <a:ln/>
-        </p:spPr>
-        <p:txBody>
-          <a:bodyPr wrap="square" lIns="0" tIns="0" rIns="0" bIns="0" rtlCol="0" anchor="ctr"/>
-          <a:lstStyle/>
-          <a:p>
-            <a:pPr indent="0" marL="0">
-              <a:buNone/>
-            </a:pPr>
-            <a:r>
-              <a:rPr lang="en-US" sz="4000" b="1" dirty="0">
-                <a:solidFill>
-                  <a:srgbClr val="106838"/>
-                </a:solidFill>
-                <a:latin typeface="Arial" pitchFamily="34" charset="0"/>
-                <a:ea typeface="Arial" pitchFamily="34" charset="-122"/>
-                <a:cs typeface="Arial" pitchFamily="34" charset="-120"/>
-              </a:rPr>
-              <a:t>3</a:t>
-            </a:r>
-            <a:r>
-              <a:rPr lang="en-US" sz="1600" b="1" dirty="0">
-                <a:solidFill>
-                  <a:srgbClr val="106838"/>
-                </a:solidFill>
-                <a:latin typeface="Yu Gothic" pitchFamily="34" charset="0"/>
-                <a:ea typeface="Yu Gothic" pitchFamily="34" charset="-122"/>
-                <a:cs typeface="Yu Gothic" pitchFamily="34" charset="-120"/>
-              </a:rPr>
-              <a:t> 年〜</a:t>
-            </a:r>
-            <a:endParaRPr lang="en-US" sz="4000" dirty="0"/>
-          </a:p>
-        </p:txBody>
-      </p:sp>
-      <p:sp>
-        <p:nvSpPr>
-          <p:cNvPr id="19" name="Shape 14"/>
-          <p:cNvSpPr/>
-          <p:nvPr/>
-        </p:nvSpPr>
-        <p:spPr>
-          <a:xfrm>
-            <a:off x="4649724" y="3480206"/>
-            <a:ext cx="2892247" cy="10058"/>
-          </a:xfrm>
-          <a:prstGeom prst="rect">
-            <a:avLst/>
-          </a:prstGeom>
-          <a:solidFill>
-            <a:srgbClr val="EFEAE0"/>
-          </a:solidFill>
-          <a:ln/>
-        </p:spPr>
-      </p:sp>
-      <p:sp>
-        <p:nvSpPr>
-          <p:cNvPr id="20" name="Text 15"/>
-          <p:cNvSpPr/>
-          <p:nvPr/>
-        </p:nvSpPr>
-        <p:spPr>
-          <a:xfrm>
-            <a:off x="4649724" y="3626510"/>
-            <a:ext cx="2892247" cy="859536"/>
+          <p:cNvPr id="31" name="Text 26"/>
+          <p:cNvSpPr/>
+          <p:nvPr/>
+        </p:nvSpPr>
+        <p:spPr>
+          <a:xfrm>
+            <a:off x="4631436" y="4517136"/>
+            <a:ext cx="2928823" cy="457200"/>
           </a:xfrm>
           <a:prstGeom prst="rect">
             <a:avLst/>
@@ -4248,12 +4669,54 @@
           <a:p>
             <a:pPr indent="0" marL="0">
               <a:lnSpc>
-                <a:spcPct val="140000"/>
+                <a:spcPct val="120000"/>
               </a:lnSpc>
               <a:buNone/>
             </a:pPr>
             <a:r>
-              <a:rPr lang="en-US" sz="1000" dirty="0">
+              <a:rPr lang="en-US" sz="1200" b="1" dirty="0">
+                <a:solidFill>
+                  <a:srgbClr val="0A3D23"/>
+                </a:solidFill>
+                <a:latin typeface="Yu Gothic" pitchFamily="34" charset="0"/>
+                <a:ea typeface="Yu Gothic" pitchFamily="34" charset="-122"/>
+                <a:cs typeface="Yu Gothic" pitchFamily="34" charset="-120"/>
+              </a:rPr>
+              <a:t>2年目から月額5万円が加算</a:t>
+            </a:r>
+            <a:endParaRPr lang="en-US" sz="1200" dirty="0"/>
+          </a:p>
+        </p:txBody>
+      </p:sp>
+      <p:sp>
+        <p:nvSpPr>
+          <p:cNvPr id="32" name="Text 27"/>
+          <p:cNvSpPr/>
+          <p:nvPr/>
+        </p:nvSpPr>
+        <p:spPr>
+          <a:xfrm>
+            <a:off x="4631436" y="5029200"/>
+            <a:ext cx="2928823" cy="603504"/>
+          </a:xfrm>
+          <a:prstGeom prst="rect">
+            <a:avLst/>
+          </a:prstGeom>
+          <a:noFill/>
+          <a:ln/>
+        </p:spPr>
+        <p:txBody>
+          <a:bodyPr wrap="square" lIns="0" tIns="0" rIns="0" bIns="0" rtlCol="0" anchor="t"/>
+          <a:lstStyle/>
+          <a:p>
+            <a:pPr indent="0" marL="0">
+              <a:lnSpc>
+                <a:spcPct val="135000"/>
+              </a:lnSpc>
+              <a:buNone/>
+            </a:pPr>
+            <a:r>
+              <a:rPr lang="en-US" sz="950" dirty="0">
                 <a:solidFill>
                   <a:srgbClr val="4B5550"/>
                 </a:solidFill>
@@ -4261,34 +4724,34 @@
                 <a:ea typeface="Yu Gothic" pitchFamily="34" charset="-122"/>
                 <a:cs typeface="Yu Gothic" pitchFamily="34" charset="-120"/>
               </a:rPr>
-              <a:t>内装工事費は当社が負担するため、回収に一定の期間が必要です。通常は3年以上でお願いしています。</a:t>
-            </a:r>
-            <a:endParaRPr lang="en-US" sz="1000" dirty="0"/>
-          </a:p>
-        </p:txBody>
-      </p:sp>
-      <p:sp>
-        <p:nvSpPr>
-          <p:cNvPr id="21" name="Shape 16"/>
-          <p:cNvSpPr/>
-          <p:nvPr/>
-        </p:nvSpPr>
-        <p:spPr>
-          <a:xfrm>
-            <a:off x="8090611" y="1651406"/>
-            <a:ext cx="3440887" cy="2926080"/>
+              <a:t>トライアル期間を終えたあとは、売上の25％に月額固定5万円を上乗せしてお支払いします。</a:t>
+            </a:r>
+            <a:endParaRPr lang="en-US" sz="950" dirty="0"/>
+          </a:p>
+        </p:txBody>
+      </p:sp>
+      <p:sp>
+        <p:nvSpPr>
+          <p:cNvPr id="33" name="Shape 28"/>
+          <p:cNvSpPr/>
+          <p:nvPr/>
+        </p:nvSpPr>
+        <p:spPr>
+          <a:xfrm>
+            <a:off x="8090611" y="3877056"/>
+            <a:ext cx="3440887" cy="1847088"/>
           </a:xfrm>
           <a:prstGeom prst="roundRect">
             <a:avLst>
-              <a:gd name="adj" fmla="val 1875"/>
+              <a:gd name="adj" fmla="val 2970"/>
             </a:avLst>
           </a:prstGeom>
           <a:solidFill>
-            <a:srgbClr val="FBF4E4"/>
+            <a:srgbClr val="F1F8F3"/>
           </a:solidFill>
           <a:ln w="9525">
             <a:solidFill>
-              <a:srgbClr val="E7D3A8"/>
+              <a:srgbClr val="D2E7DA"/>
             </a:solidFill>
             <a:prstDash val="solid"/>
           </a:ln>
@@ -4296,7 +4759,7 @@
       </p:sp>
       <p:pic>
         <p:nvPicPr>
-          <p:cNvPr id="22" name="Image 3" descr="/home/user/suzuki-ceo/selfcafe-miraiya-trial-deck/assets/icons/LuBadgeCheck-gold.png">    </p:cNvPr>
+          <p:cNvPr id="34" name="Image 3" descr="/home/user/suzuki-ceo/selfcafe-miraiya-trial-deck/assets/icons/LuFileCheck-green.png">    </p:cNvPr>
           <p:cNvPicPr>
             <a:picLocks noChangeAspect="1"/>
           </p:cNvPicPr>
@@ -4310,8 +4773,8 @@
         </p:blipFill>
         <p:spPr>
           <a:xfrm>
-            <a:off x="8364931" y="1925726"/>
-            <a:ext cx="365760" cy="365760"/>
+            <a:off x="8346643" y="4078224"/>
+            <a:ext cx="329184" cy="329184"/>
           </a:xfrm>
           <a:prstGeom prst="rect">
             <a:avLst/>
@@ -4320,123 +4783,14 @@
       </p:pic>
       <p:sp>
         <p:nvSpPr>
-          <p:cNvPr id="23" name="Text 17"/>
-          <p:cNvSpPr/>
-          <p:nvPr/>
-        </p:nvSpPr>
-        <p:spPr>
-          <a:xfrm>
-            <a:off x="8364931" y="2437790"/>
-            <a:ext cx="2892247" cy="256032"/>
-          </a:xfrm>
-          <a:prstGeom prst="rect">
-            <a:avLst/>
-          </a:prstGeom>
-          <a:noFill/>
-          <a:ln/>
-        </p:spPr>
-        <p:txBody>
-          <a:bodyPr wrap="square" lIns="0" tIns="0" rIns="0" bIns="0" rtlCol="0" anchor="ctr"/>
-          <a:lstStyle/>
-          <a:p>
-            <a:pPr indent="0" marL="0">
-              <a:buNone/>
-            </a:pPr>
-            <a:r>
-              <a:rPr lang="en-US" sz="1100" b="1" dirty="0">
-                <a:solidFill>
-                  <a:srgbClr val="A8761F"/>
-                </a:solidFill>
-                <a:latin typeface="Yu Gothic" pitchFamily="34" charset="0"/>
-                <a:ea typeface="Yu Gothic" pitchFamily="34" charset="-122"/>
-                <a:cs typeface="Yu Gothic" pitchFamily="34" charset="-120"/>
-              </a:rPr>
-              <a:t>今回の特約</a:t>
-            </a:r>
-            <a:endParaRPr lang="en-US" sz="1100" dirty="0"/>
-          </a:p>
-        </p:txBody>
-      </p:sp>
-      <p:sp>
-        <p:nvSpPr>
-          <p:cNvPr id="24" name="Text 18"/>
-          <p:cNvSpPr/>
-          <p:nvPr/>
-        </p:nvSpPr>
-        <p:spPr>
-          <a:xfrm>
-            <a:off x="8364931" y="2712110"/>
-            <a:ext cx="2892247" cy="676656"/>
-          </a:xfrm>
-          <a:prstGeom prst="rect">
-            <a:avLst/>
-          </a:prstGeom>
-          <a:noFill/>
-          <a:ln/>
-        </p:spPr>
-        <p:txBody>
-          <a:bodyPr wrap="square" lIns="0" tIns="0" rIns="0" bIns="0" rtlCol="0" anchor="ctr"/>
-          <a:lstStyle/>
-          <a:p>
-            <a:pPr indent="0" marL="0">
-              <a:buNone/>
-            </a:pPr>
-            <a:r>
-              <a:rPr lang="en-US" sz="4000" b="1" dirty="0">
-                <a:solidFill>
-                  <a:srgbClr val="A8761F"/>
-                </a:solidFill>
-                <a:latin typeface="Arial" pitchFamily="34" charset="0"/>
-                <a:ea typeface="Arial" pitchFamily="34" charset="-122"/>
-                <a:cs typeface="Arial" pitchFamily="34" charset="-120"/>
-              </a:rPr>
-              <a:t>2</a:t>
-            </a:r>
-            <a:r>
-              <a:rPr lang="en-US" sz="1600" b="1" dirty="0">
-                <a:solidFill>
-                  <a:srgbClr val="A8761F"/>
-                </a:solidFill>
-                <a:latin typeface="Yu Gothic" pitchFamily="34" charset="0"/>
-                <a:ea typeface="Yu Gothic" pitchFamily="34" charset="-122"/>
-                <a:cs typeface="Yu Gothic" pitchFamily="34" charset="-120"/>
-              </a:rPr>
-              <a:t> 年〜</a:t>
-            </a:r>
-            <a:endParaRPr lang="en-US" sz="4000" dirty="0"/>
-          </a:p>
-        </p:txBody>
-      </p:sp>
-      <p:sp>
-        <p:nvSpPr>
-          <p:cNvPr id="25" name="Shape 19"/>
-          <p:cNvSpPr/>
-          <p:nvPr/>
-        </p:nvSpPr>
-        <p:spPr>
-          <a:xfrm>
-            <a:off x="8364931" y="3480206"/>
-            <a:ext cx="2892247" cy="10058"/>
-          </a:xfrm>
-          <a:prstGeom prst="rect">
-            <a:avLst/>
-          </a:prstGeom>
-          <a:solidFill>
-            <a:srgbClr val="E7D3A8"/>
-          </a:solidFill>
-          <a:ln/>
-        </p:spPr>
-      </p:sp>
-      <p:sp>
-        <p:nvSpPr>
-          <p:cNvPr id="26" name="Text 20"/>
-          <p:cNvSpPr/>
-          <p:nvPr/>
-        </p:nvSpPr>
-        <p:spPr>
-          <a:xfrm>
-            <a:off x="8364931" y="3626510"/>
-            <a:ext cx="2892247" cy="859536"/>
+          <p:cNvPr id="35" name="Text 29"/>
+          <p:cNvSpPr/>
+          <p:nvPr/>
+        </p:nvSpPr>
+        <p:spPr>
+          <a:xfrm>
+            <a:off x="8346643" y="4517136"/>
+            <a:ext cx="2928823" cy="457200"/>
           </a:xfrm>
           <a:prstGeom prst="rect">
             <a:avLst/>
@@ -4450,12 +4804,54 @@
           <a:p>
             <a:pPr indent="0" marL="0">
               <a:lnSpc>
-                <a:spcPct val="140000"/>
+                <a:spcPct val="120000"/>
               </a:lnSpc>
               <a:buNone/>
             </a:pPr>
             <a:r>
-              <a:rPr lang="en-US" sz="1000" dirty="0">
+              <a:rPr lang="en-US" sz="1200" b="1" dirty="0">
+                <a:solidFill>
+                  <a:srgbClr val="0A3D23"/>
+                </a:solidFill>
+                <a:latin typeface="Yu Gothic" pitchFamily="34" charset="0"/>
+                <a:ea typeface="Yu Gothic" pitchFamily="34" charset="-122"/>
+                <a:cs typeface="Yu Gothic" pitchFamily="34" charset="-120"/>
+              </a:rPr>
+              <a:t>3年を基本とする理由</a:t>
+            </a:r>
+            <a:endParaRPr lang="en-US" sz="1200" dirty="0"/>
+          </a:p>
+        </p:txBody>
+      </p:sp>
+      <p:sp>
+        <p:nvSpPr>
+          <p:cNvPr id="36" name="Text 30"/>
+          <p:cNvSpPr/>
+          <p:nvPr/>
+        </p:nvSpPr>
+        <p:spPr>
+          <a:xfrm>
+            <a:off x="8346643" y="5029200"/>
+            <a:ext cx="2928823" cy="603504"/>
+          </a:xfrm>
+          <a:prstGeom prst="rect">
+            <a:avLst/>
+          </a:prstGeom>
+          <a:noFill/>
+          <a:ln/>
+        </p:spPr>
+        <p:txBody>
+          <a:bodyPr wrap="square" lIns="0" tIns="0" rIns="0" bIns="0" rtlCol="0" anchor="t"/>
+          <a:lstStyle/>
+          <a:p>
+            <a:pPr indent="0" marL="0">
+              <a:lnSpc>
+                <a:spcPct val="135000"/>
+              </a:lnSpc>
+              <a:buNone/>
+            </a:pPr>
+            <a:r>
+              <a:rPr lang="en-US" sz="950" dirty="0">
                 <a:solidFill>
                   <a:srgbClr val="4B5550"/>
                 </a:solidFill>
@@ -4463,123 +4859,15 @@
                 <a:ea typeface="Yu Gothic" pitchFamily="34" charset="-122"/>
                 <a:cs typeface="Yu Gothic" pitchFamily="34" charset="-120"/>
               </a:rPr>
-              <a:t>今回は特約として、最低2年からでも3年以上と同じ条件でお受けします。</a:t>
-            </a:r>
-            <a:endParaRPr lang="en-US" sz="1000" dirty="0"/>
-          </a:p>
-        </p:txBody>
-      </p:sp>
-      <p:sp>
-        <p:nvSpPr>
-          <p:cNvPr id="27" name="Shape 21"/>
-          <p:cNvSpPr/>
-          <p:nvPr/>
-        </p:nvSpPr>
-        <p:spPr>
-          <a:xfrm>
-            <a:off x="660197" y="4718304"/>
-            <a:ext cx="10871302" cy="1005840"/>
-          </a:xfrm>
-          <a:prstGeom prst="roundRect">
-            <a:avLst>
-              <a:gd name="adj" fmla="val 5455"/>
-            </a:avLst>
-          </a:prstGeom>
-          <a:solidFill>
-            <a:srgbClr val="0C5230"/>
-          </a:solidFill>
-          <a:ln/>
-        </p:spPr>
-      </p:sp>
-      <p:pic>
-        <p:nvPicPr>
-          <p:cNvPr id="28" name="Image 4" descr="/home/user/suzuki-ceo/selfcafe-miraiya-trial-deck/assets/icons/LuHandCoins-pale.png">    </p:cNvPr>
-          <p:cNvPicPr>
-            <a:picLocks noChangeAspect="1"/>
-          </p:cNvPicPr>
-          <p:nvPr/>
-        </p:nvPicPr>
-        <p:blipFill>
-          <a:blip r:embed="rId5"/>
-          <a:stretch>
-            <a:fillRect/>
-          </a:stretch>
-        </p:blipFill>
-        <p:spPr>
-          <a:xfrm>
-            <a:off x="1007669" y="4992624"/>
-            <a:ext cx="402336" cy="402336"/>
-          </a:xfrm>
-          <a:prstGeom prst="rect">
-            <a:avLst/>
-          </a:prstGeom>
-        </p:spPr>
-      </p:pic>
-      <p:sp>
-        <p:nvSpPr>
-          <p:cNvPr id="29" name="Text 22"/>
-          <p:cNvSpPr/>
-          <p:nvPr/>
-        </p:nvSpPr>
-        <p:spPr>
-          <a:xfrm>
-            <a:off x="1574597" y="4718304"/>
-            <a:ext cx="9591142" cy="1005840"/>
-          </a:xfrm>
-          <a:prstGeom prst="rect">
-            <a:avLst/>
-          </a:prstGeom>
-          <a:noFill/>
-          <a:ln/>
-        </p:spPr>
-        <p:txBody>
-          <a:bodyPr wrap="square" lIns="0" tIns="0" rIns="0" bIns="0" rtlCol="0" anchor="ctr"/>
-          <a:lstStyle/>
-          <a:p>
-            <a:pPr indent="0" marL="0">
-              <a:lnSpc>
-                <a:spcPct val="125000"/>
-              </a:lnSpc>
-              <a:buNone/>
-            </a:pPr>
-            <a:r>
-              <a:rPr lang="en-US" sz="1400" b="1" dirty="0">
-                <a:solidFill>
-                  <a:srgbClr val="FFFFFF"/>
-                </a:solidFill>
-                <a:latin typeface="Yu Gothic" pitchFamily="34" charset="0"/>
-                <a:ea typeface="Yu Gothic" pitchFamily="34" charset="-122"/>
-                <a:cs typeface="Yu Gothic" pitchFamily="34" charset="-120"/>
-              </a:rPr>
-              <a:t>通常は3年以上が条件ですが、今回は2年からでも同じ条件でお受けします。</a:t>
-            </a:r>
-            <a:endParaRPr lang="en-US" sz="1400" dirty="0"/>
-          </a:p>
-          <a:p>
-            <a:pPr indent="0" marL="0">
-              <a:lnSpc>
-                <a:spcPct val="125000"/>
-              </a:lnSpc>
-              <a:buNone/>
-            </a:pPr>
-            <a:r>
-              <a:rPr lang="en-US" sz="1100" dirty="0">
-                <a:solidFill>
-                  <a:srgbClr val="AFC2B8"/>
-                </a:solidFill>
-                <a:latin typeface="Yu Gothic" pitchFamily="34" charset="0"/>
-                <a:ea typeface="Yu Gothic" pitchFamily="34" charset="-122"/>
-                <a:cs typeface="Yu Gothic" pitchFamily="34" charset="-120"/>
-              </a:rPr>
-              <a:t>工事費は当社が負担し、原状回復もいただかないため、御社側の期間リスクは小さく抑えられます。</a:t>
-            </a:r>
-            <a:endParaRPr lang="en-US" sz="1400" dirty="0"/>
-          </a:p>
-        </p:txBody>
-      </p:sp>
-      <p:sp>
-        <p:nvSpPr>
-          <p:cNvPr id="30" name="Text 23"/>
+              <a:t>内装工事費は当社が負担するため、回収に一定の期間が必要です。今回は特約として2年からお受けします。</a:t>
+            </a:r>
+            <a:endParaRPr lang="en-US" sz="950" dirty="0"/>
+          </a:p>
+        </p:txBody>
+      </p:sp>
+      <p:sp>
+        <p:nvSpPr>
+          <p:cNvPr id="37" name="Text 31"/>
           <p:cNvSpPr/>
           <p:nvPr/>
         </p:nvSpPr>
@@ -4610,7 +4898,7 @@
                 <a:ea typeface="Yu Gothic" pitchFamily="34" charset="-122"/>
                 <a:cs typeface="Yu Gothic" pitchFamily="34" charset="-120"/>
               </a:rPr>
-              <a:t>※ トライアル期間（1年）と基本契約期間の通算の扱いは、契約書にて明記させていただきます。</a:t>
+              <a:t>※ トライアル期間（1年）は契約期間に含みます。特約を適用した場合、最低契約期間はトライアル1年＋本格運用1年の計2年となります。</a:t>
             </a:r>
             <a:endParaRPr lang="en-US" sz="850" dirty="0"/>
           </a:p>

--- a/selfcafe-miraiya-trial-deck/selfcafe-miraiya-trial-deck.pptx
+++ b/selfcafe-miraiya-trial-deck/selfcafe-miraiya-trial-deck.pptx
@@ -12,9 +12,10 @@
     <p:sldId id="260" r:id="rId6"/>
     <p:sldId id="261" r:id="rId7"/>
     <p:sldId id="262" r:id="rId8"/>
+    <p:sldId id="263" r:id="rId9"/>
   </p:sldIdLst>
   <p:notesMasterIdLst>
-    <p:notesMasterId r:id="rId9"/>
+    <p:notesMasterId r:id="rId10"/>
   </p:notesMasterIdLst>
   <p:sldSz cx="12192000" cy="6858000"/>
   <p:notesSz cx="6858000" cy="12192000"/>
@@ -1060,6 +1061,94 @@
             <a:fld id="{F7021451-1387-4CA6-816F-3879F97B5CBC}" type="slidenum">
               <a:rPr lang="en-US"/>
               <a:t>7</a:t>
+            </a:fld>
+            <a:endParaRPr lang="en-US"/>
+          </a:p>
+        </p:txBody>
+      </p:sp>
+    </p:spTree>
+    <p:extLst>
+      <p:ext uri="{BB962C8B-B14F-4D97-AF65-F5344CB8AC3E}">
+        <p14:creationId xmlns:p14="http://schemas.microsoft.com/office/powerpoint/2010/main" val="1024086991"/>
+      </p:ext>
+    </p:extLst>
+  </p:cSld>
+  <p:clrMapOvr>
+    <a:masterClrMapping/>
+  </p:clrMapOvr>
+</p:notes>
+</file>
+
+<file path=ppt/notesSlides/notesSlide8.xml><?xml version="1.0" encoding="utf-8"?>
+<p:notes xmlns:a="http://schemas.openxmlformats.org/drawingml/2006/main" xmlns:r="http://schemas.openxmlformats.org/officeDocument/2006/relationships" xmlns:p="http://schemas.openxmlformats.org/presentationml/2006/main">
+  <p:cSld>
+    <p:spTree>
+      <p:nvGrpSpPr>
+        <p:cNvPr id="1" name=""/>
+        <p:cNvGrpSpPr/>
+        <p:nvPr/>
+      </p:nvGrpSpPr>
+      <p:grpSpPr>
+        <a:xfrm>
+          <a:off x="0" y="0"/>
+          <a:ext cx="0" cy="0"/>
+          <a:chOff x="0" y="0"/>
+          <a:chExt cx="0" cy="0"/>
+        </a:xfrm>
+      </p:grpSpPr>
+      <p:sp>
+        <p:nvSpPr>
+          <p:cNvPr id="2" name="Slide Image Placeholder 1"/>
+          <p:cNvSpPr>
+            <a:spLocks noGrp="1" noRot="1" noChangeAspect="1"/>
+          </p:cNvSpPr>
+          <p:nvPr>
+            <p:ph type="sldImg"/>
+          </p:nvPr>
+        </p:nvSpPr>
+        <p:spPr/>
+      </p:sp>
+      <p:sp>
+        <p:nvSpPr>
+          <p:cNvPr id="3" name="Notes Placeholder 2"/>
+          <p:cNvSpPr>
+            <a:spLocks noGrp="1"/>
+          </p:cNvSpPr>
+          <p:nvPr>
+            <p:ph type="body" idx="1"/>
+          </p:nvPr>
+        </p:nvSpPr>
+        <p:spPr/>
+        <p:txBody>
+          <a:bodyPr/>
+          <a:lstStyle/>
+          <a:p>
+            <a:r>
+              <a:rPr lang="en-US" dirty="0"/>
+              <a:t/>
+            </a:r>
+            <a:endParaRPr lang="en-US" dirty="0"/>
+          </a:p>
+        </p:txBody>
+      </p:sp>
+      <p:sp>
+        <p:nvSpPr>
+          <p:cNvPr id="4" name="Slide Number Placeholder 3"/>
+          <p:cNvSpPr>
+            <a:spLocks noGrp="1"/>
+          </p:cNvSpPr>
+          <p:nvPr>
+            <p:ph type="sldNum" sz="quarter" idx="10"/>
+          </p:nvPr>
+        </p:nvSpPr>
+        <p:spPr/>
+        <p:txBody>
+          <a:bodyPr/>
+          <a:lstStyle/>
+          <a:p>
+            <a:fld id="{F7021451-1387-4CA6-816F-3879F97B5CBC}" type="slidenum">
+              <a:rPr lang="en-US"/>
+              <a:t>8</a:t>
             </a:fld>
             <a:endParaRPr lang="en-US"/>
           </a:p>
@@ -1623,7 +1712,7 @@
                 <a:ea typeface="Yu Gothic" pitchFamily="34" charset="-122"/>
                 <a:cs typeface="Yu Gothic" pitchFamily="34" charset="-120"/>
               </a:rPr>
-              <a:t>内装工事は当社が負担し、原状回復義務もいただきません。</a:t>
+              <a:t>1年間のトライアルからお試しいただけます。内装工事費は当社が負担し、</a:t>
             </a:r>
             <a:endParaRPr lang="en-US" sz="1250" dirty="0"/>
           </a:p>
@@ -1643,7 +1732,7 @@
                 <a:ea typeface="Yu Gothic" pitchFamily="34" charset="-122"/>
                 <a:cs typeface="Yu Gothic" pitchFamily="34" charset="-120"/>
               </a:rPr>
-              <a:t>まずは実際の数字をご確認いただいたうえで、その先をご判断ください。</a:t>
+              <a:t>原状回復義務もいただきません。まずは実際の数字をご確認ください。</a:t>
             </a:r>
             <a:endParaRPr lang="en-US" sz="1250" dirty="0"/>
           </a:p>
@@ -1702,7 +1791,7 @@
                 <a:ea typeface="Arial" pitchFamily="34" charset="-122"/>
                 <a:cs typeface="Arial" pitchFamily="34" charset="-120"/>
               </a:rPr>
-              <a:t>0</a:t>
+              <a:t>1</a:t>
             </a:r>
             <a:r>
               <a:rPr lang="en-US" sz="1200" b="1" dirty="0">
@@ -1713,7 +1802,7 @@
                 <a:ea typeface="Yu Gothic" pitchFamily="34" charset="-122"/>
                 <a:cs typeface="Yu Gothic" pitchFamily="34" charset="-120"/>
               </a:rPr>
-              <a:t> 円</a:t>
+              <a:t> 年</a:t>
             </a:r>
             <a:endParaRPr lang="en-US" sz="2600" dirty="0"/>
           </a:p>
@@ -1752,7 +1841,7 @@
                 <a:ea typeface="Yu Gothic" pitchFamily="34" charset="-122"/>
                 <a:cs typeface="Yu Gothic" pitchFamily="34" charset="-120"/>
               </a:rPr>
-              <a:t>内装工事費のご負担</a:t>
+              <a:t>トライアルの契約期間</a:t>
             </a:r>
             <a:endParaRPr lang="en-US" sz="950" dirty="0"/>
           </a:p>
@@ -1841,7 +1930,7 @@
                 <a:ea typeface="Yu Gothic" pitchFamily="34" charset="-122"/>
                 <a:cs typeface="Yu Gothic" pitchFamily="34" charset="-120"/>
               </a:rPr>
-              <a:t>トライアル期間中のお受取</a:t>
+              <a:t>売上からのお受取</a:t>
             </a:r>
             <a:endParaRPr lang="en-US" sz="950" dirty="0"/>
           </a:p>
@@ -1873,6 +1962,17 @@
             </a:pPr>
             <a:r>
               <a:rPr lang="en-US" sz="2600" b="1" dirty="0">
+                <a:solidFill>
+                  <a:srgbClr val="FFFFFF"/>
+                </a:solidFill>
+                <a:latin typeface="Arial" pitchFamily="34" charset="0"/>
+                <a:ea typeface="Arial" pitchFamily="34" charset="-122"/>
+                <a:cs typeface="Arial" pitchFamily="34" charset="-120"/>
+              </a:rPr>
+              <a:t>0</a:t>
+            </a:r>
+            <a:r>
+              <a:rPr lang="en-US" sz="1200" b="1" dirty="0">
                 <a:solidFill>
                   <a:srgbClr val="FFFFFF"/>
                 </a:solidFill>
@@ -1880,7 +1980,7 @@
                 <a:ea typeface="Yu Gothic" pitchFamily="34" charset="-122"/>
                 <a:cs typeface="Yu Gothic" pitchFamily="34" charset="-120"/>
               </a:rPr>
-              <a:t>なし</a:t>
+              <a:t> 円</a:t>
             </a:r>
             <a:endParaRPr lang="en-US" sz="2600" dirty="0"/>
           </a:p>
@@ -1919,7 +2019,7 @@
                 <a:ea typeface="Yu Gothic" pitchFamily="34" charset="-122"/>
                 <a:cs typeface="Yu Gothic" pitchFamily="34" charset="-120"/>
               </a:rPr>
-              <a:t>原状回復義務</a:t>
+              <a:t>内装工事費のご負担</a:t>
             </a:r>
             <a:endParaRPr lang="en-US" sz="950" dirty="0"/>
           </a:p>
@@ -2409,7 +2509,7 @@
                 <a:ea typeface="Yu Gothic" pitchFamily="34" charset="-122"/>
                 <a:cs typeface="Yu Gothic" pitchFamily="34" charset="-120"/>
               </a:rPr>
-              <a:t>スタンダード仕様（既存の書店併設店と同じ設え）</a:t>
+              <a:t>プレミアム仕様（木製書架・間接照明の書店一体型）</a:t>
             </a:r>
             <a:endParaRPr lang="en-US" sz="1050" dirty="0"/>
           </a:p>
@@ -2796,7 +2896,7 @@
                 <a:ea typeface="Yu Gothic" pitchFamily="34" charset="-122"/>
                 <a:cs typeface="Yu Gothic" pitchFamily="34" charset="-120"/>
               </a:rPr>
-              <a:t>トライアル中は売上の25％／2年目以降は＋月額5万円</a:t>
+              <a:t>セルフカフェ売上の25％を毎月お支払いします</a:t>
             </a:r>
             <a:endParaRPr lang="en-US" sz="1050" dirty="0"/>
           </a:p>
@@ -2925,7 +3025,7 @@
                 <a:ea typeface="Yu Gothic" pitchFamily="34" charset="-122"/>
                 <a:cs typeface="Yu Gothic" pitchFamily="34" charset="-120"/>
               </a:rPr>
-              <a:t>基本3年〜（トライアル1年を含む）／特約で最低2年〜</a:t>
+              <a:t>1年（通常は3年以上のところ、今回は1年で）</a:t>
             </a:r>
             <a:endParaRPr lang="en-US" sz="1050" dirty="0"/>
           </a:p>
@@ -3090,7 +3190,7 @@
         </p:nvSpPr>
         <p:spPr>
           <a:xfrm>
-            <a:off x="8158277" y="1834286"/>
+            <a:off x="8158277" y="1870862"/>
             <a:ext cx="2377440" cy="164592"/>
           </a:xfrm>
           <a:prstGeom prst="rect">
@@ -3129,8 +3229,8 @@
         </p:nvSpPr>
         <p:spPr>
           <a:xfrm>
-            <a:off x="8158277" y="2053742"/>
-            <a:ext cx="3117190" cy="219456"/>
+            <a:off x="8158277" y="2145182"/>
+            <a:ext cx="3117190" cy="256032"/>
           </a:xfrm>
           <a:prstGeom prst="rect">
             <a:avLst/>
@@ -3146,7 +3246,7 @@
               <a:buNone/>
             </a:pPr>
             <a:r>
-              <a:rPr lang="en-US" sz="950" dirty="0">
+              <a:rPr lang="en-US" sz="1100" dirty="0">
                 <a:solidFill>
                   <a:srgbClr val="AFC2B8"/>
                 </a:solidFill>
@@ -3154,9 +3254,9 @@
                 <a:ea typeface="Yu Gothic" pitchFamily="34" charset="-122"/>
                 <a:cs typeface="Yu Gothic" pitchFamily="34" charset="-120"/>
               </a:rPr>
-              <a:t>トライアル期間（1年目）</a:t>
-            </a:r>
-            <a:endParaRPr lang="en-US" sz="950" dirty="0"/>
+              <a:t>御社へのお支払い</a:t>
+            </a:r>
+            <a:endParaRPr lang="en-US" sz="1100" dirty="0"/>
           </a:p>
         </p:txBody>
       </p:sp>
@@ -3168,8 +3268,8 @@
         </p:nvSpPr>
         <p:spPr>
           <a:xfrm>
-            <a:off x="8158277" y="2273198"/>
-            <a:ext cx="3117190" cy="530352"/>
+            <a:off x="8158277" y="2474366"/>
+            <a:ext cx="3117190" cy="731520"/>
           </a:xfrm>
           <a:prstGeom prst="rect">
             <a:avLst/>
@@ -3185,7 +3285,7 @@
               <a:buNone/>
             </a:pPr>
             <a:r>
-              <a:rPr lang="en-US" sz="1300" dirty="0">
+              <a:rPr lang="en-US" sz="1400" dirty="0">
                 <a:solidFill>
                   <a:srgbClr val="FFFFFF"/>
                 </a:solidFill>
@@ -3196,7 +3296,7 @@
               <a:t>売上の </a:t>
             </a:r>
             <a:r>
-              <a:rPr lang="en-US" sz="3000" b="1" dirty="0">
+              <a:rPr lang="en-US" sz="4000" b="1" dirty="0">
                 <a:solidFill>
                   <a:srgbClr val="F0C05A"/>
                 </a:solidFill>
@@ -3207,7 +3307,7 @@
               <a:t>25</a:t>
             </a:r>
             <a:r>
-              <a:rPr lang="en-US" sz="1500" b="1" dirty="0">
+              <a:rPr lang="en-US" sz="1700" b="1" dirty="0">
                 <a:solidFill>
                   <a:srgbClr val="F0C05A"/>
                 </a:solidFill>
@@ -3217,40 +3317,20 @@
               </a:rPr>
               <a:t> ％</a:t>
             </a:r>
-            <a:endParaRPr lang="en-US" sz="1300" dirty="0"/>
-          </a:p>
-        </p:txBody>
-      </p:sp>
-      <p:sp>
-        <p:nvSpPr>
-          <p:cNvPr id="37" name="Shape 28"/>
-          <p:cNvSpPr/>
-          <p:nvPr/>
-        </p:nvSpPr>
-        <p:spPr>
-          <a:xfrm>
-            <a:off x="8158277" y="2876702"/>
-            <a:ext cx="3117190" cy="10058"/>
-          </a:xfrm>
-          <a:prstGeom prst="rect">
-            <a:avLst/>
-          </a:prstGeom>
-          <a:solidFill>
-            <a:srgbClr val="2A7A4E"/>
-          </a:solidFill>
-          <a:ln/>
-        </p:spPr>
-      </p:sp>
-      <p:sp>
-        <p:nvSpPr>
-          <p:cNvPr id="38" name="Text 29"/>
-          <p:cNvSpPr/>
-          <p:nvPr/>
-        </p:nvSpPr>
-        <p:spPr>
-          <a:xfrm>
-            <a:off x="8158277" y="2968142"/>
-            <a:ext cx="3117190" cy="219456"/>
+            <a:endParaRPr lang="en-US" sz="1400" dirty="0"/>
+          </a:p>
+        </p:txBody>
+      </p:sp>
+      <p:sp>
+        <p:nvSpPr>
+          <p:cNvPr id="37" name="Text 28"/>
+          <p:cNvSpPr/>
+          <p:nvPr/>
+        </p:nvSpPr>
+        <p:spPr>
+          <a:xfrm>
+            <a:off x="8158277" y="3279038"/>
+            <a:ext cx="3117190" cy="274320"/>
           </a:xfrm>
           <a:prstGeom prst="rect">
             <a:avLst/>
@@ -3274,7 +3354,7 @@
                 <a:ea typeface="Yu Gothic" pitchFamily="34" charset="-122"/>
                 <a:cs typeface="Yu Gothic" pitchFamily="34" charset="-120"/>
               </a:rPr>
-              <a:t>2年目以降</a:t>
+              <a:t>毎月お支払いします（税抜）</a:t>
             </a:r>
             <a:endParaRPr lang="en-US" sz="950" dirty="0"/>
           </a:p>
@@ -3282,57 +3362,7 @@
       </p:sp>
       <p:sp>
         <p:nvSpPr>
-          <p:cNvPr id="39" name="Text 30"/>
-          <p:cNvSpPr/>
-          <p:nvPr/>
-        </p:nvSpPr>
-        <p:spPr>
-          <a:xfrm>
-            <a:off x="8158277" y="3205886"/>
-            <a:ext cx="3117190" cy="420624"/>
-          </a:xfrm>
-          <a:prstGeom prst="rect">
-            <a:avLst/>
-          </a:prstGeom>
-          <a:noFill/>
-          <a:ln/>
-        </p:spPr>
-        <p:txBody>
-          <a:bodyPr wrap="square" lIns="0" tIns="0" rIns="0" bIns="0" rtlCol="0" anchor="ctr"/>
-          <a:lstStyle/>
-          <a:p>
-            <a:pPr indent="0" marL="0">
-              <a:buNone/>
-            </a:pPr>
-            <a:r>
-              <a:rPr lang="en-US" sz="1200" b="1" dirty="0">
-                <a:solidFill>
-                  <a:srgbClr val="FFFFFF"/>
-                </a:solidFill>
-                <a:latin typeface="Yu Gothic" pitchFamily="34" charset="0"/>
-                <a:ea typeface="Yu Gothic" pitchFamily="34" charset="-122"/>
-                <a:cs typeface="Yu Gothic" pitchFamily="34" charset="-120"/>
-              </a:rPr>
-              <a:t>売上の25％ </a:t>
-            </a:r>
-            <a:r>
-              <a:rPr lang="en-US" sz="1250" b="1" dirty="0">
-                <a:solidFill>
-                  <a:srgbClr val="F0C05A"/>
-                </a:solidFill>
-                <a:latin typeface="Yu Gothic" pitchFamily="34" charset="0"/>
-                <a:ea typeface="Yu Gothic" pitchFamily="34" charset="-122"/>
-                <a:cs typeface="Yu Gothic" pitchFamily="34" charset="-120"/>
-              </a:rPr>
-              <a:t>＋ 月額固定 5万円</a:t>
-            </a:r>
-            <a:endParaRPr lang="en-US" sz="1200" dirty="0"/>
-          </a:p>
-        </p:txBody>
-      </p:sp>
-      <p:sp>
-        <p:nvSpPr>
-          <p:cNvPr id="40" name="Shape 31"/>
+          <p:cNvPr id="38" name="Shape 29"/>
           <p:cNvSpPr/>
           <p:nvPr/>
         </p:nvSpPr>
@@ -3359,7 +3389,7 @@
       </p:sp>
       <p:sp>
         <p:nvSpPr>
-          <p:cNvPr id="41" name="Text 32"/>
+          <p:cNvPr id="39" name="Text 30"/>
           <p:cNvSpPr/>
           <p:nvPr/>
         </p:nvSpPr>
@@ -3398,7 +3428,7 @@
       </p:sp>
       <p:sp>
         <p:nvSpPr>
-          <p:cNvPr id="42" name="Text 33"/>
+          <p:cNvPr id="40" name="Text 31"/>
           <p:cNvSpPr/>
           <p:nvPr/>
         </p:nvSpPr>
@@ -3460,7 +3490,7 @@
       </p:sp>
       <p:sp>
         <p:nvSpPr>
-          <p:cNvPr id="43" name="Shape 34"/>
+          <p:cNvPr id="41" name="Shape 32"/>
           <p:cNvSpPr/>
           <p:nvPr/>
         </p:nvSpPr>
@@ -3487,7 +3517,7 @@
       </p:sp>
       <p:pic>
         <p:nvPicPr>
-          <p:cNvPr id="44" name="Image 7" descr="/home/user/suzuki-ceo/selfcafe-miraiya-trial-deck/assets/icons/LuShieldCheck-green.png">    </p:cNvPr>
+          <p:cNvPr id="42" name="Image 7" descr="/home/user/suzuki-ceo/selfcafe-miraiya-trial-deck/assets/icons/LuShieldCheck-green.png">    </p:cNvPr>
           <p:cNvPicPr>
             <a:picLocks noChangeAspect="1"/>
           </p:cNvPicPr>
@@ -3511,7 +3541,7 @@
       </p:pic>
       <p:sp>
         <p:nvSpPr>
-          <p:cNvPr id="45" name="Text 35"/>
+          <p:cNvPr id="43" name="Text 33"/>
           <p:cNvSpPr/>
           <p:nvPr/>
         </p:nvSpPr>
@@ -3550,7 +3580,7 @@
       </p:sp>
       <p:sp>
         <p:nvSpPr>
-          <p:cNvPr id="46" name="Text 36"/>
+          <p:cNvPr id="44" name="Text 34"/>
           <p:cNvSpPr/>
           <p:nvPr/>
         </p:nvSpPr>
@@ -3592,7 +3622,7 @@
       </p:sp>
       <p:sp>
         <p:nvSpPr>
-          <p:cNvPr id="47" name="Text 37"/>
+          <p:cNvPr id="45" name="Text 35"/>
           <p:cNvSpPr/>
           <p:nvPr/>
         </p:nvSpPr>
@@ -3623,7 +3653,7 @@
                 <a:ea typeface="Yu Gothic" pitchFamily="34" charset="-122"/>
                 <a:cs typeface="Yu Gothic" pitchFamily="34" charset="-120"/>
               </a:rPr>
-              <a:t>※ 金額はすべて税抜。トライアル期間（1年）は契約期間に含みます。対象店舗はご相談のうえ決定させていただきます。</a:t>
+              <a:t>※ 金額はすべて税抜。通常のご契約との違いは次ページに整理しています。対象店舗はご相談のうえ決定させていただきます。</a:t>
             </a:r>
             <a:endParaRPr lang="en-US" sz="850" dirty="0"/>
           </a:p>
@@ -3725,7 +3755,7 @@
                 <a:ea typeface="Yu Gothic" pitchFamily="34" charset="-122"/>
                 <a:cs typeface="Yu Gothic" pitchFamily="34" charset="-120"/>
               </a:rPr>
-              <a:t>   契約期間の考え方</a:t>
+              <a:t>   通常契約との比較</a:t>
             </a:r>
             <a:endParaRPr lang="en-US" sz="1050" dirty="0"/>
           </a:p>
@@ -3764,7 +3794,7 @@
                 <a:ea typeface="Yu Gothic" pitchFamily="34" charset="-122"/>
                 <a:cs typeface="Yu Gothic" pitchFamily="34" charset="-120"/>
               </a:rPr>
-              <a:t>トライアルの1年も、契約期間に含みます。</a:t>
+              <a:t>違いは、契約期間と月額5万円だけです。</a:t>
             </a:r>
             <a:endParaRPr lang="en-US" sz="2900" dirty="0"/>
           </a:p>
@@ -3803,7 +3833,7 @@
                 <a:ea typeface="Yu Gothic" pitchFamily="34" charset="-122"/>
                 <a:cs typeface="Yu Gothic" pitchFamily="34" charset="-120"/>
               </a:rPr>
-              <a:t>内装工事費を当社が負担するため、基本契約は3年以上とさせていただいています。</a:t>
+              <a:t>通常は3年以上でお願いしていますが、今回は1年のトライアルとしてご提案します。</a:t>
             </a:r>
             <a:endParaRPr lang="en-US" sz="1250" dirty="0"/>
           </a:p>
@@ -3913,14 +3943,36 @@
       </p:sp>
       <p:sp>
         <p:nvSpPr>
-          <p:cNvPr id="9" name="Text 6"/>
-          <p:cNvSpPr/>
-          <p:nvPr/>
-        </p:nvSpPr>
-        <p:spPr>
-          <a:xfrm>
-            <a:off x="660197" y="1651406"/>
-            <a:ext cx="3550615" cy="219456"/>
+          <p:cNvPr id="9" name="Shape 6"/>
+          <p:cNvSpPr/>
+          <p:nvPr/>
+        </p:nvSpPr>
+        <p:spPr>
+          <a:xfrm>
+            <a:off x="7518197" y="1706270"/>
+            <a:ext cx="4013302" cy="274320"/>
+          </a:xfrm>
+          <a:prstGeom prst="roundRect">
+            <a:avLst>
+              <a:gd name="adj" fmla="val 16667"/>
+            </a:avLst>
+          </a:prstGeom>
+          <a:solidFill>
+            <a:srgbClr val="A8761F"/>
+          </a:solidFill>
+          <a:ln/>
+        </p:spPr>
+      </p:sp>
+      <p:sp>
+        <p:nvSpPr>
+          <p:cNvPr id="10" name="Text 7"/>
+          <p:cNvSpPr/>
+          <p:nvPr/>
+        </p:nvSpPr>
+        <p:spPr>
+          <a:xfrm>
+            <a:off x="7518197" y="1706270"/>
+            <a:ext cx="4013302" cy="274320"/>
           </a:xfrm>
           <a:prstGeom prst="rect">
             <a:avLst/>
@@ -3932,177 +3984,1717 @@
           <a:bodyPr wrap="square" lIns="0" tIns="0" rIns="0" bIns="0" rtlCol="0" anchor="ctr"/>
           <a:lstStyle/>
           <a:p>
-            <a:pPr indent="0" marL="0">
-              <a:buNone/>
-            </a:pPr>
-            <a:r>
-              <a:rPr lang="en-US" sz="1000" b="1" dirty="0">
-                <a:solidFill>
-                  <a:srgbClr val="7E8882"/>
+            <a:pPr algn="ctr" indent="0" marL="0">
+              <a:buNone/>
+            </a:pPr>
+            <a:r>
+              <a:rPr lang="en-US" sz="950" b="1" dirty="0">
+                <a:solidFill>
+                  <a:srgbClr val="FFFFFF"/>
                 </a:solidFill>
                 <a:latin typeface="Yu Gothic" pitchFamily="34" charset="0"/>
                 <a:ea typeface="Yu Gothic" pitchFamily="34" charset="-122"/>
                 <a:cs typeface="Yu Gothic" pitchFamily="34" charset="-120"/>
               </a:rPr>
-              <a:t>1年目</a:t>
-            </a:r>
-            <a:endParaRPr lang="en-US" sz="1000" dirty="0"/>
-          </a:p>
-        </p:txBody>
-      </p:sp>
-      <p:sp>
-        <p:nvSpPr>
-          <p:cNvPr id="10" name="Shape 7"/>
-          <p:cNvSpPr/>
-          <p:nvPr/>
-        </p:nvSpPr>
-        <p:spPr>
-          <a:xfrm>
-            <a:off x="660197" y="1925726"/>
-            <a:ext cx="3550615" cy="786384"/>
+              <a:t>今回ご提案するのはこちら</a:t>
+            </a:r>
+            <a:endParaRPr lang="en-US" sz="950" dirty="0"/>
+          </a:p>
+        </p:txBody>
+      </p:sp>
+      <p:graphicFrame>
+        <p:nvGraphicFramePr>
+          <p:cNvPr id="4" name="Table 0"/>
+          <p:cNvGraphicFramePr>
+            <a:graphicFrameLocks noGrp="1"/>
+          </p:cNvGraphicFramePr>
+          <p:nvPr>
+            <p:extLst>
+              <p:ext uri="{D42A27DB-BD31-4B8C-83A1-F6EECF244321}">
+                <p14:modId xmlns:p14="http://schemas.microsoft.com/office/powerpoint/2010/main" val="1579011935"/>
+              </p:ext>
+            </p:extLst>
+          </p:nvPr>
+        </p:nvGraphicFramePr>
+        <p:xfrm>
+          <a:off x="660197" y="2053742"/>
+          <a:ext cx="10871302" cy="914400"/>
+        </p:xfrm>
+        <a:graphic>
+          <a:graphicData uri="http://schemas.openxmlformats.org/drawingml/2006/table">
+            <a:tbl>
+              <a:tblPr/>
+              <a:tblGrid>
+                <a:gridCol w="2926080"/>
+                <a:gridCol w="3931920"/>
+                <a:gridCol w="4013302"/>
+              </a:tblGrid>
+              <a:tr h="347472">
+                <a:tc>
+                  <a:txBody>
+                    <a:bodyPr/>
+                    <a:lstStyle/>
+                    <a:p>
+                      <a:pPr algn="l" indent="0" marL="0">
+                        <a:buNone/>
+                      </a:pPr>
+                      <a:r>
+                        <a:rPr lang="en-US" sz="1150" b="1" dirty="0">
+                          <a:solidFill>
+                            <a:srgbClr val="0A3D23"/>
+                          </a:solidFill>
+                          <a:latin typeface="Yu Gothic" pitchFamily="34" charset="0"/>
+                          <a:ea typeface="Yu Gothic" pitchFamily="34" charset="-122"/>
+                          <a:cs typeface="Yu Gothic" pitchFamily="34" charset="-120"/>
+                        </a:rPr>
+                        <a:t>項目</a:t>
+                      </a:r>
+                      <a:endParaRPr lang="en-US" sz="1150" dirty="0">
+                        <a:latin typeface="Yu Gothic" charset="0"/>
+                        <a:ea typeface="Yu Gothic" charset="0"/>
+                        <a:cs typeface="Yu Gothic" charset="0"/>
+                      </a:endParaRPr>
+                    </a:p>
+                  </a:txBody>
+                  <a:tcPr marL="128016" marR="128016" marT="45720" marB="45720" anchor="ctr">
+                    <a:lnL w="9525" cap="flat" cmpd="sng" algn="ctr">
+                      <a:solidFill>
+                        <a:srgbClr val="EFEAE0"/>
+                      </a:solidFill>
+                      <a:prstDash val="solid"/>
+                      <a:round/>
+                      <a:headEnd type="none" w="med" len="med"/>
+                      <a:tailEnd type="none" w="med" len="med"/>
+                    </a:lnL>
+                    <a:lnR w="9525" cap="flat" cmpd="sng" algn="ctr">
+                      <a:solidFill>
+                        <a:srgbClr val="EFEAE0"/>
+                      </a:solidFill>
+                      <a:prstDash val="solid"/>
+                      <a:round/>
+                      <a:headEnd type="none" w="med" len="med"/>
+                      <a:tailEnd type="none" w="med" len="med"/>
+                    </a:lnR>
+                    <a:lnT w="9525" cap="flat" cmpd="sng" algn="ctr">
+                      <a:solidFill>
+                        <a:srgbClr val="EFEAE0"/>
+                      </a:solidFill>
+                      <a:prstDash val="solid"/>
+                      <a:round/>
+                      <a:headEnd type="none" w="med" len="med"/>
+                      <a:tailEnd type="none" w="med" len="med"/>
+                    </a:lnT>
+                    <a:lnB w="9525" cap="flat" cmpd="sng" algn="ctr">
+                      <a:solidFill>
+                        <a:srgbClr val="EFEAE0"/>
+                      </a:solidFill>
+                      <a:prstDash val="solid"/>
+                      <a:round/>
+                      <a:headEnd type="none" w="med" len="med"/>
+                      <a:tailEnd type="none" w="med" len="med"/>
+                    </a:lnB>
+                    <a:solidFill>
+                      <a:srgbClr val="F4F2EE"/>
+                    </a:solidFill>
+                  </a:tcPr>
+                </a:tc>
+                <a:tc>
+                  <a:txBody>
+                    <a:bodyPr/>
+                    <a:lstStyle/>
+                    <a:p>
+                      <a:pPr algn="l" indent="0" marL="0">
+                        <a:buNone/>
+                      </a:pPr>
+                      <a:r>
+                        <a:rPr lang="en-US" sz="1150" b="1" dirty="0">
+                          <a:solidFill>
+                            <a:srgbClr val="FFFFFF"/>
+                          </a:solidFill>
+                          <a:latin typeface="Yu Gothic" pitchFamily="34" charset="0"/>
+                          <a:ea typeface="Yu Gothic" pitchFamily="34" charset="-122"/>
+                          <a:cs typeface="Yu Gothic" pitchFamily="34" charset="-120"/>
+                        </a:rPr>
+                        <a:t>通常のご契約</a:t>
+                      </a:r>
+                      <a:endParaRPr lang="en-US" sz="1150" dirty="0">
+                        <a:latin typeface="Yu Gothic" charset="0"/>
+                        <a:ea typeface="Yu Gothic" charset="0"/>
+                        <a:cs typeface="Yu Gothic" charset="0"/>
+                      </a:endParaRPr>
+                    </a:p>
+                  </a:txBody>
+                  <a:tcPr marL="128016" marR="128016" marT="45720" marB="45720" anchor="ctr">
+                    <a:lnL w="9525" cap="flat" cmpd="sng" algn="ctr">
+                      <a:solidFill>
+                        <a:srgbClr val="EFEAE0"/>
+                      </a:solidFill>
+                      <a:prstDash val="solid"/>
+                      <a:round/>
+                      <a:headEnd type="none" w="med" len="med"/>
+                      <a:tailEnd type="none" w="med" len="med"/>
+                    </a:lnL>
+                    <a:lnR w="9525" cap="flat" cmpd="sng" algn="ctr">
+                      <a:solidFill>
+                        <a:srgbClr val="EFEAE0"/>
+                      </a:solidFill>
+                      <a:prstDash val="solid"/>
+                      <a:round/>
+                      <a:headEnd type="none" w="med" len="med"/>
+                      <a:tailEnd type="none" w="med" len="med"/>
+                    </a:lnR>
+                    <a:lnT w="9525" cap="flat" cmpd="sng" algn="ctr">
+                      <a:solidFill>
+                        <a:srgbClr val="EFEAE0"/>
+                      </a:solidFill>
+                      <a:prstDash val="solid"/>
+                      <a:round/>
+                      <a:headEnd type="none" w="med" len="med"/>
+                      <a:tailEnd type="none" w="med" len="med"/>
+                    </a:lnT>
+                    <a:lnB w="9525" cap="flat" cmpd="sng" algn="ctr">
+                      <a:solidFill>
+                        <a:srgbClr val="EFEAE0"/>
+                      </a:solidFill>
+                      <a:prstDash val="solid"/>
+                      <a:round/>
+                      <a:headEnd type="none" w="med" len="med"/>
+                      <a:tailEnd type="none" w="med" len="med"/>
+                    </a:lnB>
+                    <a:solidFill>
+                      <a:srgbClr val="8E8B84"/>
+                    </a:solidFill>
+                  </a:tcPr>
+                </a:tc>
+                <a:tc>
+                  <a:txBody>
+                    <a:bodyPr/>
+                    <a:lstStyle/>
+                    <a:p>
+                      <a:pPr algn="l" indent="0" marL="0">
+                        <a:buNone/>
+                      </a:pPr>
+                      <a:r>
+                        <a:rPr lang="en-US" sz="1150" b="1" dirty="0">
+                          <a:solidFill>
+                            <a:srgbClr val="FFFFFF"/>
+                          </a:solidFill>
+                          <a:latin typeface="Yu Gothic" pitchFamily="34" charset="0"/>
+                          <a:ea typeface="Yu Gothic" pitchFamily="34" charset="-122"/>
+                          <a:cs typeface="Yu Gothic" pitchFamily="34" charset="-120"/>
+                        </a:rPr>
+                        <a:t>今回のトライアル</a:t>
+                      </a:r>
+                      <a:endParaRPr lang="en-US" sz="1150" dirty="0">
+                        <a:latin typeface="Yu Gothic" charset="0"/>
+                        <a:ea typeface="Yu Gothic" charset="0"/>
+                        <a:cs typeface="Yu Gothic" charset="0"/>
+                      </a:endParaRPr>
+                    </a:p>
+                  </a:txBody>
+                  <a:tcPr marL="128016" marR="128016" marT="45720" marB="45720" anchor="ctr">
+                    <a:lnL w="9525" cap="flat" cmpd="sng" algn="ctr">
+                      <a:solidFill>
+                        <a:srgbClr val="EFEAE0"/>
+                      </a:solidFill>
+                      <a:prstDash val="solid"/>
+                      <a:round/>
+                      <a:headEnd type="none" w="med" len="med"/>
+                      <a:tailEnd type="none" w="med" len="med"/>
+                    </a:lnL>
+                    <a:lnR w="9525" cap="flat" cmpd="sng" algn="ctr">
+                      <a:solidFill>
+                        <a:srgbClr val="EFEAE0"/>
+                      </a:solidFill>
+                      <a:prstDash val="solid"/>
+                      <a:round/>
+                      <a:headEnd type="none" w="med" len="med"/>
+                      <a:tailEnd type="none" w="med" len="med"/>
+                    </a:lnR>
+                    <a:lnT w="9525" cap="flat" cmpd="sng" algn="ctr">
+                      <a:solidFill>
+                        <a:srgbClr val="EFEAE0"/>
+                      </a:solidFill>
+                      <a:prstDash val="solid"/>
+                      <a:round/>
+                      <a:headEnd type="none" w="med" len="med"/>
+                      <a:tailEnd type="none" w="med" len="med"/>
+                    </a:lnT>
+                    <a:lnB w="9525" cap="flat" cmpd="sng" algn="ctr">
+                      <a:solidFill>
+                        <a:srgbClr val="EFEAE0"/>
+                      </a:solidFill>
+                      <a:prstDash val="solid"/>
+                      <a:round/>
+                      <a:headEnd type="none" w="med" len="med"/>
+                      <a:tailEnd type="none" w="med" len="med"/>
+                    </a:lnB>
+                    <a:solidFill>
+                      <a:srgbClr val="0C5230"/>
+                    </a:solidFill>
+                  </a:tcPr>
+                </a:tc>
+              </a:tr>
+              <a:tr h="384048">
+                <a:tc>
+                  <a:txBody>
+                    <a:bodyPr/>
+                    <a:lstStyle/>
+                    <a:p>
+                      <a:pPr indent="0" marL="0">
+                        <a:buNone/>
+                      </a:pPr>
+                      <a:r>
+                        <a:rPr lang="en-US" sz="1200" b="1" dirty="0">
+                          <a:solidFill>
+                            <a:srgbClr val="0A3D23"/>
+                          </a:solidFill>
+                          <a:latin typeface="Yu Gothic" pitchFamily="34" charset="0"/>
+                          <a:ea typeface="Yu Gothic" pitchFamily="34" charset="-122"/>
+                          <a:cs typeface="Yu Gothic" pitchFamily="34" charset="-120"/>
+                        </a:rPr>
+                        <a:t>契約期間</a:t>
+                      </a:r>
+                      <a:endParaRPr lang="en-US" sz="1200" dirty="0">
+                        <a:latin typeface="Yu Gothic" charset="0"/>
+                        <a:ea typeface="Yu Gothic" charset="0"/>
+                        <a:cs typeface="Yu Gothic" charset="0"/>
+                      </a:endParaRPr>
+                    </a:p>
+                  </a:txBody>
+                  <a:tcPr marL="128016" marR="128016" marT="45720" marB="45720" anchor="ctr">
+                    <a:lnL w="9525" cap="flat" cmpd="sng" algn="ctr">
+                      <a:solidFill>
+                        <a:srgbClr val="EFEAE0"/>
+                      </a:solidFill>
+                      <a:prstDash val="solid"/>
+                      <a:round/>
+                      <a:headEnd type="none" w="med" len="med"/>
+                      <a:tailEnd type="none" w="med" len="med"/>
+                    </a:lnL>
+                    <a:lnR w="9525" cap="flat" cmpd="sng" algn="ctr">
+                      <a:solidFill>
+                        <a:srgbClr val="EFEAE0"/>
+                      </a:solidFill>
+                      <a:prstDash val="solid"/>
+                      <a:round/>
+                      <a:headEnd type="none" w="med" len="med"/>
+                      <a:tailEnd type="none" w="med" len="med"/>
+                    </a:lnR>
+                    <a:lnT w="9525" cap="flat" cmpd="sng" algn="ctr">
+                      <a:solidFill>
+                        <a:srgbClr val="EFEAE0"/>
+                      </a:solidFill>
+                      <a:prstDash val="solid"/>
+                      <a:round/>
+                      <a:headEnd type="none" w="med" len="med"/>
+                      <a:tailEnd type="none" w="med" len="med"/>
+                    </a:lnT>
+                    <a:lnB w="9525" cap="flat" cmpd="sng" algn="ctr">
+                      <a:solidFill>
+                        <a:srgbClr val="EFEAE0"/>
+                      </a:solidFill>
+                      <a:prstDash val="solid"/>
+                      <a:round/>
+                      <a:headEnd type="none" w="med" len="med"/>
+                      <a:tailEnd type="none" w="med" len="med"/>
+                    </a:lnB>
+                    <a:solidFill>
+                      <a:srgbClr val="F4F2EE"/>
+                    </a:solidFill>
+                  </a:tcPr>
+                </a:tc>
+                <a:tc>
+                  <a:txBody>
+                    <a:bodyPr/>
+                    <a:lstStyle/>
+                    <a:p>
+                      <a:pPr indent="0" marL="0">
+                        <a:buNone/>
+                      </a:pPr>
+                      <a:r>
+                        <a:rPr lang="en-US" sz="1100" dirty="0">
+                          <a:solidFill>
+                            <a:srgbClr val="6E6A61"/>
+                          </a:solidFill>
+                          <a:latin typeface="Yu Gothic" pitchFamily="34" charset="0"/>
+                          <a:ea typeface="Yu Gothic" pitchFamily="34" charset="-122"/>
+                          <a:cs typeface="Yu Gothic" pitchFamily="34" charset="-120"/>
+                        </a:rPr>
+                        <a:t>3年〜</a:t>
+                      </a:r>
+                      <a:endParaRPr lang="en-US" sz="1100" dirty="0">
+                        <a:latin typeface="Yu Gothic" charset="0"/>
+                        <a:ea typeface="Yu Gothic" charset="0"/>
+                        <a:cs typeface="Yu Gothic" charset="0"/>
+                      </a:endParaRPr>
+                    </a:p>
+                  </a:txBody>
+                  <a:tcPr marL="146304" marR="146304" marT="54864" marB="54864" anchor="ctr">
+                    <a:lnL w="9525" cap="flat" cmpd="sng" algn="ctr">
+                      <a:solidFill>
+                        <a:srgbClr val="EFEAE0"/>
+                      </a:solidFill>
+                      <a:prstDash val="solid"/>
+                      <a:round/>
+                      <a:headEnd type="none" w="med" len="med"/>
+                      <a:tailEnd type="none" w="med" len="med"/>
+                    </a:lnL>
+                    <a:lnR w="9525" cap="flat" cmpd="sng" algn="ctr">
+                      <a:solidFill>
+                        <a:srgbClr val="EFEAE0"/>
+                      </a:solidFill>
+                      <a:prstDash val="solid"/>
+                      <a:round/>
+                      <a:headEnd type="none" w="med" len="med"/>
+                      <a:tailEnd type="none" w="med" len="med"/>
+                    </a:lnR>
+                    <a:lnT w="9525" cap="flat" cmpd="sng" algn="ctr">
+                      <a:solidFill>
+                        <a:srgbClr val="EFEAE0"/>
+                      </a:solidFill>
+                      <a:prstDash val="solid"/>
+                      <a:round/>
+                      <a:headEnd type="none" w="med" len="med"/>
+                      <a:tailEnd type="none" w="med" len="med"/>
+                    </a:lnT>
+                    <a:lnB w="9525" cap="flat" cmpd="sng" algn="ctr">
+                      <a:solidFill>
+                        <a:srgbClr val="EFEAE0"/>
+                      </a:solidFill>
+                      <a:prstDash val="solid"/>
+                      <a:round/>
+                      <a:headEnd type="none" w="med" len="med"/>
+                      <a:tailEnd type="none" w="med" len="med"/>
+                    </a:lnB>
+                    <a:solidFill>
+                      <a:srgbClr val="FFFFFF"/>
+                    </a:solidFill>
+                  </a:tcPr>
+                </a:tc>
+                <a:tc>
+                  <a:txBody>
+                    <a:bodyPr/>
+                    <a:lstStyle/>
+                    <a:p>
+                      <a:pPr indent="0" marL="0">
+                        <a:buNone/>
+                      </a:pPr>
+                      <a:r>
+                        <a:rPr lang="en-US" sz="1200" b="1" dirty="0">
+                          <a:solidFill>
+                            <a:srgbClr val="A8761F"/>
+                          </a:solidFill>
+                          <a:latin typeface="Yu Gothic" pitchFamily="34" charset="0"/>
+                          <a:ea typeface="Yu Gothic" pitchFamily="34" charset="-122"/>
+                          <a:cs typeface="Yu Gothic" pitchFamily="34" charset="-120"/>
+                        </a:rPr>
+                        <a:t>1年</a:t>
+                      </a:r>
+                      <a:endParaRPr lang="en-US" sz="1200" dirty="0">
+                        <a:latin typeface="Yu Gothic" charset="0"/>
+                        <a:ea typeface="Yu Gothic" charset="0"/>
+                        <a:cs typeface="Yu Gothic" charset="0"/>
+                      </a:endParaRPr>
+                    </a:p>
+                  </a:txBody>
+                  <a:tcPr marL="146304" marR="146304" marT="54864" marB="54864" anchor="ctr">
+                    <a:lnL w="9525" cap="flat" cmpd="sng" algn="ctr">
+                      <a:solidFill>
+                        <a:srgbClr val="EFEAE0"/>
+                      </a:solidFill>
+                      <a:prstDash val="solid"/>
+                      <a:round/>
+                      <a:headEnd type="none" w="med" len="med"/>
+                      <a:tailEnd type="none" w="med" len="med"/>
+                    </a:lnL>
+                    <a:lnR w="9525" cap="flat" cmpd="sng" algn="ctr">
+                      <a:solidFill>
+                        <a:srgbClr val="EFEAE0"/>
+                      </a:solidFill>
+                      <a:prstDash val="solid"/>
+                      <a:round/>
+                      <a:headEnd type="none" w="med" len="med"/>
+                      <a:tailEnd type="none" w="med" len="med"/>
+                    </a:lnR>
+                    <a:lnT w="9525" cap="flat" cmpd="sng" algn="ctr">
+                      <a:solidFill>
+                        <a:srgbClr val="EFEAE0"/>
+                      </a:solidFill>
+                      <a:prstDash val="solid"/>
+                      <a:round/>
+                      <a:headEnd type="none" w="med" len="med"/>
+                      <a:tailEnd type="none" w="med" len="med"/>
+                    </a:lnT>
+                    <a:lnB w="9525" cap="flat" cmpd="sng" algn="ctr">
+                      <a:solidFill>
+                        <a:srgbClr val="EFEAE0"/>
+                      </a:solidFill>
+                      <a:prstDash val="solid"/>
+                      <a:round/>
+                      <a:headEnd type="none" w="med" len="med"/>
+                      <a:tailEnd type="none" w="med" len="med"/>
+                    </a:lnB>
+                    <a:solidFill>
+                      <a:srgbClr val="FBF4E4"/>
+                    </a:solidFill>
+                  </a:tcPr>
+                </a:tc>
+              </a:tr>
+              <a:tr h="384048">
+                <a:tc>
+                  <a:txBody>
+                    <a:bodyPr/>
+                    <a:lstStyle/>
+                    <a:p>
+                      <a:pPr indent="0" marL="0">
+                        <a:buNone/>
+                      </a:pPr>
+                      <a:r>
+                        <a:rPr lang="en-US" sz="1200" b="1" dirty="0">
+                          <a:solidFill>
+                            <a:srgbClr val="0A3D23"/>
+                          </a:solidFill>
+                          <a:latin typeface="Yu Gothic" pitchFamily="34" charset="0"/>
+                          <a:ea typeface="Yu Gothic" pitchFamily="34" charset="-122"/>
+                          <a:cs typeface="Yu Gothic" pitchFamily="34" charset="-120"/>
+                        </a:rPr>
+                        <a:t>内装仕様</a:t>
+                      </a:r>
+                      <a:endParaRPr lang="en-US" sz="1200" dirty="0">
+                        <a:latin typeface="Yu Gothic" charset="0"/>
+                        <a:ea typeface="Yu Gothic" charset="0"/>
+                        <a:cs typeface="Yu Gothic" charset="0"/>
+                      </a:endParaRPr>
+                    </a:p>
+                  </a:txBody>
+                  <a:tcPr marL="128016" marR="128016" marT="45720" marB="45720" anchor="ctr">
+                    <a:lnL w="9525" cap="flat" cmpd="sng" algn="ctr">
+                      <a:solidFill>
+                        <a:srgbClr val="EFEAE0"/>
+                      </a:solidFill>
+                      <a:prstDash val="solid"/>
+                      <a:round/>
+                      <a:headEnd type="none" w="med" len="med"/>
+                      <a:tailEnd type="none" w="med" len="med"/>
+                    </a:lnL>
+                    <a:lnR w="9525" cap="flat" cmpd="sng" algn="ctr">
+                      <a:solidFill>
+                        <a:srgbClr val="EFEAE0"/>
+                      </a:solidFill>
+                      <a:prstDash val="solid"/>
+                      <a:round/>
+                      <a:headEnd type="none" w="med" len="med"/>
+                      <a:tailEnd type="none" w="med" len="med"/>
+                    </a:lnR>
+                    <a:lnT w="9525" cap="flat" cmpd="sng" algn="ctr">
+                      <a:solidFill>
+                        <a:srgbClr val="EFEAE0"/>
+                      </a:solidFill>
+                      <a:prstDash val="solid"/>
+                      <a:round/>
+                      <a:headEnd type="none" w="med" len="med"/>
+                      <a:tailEnd type="none" w="med" len="med"/>
+                    </a:lnT>
+                    <a:lnB w="9525" cap="flat" cmpd="sng" algn="ctr">
+                      <a:solidFill>
+                        <a:srgbClr val="EFEAE0"/>
+                      </a:solidFill>
+                      <a:prstDash val="solid"/>
+                      <a:round/>
+                      <a:headEnd type="none" w="med" len="med"/>
+                      <a:tailEnd type="none" w="med" len="med"/>
+                    </a:lnB>
+                    <a:solidFill>
+                      <a:srgbClr val="F4F2EE"/>
+                    </a:solidFill>
+                  </a:tcPr>
+                </a:tc>
+                <a:tc>
+                  <a:txBody>
+                    <a:bodyPr/>
+                    <a:lstStyle/>
+                    <a:p>
+                      <a:pPr indent="0" marL="0">
+                        <a:buNone/>
+                      </a:pPr>
+                      <a:r>
+                        <a:rPr lang="en-US" sz="1100" dirty="0">
+                          <a:solidFill>
+                            <a:srgbClr val="6E6A61"/>
+                          </a:solidFill>
+                          <a:latin typeface="Yu Gothic" pitchFamily="34" charset="0"/>
+                          <a:ea typeface="Yu Gothic" pitchFamily="34" charset="-122"/>
+                          <a:cs typeface="Yu Gothic" pitchFamily="34" charset="-120"/>
+                        </a:rPr>
+                        <a:t>プレミアム仕様</a:t>
+                      </a:r>
+                      <a:endParaRPr lang="en-US" sz="1100" dirty="0">
+                        <a:latin typeface="Yu Gothic" charset="0"/>
+                        <a:ea typeface="Yu Gothic" charset="0"/>
+                        <a:cs typeface="Yu Gothic" charset="0"/>
+                      </a:endParaRPr>
+                    </a:p>
+                  </a:txBody>
+                  <a:tcPr marL="146304" marR="146304" marT="54864" marB="54864" anchor="ctr">
+                    <a:lnL w="9525" cap="flat" cmpd="sng" algn="ctr">
+                      <a:solidFill>
+                        <a:srgbClr val="EFEAE0"/>
+                      </a:solidFill>
+                      <a:prstDash val="solid"/>
+                      <a:round/>
+                      <a:headEnd type="none" w="med" len="med"/>
+                      <a:tailEnd type="none" w="med" len="med"/>
+                    </a:lnL>
+                    <a:lnR w="9525" cap="flat" cmpd="sng" algn="ctr">
+                      <a:solidFill>
+                        <a:srgbClr val="EFEAE0"/>
+                      </a:solidFill>
+                      <a:prstDash val="solid"/>
+                      <a:round/>
+                      <a:headEnd type="none" w="med" len="med"/>
+                      <a:tailEnd type="none" w="med" len="med"/>
+                    </a:lnR>
+                    <a:lnT w="9525" cap="flat" cmpd="sng" algn="ctr">
+                      <a:solidFill>
+                        <a:srgbClr val="EFEAE0"/>
+                      </a:solidFill>
+                      <a:prstDash val="solid"/>
+                      <a:round/>
+                      <a:headEnd type="none" w="med" len="med"/>
+                      <a:tailEnd type="none" w="med" len="med"/>
+                    </a:lnT>
+                    <a:lnB w="9525" cap="flat" cmpd="sng" algn="ctr">
+                      <a:solidFill>
+                        <a:srgbClr val="EFEAE0"/>
+                      </a:solidFill>
+                      <a:prstDash val="solid"/>
+                      <a:round/>
+                      <a:headEnd type="none" w="med" len="med"/>
+                      <a:tailEnd type="none" w="med" len="med"/>
+                    </a:lnB>
+                    <a:solidFill>
+                      <a:srgbClr val="FFFFFF"/>
+                    </a:solidFill>
+                  </a:tcPr>
+                </a:tc>
+                <a:tc>
+                  <a:txBody>
+                    <a:bodyPr/>
+                    <a:lstStyle/>
+                    <a:p>
+                      <a:pPr indent="0" marL="0">
+                        <a:buNone/>
+                      </a:pPr>
+                      <a:r>
+                        <a:rPr lang="en-US" sz="1100" b="1" dirty="0">
+                          <a:solidFill>
+                            <a:srgbClr val="0A3D23"/>
+                          </a:solidFill>
+                          <a:latin typeface="Yu Gothic" pitchFamily="34" charset="0"/>
+                          <a:ea typeface="Yu Gothic" pitchFamily="34" charset="-122"/>
+                          <a:cs typeface="Yu Gothic" pitchFamily="34" charset="-120"/>
+                        </a:rPr>
+                        <a:t>プレミアム仕様（同じ）</a:t>
+                      </a:r>
+                      <a:endParaRPr lang="en-US" sz="1100" dirty="0">
+                        <a:latin typeface="Yu Gothic" charset="0"/>
+                        <a:ea typeface="Yu Gothic" charset="0"/>
+                        <a:cs typeface="Yu Gothic" charset="0"/>
+                      </a:endParaRPr>
+                    </a:p>
+                  </a:txBody>
+                  <a:tcPr marL="146304" marR="146304" marT="54864" marB="54864" anchor="ctr">
+                    <a:lnL w="9525" cap="flat" cmpd="sng" algn="ctr">
+                      <a:solidFill>
+                        <a:srgbClr val="EFEAE0"/>
+                      </a:solidFill>
+                      <a:prstDash val="solid"/>
+                      <a:round/>
+                      <a:headEnd type="none" w="med" len="med"/>
+                      <a:tailEnd type="none" w="med" len="med"/>
+                    </a:lnL>
+                    <a:lnR w="9525" cap="flat" cmpd="sng" algn="ctr">
+                      <a:solidFill>
+                        <a:srgbClr val="EFEAE0"/>
+                      </a:solidFill>
+                      <a:prstDash val="solid"/>
+                      <a:round/>
+                      <a:headEnd type="none" w="med" len="med"/>
+                      <a:tailEnd type="none" w="med" len="med"/>
+                    </a:lnR>
+                    <a:lnT w="9525" cap="flat" cmpd="sng" algn="ctr">
+                      <a:solidFill>
+                        <a:srgbClr val="EFEAE0"/>
+                      </a:solidFill>
+                      <a:prstDash val="solid"/>
+                      <a:round/>
+                      <a:headEnd type="none" w="med" len="med"/>
+                      <a:tailEnd type="none" w="med" len="med"/>
+                    </a:lnT>
+                    <a:lnB w="9525" cap="flat" cmpd="sng" algn="ctr">
+                      <a:solidFill>
+                        <a:srgbClr val="EFEAE0"/>
+                      </a:solidFill>
+                      <a:prstDash val="solid"/>
+                      <a:round/>
+                      <a:headEnd type="none" w="med" len="med"/>
+                      <a:tailEnd type="none" w="med" len="med"/>
+                    </a:lnB>
+                    <a:solidFill>
+                      <a:srgbClr val="F1F8F3"/>
+                    </a:solidFill>
+                  </a:tcPr>
+                </a:tc>
+              </a:tr>
+              <a:tr h="384048">
+                <a:tc>
+                  <a:txBody>
+                    <a:bodyPr/>
+                    <a:lstStyle/>
+                    <a:p>
+                      <a:pPr indent="0" marL="0">
+                        <a:buNone/>
+                      </a:pPr>
+                      <a:r>
+                        <a:rPr lang="en-US" sz="1200" b="1" dirty="0">
+                          <a:solidFill>
+                            <a:srgbClr val="0A3D23"/>
+                          </a:solidFill>
+                          <a:latin typeface="Yu Gothic" pitchFamily="34" charset="0"/>
+                          <a:ea typeface="Yu Gothic" pitchFamily="34" charset="-122"/>
+                          <a:cs typeface="Yu Gothic" pitchFamily="34" charset="-120"/>
+                        </a:rPr>
+                        <a:t>内装工事費</a:t>
+                      </a:r>
+                      <a:endParaRPr lang="en-US" sz="1200" dirty="0">
+                        <a:latin typeface="Yu Gothic" charset="0"/>
+                        <a:ea typeface="Yu Gothic" charset="0"/>
+                        <a:cs typeface="Yu Gothic" charset="0"/>
+                      </a:endParaRPr>
+                    </a:p>
+                  </a:txBody>
+                  <a:tcPr marL="128016" marR="128016" marT="45720" marB="45720" anchor="ctr">
+                    <a:lnL w="9525" cap="flat" cmpd="sng" algn="ctr">
+                      <a:solidFill>
+                        <a:srgbClr val="EFEAE0"/>
+                      </a:solidFill>
+                      <a:prstDash val="solid"/>
+                      <a:round/>
+                      <a:headEnd type="none" w="med" len="med"/>
+                      <a:tailEnd type="none" w="med" len="med"/>
+                    </a:lnL>
+                    <a:lnR w="9525" cap="flat" cmpd="sng" algn="ctr">
+                      <a:solidFill>
+                        <a:srgbClr val="EFEAE0"/>
+                      </a:solidFill>
+                      <a:prstDash val="solid"/>
+                      <a:round/>
+                      <a:headEnd type="none" w="med" len="med"/>
+                      <a:tailEnd type="none" w="med" len="med"/>
+                    </a:lnR>
+                    <a:lnT w="9525" cap="flat" cmpd="sng" algn="ctr">
+                      <a:solidFill>
+                        <a:srgbClr val="EFEAE0"/>
+                      </a:solidFill>
+                      <a:prstDash val="solid"/>
+                      <a:round/>
+                      <a:headEnd type="none" w="med" len="med"/>
+                      <a:tailEnd type="none" w="med" len="med"/>
+                    </a:lnT>
+                    <a:lnB w="9525" cap="flat" cmpd="sng" algn="ctr">
+                      <a:solidFill>
+                        <a:srgbClr val="EFEAE0"/>
+                      </a:solidFill>
+                      <a:prstDash val="solid"/>
+                      <a:round/>
+                      <a:headEnd type="none" w="med" len="med"/>
+                      <a:tailEnd type="none" w="med" len="med"/>
+                    </a:lnB>
+                    <a:solidFill>
+                      <a:srgbClr val="F4F2EE"/>
+                    </a:solidFill>
+                  </a:tcPr>
+                </a:tc>
+                <a:tc>
+                  <a:txBody>
+                    <a:bodyPr/>
+                    <a:lstStyle/>
+                    <a:p>
+                      <a:pPr indent="0" marL="0">
+                        <a:buNone/>
+                      </a:pPr>
+                      <a:r>
+                        <a:rPr lang="en-US" sz="1100" dirty="0">
+                          <a:solidFill>
+                            <a:srgbClr val="6E6A61"/>
+                          </a:solidFill>
+                          <a:latin typeface="Yu Gothic" pitchFamily="34" charset="0"/>
+                          <a:ea typeface="Yu Gothic" pitchFamily="34" charset="-122"/>
+                          <a:cs typeface="Yu Gothic" pitchFamily="34" charset="-120"/>
+                        </a:rPr>
+                        <a:t>セルフカフェが負担</a:t>
+                      </a:r>
+                      <a:endParaRPr lang="en-US" sz="1100" dirty="0">
+                        <a:latin typeface="Yu Gothic" charset="0"/>
+                        <a:ea typeface="Yu Gothic" charset="0"/>
+                        <a:cs typeface="Yu Gothic" charset="0"/>
+                      </a:endParaRPr>
+                    </a:p>
+                  </a:txBody>
+                  <a:tcPr marL="146304" marR="146304" marT="54864" marB="54864" anchor="ctr">
+                    <a:lnL w="9525" cap="flat" cmpd="sng" algn="ctr">
+                      <a:solidFill>
+                        <a:srgbClr val="EFEAE0"/>
+                      </a:solidFill>
+                      <a:prstDash val="solid"/>
+                      <a:round/>
+                      <a:headEnd type="none" w="med" len="med"/>
+                      <a:tailEnd type="none" w="med" len="med"/>
+                    </a:lnL>
+                    <a:lnR w="9525" cap="flat" cmpd="sng" algn="ctr">
+                      <a:solidFill>
+                        <a:srgbClr val="EFEAE0"/>
+                      </a:solidFill>
+                      <a:prstDash val="solid"/>
+                      <a:round/>
+                      <a:headEnd type="none" w="med" len="med"/>
+                      <a:tailEnd type="none" w="med" len="med"/>
+                    </a:lnR>
+                    <a:lnT w="9525" cap="flat" cmpd="sng" algn="ctr">
+                      <a:solidFill>
+                        <a:srgbClr val="EFEAE0"/>
+                      </a:solidFill>
+                      <a:prstDash val="solid"/>
+                      <a:round/>
+                      <a:headEnd type="none" w="med" len="med"/>
+                      <a:tailEnd type="none" w="med" len="med"/>
+                    </a:lnT>
+                    <a:lnB w="9525" cap="flat" cmpd="sng" algn="ctr">
+                      <a:solidFill>
+                        <a:srgbClr val="EFEAE0"/>
+                      </a:solidFill>
+                      <a:prstDash val="solid"/>
+                      <a:round/>
+                      <a:headEnd type="none" w="med" len="med"/>
+                      <a:tailEnd type="none" w="med" len="med"/>
+                    </a:lnB>
+                    <a:solidFill>
+                      <a:srgbClr val="FFFFFF"/>
+                    </a:solidFill>
+                  </a:tcPr>
+                </a:tc>
+                <a:tc>
+                  <a:txBody>
+                    <a:bodyPr/>
+                    <a:lstStyle/>
+                    <a:p>
+                      <a:pPr indent="0" marL="0">
+                        <a:buNone/>
+                      </a:pPr>
+                      <a:r>
+                        <a:rPr lang="en-US" sz="1100" b="1" dirty="0">
+                          <a:solidFill>
+                            <a:srgbClr val="0A3D23"/>
+                          </a:solidFill>
+                          <a:latin typeface="Yu Gothic" pitchFamily="34" charset="0"/>
+                          <a:ea typeface="Yu Gothic" pitchFamily="34" charset="-122"/>
+                          <a:cs typeface="Yu Gothic" pitchFamily="34" charset="-120"/>
+                        </a:rPr>
+                        <a:t>セルフカフェが負担（同じ）</a:t>
+                      </a:r>
+                      <a:endParaRPr lang="en-US" sz="1100" dirty="0">
+                        <a:latin typeface="Yu Gothic" charset="0"/>
+                        <a:ea typeface="Yu Gothic" charset="0"/>
+                        <a:cs typeface="Yu Gothic" charset="0"/>
+                      </a:endParaRPr>
+                    </a:p>
+                  </a:txBody>
+                  <a:tcPr marL="146304" marR="146304" marT="54864" marB="54864" anchor="ctr">
+                    <a:lnL w="9525" cap="flat" cmpd="sng" algn="ctr">
+                      <a:solidFill>
+                        <a:srgbClr val="EFEAE0"/>
+                      </a:solidFill>
+                      <a:prstDash val="solid"/>
+                      <a:round/>
+                      <a:headEnd type="none" w="med" len="med"/>
+                      <a:tailEnd type="none" w="med" len="med"/>
+                    </a:lnL>
+                    <a:lnR w="9525" cap="flat" cmpd="sng" algn="ctr">
+                      <a:solidFill>
+                        <a:srgbClr val="EFEAE0"/>
+                      </a:solidFill>
+                      <a:prstDash val="solid"/>
+                      <a:round/>
+                      <a:headEnd type="none" w="med" len="med"/>
+                      <a:tailEnd type="none" w="med" len="med"/>
+                    </a:lnR>
+                    <a:lnT w="9525" cap="flat" cmpd="sng" algn="ctr">
+                      <a:solidFill>
+                        <a:srgbClr val="EFEAE0"/>
+                      </a:solidFill>
+                      <a:prstDash val="solid"/>
+                      <a:round/>
+                      <a:headEnd type="none" w="med" len="med"/>
+                      <a:tailEnd type="none" w="med" len="med"/>
+                    </a:lnT>
+                    <a:lnB w="9525" cap="flat" cmpd="sng" algn="ctr">
+                      <a:solidFill>
+                        <a:srgbClr val="EFEAE0"/>
+                      </a:solidFill>
+                      <a:prstDash val="solid"/>
+                      <a:round/>
+                      <a:headEnd type="none" w="med" len="med"/>
+                      <a:tailEnd type="none" w="med" len="med"/>
+                    </a:lnB>
+                    <a:solidFill>
+                      <a:srgbClr val="F1F8F3"/>
+                    </a:solidFill>
+                  </a:tcPr>
+                </a:tc>
+              </a:tr>
+              <a:tr h="384048">
+                <a:tc>
+                  <a:txBody>
+                    <a:bodyPr/>
+                    <a:lstStyle/>
+                    <a:p>
+                      <a:pPr indent="0" marL="0">
+                        <a:buNone/>
+                      </a:pPr>
+                      <a:r>
+                        <a:rPr lang="en-US" sz="1200" b="1" dirty="0">
+                          <a:solidFill>
+                            <a:srgbClr val="0A3D23"/>
+                          </a:solidFill>
+                          <a:latin typeface="Yu Gothic" pitchFamily="34" charset="0"/>
+                          <a:ea typeface="Yu Gothic" pitchFamily="34" charset="-122"/>
+                          <a:cs typeface="Yu Gothic" pitchFamily="34" charset="-120"/>
+                        </a:rPr>
+                        <a:t>家具・什器</a:t>
+                      </a:r>
+                      <a:endParaRPr lang="en-US" sz="1200" dirty="0">
+                        <a:latin typeface="Yu Gothic" charset="0"/>
+                        <a:ea typeface="Yu Gothic" charset="0"/>
+                        <a:cs typeface="Yu Gothic" charset="0"/>
+                      </a:endParaRPr>
+                    </a:p>
+                  </a:txBody>
+                  <a:tcPr marL="128016" marR="128016" marT="45720" marB="45720" anchor="ctr">
+                    <a:lnL w="9525" cap="flat" cmpd="sng" algn="ctr">
+                      <a:solidFill>
+                        <a:srgbClr val="EFEAE0"/>
+                      </a:solidFill>
+                      <a:prstDash val="solid"/>
+                      <a:round/>
+                      <a:headEnd type="none" w="med" len="med"/>
+                      <a:tailEnd type="none" w="med" len="med"/>
+                    </a:lnL>
+                    <a:lnR w="9525" cap="flat" cmpd="sng" algn="ctr">
+                      <a:solidFill>
+                        <a:srgbClr val="EFEAE0"/>
+                      </a:solidFill>
+                      <a:prstDash val="solid"/>
+                      <a:round/>
+                      <a:headEnd type="none" w="med" len="med"/>
+                      <a:tailEnd type="none" w="med" len="med"/>
+                    </a:lnR>
+                    <a:lnT w="9525" cap="flat" cmpd="sng" algn="ctr">
+                      <a:solidFill>
+                        <a:srgbClr val="EFEAE0"/>
+                      </a:solidFill>
+                      <a:prstDash val="solid"/>
+                      <a:round/>
+                      <a:headEnd type="none" w="med" len="med"/>
+                      <a:tailEnd type="none" w="med" len="med"/>
+                    </a:lnT>
+                    <a:lnB w="9525" cap="flat" cmpd="sng" algn="ctr">
+                      <a:solidFill>
+                        <a:srgbClr val="EFEAE0"/>
+                      </a:solidFill>
+                      <a:prstDash val="solid"/>
+                      <a:round/>
+                      <a:headEnd type="none" w="med" len="med"/>
+                      <a:tailEnd type="none" w="med" len="med"/>
+                    </a:lnB>
+                    <a:solidFill>
+                      <a:srgbClr val="F4F2EE"/>
+                    </a:solidFill>
+                  </a:tcPr>
+                </a:tc>
+                <a:tc>
+                  <a:txBody>
+                    <a:bodyPr/>
+                    <a:lstStyle/>
+                    <a:p>
+                      <a:pPr indent="0" marL="0">
+                        <a:buNone/>
+                      </a:pPr>
+                      <a:r>
+                        <a:rPr lang="en-US" sz="1100" dirty="0">
+                          <a:solidFill>
+                            <a:srgbClr val="6E6A61"/>
+                          </a:solidFill>
+                          <a:latin typeface="Yu Gothic" pitchFamily="34" charset="0"/>
+                          <a:ea typeface="Yu Gothic" pitchFamily="34" charset="-122"/>
+                          <a:cs typeface="Yu Gothic" pitchFamily="34" charset="-120"/>
+                        </a:rPr>
+                        <a:t>御社にてご手配（御社の所有）</a:t>
+                      </a:r>
+                      <a:endParaRPr lang="en-US" sz="1100" dirty="0">
+                        <a:latin typeface="Yu Gothic" charset="0"/>
+                        <a:ea typeface="Yu Gothic" charset="0"/>
+                        <a:cs typeface="Yu Gothic" charset="0"/>
+                      </a:endParaRPr>
+                    </a:p>
+                  </a:txBody>
+                  <a:tcPr marL="146304" marR="146304" marT="54864" marB="54864" anchor="ctr">
+                    <a:lnL w="9525" cap="flat" cmpd="sng" algn="ctr">
+                      <a:solidFill>
+                        <a:srgbClr val="EFEAE0"/>
+                      </a:solidFill>
+                      <a:prstDash val="solid"/>
+                      <a:round/>
+                      <a:headEnd type="none" w="med" len="med"/>
+                      <a:tailEnd type="none" w="med" len="med"/>
+                    </a:lnL>
+                    <a:lnR w="9525" cap="flat" cmpd="sng" algn="ctr">
+                      <a:solidFill>
+                        <a:srgbClr val="EFEAE0"/>
+                      </a:solidFill>
+                      <a:prstDash val="solid"/>
+                      <a:round/>
+                      <a:headEnd type="none" w="med" len="med"/>
+                      <a:tailEnd type="none" w="med" len="med"/>
+                    </a:lnR>
+                    <a:lnT w="9525" cap="flat" cmpd="sng" algn="ctr">
+                      <a:solidFill>
+                        <a:srgbClr val="EFEAE0"/>
+                      </a:solidFill>
+                      <a:prstDash val="solid"/>
+                      <a:round/>
+                      <a:headEnd type="none" w="med" len="med"/>
+                      <a:tailEnd type="none" w="med" len="med"/>
+                    </a:lnT>
+                    <a:lnB w="9525" cap="flat" cmpd="sng" algn="ctr">
+                      <a:solidFill>
+                        <a:srgbClr val="EFEAE0"/>
+                      </a:solidFill>
+                      <a:prstDash val="solid"/>
+                      <a:round/>
+                      <a:headEnd type="none" w="med" len="med"/>
+                      <a:tailEnd type="none" w="med" len="med"/>
+                    </a:lnB>
+                    <a:solidFill>
+                      <a:srgbClr val="FFFFFF"/>
+                    </a:solidFill>
+                  </a:tcPr>
+                </a:tc>
+                <a:tc>
+                  <a:txBody>
+                    <a:bodyPr/>
+                    <a:lstStyle/>
+                    <a:p>
+                      <a:pPr indent="0" marL="0">
+                        <a:buNone/>
+                      </a:pPr>
+                      <a:r>
+                        <a:rPr lang="en-US" sz="1100" b="1" dirty="0">
+                          <a:solidFill>
+                            <a:srgbClr val="0A3D23"/>
+                          </a:solidFill>
+                          <a:latin typeface="Yu Gothic" pitchFamily="34" charset="0"/>
+                          <a:ea typeface="Yu Gothic" pitchFamily="34" charset="-122"/>
+                          <a:cs typeface="Yu Gothic" pitchFamily="34" charset="-120"/>
+                        </a:rPr>
+                        <a:t>御社にてご手配（同じ）</a:t>
+                      </a:r>
+                      <a:endParaRPr lang="en-US" sz="1100" dirty="0">
+                        <a:latin typeface="Yu Gothic" charset="0"/>
+                        <a:ea typeface="Yu Gothic" charset="0"/>
+                        <a:cs typeface="Yu Gothic" charset="0"/>
+                      </a:endParaRPr>
+                    </a:p>
+                  </a:txBody>
+                  <a:tcPr marL="146304" marR="146304" marT="54864" marB="54864" anchor="ctr">
+                    <a:lnL w="9525" cap="flat" cmpd="sng" algn="ctr">
+                      <a:solidFill>
+                        <a:srgbClr val="EFEAE0"/>
+                      </a:solidFill>
+                      <a:prstDash val="solid"/>
+                      <a:round/>
+                      <a:headEnd type="none" w="med" len="med"/>
+                      <a:tailEnd type="none" w="med" len="med"/>
+                    </a:lnL>
+                    <a:lnR w="9525" cap="flat" cmpd="sng" algn="ctr">
+                      <a:solidFill>
+                        <a:srgbClr val="EFEAE0"/>
+                      </a:solidFill>
+                      <a:prstDash val="solid"/>
+                      <a:round/>
+                      <a:headEnd type="none" w="med" len="med"/>
+                      <a:tailEnd type="none" w="med" len="med"/>
+                    </a:lnR>
+                    <a:lnT w="9525" cap="flat" cmpd="sng" algn="ctr">
+                      <a:solidFill>
+                        <a:srgbClr val="EFEAE0"/>
+                      </a:solidFill>
+                      <a:prstDash val="solid"/>
+                      <a:round/>
+                      <a:headEnd type="none" w="med" len="med"/>
+                      <a:tailEnd type="none" w="med" len="med"/>
+                    </a:lnT>
+                    <a:lnB w="9525" cap="flat" cmpd="sng" algn="ctr">
+                      <a:solidFill>
+                        <a:srgbClr val="EFEAE0"/>
+                      </a:solidFill>
+                      <a:prstDash val="solid"/>
+                      <a:round/>
+                      <a:headEnd type="none" w="med" len="med"/>
+                      <a:tailEnd type="none" w="med" len="med"/>
+                    </a:lnB>
+                    <a:solidFill>
+                      <a:srgbClr val="F1F8F3"/>
+                    </a:solidFill>
+                  </a:tcPr>
+                </a:tc>
+              </a:tr>
+              <a:tr h="384048">
+                <a:tc>
+                  <a:txBody>
+                    <a:bodyPr/>
+                    <a:lstStyle/>
+                    <a:p>
+                      <a:pPr indent="0" marL="0">
+                        <a:buNone/>
+                      </a:pPr>
+                      <a:r>
+                        <a:rPr lang="en-US" sz="1200" b="1" dirty="0">
+                          <a:solidFill>
+                            <a:srgbClr val="0A3D23"/>
+                          </a:solidFill>
+                          <a:latin typeface="Yu Gothic" pitchFamily="34" charset="0"/>
+                          <a:ea typeface="Yu Gothic" pitchFamily="34" charset="-122"/>
+                          <a:cs typeface="Yu Gothic" pitchFamily="34" charset="-120"/>
+                        </a:rPr>
+                        <a:t>御社のご負担</a:t>
+                      </a:r>
+                      <a:endParaRPr lang="en-US" sz="1200" dirty="0">
+                        <a:latin typeface="Yu Gothic" charset="0"/>
+                        <a:ea typeface="Yu Gothic" charset="0"/>
+                        <a:cs typeface="Yu Gothic" charset="0"/>
+                      </a:endParaRPr>
+                    </a:p>
+                  </a:txBody>
+                  <a:tcPr marL="128016" marR="128016" marT="45720" marB="45720" anchor="ctr">
+                    <a:lnL w="9525" cap="flat" cmpd="sng" algn="ctr">
+                      <a:solidFill>
+                        <a:srgbClr val="EFEAE0"/>
+                      </a:solidFill>
+                      <a:prstDash val="solid"/>
+                      <a:round/>
+                      <a:headEnd type="none" w="med" len="med"/>
+                      <a:tailEnd type="none" w="med" len="med"/>
+                    </a:lnL>
+                    <a:lnR w="9525" cap="flat" cmpd="sng" algn="ctr">
+                      <a:solidFill>
+                        <a:srgbClr val="EFEAE0"/>
+                      </a:solidFill>
+                      <a:prstDash val="solid"/>
+                      <a:round/>
+                      <a:headEnd type="none" w="med" len="med"/>
+                      <a:tailEnd type="none" w="med" len="med"/>
+                    </a:lnR>
+                    <a:lnT w="9525" cap="flat" cmpd="sng" algn="ctr">
+                      <a:solidFill>
+                        <a:srgbClr val="EFEAE0"/>
+                      </a:solidFill>
+                      <a:prstDash val="solid"/>
+                      <a:round/>
+                      <a:headEnd type="none" w="med" len="med"/>
+                      <a:tailEnd type="none" w="med" len="med"/>
+                    </a:lnT>
+                    <a:lnB w="9525" cap="flat" cmpd="sng" algn="ctr">
+                      <a:solidFill>
+                        <a:srgbClr val="EFEAE0"/>
+                      </a:solidFill>
+                      <a:prstDash val="solid"/>
+                      <a:round/>
+                      <a:headEnd type="none" w="med" len="med"/>
+                      <a:tailEnd type="none" w="med" len="med"/>
+                    </a:lnB>
+                    <a:solidFill>
+                      <a:srgbClr val="F4F2EE"/>
+                    </a:solidFill>
+                  </a:tcPr>
+                </a:tc>
+                <a:tc>
+                  <a:txBody>
+                    <a:bodyPr/>
+                    <a:lstStyle/>
+                    <a:p>
+                      <a:pPr indent="0" marL="0">
+                        <a:buNone/>
+                      </a:pPr>
+                      <a:r>
+                        <a:rPr lang="en-US" sz="1100" dirty="0">
+                          <a:solidFill>
+                            <a:srgbClr val="6E6A61"/>
+                          </a:solidFill>
+                          <a:latin typeface="Yu Gothic" pitchFamily="34" charset="0"/>
+                          <a:ea typeface="Yu Gothic" pitchFamily="34" charset="-122"/>
+                          <a:cs typeface="Yu Gothic" pitchFamily="34" charset="-120"/>
+                        </a:rPr>
+                        <a:t>家具・什器のご手配のみ</a:t>
+                      </a:r>
+                      <a:endParaRPr lang="en-US" sz="1100" dirty="0">
+                        <a:latin typeface="Yu Gothic" charset="0"/>
+                        <a:ea typeface="Yu Gothic" charset="0"/>
+                        <a:cs typeface="Yu Gothic" charset="0"/>
+                      </a:endParaRPr>
+                    </a:p>
+                  </a:txBody>
+                  <a:tcPr marL="146304" marR="146304" marT="54864" marB="54864" anchor="ctr">
+                    <a:lnL w="9525" cap="flat" cmpd="sng" algn="ctr">
+                      <a:solidFill>
+                        <a:srgbClr val="EFEAE0"/>
+                      </a:solidFill>
+                      <a:prstDash val="solid"/>
+                      <a:round/>
+                      <a:headEnd type="none" w="med" len="med"/>
+                      <a:tailEnd type="none" w="med" len="med"/>
+                    </a:lnL>
+                    <a:lnR w="9525" cap="flat" cmpd="sng" algn="ctr">
+                      <a:solidFill>
+                        <a:srgbClr val="EFEAE0"/>
+                      </a:solidFill>
+                      <a:prstDash val="solid"/>
+                      <a:round/>
+                      <a:headEnd type="none" w="med" len="med"/>
+                      <a:tailEnd type="none" w="med" len="med"/>
+                    </a:lnR>
+                    <a:lnT w="9525" cap="flat" cmpd="sng" algn="ctr">
+                      <a:solidFill>
+                        <a:srgbClr val="EFEAE0"/>
+                      </a:solidFill>
+                      <a:prstDash val="solid"/>
+                      <a:round/>
+                      <a:headEnd type="none" w="med" len="med"/>
+                      <a:tailEnd type="none" w="med" len="med"/>
+                    </a:lnT>
+                    <a:lnB w="9525" cap="flat" cmpd="sng" algn="ctr">
+                      <a:solidFill>
+                        <a:srgbClr val="EFEAE0"/>
+                      </a:solidFill>
+                      <a:prstDash val="solid"/>
+                      <a:round/>
+                      <a:headEnd type="none" w="med" len="med"/>
+                      <a:tailEnd type="none" w="med" len="med"/>
+                    </a:lnB>
+                    <a:solidFill>
+                      <a:srgbClr val="FFFFFF"/>
+                    </a:solidFill>
+                  </a:tcPr>
+                </a:tc>
+                <a:tc>
+                  <a:txBody>
+                    <a:bodyPr/>
+                    <a:lstStyle/>
+                    <a:p>
+                      <a:pPr indent="0" marL="0">
+                        <a:buNone/>
+                      </a:pPr>
+                      <a:r>
+                        <a:rPr lang="en-US" sz="1100" b="1" dirty="0">
+                          <a:solidFill>
+                            <a:srgbClr val="0A3D23"/>
+                          </a:solidFill>
+                          <a:latin typeface="Yu Gothic" pitchFamily="34" charset="0"/>
+                          <a:ea typeface="Yu Gothic" pitchFamily="34" charset="-122"/>
+                          <a:cs typeface="Yu Gothic" pitchFamily="34" charset="-120"/>
+                        </a:rPr>
+                        <a:t>家具・什器のご手配のみ（同じ）</a:t>
+                      </a:r>
+                      <a:endParaRPr lang="en-US" sz="1100" dirty="0">
+                        <a:latin typeface="Yu Gothic" charset="0"/>
+                        <a:ea typeface="Yu Gothic" charset="0"/>
+                        <a:cs typeface="Yu Gothic" charset="0"/>
+                      </a:endParaRPr>
+                    </a:p>
+                  </a:txBody>
+                  <a:tcPr marL="146304" marR="146304" marT="54864" marB="54864" anchor="ctr">
+                    <a:lnL w="9525" cap="flat" cmpd="sng" algn="ctr">
+                      <a:solidFill>
+                        <a:srgbClr val="EFEAE0"/>
+                      </a:solidFill>
+                      <a:prstDash val="solid"/>
+                      <a:round/>
+                      <a:headEnd type="none" w="med" len="med"/>
+                      <a:tailEnd type="none" w="med" len="med"/>
+                    </a:lnL>
+                    <a:lnR w="9525" cap="flat" cmpd="sng" algn="ctr">
+                      <a:solidFill>
+                        <a:srgbClr val="EFEAE0"/>
+                      </a:solidFill>
+                      <a:prstDash val="solid"/>
+                      <a:round/>
+                      <a:headEnd type="none" w="med" len="med"/>
+                      <a:tailEnd type="none" w="med" len="med"/>
+                    </a:lnR>
+                    <a:lnT w="9525" cap="flat" cmpd="sng" algn="ctr">
+                      <a:solidFill>
+                        <a:srgbClr val="EFEAE0"/>
+                      </a:solidFill>
+                      <a:prstDash val="solid"/>
+                      <a:round/>
+                      <a:headEnd type="none" w="med" len="med"/>
+                      <a:tailEnd type="none" w="med" len="med"/>
+                    </a:lnT>
+                    <a:lnB w="9525" cap="flat" cmpd="sng" algn="ctr">
+                      <a:solidFill>
+                        <a:srgbClr val="EFEAE0"/>
+                      </a:solidFill>
+                      <a:prstDash val="solid"/>
+                      <a:round/>
+                      <a:headEnd type="none" w="med" len="med"/>
+                      <a:tailEnd type="none" w="med" len="med"/>
+                    </a:lnB>
+                    <a:solidFill>
+                      <a:srgbClr val="F1F8F3"/>
+                    </a:solidFill>
+                  </a:tcPr>
+                </a:tc>
+              </a:tr>
+              <a:tr h="420624">
+                <a:tc>
+                  <a:txBody>
+                    <a:bodyPr/>
+                    <a:lstStyle/>
+                    <a:p>
+                      <a:pPr indent="0" marL="0">
+                        <a:buNone/>
+                      </a:pPr>
+                      <a:r>
+                        <a:rPr lang="en-US" sz="1200" b="1" dirty="0">
+                          <a:solidFill>
+                            <a:srgbClr val="0A3D23"/>
+                          </a:solidFill>
+                          <a:latin typeface="Yu Gothic" pitchFamily="34" charset="0"/>
+                          <a:ea typeface="Yu Gothic" pitchFamily="34" charset="-122"/>
+                          <a:cs typeface="Yu Gothic" pitchFamily="34" charset="-120"/>
+                        </a:rPr>
+                        <a:t>お支払い</a:t>
+                      </a:r>
+                      <a:endParaRPr lang="en-US" sz="1200" dirty="0">
+                        <a:latin typeface="Yu Gothic" charset="0"/>
+                        <a:ea typeface="Yu Gothic" charset="0"/>
+                        <a:cs typeface="Yu Gothic" charset="0"/>
+                      </a:endParaRPr>
+                    </a:p>
+                  </a:txBody>
+                  <a:tcPr marL="128016" marR="128016" marT="45720" marB="45720" anchor="ctr">
+                    <a:lnL w="9525" cap="flat" cmpd="sng" algn="ctr">
+                      <a:solidFill>
+                        <a:srgbClr val="EFEAE0"/>
+                      </a:solidFill>
+                      <a:prstDash val="solid"/>
+                      <a:round/>
+                      <a:headEnd type="none" w="med" len="med"/>
+                      <a:tailEnd type="none" w="med" len="med"/>
+                    </a:lnL>
+                    <a:lnR w="9525" cap="flat" cmpd="sng" algn="ctr">
+                      <a:solidFill>
+                        <a:srgbClr val="EFEAE0"/>
+                      </a:solidFill>
+                      <a:prstDash val="solid"/>
+                      <a:round/>
+                      <a:headEnd type="none" w="med" len="med"/>
+                      <a:tailEnd type="none" w="med" len="med"/>
+                    </a:lnR>
+                    <a:lnT w="9525" cap="flat" cmpd="sng" algn="ctr">
+                      <a:solidFill>
+                        <a:srgbClr val="EFEAE0"/>
+                      </a:solidFill>
+                      <a:prstDash val="solid"/>
+                      <a:round/>
+                      <a:headEnd type="none" w="med" len="med"/>
+                      <a:tailEnd type="none" w="med" len="med"/>
+                    </a:lnT>
+                    <a:lnB w="9525" cap="flat" cmpd="sng" algn="ctr">
+                      <a:solidFill>
+                        <a:srgbClr val="EFEAE0"/>
+                      </a:solidFill>
+                      <a:prstDash val="solid"/>
+                      <a:round/>
+                      <a:headEnd type="none" w="med" len="med"/>
+                      <a:tailEnd type="none" w="med" len="med"/>
+                    </a:lnB>
+                    <a:solidFill>
+                      <a:srgbClr val="F4F2EE"/>
+                    </a:solidFill>
+                  </a:tcPr>
+                </a:tc>
+                <a:tc>
+                  <a:txBody>
+                    <a:bodyPr/>
+                    <a:lstStyle/>
+                    <a:p>
+                      <a:pPr indent="0" marL="0">
+                        <a:buNone/>
+                      </a:pPr>
+                      <a:r>
+                        <a:rPr lang="en-US" sz="1100" dirty="0">
+                          <a:solidFill>
+                            <a:srgbClr val="6E6A61"/>
+                          </a:solidFill>
+                          <a:latin typeface="Yu Gothic" pitchFamily="34" charset="0"/>
+                          <a:ea typeface="Yu Gothic" pitchFamily="34" charset="-122"/>
+                          <a:cs typeface="Yu Gothic" pitchFamily="34" charset="-120"/>
+                        </a:rPr>
+                        <a:t>売上の25％ ＋ 月額固定5万円</a:t>
+                      </a:r>
+                      <a:endParaRPr lang="en-US" sz="1100" dirty="0">
+                        <a:latin typeface="Yu Gothic" charset="0"/>
+                        <a:ea typeface="Yu Gothic" charset="0"/>
+                        <a:cs typeface="Yu Gothic" charset="0"/>
+                      </a:endParaRPr>
+                    </a:p>
+                  </a:txBody>
+                  <a:tcPr marL="146304" marR="146304" marT="54864" marB="54864" anchor="ctr">
+                    <a:lnL w="9525" cap="flat" cmpd="sng" algn="ctr">
+                      <a:solidFill>
+                        <a:srgbClr val="EFEAE0"/>
+                      </a:solidFill>
+                      <a:prstDash val="solid"/>
+                      <a:round/>
+                      <a:headEnd type="none" w="med" len="med"/>
+                      <a:tailEnd type="none" w="med" len="med"/>
+                    </a:lnL>
+                    <a:lnR w="9525" cap="flat" cmpd="sng" algn="ctr">
+                      <a:solidFill>
+                        <a:srgbClr val="EFEAE0"/>
+                      </a:solidFill>
+                      <a:prstDash val="solid"/>
+                      <a:round/>
+                      <a:headEnd type="none" w="med" len="med"/>
+                      <a:tailEnd type="none" w="med" len="med"/>
+                    </a:lnR>
+                    <a:lnT w="9525" cap="flat" cmpd="sng" algn="ctr">
+                      <a:solidFill>
+                        <a:srgbClr val="EFEAE0"/>
+                      </a:solidFill>
+                      <a:prstDash val="solid"/>
+                      <a:round/>
+                      <a:headEnd type="none" w="med" len="med"/>
+                      <a:tailEnd type="none" w="med" len="med"/>
+                    </a:lnT>
+                    <a:lnB w="9525" cap="flat" cmpd="sng" algn="ctr">
+                      <a:solidFill>
+                        <a:srgbClr val="EFEAE0"/>
+                      </a:solidFill>
+                      <a:prstDash val="solid"/>
+                      <a:round/>
+                      <a:headEnd type="none" w="med" len="med"/>
+                      <a:tailEnd type="none" w="med" len="med"/>
+                    </a:lnB>
+                    <a:solidFill>
+                      <a:srgbClr val="FFFFFF"/>
+                    </a:solidFill>
+                  </a:tcPr>
+                </a:tc>
+                <a:tc>
+                  <a:txBody>
+                    <a:bodyPr/>
+                    <a:lstStyle/>
+                    <a:p>
+                      <a:pPr indent="0" marL="0">
+                        <a:buNone/>
+                      </a:pPr>
+                      <a:r>
+                        <a:rPr lang="en-US" sz="1200" b="1" dirty="0">
+                          <a:solidFill>
+                            <a:srgbClr val="A8761F"/>
+                          </a:solidFill>
+                          <a:latin typeface="Yu Gothic" pitchFamily="34" charset="0"/>
+                          <a:ea typeface="Yu Gothic" pitchFamily="34" charset="-122"/>
+                          <a:cs typeface="Yu Gothic" pitchFamily="34" charset="-120"/>
+                        </a:rPr>
+                        <a:t>売上の25％</a:t>
+                      </a:r>
+                      <a:endParaRPr lang="en-US" sz="1200" dirty="0">
+                        <a:latin typeface="Yu Gothic" charset="0"/>
+                        <a:ea typeface="Yu Gothic" charset="0"/>
+                        <a:cs typeface="Yu Gothic" charset="0"/>
+                      </a:endParaRPr>
+                    </a:p>
+                  </a:txBody>
+                  <a:tcPr marL="146304" marR="146304" marT="54864" marB="54864" anchor="ctr">
+                    <a:lnL w="9525" cap="flat" cmpd="sng" algn="ctr">
+                      <a:solidFill>
+                        <a:srgbClr val="EFEAE0"/>
+                      </a:solidFill>
+                      <a:prstDash val="solid"/>
+                      <a:round/>
+                      <a:headEnd type="none" w="med" len="med"/>
+                      <a:tailEnd type="none" w="med" len="med"/>
+                    </a:lnL>
+                    <a:lnR w="9525" cap="flat" cmpd="sng" algn="ctr">
+                      <a:solidFill>
+                        <a:srgbClr val="EFEAE0"/>
+                      </a:solidFill>
+                      <a:prstDash val="solid"/>
+                      <a:round/>
+                      <a:headEnd type="none" w="med" len="med"/>
+                      <a:tailEnd type="none" w="med" len="med"/>
+                    </a:lnR>
+                    <a:lnT w="9525" cap="flat" cmpd="sng" algn="ctr">
+                      <a:solidFill>
+                        <a:srgbClr val="EFEAE0"/>
+                      </a:solidFill>
+                      <a:prstDash val="solid"/>
+                      <a:round/>
+                      <a:headEnd type="none" w="med" len="med"/>
+                      <a:tailEnd type="none" w="med" len="med"/>
+                    </a:lnT>
+                    <a:lnB w="9525" cap="flat" cmpd="sng" algn="ctr">
+                      <a:solidFill>
+                        <a:srgbClr val="EFEAE0"/>
+                      </a:solidFill>
+                      <a:prstDash val="solid"/>
+                      <a:round/>
+                      <a:headEnd type="none" w="med" len="med"/>
+                      <a:tailEnd type="none" w="med" len="med"/>
+                    </a:lnB>
+                    <a:solidFill>
+                      <a:srgbClr val="FBF4E4"/>
+                    </a:solidFill>
+                  </a:tcPr>
+                </a:tc>
+              </a:tr>
+              <a:tr h="384048">
+                <a:tc>
+                  <a:txBody>
+                    <a:bodyPr/>
+                    <a:lstStyle/>
+                    <a:p>
+                      <a:pPr indent="0" marL="0">
+                        <a:buNone/>
+                      </a:pPr>
+                      <a:r>
+                        <a:rPr lang="en-US" sz="1200" b="1" dirty="0">
+                          <a:solidFill>
+                            <a:srgbClr val="0A3D23"/>
+                          </a:solidFill>
+                          <a:latin typeface="Yu Gothic" pitchFamily="34" charset="0"/>
+                          <a:ea typeface="Yu Gothic" pitchFamily="34" charset="-122"/>
+                          <a:cs typeface="Yu Gothic" pitchFamily="34" charset="-120"/>
+                        </a:rPr>
+                        <a:t>原状回復義務</a:t>
+                      </a:r>
+                      <a:endParaRPr lang="en-US" sz="1200" dirty="0">
+                        <a:latin typeface="Yu Gothic" charset="0"/>
+                        <a:ea typeface="Yu Gothic" charset="0"/>
+                        <a:cs typeface="Yu Gothic" charset="0"/>
+                      </a:endParaRPr>
+                    </a:p>
+                  </a:txBody>
+                  <a:tcPr marL="128016" marR="128016" marT="45720" marB="45720" anchor="ctr">
+                    <a:lnL w="9525" cap="flat" cmpd="sng" algn="ctr">
+                      <a:solidFill>
+                        <a:srgbClr val="EFEAE0"/>
+                      </a:solidFill>
+                      <a:prstDash val="solid"/>
+                      <a:round/>
+                      <a:headEnd type="none" w="med" len="med"/>
+                      <a:tailEnd type="none" w="med" len="med"/>
+                    </a:lnL>
+                    <a:lnR w="9525" cap="flat" cmpd="sng" algn="ctr">
+                      <a:solidFill>
+                        <a:srgbClr val="EFEAE0"/>
+                      </a:solidFill>
+                      <a:prstDash val="solid"/>
+                      <a:round/>
+                      <a:headEnd type="none" w="med" len="med"/>
+                      <a:tailEnd type="none" w="med" len="med"/>
+                    </a:lnR>
+                    <a:lnT w="9525" cap="flat" cmpd="sng" algn="ctr">
+                      <a:solidFill>
+                        <a:srgbClr val="EFEAE0"/>
+                      </a:solidFill>
+                      <a:prstDash val="solid"/>
+                      <a:round/>
+                      <a:headEnd type="none" w="med" len="med"/>
+                      <a:tailEnd type="none" w="med" len="med"/>
+                    </a:lnT>
+                    <a:lnB w="9525" cap="flat" cmpd="sng" algn="ctr">
+                      <a:solidFill>
+                        <a:srgbClr val="EFEAE0"/>
+                      </a:solidFill>
+                      <a:prstDash val="solid"/>
+                      <a:round/>
+                      <a:headEnd type="none" w="med" len="med"/>
+                      <a:tailEnd type="none" w="med" len="med"/>
+                    </a:lnB>
+                    <a:solidFill>
+                      <a:srgbClr val="F4F2EE"/>
+                    </a:solidFill>
+                  </a:tcPr>
+                </a:tc>
+                <a:tc>
+                  <a:txBody>
+                    <a:bodyPr/>
+                    <a:lstStyle/>
+                    <a:p>
+                      <a:pPr indent="0" marL="0">
+                        <a:buNone/>
+                      </a:pPr>
+                      <a:r>
+                        <a:rPr lang="en-US" sz="1100" dirty="0">
+                          <a:solidFill>
+                            <a:srgbClr val="6E6A61"/>
+                          </a:solidFill>
+                          <a:latin typeface="Yu Gothic" pitchFamily="34" charset="0"/>
+                          <a:ea typeface="Yu Gothic" pitchFamily="34" charset="-122"/>
+                          <a:cs typeface="Yu Gothic" pitchFamily="34" charset="-120"/>
+                        </a:rPr>
+                        <a:t>なし</a:t>
+                      </a:r>
+                      <a:endParaRPr lang="en-US" sz="1100" dirty="0">
+                        <a:latin typeface="Yu Gothic" charset="0"/>
+                        <a:ea typeface="Yu Gothic" charset="0"/>
+                        <a:cs typeface="Yu Gothic" charset="0"/>
+                      </a:endParaRPr>
+                    </a:p>
+                  </a:txBody>
+                  <a:tcPr marL="146304" marR="146304" marT="54864" marB="54864" anchor="ctr">
+                    <a:lnL w="9525" cap="flat" cmpd="sng" algn="ctr">
+                      <a:solidFill>
+                        <a:srgbClr val="EFEAE0"/>
+                      </a:solidFill>
+                      <a:prstDash val="solid"/>
+                      <a:round/>
+                      <a:headEnd type="none" w="med" len="med"/>
+                      <a:tailEnd type="none" w="med" len="med"/>
+                    </a:lnL>
+                    <a:lnR w="9525" cap="flat" cmpd="sng" algn="ctr">
+                      <a:solidFill>
+                        <a:srgbClr val="EFEAE0"/>
+                      </a:solidFill>
+                      <a:prstDash val="solid"/>
+                      <a:round/>
+                      <a:headEnd type="none" w="med" len="med"/>
+                      <a:tailEnd type="none" w="med" len="med"/>
+                    </a:lnR>
+                    <a:lnT w="9525" cap="flat" cmpd="sng" algn="ctr">
+                      <a:solidFill>
+                        <a:srgbClr val="EFEAE0"/>
+                      </a:solidFill>
+                      <a:prstDash val="solid"/>
+                      <a:round/>
+                      <a:headEnd type="none" w="med" len="med"/>
+                      <a:tailEnd type="none" w="med" len="med"/>
+                    </a:lnT>
+                    <a:lnB w="9525" cap="flat" cmpd="sng" algn="ctr">
+                      <a:solidFill>
+                        <a:srgbClr val="EFEAE0"/>
+                      </a:solidFill>
+                      <a:prstDash val="solid"/>
+                      <a:round/>
+                      <a:headEnd type="none" w="med" len="med"/>
+                      <a:tailEnd type="none" w="med" len="med"/>
+                    </a:lnB>
+                    <a:solidFill>
+                      <a:srgbClr val="FFFFFF"/>
+                    </a:solidFill>
+                  </a:tcPr>
+                </a:tc>
+                <a:tc>
+                  <a:txBody>
+                    <a:bodyPr/>
+                    <a:lstStyle/>
+                    <a:p>
+                      <a:pPr indent="0" marL="0">
+                        <a:buNone/>
+                      </a:pPr>
+                      <a:r>
+                        <a:rPr lang="en-US" sz="1100" b="1" dirty="0">
+                          <a:solidFill>
+                            <a:srgbClr val="0A3D23"/>
+                          </a:solidFill>
+                          <a:latin typeface="Yu Gothic" pitchFamily="34" charset="0"/>
+                          <a:ea typeface="Yu Gothic" pitchFamily="34" charset="-122"/>
+                          <a:cs typeface="Yu Gothic" pitchFamily="34" charset="-120"/>
+                        </a:rPr>
+                        <a:t>なし（同じ）</a:t>
+                      </a:r>
+                      <a:endParaRPr lang="en-US" sz="1100" dirty="0">
+                        <a:latin typeface="Yu Gothic" charset="0"/>
+                        <a:ea typeface="Yu Gothic" charset="0"/>
+                        <a:cs typeface="Yu Gothic" charset="0"/>
+                      </a:endParaRPr>
+                    </a:p>
+                  </a:txBody>
+                  <a:tcPr marL="146304" marR="146304" marT="54864" marB="54864" anchor="ctr">
+                    <a:lnL w="9525" cap="flat" cmpd="sng" algn="ctr">
+                      <a:solidFill>
+                        <a:srgbClr val="EFEAE0"/>
+                      </a:solidFill>
+                      <a:prstDash val="solid"/>
+                      <a:round/>
+                      <a:headEnd type="none" w="med" len="med"/>
+                      <a:tailEnd type="none" w="med" len="med"/>
+                    </a:lnL>
+                    <a:lnR w="9525" cap="flat" cmpd="sng" algn="ctr">
+                      <a:solidFill>
+                        <a:srgbClr val="EFEAE0"/>
+                      </a:solidFill>
+                      <a:prstDash val="solid"/>
+                      <a:round/>
+                      <a:headEnd type="none" w="med" len="med"/>
+                      <a:tailEnd type="none" w="med" len="med"/>
+                    </a:lnR>
+                    <a:lnT w="9525" cap="flat" cmpd="sng" algn="ctr">
+                      <a:solidFill>
+                        <a:srgbClr val="EFEAE0"/>
+                      </a:solidFill>
+                      <a:prstDash val="solid"/>
+                      <a:round/>
+                      <a:headEnd type="none" w="med" len="med"/>
+                      <a:tailEnd type="none" w="med" len="med"/>
+                    </a:lnT>
+                    <a:lnB w="9525" cap="flat" cmpd="sng" algn="ctr">
+                      <a:solidFill>
+                        <a:srgbClr val="EFEAE0"/>
+                      </a:solidFill>
+                      <a:prstDash val="solid"/>
+                      <a:round/>
+                      <a:headEnd type="none" w="med" len="med"/>
+                      <a:tailEnd type="none" w="med" len="med"/>
+                    </a:lnB>
+                    <a:solidFill>
+                      <a:srgbClr val="F1F8F3"/>
+                    </a:solidFill>
+                  </a:tcPr>
+                </a:tc>
+              </a:tr>
+            </a:tbl>
+          </a:graphicData>
+        </a:graphic>
+      </p:graphicFrame>
+      <p:sp>
+        <p:nvSpPr>
+          <p:cNvPr id="12" name="Shape 8"/>
+          <p:cNvSpPr/>
+          <p:nvPr/>
+        </p:nvSpPr>
+        <p:spPr>
+          <a:xfrm>
+            <a:off x="660197" y="5230368"/>
+            <a:ext cx="10871302" cy="822960"/>
           </a:xfrm>
           <a:prstGeom prst="roundRect">
             <a:avLst>
-              <a:gd name="adj" fmla="val 6977"/>
-            </a:avLst>
-          </a:prstGeom>
-          <a:solidFill>
-            <a:srgbClr val="A8761F"/>
-          </a:solidFill>
-          <a:ln/>
-        </p:spPr>
-      </p:sp>
-      <p:sp>
-        <p:nvSpPr>
-          <p:cNvPr id="11" name="Text 8"/>
-          <p:cNvSpPr/>
-          <p:nvPr/>
-        </p:nvSpPr>
-        <p:spPr>
-          <a:xfrm>
-            <a:off x="879653" y="1998878"/>
-            <a:ext cx="3111703" cy="256032"/>
-          </a:xfrm>
-          <a:prstGeom prst="rect">
-            <a:avLst/>
-          </a:prstGeom>
-          <a:noFill/>
-          <a:ln/>
-        </p:spPr>
-        <p:txBody>
-          <a:bodyPr wrap="square" lIns="0" tIns="0" rIns="0" bIns="0" rtlCol="0" anchor="ctr"/>
-          <a:lstStyle/>
-          <a:p>
-            <a:pPr indent="0" marL="0">
-              <a:buNone/>
-            </a:pPr>
-            <a:r>
-              <a:rPr lang="en-US" sz="1100" b="1" dirty="0">
-                <a:solidFill>
-                  <a:srgbClr val="FFF3DC"/>
-                </a:solidFill>
-                <a:latin typeface="Yu Gothic" pitchFamily="34" charset="0"/>
-                <a:ea typeface="Yu Gothic" pitchFamily="34" charset="-122"/>
-                <a:cs typeface="Yu Gothic" pitchFamily="34" charset="-120"/>
-              </a:rPr>
-              <a:t>トライアル期間</a:t>
-            </a:r>
-            <a:endParaRPr lang="en-US" sz="1100" dirty="0"/>
-          </a:p>
-        </p:txBody>
-      </p:sp>
-      <p:sp>
-        <p:nvSpPr>
-          <p:cNvPr id="12" name="Text 9"/>
-          <p:cNvSpPr/>
-          <p:nvPr/>
-        </p:nvSpPr>
-        <p:spPr>
-          <a:xfrm>
-            <a:off x="879653" y="2254910"/>
-            <a:ext cx="3111703" cy="292608"/>
-          </a:xfrm>
-          <a:prstGeom prst="rect">
-            <a:avLst/>
-          </a:prstGeom>
-          <a:noFill/>
-          <a:ln/>
-        </p:spPr>
-        <p:txBody>
-          <a:bodyPr wrap="square" lIns="0" tIns="0" rIns="0" bIns="0" rtlCol="0" anchor="ctr"/>
-          <a:lstStyle/>
-          <a:p>
-            <a:pPr indent="0" marL="0">
-              <a:buNone/>
-            </a:pPr>
-            <a:r>
-              <a:rPr lang="en-US" sz="1250" b="1" dirty="0">
-                <a:solidFill>
-                  <a:srgbClr val="FFFFFF"/>
-                </a:solidFill>
-                <a:latin typeface="Yu Gothic" pitchFamily="34" charset="0"/>
-                <a:ea typeface="Yu Gothic" pitchFamily="34" charset="-122"/>
-                <a:cs typeface="Yu Gothic" pitchFamily="34" charset="-120"/>
-              </a:rPr>
-              <a:t>売上の25％</a:t>
-            </a:r>
-            <a:endParaRPr lang="en-US" sz="1250" dirty="0"/>
-          </a:p>
-        </p:txBody>
-      </p:sp>
-      <p:sp>
-        <p:nvSpPr>
-          <p:cNvPr id="13" name="Text 10"/>
-          <p:cNvSpPr/>
-          <p:nvPr/>
-        </p:nvSpPr>
-        <p:spPr>
-          <a:xfrm>
-            <a:off x="4320540" y="1651406"/>
-            <a:ext cx="3550615" cy="219456"/>
-          </a:xfrm>
-          <a:prstGeom prst="rect">
-            <a:avLst/>
-          </a:prstGeom>
-          <a:noFill/>
-          <a:ln/>
-        </p:spPr>
-        <p:txBody>
-          <a:bodyPr wrap="square" lIns="0" tIns="0" rIns="0" bIns="0" rtlCol="0" anchor="ctr"/>
-          <a:lstStyle/>
-          <a:p>
-            <a:pPr indent="0" marL="0">
-              <a:buNone/>
-            </a:pPr>
-            <a:r>
-              <a:rPr lang="en-US" sz="1000" b="1" dirty="0">
-                <a:solidFill>
-                  <a:srgbClr val="7E8882"/>
-                </a:solidFill>
-                <a:latin typeface="Yu Gothic" pitchFamily="34" charset="0"/>
-                <a:ea typeface="Yu Gothic" pitchFamily="34" charset="-122"/>
-                <a:cs typeface="Yu Gothic" pitchFamily="34" charset="-120"/>
-              </a:rPr>
-              <a:t>2年目</a:t>
-            </a:r>
-            <a:endParaRPr lang="en-US" sz="1000" dirty="0"/>
-          </a:p>
-        </p:txBody>
-      </p:sp>
-      <p:sp>
-        <p:nvSpPr>
-          <p:cNvPr id="14" name="Shape 11"/>
-          <p:cNvSpPr/>
-          <p:nvPr/>
-        </p:nvSpPr>
-        <p:spPr>
-          <a:xfrm>
-            <a:off x="4320540" y="1925726"/>
-            <a:ext cx="3550615" cy="786384"/>
-          </a:xfrm>
-          <a:prstGeom prst="roundRect">
-            <a:avLst>
-              <a:gd name="adj" fmla="val 6977"/>
+              <a:gd name="adj" fmla="val 6667"/>
             </a:avLst>
           </a:prstGeom>
           <a:solidFill>
@@ -4111,385 +5703,9 @@
           <a:ln/>
         </p:spPr>
       </p:sp>
-      <p:sp>
-        <p:nvSpPr>
-          <p:cNvPr id="15" name="Text 12"/>
-          <p:cNvSpPr/>
-          <p:nvPr/>
-        </p:nvSpPr>
-        <p:spPr>
-          <a:xfrm>
-            <a:off x="4539996" y="1998878"/>
-            <a:ext cx="3111703" cy="256032"/>
-          </a:xfrm>
-          <a:prstGeom prst="rect">
-            <a:avLst/>
-          </a:prstGeom>
-          <a:noFill/>
-          <a:ln/>
-        </p:spPr>
-        <p:txBody>
-          <a:bodyPr wrap="square" lIns="0" tIns="0" rIns="0" bIns="0" rtlCol="0" anchor="ctr"/>
-          <a:lstStyle/>
-          <a:p>
-            <a:pPr indent="0" marL="0">
-              <a:buNone/>
-            </a:pPr>
-            <a:r>
-              <a:rPr lang="en-US" sz="1100" b="1" dirty="0">
-                <a:solidFill>
-                  <a:srgbClr val="8CC5A5"/>
-                </a:solidFill>
-                <a:latin typeface="Yu Gothic" pitchFamily="34" charset="0"/>
-                <a:ea typeface="Yu Gothic" pitchFamily="34" charset="-122"/>
-                <a:cs typeface="Yu Gothic" pitchFamily="34" charset="-120"/>
-              </a:rPr>
-              <a:t>本格運用</a:t>
-            </a:r>
-            <a:endParaRPr lang="en-US" sz="1100" dirty="0"/>
-          </a:p>
-        </p:txBody>
-      </p:sp>
-      <p:sp>
-        <p:nvSpPr>
-          <p:cNvPr id="16" name="Text 13"/>
-          <p:cNvSpPr/>
-          <p:nvPr/>
-        </p:nvSpPr>
-        <p:spPr>
-          <a:xfrm>
-            <a:off x="4539996" y="2254910"/>
-            <a:ext cx="3111703" cy="292608"/>
-          </a:xfrm>
-          <a:prstGeom prst="rect">
-            <a:avLst/>
-          </a:prstGeom>
-          <a:noFill/>
-          <a:ln/>
-        </p:spPr>
-        <p:txBody>
-          <a:bodyPr wrap="square" lIns="0" tIns="0" rIns="0" bIns="0" rtlCol="0" anchor="ctr"/>
-          <a:lstStyle/>
-          <a:p>
-            <a:pPr indent="0" marL="0">
-              <a:buNone/>
-            </a:pPr>
-            <a:r>
-              <a:rPr lang="en-US" sz="1250" b="1" dirty="0">
-                <a:solidFill>
-                  <a:srgbClr val="FFFFFF"/>
-                </a:solidFill>
-                <a:latin typeface="Yu Gothic" pitchFamily="34" charset="0"/>
-                <a:ea typeface="Yu Gothic" pitchFamily="34" charset="-122"/>
-                <a:cs typeface="Yu Gothic" pitchFamily="34" charset="-120"/>
-              </a:rPr>
-              <a:t>売上の25％ ＋ 月額5万円</a:t>
-            </a:r>
-            <a:endParaRPr lang="en-US" sz="1250" dirty="0"/>
-          </a:p>
-        </p:txBody>
-      </p:sp>
-      <p:sp>
-        <p:nvSpPr>
-          <p:cNvPr id="17" name="Text 14"/>
-          <p:cNvSpPr/>
-          <p:nvPr/>
-        </p:nvSpPr>
-        <p:spPr>
-          <a:xfrm>
-            <a:off x="7980883" y="1651406"/>
-            <a:ext cx="3550615" cy="219456"/>
-          </a:xfrm>
-          <a:prstGeom prst="rect">
-            <a:avLst/>
-          </a:prstGeom>
-          <a:noFill/>
-          <a:ln/>
-        </p:spPr>
-        <p:txBody>
-          <a:bodyPr wrap="square" lIns="0" tIns="0" rIns="0" bIns="0" rtlCol="0" anchor="ctr"/>
-          <a:lstStyle/>
-          <a:p>
-            <a:pPr indent="0" marL="0">
-              <a:buNone/>
-            </a:pPr>
-            <a:r>
-              <a:rPr lang="en-US" sz="1000" b="1" dirty="0">
-                <a:solidFill>
-                  <a:srgbClr val="7E8882"/>
-                </a:solidFill>
-                <a:latin typeface="Yu Gothic" pitchFamily="34" charset="0"/>
-                <a:ea typeface="Yu Gothic" pitchFamily="34" charset="-122"/>
-                <a:cs typeface="Yu Gothic" pitchFamily="34" charset="-120"/>
-              </a:rPr>
-              <a:t>3年目</a:t>
-            </a:r>
-            <a:endParaRPr lang="en-US" sz="1000" dirty="0"/>
-          </a:p>
-        </p:txBody>
-      </p:sp>
-      <p:sp>
-        <p:nvSpPr>
-          <p:cNvPr id="18" name="Shape 15"/>
-          <p:cNvSpPr/>
-          <p:nvPr/>
-        </p:nvSpPr>
-        <p:spPr>
-          <a:xfrm>
-            <a:off x="7980883" y="1925726"/>
-            <a:ext cx="3550615" cy="786384"/>
-          </a:xfrm>
-          <a:prstGeom prst="roundRect">
-            <a:avLst>
-              <a:gd name="adj" fmla="val 6977"/>
-            </a:avLst>
-          </a:prstGeom>
-          <a:solidFill>
-            <a:srgbClr val="0C5230"/>
-          </a:solidFill>
-          <a:ln/>
-        </p:spPr>
-      </p:sp>
-      <p:sp>
-        <p:nvSpPr>
-          <p:cNvPr id="19" name="Text 16"/>
-          <p:cNvSpPr/>
-          <p:nvPr/>
-        </p:nvSpPr>
-        <p:spPr>
-          <a:xfrm>
-            <a:off x="8200339" y="1998878"/>
-            <a:ext cx="3111703" cy="256032"/>
-          </a:xfrm>
-          <a:prstGeom prst="rect">
-            <a:avLst/>
-          </a:prstGeom>
-          <a:noFill/>
-          <a:ln/>
-        </p:spPr>
-        <p:txBody>
-          <a:bodyPr wrap="square" lIns="0" tIns="0" rIns="0" bIns="0" rtlCol="0" anchor="ctr"/>
-          <a:lstStyle/>
-          <a:p>
-            <a:pPr indent="0" marL="0">
-              <a:buNone/>
-            </a:pPr>
-            <a:r>
-              <a:rPr lang="en-US" sz="1100" b="1" dirty="0">
-                <a:solidFill>
-                  <a:srgbClr val="8CC5A5"/>
-                </a:solidFill>
-                <a:latin typeface="Yu Gothic" pitchFamily="34" charset="0"/>
-                <a:ea typeface="Yu Gothic" pitchFamily="34" charset="-122"/>
-                <a:cs typeface="Yu Gothic" pitchFamily="34" charset="-120"/>
-              </a:rPr>
-              <a:t>本格運用</a:t>
-            </a:r>
-            <a:endParaRPr lang="en-US" sz="1100" dirty="0"/>
-          </a:p>
-        </p:txBody>
-      </p:sp>
-      <p:sp>
-        <p:nvSpPr>
-          <p:cNvPr id="20" name="Text 17"/>
-          <p:cNvSpPr/>
-          <p:nvPr/>
-        </p:nvSpPr>
-        <p:spPr>
-          <a:xfrm>
-            <a:off x="8200339" y="2254910"/>
-            <a:ext cx="3111703" cy="292608"/>
-          </a:xfrm>
-          <a:prstGeom prst="rect">
-            <a:avLst/>
-          </a:prstGeom>
-          <a:noFill/>
-          <a:ln/>
-        </p:spPr>
-        <p:txBody>
-          <a:bodyPr wrap="square" lIns="0" tIns="0" rIns="0" bIns="0" rtlCol="0" anchor="ctr"/>
-          <a:lstStyle/>
-          <a:p>
-            <a:pPr indent="0" marL="0">
-              <a:buNone/>
-            </a:pPr>
-            <a:r>
-              <a:rPr lang="en-US" sz="1250" b="1" dirty="0">
-                <a:solidFill>
-                  <a:srgbClr val="FFFFFF"/>
-                </a:solidFill>
-                <a:latin typeface="Yu Gothic" pitchFamily="34" charset="0"/>
-                <a:ea typeface="Yu Gothic" pitchFamily="34" charset="-122"/>
-                <a:cs typeface="Yu Gothic" pitchFamily="34" charset="-120"/>
-              </a:rPr>
-              <a:t>売上の25％ ＋ 月額5万円</a:t>
-            </a:r>
-            <a:endParaRPr lang="en-US" sz="1250" dirty="0"/>
-          </a:p>
-        </p:txBody>
-      </p:sp>
-      <p:sp>
-        <p:nvSpPr>
-          <p:cNvPr id="21" name="Shape 18"/>
-          <p:cNvSpPr/>
-          <p:nvPr/>
-        </p:nvSpPr>
-        <p:spPr>
-          <a:xfrm>
-            <a:off x="660197" y="2840126"/>
-            <a:ext cx="7210958" cy="384048"/>
-          </a:xfrm>
-          <a:prstGeom prst="roundRect">
-            <a:avLst>
-              <a:gd name="adj" fmla="val 11905"/>
-            </a:avLst>
-          </a:prstGeom>
-          <a:solidFill>
-            <a:srgbClr val="FBF4E4"/>
-          </a:solidFill>
-          <a:ln w="12700">
-            <a:solidFill>
-              <a:srgbClr val="E7D3A8"/>
-            </a:solidFill>
-            <a:prstDash val="solid"/>
-          </a:ln>
-        </p:spPr>
-      </p:sp>
-      <p:sp>
-        <p:nvSpPr>
-          <p:cNvPr id="22" name="Text 19"/>
-          <p:cNvSpPr/>
-          <p:nvPr/>
-        </p:nvSpPr>
-        <p:spPr>
-          <a:xfrm>
-            <a:off x="879653" y="2840126"/>
-            <a:ext cx="6772046" cy="384048"/>
-          </a:xfrm>
-          <a:prstGeom prst="rect">
-            <a:avLst/>
-          </a:prstGeom>
-          <a:noFill/>
-          <a:ln/>
-        </p:spPr>
-        <p:txBody>
-          <a:bodyPr wrap="square" lIns="0" tIns="0" rIns="0" bIns="0" rtlCol="0" anchor="ctr"/>
-          <a:lstStyle/>
-          <a:p>
-            <a:pPr indent="0" marL="0">
-              <a:buNone/>
-            </a:pPr>
-            <a:r>
-              <a:rPr lang="en-US" sz="1050" b="1" dirty="0">
-                <a:solidFill>
-                  <a:srgbClr val="A8761F"/>
-                </a:solidFill>
-                <a:latin typeface="Yu Gothic" pitchFamily="34" charset="0"/>
-                <a:ea typeface="Yu Gothic" pitchFamily="34" charset="-122"/>
-                <a:cs typeface="Yu Gothic" pitchFamily="34" charset="-120"/>
-              </a:rPr>
-              <a:t>今回の特約：最低2年〜　3年以上と同じ条件でお受けします</a:t>
-            </a:r>
-            <a:endParaRPr lang="en-US" sz="1050" dirty="0"/>
-          </a:p>
-        </p:txBody>
-      </p:sp>
-      <p:sp>
-        <p:nvSpPr>
-          <p:cNvPr id="23" name="Shape 20"/>
-          <p:cNvSpPr/>
-          <p:nvPr/>
-        </p:nvSpPr>
-        <p:spPr>
-          <a:xfrm>
-            <a:off x="660197" y="3333902"/>
-            <a:ext cx="10871302" cy="384048"/>
-          </a:xfrm>
-          <a:prstGeom prst="roundRect">
-            <a:avLst>
-              <a:gd name="adj" fmla="val 11905"/>
-            </a:avLst>
-          </a:prstGeom>
-          <a:solidFill>
-            <a:srgbClr val="F1F8F3"/>
-          </a:solidFill>
-          <a:ln w="12700">
-            <a:solidFill>
-              <a:srgbClr val="D2E7DA"/>
-            </a:solidFill>
-            <a:prstDash val="solid"/>
-          </a:ln>
-        </p:spPr>
-      </p:sp>
-      <p:sp>
-        <p:nvSpPr>
-          <p:cNvPr id="24" name="Text 21"/>
-          <p:cNvSpPr/>
-          <p:nvPr/>
-        </p:nvSpPr>
-        <p:spPr>
-          <a:xfrm>
-            <a:off x="879653" y="3333902"/>
-            <a:ext cx="10432390" cy="384048"/>
-          </a:xfrm>
-          <a:prstGeom prst="rect">
-            <a:avLst/>
-          </a:prstGeom>
-          <a:noFill/>
-          <a:ln/>
-        </p:spPr>
-        <p:txBody>
-          <a:bodyPr wrap="square" lIns="0" tIns="0" rIns="0" bIns="0" rtlCol="0" anchor="ctr"/>
-          <a:lstStyle/>
-          <a:p>
-            <a:pPr indent="0" marL="0">
-              <a:buNone/>
-            </a:pPr>
-            <a:r>
-              <a:rPr lang="en-US" sz="1050" b="1" dirty="0">
-                <a:solidFill>
-                  <a:srgbClr val="106838"/>
-                </a:solidFill>
-                <a:latin typeface="Yu Gothic" pitchFamily="34" charset="0"/>
-                <a:ea typeface="Yu Gothic" pitchFamily="34" charset="-122"/>
-                <a:cs typeface="Yu Gothic" pitchFamily="34" charset="-120"/>
-              </a:rPr>
-              <a:t>基本契約：3年〜　トライアルの1年を含めて通算します</a:t>
-            </a:r>
-            <a:endParaRPr lang="en-US" sz="1050" dirty="0"/>
-          </a:p>
-        </p:txBody>
-      </p:sp>
-      <p:sp>
-        <p:nvSpPr>
-          <p:cNvPr id="25" name="Shape 22"/>
-          <p:cNvSpPr/>
-          <p:nvPr/>
-        </p:nvSpPr>
-        <p:spPr>
-          <a:xfrm>
-            <a:off x="660197" y="3877056"/>
-            <a:ext cx="3440887" cy="1847088"/>
-          </a:xfrm>
-          <a:prstGeom prst="roundRect">
-            <a:avLst>
-              <a:gd name="adj" fmla="val 2970"/>
-            </a:avLst>
-          </a:prstGeom>
-          <a:solidFill>
-            <a:srgbClr val="F1F8F3"/>
-          </a:solidFill>
-          <a:ln w="9525">
-            <a:solidFill>
-              <a:srgbClr val="D2E7DA"/>
-            </a:solidFill>
-            <a:prstDash val="solid"/>
-          </a:ln>
-        </p:spPr>
-      </p:sp>
       <p:pic>
         <p:nvPicPr>
-          <p:cNvPr id="26" name="Image 1" descr="/home/user/suzuki-ceo/selfcafe-miraiya-trial-deck/assets/icons/LuTimer-green.png">    </p:cNvPr>
+          <p:cNvPr id="13" name="Image 1" descr="/home/user/suzuki-ceo/selfcafe-miraiya-trial-deck/assets/icons/LuBadgeCheck-pale.png">    </p:cNvPr>
           <p:cNvPicPr>
             <a:picLocks noChangeAspect="1"/>
           </p:cNvPicPr>
@@ -4503,8 +5719,8 @@
         </p:blipFill>
         <p:spPr>
           <a:xfrm>
-            <a:off x="916229" y="4078224"/>
-            <a:ext cx="329184" cy="329184"/>
+            <a:off x="1007669" y="5431536"/>
+            <a:ext cx="402336" cy="402336"/>
           </a:xfrm>
           <a:prstGeom prst="rect">
             <a:avLst/>
@@ -4513,14 +5729,14 @@
       </p:pic>
       <p:sp>
         <p:nvSpPr>
-          <p:cNvPr id="27" name="Text 23"/>
-          <p:cNvSpPr/>
-          <p:nvPr/>
-        </p:nvSpPr>
-        <p:spPr>
-          <a:xfrm>
-            <a:off x="916229" y="4517136"/>
-            <a:ext cx="2928823" cy="457200"/>
+          <p:cNvPr id="14" name="Text 9"/>
+          <p:cNvSpPr/>
+          <p:nvPr/>
+        </p:nvSpPr>
+        <p:spPr>
+          <a:xfrm>
+            <a:off x="1574597" y="5230368"/>
+            <a:ext cx="9591142" cy="822960"/>
           </a:xfrm>
           <a:prstGeom prst="rect">
             <a:avLst/>
@@ -4529,133 +5745,60 @@
           <a:ln/>
         </p:spPr>
         <p:txBody>
-          <a:bodyPr wrap="square" lIns="0" tIns="0" rIns="0" bIns="0" rtlCol="0" anchor="t"/>
+          <a:bodyPr wrap="square" lIns="0" tIns="0" rIns="0" bIns="0" rtlCol="0" anchor="ctr"/>
           <a:lstStyle/>
           <a:p>
             <a:pPr indent="0" marL="0">
               <a:lnSpc>
-                <a:spcPct val="120000"/>
+                <a:spcPct val="125000"/>
               </a:lnSpc>
               <a:buNone/>
             </a:pPr>
             <a:r>
-              <a:rPr lang="en-US" sz="1200" b="1" dirty="0">
-                <a:solidFill>
-                  <a:srgbClr val="0A3D23"/>
+              <a:rPr lang="en-US" sz="1300" b="1" dirty="0">
+                <a:solidFill>
+                  <a:srgbClr val="FFFFFF"/>
                 </a:solidFill>
                 <a:latin typeface="Yu Gothic" pitchFamily="34" charset="0"/>
                 <a:ea typeface="Yu Gothic" pitchFamily="34" charset="-122"/>
                 <a:cs typeface="Yu Gothic" pitchFamily="34" charset="-120"/>
               </a:rPr>
-              <a:t>1年目はトライアル</a:t>
-            </a:r>
-            <a:endParaRPr lang="en-US" sz="1200" dirty="0"/>
-          </a:p>
-        </p:txBody>
-      </p:sp>
-      <p:sp>
-        <p:nvSpPr>
-          <p:cNvPr id="28" name="Text 24"/>
-          <p:cNvSpPr/>
-          <p:nvPr/>
-        </p:nvSpPr>
-        <p:spPr>
-          <a:xfrm>
-            <a:off x="916229" y="5029200"/>
-            <a:ext cx="2928823" cy="603504"/>
-          </a:xfrm>
-          <a:prstGeom prst="rect">
-            <a:avLst/>
-          </a:prstGeom>
-          <a:noFill/>
-          <a:ln/>
-        </p:spPr>
-        <p:txBody>
-          <a:bodyPr wrap="square" lIns="0" tIns="0" rIns="0" bIns="0" rtlCol="0" anchor="t"/>
-          <a:lstStyle/>
+              <a:t>契約期間を1年に短縮する分、月額固定5万円はお付けしていません。</a:t>
+            </a:r>
+            <a:endParaRPr lang="en-US" sz="1300" dirty="0"/>
+          </a:p>
           <a:p>
             <a:pPr indent="0" marL="0">
               <a:lnSpc>
-                <a:spcPct val="135000"/>
+                <a:spcPct val="125000"/>
               </a:lnSpc>
               <a:buNone/>
             </a:pPr>
             <a:r>
-              <a:rPr lang="en-US" sz="950" dirty="0">
-                <a:solidFill>
-                  <a:srgbClr val="4B5550"/>
+              <a:rPr lang="en-US" sz="1100" dirty="0">
+                <a:solidFill>
+                  <a:srgbClr val="AFC2B8"/>
                 </a:solidFill>
                 <a:latin typeface="Yu Gothic" pitchFamily="34" charset="0"/>
                 <a:ea typeface="Yu Gothic" pitchFamily="34" charset="-122"/>
                 <a:cs typeface="Yu Gothic" pitchFamily="34" charset="-120"/>
               </a:rPr>
-              <a:t>実際の販売杯数と、清掃・補充の運営負荷をご確認いただく期間です。お支払いは売上の25％のみとなります。</a:t>
-            </a:r>
-            <a:endParaRPr lang="en-US" sz="950" dirty="0"/>
-          </a:p>
-        </p:txBody>
-      </p:sp>
-      <p:sp>
-        <p:nvSpPr>
-          <p:cNvPr id="29" name="Shape 25"/>
-          <p:cNvSpPr/>
-          <p:nvPr/>
-        </p:nvSpPr>
-        <p:spPr>
-          <a:xfrm>
-            <a:off x="4375404" y="3877056"/>
-            <a:ext cx="3440887" cy="1847088"/>
-          </a:xfrm>
-          <a:prstGeom prst="roundRect">
-            <a:avLst>
-              <a:gd name="adj" fmla="val 2970"/>
-            </a:avLst>
-          </a:prstGeom>
-          <a:solidFill>
-            <a:srgbClr val="F1F8F3"/>
-          </a:solidFill>
-          <a:ln w="9525">
-            <a:solidFill>
-              <a:srgbClr val="D2E7DA"/>
-            </a:solidFill>
-            <a:prstDash val="solid"/>
-          </a:ln>
-        </p:spPr>
-      </p:sp>
-      <p:pic>
-        <p:nvPicPr>
-          <p:cNvPr id="30" name="Image 2" descr="/home/user/suzuki-ceo/selfcafe-miraiya-trial-deck/assets/icons/LuHandCoins-green.png">    </p:cNvPr>
-          <p:cNvPicPr>
-            <a:picLocks noChangeAspect="1"/>
-          </p:cNvPicPr>
-          <p:nvPr/>
-        </p:nvPicPr>
-        <p:blipFill>
-          <a:blip r:embed="rId3"/>
-          <a:stretch>
-            <a:fillRect/>
-          </a:stretch>
-        </p:blipFill>
-        <p:spPr>
-          <a:xfrm>
-            <a:off x="4631436" y="4078224"/>
-            <a:ext cx="329184" cy="329184"/>
-          </a:xfrm>
-          <a:prstGeom prst="rect">
-            <a:avLst/>
-          </a:prstGeom>
-        </p:spPr>
-      </p:pic>
-      <p:sp>
-        <p:nvSpPr>
-          <p:cNvPr id="31" name="Text 26"/>
-          <p:cNvSpPr/>
-          <p:nvPr/>
-        </p:nvSpPr>
-        <p:spPr>
-          <a:xfrm>
-            <a:off x="4631436" y="4517136"/>
-            <a:ext cx="2928823" cy="457200"/>
+              <a:t>それ以外の条件は、通常のご契約とすべて同じです。</a:t>
+            </a:r>
+            <a:endParaRPr lang="en-US" sz="1300" dirty="0"/>
+          </a:p>
+        </p:txBody>
+      </p:sp>
+      <p:sp>
+        <p:nvSpPr>
+          <p:cNvPr id="15" name="Text 10"/>
+          <p:cNvSpPr/>
+          <p:nvPr/>
+        </p:nvSpPr>
+        <p:spPr>
+          <a:xfrm>
+            <a:off x="660197" y="6163056"/>
+            <a:ext cx="10871302" cy="182880"/>
           </a:xfrm>
           <a:prstGeom prst="rect">
             <a:avLst/>
@@ -4664,241 +5807,22 @@
           <a:ln/>
         </p:spPr>
         <p:txBody>
-          <a:bodyPr wrap="square" lIns="0" tIns="0" rIns="0" bIns="0" rtlCol="0" anchor="t"/>
+          <a:bodyPr wrap="square" lIns="0" tIns="0" rIns="0" bIns="0" rtlCol="0" anchor="ctr"/>
           <a:lstStyle/>
           <a:p>
             <a:pPr indent="0" marL="0">
-              <a:lnSpc>
-                <a:spcPct val="120000"/>
-              </a:lnSpc>
-              <a:buNone/>
-            </a:pPr>
-            <a:r>
-              <a:rPr lang="en-US" sz="1200" b="1" dirty="0">
-                <a:solidFill>
-                  <a:srgbClr val="0A3D23"/>
+              <a:buNone/>
+            </a:pPr>
+            <a:r>
+              <a:rPr lang="en-US" sz="850" dirty="0">
+                <a:solidFill>
+                  <a:srgbClr val="A8B0AA"/>
                 </a:solidFill>
                 <a:latin typeface="Yu Gothic" pitchFamily="34" charset="0"/>
                 <a:ea typeface="Yu Gothic" pitchFamily="34" charset="-122"/>
                 <a:cs typeface="Yu Gothic" pitchFamily="34" charset="-120"/>
               </a:rPr>
-              <a:t>2年目から月額5万円が加算</a:t>
-            </a:r>
-            <a:endParaRPr lang="en-US" sz="1200" dirty="0"/>
-          </a:p>
-        </p:txBody>
-      </p:sp>
-      <p:sp>
-        <p:nvSpPr>
-          <p:cNvPr id="32" name="Text 27"/>
-          <p:cNvSpPr/>
-          <p:nvPr/>
-        </p:nvSpPr>
-        <p:spPr>
-          <a:xfrm>
-            <a:off x="4631436" y="5029200"/>
-            <a:ext cx="2928823" cy="603504"/>
-          </a:xfrm>
-          <a:prstGeom prst="rect">
-            <a:avLst/>
-          </a:prstGeom>
-          <a:noFill/>
-          <a:ln/>
-        </p:spPr>
-        <p:txBody>
-          <a:bodyPr wrap="square" lIns="0" tIns="0" rIns="0" bIns="0" rtlCol="0" anchor="t"/>
-          <a:lstStyle/>
-          <a:p>
-            <a:pPr indent="0" marL="0">
-              <a:lnSpc>
-                <a:spcPct val="135000"/>
-              </a:lnSpc>
-              <a:buNone/>
-            </a:pPr>
-            <a:r>
-              <a:rPr lang="en-US" sz="950" dirty="0">
-                <a:solidFill>
-                  <a:srgbClr val="4B5550"/>
-                </a:solidFill>
-                <a:latin typeface="Yu Gothic" pitchFamily="34" charset="0"/>
-                <a:ea typeface="Yu Gothic" pitchFamily="34" charset="-122"/>
-                <a:cs typeface="Yu Gothic" pitchFamily="34" charset="-120"/>
-              </a:rPr>
-              <a:t>トライアル期間を終えたあとは、売上の25％に月額固定5万円を上乗せしてお支払いします。</a:t>
-            </a:r>
-            <a:endParaRPr lang="en-US" sz="950" dirty="0"/>
-          </a:p>
-        </p:txBody>
-      </p:sp>
-      <p:sp>
-        <p:nvSpPr>
-          <p:cNvPr id="33" name="Shape 28"/>
-          <p:cNvSpPr/>
-          <p:nvPr/>
-        </p:nvSpPr>
-        <p:spPr>
-          <a:xfrm>
-            <a:off x="8090611" y="3877056"/>
-            <a:ext cx="3440887" cy="1847088"/>
-          </a:xfrm>
-          <a:prstGeom prst="roundRect">
-            <a:avLst>
-              <a:gd name="adj" fmla="val 2970"/>
-            </a:avLst>
-          </a:prstGeom>
-          <a:solidFill>
-            <a:srgbClr val="F1F8F3"/>
-          </a:solidFill>
-          <a:ln w="9525">
-            <a:solidFill>
-              <a:srgbClr val="D2E7DA"/>
-            </a:solidFill>
-            <a:prstDash val="solid"/>
-          </a:ln>
-        </p:spPr>
-      </p:sp>
-      <p:pic>
-        <p:nvPicPr>
-          <p:cNvPr id="34" name="Image 3" descr="/home/user/suzuki-ceo/selfcafe-miraiya-trial-deck/assets/icons/LuFileCheck-green.png">    </p:cNvPr>
-          <p:cNvPicPr>
-            <a:picLocks noChangeAspect="1"/>
-          </p:cNvPicPr>
-          <p:nvPr/>
-        </p:nvPicPr>
-        <p:blipFill>
-          <a:blip r:embed="rId4"/>
-          <a:stretch>
-            <a:fillRect/>
-          </a:stretch>
-        </p:blipFill>
-        <p:spPr>
-          <a:xfrm>
-            <a:off x="8346643" y="4078224"/>
-            <a:ext cx="329184" cy="329184"/>
-          </a:xfrm>
-          <a:prstGeom prst="rect">
-            <a:avLst/>
-          </a:prstGeom>
-        </p:spPr>
-      </p:pic>
-      <p:sp>
-        <p:nvSpPr>
-          <p:cNvPr id="35" name="Text 29"/>
-          <p:cNvSpPr/>
-          <p:nvPr/>
-        </p:nvSpPr>
-        <p:spPr>
-          <a:xfrm>
-            <a:off x="8346643" y="4517136"/>
-            <a:ext cx="2928823" cy="457200"/>
-          </a:xfrm>
-          <a:prstGeom prst="rect">
-            <a:avLst/>
-          </a:prstGeom>
-          <a:noFill/>
-          <a:ln/>
-        </p:spPr>
-        <p:txBody>
-          <a:bodyPr wrap="square" lIns="0" tIns="0" rIns="0" bIns="0" rtlCol="0" anchor="t"/>
-          <a:lstStyle/>
-          <a:p>
-            <a:pPr indent="0" marL="0">
-              <a:lnSpc>
-                <a:spcPct val="120000"/>
-              </a:lnSpc>
-              <a:buNone/>
-            </a:pPr>
-            <a:r>
-              <a:rPr lang="en-US" sz="1200" b="1" dirty="0">
-                <a:solidFill>
-                  <a:srgbClr val="0A3D23"/>
-                </a:solidFill>
-                <a:latin typeface="Yu Gothic" pitchFamily="34" charset="0"/>
-                <a:ea typeface="Yu Gothic" pitchFamily="34" charset="-122"/>
-                <a:cs typeface="Yu Gothic" pitchFamily="34" charset="-120"/>
-              </a:rPr>
-              <a:t>3年を基本とする理由</a:t>
-            </a:r>
-            <a:endParaRPr lang="en-US" sz="1200" dirty="0"/>
-          </a:p>
-        </p:txBody>
-      </p:sp>
-      <p:sp>
-        <p:nvSpPr>
-          <p:cNvPr id="36" name="Text 30"/>
-          <p:cNvSpPr/>
-          <p:nvPr/>
-        </p:nvSpPr>
-        <p:spPr>
-          <a:xfrm>
-            <a:off x="8346643" y="5029200"/>
-            <a:ext cx="2928823" cy="603504"/>
-          </a:xfrm>
-          <a:prstGeom prst="rect">
-            <a:avLst/>
-          </a:prstGeom>
-          <a:noFill/>
-          <a:ln/>
-        </p:spPr>
-        <p:txBody>
-          <a:bodyPr wrap="square" lIns="0" tIns="0" rIns="0" bIns="0" rtlCol="0" anchor="t"/>
-          <a:lstStyle/>
-          <a:p>
-            <a:pPr indent="0" marL="0">
-              <a:lnSpc>
-                <a:spcPct val="135000"/>
-              </a:lnSpc>
-              <a:buNone/>
-            </a:pPr>
-            <a:r>
-              <a:rPr lang="en-US" sz="950" dirty="0">
-                <a:solidFill>
-                  <a:srgbClr val="4B5550"/>
-                </a:solidFill>
-                <a:latin typeface="Yu Gothic" pitchFamily="34" charset="0"/>
-                <a:ea typeface="Yu Gothic" pitchFamily="34" charset="-122"/>
-                <a:cs typeface="Yu Gothic" pitchFamily="34" charset="-120"/>
-              </a:rPr>
-              <a:t>内装工事費は当社が負担するため、回収に一定の期間が必要です。今回は特約として2年からお受けします。</a:t>
-            </a:r>
-            <a:endParaRPr lang="en-US" sz="950" dirty="0"/>
-          </a:p>
-        </p:txBody>
-      </p:sp>
-      <p:sp>
-        <p:nvSpPr>
-          <p:cNvPr id="37" name="Text 31"/>
-          <p:cNvSpPr/>
-          <p:nvPr/>
-        </p:nvSpPr>
-        <p:spPr>
-          <a:xfrm>
-            <a:off x="660197" y="5888736"/>
-            <a:ext cx="10871302" cy="182880"/>
-          </a:xfrm>
-          <a:prstGeom prst="rect">
-            <a:avLst/>
-          </a:prstGeom>
-          <a:noFill/>
-          <a:ln/>
-        </p:spPr>
-        <p:txBody>
-          <a:bodyPr wrap="square" lIns="0" tIns="0" rIns="0" bIns="0" rtlCol="0" anchor="ctr"/>
-          <a:lstStyle/>
-          <a:p>
-            <a:pPr indent="0" marL="0">
-              <a:buNone/>
-            </a:pPr>
-            <a:r>
-              <a:rPr lang="en-US" sz="850" dirty="0">
-                <a:solidFill>
-                  <a:srgbClr val="A8B0AA"/>
-                </a:solidFill>
-                <a:latin typeface="Yu Gothic" pitchFamily="34" charset="0"/>
-                <a:ea typeface="Yu Gothic" pitchFamily="34" charset="-122"/>
-                <a:cs typeface="Yu Gothic" pitchFamily="34" charset="-120"/>
-              </a:rPr>
-              <a:t>※ トライアル期間（1年）は契約期間に含みます。特約を適用した場合、最低契約期間はトライアル1年＋本格運用1年の計2年となります。</a:t>
+              <a:t>※ 金額はすべて税抜。内装工事費は当社が負担し、原状回復義務もいただかないため、1年でご判断いただく形でも御社側の持ち出しは家具・什器のみです。</a:t>
             </a:r>
             <a:endParaRPr lang="en-US" sz="850" dirty="0"/>
           </a:p>
@@ -5000,7 +5924,7 @@
                 <a:ea typeface="Yu Gothic" pitchFamily="34" charset="-122"/>
                 <a:cs typeface="Yu Gothic" pitchFamily="34" charset="-120"/>
               </a:rPr>
-              <a:t>   費用と所有の区分</a:t>
+              <a:t>   内装仕様</a:t>
             </a:r>
             <a:endParaRPr lang="en-US" sz="1050" dirty="0"/>
           </a:p>
@@ -5039,7 +5963,7 @@
                 <a:ea typeface="Yu Gothic" pitchFamily="34" charset="-122"/>
                 <a:cs typeface="Yu Gothic" pitchFamily="34" charset="-120"/>
               </a:rPr>
-              <a:t>どちらが何を用意し、終了後どうなるか。</a:t>
+              <a:t>内装はプレミアム仕様でご提案します。</a:t>
             </a:r>
             <a:endParaRPr lang="en-US" sz="2900" dirty="0"/>
           </a:p>
@@ -5078,7 +6002,7 @@
                 <a:ea typeface="Yu Gothic" pitchFamily="34" charset="-122"/>
                 <a:cs typeface="Yu Gothic" pitchFamily="34" charset="-120"/>
               </a:rPr>
-              <a:t>トライアル期間中の費用負担と、終了後にそれがどう扱われるかを整理しました。</a:t>
+              <a:t>木製書架と間接照明でまとめた書店一体型の仕様です。床仕上げは2案からお選びいただけます。</a:t>
             </a:r>
             <a:endParaRPr lang="en-US" sz="1250" dirty="0"/>
           </a:p>
@@ -5186,9 +6110,1434 @@
           </a:p>
         </p:txBody>
       </p:sp>
+      <p:sp>
+        <p:nvSpPr>
+          <p:cNvPr id="9" name="Shape 6"/>
+          <p:cNvSpPr/>
+          <p:nvPr/>
+        </p:nvSpPr>
+        <p:spPr>
+          <a:xfrm>
+            <a:off x="660197" y="1651406"/>
+            <a:ext cx="2194560" cy="237744"/>
+          </a:xfrm>
+          <a:prstGeom prst="roundRect">
+            <a:avLst>
+              <a:gd name="adj" fmla="val 19231"/>
+            </a:avLst>
+          </a:prstGeom>
+          <a:solidFill>
+            <a:srgbClr val="106838"/>
+          </a:solidFill>
+          <a:ln/>
+        </p:spPr>
+      </p:sp>
+      <p:sp>
+        <p:nvSpPr>
+          <p:cNvPr id="10" name="Text 7"/>
+          <p:cNvSpPr/>
+          <p:nvPr/>
+        </p:nvSpPr>
+        <p:spPr>
+          <a:xfrm>
+            <a:off x="660197" y="1651406"/>
+            <a:ext cx="2194560" cy="237744"/>
+          </a:xfrm>
+          <a:prstGeom prst="rect">
+            <a:avLst/>
+          </a:prstGeom>
+          <a:noFill/>
+          <a:ln/>
+        </p:spPr>
+        <p:txBody>
+          <a:bodyPr wrap="square" lIns="0" tIns="0" rIns="0" bIns="0" rtlCol="0" anchor="ctr"/>
+          <a:lstStyle/>
+          <a:p>
+            <a:pPr algn="ctr" indent="0" marL="0">
+              <a:buNone/>
+            </a:pPr>
+            <a:r>
+              <a:rPr lang="en-US" sz="950" b="1" dirty="0">
+                <a:solidFill>
+                  <a:srgbClr val="FFFFFF"/>
+                </a:solidFill>
+                <a:latin typeface="Yu Gothic" pitchFamily="34" charset="0"/>
+                <a:ea typeface="Yu Gothic" pitchFamily="34" charset="-122"/>
+                <a:cs typeface="Yu Gothic" pitchFamily="34" charset="-120"/>
+              </a:rPr>
+              <a:t>N案：ライトフロア</a:t>
+            </a:r>
+            <a:endParaRPr lang="en-US" sz="950" dirty="0"/>
+          </a:p>
+        </p:txBody>
+      </p:sp>
+      <p:sp>
+        <p:nvSpPr>
+          <p:cNvPr id="11" name="Shape 8"/>
+          <p:cNvSpPr/>
+          <p:nvPr/>
+        </p:nvSpPr>
+        <p:spPr>
+          <a:xfrm>
+            <a:off x="4345229" y="1651406"/>
+            <a:ext cx="2194560" cy="237744"/>
+          </a:xfrm>
+          <a:prstGeom prst="roundRect">
+            <a:avLst>
+              <a:gd name="adj" fmla="val 19231"/>
+            </a:avLst>
+          </a:prstGeom>
+          <a:solidFill>
+            <a:srgbClr val="106838"/>
+          </a:solidFill>
+          <a:ln/>
+        </p:spPr>
+      </p:sp>
+      <p:sp>
+        <p:nvSpPr>
+          <p:cNvPr id="12" name="Text 9"/>
+          <p:cNvSpPr/>
+          <p:nvPr/>
+        </p:nvSpPr>
+        <p:spPr>
+          <a:xfrm>
+            <a:off x="4345229" y="1651406"/>
+            <a:ext cx="2194560" cy="237744"/>
+          </a:xfrm>
+          <a:prstGeom prst="rect">
+            <a:avLst/>
+          </a:prstGeom>
+          <a:noFill/>
+          <a:ln/>
+        </p:spPr>
+        <p:txBody>
+          <a:bodyPr wrap="square" lIns="0" tIns="0" rIns="0" bIns="0" rtlCol="0" anchor="ctr"/>
+          <a:lstStyle/>
+          <a:p>
+            <a:pPr algn="ctr" indent="0" marL="0">
+              <a:buNone/>
+            </a:pPr>
+            <a:r>
+              <a:rPr lang="en-US" sz="950" b="1" dirty="0">
+                <a:solidFill>
+                  <a:srgbClr val="FFFFFF"/>
+                </a:solidFill>
+                <a:latin typeface="Yu Gothic" pitchFamily="34" charset="0"/>
+                <a:ea typeface="Yu Gothic" pitchFamily="34" charset="-122"/>
+                <a:cs typeface="Yu Gothic" pitchFamily="34" charset="-120"/>
+              </a:rPr>
+              <a:t>G案：グリーンフロア</a:t>
+            </a:r>
+            <a:endParaRPr lang="en-US" sz="950" dirty="0"/>
+          </a:p>
+        </p:txBody>
+      </p:sp>
+      <p:pic>
+        <p:nvPicPr>
+          <p:cNvPr id="13" name="Image 1" descr="/home/user/suzuki-ceo/selfcafe-miraiya-trial-deck/assets/photos/.crops/tsuchiura-premium-n-375x211.jpg">    </p:cNvPr>
+          <p:cNvPicPr>
+            <a:picLocks noChangeAspect="1"/>
+          </p:cNvPicPr>
+          <p:nvPr/>
+        </p:nvPicPr>
+        <p:blipFill>
+          <a:blip r:embed="rId2"/>
+          <a:stretch>
+            <a:fillRect/>
+          </a:stretch>
+        </p:blipFill>
+        <p:spPr>
+          <a:xfrm>
+            <a:off x="660197" y="1920240"/>
+            <a:ext cx="3429000" cy="1928813"/>
+          </a:xfrm>
+          <a:prstGeom prst="rect">
+            <a:avLst/>
+          </a:prstGeom>
+        </p:spPr>
+      </p:pic>
+      <p:sp>
+        <p:nvSpPr>
+          <p:cNvPr id="14" name="Shape 10"/>
+          <p:cNvSpPr/>
+          <p:nvPr/>
+        </p:nvSpPr>
+        <p:spPr>
+          <a:xfrm>
+            <a:off x="660197" y="1920240"/>
+            <a:ext cx="3429000" cy="1928813"/>
+          </a:xfrm>
+          <a:prstGeom prst="rect">
+            <a:avLst/>
+          </a:prstGeom>
+          <a:ln w="12700">
+            <a:solidFill>
+              <a:srgbClr val="D8D2C6"/>
+            </a:solidFill>
+            <a:prstDash val="solid"/>
+          </a:ln>
+        </p:spPr>
+      </p:sp>
+      <p:sp>
+        <p:nvSpPr>
+          <p:cNvPr id="15" name="Shape 11"/>
+          <p:cNvSpPr/>
+          <p:nvPr/>
+        </p:nvSpPr>
+        <p:spPr>
+          <a:xfrm>
+            <a:off x="788213" y="3391852"/>
+            <a:ext cx="749427" cy="329184"/>
+          </a:xfrm>
+          <a:prstGeom prst="roundRect">
+            <a:avLst>
+              <a:gd name="adj" fmla="val 13889"/>
+            </a:avLst>
+          </a:prstGeom>
+          <a:solidFill>
+            <a:srgbClr val="FFFFFF">
+              <a:alpha val="90000"/>
+            </a:srgbClr>
+          </a:solidFill>
+          <a:ln/>
+        </p:spPr>
+      </p:sp>
+      <p:sp>
+        <p:nvSpPr>
+          <p:cNvPr id="16" name="Text 12"/>
+          <p:cNvSpPr/>
+          <p:nvPr/>
+        </p:nvSpPr>
+        <p:spPr>
+          <a:xfrm>
+            <a:off x="952805" y="3391852"/>
+            <a:ext cx="475107" cy="329184"/>
+          </a:xfrm>
+          <a:prstGeom prst="rect">
+            <a:avLst/>
+          </a:prstGeom>
+          <a:noFill/>
+          <a:ln/>
+        </p:spPr>
+        <p:txBody>
+          <a:bodyPr wrap="square" lIns="0" tIns="0" rIns="0" bIns="0" rtlCol="0" anchor="ctr"/>
+          <a:lstStyle/>
+          <a:p>
+            <a:pPr indent="0" marL="0">
+              <a:buNone/>
+            </a:pPr>
+            <a:r>
+              <a:rPr lang="en-US" sz="950" b="1" dirty="0">
+                <a:solidFill>
+                  <a:srgbClr val="0A3D23"/>
+                </a:solidFill>
+                <a:latin typeface="Yu Gothic" pitchFamily="34" charset="0"/>
+                <a:ea typeface="Yu Gothic" pitchFamily="34" charset="-122"/>
+                <a:cs typeface="Yu Gothic" pitchFamily="34" charset="-120"/>
+              </a:rPr>
+              <a:t>土浦店</a:t>
+            </a:r>
+            <a:endParaRPr lang="en-US" sz="950" dirty="0"/>
+          </a:p>
+        </p:txBody>
+      </p:sp>
+      <p:pic>
+        <p:nvPicPr>
+          <p:cNvPr id="17" name="Image 2" descr="/home/user/suzuki-ceo/selfcafe-miraiya-trial-deck/assets/photos/.crops/tsuchiura-premium-g-375x211.jpg">    </p:cNvPr>
+          <p:cNvPicPr>
+            <a:picLocks noChangeAspect="1"/>
+          </p:cNvPicPr>
+          <p:nvPr/>
+        </p:nvPicPr>
+        <p:blipFill>
+          <a:blip r:embed="rId3"/>
+          <a:stretch>
+            <a:fillRect/>
+          </a:stretch>
+        </p:blipFill>
+        <p:spPr>
+          <a:xfrm>
+            <a:off x="4345229" y="1920240"/>
+            <a:ext cx="3429000" cy="1928813"/>
+          </a:xfrm>
+          <a:prstGeom prst="rect">
+            <a:avLst/>
+          </a:prstGeom>
+        </p:spPr>
+      </p:pic>
+      <p:sp>
+        <p:nvSpPr>
+          <p:cNvPr id="18" name="Shape 13"/>
+          <p:cNvSpPr/>
+          <p:nvPr/>
+        </p:nvSpPr>
+        <p:spPr>
+          <a:xfrm>
+            <a:off x="4345229" y="1920240"/>
+            <a:ext cx="3429000" cy="1928813"/>
+          </a:xfrm>
+          <a:prstGeom prst="rect">
+            <a:avLst/>
+          </a:prstGeom>
+          <a:ln w="12700">
+            <a:solidFill>
+              <a:srgbClr val="D8D2C6"/>
+            </a:solidFill>
+            <a:prstDash val="solid"/>
+          </a:ln>
+        </p:spPr>
+      </p:sp>
+      <p:sp>
+        <p:nvSpPr>
+          <p:cNvPr id="19" name="Shape 14"/>
+          <p:cNvSpPr/>
+          <p:nvPr/>
+        </p:nvSpPr>
+        <p:spPr>
+          <a:xfrm>
+            <a:off x="4473245" y="3391852"/>
+            <a:ext cx="749427" cy="329184"/>
+          </a:xfrm>
+          <a:prstGeom prst="roundRect">
+            <a:avLst>
+              <a:gd name="adj" fmla="val 13889"/>
+            </a:avLst>
+          </a:prstGeom>
+          <a:solidFill>
+            <a:srgbClr val="FFFFFF">
+              <a:alpha val="90000"/>
+            </a:srgbClr>
+          </a:solidFill>
+          <a:ln/>
+        </p:spPr>
+      </p:sp>
+      <p:sp>
+        <p:nvSpPr>
+          <p:cNvPr id="20" name="Text 15"/>
+          <p:cNvSpPr/>
+          <p:nvPr/>
+        </p:nvSpPr>
+        <p:spPr>
+          <a:xfrm>
+            <a:off x="4637837" y="3391852"/>
+            <a:ext cx="475107" cy="329184"/>
+          </a:xfrm>
+          <a:prstGeom prst="rect">
+            <a:avLst/>
+          </a:prstGeom>
+          <a:noFill/>
+          <a:ln/>
+        </p:spPr>
+        <p:txBody>
+          <a:bodyPr wrap="square" lIns="0" tIns="0" rIns="0" bIns="0" rtlCol="0" anchor="ctr"/>
+          <a:lstStyle/>
+          <a:p>
+            <a:pPr indent="0" marL="0">
+              <a:buNone/>
+            </a:pPr>
+            <a:r>
+              <a:rPr lang="en-US" sz="950" b="1" dirty="0">
+                <a:solidFill>
+                  <a:srgbClr val="0A3D23"/>
+                </a:solidFill>
+                <a:latin typeface="Yu Gothic" pitchFamily="34" charset="0"/>
+                <a:ea typeface="Yu Gothic" pitchFamily="34" charset="-122"/>
+                <a:cs typeface="Yu Gothic" pitchFamily="34" charset="-120"/>
+              </a:rPr>
+              <a:t>土浦店</a:t>
+            </a:r>
+            <a:endParaRPr lang="en-US" sz="950" dirty="0"/>
+          </a:p>
+        </p:txBody>
+      </p:sp>
+      <p:pic>
+        <p:nvPicPr>
+          <p:cNvPr id="21" name="Image 3" descr="/home/user/suzuki-ceo/selfcafe-miraiya-trial-deck/assets/photos/.crops/akita-premium-n-375x211.jpg">    </p:cNvPr>
+          <p:cNvPicPr>
+            <a:picLocks noChangeAspect="1"/>
+          </p:cNvPicPr>
+          <p:nvPr/>
+        </p:nvPicPr>
+        <p:blipFill>
+          <a:blip r:embed="rId4"/>
+          <a:stretch>
+            <a:fillRect/>
+          </a:stretch>
+        </p:blipFill>
+        <p:spPr>
+          <a:xfrm>
+            <a:off x="660197" y="4324540"/>
+            <a:ext cx="3429000" cy="1928813"/>
+          </a:xfrm>
+          <a:prstGeom prst="rect">
+            <a:avLst/>
+          </a:prstGeom>
+        </p:spPr>
+      </p:pic>
+      <p:sp>
+        <p:nvSpPr>
+          <p:cNvPr id="22" name="Shape 16"/>
+          <p:cNvSpPr/>
+          <p:nvPr/>
+        </p:nvSpPr>
+        <p:spPr>
+          <a:xfrm>
+            <a:off x="660197" y="4324540"/>
+            <a:ext cx="3429000" cy="1928813"/>
+          </a:xfrm>
+          <a:prstGeom prst="rect">
+            <a:avLst/>
+          </a:prstGeom>
+          <a:ln w="12700">
+            <a:solidFill>
+              <a:srgbClr val="D8D2C6"/>
+            </a:solidFill>
+            <a:prstDash val="solid"/>
+          </a:ln>
+        </p:spPr>
+      </p:sp>
+      <p:sp>
+        <p:nvSpPr>
+          <p:cNvPr id="23" name="Shape 17"/>
+          <p:cNvSpPr/>
+          <p:nvPr/>
+        </p:nvSpPr>
+        <p:spPr>
+          <a:xfrm>
+            <a:off x="788213" y="5796153"/>
+            <a:ext cx="749427" cy="329184"/>
+          </a:xfrm>
+          <a:prstGeom prst="roundRect">
+            <a:avLst>
+              <a:gd name="adj" fmla="val 13889"/>
+            </a:avLst>
+          </a:prstGeom>
+          <a:solidFill>
+            <a:srgbClr val="FFFFFF">
+              <a:alpha val="90000"/>
+            </a:srgbClr>
+          </a:solidFill>
+          <a:ln/>
+        </p:spPr>
+      </p:sp>
+      <p:sp>
+        <p:nvSpPr>
+          <p:cNvPr id="24" name="Text 18"/>
+          <p:cNvSpPr/>
+          <p:nvPr/>
+        </p:nvSpPr>
+        <p:spPr>
+          <a:xfrm>
+            <a:off x="952805" y="5796153"/>
+            <a:ext cx="475107" cy="329184"/>
+          </a:xfrm>
+          <a:prstGeom prst="rect">
+            <a:avLst/>
+          </a:prstGeom>
+          <a:noFill/>
+          <a:ln/>
+        </p:spPr>
+        <p:txBody>
+          <a:bodyPr wrap="square" lIns="0" tIns="0" rIns="0" bIns="0" rtlCol="0" anchor="ctr"/>
+          <a:lstStyle/>
+          <a:p>
+            <a:pPr indent="0" marL="0">
+              <a:buNone/>
+            </a:pPr>
+            <a:r>
+              <a:rPr lang="en-US" sz="950" b="1" dirty="0">
+                <a:solidFill>
+                  <a:srgbClr val="0A3D23"/>
+                </a:solidFill>
+                <a:latin typeface="Yu Gothic" pitchFamily="34" charset="0"/>
+                <a:ea typeface="Yu Gothic" pitchFamily="34" charset="-122"/>
+                <a:cs typeface="Yu Gothic" pitchFamily="34" charset="-120"/>
+              </a:rPr>
+              <a:t>秋田店</a:t>
+            </a:r>
+            <a:endParaRPr lang="en-US" sz="950" dirty="0"/>
+          </a:p>
+        </p:txBody>
+      </p:sp>
+      <p:pic>
+        <p:nvPicPr>
+          <p:cNvPr id="25" name="Image 4" descr="/home/user/suzuki-ceo/selfcafe-miraiya-trial-deck/assets/photos/.crops/akita-premium-g-375x211.jpg">    </p:cNvPr>
+          <p:cNvPicPr>
+            <a:picLocks noChangeAspect="1"/>
+          </p:cNvPicPr>
+          <p:nvPr/>
+        </p:nvPicPr>
+        <p:blipFill>
+          <a:blip r:embed="rId5"/>
+          <a:stretch>
+            <a:fillRect/>
+          </a:stretch>
+        </p:blipFill>
+        <p:spPr>
+          <a:xfrm>
+            <a:off x="4345229" y="4324540"/>
+            <a:ext cx="3429000" cy="1928813"/>
+          </a:xfrm>
+          <a:prstGeom prst="rect">
+            <a:avLst/>
+          </a:prstGeom>
+        </p:spPr>
+      </p:pic>
+      <p:sp>
+        <p:nvSpPr>
+          <p:cNvPr id="26" name="Shape 19"/>
+          <p:cNvSpPr/>
+          <p:nvPr/>
+        </p:nvSpPr>
+        <p:spPr>
+          <a:xfrm>
+            <a:off x="4345229" y="4324540"/>
+            <a:ext cx="3429000" cy="1928813"/>
+          </a:xfrm>
+          <a:prstGeom prst="rect">
+            <a:avLst/>
+          </a:prstGeom>
+          <a:ln w="12700">
+            <a:solidFill>
+              <a:srgbClr val="D8D2C6"/>
+            </a:solidFill>
+            <a:prstDash val="solid"/>
+          </a:ln>
+        </p:spPr>
+      </p:sp>
+      <p:sp>
+        <p:nvSpPr>
+          <p:cNvPr id="27" name="Shape 20"/>
+          <p:cNvSpPr/>
+          <p:nvPr/>
+        </p:nvSpPr>
+        <p:spPr>
+          <a:xfrm>
+            <a:off x="4473245" y="5796153"/>
+            <a:ext cx="749427" cy="329184"/>
+          </a:xfrm>
+          <a:prstGeom prst="roundRect">
+            <a:avLst>
+              <a:gd name="adj" fmla="val 13889"/>
+            </a:avLst>
+          </a:prstGeom>
+          <a:solidFill>
+            <a:srgbClr val="FFFFFF">
+              <a:alpha val="90000"/>
+            </a:srgbClr>
+          </a:solidFill>
+          <a:ln/>
+        </p:spPr>
+      </p:sp>
+      <p:sp>
+        <p:nvSpPr>
+          <p:cNvPr id="28" name="Text 21"/>
+          <p:cNvSpPr/>
+          <p:nvPr/>
+        </p:nvSpPr>
+        <p:spPr>
+          <a:xfrm>
+            <a:off x="4637837" y="5796153"/>
+            <a:ext cx="475107" cy="329184"/>
+          </a:xfrm>
+          <a:prstGeom prst="rect">
+            <a:avLst/>
+          </a:prstGeom>
+          <a:noFill/>
+          <a:ln/>
+        </p:spPr>
+        <p:txBody>
+          <a:bodyPr wrap="square" lIns="0" tIns="0" rIns="0" bIns="0" rtlCol="0" anchor="ctr"/>
+          <a:lstStyle/>
+          <a:p>
+            <a:pPr indent="0" marL="0">
+              <a:buNone/>
+            </a:pPr>
+            <a:r>
+              <a:rPr lang="en-US" sz="950" b="1" dirty="0">
+                <a:solidFill>
+                  <a:srgbClr val="0A3D23"/>
+                </a:solidFill>
+                <a:latin typeface="Yu Gothic" pitchFamily="34" charset="0"/>
+                <a:ea typeface="Yu Gothic" pitchFamily="34" charset="-122"/>
+                <a:cs typeface="Yu Gothic" pitchFamily="34" charset="-120"/>
+              </a:rPr>
+              <a:t>秋田店</a:t>
+            </a:r>
+            <a:endParaRPr lang="en-US" sz="950" dirty="0"/>
+          </a:p>
+        </p:txBody>
+      </p:sp>
+      <p:sp>
+        <p:nvSpPr>
+          <p:cNvPr id="29" name="Shape 22"/>
+          <p:cNvSpPr/>
+          <p:nvPr/>
+        </p:nvSpPr>
+        <p:spPr>
+          <a:xfrm>
+            <a:off x="8048549" y="1920240"/>
+            <a:ext cx="3482950" cy="1928813"/>
+          </a:xfrm>
+          <a:prstGeom prst="roundRect">
+            <a:avLst>
+              <a:gd name="adj" fmla="val 2844"/>
+            </a:avLst>
+          </a:prstGeom>
+          <a:solidFill>
+            <a:srgbClr val="F1F8F3"/>
+          </a:solidFill>
+          <a:ln w="9525">
+            <a:solidFill>
+              <a:srgbClr val="D2E7DA"/>
+            </a:solidFill>
+            <a:prstDash val="solid"/>
+          </a:ln>
+        </p:spPr>
+      </p:sp>
+      <p:sp>
+        <p:nvSpPr>
+          <p:cNvPr id="30" name="Text 23"/>
+          <p:cNvSpPr/>
+          <p:nvPr/>
+        </p:nvSpPr>
+        <p:spPr>
+          <a:xfrm>
+            <a:off x="8286293" y="2066544"/>
+            <a:ext cx="3007462" cy="237744"/>
+          </a:xfrm>
+          <a:prstGeom prst="rect">
+            <a:avLst/>
+          </a:prstGeom>
+          <a:noFill/>
+          <a:ln/>
+        </p:spPr>
+        <p:txBody>
+          <a:bodyPr wrap="square" lIns="0" tIns="0" rIns="0" bIns="0" rtlCol="0" anchor="ctr"/>
+          <a:lstStyle/>
+          <a:p>
+            <a:pPr indent="0" marL="0">
+              <a:buNone/>
+            </a:pPr>
+            <a:r>
+              <a:rPr lang="en-US" sz="1050" b="1" dirty="0">
+                <a:solidFill>
+                  <a:srgbClr val="106838"/>
+                </a:solidFill>
+                <a:latin typeface="Yu Gothic" pitchFamily="34" charset="0"/>
+                <a:ea typeface="Yu Gothic" pitchFamily="34" charset="-122"/>
+                <a:cs typeface="Yu Gothic" pitchFamily="34" charset="-120"/>
+              </a:rPr>
+              <a:t>プレミアム仕様の特徴</a:t>
+            </a:r>
+            <a:endParaRPr lang="en-US" sz="1050" dirty="0"/>
+          </a:p>
+        </p:txBody>
+      </p:sp>
+      <p:pic>
+        <p:nvPicPr>
+          <p:cNvPr id="31" name="Image 5" descr="/home/user/suzuki-ceo/selfcafe-miraiya-trial-deck/assets/icons/LuCheck-green.png">    </p:cNvPr>
+          <p:cNvPicPr>
+            <a:picLocks noChangeAspect="1"/>
+          </p:cNvPicPr>
+          <p:nvPr/>
+        </p:nvPicPr>
+        <p:blipFill>
+          <a:blip r:embed="rId6"/>
+          <a:stretch>
+            <a:fillRect/>
+          </a:stretch>
+        </p:blipFill>
+        <p:spPr>
+          <a:xfrm>
+            <a:off x="8304581" y="2423160"/>
+            <a:ext cx="164592" cy="164592"/>
+          </a:xfrm>
+          <a:prstGeom prst="rect">
+            <a:avLst/>
+          </a:prstGeom>
+        </p:spPr>
+      </p:pic>
+      <p:sp>
+        <p:nvSpPr>
+          <p:cNvPr id="32" name="Text 24"/>
+          <p:cNvSpPr/>
+          <p:nvPr/>
+        </p:nvSpPr>
+        <p:spPr>
+          <a:xfrm>
+            <a:off x="8578901" y="2377440"/>
+            <a:ext cx="2696566" cy="274320"/>
+          </a:xfrm>
+          <a:prstGeom prst="rect">
+            <a:avLst/>
+          </a:prstGeom>
+          <a:noFill/>
+          <a:ln/>
+        </p:spPr>
+        <p:txBody>
+          <a:bodyPr wrap="square" lIns="0" tIns="0" rIns="0" bIns="0" rtlCol="0" anchor="ctr"/>
+          <a:lstStyle/>
+          <a:p>
+            <a:pPr indent="0" marL="0">
+              <a:buNone/>
+            </a:pPr>
+            <a:r>
+              <a:rPr lang="en-US" sz="900" dirty="0">
+                <a:solidFill>
+                  <a:srgbClr val="0A3D23"/>
+                </a:solidFill>
+                <a:latin typeface="Yu Gothic" pitchFamily="34" charset="0"/>
+                <a:ea typeface="Yu Gothic" pitchFamily="34" charset="-122"/>
+                <a:cs typeface="Yu Gothic" pitchFamily="34" charset="-120"/>
+              </a:rPr>
+              <a:t>木製書架と一体の造作</a:t>
+            </a:r>
+            <a:endParaRPr lang="en-US" sz="900" dirty="0"/>
+          </a:p>
+        </p:txBody>
+      </p:sp>
+      <p:pic>
+        <p:nvPicPr>
+          <p:cNvPr id="33" name="Image 6" descr="/home/user/suzuki-ceo/selfcafe-miraiya-trial-deck/assets/icons/LuCheck-green.png">    </p:cNvPr>
+          <p:cNvPicPr>
+            <a:picLocks noChangeAspect="1"/>
+          </p:cNvPicPr>
+          <p:nvPr/>
+        </p:nvPicPr>
+        <p:blipFill>
+          <a:blip r:embed="rId7"/>
+          <a:stretch>
+            <a:fillRect/>
+          </a:stretch>
+        </p:blipFill>
+        <p:spPr>
+          <a:xfrm>
+            <a:off x="8304581" y="2752344"/>
+            <a:ext cx="164592" cy="164592"/>
+          </a:xfrm>
+          <a:prstGeom prst="rect">
+            <a:avLst/>
+          </a:prstGeom>
+        </p:spPr>
+      </p:pic>
+      <p:sp>
+        <p:nvSpPr>
+          <p:cNvPr id="34" name="Text 25"/>
+          <p:cNvSpPr/>
+          <p:nvPr/>
+        </p:nvSpPr>
+        <p:spPr>
+          <a:xfrm>
+            <a:off x="8578901" y="2706624"/>
+            <a:ext cx="2696566" cy="274320"/>
+          </a:xfrm>
+          <a:prstGeom prst="rect">
+            <a:avLst/>
+          </a:prstGeom>
+          <a:noFill/>
+          <a:ln/>
+        </p:spPr>
+        <p:txBody>
+          <a:bodyPr wrap="square" lIns="0" tIns="0" rIns="0" bIns="0" rtlCol="0" anchor="ctr"/>
+          <a:lstStyle/>
+          <a:p>
+            <a:pPr indent="0" marL="0">
+              <a:buNone/>
+            </a:pPr>
+            <a:r>
+              <a:rPr lang="en-US" sz="900" dirty="0">
+                <a:solidFill>
+                  <a:srgbClr val="0A3D23"/>
+                </a:solidFill>
+                <a:latin typeface="Yu Gothic" pitchFamily="34" charset="0"/>
+                <a:ea typeface="Yu Gothic" pitchFamily="34" charset="-122"/>
+                <a:cs typeface="Yu Gothic" pitchFamily="34" charset="-120"/>
+              </a:rPr>
+              <a:t>間接照明・スタンドライト</a:t>
+            </a:r>
+            <a:endParaRPr lang="en-US" sz="900" dirty="0"/>
+          </a:p>
+        </p:txBody>
+      </p:sp>
+      <p:pic>
+        <p:nvPicPr>
+          <p:cNvPr id="35" name="Image 7" descr="/home/user/suzuki-ceo/selfcafe-miraiya-trial-deck/assets/icons/LuCheck-green.png">    </p:cNvPr>
+          <p:cNvPicPr>
+            <a:picLocks noChangeAspect="1"/>
+          </p:cNvPicPr>
+          <p:nvPr/>
+        </p:nvPicPr>
+        <p:blipFill>
+          <a:blip r:embed="rId8"/>
+          <a:stretch>
+            <a:fillRect/>
+          </a:stretch>
+        </p:blipFill>
+        <p:spPr>
+          <a:xfrm>
+            <a:off x="8304581" y="3081528"/>
+            <a:ext cx="164592" cy="164592"/>
+          </a:xfrm>
+          <a:prstGeom prst="rect">
+            <a:avLst/>
+          </a:prstGeom>
+        </p:spPr>
+      </p:pic>
+      <p:sp>
+        <p:nvSpPr>
+          <p:cNvPr id="36" name="Text 26"/>
+          <p:cNvSpPr/>
+          <p:nvPr/>
+        </p:nvSpPr>
+        <p:spPr>
+          <a:xfrm>
+            <a:off x="8578901" y="3035808"/>
+            <a:ext cx="2696566" cy="274320"/>
+          </a:xfrm>
+          <a:prstGeom prst="rect">
+            <a:avLst/>
+          </a:prstGeom>
+          <a:noFill/>
+          <a:ln/>
+        </p:spPr>
+        <p:txBody>
+          <a:bodyPr wrap="square" lIns="0" tIns="0" rIns="0" bIns="0" rtlCol="0" anchor="ctr"/>
+          <a:lstStyle/>
+          <a:p>
+            <a:pPr indent="0" marL="0">
+              <a:buNone/>
+            </a:pPr>
+            <a:r>
+              <a:rPr lang="en-US" sz="900" dirty="0">
+                <a:solidFill>
+                  <a:srgbClr val="0A3D23"/>
+                </a:solidFill>
+                <a:latin typeface="Yu Gothic" pitchFamily="34" charset="0"/>
+                <a:ea typeface="Yu Gothic" pitchFamily="34" charset="-122"/>
+                <a:cs typeface="Yu Gothic" pitchFamily="34" charset="-120"/>
+              </a:rPr>
+              <a:t>落ち着いたダークトーンのサイン</a:t>
+            </a:r>
+            <a:endParaRPr lang="en-US" sz="900" dirty="0"/>
+          </a:p>
+        </p:txBody>
+      </p:sp>
+      <p:pic>
+        <p:nvPicPr>
+          <p:cNvPr id="37" name="Image 8" descr="/home/user/suzuki-ceo/selfcafe-miraiya-trial-deck/assets/icons/LuCheck-green.png">    </p:cNvPr>
+          <p:cNvPicPr>
+            <a:picLocks noChangeAspect="1"/>
+          </p:cNvPicPr>
+          <p:nvPr/>
+        </p:nvPicPr>
+        <p:blipFill>
+          <a:blip r:embed="rId9"/>
+          <a:stretch>
+            <a:fillRect/>
+          </a:stretch>
+        </p:blipFill>
+        <p:spPr>
+          <a:xfrm>
+            <a:off x="8304581" y="3410712"/>
+            <a:ext cx="164592" cy="164592"/>
+          </a:xfrm>
+          <a:prstGeom prst="rect">
+            <a:avLst/>
+          </a:prstGeom>
+        </p:spPr>
+      </p:pic>
+      <p:sp>
+        <p:nvSpPr>
+          <p:cNvPr id="38" name="Text 27"/>
+          <p:cNvSpPr/>
+          <p:nvPr/>
+        </p:nvSpPr>
+        <p:spPr>
+          <a:xfrm>
+            <a:off x="8578901" y="3364992"/>
+            <a:ext cx="2696566" cy="274320"/>
+          </a:xfrm>
+          <a:prstGeom prst="rect">
+            <a:avLst/>
+          </a:prstGeom>
+          <a:noFill/>
+          <a:ln/>
+        </p:spPr>
+        <p:txBody>
+          <a:bodyPr wrap="square" lIns="0" tIns="0" rIns="0" bIns="0" rtlCol="0" anchor="ctr"/>
+          <a:lstStyle/>
+          <a:p>
+            <a:pPr indent="0" marL="0">
+              <a:buNone/>
+            </a:pPr>
+            <a:r>
+              <a:rPr lang="en-US" sz="900" dirty="0">
+                <a:solidFill>
+                  <a:srgbClr val="0A3D23"/>
+                </a:solidFill>
+                <a:latin typeface="Yu Gothic" pitchFamily="34" charset="0"/>
+                <a:ea typeface="Yu Gothic" pitchFamily="34" charset="-122"/>
+                <a:cs typeface="Yu Gothic" pitchFamily="34" charset="-120"/>
+              </a:rPr>
+              <a:t>「MIRAIYA Book &amp; Cafe」併記</a:t>
+            </a:r>
+            <a:endParaRPr lang="en-US" sz="900" dirty="0"/>
+          </a:p>
+        </p:txBody>
+      </p:sp>
+      <p:sp>
+        <p:nvSpPr>
+          <p:cNvPr id="39" name="Shape 28"/>
+          <p:cNvSpPr/>
+          <p:nvPr/>
+        </p:nvSpPr>
+        <p:spPr>
+          <a:xfrm>
+            <a:off x="8048549" y="4324540"/>
+            <a:ext cx="3482950" cy="1928813"/>
+          </a:xfrm>
+          <a:prstGeom prst="roundRect">
+            <a:avLst>
+              <a:gd name="adj" fmla="val 2844"/>
+            </a:avLst>
+          </a:prstGeom>
+          <a:solidFill>
+            <a:srgbClr val="FFFFFF"/>
+          </a:solidFill>
+          <a:ln w="9525">
+            <a:solidFill>
+              <a:srgbClr val="EFEAE0"/>
+            </a:solidFill>
+            <a:prstDash val="solid"/>
+          </a:ln>
+        </p:spPr>
+      </p:sp>
+      <p:sp>
+        <p:nvSpPr>
+          <p:cNvPr id="40" name="Text 29"/>
+          <p:cNvSpPr/>
+          <p:nvPr/>
+        </p:nvSpPr>
+        <p:spPr>
+          <a:xfrm>
+            <a:off x="8286293" y="4470844"/>
+            <a:ext cx="3007462" cy="237744"/>
+          </a:xfrm>
+          <a:prstGeom prst="rect">
+            <a:avLst/>
+          </a:prstGeom>
+          <a:noFill/>
+          <a:ln/>
+        </p:spPr>
+        <p:txBody>
+          <a:bodyPr wrap="square" lIns="0" tIns="0" rIns="0" bIns="0" rtlCol="0" anchor="ctr"/>
+          <a:lstStyle/>
+          <a:p>
+            <a:pPr indent="0" marL="0">
+              <a:buNone/>
+            </a:pPr>
+            <a:r>
+              <a:rPr lang="en-US" sz="1050" b="1" dirty="0">
+                <a:solidFill>
+                  <a:srgbClr val="A8761F"/>
+                </a:solidFill>
+                <a:latin typeface="Yu Gothic" pitchFamily="34" charset="0"/>
+                <a:ea typeface="Yu Gothic" pitchFamily="34" charset="-122"/>
+                <a:cs typeface="Yu Gothic" pitchFamily="34" charset="-120"/>
+              </a:rPr>
+              <a:t>床仕上げの違い</a:t>
+            </a:r>
+            <a:endParaRPr lang="en-US" sz="1050" dirty="0"/>
+          </a:p>
+        </p:txBody>
+      </p:sp>
+      <p:sp>
+        <p:nvSpPr>
+          <p:cNvPr id="41" name="Text 30"/>
+          <p:cNvSpPr/>
+          <p:nvPr/>
+        </p:nvSpPr>
+        <p:spPr>
+          <a:xfrm>
+            <a:off x="8286293" y="4800028"/>
+            <a:ext cx="3007462" cy="219456"/>
+          </a:xfrm>
+          <a:prstGeom prst="rect">
+            <a:avLst/>
+          </a:prstGeom>
+          <a:noFill/>
+          <a:ln/>
+        </p:spPr>
+        <p:txBody>
+          <a:bodyPr wrap="square" lIns="0" tIns="0" rIns="0" bIns="0" rtlCol="0" anchor="ctr"/>
+          <a:lstStyle/>
+          <a:p>
+            <a:pPr indent="0" marL="0">
+              <a:buNone/>
+            </a:pPr>
+            <a:r>
+              <a:rPr lang="en-US" sz="950" b="1" dirty="0">
+                <a:solidFill>
+                  <a:srgbClr val="0A3D23"/>
+                </a:solidFill>
+                <a:latin typeface="Yu Gothic" pitchFamily="34" charset="0"/>
+                <a:ea typeface="Yu Gothic" pitchFamily="34" charset="-122"/>
+                <a:cs typeface="Yu Gothic" pitchFamily="34" charset="-120"/>
+              </a:rPr>
+              <a:t>N案</a:t>
+            </a:r>
+            <a:endParaRPr lang="en-US" sz="950" dirty="0"/>
+          </a:p>
+        </p:txBody>
+      </p:sp>
+      <p:sp>
+        <p:nvSpPr>
+          <p:cNvPr id="42" name="Text 31"/>
+          <p:cNvSpPr/>
+          <p:nvPr/>
+        </p:nvSpPr>
+        <p:spPr>
+          <a:xfrm>
+            <a:off x="8286293" y="5001196"/>
+            <a:ext cx="3007462" cy="420624"/>
+          </a:xfrm>
+          <a:prstGeom prst="rect">
+            <a:avLst/>
+          </a:prstGeom>
+          <a:noFill/>
+          <a:ln/>
+        </p:spPr>
+        <p:txBody>
+          <a:bodyPr wrap="square" lIns="0" tIns="0" rIns="0" bIns="0" rtlCol="0" anchor="t"/>
+          <a:lstStyle/>
+          <a:p>
+            <a:pPr indent="0" marL="0">
+              <a:lnSpc>
+                <a:spcPct val="120000"/>
+              </a:lnSpc>
+              <a:buNone/>
+            </a:pPr>
+            <a:r>
+              <a:rPr lang="en-US" sz="900" dirty="0">
+                <a:solidFill>
+                  <a:srgbClr val="4B5550"/>
+                </a:solidFill>
+                <a:latin typeface="Yu Gothic" pitchFamily="34" charset="0"/>
+                <a:ea typeface="Yu Gothic" pitchFamily="34" charset="-122"/>
+                <a:cs typeface="Yu Gothic" pitchFamily="34" charset="-120"/>
+              </a:rPr>
+              <a:t>書店売場の床と連続し、区画が広く開放的に見えます。</a:t>
+            </a:r>
+            <a:endParaRPr lang="en-US" sz="900" dirty="0"/>
+          </a:p>
+        </p:txBody>
+      </p:sp>
+      <p:sp>
+        <p:nvSpPr>
+          <p:cNvPr id="43" name="Text 32"/>
+          <p:cNvSpPr/>
+          <p:nvPr/>
+        </p:nvSpPr>
+        <p:spPr>
+          <a:xfrm>
+            <a:off x="8286293" y="5494972"/>
+            <a:ext cx="3007462" cy="219456"/>
+          </a:xfrm>
+          <a:prstGeom prst="rect">
+            <a:avLst/>
+          </a:prstGeom>
+          <a:noFill/>
+          <a:ln/>
+        </p:spPr>
+        <p:txBody>
+          <a:bodyPr wrap="square" lIns="0" tIns="0" rIns="0" bIns="0" rtlCol="0" anchor="ctr"/>
+          <a:lstStyle/>
+          <a:p>
+            <a:pPr indent="0" marL="0">
+              <a:buNone/>
+            </a:pPr>
+            <a:r>
+              <a:rPr lang="en-US" sz="950" b="1" dirty="0">
+                <a:solidFill>
+                  <a:srgbClr val="0A3D23"/>
+                </a:solidFill>
+                <a:latin typeface="Yu Gothic" pitchFamily="34" charset="0"/>
+                <a:ea typeface="Yu Gothic" pitchFamily="34" charset="-122"/>
+                <a:cs typeface="Yu Gothic" pitchFamily="34" charset="-120"/>
+              </a:rPr>
+              <a:t>G案</a:t>
+            </a:r>
+            <a:endParaRPr lang="en-US" sz="950" dirty="0"/>
+          </a:p>
+        </p:txBody>
+      </p:sp>
+      <p:sp>
+        <p:nvSpPr>
+          <p:cNvPr id="44" name="Text 33"/>
+          <p:cNvSpPr/>
+          <p:nvPr/>
+        </p:nvSpPr>
+        <p:spPr>
+          <a:xfrm>
+            <a:off x="8286293" y="5696140"/>
+            <a:ext cx="3007462" cy="420624"/>
+          </a:xfrm>
+          <a:prstGeom prst="rect">
+            <a:avLst/>
+          </a:prstGeom>
+          <a:noFill/>
+          <a:ln/>
+        </p:spPr>
+        <p:txBody>
+          <a:bodyPr wrap="square" lIns="0" tIns="0" rIns="0" bIns="0" rtlCol="0" anchor="t"/>
+          <a:lstStyle/>
+          <a:p>
+            <a:pPr indent="0" marL="0">
+              <a:lnSpc>
+                <a:spcPct val="120000"/>
+              </a:lnSpc>
+              <a:buNone/>
+            </a:pPr>
+            <a:r>
+              <a:rPr lang="en-US" sz="900" dirty="0">
+                <a:solidFill>
+                  <a:srgbClr val="4B5550"/>
+                </a:solidFill>
+                <a:latin typeface="Yu Gothic" pitchFamily="34" charset="0"/>
+                <a:ea typeface="Yu Gothic" pitchFamily="34" charset="-122"/>
+                <a:cs typeface="Yu Gothic" pitchFamily="34" charset="-120"/>
+              </a:rPr>
+              <a:t>カフェ区画が明確に分かれ、落ち着いた印象になります。</a:t>
+            </a:r>
+            <a:endParaRPr lang="en-US" sz="900" dirty="0"/>
+          </a:p>
+        </p:txBody>
+      </p:sp>
+      <p:sp>
+        <p:nvSpPr>
+          <p:cNvPr id="45" name="Text 34"/>
+          <p:cNvSpPr/>
+          <p:nvPr/>
+        </p:nvSpPr>
+        <p:spPr>
+          <a:xfrm>
+            <a:off x="660197" y="6254496"/>
+            <a:ext cx="10871302" cy="182880"/>
+          </a:xfrm>
+          <a:prstGeom prst="rect">
+            <a:avLst/>
+          </a:prstGeom>
+          <a:noFill/>
+          <a:ln/>
+        </p:spPr>
+        <p:txBody>
+          <a:bodyPr wrap="square" lIns="0" tIns="0" rIns="0" bIns="0" rtlCol="0" anchor="ctr"/>
+          <a:lstStyle/>
+          <a:p>
+            <a:pPr indent="0" marL="0">
+              <a:buNone/>
+            </a:pPr>
+            <a:r>
+              <a:rPr lang="en-US" sz="850" dirty="0">
+                <a:solidFill>
+                  <a:srgbClr val="A8B0AA"/>
+                </a:solidFill>
+                <a:latin typeface="Yu Gothic" pitchFamily="34" charset="0"/>
+                <a:ea typeface="Yu Gothic" pitchFamily="34" charset="-122"/>
+                <a:cs typeface="Yu Gothic" pitchFamily="34" charset="-120"/>
+              </a:rPr>
+              <a:t>※ パースは完成予想図です。内装工事は当社が負担して施工します。什器・造作の再利用可否および工事範囲は現地確認のうえ確定し、実際の仕上がりは設計内容により異なります。</a:t>
+            </a:r>
+            <a:endParaRPr lang="en-US" sz="850" dirty="0"/>
+          </a:p>
+        </p:txBody>
+      </p:sp>
+    </p:spTree>
+  </p:cSld>
+  <p:clrMapOvr>
+    <a:masterClrMapping/>
+  </p:clrMapOvr>
+</p:sld>
+</file>
+
+<file path=ppt/slides/slide5.xml><?xml version="1.0" encoding="utf-8"?>
+<p:sld xmlns:a="http://schemas.openxmlformats.org/drawingml/2006/main" xmlns:r="http://schemas.openxmlformats.org/officeDocument/2006/relationships" xmlns:p="http://schemas.openxmlformats.org/presentationml/2006/main">
+  <p:cSld name="Slide 5">
+    <p:bg>
+      <p:bgPr>
+        <a:solidFill>
+          <a:srgbClr val="FFFDF7"/>
+        </a:solidFill>
+      </p:bgPr>
+    </p:bg>
+    <p:spTree>
+      <p:nvGrpSpPr>
+        <p:cNvPr id="1" name=""/>
+        <p:cNvGrpSpPr/>
+        <p:nvPr/>
+      </p:nvGrpSpPr>
+      <p:grpSpPr>
+        <a:xfrm>
+          <a:off x="0" y="0"/>
+          <a:ext cx="0" cy="0"/>
+          <a:chOff x="0" y="0"/>
+          <a:chExt cx="0" cy="0"/>
+        </a:xfrm>
+      </p:grpSpPr>
+      <p:sp>
+        <p:nvSpPr>
+          <p:cNvPr id="2" name="Shape 0"/>
+          <p:cNvSpPr/>
+          <p:nvPr/>
+        </p:nvSpPr>
+        <p:spPr>
+          <a:xfrm>
+            <a:off x="660197" y="545897"/>
+            <a:ext cx="202997" cy="25603"/>
+          </a:xfrm>
+          <a:prstGeom prst="rect">
+            <a:avLst/>
+          </a:prstGeom>
+          <a:solidFill>
+            <a:srgbClr val="106838"/>
+          </a:solidFill>
+          <a:ln/>
+        </p:spPr>
+      </p:sp>
+      <p:sp>
+        <p:nvSpPr>
+          <p:cNvPr id="3" name="Text 1"/>
+          <p:cNvSpPr/>
+          <p:nvPr/>
+        </p:nvSpPr>
+        <p:spPr>
+          <a:xfrm>
+            <a:off x="952805" y="444398"/>
+            <a:ext cx="6400800" cy="177394"/>
+          </a:xfrm>
+          <a:prstGeom prst="rect">
+            <a:avLst/>
+          </a:prstGeom>
+          <a:noFill/>
+          <a:ln/>
+        </p:spPr>
+        <p:txBody>
+          <a:bodyPr wrap="square" lIns="0" tIns="0" rIns="0" bIns="0" rtlCol="0" anchor="ctr"/>
+          <a:lstStyle/>
+          <a:p>
+            <a:pPr indent="0" marL="0">
+              <a:buNone/>
+            </a:pPr>
+            <a:r>
+              <a:rPr lang="en-US" sz="1050" b="1" dirty="0">
+                <a:solidFill>
+                  <a:srgbClr val="A8761F"/>
+                </a:solidFill>
+                <a:latin typeface="Arial" pitchFamily="34" charset="0"/>
+                <a:ea typeface="Arial" pitchFamily="34" charset="-122"/>
+                <a:cs typeface="Arial" pitchFamily="34" charset="-120"/>
+              </a:rPr>
+              <a:t>04</a:t>
+            </a:r>
+            <a:r>
+              <a:rPr lang="en-US" sz="1050" b="1" dirty="0">
+                <a:solidFill>
+                  <a:srgbClr val="1B8149"/>
+                </a:solidFill>
+                <a:latin typeface="Yu Gothic" pitchFamily="34" charset="0"/>
+                <a:ea typeface="Yu Gothic" pitchFamily="34" charset="-122"/>
+                <a:cs typeface="Yu Gothic" pitchFamily="34" charset="-120"/>
+              </a:rPr>
+              <a:t>   費用と所有の区分</a:t>
+            </a:r>
+            <a:endParaRPr lang="en-US" sz="1050" dirty="0"/>
+          </a:p>
+        </p:txBody>
+      </p:sp>
+      <p:sp>
+        <p:nvSpPr>
+          <p:cNvPr id="4" name="Text 2"/>
+          <p:cNvSpPr/>
+          <p:nvPr/>
+        </p:nvSpPr>
+        <p:spPr>
+          <a:xfrm>
+            <a:off x="660197" y="660197"/>
+            <a:ext cx="8889797" cy="508406"/>
+          </a:xfrm>
+          <a:prstGeom prst="rect">
+            <a:avLst/>
+          </a:prstGeom>
+          <a:noFill/>
+          <a:ln/>
+        </p:spPr>
+        <p:txBody>
+          <a:bodyPr wrap="square" lIns="0" tIns="0" rIns="0" bIns="0" rtlCol="0" anchor="ctr"/>
+          <a:lstStyle/>
+          <a:p>
+            <a:pPr indent="0" marL="0">
+              <a:buNone/>
+            </a:pPr>
+            <a:r>
+              <a:rPr lang="en-US" sz="2900" b="1" dirty="0">
+                <a:solidFill>
+                  <a:srgbClr val="0A3D23"/>
+                </a:solidFill>
+                <a:latin typeface="Yu Gothic" pitchFamily="34" charset="0"/>
+                <a:ea typeface="Yu Gothic" pitchFamily="34" charset="-122"/>
+                <a:cs typeface="Yu Gothic" pitchFamily="34" charset="-120"/>
+              </a:rPr>
+              <a:t>どちらが何を用意し、終了後どうなるか。</a:t>
+            </a:r>
+            <a:endParaRPr lang="en-US" sz="2900" dirty="0"/>
+          </a:p>
+        </p:txBody>
+      </p:sp>
+      <p:sp>
+        <p:nvSpPr>
+          <p:cNvPr id="5" name="Text 3"/>
+          <p:cNvSpPr/>
+          <p:nvPr/>
+        </p:nvSpPr>
+        <p:spPr>
+          <a:xfrm>
+            <a:off x="660197" y="1308506"/>
+            <a:ext cx="10032797" cy="228600"/>
+          </a:xfrm>
+          <a:prstGeom prst="rect">
+            <a:avLst/>
+          </a:prstGeom>
+          <a:noFill/>
+          <a:ln/>
+        </p:spPr>
+        <p:txBody>
+          <a:bodyPr wrap="square" lIns="0" tIns="0" rIns="0" bIns="0" rtlCol="0" anchor="ctr"/>
+          <a:lstStyle/>
+          <a:p>
+            <a:pPr indent="0" marL="0">
+              <a:buNone/>
+            </a:pPr>
+            <a:r>
+              <a:rPr lang="en-US" sz="1250" dirty="0">
+                <a:solidFill>
+                  <a:srgbClr val="4B5550"/>
+                </a:solidFill>
+                <a:latin typeface="Yu Gothic" pitchFamily="34" charset="0"/>
+                <a:ea typeface="Yu Gothic" pitchFamily="34" charset="-122"/>
+                <a:cs typeface="Yu Gothic" pitchFamily="34" charset="-120"/>
+              </a:rPr>
+              <a:t>トライアル期間中の費用負担と、終了後にそれがどう扱われるかを整理しました。</a:t>
+            </a:r>
+            <a:endParaRPr lang="en-US" sz="1250" dirty="0"/>
+          </a:p>
+        </p:txBody>
+      </p:sp>
+      <p:pic>
+        <p:nvPicPr>
+          <p:cNvPr id="6" name="Image 0" descr="/home/user/suzuki-ceo/selfcafe-miraiya-trial-deck/assets/logo-green.png">    </p:cNvPr>
+          <p:cNvPicPr>
+            <a:picLocks noChangeAspect="1"/>
+          </p:cNvPicPr>
+          <p:nvPr/>
+        </p:nvPicPr>
+        <p:blipFill>
+          <a:blip r:embed="rId1"/>
+          <a:stretch>
+            <a:fillRect/>
+          </a:stretch>
+        </p:blipFill>
+        <p:spPr>
+          <a:xfrm>
+            <a:off x="9855403" y="482803"/>
+            <a:ext cx="1676095" cy="238658"/>
+          </a:xfrm>
+          <a:prstGeom prst="rect">
+            <a:avLst/>
+          </a:prstGeom>
+        </p:spPr>
+      </p:pic>
+      <p:sp>
+        <p:nvSpPr>
+          <p:cNvPr id="7" name="Text 4"/>
+          <p:cNvSpPr/>
+          <p:nvPr/>
+        </p:nvSpPr>
+        <p:spPr>
+          <a:xfrm>
+            <a:off x="660197" y="6476695"/>
+            <a:ext cx="5080406" cy="152705"/>
+          </a:xfrm>
+          <a:prstGeom prst="rect">
+            <a:avLst/>
+          </a:prstGeom>
+          <a:noFill/>
+          <a:ln/>
+        </p:spPr>
+        <p:txBody>
+          <a:bodyPr wrap="square" lIns="0" tIns="0" rIns="0" bIns="0" rtlCol="0" anchor="ctr"/>
+          <a:lstStyle/>
+          <a:p>
+            <a:pPr indent="0" marL="0">
+              <a:buNone/>
+            </a:pPr>
+            <a:r>
+              <a:rPr lang="en-US" sz="900" dirty="0">
+                <a:solidFill>
+                  <a:srgbClr val="A8B0AA"/>
+                </a:solidFill>
+                <a:latin typeface="Yu Gothic" pitchFamily="34" charset="0"/>
+                <a:ea typeface="Yu Gothic" pitchFamily="34" charset="-122"/>
+                <a:cs typeface="Yu Gothic" pitchFamily="34" charset="-120"/>
+              </a:rPr>
+              <a:t>セルフカフェ × 未来屋書店 トライアル導入のご提案</a:t>
+            </a:r>
+            <a:endParaRPr lang="en-US" sz="900" dirty="0"/>
+          </a:p>
+        </p:txBody>
+      </p:sp>
+      <p:sp>
+        <p:nvSpPr>
+          <p:cNvPr id="8" name="Text 5"/>
+          <p:cNvSpPr/>
+          <p:nvPr/>
+        </p:nvSpPr>
+        <p:spPr>
+          <a:xfrm>
+            <a:off x="10261397" y="6463894"/>
+            <a:ext cx="1270102" cy="152705"/>
+          </a:xfrm>
+          <a:prstGeom prst="rect">
+            <a:avLst/>
+          </a:prstGeom>
+          <a:noFill/>
+          <a:ln/>
+        </p:spPr>
+        <p:txBody>
+          <a:bodyPr wrap="square" lIns="0" tIns="0" rIns="0" bIns="0" rtlCol="0" anchor="ctr"/>
+          <a:lstStyle/>
+          <a:p>
+            <a:pPr algn="r" indent="0" marL="0">
+              <a:buNone/>
+            </a:pPr>
+            <a:r>
+              <a:rPr lang="en-US" sz="1000" b="1" dirty="0">
+                <a:solidFill>
+                  <a:srgbClr val="7E8882"/>
+                </a:solidFill>
+                <a:latin typeface="Arial" pitchFamily="34" charset="0"/>
+                <a:ea typeface="Arial" pitchFamily="34" charset="-122"/>
+                <a:cs typeface="Arial" pitchFamily="34" charset="-120"/>
+              </a:rPr>
+              <a:t>05</a:t>
+            </a:r>
+            <a:endParaRPr lang="en-US" sz="1000" dirty="0"/>
+          </a:p>
+        </p:txBody>
+      </p:sp>
       <p:graphicFrame>
         <p:nvGraphicFramePr>
-          <p:cNvPr id="5" name="Table 0"/>
+          <p:cNvPr id="6" name="Table 0"/>
           <p:cNvGraphicFramePr>
             <a:graphicFrameLocks noGrp="1"/>
           </p:cNvGraphicFramePr>
@@ -6984,1117 +9333,6 @@
 </p:sld>
 </file>
 
-<file path=ppt/slides/slide5.xml><?xml version="1.0" encoding="utf-8"?>
-<p:sld xmlns:a="http://schemas.openxmlformats.org/drawingml/2006/main" xmlns:r="http://schemas.openxmlformats.org/officeDocument/2006/relationships" xmlns:p="http://schemas.openxmlformats.org/presentationml/2006/main">
-  <p:cSld name="Slide 5">
-    <p:bg>
-      <p:bgPr>
-        <a:solidFill>
-          <a:srgbClr val="FFFDF7"/>
-        </a:solidFill>
-      </p:bgPr>
-    </p:bg>
-    <p:spTree>
-      <p:nvGrpSpPr>
-        <p:cNvPr id="1" name=""/>
-        <p:cNvGrpSpPr/>
-        <p:nvPr/>
-      </p:nvGrpSpPr>
-      <p:grpSpPr>
-        <a:xfrm>
-          <a:off x="0" y="0"/>
-          <a:ext cx="0" cy="0"/>
-          <a:chOff x="0" y="0"/>
-          <a:chExt cx="0" cy="0"/>
-        </a:xfrm>
-      </p:grpSpPr>
-      <p:sp>
-        <p:nvSpPr>
-          <p:cNvPr id="2" name="Shape 0"/>
-          <p:cNvSpPr/>
-          <p:nvPr/>
-        </p:nvSpPr>
-        <p:spPr>
-          <a:xfrm>
-            <a:off x="660197" y="545897"/>
-            <a:ext cx="202997" cy="25603"/>
-          </a:xfrm>
-          <a:prstGeom prst="rect">
-            <a:avLst/>
-          </a:prstGeom>
-          <a:solidFill>
-            <a:srgbClr val="106838"/>
-          </a:solidFill>
-          <a:ln/>
-        </p:spPr>
-      </p:sp>
-      <p:sp>
-        <p:nvSpPr>
-          <p:cNvPr id="3" name="Text 1"/>
-          <p:cNvSpPr/>
-          <p:nvPr/>
-        </p:nvSpPr>
-        <p:spPr>
-          <a:xfrm>
-            <a:off x="952805" y="444398"/>
-            <a:ext cx="6400800" cy="177394"/>
-          </a:xfrm>
-          <a:prstGeom prst="rect">
-            <a:avLst/>
-          </a:prstGeom>
-          <a:noFill/>
-          <a:ln/>
-        </p:spPr>
-        <p:txBody>
-          <a:bodyPr wrap="square" lIns="0" tIns="0" rIns="0" bIns="0" rtlCol="0" anchor="ctr"/>
-          <a:lstStyle/>
-          <a:p>
-            <a:pPr indent="0" marL="0">
-              <a:buNone/>
-            </a:pPr>
-            <a:r>
-              <a:rPr lang="en-US" sz="1050" b="1" dirty="0">
-                <a:solidFill>
-                  <a:srgbClr val="A8761F"/>
-                </a:solidFill>
-                <a:latin typeface="Arial" pitchFamily="34" charset="0"/>
-                <a:ea typeface="Arial" pitchFamily="34" charset="-122"/>
-                <a:cs typeface="Arial" pitchFamily="34" charset="-120"/>
-              </a:rPr>
-              <a:t>04</a:t>
-            </a:r>
-            <a:r>
-              <a:rPr lang="en-US" sz="1050" b="1" dirty="0">
-                <a:solidFill>
-                  <a:srgbClr val="1B8149"/>
-                </a:solidFill>
-                <a:latin typeface="Yu Gothic" pitchFamily="34" charset="0"/>
-                <a:ea typeface="Yu Gothic" pitchFamily="34" charset="-122"/>
-                <a:cs typeface="Yu Gothic" pitchFamily="34" charset="-120"/>
-              </a:rPr>
-              <a:t>   終了時の扱い</a:t>
-            </a:r>
-            <a:endParaRPr lang="en-US" sz="1050" dirty="0"/>
-          </a:p>
-        </p:txBody>
-      </p:sp>
-      <p:sp>
-        <p:nvSpPr>
-          <p:cNvPr id="4" name="Text 2"/>
-          <p:cNvSpPr/>
-          <p:nvPr/>
-        </p:nvSpPr>
-        <p:spPr>
-          <a:xfrm>
-            <a:off x="660197" y="660197"/>
-            <a:ext cx="8889797" cy="508406"/>
-          </a:xfrm>
-          <a:prstGeom prst="rect">
-            <a:avLst/>
-          </a:prstGeom>
-          <a:noFill/>
-          <a:ln/>
-        </p:spPr>
-        <p:txBody>
-          <a:bodyPr wrap="square" lIns="0" tIns="0" rIns="0" bIns="0" rtlCol="0" anchor="ctr"/>
-          <a:lstStyle/>
-          <a:p>
-            <a:pPr indent="0" marL="0">
-              <a:buNone/>
-            </a:pPr>
-            <a:r>
-              <a:rPr lang="en-US" sz="2900" b="1" dirty="0">
-                <a:solidFill>
-                  <a:srgbClr val="0A3D23"/>
-                </a:solidFill>
-                <a:latin typeface="Yu Gothic" pitchFamily="34" charset="0"/>
-                <a:ea typeface="Yu Gothic" pitchFamily="34" charset="-122"/>
-                <a:cs typeface="Yu Gothic" pitchFamily="34" charset="-120"/>
-              </a:rPr>
-              <a:t>原状回復は不要。撤去するのは当社の機器だけです。</a:t>
-            </a:r>
-            <a:endParaRPr lang="en-US" sz="2900" dirty="0"/>
-          </a:p>
-        </p:txBody>
-      </p:sp>
-      <p:sp>
-        <p:nvSpPr>
-          <p:cNvPr id="5" name="Text 3"/>
-          <p:cNvSpPr/>
-          <p:nvPr/>
-        </p:nvSpPr>
-        <p:spPr>
-          <a:xfrm>
-            <a:off x="660197" y="1308506"/>
-            <a:ext cx="10032797" cy="228600"/>
-          </a:xfrm>
-          <a:prstGeom prst="rect">
-            <a:avLst/>
-          </a:prstGeom>
-          <a:noFill/>
-          <a:ln/>
-        </p:spPr>
-        <p:txBody>
-          <a:bodyPr wrap="square" lIns="0" tIns="0" rIns="0" bIns="0" rtlCol="0" anchor="ctr"/>
-          <a:lstStyle/>
-          <a:p>
-            <a:pPr indent="0" marL="0">
-              <a:buNone/>
-            </a:pPr>
-            <a:r>
-              <a:rPr lang="en-US" sz="1250" dirty="0">
-                <a:solidFill>
-                  <a:srgbClr val="4B5550"/>
-                </a:solidFill>
-                <a:latin typeface="Yu Gothic" pitchFamily="34" charset="0"/>
-                <a:ea typeface="Yu Gothic" pitchFamily="34" charset="-122"/>
-                <a:cs typeface="Yu Gothic" pitchFamily="34" charset="-120"/>
-              </a:rPr>
-              <a:t>ご契約を終了される場合も、内装を元に戻していただく必要はありません。</a:t>
-            </a:r>
-            <a:endParaRPr lang="en-US" sz="1250" dirty="0"/>
-          </a:p>
-        </p:txBody>
-      </p:sp>
-      <p:pic>
-        <p:nvPicPr>
-          <p:cNvPr id="6" name="Image 0" descr="/home/user/suzuki-ceo/selfcafe-miraiya-trial-deck/assets/logo-green.png">    </p:cNvPr>
-          <p:cNvPicPr>
-            <a:picLocks noChangeAspect="1"/>
-          </p:cNvPicPr>
-          <p:nvPr/>
-        </p:nvPicPr>
-        <p:blipFill>
-          <a:blip r:embed="rId1"/>
-          <a:stretch>
-            <a:fillRect/>
-          </a:stretch>
-        </p:blipFill>
-        <p:spPr>
-          <a:xfrm>
-            <a:off x="9855403" y="482803"/>
-            <a:ext cx="1676095" cy="238658"/>
-          </a:xfrm>
-          <a:prstGeom prst="rect">
-            <a:avLst/>
-          </a:prstGeom>
-        </p:spPr>
-      </p:pic>
-      <p:sp>
-        <p:nvSpPr>
-          <p:cNvPr id="7" name="Text 4"/>
-          <p:cNvSpPr/>
-          <p:nvPr/>
-        </p:nvSpPr>
-        <p:spPr>
-          <a:xfrm>
-            <a:off x="660197" y="6476695"/>
-            <a:ext cx="5080406" cy="152705"/>
-          </a:xfrm>
-          <a:prstGeom prst="rect">
-            <a:avLst/>
-          </a:prstGeom>
-          <a:noFill/>
-          <a:ln/>
-        </p:spPr>
-        <p:txBody>
-          <a:bodyPr wrap="square" lIns="0" tIns="0" rIns="0" bIns="0" rtlCol="0" anchor="ctr"/>
-          <a:lstStyle/>
-          <a:p>
-            <a:pPr indent="0" marL="0">
-              <a:buNone/>
-            </a:pPr>
-            <a:r>
-              <a:rPr lang="en-US" sz="900" dirty="0">
-                <a:solidFill>
-                  <a:srgbClr val="A8B0AA"/>
-                </a:solidFill>
-                <a:latin typeface="Yu Gothic" pitchFamily="34" charset="0"/>
-                <a:ea typeface="Yu Gothic" pitchFamily="34" charset="-122"/>
-                <a:cs typeface="Yu Gothic" pitchFamily="34" charset="-120"/>
-              </a:rPr>
-              <a:t>セルフカフェ × 未来屋書店 トライアル導入のご提案</a:t>
-            </a:r>
-            <a:endParaRPr lang="en-US" sz="900" dirty="0"/>
-          </a:p>
-        </p:txBody>
-      </p:sp>
-      <p:sp>
-        <p:nvSpPr>
-          <p:cNvPr id="8" name="Text 5"/>
-          <p:cNvSpPr/>
-          <p:nvPr/>
-        </p:nvSpPr>
-        <p:spPr>
-          <a:xfrm>
-            <a:off x="10261397" y="6463894"/>
-            <a:ext cx="1270102" cy="152705"/>
-          </a:xfrm>
-          <a:prstGeom prst="rect">
-            <a:avLst/>
-          </a:prstGeom>
-          <a:noFill/>
-          <a:ln/>
-        </p:spPr>
-        <p:txBody>
-          <a:bodyPr wrap="square" lIns="0" tIns="0" rIns="0" bIns="0" rtlCol="0" anchor="ctr"/>
-          <a:lstStyle/>
-          <a:p>
-            <a:pPr algn="r" indent="0" marL="0">
-              <a:buNone/>
-            </a:pPr>
-            <a:r>
-              <a:rPr lang="en-US" sz="1000" b="1" dirty="0">
-                <a:solidFill>
-                  <a:srgbClr val="7E8882"/>
-                </a:solidFill>
-                <a:latin typeface="Arial" pitchFamily="34" charset="0"/>
-                <a:ea typeface="Arial" pitchFamily="34" charset="-122"/>
-                <a:cs typeface="Arial" pitchFamily="34" charset="-120"/>
-              </a:rPr>
-              <a:t>05</a:t>
-            </a:r>
-            <a:endParaRPr lang="en-US" sz="1000" dirty="0"/>
-          </a:p>
-        </p:txBody>
-      </p:sp>
-      <p:sp>
-        <p:nvSpPr>
-          <p:cNvPr id="9" name="Shape 6"/>
-          <p:cNvSpPr/>
-          <p:nvPr/>
-        </p:nvSpPr>
-        <p:spPr>
-          <a:xfrm>
-            <a:off x="660197" y="1651406"/>
-            <a:ext cx="5243627" cy="2926080"/>
-          </a:xfrm>
-          <a:prstGeom prst="roundRect">
-            <a:avLst>
-              <a:gd name="adj" fmla="val 1875"/>
-            </a:avLst>
-          </a:prstGeom>
-          <a:solidFill>
-            <a:srgbClr val="F1F8F3"/>
-          </a:solidFill>
-          <a:ln w="9525">
-            <a:solidFill>
-              <a:srgbClr val="D2E7DA"/>
-            </a:solidFill>
-            <a:prstDash val="solid"/>
-          </a:ln>
-        </p:spPr>
-      </p:sp>
-      <p:pic>
-        <p:nvPicPr>
-          <p:cNvPr id="10" name="Image 1" descr="/home/user/suzuki-ceo/selfcafe-miraiya-trial-deck/assets/icons/LuHouse-green.png">    </p:cNvPr>
-          <p:cNvPicPr>
-            <a:picLocks noChangeAspect="1"/>
-          </p:cNvPicPr>
-          <p:nvPr/>
-        </p:nvPicPr>
-        <p:blipFill>
-          <a:blip r:embed="rId2"/>
-          <a:stretch>
-            <a:fillRect/>
-          </a:stretch>
-        </p:blipFill>
-        <p:spPr>
-          <a:xfrm>
-            <a:off x="934517" y="1889150"/>
-            <a:ext cx="329184" cy="329184"/>
-          </a:xfrm>
-          <a:prstGeom prst="rect">
-            <a:avLst/>
-          </a:prstGeom>
-        </p:spPr>
-      </p:pic>
-      <p:sp>
-        <p:nvSpPr>
-          <p:cNvPr id="11" name="Text 7"/>
-          <p:cNvSpPr/>
-          <p:nvPr/>
-        </p:nvSpPr>
-        <p:spPr>
-          <a:xfrm>
-            <a:off x="1391717" y="1834286"/>
-            <a:ext cx="4237787" cy="384048"/>
-          </a:xfrm>
-          <a:prstGeom prst="rect">
-            <a:avLst/>
-          </a:prstGeom>
-          <a:noFill/>
-          <a:ln/>
-        </p:spPr>
-        <p:txBody>
-          <a:bodyPr wrap="square" lIns="0" tIns="0" rIns="0" bIns="0" rtlCol="0" anchor="ctr"/>
-          <a:lstStyle/>
-          <a:p>
-            <a:pPr indent="0" marL="0">
-              <a:buNone/>
-            </a:pPr>
-            <a:r>
-              <a:rPr lang="en-US" sz="1400" b="1" dirty="0">
-                <a:solidFill>
-                  <a:srgbClr val="106838"/>
-                </a:solidFill>
-                <a:latin typeface="Yu Gothic" pitchFamily="34" charset="0"/>
-                <a:ea typeface="Yu Gothic" pitchFamily="34" charset="-122"/>
-                <a:cs typeface="Yu Gothic" pitchFamily="34" charset="-120"/>
-              </a:rPr>
-              <a:t>そのまま残るもの</a:t>
-            </a:r>
-            <a:endParaRPr lang="en-US" sz="1400" dirty="0"/>
-          </a:p>
-        </p:txBody>
-      </p:sp>
-      <p:sp>
-        <p:nvSpPr>
-          <p:cNvPr id="12" name="Shape 8"/>
-          <p:cNvSpPr/>
-          <p:nvPr/>
-        </p:nvSpPr>
-        <p:spPr>
-          <a:xfrm>
-            <a:off x="934517" y="2364638"/>
-            <a:ext cx="4694987" cy="10058"/>
-          </a:xfrm>
-          <a:prstGeom prst="rect">
-            <a:avLst/>
-          </a:prstGeom>
-          <a:solidFill>
-            <a:srgbClr val="D2E7DA"/>
-          </a:solidFill>
-          <a:ln/>
-        </p:spPr>
-      </p:sp>
-      <p:pic>
-        <p:nvPicPr>
-          <p:cNvPr id="13" name="Image 2" descr="/home/user/suzuki-ceo/selfcafe-miraiya-trial-deck/assets/icons/LuCheck-green.png">    </p:cNvPr>
-          <p:cNvPicPr>
-            <a:picLocks noChangeAspect="1"/>
-          </p:cNvPicPr>
-          <p:nvPr/>
-        </p:nvPicPr>
-        <p:blipFill>
-          <a:blip r:embed="rId3"/>
-          <a:stretch>
-            <a:fillRect/>
-          </a:stretch>
-        </p:blipFill>
-        <p:spPr>
-          <a:xfrm>
-            <a:off x="952805" y="2593238"/>
-            <a:ext cx="182880" cy="182880"/>
-          </a:xfrm>
-          <a:prstGeom prst="rect">
-            <a:avLst/>
-          </a:prstGeom>
-        </p:spPr>
-      </p:pic>
-      <p:sp>
-        <p:nvSpPr>
-          <p:cNvPr id="14" name="Text 9"/>
-          <p:cNvSpPr/>
-          <p:nvPr/>
-        </p:nvSpPr>
-        <p:spPr>
-          <a:xfrm>
-            <a:off x="1281989" y="2529230"/>
-            <a:ext cx="4329227" cy="310896"/>
-          </a:xfrm>
-          <a:prstGeom prst="rect">
-            <a:avLst/>
-          </a:prstGeom>
-          <a:noFill/>
-          <a:ln/>
-        </p:spPr>
-        <p:txBody>
-          <a:bodyPr wrap="square" lIns="0" tIns="0" rIns="0" bIns="0" rtlCol="0" anchor="ctr"/>
-          <a:lstStyle/>
-          <a:p>
-            <a:pPr indent="0" marL="0">
-              <a:buNone/>
-            </a:pPr>
-            <a:r>
-              <a:rPr lang="en-US" sz="1100" dirty="0">
-                <a:solidFill>
-                  <a:srgbClr val="0A3D23"/>
-                </a:solidFill>
-                <a:latin typeface="Yu Gothic" pitchFamily="34" charset="0"/>
-                <a:ea typeface="Yu Gothic" pitchFamily="34" charset="-122"/>
-                <a:cs typeface="Yu Gothic" pitchFamily="34" charset="-120"/>
-              </a:rPr>
-              <a:t>内装工事（造作・床・サイン）</a:t>
-            </a:r>
-            <a:endParaRPr lang="en-US" sz="1100" dirty="0"/>
-          </a:p>
-        </p:txBody>
-      </p:sp>
-      <p:pic>
-        <p:nvPicPr>
-          <p:cNvPr id="15" name="Image 3" descr="/home/user/suzuki-ceo/selfcafe-miraiya-trial-deck/assets/icons/LuCheck-green.png">    </p:cNvPr>
-          <p:cNvPicPr>
-            <a:picLocks noChangeAspect="1"/>
-          </p:cNvPicPr>
-          <p:nvPr/>
-        </p:nvPicPr>
-        <p:blipFill>
-          <a:blip r:embed="rId4"/>
-          <a:stretch>
-            <a:fillRect/>
-          </a:stretch>
-        </p:blipFill>
-        <p:spPr>
-          <a:xfrm>
-            <a:off x="952805" y="3013862"/>
-            <a:ext cx="182880" cy="182880"/>
-          </a:xfrm>
-          <a:prstGeom prst="rect">
-            <a:avLst/>
-          </a:prstGeom>
-        </p:spPr>
-      </p:pic>
-      <p:sp>
-        <p:nvSpPr>
-          <p:cNvPr id="16" name="Text 10"/>
-          <p:cNvSpPr/>
-          <p:nvPr/>
-        </p:nvSpPr>
-        <p:spPr>
-          <a:xfrm>
-            <a:off x="1281989" y="2949854"/>
-            <a:ext cx="4329227" cy="310896"/>
-          </a:xfrm>
-          <a:prstGeom prst="rect">
-            <a:avLst/>
-          </a:prstGeom>
-          <a:noFill/>
-          <a:ln/>
-        </p:spPr>
-        <p:txBody>
-          <a:bodyPr wrap="square" lIns="0" tIns="0" rIns="0" bIns="0" rtlCol="0" anchor="ctr"/>
-          <a:lstStyle/>
-          <a:p>
-            <a:pPr indent="0" marL="0">
-              <a:buNone/>
-            </a:pPr>
-            <a:r>
-              <a:rPr lang="en-US" sz="1100" dirty="0">
-                <a:solidFill>
-                  <a:srgbClr val="0A3D23"/>
-                </a:solidFill>
-                <a:latin typeface="Yu Gothic" pitchFamily="34" charset="0"/>
-                <a:ea typeface="Yu Gothic" pitchFamily="34" charset="-122"/>
-                <a:cs typeface="Yu Gothic" pitchFamily="34" charset="-120"/>
-              </a:rPr>
-              <a:t>家具・什器（テーブル・椅子・植栽 等）</a:t>
-            </a:r>
-            <a:endParaRPr lang="en-US" sz="1100" dirty="0"/>
-          </a:p>
-        </p:txBody>
-      </p:sp>
-      <p:pic>
-        <p:nvPicPr>
-          <p:cNvPr id="17" name="Image 4" descr="/home/user/suzuki-ceo/selfcafe-miraiya-trial-deck/assets/icons/LuCheck-green.png">    </p:cNvPr>
-          <p:cNvPicPr>
-            <a:picLocks noChangeAspect="1"/>
-          </p:cNvPicPr>
-          <p:nvPr/>
-        </p:nvPicPr>
-        <p:blipFill>
-          <a:blip r:embed="rId5"/>
-          <a:stretch>
-            <a:fillRect/>
-          </a:stretch>
-        </p:blipFill>
-        <p:spPr>
-          <a:xfrm>
-            <a:off x="952805" y="3434486"/>
-            <a:ext cx="182880" cy="182880"/>
-          </a:xfrm>
-          <a:prstGeom prst="rect">
-            <a:avLst/>
-          </a:prstGeom>
-        </p:spPr>
-      </p:pic>
-      <p:sp>
-        <p:nvSpPr>
-          <p:cNvPr id="18" name="Text 11"/>
-          <p:cNvSpPr/>
-          <p:nvPr/>
-        </p:nvSpPr>
-        <p:spPr>
-          <a:xfrm>
-            <a:off x="1281989" y="3370478"/>
-            <a:ext cx="4329227" cy="310896"/>
-          </a:xfrm>
-          <a:prstGeom prst="rect">
-            <a:avLst/>
-          </a:prstGeom>
-          <a:noFill/>
-          <a:ln/>
-        </p:spPr>
-        <p:txBody>
-          <a:bodyPr wrap="square" lIns="0" tIns="0" rIns="0" bIns="0" rtlCol="0" anchor="ctr"/>
-          <a:lstStyle/>
-          <a:p>
-            <a:pPr indent="0" marL="0">
-              <a:buNone/>
-            </a:pPr>
-            <a:r>
-              <a:rPr lang="en-US" sz="1100" dirty="0">
-                <a:solidFill>
-                  <a:srgbClr val="0A3D23"/>
-                </a:solidFill>
-                <a:latin typeface="Yu Gothic" pitchFamily="34" charset="0"/>
-                <a:ea typeface="Yu Gothic" pitchFamily="34" charset="-122"/>
-                <a:cs typeface="Yu Gothic" pitchFamily="34" charset="-120"/>
-              </a:rPr>
-              <a:t>書店側の売場・動線</a:t>
-            </a:r>
-            <a:endParaRPr lang="en-US" sz="1100" dirty="0"/>
-          </a:p>
-        </p:txBody>
-      </p:sp>
-      <p:sp>
-        <p:nvSpPr>
-          <p:cNvPr id="19" name="Text 12"/>
-          <p:cNvSpPr/>
-          <p:nvPr/>
-        </p:nvSpPr>
-        <p:spPr>
-          <a:xfrm>
-            <a:off x="934517" y="3919118"/>
-            <a:ext cx="4694987" cy="512064"/>
-          </a:xfrm>
-          <a:prstGeom prst="rect">
-            <a:avLst/>
-          </a:prstGeom>
-          <a:noFill/>
-          <a:ln/>
-        </p:spPr>
-        <p:txBody>
-          <a:bodyPr wrap="square" lIns="0" tIns="0" rIns="0" bIns="0" rtlCol="0" anchor="t"/>
-          <a:lstStyle/>
-          <a:p>
-            <a:pPr indent="0" marL="0">
-              <a:lnSpc>
-                <a:spcPct val="130000"/>
-              </a:lnSpc>
-              <a:buNone/>
-            </a:pPr>
-            <a:r>
-              <a:rPr lang="en-US" sz="950" dirty="0">
-                <a:solidFill>
-                  <a:srgbClr val="7E8882"/>
-                </a:solidFill>
-                <a:latin typeface="Yu Gothic" pitchFamily="34" charset="0"/>
-                <a:ea typeface="Yu Gothic" pitchFamily="34" charset="-122"/>
-                <a:cs typeface="Yu Gothic" pitchFamily="34" charset="-120"/>
-              </a:rPr>
-              <a:t>工事部分は当社負担で施工しますが、撤去はいたしません。</a:t>
-            </a:r>
-            <a:endParaRPr lang="en-US" sz="950" dirty="0"/>
-          </a:p>
-        </p:txBody>
-      </p:sp>
-      <p:sp>
-        <p:nvSpPr>
-          <p:cNvPr id="20" name="Shape 13"/>
-          <p:cNvSpPr/>
-          <p:nvPr/>
-        </p:nvSpPr>
-        <p:spPr>
-          <a:xfrm>
-            <a:off x="6287872" y="1651406"/>
-            <a:ext cx="5243627" cy="2926080"/>
-          </a:xfrm>
-          <a:prstGeom prst="roundRect">
-            <a:avLst>
-              <a:gd name="adj" fmla="val 1875"/>
-            </a:avLst>
-          </a:prstGeom>
-          <a:solidFill>
-            <a:srgbClr val="FFFFFF"/>
-          </a:solidFill>
-          <a:ln w="9525">
-            <a:solidFill>
-              <a:srgbClr val="EFEAE0"/>
-            </a:solidFill>
-            <a:prstDash val="solid"/>
-          </a:ln>
-        </p:spPr>
-      </p:sp>
-      <p:pic>
-        <p:nvPicPr>
-          <p:cNvPr id="21" name="Image 5" descr="/home/user/suzuki-ceo/selfcafe-miraiya-trial-deck/assets/icons/LuMinus-green.png">    </p:cNvPr>
-          <p:cNvPicPr>
-            <a:picLocks noChangeAspect="1"/>
-          </p:cNvPicPr>
-          <p:nvPr/>
-        </p:nvPicPr>
-        <p:blipFill>
-          <a:blip r:embed="rId6"/>
-          <a:stretch>
-            <a:fillRect/>
-          </a:stretch>
-        </p:blipFill>
-        <p:spPr>
-          <a:xfrm>
-            <a:off x="6562192" y="1889150"/>
-            <a:ext cx="329184" cy="329184"/>
-          </a:xfrm>
-          <a:prstGeom prst="rect">
-            <a:avLst/>
-          </a:prstGeom>
-        </p:spPr>
-      </p:pic>
-      <p:sp>
-        <p:nvSpPr>
-          <p:cNvPr id="22" name="Text 14"/>
-          <p:cNvSpPr/>
-          <p:nvPr/>
-        </p:nvSpPr>
-        <p:spPr>
-          <a:xfrm>
-            <a:off x="7019392" y="1834286"/>
-            <a:ext cx="4237787" cy="384048"/>
-          </a:xfrm>
-          <a:prstGeom prst="rect">
-            <a:avLst/>
-          </a:prstGeom>
-          <a:noFill/>
-          <a:ln/>
-        </p:spPr>
-        <p:txBody>
-          <a:bodyPr wrap="square" lIns="0" tIns="0" rIns="0" bIns="0" rtlCol="0" anchor="ctr"/>
-          <a:lstStyle/>
-          <a:p>
-            <a:pPr indent="0" marL="0">
-              <a:buNone/>
-            </a:pPr>
-            <a:r>
-              <a:rPr lang="en-US" sz="1400" b="1" dirty="0">
-                <a:solidFill>
-                  <a:srgbClr val="0A3D23"/>
-                </a:solidFill>
-                <a:latin typeface="Yu Gothic" pitchFamily="34" charset="0"/>
-                <a:ea typeface="Yu Gothic" pitchFamily="34" charset="-122"/>
-                <a:cs typeface="Yu Gothic" pitchFamily="34" charset="-120"/>
-              </a:rPr>
-              <a:t>当社が撤去するもの</a:t>
-            </a:r>
-            <a:endParaRPr lang="en-US" sz="1400" dirty="0"/>
-          </a:p>
-        </p:txBody>
-      </p:sp>
-      <p:sp>
-        <p:nvSpPr>
-          <p:cNvPr id="23" name="Shape 15"/>
-          <p:cNvSpPr/>
-          <p:nvPr/>
-        </p:nvSpPr>
-        <p:spPr>
-          <a:xfrm>
-            <a:off x="6562192" y="2364638"/>
-            <a:ext cx="4694987" cy="10058"/>
-          </a:xfrm>
-          <a:prstGeom prst="rect">
-            <a:avLst/>
-          </a:prstGeom>
-          <a:solidFill>
-            <a:srgbClr val="EFEAE0"/>
-          </a:solidFill>
-          <a:ln/>
-        </p:spPr>
-      </p:sp>
-      <p:pic>
-        <p:nvPicPr>
-          <p:cNvPr id="24" name="Image 6" descr="/home/user/suzuki-ceo/selfcafe-miraiya-trial-deck/assets/icons/LuX-muted.png">    </p:cNvPr>
-          <p:cNvPicPr>
-            <a:picLocks noChangeAspect="1"/>
-          </p:cNvPicPr>
-          <p:nvPr/>
-        </p:nvPicPr>
-        <p:blipFill>
-          <a:blip r:embed="rId7"/>
-          <a:stretch>
-            <a:fillRect/>
-          </a:stretch>
-        </p:blipFill>
-        <p:spPr>
-          <a:xfrm>
-            <a:off x="6580480" y="2593238"/>
-            <a:ext cx="182880" cy="182880"/>
-          </a:xfrm>
-          <a:prstGeom prst="rect">
-            <a:avLst/>
-          </a:prstGeom>
-        </p:spPr>
-      </p:pic>
-      <p:sp>
-        <p:nvSpPr>
-          <p:cNvPr id="25" name="Text 16"/>
-          <p:cNvSpPr/>
-          <p:nvPr/>
-        </p:nvSpPr>
-        <p:spPr>
-          <a:xfrm>
-            <a:off x="6909664" y="2529230"/>
-            <a:ext cx="4329227" cy="310896"/>
-          </a:xfrm>
-          <a:prstGeom prst="rect">
-            <a:avLst/>
-          </a:prstGeom>
-          <a:noFill/>
-          <a:ln/>
-        </p:spPr>
-        <p:txBody>
-          <a:bodyPr wrap="square" lIns="0" tIns="0" rIns="0" bIns="0" rtlCol="0" anchor="ctr"/>
-          <a:lstStyle/>
-          <a:p>
-            <a:pPr indent="0" marL="0">
-              <a:buNone/>
-            </a:pPr>
-            <a:r>
-              <a:rPr lang="en-US" sz="1100" dirty="0">
-                <a:solidFill>
-                  <a:srgbClr val="0A3D23"/>
-                </a:solidFill>
-                <a:latin typeface="Yu Gothic" pitchFamily="34" charset="0"/>
-                <a:ea typeface="Yu Gothic" pitchFamily="34" charset="-122"/>
-                <a:cs typeface="Yu Gothic" pitchFamily="34" charset="-120"/>
-              </a:rPr>
-              <a:t>ドリンクマシン</a:t>
-            </a:r>
-            <a:endParaRPr lang="en-US" sz="1100" dirty="0"/>
-          </a:p>
-        </p:txBody>
-      </p:sp>
-      <p:pic>
-        <p:nvPicPr>
-          <p:cNvPr id="26" name="Image 7" descr="/home/user/suzuki-ceo/selfcafe-miraiya-trial-deck/assets/icons/LuX-muted.png">    </p:cNvPr>
-          <p:cNvPicPr>
-            <a:picLocks noChangeAspect="1"/>
-          </p:cNvPicPr>
-          <p:nvPr/>
-        </p:nvPicPr>
-        <p:blipFill>
-          <a:blip r:embed="rId8"/>
-          <a:stretch>
-            <a:fillRect/>
-          </a:stretch>
-        </p:blipFill>
-        <p:spPr>
-          <a:xfrm>
-            <a:off x="6580480" y="3013862"/>
-            <a:ext cx="182880" cy="182880"/>
-          </a:xfrm>
-          <a:prstGeom prst="rect">
-            <a:avLst/>
-          </a:prstGeom>
-        </p:spPr>
-      </p:pic>
-      <p:sp>
-        <p:nvSpPr>
-          <p:cNvPr id="27" name="Text 17"/>
-          <p:cNvSpPr/>
-          <p:nvPr/>
-        </p:nvSpPr>
-        <p:spPr>
-          <a:xfrm>
-            <a:off x="6909664" y="2949854"/>
-            <a:ext cx="4329227" cy="310896"/>
-          </a:xfrm>
-          <a:prstGeom prst="rect">
-            <a:avLst/>
-          </a:prstGeom>
-          <a:noFill/>
-          <a:ln/>
-        </p:spPr>
-        <p:txBody>
-          <a:bodyPr wrap="square" lIns="0" tIns="0" rIns="0" bIns="0" rtlCol="0" anchor="ctr"/>
-          <a:lstStyle/>
-          <a:p>
-            <a:pPr indent="0" marL="0">
-              <a:buNone/>
-            </a:pPr>
-            <a:r>
-              <a:rPr lang="en-US" sz="1100" dirty="0">
-                <a:solidFill>
-                  <a:srgbClr val="0A3D23"/>
-                </a:solidFill>
-                <a:latin typeface="Yu Gothic" pitchFamily="34" charset="0"/>
-                <a:ea typeface="Yu Gothic" pitchFamily="34" charset="-122"/>
-                <a:cs typeface="Yu Gothic" pitchFamily="34" charset="-120"/>
-              </a:rPr>
-              <a:t>決済端末</a:t>
-            </a:r>
-            <a:endParaRPr lang="en-US" sz="1100" dirty="0"/>
-          </a:p>
-        </p:txBody>
-      </p:sp>
-      <p:pic>
-        <p:nvPicPr>
-          <p:cNvPr id="28" name="Image 8" descr="/home/user/suzuki-ceo/selfcafe-miraiya-trial-deck/assets/icons/LuX-muted.png">    </p:cNvPr>
-          <p:cNvPicPr>
-            <a:picLocks noChangeAspect="1"/>
-          </p:cNvPicPr>
-          <p:nvPr/>
-        </p:nvPicPr>
-        <p:blipFill>
-          <a:blip r:embed="rId9"/>
-          <a:stretch>
-            <a:fillRect/>
-          </a:stretch>
-        </p:blipFill>
-        <p:spPr>
-          <a:xfrm>
-            <a:off x="6580480" y="3434486"/>
-            <a:ext cx="182880" cy="182880"/>
-          </a:xfrm>
-          <a:prstGeom prst="rect">
-            <a:avLst/>
-          </a:prstGeom>
-        </p:spPr>
-      </p:pic>
-      <p:sp>
-        <p:nvSpPr>
-          <p:cNvPr id="29" name="Text 18"/>
-          <p:cNvSpPr/>
-          <p:nvPr/>
-        </p:nvSpPr>
-        <p:spPr>
-          <a:xfrm>
-            <a:off x="6909664" y="3370478"/>
-            <a:ext cx="4329227" cy="310896"/>
-          </a:xfrm>
-          <a:prstGeom prst="rect">
-            <a:avLst/>
-          </a:prstGeom>
-          <a:noFill/>
-          <a:ln/>
-        </p:spPr>
-        <p:txBody>
-          <a:bodyPr wrap="square" lIns="0" tIns="0" rIns="0" bIns="0" rtlCol="0" anchor="ctr"/>
-          <a:lstStyle/>
-          <a:p>
-            <a:pPr indent="0" marL="0">
-              <a:buNone/>
-            </a:pPr>
-            <a:r>
-              <a:rPr lang="en-US" sz="1100" dirty="0">
-                <a:solidFill>
-                  <a:srgbClr val="0A3D23"/>
-                </a:solidFill>
-                <a:latin typeface="Yu Gothic" pitchFamily="34" charset="0"/>
-                <a:ea typeface="Yu Gothic" pitchFamily="34" charset="-122"/>
-                <a:cs typeface="Yu Gothic" pitchFamily="34" charset="-120"/>
-              </a:rPr>
-              <a:t>防犯カメラ・通信機器</a:t>
-            </a:r>
-            <a:endParaRPr lang="en-US" sz="1100" dirty="0"/>
-          </a:p>
-        </p:txBody>
-      </p:sp>
-      <p:sp>
-        <p:nvSpPr>
-          <p:cNvPr id="30" name="Text 19"/>
-          <p:cNvSpPr/>
-          <p:nvPr/>
-        </p:nvSpPr>
-        <p:spPr>
-          <a:xfrm>
-            <a:off x="6562192" y="3919118"/>
-            <a:ext cx="4694987" cy="512064"/>
-          </a:xfrm>
-          <a:prstGeom prst="rect">
-            <a:avLst/>
-          </a:prstGeom>
-          <a:noFill/>
-          <a:ln/>
-        </p:spPr>
-        <p:txBody>
-          <a:bodyPr wrap="square" lIns="0" tIns="0" rIns="0" bIns="0" rtlCol="0" anchor="t"/>
-          <a:lstStyle/>
-          <a:p>
-            <a:pPr indent="0" marL="0">
-              <a:lnSpc>
-                <a:spcPct val="130000"/>
-              </a:lnSpc>
-              <a:buNone/>
-            </a:pPr>
-            <a:r>
-              <a:rPr lang="en-US" sz="950" dirty="0">
-                <a:solidFill>
-                  <a:srgbClr val="7E8882"/>
-                </a:solidFill>
-                <a:latin typeface="Yu Gothic" pitchFamily="34" charset="0"/>
-                <a:ea typeface="Yu Gothic" pitchFamily="34" charset="-122"/>
-                <a:cs typeface="Yu Gothic" pitchFamily="34" charset="-120"/>
-              </a:rPr>
-              <a:t>撤去費用は当社が負担します。跡の補修も当社で対応します。</a:t>
-            </a:r>
-            <a:endParaRPr lang="en-US" sz="950" dirty="0"/>
-          </a:p>
-        </p:txBody>
-      </p:sp>
-      <p:sp>
-        <p:nvSpPr>
-          <p:cNvPr id="31" name="Shape 20"/>
-          <p:cNvSpPr/>
-          <p:nvPr/>
-        </p:nvSpPr>
-        <p:spPr>
-          <a:xfrm>
-            <a:off x="660197" y="4718304"/>
-            <a:ext cx="10871302" cy="1005840"/>
-          </a:xfrm>
-          <a:prstGeom prst="roundRect">
-            <a:avLst>
-              <a:gd name="adj" fmla="val 5455"/>
-            </a:avLst>
-          </a:prstGeom>
-          <a:solidFill>
-            <a:srgbClr val="0C5230"/>
-          </a:solidFill>
-          <a:ln/>
-        </p:spPr>
-      </p:sp>
-      <p:pic>
-        <p:nvPicPr>
-          <p:cNvPr id="32" name="Image 9" descr="/home/user/suzuki-ceo/selfcafe-miraiya-trial-deck/assets/icons/LuBadgeCheck-pale.png">    </p:cNvPr>
-          <p:cNvPicPr>
-            <a:picLocks noChangeAspect="1"/>
-          </p:cNvPicPr>
-          <p:nvPr/>
-        </p:nvPicPr>
-        <p:blipFill>
-          <a:blip r:embed="rId10"/>
-          <a:stretch>
-            <a:fillRect/>
-          </a:stretch>
-        </p:blipFill>
-        <p:spPr>
-          <a:xfrm>
-            <a:off x="1007669" y="4992624"/>
-            <a:ext cx="402336" cy="402336"/>
-          </a:xfrm>
-          <a:prstGeom prst="rect">
-            <a:avLst/>
-          </a:prstGeom>
-        </p:spPr>
-      </p:pic>
-      <p:sp>
-        <p:nvSpPr>
-          <p:cNvPr id="33" name="Text 21"/>
-          <p:cNvSpPr/>
-          <p:nvPr/>
-        </p:nvSpPr>
-        <p:spPr>
-          <a:xfrm>
-            <a:off x="1574597" y="4718304"/>
-            <a:ext cx="9591142" cy="1005840"/>
-          </a:xfrm>
-          <a:prstGeom prst="rect">
-            <a:avLst/>
-          </a:prstGeom>
-          <a:noFill/>
-          <a:ln/>
-        </p:spPr>
-        <p:txBody>
-          <a:bodyPr wrap="square" lIns="0" tIns="0" rIns="0" bIns="0" rtlCol="0" anchor="ctr"/>
-          <a:lstStyle/>
-          <a:p>
-            <a:pPr indent="0" marL="0">
-              <a:lnSpc>
-                <a:spcPct val="125000"/>
-              </a:lnSpc>
-              <a:buNone/>
-            </a:pPr>
-            <a:r>
-              <a:rPr lang="en-US" sz="1400" b="1" dirty="0">
-                <a:solidFill>
-                  <a:srgbClr val="FFFFFF"/>
-                </a:solidFill>
-                <a:latin typeface="Yu Gothic" pitchFamily="34" charset="0"/>
-                <a:ea typeface="Yu Gothic" pitchFamily="34" charset="-122"/>
-                <a:cs typeface="Yu Gothic" pitchFamily="34" charset="-120"/>
-              </a:rPr>
-              <a:t>トライアル後は、基本そのまま残す形を想定しています。</a:t>
-            </a:r>
-            <a:endParaRPr lang="en-US" sz="1400" dirty="0"/>
-          </a:p>
-          <a:p>
-            <a:pPr indent="0" marL="0">
-              <a:lnSpc>
-                <a:spcPct val="125000"/>
-              </a:lnSpc>
-              <a:buNone/>
-            </a:pPr>
-            <a:r>
-              <a:rPr lang="en-US" sz="1100" dirty="0">
-                <a:solidFill>
-                  <a:srgbClr val="AFC2B8"/>
-                </a:solidFill>
-                <a:latin typeface="Yu Gothic" pitchFamily="34" charset="0"/>
-                <a:ea typeface="Yu Gothic" pitchFamily="34" charset="-122"/>
-                <a:cs typeface="Yu Gothic" pitchFamily="34" charset="-120"/>
-              </a:rPr>
-              <a:t>内装も什器も残るため、継続いただく場合は追加の工事なくそのまま運営を続けられます。</a:t>
-            </a:r>
-            <a:endParaRPr lang="en-US" sz="1400" dirty="0"/>
-          </a:p>
-        </p:txBody>
-      </p:sp>
-      <p:sp>
-        <p:nvSpPr>
-          <p:cNvPr id="34" name="Text 22"/>
-          <p:cNvSpPr/>
-          <p:nvPr/>
-        </p:nvSpPr>
-        <p:spPr>
-          <a:xfrm>
-            <a:off x="660197" y="5888736"/>
-            <a:ext cx="10871302" cy="182880"/>
-          </a:xfrm>
-          <a:prstGeom prst="rect">
-            <a:avLst/>
-          </a:prstGeom>
-          <a:noFill/>
-          <a:ln/>
-        </p:spPr>
-        <p:txBody>
-          <a:bodyPr wrap="square" lIns="0" tIns="0" rIns="0" bIns="0" rtlCol="0" anchor="ctr"/>
-          <a:lstStyle/>
-          <a:p>
-            <a:pPr indent="0" marL="0">
-              <a:buNone/>
-            </a:pPr>
-            <a:r>
-              <a:rPr lang="en-US" sz="850" dirty="0">
-                <a:solidFill>
-                  <a:srgbClr val="A8B0AA"/>
-                </a:solidFill>
-                <a:latin typeface="Yu Gothic" pitchFamily="34" charset="0"/>
-                <a:ea typeface="Yu Gothic" pitchFamily="34" charset="-122"/>
-                <a:cs typeface="Yu Gothic" pitchFamily="34" charset="-120"/>
-              </a:rPr>
-              <a:t>※ 撤去の範囲・時期は事前にお打ち合わせのうえ決定します。什器の再利用可否は現地確認時にご相談させてください。</a:t>
-            </a:r>
-            <a:endParaRPr lang="en-US" sz="850" dirty="0"/>
-          </a:p>
-        </p:txBody>
-      </p:sp>
-    </p:spTree>
-  </p:cSld>
-  <p:clrMapOvr>
-    <a:masterClrMapping/>
-  </p:clrMapOvr>
-</p:sld>
-</file>
-
 <file path=ppt/slides/slide6.xml><?xml version="1.0" encoding="utf-8"?>
 <p:sld xmlns:a="http://schemas.openxmlformats.org/drawingml/2006/main" xmlns:r="http://schemas.openxmlformats.org/officeDocument/2006/relationships" xmlns:p="http://schemas.openxmlformats.org/presentationml/2006/main">
   <p:cSld name="Slide 6">
@@ -8183,7 +9421,7 @@
                 <a:ea typeface="Yu Gothic" pitchFamily="34" charset="-122"/>
                 <a:cs typeface="Yu Gothic" pitchFamily="34" charset="-120"/>
               </a:rPr>
-              <a:t>   家具・什器の考え方</a:t>
+              <a:t>   終了時の扱い</a:t>
             </a:r>
             <a:endParaRPr lang="en-US" sz="1050" dirty="0"/>
           </a:p>
@@ -8222,7 +9460,7 @@
                 <a:ea typeface="Yu Gothic" pitchFamily="34" charset="-122"/>
                 <a:cs typeface="Yu Gothic" pitchFamily="34" charset="-120"/>
               </a:rPr>
-              <a:t>家具は御社ご所有のほうがよい、と判断しました。</a:t>
+              <a:t>原状回復は不要。撤去するのは当社の機器だけです。</a:t>
             </a:r>
             <a:endParaRPr lang="en-US" sz="2900" dirty="0"/>
           </a:p>
@@ -8261,7 +9499,7 @@
                 <a:ea typeface="Yu Gothic" pitchFamily="34" charset="-122"/>
                 <a:cs typeface="Yu Gothic" pitchFamily="34" charset="-120"/>
               </a:rPr>
-              <a:t>トライアル後もそのまま残す前提で考えると、御社の資産にしておくのが最も無駄がありません。</a:t>
+              <a:t>ご契約を終了される場合も、内装を元に戻していただく必要はありません。</a:t>
             </a:r>
             <a:endParaRPr lang="en-US" sz="1250" dirty="0"/>
           </a:p>
@@ -8378,11 +9616,352 @@
         <p:spPr>
           <a:xfrm>
             <a:off x="660197" y="1651406"/>
-            <a:ext cx="3440887" cy="3017520"/>
+            <a:ext cx="5243627" cy="2926080"/>
           </a:xfrm>
           <a:prstGeom prst="roundRect">
             <a:avLst>
-              <a:gd name="adj" fmla="val 1818"/>
+              <a:gd name="adj" fmla="val 1875"/>
+            </a:avLst>
+          </a:prstGeom>
+          <a:solidFill>
+            <a:srgbClr val="F1F8F3"/>
+          </a:solidFill>
+          <a:ln w="9525">
+            <a:solidFill>
+              <a:srgbClr val="D2E7DA"/>
+            </a:solidFill>
+            <a:prstDash val="solid"/>
+          </a:ln>
+        </p:spPr>
+      </p:sp>
+      <p:pic>
+        <p:nvPicPr>
+          <p:cNvPr id="10" name="Image 1" descr="/home/user/suzuki-ceo/selfcafe-miraiya-trial-deck/assets/icons/LuHouse-green.png">    </p:cNvPr>
+          <p:cNvPicPr>
+            <a:picLocks noChangeAspect="1"/>
+          </p:cNvPicPr>
+          <p:nvPr/>
+        </p:nvPicPr>
+        <p:blipFill>
+          <a:blip r:embed="rId2"/>
+          <a:stretch>
+            <a:fillRect/>
+          </a:stretch>
+        </p:blipFill>
+        <p:spPr>
+          <a:xfrm>
+            <a:off x="934517" y="1889150"/>
+            <a:ext cx="329184" cy="329184"/>
+          </a:xfrm>
+          <a:prstGeom prst="rect">
+            <a:avLst/>
+          </a:prstGeom>
+        </p:spPr>
+      </p:pic>
+      <p:sp>
+        <p:nvSpPr>
+          <p:cNvPr id="11" name="Text 7"/>
+          <p:cNvSpPr/>
+          <p:nvPr/>
+        </p:nvSpPr>
+        <p:spPr>
+          <a:xfrm>
+            <a:off x="1391717" y="1834286"/>
+            <a:ext cx="4237787" cy="384048"/>
+          </a:xfrm>
+          <a:prstGeom prst="rect">
+            <a:avLst/>
+          </a:prstGeom>
+          <a:noFill/>
+          <a:ln/>
+        </p:spPr>
+        <p:txBody>
+          <a:bodyPr wrap="square" lIns="0" tIns="0" rIns="0" bIns="0" rtlCol="0" anchor="ctr"/>
+          <a:lstStyle/>
+          <a:p>
+            <a:pPr indent="0" marL="0">
+              <a:buNone/>
+            </a:pPr>
+            <a:r>
+              <a:rPr lang="en-US" sz="1400" b="1" dirty="0">
+                <a:solidFill>
+                  <a:srgbClr val="106838"/>
+                </a:solidFill>
+                <a:latin typeface="Yu Gothic" pitchFamily="34" charset="0"/>
+                <a:ea typeface="Yu Gothic" pitchFamily="34" charset="-122"/>
+                <a:cs typeface="Yu Gothic" pitchFamily="34" charset="-120"/>
+              </a:rPr>
+              <a:t>そのまま残るもの</a:t>
+            </a:r>
+            <a:endParaRPr lang="en-US" sz="1400" dirty="0"/>
+          </a:p>
+        </p:txBody>
+      </p:sp>
+      <p:sp>
+        <p:nvSpPr>
+          <p:cNvPr id="12" name="Shape 8"/>
+          <p:cNvSpPr/>
+          <p:nvPr/>
+        </p:nvSpPr>
+        <p:spPr>
+          <a:xfrm>
+            <a:off x="934517" y="2364638"/>
+            <a:ext cx="4694987" cy="10058"/>
+          </a:xfrm>
+          <a:prstGeom prst="rect">
+            <a:avLst/>
+          </a:prstGeom>
+          <a:solidFill>
+            <a:srgbClr val="D2E7DA"/>
+          </a:solidFill>
+          <a:ln/>
+        </p:spPr>
+      </p:sp>
+      <p:pic>
+        <p:nvPicPr>
+          <p:cNvPr id="13" name="Image 2" descr="/home/user/suzuki-ceo/selfcafe-miraiya-trial-deck/assets/icons/LuCheck-green.png">    </p:cNvPr>
+          <p:cNvPicPr>
+            <a:picLocks noChangeAspect="1"/>
+          </p:cNvPicPr>
+          <p:nvPr/>
+        </p:nvPicPr>
+        <p:blipFill>
+          <a:blip r:embed="rId3"/>
+          <a:stretch>
+            <a:fillRect/>
+          </a:stretch>
+        </p:blipFill>
+        <p:spPr>
+          <a:xfrm>
+            <a:off x="952805" y="2593238"/>
+            <a:ext cx="182880" cy="182880"/>
+          </a:xfrm>
+          <a:prstGeom prst="rect">
+            <a:avLst/>
+          </a:prstGeom>
+        </p:spPr>
+      </p:pic>
+      <p:sp>
+        <p:nvSpPr>
+          <p:cNvPr id="14" name="Text 9"/>
+          <p:cNvSpPr/>
+          <p:nvPr/>
+        </p:nvSpPr>
+        <p:spPr>
+          <a:xfrm>
+            <a:off x="1281989" y="2529230"/>
+            <a:ext cx="4329227" cy="310896"/>
+          </a:xfrm>
+          <a:prstGeom prst="rect">
+            <a:avLst/>
+          </a:prstGeom>
+          <a:noFill/>
+          <a:ln/>
+        </p:spPr>
+        <p:txBody>
+          <a:bodyPr wrap="square" lIns="0" tIns="0" rIns="0" bIns="0" rtlCol="0" anchor="ctr"/>
+          <a:lstStyle/>
+          <a:p>
+            <a:pPr indent="0" marL="0">
+              <a:buNone/>
+            </a:pPr>
+            <a:r>
+              <a:rPr lang="en-US" sz="1100" dirty="0">
+                <a:solidFill>
+                  <a:srgbClr val="0A3D23"/>
+                </a:solidFill>
+                <a:latin typeface="Yu Gothic" pitchFamily="34" charset="0"/>
+                <a:ea typeface="Yu Gothic" pitchFamily="34" charset="-122"/>
+                <a:cs typeface="Yu Gothic" pitchFamily="34" charset="-120"/>
+              </a:rPr>
+              <a:t>内装工事（造作・床・サイン）</a:t>
+            </a:r>
+            <a:endParaRPr lang="en-US" sz="1100" dirty="0"/>
+          </a:p>
+        </p:txBody>
+      </p:sp>
+      <p:pic>
+        <p:nvPicPr>
+          <p:cNvPr id="15" name="Image 3" descr="/home/user/suzuki-ceo/selfcafe-miraiya-trial-deck/assets/icons/LuCheck-green.png">    </p:cNvPr>
+          <p:cNvPicPr>
+            <a:picLocks noChangeAspect="1"/>
+          </p:cNvPicPr>
+          <p:nvPr/>
+        </p:nvPicPr>
+        <p:blipFill>
+          <a:blip r:embed="rId4"/>
+          <a:stretch>
+            <a:fillRect/>
+          </a:stretch>
+        </p:blipFill>
+        <p:spPr>
+          <a:xfrm>
+            <a:off x="952805" y="3013862"/>
+            <a:ext cx="182880" cy="182880"/>
+          </a:xfrm>
+          <a:prstGeom prst="rect">
+            <a:avLst/>
+          </a:prstGeom>
+        </p:spPr>
+      </p:pic>
+      <p:sp>
+        <p:nvSpPr>
+          <p:cNvPr id="16" name="Text 10"/>
+          <p:cNvSpPr/>
+          <p:nvPr/>
+        </p:nvSpPr>
+        <p:spPr>
+          <a:xfrm>
+            <a:off x="1281989" y="2949854"/>
+            <a:ext cx="4329227" cy="310896"/>
+          </a:xfrm>
+          <a:prstGeom prst="rect">
+            <a:avLst/>
+          </a:prstGeom>
+          <a:noFill/>
+          <a:ln/>
+        </p:spPr>
+        <p:txBody>
+          <a:bodyPr wrap="square" lIns="0" tIns="0" rIns="0" bIns="0" rtlCol="0" anchor="ctr"/>
+          <a:lstStyle/>
+          <a:p>
+            <a:pPr indent="0" marL="0">
+              <a:buNone/>
+            </a:pPr>
+            <a:r>
+              <a:rPr lang="en-US" sz="1100" dirty="0">
+                <a:solidFill>
+                  <a:srgbClr val="0A3D23"/>
+                </a:solidFill>
+                <a:latin typeface="Yu Gothic" pitchFamily="34" charset="0"/>
+                <a:ea typeface="Yu Gothic" pitchFamily="34" charset="-122"/>
+                <a:cs typeface="Yu Gothic" pitchFamily="34" charset="-120"/>
+              </a:rPr>
+              <a:t>家具・什器（テーブル・椅子・植栽 等）</a:t>
+            </a:r>
+            <a:endParaRPr lang="en-US" sz="1100" dirty="0"/>
+          </a:p>
+        </p:txBody>
+      </p:sp>
+      <p:pic>
+        <p:nvPicPr>
+          <p:cNvPr id="17" name="Image 4" descr="/home/user/suzuki-ceo/selfcafe-miraiya-trial-deck/assets/icons/LuCheck-green.png">    </p:cNvPr>
+          <p:cNvPicPr>
+            <a:picLocks noChangeAspect="1"/>
+          </p:cNvPicPr>
+          <p:nvPr/>
+        </p:nvPicPr>
+        <p:blipFill>
+          <a:blip r:embed="rId5"/>
+          <a:stretch>
+            <a:fillRect/>
+          </a:stretch>
+        </p:blipFill>
+        <p:spPr>
+          <a:xfrm>
+            <a:off x="952805" y="3434486"/>
+            <a:ext cx="182880" cy="182880"/>
+          </a:xfrm>
+          <a:prstGeom prst="rect">
+            <a:avLst/>
+          </a:prstGeom>
+        </p:spPr>
+      </p:pic>
+      <p:sp>
+        <p:nvSpPr>
+          <p:cNvPr id="18" name="Text 11"/>
+          <p:cNvSpPr/>
+          <p:nvPr/>
+        </p:nvSpPr>
+        <p:spPr>
+          <a:xfrm>
+            <a:off x="1281989" y="3370478"/>
+            <a:ext cx="4329227" cy="310896"/>
+          </a:xfrm>
+          <a:prstGeom prst="rect">
+            <a:avLst/>
+          </a:prstGeom>
+          <a:noFill/>
+          <a:ln/>
+        </p:spPr>
+        <p:txBody>
+          <a:bodyPr wrap="square" lIns="0" tIns="0" rIns="0" bIns="0" rtlCol="0" anchor="ctr"/>
+          <a:lstStyle/>
+          <a:p>
+            <a:pPr indent="0" marL="0">
+              <a:buNone/>
+            </a:pPr>
+            <a:r>
+              <a:rPr lang="en-US" sz="1100" dirty="0">
+                <a:solidFill>
+                  <a:srgbClr val="0A3D23"/>
+                </a:solidFill>
+                <a:latin typeface="Yu Gothic" pitchFamily="34" charset="0"/>
+                <a:ea typeface="Yu Gothic" pitchFamily="34" charset="-122"/>
+                <a:cs typeface="Yu Gothic" pitchFamily="34" charset="-120"/>
+              </a:rPr>
+              <a:t>書店側の売場・動線</a:t>
+            </a:r>
+            <a:endParaRPr lang="en-US" sz="1100" dirty="0"/>
+          </a:p>
+        </p:txBody>
+      </p:sp>
+      <p:sp>
+        <p:nvSpPr>
+          <p:cNvPr id="19" name="Text 12"/>
+          <p:cNvSpPr/>
+          <p:nvPr/>
+        </p:nvSpPr>
+        <p:spPr>
+          <a:xfrm>
+            <a:off x="934517" y="3919118"/>
+            <a:ext cx="4694987" cy="512064"/>
+          </a:xfrm>
+          <a:prstGeom prst="rect">
+            <a:avLst/>
+          </a:prstGeom>
+          <a:noFill/>
+          <a:ln/>
+        </p:spPr>
+        <p:txBody>
+          <a:bodyPr wrap="square" lIns="0" tIns="0" rIns="0" bIns="0" rtlCol="0" anchor="t"/>
+          <a:lstStyle/>
+          <a:p>
+            <a:pPr indent="0" marL="0">
+              <a:lnSpc>
+                <a:spcPct val="130000"/>
+              </a:lnSpc>
+              <a:buNone/>
+            </a:pPr>
+            <a:r>
+              <a:rPr lang="en-US" sz="950" dirty="0">
+                <a:solidFill>
+                  <a:srgbClr val="7E8882"/>
+                </a:solidFill>
+                <a:latin typeface="Yu Gothic" pitchFamily="34" charset="0"/>
+                <a:ea typeface="Yu Gothic" pitchFamily="34" charset="-122"/>
+                <a:cs typeface="Yu Gothic" pitchFamily="34" charset="-120"/>
+              </a:rPr>
+              <a:t>工事部分は当社負担で施工しますが、撤去はいたしません。</a:t>
+            </a:r>
+            <a:endParaRPr lang="en-US" sz="950" dirty="0"/>
+          </a:p>
+        </p:txBody>
+      </p:sp>
+      <p:sp>
+        <p:nvSpPr>
+          <p:cNvPr id="20" name="Shape 13"/>
+          <p:cNvSpPr/>
+          <p:nvPr/>
+        </p:nvSpPr>
+        <p:spPr>
+          <a:xfrm>
+            <a:off x="6287872" y="1651406"/>
+            <a:ext cx="5243627" cy="2926080"/>
+          </a:xfrm>
+          <a:prstGeom prst="roundRect">
+            <a:avLst>
+              <a:gd name="adj" fmla="val 1875"/>
             </a:avLst>
           </a:prstGeom>
           <a:solidFill>
@@ -8398,22 +9977,22 @@
       </p:sp>
       <p:pic>
         <p:nvPicPr>
-          <p:cNvPr id="10" name="Image 1" descr="/home/user/suzuki-ceo/selfcafe-miraiya-trial-deck/assets/icons/LuStore-green.png">    </p:cNvPr>
+          <p:cNvPr id="21" name="Image 5" descr="/home/user/suzuki-ceo/selfcafe-miraiya-trial-deck/assets/icons/LuMinus-green.png">    </p:cNvPr>
           <p:cNvPicPr>
             <a:picLocks noChangeAspect="1"/>
           </p:cNvPicPr>
           <p:nvPr/>
         </p:nvPicPr>
         <p:blipFill>
-          <a:blip r:embed="rId2"/>
+          <a:blip r:embed="rId6"/>
           <a:stretch>
             <a:fillRect/>
           </a:stretch>
         </p:blipFill>
         <p:spPr>
           <a:xfrm>
-            <a:off x="934517" y="1925726"/>
-            <a:ext cx="365760" cy="365760"/>
+            <a:off x="6562192" y="1889150"/>
+            <a:ext cx="329184" cy="329184"/>
           </a:xfrm>
           <a:prstGeom prst="rect">
             <a:avLst/>
@@ -8422,14 +10001,14 @@
       </p:pic>
       <p:sp>
         <p:nvSpPr>
-          <p:cNvPr id="11" name="Text 7"/>
-          <p:cNvSpPr/>
-          <p:nvPr/>
-        </p:nvSpPr>
-        <p:spPr>
-          <a:xfrm>
-            <a:off x="934517" y="2456078"/>
-            <a:ext cx="2892247" cy="548640"/>
+          <p:cNvPr id="22" name="Text 14"/>
+          <p:cNvSpPr/>
+          <p:nvPr/>
+        </p:nvSpPr>
+        <p:spPr>
+          <a:xfrm>
+            <a:off x="7019392" y="1834286"/>
+            <a:ext cx="4237787" cy="384048"/>
           </a:xfrm>
           <a:prstGeom prst="rect">
             <a:avLst/>
@@ -8438,17 +10017,14 @@
           <a:ln/>
         </p:spPr>
         <p:txBody>
-          <a:bodyPr wrap="square" lIns="0" tIns="0" rIns="0" bIns="0" rtlCol="0" anchor="t"/>
+          <a:bodyPr wrap="square" lIns="0" tIns="0" rIns="0" bIns="0" rtlCol="0" anchor="ctr"/>
           <a:lstStyle/>
           <a:p>
             <a:pPr indent="0" marL="0">
-              <a:lnSpc>
-                <a:spcPct val="120000"/>
-              </a:lnSpc>
-              <a:buNone/>
-            </a:pPr>
-            <a:r>
-              <a:rPr lang="en-US" sz="1300" b="1" dirty="0">
+              <a:buNone/>
+            </a:pPr>
+            <a:r>
+              <a:rPr lang="en-US" sz="1400" b="1" dirty="0">
                 <a:solidFill>
                   <a:srgbClr val="0A3D23"/>
                 </a:solidFill>
@@ -8456,22 +10032,22 @@
                 <a:ea typeface="Yu Gothic" pitchFamily="34" charset="-122"/>
                 <a:cs typeface="Yu Gothic" pitchFamily="34" charset="-120"/>
               </a:rPr>
-              <a:t>そのまま使い続けられる</a:t>
-            </a:r>
-            <a:endParaRPr lang="en-US" sz="1300" dirty="0"/>
-          </a:p>
-        </p:txBody>
-      </p:sp>
-      <p:sp>
-        <p:nvSpPr>
-          <p:cNvPr id="12" name="Shape 8"/>
-          <p:cNvSpPr/>
-          <p:nvPr/>
-        </p:nvSpPr>
-        <p:spPr>
-          <a:xfrm>
-            <a:off x="934517" y="3096158"/>
-            <a:ext cx="2892247" cy="10058"/>
+              <a:t>当社が撤去するもの</a:t>
+            </a:r>
+            <a:endParaRPr lang="en-US" sz="1400" dirty="0"/>
+          </a:p>
+        </p:txBody>
+      </p:sp>
+      <p:sp>
+        <p:nvSpPr>
+          <p:cNvPr id="23" name="Shape 15"/>
+          <p:cNvSpPr/>
+          <p:nvPr/>
+        </p:nvSpPr>
+        <p:spPr>
+          <a:xfrm>
+            <a:off x="6562192" y="2364638"/>
+            <a:ext cx="4694987" cy="10058"/>
           </a:xfrm>
           <a:prstGeom prst="rect">
             <a:avLst/>
@@ -8482,93 +10058,24 @@
           <a:ln/>
         </p:spPr>
       </p:sp>
-      <p:sp>
-        <p:nvSpPr>
-          <p:cNvPr id="13" name="Text 9"/>
-          <p:cNvSpPr/>
-          <p:nvPr/>
-        </p:nvSpPr>
-        <p:spPr>
-          <a:xfrm>
-            <a:off x="934517" y="3242462"/>
-            <a:ext cx="2892247" cy="1280160"/>
-          </a:xfrm>
-          <a:prstGeom prst="rect">
-            <a:avLst/>
-          </a:prstGeom>
-          <a:noFill/>
-          <a:ln/>
-        </p:spPr>
-        <p:txBody>
-          <a:bodyPr wrap="square" lIns="0" tIns="0" rIns="0" bIns="0" rtlCol="0" anchor="t"/>
-          <a:lstStyle/>
-          <a:p>
-            <a:pPr indent="0" marL="0">
-              <a:lnSpc>
-                <a:spcPct val="140000"/>
-              </a:lnSpc>
-              <a:buNone/>
-            </a:pPr>
-            <a:r>
-              <a:rPr lang="en-US" sz="1000" dirty="0">
-                <a:solidFill>
-                  <a:srgbClr val="4B5550"/>
-                </a:solidFill>
-                <a:latin typeface="Yu Gothic" pitchFamily="34" charset="0"/>
-                <a:ea typeface="Yu Gothic" pitchFamily="34" charset="-122"/>
-                <a:cs typeface="Yu Gothic" pitchFamily="34" charset="-120"/>
-              </a:rPr>
-              <a:t>トライアル後に継続される場合、什器の入れ替えも買い直しも発生しません。設えを変えずに運営を続けられます。</a:t>
-            </a:r>
-            <a:endParaRPr lang="en-US" sz="1000" dirty="0"/>
-          </a:p>
-        </p:txBody>
-      </p:sp>
-      <p:sp>
-        <p:nvSpPr>
-          <p:cNvPr id="14" name="Shape 10"/>
-          <p:cNvSpPr/>
-          <p:nvPr/>
-        </p:nvSpPr>
-        <p:spPr>
-          <a:xfrm>
-            <a:off x="4375404" y="1651406"/>
-            <a:ext cx="3440887" cy="3017520"/>
-          </a:xfrm>
-          <a:prstGeom prst="roundRect">
-            <a:avLst>
-              <a:gd name="adj" fmla="val 1818"/>
-            </a:avLst>
-          </a:prstGeom>
-          <a:solidFill>
-            <a:srgbClr val="FFFFFF"/>
-          </a:solidFill>
-          <a:ln w="9525">
-            <a:solidFill>
-              <a:srgbClr val="EFEAE0"/>
-            </a:solidFill>
-            <a:prstDash val="solid"/>
-          </a:ln>
-        </p:spPr>
-      </p:sp>
       <p:pic>
         <p:nvPicPr>
-          <p:cNvPr id="15" name="Image 2" descr="/home/user/suzuki-ceo/selfcafe-miraiya-trial-deck/assets/icons/LuShieldCheck-green.png">    </p:cNvPr>
+          <p:cNvPr id="24" name="Image 6" descr="/home/user/suzuki-ceo/selfcafe-miraiya-trial-deck/assets/icons/LuX-muted.png">    </p:cNvPr>
           <p:cNvPicPr>
             <a:picLocks noChangeAspect="1"/>
           </p:cNvPicPr>
           <p:nvPr/>
         </p:nvPicPr>
         <p:blipFill>
-          <a:blip r:embed="rId3"/>
+          <a:blip r:embed="rId7"/>
           <a:stretch>
             <a:fillRect/>
           </a:stretch>
         </p:blipFill>
         <p:spPr>
           <a:xfrm>
-            <a:off x="4649724" y="1925726"/>
-            <a:ext cx="365760" cy="365760"/>
+            <a:off x="6580480" y="2593238"/>
+            <a:ext cx="182880" cy="182880"/>
           </a:xfrm>
           <a:prstGeom prst="rect">
             <a:avLst/>
@@ -8577,14 +10084,14 @@
       </p:pic>
       <p:sp>
         <p:nvSpPr>
-          <p:cNvPr id="16" name="Text 11"/>
-          <p:cNvSpPr/>
-          <p:nvPr/>
-        </p:nvSpPr>
-        <p:spPr>
-          <a:xfrm>
-            <a:off x="4649724" y="2456078"/>
-            <a:ext cx="2892247" cy="548640"/>
+          <p:cNvPr id="25" name="Text 16"/>
+          <p:cNvSpPr/>
+          <p:nvPr/>
+        </p:nvSpPr>
+        <p:spPr>
+          <a:xfrm>
+            <a:off x="6909664" y="2529230"/>
+            <a:ext cx="4329227" cy="310896"/>
           </a:xfrm>
           <a:prstGeom prst="rect">
             <a:avLst/>
@@ -8593,17 +10100,14 @@
           <a:ln/>
         </p:spPr>
         <p:txBody>
-          <a:bodyPr wrap="square" lIns="0" tIns="0" rIns="0" bIns="0" rtlCol="0" anchor="t"/>
+          <a:bodyPr wrap="square" lIns="0" tIns="0" rIns="0" bIns="0" rtlCol="0" anchor="ctr"/>
           <a:lstStyle/>
           <a:p>
             <a:pPr indent="0" marL="0">
-              <a:lnSpc>
-                <a:spcPct val="120000"/>
-              </a:lnSpc>
-              <a:buNone/>
-            </a:pPr>
-            <a:r>
-              <a:rPr lang="en-US" sz="1300" b="1" dirty="0">
+              <a:buNone/>
+            </a:pPr>
+            <a:r>
+              <a:rPr lang="en-US" sz="1100" dirty="0">
                 <a:solidFill>
                   <a:srgbClr val="0A3D23"/>
                 </a:solidFill>
@@ -8611,119 +10115,30 @@
                 <a:ea typeface="Yu Gothic" pitchFamily="34" charset="-122"/>
                 <a:cs typeface="Yu Gothic" pitchFamily="34" charset="-120"/>
               </a:rPr>
-              <a:t>御社の資産として残る</a:t>
-            </a:r>
-            <a:endParaRPr lang="en-US" sz="1300" dirty="0"/>
-          </a:p>
-        </p:txBody>
-      </p:sp>
-      <p:sp>
-        <p:nvSpPr>
-          <p:cNvPr id="17" name="Shape 12"/>
-          <p:cNvSpPr/>
-          <p:nvPr/>
-        </p:nvSpPr>
-        <p:spPr>
-          <a:xfrm>
-            <a:off x="4649724" y="3096158"/>
-            <a:ext cx="2892247" cy="10058"/>
-          </a:xfrm>
-          <a:prstGeom prst="rect">
-            <a:avLst/>
-          </a:prstGeom>
-          <a:solidFill>
-            <a:srgbClr val="EFEAE0"/>
-          </a:solidFill>
-          <a:ln/>
-        </p:spPr>
-      </p:sp>
-      <p:sp>
-        <p:nvSpPr>
-          <p:cNvPr id="18" name="Text 13"/>
-          <p:cNvSpPr/>
-          <p:nvPr/>
-        </p:nvSpPr>
-        <p:spPr>
-          <a:xfrm>
-            <a:off x="4649724" y="3242462"/>
-            <a:ext cx="2892247" cy="1280160"/>
-          </a:xfrm>
-          <a:prstGeom prst="rect">
-            <a:avLst/>
-          </a:prstGeom>
-          <a:noFill/>
-          <a:ln/>
-        </p:spPr>
-        <p:txBody>
-          <a:bodyPr wrap="square" lIns="0" tIns="0" rIns="0" bIns="0" rtlCol="0" anchor="t"/>
-          <a:lstStyle/>
-          <a:p>
-            <a:pPr indent="0" marL="0">
-              <a:lnSpc>
-                <a:spcPct val="140000"/>
-              </a:lnSpc>
-              <a:buNone/>
-            </a:pPr>
-            <a:r>
-              <a:rPr lang="en-US" sz="1000" dirty="0">
-                <a:solidFill>
-                  <a:srgbClr val="4B5550"/>
-                </a:solidFill>
-                <a:latin typeface="Yu Gothic" pitchFamily="34" charset="0"/>
-                <a:ea typeface="Yu Gothic" pitchFamily="34" charset="-122"/>
-                <a:cs typeface="Yu Gothic" pitchFamily="34" charset="-120"/>
-              </a:rPr>
-              <a:t>当社所有にすると、契約が終わる際に引き上げか買取かの整理が必要になります。はじめから御社ご所有であれば、その論点自体がなくなります。</a:t>
-            </a:r>
-            <a:endParaRPr lang="en-US" sz="1000" dirty="0"/>
-          </a:p>
-        </p:txBody>
-      </p:sp>
-      <p:sp>
-        <p:nvSpPr>
-          <p:cNvPr id="19" name="Shape 14"/>
-          <p:cNvSpPr/>
-          <p:nvPr/>
-        </p:nvSpPr>
-        <p:spPr>
-          <a:xfrm>
-            <a:off x="8090611" y="1651406"/>
-            <a:ext cx="3440887" cy="3017520"/>
-          </a:xfrm>
-          <a:prstGeom prst="roundRect">
-            <a:avLst>
-              <a:gd name="adj" fmla="val 1818"/>
-            </a:avLst>
-          </a:prstGeom>
-          <a:solidFill>
-            <a:srgbClr val="FFFFFF"/>
-          </a:solidFill>
-          <a:ln w="9525">
-            <a:solidFill>
-              <a:srgbClr val="EFEAE0"/>
-            </a:solidFill>
-            <a:prstDash val="solid"/>
-          </a:ln>
-        </p:spPr>
+              <a:t>ドリンクマシン</a:t>
+            </a:r>
+            <a:endParaRPr lang="en-US" sz="1100" dirty="0"/>
+          </a:p>
+        </p:txBody>
       </p:sp>
       <p:pic>
         <p:nvPicPr>
-          <p:cNvPr id="20" name="Image 3" descr="/home/user/suzuki-ceo/selfcafe-miraiya-trial-deck/assets/icons/LuPenLine-green.png">    </p:cNvPr>
+          <p:cNvPr id="26" name="Image 7" descr="/home/user/suzuki-ceo/selfcafe-miraiya-trial-deck/assets/icons/LuX-muted.png">    </p:cNvPr>
           <p:cNvPicPr>
             <a:picLocks noChangeAspect="1"/>
           </p:cNvPicPr>
           <p:nvPr/>
         </p:nvPicPr>
         <p:blipFill>
-          <a:blip r:embed="rId4"/>
+          <a:blip r:embed="rId8"/>
           <a:stretch>
             <a:fillRect/>
           </a:stretch>
         </p:blipFill>
         <p:spPr>
           <a:xfrm>
-            <a:off x="8364931" y="1925726"/>
-            <a:ext cx="365760" cy="365760"/>
+            <a:off x="6580480" y="3013862"/>
+            <a:ext cx="182880" cy="182880"/>
           </a:xfrm>
           <a:prstGeom prst="rect">
             <a:avLst/>
@@ -8732,14 +10147,14 @@
       </p:pic>
       <p:sp>
         <p:nvSpPr>
-          <p:cNvPr id="21" name="Text 15"/>
-          <p:cNvSpPr/>
-          <p:nvPr/>
-        </p:nvSpPr>
-        <p:spPr>
-          <a:xfrm>
-            <a:off x="8364931" y="2456078"/>
-            <a:ext cx="2892247" cy="548640"/>
+          <p:cNvPr id="27" name="Text 17"/>
+          <p:cNvSpPr/>
+          <p:nvPr/>
+        </p:nvSpPr>
+        <p:spPr>
+          <a:xfrm>
+            <a:off x="6909664" y="2949854"/>
+            <a:ext cx="4329227" cy="310896"/>
           </a:xfrm>
           <a:prstGeom prst="rect">
             <a:avLst/>
@@ -8748,17 +10163,14 @@
           <a:ln/>
         </p:spPr>
         <p:txBody>
-          <a:bodyPr wrap="square" lIns="0" tIns="0" rIns="0" bIns="0" rtlCol="0" anchor="t"/>
+          <a:bodyPr wrap="square" lIns="0" tIns="0" rIns="0" bIns="0" rtlCol="0" anchor="ctr"/>
           <a:lstStyle/>
           <a:p>
             <a:pPr indent="0" marL="0">
-              <a:lnSpc>
-                <a:spcPct val="120000"/>
-              </a:lnSpc>
-              <a:buNone/>
-            </a:pPr>
-            <a:r>
-              <a:rPr lang="en-US" sz="1300" b="1" dirty="0">
+              <a:buNone/>
+            </a:pPr>
+            <a:r>
+              <a:rPr lang="en-US" sz="1100" dirty="0">
                 <a:solidFill>
                   <a:srgbClr val="0A3D23"/>
                 </a:solidFill>
@@ -8766,119 +10178,30 @@
                 <a:ea typeface="Yu Gothic" pitchFamily="34" charset="-122"/>
                 <a:cs typeface="Yu Gothic" pitchFamily="34" charset="-120"/>
               </a:rPr>
-              <a:t>仕様を御社で選べる</a:t>
-            </a:r>
-            <a:endParaRPr lang="en-US" sz="1300" dirty="0"/>
-          </a:p>
-        </p:txBody>
-      </p:sp>
-      <p:sp>
-        <p:nvSpPr>
-          <p:cNvPr id="22" name="Shape 16"/>
-          <p:cNvSpPr/>
-          <p:nvPr/>
-        </p:nvSpPr>
-        <p:spPr>
-          <a:xfrm>
-            <a:off x="8364931" y="3096158"/>
-            <a:ext cx="2892247" cy="10058"/>
-          </a:xfrm>
-          <a:prstGeom prst="rect">
-            <a:avLst/>
-          </a:prstGeom>
-          <a:solidFill>
-            <a:srgbClr val="EFEAE0"/>
-          </a:solidFill>
-          <a:ln/>
-        </p:spPr>
-      </p:sp>
-      <p:sp>
-        <p:nvSpPr>
-          <p:cNvPr id="23" name="Text 17"/>
-          <p:cNvSpPr/>
-          <p:nvPr/>
-        </p:nvSpPr>
-        <p:spPr>
-          <a:xfrm>
-            <a:off x="8364931" y="3242462"/>
-            <a:ext cx="2892247" cy="1280160"/>
-          </a:xfrm>
-          <a:prstGeom prst="rect">
-            <a:avLst/>
-          </a:prstGeom>
-          <a:noFill/>
-          <a:ln/>
-        </p:spPr>
-        <p:txBody>
-          <a:bodyPr wrap="square" lIns="0" tIns="0" rIns="0" bIns="0" rtlCol="0" anchor="t"/>
-          <a:lstStyle/>
-          <a:p>
-            <a:pPr indent="0" marL="0">
-              <a:lnSpc>
-                <a:spcPct val="140000"/>
-              </a:lnSpc>
-              <a:buNone/>
-            </a:pPr>
-            <a:r>
-              <a:rPr lang="en-US" sz="1000" dirty="0">
-                <a:solidFill>
-                  <a:srgbClr val="4B5550"/>
-                </a:solidFill>
-                <a:latin typeface="Yu Gothic" pitchFamily="34" charset="0"/>
-                <a:ea typeface="Yu Gothic" pitchFamily="34" charset="-122"/>
-                <a:cs typeface="Yu Gothic" pitchFamily="34" charset="-120"/>
-              </a:rPr>
-              <a:t>テーブル・椅子・植栽は店舗の雰囲気を大きく左右します。書店の売場に合わせて御社側でお選びいただけます。</a:t>
-            </a:r>
-            <a:endParaRPr lang="en-US" sz="1000" dirty="0"/>
-          </a:p>
-        </p:txBody>
-      </p:sp>
-      <p:sp>
-        <p:nvSpPr>
-          <p:cNvPr id="24" name="Shape 18"/>
-          <p:cNvSpPr/>
-          <p:nvPr/>
-        </p:nvSpPr>
-        <p:spPr>
-          <a:xfrm>
-            <a:off x="660197" y="4809744"/>
-            <a:ext cx="10871302" cy="914400"/>
-          </a:xfrm>
-          <a:prstGeom prst="roundRect">
-            <a:avLst>
-              <a:gd name="adj" fmla="val 6000"/>
-            </a:avLst>
-          </a:prstGeom>
-          <a:solidFill>
-            <a:srgbClr val="F1F8F3"/>
-          </a:solidFill>
-          <a:ln w="9525">
-            <a:solidFill>
-              <a:srgbClr val="D2E7DA"/>
-            </a:solidFill>
-            <a:prstDash val="solid"/>
-          </a:ln>
-        </p:spPr>
+              <a:t>決済端末</a:t>
+            </a:r>
+            <a:endParaRPr lang="en-US" sz="1100" dirty="0"/>
+          </a:p>
+        </p:txBody>
       </p:sp>
       <p:pic>
         <p:nvPicPr>
-          <p:cNvPr id="25" name="Image 4" descr="/home/user/suzuki-ceo/selfcafe-miraiya-trial-deck/assets/icons/LuMessagesSquare-green.png">    </p:cNvPr>
+          <p:cNvPr id="28" name="Image 8" descr="/home/user/suzuki-ceo/selfcafe-miraiya-trial-deck/assets/icons/LuX-muted.png">    </p:cNvPr>
           <p:cNvPicPr>
             <a:picLocks noChangeAspect="1"/>
           </p:cNvPicPr>
           <p:nvPr/>
         </p:nvPicPr>
         <p:blipFill>
-          <a:blip r:embed="rId5"/>
+          <a:blip r:embed="rId9"/>
           <a:stretch>
             <a:fillRect/>
           </a:stretch>
         </p:blipFill>
         <p:spPr>
           <a:xfrm>
-            <a:off x="971093" y="5084064"/>
-            <a:ext cx="365760" cy="365760"/>
+            <a:off x="6580480" y="3434486"/>
+            <a:ext cx="182880" cy="182880"/>
           </a:xfrm>
           <a:prstGeom prst="rect">
             <a:avLst/>
@@ -8887,14 +10210,14 @@
       </p:pic>
       <p:sp>
         <p:nvSpPr>
-          <p:cNvPr id="26" name="Text 19"/>
-          <p:cNvSpPr/>
-          <p:nvPr/>
-        </p:nvSpPr>
-        <p:spPr>
-          <a:xfrm>
-            <a:off x="1501445" y="4809744"/>
-            <a:ext cx="9682582" cy="914400"/>
+          <p:cNvPr id="29" name="Text 18"/>
+          <p:cNvSpPr/>
+          <p:nvPr/>
+        </p:nvSpPr>
+        <p:spPr>
+          <a:xfrm>
+            <a:off x="6909664" y="3370478"/>
+            <a:ext cx="4329227" cy="310896"/>
           </a:xfrm>
           <a:prstGeom prst="rect">
             <a:avLst/>
@@ -8907,13 +10230,10 @@
           <a:lstStyle/>
           <a:p>
             <a:pPr indent="0" marL="0">
-              <a:lnSpc>
-                <a:spcPct val="135000"/>
-              </a:lnSpc>
-              <a:buNone/>
-            </a:pPr>
-            <a:r>
-              <a:rPr lang="en-US" sz="1050" dirty="0">
+              <a:buNone/>
+            </a:pPr>
+            <a:r>
+              <a:rPr lang="en-US" sz="1100" dirty="0">
                 <a:solidFill>
                   <a:srgbClr val="0A3D23"/>
                 </a:solidFill>
@@ -8921,22 +10241,22 @@
                 <a:ea typeface="Yu Gothic" pitchFamily="34" charset="-122"/>
                 <a:cs typeface="Yu Gothic" pitchFamily="34" charset="-120"/>
               </a:rPr>
-              <a:t>当社側で家具・什器を手配することも可能です。その場合は当社の資産となるため、トライアル終了時に引き上げ・買取のご相談が必要になります。ご希望があればその形でもお受けします。</a:t>
-            </a:r>
-            <a:endParaRPr lang="en-US" sz="1050" dirty="0"/>
-          </a:p>
-        </p:txBody>
-      </p:sp>
-      <p:sp>
-        <p:nvSpPr>
-          <p:cNvPr id="27" name="Text 20"/>
-          <p:cNvSpPr/>
-          <p:nvPr/>
-        </p:nvSpPr>
-        <p:spPr>
-          <a:xfrm>
-            <a:off x="660197" y="5888736"/>
-            <a:ext cx="10871302" cy="182880"/>
+              <a:t>防犯カメラ・通信機器</a:t>
+            </a:r>
+            <a:endParaRPr lang="en-US" sz="1100" dirty="0"/>
+          </a:p>
+        </p:txBody>
+      </p:sp>
+      <p:sp>
+        <p:nvSpPr>
+          <p:cNvPr id="30" name="Text 19"/>
+          <p:cNvSpPr/>
+          <p:nvPr/>
+        </p:nvSpPr>
+        <p:spPr>
+          <a:xfrm>
+            <a:off x="6562192" y="3919118"/>
+            <a:ext cx="4694987" cy="512064"/>
           </a:xfrm>
           <a:prstGeom prst="rect">
             <a:avLst/>
@@ -8945,22 +10265,172 @@
           <a:ln/>
         </p:spPr>
         <p:txBody>
-          <a:bodyPr wrap="square" lIns="0" tIns="0" rIns="0" bIns="0" rtlCol="0" anchor="ctr"/>
+          <a:bodyPr wrap="square" lIns="0" tIns="0" rIns="0" bIns="0" rtlCol="0" anchor="t"/>
           <a:lstStyle/>
           <a:p>
             <a:pPr indent="0" marL="0">
-              <a:buNone/>
-            </a:pPr>
-            <a:r>
-              <a:rPr lang="en-US" sz="850" dirty="0">
-                <a:solidFill>
-                  <a:srgbClr val="A8B0AA"/>
+              <a:lnSpc>
+                <a:spcPct val="130000"/>
+              </a:lnSpc>
+              <a:buNone/>
+            </a:pPr>
+            <a:r>
+              <a:rPr lang="en-US" sz="950" dirty="0">
+                <a:solidFill>
+                  <a:srgbClr val="7E8882"/>
                 </a:solidFill>
                 <a:latin typeface="Yu Gothic" pitchFamily="34" charset="0"/>
                 <a:ea typeface="Yu Gothic" pitchFamily="34" charset="-122"/>
                 <a:cs typeface="Yu Gothic" pitchFamily="34" charset="-120"/>
               </a:rPr>
-              <a:t>※ 什器の概算費用は、レイアウト確定後にお見積りをお出しします。既存什器を再利用できる場合は、その分ご負担が減ります。</a:t>
+              <a:t>撤去費用は当社が負担します。跡の補修も当社で対応します。</a:t>
+            </a:r>
+            <a:endParaRPr lang="en-US" sz="950" dirty="0"/>
+          </a:p>
+        </p:txBody>
+      </p:sp>
+      <p:sp>
+        <p:nvSpPr>
+          <p:cNvPr id="31" name="Shape 20"/>
+          <p:cNvSpPr/>
+          <p:nvPr/>
+        </p:nvSpPr>
+        <p:spPr>
+          <a:xfrm>
+            <a:off x="660197" y="4718304"/>
+            <a:ext cx="10871302" cy="1005840"/>
+          </a:xfrm>
+          <a:prstGeom prst="roundRect">
+            <a:avLst>
+              <a:gd name="adj" fmla="val 5455"/>
+            </a:avLst>
+          </a:prstGeom>
+          <a:solidFill>
+            <a:srgbClr val="0C5230"/>
+          </a:solidFill>
+          <a:ln/>
+        </p:spPr>
+      </p:sp>
+      <p:pic>
+        <p:nvPicPr>
+          <p:cNvPr id="32" name="Image 9" descr="/home/user/suzuki-ceo/selfcafe-miraiya-trial-deck/assets/icons/LuBadgeCheck-pale.png">    </p:cNvPr>
+          <p:cNvPicPr>
+            <a:picLocks noChangeAspect="1"/>
+          </p:cNvPicPr>
+          <p:nvPr/>
+        </p:nvPicPr>
+        <p:blipFill>
+          <a:blip r:embed="rId10"/>
+          <a:stretch>
+            <a:fillRect/>
+          </a:stretch>
+        </p:blipFill>
+        <p:spPr>
+          <a:xfrm>
+            <a:off x="1007669" y="4992624"/>
+            <a:ext cx="402336" cy="402336"/>
+          </a:xfrm>
+          <a:prstGeom prst="rect">
+            <a:avLst/>
+          </a:prstGeom>
+        </p:spPr>
+      </p:pic>
+      <p:sp>
+        <p:nvSpPr>
+          <p:cNvPr id="33" name="Text 21"/>
+          <p:cNvSpPr/>
+          <p:nvPr/>
+        </p:nvSpPr>
+        <p:spPr>
+          <a:xfrm>
+            <a:off x="1574597" y="4718304"/>
+            <a:ext cx="9591142" cy="1005840"/>
+          </a:xfrm>
+          <a:prstGeom prst="rect">
+            <a:avLst/>
+          </a:prstGeom>
+          <a:noFill/>
+          <a:ln/>
+        </p:spPr>
+        <p:txBody>
+          <a:bodyPr wrap="square" lIns="0" tIns="0" rIns="0" bIns="0" rtlCol="0" anchor="ctr"/>
+          <a:lstStyle/>
+          <a:p>
+            <a:pPr indent="0" marL="0">
+              <a:lnSpc>
+                <a:spcPct val="125000"/>
+              </a:lnSpc>
+              <a:buNone/>
+            </a:pPr>
+            <a:r>
+              <a:rPr lang="en-US" sz="1400" b="1" dirty="0">
+                <a:solidFill>
+                  <a:srgbClr val="FFFFFF"/>
+                </a:solidFill>
+                <a:latin typeface="Yu Gothic" pitchFamily="34" charset="0"/>
+                <a:ea typeface="Yu Gothic" pitchFamily="34" charset="-122"/>
+                <a:cs typeface="Yu Gothic" pitchFamily="34" charset="-120"/>
+              </a:rPr>
+              <a:t>トライアル後は、基本そのまま残す形を想定しています。</a:t>
+            </a:r>
+            <a:endParaRPr lang="en-US" sz="1400" dirty="0"/>
+          </a:p>
+          <a:p>
+            <a:pPr indent="0" marL="0">
+              <a:lnSpc>
+                <a:spcPct val="125000"/>
+              </a:lnSpc>
+              <a:buNone/>
+            </a:pPr>
+            <a:r>
+              <a:rPr lang="en-US" sz="1100" dirty="0">
+                <a:solidFill>
+                  <a:srgbClr val="AFC2B8"/>
+                </a:solidFill>
+                <a:latin typeface="Yu Gothic" pitchFamily="34" charset="0"/>
+                <a:ea typeface="Yu Gothic" pitchFamily="34" charset="-122"/>
+                <a:cs typeface="Yu Gothic" pitchFamily="34" charset="-120"/>
+              </a:rPr>
+              <a:t>内装も什器も残るため、継続いただく場合は追加の工事なくそのまま運営を続けられます。</a:t>
+            </a:r>
+            <a:endParaRPr lang="en-US" sz="1400" dirty="0"/>
+          </a:p>
+        </p:txBody>
+      </p:sp>
+      <p:sp>
+        <p:nvSpPr>
+          <p:cNvPr id="34" name="Text 22"/>
+          <p:cNvSpPr/>
+          <p:nvPr/>
+        </p:nvSpPr>
+        <p:spPr>
+          <a:xfrm>
+            <a:off x="660197" y="5888736"/>
+            <a:ext cx="10871302" cy="182880"/>
+          </a:xfrm>
+          <a:prstGeom prst="rect">
+            <a:avLst/>
+          </a:prstGeom>
+          <a:noFill/>
+          <a:ln/>
+        </p:spPr>
+        <p:txBody>
+          <a:bodyPr wrap="square" lIns="0" tIns="0" rIns="0" bIns="0" rtlCol="0" anchor="ctr"/>
+          <a:lstStyle/>
+          <a:p>
+            <a:pPr indent="0" marL="0">
+              <a:buNone/>
+            </a:pPr>
+            <a:r>
+              <a:rPr lang="en-US" sz="850" dirty="0">
+                <a:solidFill>
+                  <a:srgbClr val="A8B0AA"/>
+                </a:solidFill>
+                <a:latin typeface="Yu Gothic" pitchFamily="34" charset="0"/>
+                <a:ea typeface="Yu Gothic" pitchFamily="34" charset="-122"/>
+                <a:cs typeface="Yu Gothic" pitchFamily="34" charset="-120"/>
+              </a:rPr>
+              <a:t>※ 撤去の範囲・時期は事前にお打ち合わせのうえ決定します。什器の再利用可否は現地確認時にご相談させてください。</a:t>
             </a:r>
             <a:endParaRPr lang="en-US" sz="850" dirty="0"/>
           </a:p>
@@ -9062,7 +10532,7 @@
                 <a:ea typeface="Yu Gothic" pitchFamily="34" charset="-122"/>
                 <a:cs typeface="Yu Gothic" pitchFamily="34" charset="-120"/>
               </a:rPr>
-              <a:t>   今後の進め方</a:t>
+              <a:t>   家具・什器の考え方</a:t>
             </a:r>
             <a:endParaRPr lang="en-US" sz="1050" dirty="0"/>
           </a:p>
@@ -9101,7 +10571,7 @@
                 <a:ea typeface="Yu Gothic" pitchFamily="34" charset="-122"/>
                 <a:cs typeface="Yu Gothic" pitchFamily="34" charset="-120"/>
               </a:rPr>
-              <a:t>現地確認から、最短2〜3ヶ月で開始できます。</a:t>
+              <a:t>家具は御社ご所有のほうがよい、と判断しました。</a:t>
             </a:r>
             <a:endParaRPr lang="en-US" sz="2900" dirty="0"/>
           </a:p>
@@ -9140,7 +10610,7 @@
                 <a:ea typeface="Yu Gothic" pitchFamily="34" charset="-122"/>
                 <a:cs typeface="Yu Gothic" pitchFamily="34" charset="-120"/>
               </a:rPr>
-              <a:t>まずは対象店舗と期間のすり合わせ、現地確認からお願いできればと存じます。</a:t>
+              <a:t>トライアル後もそのまま残す前提で考えると、御社の資産にしておくのが最も無駄がありません。</a:t>
             </a:r>
             <a:endParaRPr lang="en-US" sz="1250" dirty="0"/>
           </a:p>
@@ -9243,6 +10713,885 @@
                 <a:cs typeface="Arial" pitchFamily="34" charset="-120"/>
               </a:rPr>
               <a:t>07</a:t>
+            </a:r>
+            <a:endParaRPr lang="en-US" sz="1000" dirty="0"/>
+          </a:p>
+        </p:txBody>
+      </p:sp>
+      <p:sp>
+        <p:nvSpPr>
+          <p:cNvPr id="9" name="Shape 6"/>
+          <p:cNvSpPr/>
+          <p:nvPr/>
+        </p:nvSpPr>
+        <p:spPr>
+          <a:xfrm>
+            <a:off x="660197" y="1651406"/>
+            <a:ext cx="3440887" cy="3017520"/>
+          </a:xfrm>
+          <a:prstGeom prst="roundRect">
+            <a:avLst>
+              <a:gd name="adj" fmla="val 1818"/>
+            </a:avLst>
+          </a:prstGeom>
+          <a:solidFill>
+            <a:srgbClr val="FFFFFF"/>
+          </a:solidFill>
+          <a:ln w="9525">
+            <a:solidFill>
+              <a:srgbClr val="EFEAE0"/>
+            </a:solidFill>
+            <a:prstDash val="solid"/>
+          </a:ln>
+        </p:spPr>
+      </p:sp>
+      <p:pic>
+        <p:nvPicPr>
+          <p:cNvPr id="10" name="Image 1" descr="/home/user/suzuki-ceo/selfcafe-miraiya-trial-deck/assets/icons/LuStore-green.png">    </p:cNvPr>
+          <p:cNvPicPr>
+            <a:picLocks noChangeAspect="1"/>
+          </p:cNvPicPr>
+          <p:nvPr/>
+        </p:nvPicPr>
+        <p:blipFill>
+          <a:blip r:embed="rId2"/>
+          <a:stretch>
+            <a:fillRect/>
+          </a:stretch>
+        </p:blipFill>
+        <p:spPr>
+          <a:xfrm>
+            <a:off x="934517" y="1925726"/>
+            <a:ext cx="365760" cy="365760"/>
+          </a:xfrm>
+          <a:prstGeom prst="rect">
+            <a:avLst/>
+          </a:prstGeom>
+        </p:spPr>
+      </p:pic>
+      <p:sp>
+        <p:nvSpPr>
+          <p:cNvPr id="11" name="Text 7"/>
+          <p:cNvSpPr/>
+          <p:nvPr/>
+        </p:nvSpPr>
+        <p:spPr>
+          <a:xfrm>
+            <a:off x="934517" y="2456078"/>
+            <a:ext cx="2892247" cy="548640"/>
+          </a:xfrm>
+          <a:prstGeom prst="rect">
+            <a:avLst/>
+          </a:prstGeom>
+          <a:noFill/>
+          <a:ln/>
+        </p:spPr>
+        <p:txBody>
+          <a:bodyPr wrap="square" lIns="0" tIns="0" rIns="0" bIns="0" rtlCol="0" anchor="t"/>
+          <a:lstStyle/>
+          <a:p>
+            <a:pPr indent="0" marL="0">
+              <a:lnSpc>
+                <a:spcPct val="120000"/>
+              </a:lnSpc>
+              <a:buNone/>
+            </a:pPr>
+            <a:r>
+              <a:rPr lang="en-US" sz="1300" b="1" dirty="0">
+                <a:solidFill>
+                  <a:srgbClr val="0A3D23"/>
+                </a:solidFill>
+                <a:latin typeface="Yu Gothic" pitchFamily="34" charset="0"/>
+                <a:ea typeface="Yu Gothic" pitchFamily="34" charset="-122"/>
+                <a:cs typeface="Yu Gothic" pitchFamily="34" charset="-120"/>
+              </a:rPr>
+              <a:t>そのまま使い続けられる</a:t>
+            </a:r>
+            <a:endParaRPr lang="en-US" sz="1300" dirty="0"/>
+          </a:p>
+        </p:txBody>
+      </p:sp>
+      <p:sp>
+        <p:nvSpPr>
+          <p:cNvPr id="12" name="Shape 8"/>
+          <p:cNvSpPr/>
+          <p:nvPr/>
+        </p:nvSpPr>
+        <p:spPr>
+          <a:xfrm>
+            <a:off x="934517" y="3096158"/>
+            <a:ext cx="2892247" cy="10058"/>
+          </a:xfrm>
+          <a:prstGeom prst="rect">
+            <a:avLst/>
+          </a:prstGeom>
+          <a:solidFill>
+            <a:srgbClr val="EFEAE0"/>
+          </a:solidFill>
+          <a:ln/>
+        </p:spPr>
+      </p:sp>
+      <p:sp>
+        <p:nvSpPr>
+          <p:cNvPr id="13" name="Text 9"/>
+          <p:cNvSpPr/>
+          <p:nvPr/>
+        </p:nvSpPr>
+        <p:spPr>
+          <a:xfrm>
+            <a:off x="934517" y="3242462"/>
+            <a:ext cx="2892247" cy="1280160"/>
+          </a:xfrm>
+          <a:prstGeom prst="rect">
+            <a:avLst/>
+          </a:prstGeom>
+          <a:noFill/>
+          <a:ln/>
+        </p:spPr>
+        <p:txBody>
+          <a:bodyPr wrap="square" lIns="0" tIns="0" rIns="0" bIns="0" rtlCol="0" anchor="t"/>
+          <a:lstStyle/>
+          <a:p>
+            <a:pPr indent="0" marL="0">
+              <a:lnSpc>
+                <a:spcPct val="140000"/>
+              </a:lnSpc>
+              <a:buNone/>
+            </a:pPr>
+            <a:r>
+              <a:rPr lang="en-US" sz="1000" dirty="0">
+                <a:solidFill>
+                  <a:srgbClr val="4B5550"/>
+                </a:solidFill>
+                <a:latin typeface="Yu Gothic" pitchFamily="34" charset="0"/>
+                <a:ea typeface="Yu Gothic" pitchFamily="34" charset="-122"/>
+                <a:cs typeface="Yu Gothic" pitchFamily="34" charset="-120"/>
+              </a:rPr>
+              <a:t>トライアル後に継続される場合、什器の入れ替えも買い直しも発生しません。設えを変えずに運営を続けられます。</a:t>
+            </a:r>
+            <a:endParaRPr lang="en-US" sz="1000" dirty="0"/>
+          </a:p>
+        </p:txBody>
+      </p:sp>
+      <p:sp>
+        <p:nvSpPr>
+          <p:cNvPr id="14" name="Shape 10"/>
+          <p:cNvSpPr/>
+          <p:nvPr/>
+        </p:nvSpPr>
+        <p:spPr>
+          <a:xfrm>
+            <a:off x="4375404" y="1651406"/>
+            <a:ext cx="3440887" cy="3017520"/>
+          </a:xfrm>
+          <a:prstGeom prst="roundRect">
+            <a:avLst>
+              <a:gd name="adj" fmla="val 1818"/>
+            </a:avLst>
+          </a:prstGeom>
+          <a:solidFill>
+            <a:srgbClr val="FFFFFF"/>
+          </a:solidFill>
+          <a:ln w="9525">
+            <a:solidFill>
+              <a:srgbClr val="EFEAE0"/>
+            </a:solidFill>
+            <a:prstDash val="solid"/>
+          </a:ln>
+        </p:spPr>
+      </p:sp>
+      <p:pic>
+        <p:nvPicPr>
+          <p:cNvPr id="15" name="Image 2" descr="/home/user/suzuki-ceo/selfcafe-miraiya-trial-deck/assets/icons/LuShieldCheck-green.png">    </p:cNvPr>
+          <p:cNvPicPr>
+            <a:picLocks noChangeAspect="1"/>
+          </p:cNvPicPr>
+          <p:nvPr/>
+        </p:nvPicPr>
+        <p:blipFill>
+          <a:blip r:embed="rId3"/>
+          <a:stretch>
+            <a:fillRect/>
+          </a:stretch>
+        </p:blipFill>
+        <p:spPr>
+          <a:xfrm>
+            <a:off x="4649724" y="1925726"/>
+            <a:ext cx="365760" cy="365760"/>
+          </a:xfrm>
+          <a:prstGeom prst="rect">
+            <a:avLst/>
+          </a:prstGeom>
+        </p:spPr>
+      </p:pic>
+      <p:sp>
+        <p:nvSpPr>
+          <p:cNvPr id="16" name="Text 11"/>
+          <p:cNvSpPr/>
+          <p:nvPr/>
+        </p:nvSpPr>
+        <p:spPr>
+          <a:xfrm>
+            <a:off x="4649724" y="2456078"/>
+            <a:ext cx="2892247" cy="548640"/>
+          </a:xfrm>
+          <a:prstGeom prst="rect">
+            <a:avLst/>
+          </a:prstGeom>
+          <a:noFill/>
+          <a:ln/>
+        </p:spPr>
+        <p:txBody>
+          <a:bodyPr wrap="square" lIns="0" tIns="0" rIns="0" bIns="0" rtlCol="0" anchor="t"/>
+          <a:lstStyle/>
+          <a:p>
+            <a:pPr indent="0" marL="0">
+              <a:lnSpc>
+                <a:spcPct val="120000"/>
+              </a:lnSpc>
+              <a:buNone/>
+            </a:pPr>
+            <a:r>
+              <a:rPr lang="en-US" sz="1300" b="1" dirty="0">
+                <a:solidFill>
+                  <a:srgbClr val="0A3D23"/>
+                </a:solidFill>
+                <a:latin typeface="Yu Gothic" pitchFamily="34" charset="0"/>
+                <a:ea typeface="Yu Gothic" pitchFamily="34" charset="-122"/>
+                <a:cs typeface="Yu Gothic" pitchFamily="34" charset="-120"/>
+              </a:rPr>
+              <a:t>御社の資産として残る</a:t>
+            </a:r>
+            <a:endParaRPr lang="en-US" sz="1300" dirty="0"/>
+          </a:p>
+        </p:txBody>
+      </p:sp>
+      <p:sp>
+        <p:nvSpPr>
+          <p:cNvPr id="17" name="Shape 12"/>
+          <p:cNvSpPr/>
+          <p:nvPr/>
+        </p:nvSpPr>
+        <p:spPr>
+          <a:xfrm>
+            <a:off x="4649724" y="3096158"/>
+            <a:ext cx="2892247" cy="10058"/>
+          </a:xfrm>
+          <a:prstGeom prst="rect">
+            <a:avLst/>
+          </a:prstGeom>
+          <a:solidFill>
+            <a:srgbClr val="EFEAE0"/>
+          </a:solidFill>
+          <a:ln/>
+        </p:spPr>
+      </p:sp>
+      <p:sp>
+        <p:nvSpPr>
+          <p:cNvPr id="18" name="Text 13"/>
+          <p:cNvSpPr/>
+          <p:nvPr/>
+        </p:nvSpPr>
+        <p:spPr>
+          <a:xfrm>
+            <a:off x="4649724" y="3242462"/>
+            <a:ext cx="2892247" cy="1280160"/>
+          </a:xfrm>
+          <a:prstGeom prst="rect">
+            <a:avLst/>
+          </a:prstGeom>
+          <a:noFill/>
+          <a:ln/>
+        </p:spPr>
+        <p:txBody>
+          <a:bodyPr wrap="square" lIns="0" tIns="0" rIns="0" bIns="0" rtlCol="0" anchor="t"/>
+          <a:lstStyle/>
+          <a:p>
+            <a:pPr indent="0" marL="0">
+              <a:lnSpc>
+                <a:spcPct val="140000"/>
+              </a:lnSpc>
+              <a:buNone/>
+            </a:pPr>
+            <a:r>
+              <a:rPr lang="en-US" sz="1000" dirty="0">
+                <a:solidFill>
+                  <a:srgbClr val="4B5550"/>
+                </a:solidFill>
+                <a:latin typeface="Yu Gothic" pitchFamily="34" charset="0"/>
+                <a:ea typeface="Yu Gothic" pitchFamily="34" charset="-122"/>
+                <a:cs typeface="Yu Gothic" pitchFamily="34" charset="-120"/>
+              </a:rPr>
+              <a:t>当社所有にすると、契約が終わる際に引き上げか買取かの整理が必要になります。はじめから御社ご所有であれば、その論点自体がなくなります。</a:t>
+            </a:r>
+            <a:endParaRPr lang="en-US" sz="1000" dirty="0"/>
+          </a:p>
+        </p:txBody>
+      </p:sp>
+      <p:sp>
+        <p:nvSpPr>
+          <p:cNvPr id="19" name="Shape 14"/>
+          <p:cNvSpPr/>
+          <p:nvPr/>
+        </p:nvSpPr>
+        <p:spPr>
+          <a:xfrm>
+            <a:off x="8090611" y="1651406"/>
+            <a:ext cx="3440887" cy="3017520"/>
+          </a:xfrm>
+          <a:prstGeom prst="roundRect">
+            <a:avLst>
+              <a:gd name="adj" fmla="val 1818"/>
+            </a:avLst>
+          </a:prstGeom>
+          <a:solidFill>
+            <a:srgbClr val="FFFFFF"/>
+          </a:solidFill>
+          <a:ln w="9525">
+            <a:solidFill>
+              <a:srgbClr val="EFEAE0"/>
+            </a:solidFill>
+            <a:prstDash val="solid"/>
+          </a:ln>
+        </p:spPr>
+      </p:sp>
+      <p:pic>
+        <p:nvPicPr>
+          <p:cNvPr id="20" name="Image 3" descr="/home/user/suzuki-ceo/selfcafe-miraiya-trial-deck/assets/icons/LuPenLine-green.png">    </p:cNvPr>
+          <p:cNvPicPr>
+            <a:picLocks noChangeAspect="1"/>
+          </p:cNvPicPr>
+          <p:nvPr/>
+        </p:nvPicPr>
+        <p:blipFill>
+          <a:blip r:embed="rId4"/>
+          <a:stretch>
+            <a:fillRect/>
+          </a:stretch>
+        </p:blipFill>
+        <p:spPr>
+          <a:xfrm>
+            <a:off x="8364931" y="1925726"/>
+            <a:ext cx="365760" cy="365760"/>
+          </a:xfrm>
+          <a:prstGeom prst="rect">
+            <a:avLst/>
+          </a:prstGeom>
+        </p:spPr>
+      </p:pic>
+      <p:sp>
+        <p:nvSpPr>
+          <p:cNvPr id="21" name="Text 15"/>
+          <p:cNvSpPr/>
+          <p:nvPr/>
+        </p:nvSpPr>
+        <p:spPr>
+          <a:xfrm>
+            <a:off x="8364931" y="2456078"/>
+            <a:ext cx="2892247" cy="548640"/>
+          </a:xfrm>
+          <a:prstGeom prst="rect">
+            <a:avLst/>
+          </a:prstGeom>
+          <a:noFill/>
+          <a:ln/>
+        </p:spPr>
+        <p:txBody>
+          <a:bodyPr wrap="square" lIns="0" tIns="0" rIns="0" bIns="0" rtlCol="0" anchor="t"/>
+          <a:lstStyle/>
+          <a:p>
+            <a:pPr indent="0" marL="0">
+              <a:lnSpc>
+                <a:spcPct val="120000"/>
+              </a:lnSpc>
+              <a:buNone/>
+            </a:pPr>
+            <a:r>
+              <a:rPr lang="en-US" sz="1300" b="1" dirty="0">
+                <a:solidFill>
+                  <a:srgbClr val="0A3D23"/>
+                </a:solidFill>
+                <a:latin typeface="Yu Gothic" pitchFamily="34" charset="0"/>
+                <a:ea typeface="Yu Gothic" pitchFamily="34" charset="-122"/>
+                <a:cs typeface="Yu Gothic" pitchFamily="34" charset="-120"/>
+              </a:rPr>
+              <a:t>仕様を御社で選べる</a:t>
+            </a:r>
+            <a:endParaRPr lang="en-US" sz="1300" dirty="0"/>
+          </a:p>
+        </p:txBody>
+      </p:sp>
+      <p:sp>
+        <p:nvSpPr>
+          <p:cNvPr id="22" name="Shape 16"/>
+          <p:cNvSpPr/>
+          <p:nvPr/>
+        </p:nvSpPr>
+        <p:spPr>
+          <a:xfrm>
+            <a:off x="8364931" y="3096158"/>
+            <a:ext cx="2892247" cy="10058"/>
+          </a:xfrm>
+          <a:prstGeom prst="rect">
+            <a:avLst/>
+          </a:prstGeom>
+          <a:solidFill>
+            <a:srgbClr val="EFEAE0"/>
+          </a:solidFill>
+          <a:ln/>
+        </p:spPr>
+      </p:sp>
+      <p:sp>
+        <p:nvSpPr>
+          <p:cNvPr id="23" name="Text 17"/>
+          <p:cNvSpPr/>
+          <p:nvPr/>
+        </p:nvSpPr>
+        <p:spPr>
+          <a:xfrm>
+            <a:off x="8364931" y="3242462"/>
+            <a:ext cx="2892247" cy="1280160"/>
+          </a:xfrm>
+          <a:prstGeom prst="rect">
+            <a:avLst/>
+          </a:prstGeom>
+          <a:noFill/>
+          <a:ln/>
+        </p:spPr>
+        <p:txBody>
+          <a:bodyPr wrap="square" lIns="0" tIns="0" rIns="0" bIns="0" rtlCol="0" anchor="t"/>
+          <a:lstStyle/>
+          <a:p>
+            <a:pPr indent="0" marL="0">
+              <a:lnSpc>
+                <a:spcPct val="140000"/>
+              </a:lnSpc>
+              <a:buNone/>
+            </a:pPr>
+            <a:r>
+              <a:rPr lang="en-US" sz="1000" dirty="0">
+                <a:solidFill>
+                  <a:srgbClr val="4B5550"/>
+                </a:solidFill>
+                <a:latin typeface="Yu Gothic" pitchFamily="34" charset="0"/>
+                <a:ea typeface="Yu Gothic" pitchFamily="34" charset="-122"/>
+                <a:cs typeface="Yu Gothic" pitchFamily="34" charset="-120"/>
+              </a:rPr>
+              <a:t>テーブル・椅子・植栽は店舗の雰囲気を大きく左右します。書店の売場に合わせて御社側でお選びいただけます。</a:t>
+            </a:r>
+            <a:endParaRPr lang="en-US" sz="1000" dirty="0"/>
+          </a:p>
+        </p:txBody>
+      </p:sp>
+      <p:sp>
+        <p:nvSpPr>
+          <p:cNvPr id="24" name="Shape 18"/>
+          <p:cNvSpPr/>
+          <p:nvPr/>
+        </p:nvSpPr>
+        <p:spPr>
+          <a:xfrm>
+            <a:off x="660197" y="4809744"/>
+            <a:ext cx="10871302" cy="914400"/>
+          </a:xfrm>
+          <a:prstGeom prst="roundRect">
+            <a:avLst>
+              <a:gd name="adj" fmla="val 6000"/>
+            </a:avLst>
+          </a:prstGeom>
+          <a:solidFill>
+            <a:srgbClr val="F1F8F3"/>
+          </a:solidFill>
+          <a:ln w="9525">
+            <a:solidFill>
+              <a:srgbClr val="D2E7DA"/>
+            </a:solidFill>
+            <a:prstDash val="solid"/>
+          </a:ln>
+        </p:spPr>
+      </p:sp>
+      <p:pic>
+        <p:nvPicPr>
+          <p:cNvPr id="25" name="Image 4" descr="/home/user/suzuki-ceo/selfcafe-miraiya-trial-deck/assets/icons/LuMessagesSquare-green.png">    </p:cNvPr>
+          <p:cNvPicPr>
+            <a:picLocks noChangeAspect="1"/>
+          </p:cNvPicPr>
+          <p:nvPr/>
+        </p:nvPicPr>
+        <p:blipFill>
+          <a:blip r:embed="rId5"/>
+          <a:stretch>
+            <a:fillRect/>
+          </a:stretch>
+        </p:blipFill>
+        <p:spPr>
+          <a:xfrm>
+            <a:off x="971093" y="5084064"/>
+            <a:ext cx="365760" cy="365760"/>
+          </a:xfrm>
+          <a:prstGeom prst="rect">
+            <a:avLst/>
+          </a:prstGeom>
+        </p:spPr>
+      </p:pic>
+      <p:sp>
+        <p:nvSpPr>
+          <p:cNvPr id="26" name="Text 19"/>
+          <p:cNvSpPr/>
+          <p:nvPr/>
+        </p:nvSpPr>
+        <p:spPr>
+          <a:xfrm>
+            <a:off x="1501445" y="4809744"/>
+            <a:ext cx="9682582" cy="914400"/>
+          </a:xfrm>
+          <a:prstGeom prst="rect">
+            <a:avLst/>
+          </a:prstGeom>
+          <a:noFill/>
+          <a:ln/>
+        </p:spPr>
+        <p:txBody>
+          <a:bodyPr wrap="square" lIns="0" tIns="0" rIns="0" bIns="0" rtlCol="0" anchor="ctr"/>
+          <a:lstStyle/>
+          <a:p>
+            <a:pPr indent="0" marL="0">
+              <a:lnSpc>
+                <a:spcPct val="135000"/>
+              </a:lnSpc>
+              <a:buNone/>
+            </a:pPr>
+            <a:r>
+              <a:rPr lang="en-US" sz="1050" dirty="0">
+                <a:solidFill>
+                  <a:srgbClr val="0A3D23"/>
+                </a:solidFill>
+                <a:latin typeface="Yu Gothic" pitchFamily="34" charset="0"/>
+                <a:ea typeface="Yu Gothic" pitchFamily="34" charset="-122"/>
+                <a:cs typeface="Yu Gothic" pitchFamily="34" charset="-120"/>
+              </a:rPr>
+              <a:t>当社側で家具・什器を手配することも可能です。その場合は当社の資産となるため、トライアル終了時に引き上げ・買取のご相談が必要になります。ご希望があればその形でもお受けします。</a:t>
+            </a:r>
+            <a:endParaRPr lang="en-US" sz="1050" dirty="0"/>
+          </a:p>
+        </p:txBody>
+      </p:sp>
+      <p:sp>
+        <p:nvSpPr>
+          <p:cNvPr id="27" name="Text 20"/>
+          <p:cNvSpPr/>
+          <p:nvPr/>
+        </p:nvSpPr>
+        <p:spPr>
+          <a:xfrm>
+            <a:off x="660197" y="5888736"/>
+            <a:ext cx="10871302" cy="182880"/>
+          </a:xfrm>
+          <a:prstGeom prst="rect">
+            <a:avLst/>
+          </a:prstGeom>
+          <a:noFill/>
+          <a:ln/>
+        </p:spPr>
+        <p:txBody>
+          <a:bodyPr wrap="square" lIns="0" tIns="0" rIns="0" bIns="0" rtlCol="0" anchor="ctr"/>
+          <a:lstStyle/>
+          <a:p>
+            <a:pPr indent="0" marL="0">
+              <a:buNone/>
+            </a:pPr>
+            <a:r>
+              <a:rPr lang="en-US" sz="850" dirty="0">
+                <a:solidFill>
+                  <a:srgbClr val="A8B0AA"/>
+                </a:solidFill>
+                <a:latin typeface="Yu Gothic" pitchFamily="34" charset="0"/>
+                <a:ea typeface="Yu Gothic" pitchFamily="34" charset="-122"/>
+                <a:cs typeface="Yu Gothic" pitchFamily="34" charset="-120"/>
+              </a:rPr>
+              <a:t>※ 什器の概算費用は、レイアウト確定後にお見積りをお出しします。既存什器を再利用できる場合は、その分ご負担が減ります。</a:t>
+            </a:r>
+            <a:endParaRPr lang="en-US" sz="850" dirty="0"/>
+          </a:p>
+        </p:txBody>
+      </p:sp>
+    </p:spTree>
+  </p:cSld>
+  <p:clrMapOvr>
+    <a:masterClrMapping/>
+  </p:clrMapOvr>
+</p:sld>
+</file>
+
+<file path=ppt/slides/slide8.xml><?xml version="1.0" encoding="utf-8"?>
+<p:sld xmlns:a="http://schemas.openxmlformats.org/drawingml/2006/main" xmlns:r="http://schemas.openxmlformats.org/officeDocument/2006/relationships" xmlns:p="http://schemas.openxmlformats.org/presentationml/2006/main">
+  <p:cSld name="Slide 8">
+    <p:bg>
+      <p:bgPr>
+        <a:solidFill>
+          <a:srgbClr val="FFFDF7"/>
+        </a:solidFill>
+      </p:bgPr>
+    </p:bg>
+    <p:spTree>
+      <p:nvGrpSpPr>
+        <p:cNvPr id="1" name=""/>
+        <p:cNvGrpSpPr/>
+        <p:nvPr/>
+      </p:nvGrpSpPr>
+      <p:grpSpPr>
+        <a:xfrm>
+          <a:off x="0" y="0"/>
+          <a:ext cx="0" cy="0"/>
+          <a:chOff x="0" y="0"/>
+          <a:chExt cx="0" cy="0"/>
+        </a:xfrm>
+      </p:grpSpPr>
+      <p:sp>
+        <p:nvSpPr>
+          <p:cNvPr id="2" name="Shape 0"/>
+          <p:cNvSpPr/>
+          <p:nvPr/>
+        </p:nvSpPr>
+        <p:spPr>
+          <a:xfrm>
+            <a:off x="660197" y="545897"/>
+            <a:ext cx="202997" cy="25603"/>
+          </a:xfrm>
+          <a:prstGeom prst="rect">
+            <a:avLst/>
+          </a:prstGeom>
+          <a:solidFill>
+            <a:srgbClr val="106838"/>
+          </a:solidFill>
+          <a:ln/>
+        </p:spPr>
+      </p:sp>
+      <p:sp>
+        <p:nvSpPr>
+          <p:cNvPr id="3" name="Text 1"/>
+          <p:cNvSpPr/>
+          <p:nvPr/>
+        </p:nvSpPr>
+        <p:spPr>
+          <a:xfrm>
+            <a:off x="952805" y="444398"/>
+            <a:ext cx="6400800" cy="177394"/>
+          </a:xfrm>
+          <a:prstGeom prst="rect">
+            <a:avLst/>
+          </a:prstGeom>
+          <a:noFill/>
+          <a:ln/>
+        </p:spPr>
+        <p:txBody>
+          <a:bodyPr wrap="square" lIns="0" tIns="0" rIns="0" bIns="0" rtlCol="0" anchor="ctr"/>
+          <a:lstStyle/>
+          <a:p>
+            <a:pPr indent="0" marL="0">
+              <a:buNone/>
+            </a:pPr>
+            <a:r>
+              <a:rPr lang="en-US" sz="1050" b="1" dirty="0">
+                <a:solidFill>
+                  <a:srgbClr val="A8761F"/>
+                </a:solidFill>
+                <a:latin typeface="Arial" pitchFamily="34" charset="0"/>
+                <a:ea typeface="Arial" pitchFamily="34" charset="-122"/>
+                <a:cs typeface="Arial" pitchFamily="34" charset="-120"/>
+              </a:rPr>
+              <a:t>07</a:t>
+            </a:r>
+            <a:r>
+              <a:rPr lang="en-US" sz="1050" b="1" dirty="0">
+                <a:solidFill>
+                  <a:srgbClr val="1B8149"/>
+                </a:solidFill>
+                <a:latin typeface="Yu Gothic" pitchFamily="34" charset="0"/>
+                <a:ea typeface="Yu Gothic" pitchFamily="34" charset="-122"/>
+                <a:cs typeface="Yu Gothic" pitchFamily="34" charset="-120"/>
+              </a:rPr>
+              <a:t>   今後の進め方</a:t>
+            </a:r>
+            <a:endParaRPr lang="en-US" sz="1050" dirty="0"/>
+          </a:p>
+        </p:txBody>
+      </p:sp>
+      <p:sp>
+        <p:nvSpPr>
+          <p:cNvPr id="4" name="Text 2"/>
+          <p:cNvSpPr/>
+          <p:nvPr/>
+        </p:nvSpPr>
+        <p:spPr>
+          <a:xfrm>
+            <a:off x="660197" y="660197"/>
+            <a:ext cx="8889797" cy="508406"/>
+          </a:xfrm>
+          <a:prstGeom prst="rect">
+            <a:avLst/>
+          </a:prstGeom>
+          <a:noFill/>
+          <a:ln/>
+        </p:spPr>
+        <p:txBody>
+          <a:bodyPr wrap="square" lIns="0" tIns="0" rIns="0" bIns="0" rtlCol="0" anchor="ctr"/>
+          <a:lstStyle/>
+          <a:p>
+            <a:pPr indent="0" marL="0">
+              <a:buNone/>
+            </a:pPr>
+            <a:r>
+              <a:rPr lang="en-US" sz="2900" b="1" dirty="0">
+                <a:solidFill>
+                  <a:srgbClr val="0A3D23"/>
+                </a:solidFill>
+                <a:latin typeface="Yu Gothic" pitchFamily="34" charset="0"/>
+                <a:ea typeface="Yu Gothic" pitchFamily="34" charset="-122"/>
+                <a:cs typeface="Yu Gothic" pitchFamily="34" charset="-120"/>
+              </a:rPr>
+              <a:t>現地確認から、最短2〜3ヶ月で開始できます。</a:t>
+            </a:r>
+            <a:endParaRPr lang="en-US" sz="2900" dirty="0"/>
+          </a:p>
+        </p:txBody>
+      </p:sp>
+      <p:sp>
+        <p:nvSpPr>
+          <p:cNvPr id="5" name="Text 3"/>
+          <p:cNvSpPr/>
+          <p:nvPr/>
+        </p:nvSpPr>
+        <p:spPr>
+          <a:xfrm>
+            <a:off x="660197" y="1308506"/>
+            <a:ext cx="10032797" cy="228600"/>
+          </a:xfrm>
+          <a:prstGeom prst="rect">
+            <a:avLst/>
+          </a:prstGeom>
+          <a:noFill/>
+          <a:ln/>
+        </p:spPr>
+        <p:txBody>
+          <a:bodyPr wrap="square" lIns="0" tIns="0" rIns="0" bIns="0" rtlCol="0" anchor="ctr"/>
+          <a:lstStyle/>
+          <a:p>
+            <a:pPr indent="0" marL="0">
+              <a:buNone/>
+            </a:pPr>
+            <a:r>
+              <a:rPr lang="en-US" sz="1250" dirty="0">
+                <a:solidFill>
+                  <a:srgbClr val="4B5550"/>
+                </a:solidFill>
+                <a:latin typeface="Yu Gothic" pitchFamily="34" charset="0"/>
+                <a:ea typeface="Yu Gothic" pitchFamily="34" charset="-122"/>
+                <a:cs typeface="Yu Gothic" pitchFamily="34" charset="-120"/>
+              </a:rPr>
+              <a:t>まずは対象店舗と期間のすり合わせ、現地確認からお願いできればと存じます。</a:t>
+            </a:r>
+            <a:endParaRPr lang="en-US" sz="1250" dirty="0"/>
+          </a:p>
+        </p:txBody>
+      </p:sp>
+      <p:pic>
+        <p:nvPicPr>
+          <p:cNvPr id="6" name="Image 0" descr="/home/user/suzuki-ceo/selfcafe-miraiya-trial-deck/assets/logo-green.png">    </p:cNvPr>
+          <p:cNvPicPr>
+            <a:picLocks noChangeAspect="1"/>
+          </p:cNvPicPr>
+          <p:nvPr/>
+        </p:nvPicPr>
+        <p:blipFill>
+          <a:blip r:embed="rId1"/>
+          <a:stretch>
+            <a:fillRect/>
+          </a:stretch>
+        </p:blipFill>
+        <p:spPr>
+          <a:xfrm>
+            <a:off x="9855403" y="482803"/>
+            <a:ext cx="1676095" cy="238658"/>
+          </a:xfrm>
+          <a:prstGeom prst="rect">
+            <a:avLst/>
+          </a:prstGeom>
+        </p:spPr>
+      </p:pic>
+      <p:sp>
+        <p:nvSpPr>
+          <p:cNvPr id="7" name="Text 4"/>
+          <p:cNvSpPr/>
+          <p:nvPr/>
+        </p:nvSpPr>
+        <p:spPr>
+          <a:xfrm>
+            <a:off x="660197" y="6476695"/>
+            <a:ext cx="5080406" cy="152705"/>
+          </a:xfrm>
+          <a:prstGeom prst="rect">
+            <a:avLst/>
+          </a:prstGeom>
+          <a:noFill/>
+          <a:ln/>
+        </p:spPr>
+        <p:txBody>
+          <a:bodyPr wrap="square" lIns="0" tIns="0" rIns="0" bIns="0" rtlCol="0" anchor="ctr"/>
+          <a:lstStyle/>
+          <a:p>
+            <a:pPr indent="0" marL="0">
+              <a:buNone/>
+            </a:pPr>
+            <a:r>
+              <a:rPr lang="en-US" sz="900" dirty="0">
+                <a:solidFill>
+                  <a:srgbClr val="A8B0AA"/>
+                </a:solidFill>
+                <a:latin typeface="Yu Gothic" pitchFamily="34" charset="0"/>
+                <a:ea typeface="Yu Gothic" pitchFamily="34" charset="-122"/>
+                <a:cs typeface="Yu Gothic" pitchFamily="34" charset="-120"/>
+              </a:rPr>
+              <a:t>セルフカフェ × 未来屋書店 トライアル導入のご提案</a:t>
+            </a:r>
+            <a:endParaRPr lang="en-US" sz="900" dirty="0"/>
+          </a:p>
+        </p:txBody>
+      </p:sp>
+      <p:sp>
+        <p:nvSpPr>
+          <p:cNvPr id="8" name="Text 5"/>
+          <p:cNvSpPr/>
+          <p:nvPr/>
+        </p:nvSpPr>
+        <p:spPr>
+          <a:xfrm>
+            <a:off x="10261397" y="6463894"/>
+            <a:ext cx="1270102" cy="152705"/>
+          </a:xfrm>
+          <a:prstGeom prst="rect">
+            <a:avLst/>
+          </a:prstGeom>
+          <a:noFill/>
+          <a:ln/>
+        </p:spPr>
+        <p:txBody>
+          <a:bodyPr wrap="square" lIns="0" tIns="0" rIns="0" bIns="0" rtlCol="0" anchor="ctr"/>
+          <a:lstStyle/>
+          <a:p>
+            <a:pPr algn="r" indent="0" marL="0">
+              <a:buNone/>
+            </a:pPr>
+            <a:r>
+              <a:rPr lang="en-US" sz="1000" b="1" dirty="0">
+                <a:solidFill>
+                  <a:srgbClr val="7E8882"/>
+                </a:solidFill>
+                <a:latin typeface="Arial" pitchFamily="34" charset="0"/>
+                <a:ea typeface="Arial" pitchFamily="34" charset="-122"/>
+                <a:cs typeface="Arial" pitchFamily="34" charset="-120"/>
+              </a:rPr>
+              <a:t>08</a:t>
             </a:r>
             <a:endParaRPr lang="en-US" sz="1000" dirty="0"/>
           </a:p>

--- a/selfcafe-miraiya-trial-deck/selfcafe-miraiya-trial-deck.pptx
+++ b/selfcafe-miraiya-trial-deck/selfcafe-miraiya-trial-deck.pptx
@@ -1517,7 +1517,7 @@
       </p:pic>
       <p:pic>
         <p:nvPicPr>
-          <p:cNvPr id="3" name="Image 1" descr="/home/user/suzuki-ceo/selfcafe-miraiya-trial-deck/assets/logo-white.png">    </p:cNvPr>
+          <p:cNvPr id="3" name="Image 1" descr="/home/user/suzuki-ceo/selfcafe-miraiya-trial-deck/assets/photos/.crops/inzai-hall-538x750.jpg">    </p:cNvPr>
           <p:cNvPicPr>
             <a:picLocks noChangeAspect="1"/>
           </p:cNvPicPr>
@@ -1531,8 +1531,8 @@
         </p:blipFill>
         <p:spPr>
           <a:xfrm>
-            <a:off x="812902" y="1773936"/>
-            <a:ext cx="2616098" cy="372161"/>
+            <a:off x="7269480" y="0"/>
+            <a:ext cx="4922215" cy="6858000"/>
           </a:xfrm>
           <a:prstGeom prst="rect">
             <a:avLst/>
@@ -1547,8 +1547,8 @@
         </p:nvSpPr>
         <p:spPr>
           <a:xfrm>
-            <a:off x="812902" y="2688336"/>
-            <a:ext cx="254203" cy="25603"/>
+            <a:off x="7242048" y="0"/>
+            <a:ext cx="27432" cy="6858000"/>
           </a:xfrm>
           <a:prstGeom prst="rect">
             <a:avLst/>
@@ -1567,8 +1567,8 @@
         </p:nvSpPr>
         <p:spPr>
           <a:xfrm>
-            <a:off x="1194206" y="2599639"/>
-            <a:ext cx="5029200" cy="177394"/>
+            <a:off x="812902" y="758952"/>
+            <a:ext cx="3657600" cy="177394"/>
           </a:xfrm>
           <a:prstGeom prst="rect">
             <a:avLst/>
@@ -1584,30 +1584,115 @@
               <a:buNone/>
             </a:pPr>
             <a:r>
-              <a:rPr lang="en-US" sz="1050" b="1" spc="200" kern="0" dirty="0">
-                <a:solidFill>
-                  <a:srgbClr val="8CC5A5"/>
+              <a:rPr lang="en-US" sz="950" dirty="0">
+                <a:solidFill>
+                  <a:srgbClr val="8FA398"/>
+                </a:solidFill>
+                <a:latin typeface="Yu Gothic" pitchFamily="34" charset="0"/>
+                <a:ea typeface="Yu Gothic" pitchFamily="34" charset="-122"/>
+                <a:cs typeface="Yu Gothic" pitchFamily="34" charset="-120"/>
+              </a:rPr>
+              <a:t>セルフカフェ株式会社</a:t>
+            </a:r>
+            <a:endParaRPr lang="en-US" sz="950" dirty="0"/>
+          </a:p>
+        </p:txBody>
+      </p:sp>
+      <p:pic>
+        <p:nvPicPr>
+          <p:cNvPr id="6" name="Image 2" descr="/home/user/suzuki-ceo/selfcafe-miraiya-trial-deck/assets/logo-white.png">    </p:cNvPr>
+          <p:cNvPicPr>
+            <a:picLocks noChangeAspect="1"/>
+          </p:cNvPicPr>
+          <p:nvPr/>
+        </p:nvPicPr>
+        <p:blipFill>
+          <a:blip r:embed="rId3"/>
+          <a:stretch>
+            <a:fillRect/>
+          </a:stretch>
+        </p:blipFill>
+        <p:spPr>
+          <a:xfrm>
+            <a:off x="812902" y="1773936"/>
+            <a:ext cx="2616098" cy="372161"/>
+          </a:xfrm>
+          <a:prstGeom prst="rect">
+            <a:avLst/>
+          </a:prstGeom>
+        </p:spPr>
+      </p:pic>
+      <p:sp>
+        <p:nvSpPr>
+          <p:cNvPr id="7" name="Shape 2"/>
+          <p:cNvSpPr/>
+          <p:nvPr/>
+        </p:nvSpPr>
+        <p:spPr>
+          <a:xfrm>
+            <a:off x="812902" y="2615184"/>
+            <a:ext cx="1143000" cy="310896"/>
+          </a:xfrm>
+          <a:prstGeom prst="roundRect">
+            <a:avLst>
+              <a:gd name="adj" fmla="val 14706"/>
+            </a:avLst>
+          </a:prstGeom>
+          <a:solidFill>
+            <a:srgbClr val="A8761F"/>
+          </a:solidFill>
+          <a:ln/>
+        </p:spPr>
+      </p:sp>
+      <p:sp>
+        <p:nvSpPr>
+          <p:cNvPr id="8" name="Text 3"/>
+          <p:cNvSpPr/>
+          <p:nvPr/>
+        </p:nvSpPr>
+        <p:spPr>
+          <a:xfrm>
+            <a:off x="812902" y="2615184"/>
+            <a:ext cx="1143000" cy="310896"/>
+          </a:xfrm>
+          <a:prstGeom prst="rect">
+            <a:avLst/>
+          </a:prstGeom>
+          <a:noFill/>
+          <a:ln/>
+        </p:spPr>
+        <p:txBody>
+          <a:bodyPr wrap="square" lIns="0" tIns="0" rIns="0" bIns="0" rtlCol="0" anchor="ctr"/>
+          <a:lstStyle/>
+          <a:p>
+            <a:pPr algn="ctr" indent="0" marL="0">
+              <a:buNone/>
+            </a:pPr>
+            <a:r>
+              <a:rPr lang="en-US" sz="1100" b="1" spc="150" kern="0" dirty="0">
+                <a:solidFill>
+                  <a:srgbClr val="FFFFFF"/>
                 </a:solidFill>
                 <a:latin typeface="Arial" pitchFamily="34" charset="0"/>
                 <a:ea typeface="Arial" pitchFamily="34" charset="-122"/>
                 <a:cs typeface="Arial" pitchFamily="34" charset="-120"/>
               </a:rPr>
-              <a:t>TRIAL PROGRAM</a:t>
-            </a:r>
-            <a:endParaRPr lang="en-US" sz="1050" dirty="0"/>
-          </a:p>
-        </p:txBody>
-      </p:sp>
-      <p:sp>
-        <p:nvSpPr>
-          <p:cNvPr id="6" name="Text 2"/>
-          <p:cNvSpPr/>
-          <p:nvPr/>
-        </p:nvSpPr>
-        <p:spPr>
-          <a:xfrm>
-            <a:off x="812902" y="2871216"/>
-            <a:ext cx="7112203" cy="292608"/>
+              <a:t>TRIAL</a:t>
+            </a:r>
+            <a:endParaRPr lang="en-US" sz="1100" dirty="0"/>
+          </a:p>
+        </p:txBody>
+      </p:sp>
+      <p:sp>
+        <p:nvSpPr>
+          <p:cNvPr id="9" name="Text 4"/>
+          <p:cNvSpPr/>
+          <p:nvPr/>
+        </p:nvSpPr>
+        <p:spPr>
+          <a:xfrm>
+            <a:off x="2084832" y="2615184"/>
+            <a:ext cx="3657600" cy="310896"/>
           </a:xfrm>
           <a:prstGeom prst="rect">
             <a:avLst/>
@@ -1623,30 +1708,30 @@
               <a:buNone/>
             </a:pPr>
             <a:r>
-              <a:rPr lang="en-US" sz="1500" dirty="0">
-                <a:solidFill>
-                  <a:srgbClr val="D6E3DB"/>
+              <a:rPr lang="en-US" sz="1150" b="1" dirty="0">
+                <a:solidFill>
+                  <a:srgbClr val="8CC5A5"/>
                 </a:solidFill>
                 <a:latin typeface="Yu Gothic" pitchFamily="34" charset="0"/>
                 <a:ea typeface="Yu Gothic" pitchFamily="34" charset="-122"/>
                 <a:cs typeface="Yu Gothic" pitchFamily="34" charset="-120"/>
               </a:rPr>
-              <a:t>未来屋書店 秋田店・土浦店</a:t>
-            </a:r>
-            <a:endParaRPr lang="en-US" sz="1500" dirty="0"/>
-          </a:p>
-        </p:txBody>
-      </p:sp>
-      <p:sp>
-        <p:nvSpPr>
-          <p:cNvPr id="7" name="Text 3"/>
-          <p:cNvSpPr/>
-          <p:nvPr/>
-        </p:nvSpPr>
-        <p:spPr>
-          <a:xfrm>
-            <a:off x="812902" y="3145536"/>
-            <a:ext cx="9601200" cy="914400"/>
+              <a:t>1年間のお試し導入</a:t>
+            </a:r>
+            <a:endParaRPr lang="en-US" sz="1150" dirty="0"/>
+          </a:p>
+        </p:txBody>
+      </p:sp>
+      <p:sp>
+        <p:nvSpPr>
+          <p:cNvPr id="10" name="Text 5"/>
+          <p:cNvSpPr/>
+          <p:nvPr/>
+        </p:nvSpPr>
+        <p:spPr>
+          <a:xfrm>
+            <a:off x="812902" y="3072384"/>
+            <a:ext cx="6035040" cy="292608"/>
           </a:xfrm>
           <a:prstGeom prst="rect">
             <a:avLst/>
@@ -1662,30 +1747,112 @@
               <a:buNone/>
             </a:pPr>
             <a:r>
-              <a:rPr lang="en-US" sz="4200" b="1" dirty="0">
-                <a:solidFill>
-                  <a:srgbClr val="FFFFFF"/>
+              <a:rPr lang="en-US" sz="1400" dirty="0">
+                <a:solidFill>
+                  <a:srgbClr val="D6E3DB"/>
                 </a:solidFill>
                 <a:latin typeface="Yu Gothic" pitchFamily="34" charset="0"/>
                 <a:ea typeface="Yu Gothic" pitchFamily="34" charset="-122"/>
                 <a:cs typeface="Yu Gothic" pitchFamily="34" charset="-120"/>
               </a:rPr>
-              <a:t>トライアル導入のご提案</a:t>
-            </a:r>
-            <a:endParaRPr lang="en-US" sz="4200" dirty="0"/>
-          </a:p>
-        </p:txBody>
-      </p:sp>
-      <p:sp>
-        <p:nvSpPr>
-          <p:cNvPr id="8" name="Text 4"/>
-          <p:cNvSpPr/>
-          <p:nvPr/>
-        </p:nvSpPr>
-        <p:spPr>
-          <a:xfrm>
-            <a:off x="812902" y="4224528"/>
-            <a:ext cx="7863840" cy="658368"/>
+              <a:t>未来屋書店 秋田店・土浦店</a:t>
+            </a:r>
+            <a:endParaRPr lang="en-US" sz="1400" dirty="0"/>
+          </a:p>
+        </p:txBody>
+      </p:sp>
+      <p:sp>
+        <p:nvSpPr>
+          <p:cNvPr id="11" name="Text 6"/>
+          <p:cNvSpPr/>
+          <p:nvPr/>
+        </p:nvSpPr>
+        <p:spPr>
+          <a:xfrm>
+            <a:off x="812902" y="3364992"/>
+            <a:ext cx="6217920" cy="1371600"/>
+          </a:xfrm>
+          <a:prstGeom prst="rect">
+            <a:avLst/>
+          </a:prstGeom>
+          <a:noFill/>
+          <a:ln/>
+        </p:spPr>
+        <p:txBody>
+          <a:bodyPr wrap="square" lIns="0" tIns="0" rIns="0" bIns="0" rtlCol="0" anchor="ctr"/>
+          <a:lstStyle/>
+          <a:p>
+            <a:pPr indent="0" marL="0">
+              <a:lnSpc>
+                <a:spcPct val="110000"/>
+              </a:lnSpc>
+              <a:buNone/>
+            </a:pPr>
+            <a:r>
+              <a:rPr lang="en-US" sz="4000" b="1" dirty="0">
+                <a:solidFill>
+                  <a:srgbClr val="FFFFFF"/>
+                </a:solidFill>
+                <a:latin typeface="Yu Gothic" pitchFamily="34" charset="0"/>
+                <a:ea typeface="Yu Gothic" pitchFamily="34" charset="-122"/>
+                <a:cs typeface="Yu Gothic" pitchFamily="34" charset="-120"/>
+              </a:rPr>
+              <a:t>トライアル導入の</a:t>
+            </a:r>
+            <a:endParaRPr lang="en-US" sz="4000" dirty="0"/>
+          </a:p>
+          <a:p>
+            <a:pPr indent="0" marL="0">
+              <a:lnSpc>
+                <a:spcPct val="110000"/>
+              </a:lnSpc>
+              <a:buNone/>
+            </a:pPr>
+            <a:r>
+              <a:rPr lang="en-US" sz="4000" b="1" dirty="0">
+                <a:solidFill>
+                  <a:srgbClr val="FFFFFF"/>
+                </a:solidFill>
+                <a:latin typeface="Yu Gothic" pitchFamily="34" charset="0"/>
+                <a:ea typeface="Yu Gothic" pitchFamily="34" charset="-122"/>
+                <a:cs typeface="Yu Gothic" pitchFamily="34" charset="-120"/>
+              </a:rPr>
+              <a:t>ご提案</a:t>
+            </a:r>
+            <a:endParaRPr lang="en-US" sz="4000" dirty="0"/>
+          </a:p>
+        </p:txBody>
+      </p:sp>
+      <p:sp>
+        <p:nvSpPr>
+          <p:cNvPr id="12" name="Shape 7"/>
+          <p:cNvSpPr/>
+          <p:nvPr/>
+        </p:nvSpPr>
+        <p:spPr>
+          <a:xfrm>
+            <a:off x="812902" y="4882896"/>
+            <a:ext cx="711403" cy="25603"/>
+          </a:xfrm>
+          <a:prstGeom prst="rect">
+            <a:avLst/>
+          </a:prstGeom>
+          <a:solidFill>
+            <a:srgbClr val="C79A44"/>
+          </a:solidFill>
+          <a:ln/>
+        </p:spPr>
+      </p:sp>
+      <p:sp>
+        <p:nvSpPr>
+          <p:cNvPr id="13" name="Text 8"/>
+          <p:cNvSpPr/>
+          <p:nvPr/>
+        </p:nvSpPr>
+        <p:spPr>
+          <a:xfrm>
+            <a:off x="812902" y="5029200"/>
+            <a:ext cx="6035040" cy="603504"/>
           </a:xfrm>
           <a:prstGeom prst="rect">
             <a:avLst/>
@@ -1704,7 +1871,7 @@
               <a:buNone/>
             </a:pPr>
             <a:r>
-              <a:rPr lang="en-US" sz="1250" dirty="0">
+              <a:rPr lang="en-US" sz="1200" dirty="0">
                 <a:solidFill>
                   <a:srgbClr val="AFC2B8"/>
                 </a:solidFill>
@@ -1712,9 +1879,9 @@
                 <a:ea typeface="Yu Gothic" pitchFamily="34" charset="-122"/>
                 <a:cs typeface="Yu Gothic" pitchFamily="34" charset="-120"/>
               </a:rPr>
-              <a:t>1年間のトライアルからお試しいただけます。内装工事費は当社が負担し、</a:t>
-            </a:r>
-            <a:endParaRPr lang="en-US" sz="1250" dirty="0"/>
+              <a:t>内装工事費は当社が負担し、原状回復義務もいただきません。</a:t>
+            </a:r>
+            <a:endParaRPr lang="en-US" sz="1200" dirty="0"/>
           </a:p>
           <a:p>
             <a:pPr indent="0" marL="0">
@@ -1724,7 +1891,7 @@
               <a:buNone/>
             </a:pPr>
             <a:r>
-              <a:rPr lang="en-US" sz="1250" dirty="0">
+              <a:rPr lang="en-US" sz="1200" dirty="0">
                 <a:solidFill>
                   <a:srgbClr val="AFC2B8"/>
                 </a:solidFill>
@@ -1732,42 +1899,22 @@
                 <a:ea typeface="Yu Gothic" pitchFamily="34" charset="-122"/>
                 <a:cs typeface="Yu Gothic" pitchFamily="34" charset="-120"/>
               </a:rPr>
-              <a:t>原状回復義務もいただきません。まずは実際の数字をご確認ください。</a:t>
-            </a:r>
-            <a:endParaRPr lang="en-US" sz="1250" dirty="0"/>
-          </a:p>
-        </p:txBody>
-      </p:sp>
-      <p:sp>
-        <p:nvSpPr>
-          <p:cNvPr id="9" name="Shape 5"/>
-          <p:cNvSpPr/>
-          <p:nvPr/>
-        </p:nvSpPr>
-        <p:spPr>
-          <a:xfrm>
-            <a:off x="812902" y="5468112"/>
-            <a:ext cx="711403" cy="25603"/>
-          </a:xfrm>
-          <a:prstGeom prst="rect">
-            <a:avLst/>
-          </a:prstGeom>
-          <a:solidFill>
-            <a:srgbClr val="C79A44"/>
-          </a:solidFill>
-          <a:ln/>
-        </p:spPr>
-      </p:sp>
-      <p:sp>
-        <p:nvSpPr>
-          <p:cNvPr id="10" name="Text 6"/>
-          <p:cNvSpPr/>
-          <p:nvPr/>
-        </p:nvSpPr>
-        <p:spPr>
-          <a:xfrm>
-            <a:off x="812902" y="5742432"/>
-            <a:ext cx="2926080" cy="381305"/>
+              <a:t>まずは1年、実際の数字をご確認ください。</a:t>
+            </a:r>
+            <a:endParaRPr lang="en-US" sz="1200" dirty="0"/>
+          </a:p>
+        </p:txBody>
+      </p:sp>
+      <p:sp>
+        <p:nvSpPr>
+          <p:cNvPr id="14" name="Text 9"/>
+          <p:cNvSpPr/>
+          <p:nvPr/>
+        </p:nvSpPr>
+        <p:spPr>
+          <a:xfrm>
+            <a:off x="812902" y="5852160"/>
+            <a:ext cx="2011680" cy="365760"/>
           </a:xfrm>
           <a:prstGeom prst="rect">
             <a:avLst/>
@@ -1783,9 +1930,9 @@
               <a:buNone/>
             </a:pPr>
             <a:r>
-              <a:rPr lang="en-US" sz="2600" b="1" dirty="0">
-                <a:solidFill>
-                  <a:srgbClr val="FFFFFF"/>
+              <a:rPr lang="en-US" sz="2400" b="1" dirty="0">
+                <a:solidFill>
+                  <a:srgbClr val="F0C05A"/>
                 </a:solidFill>
                 <a:latin typeface="Arial" pitchFamily="34" charset="0"/>
                 <a:ea typeface="Arial" pitchFamily="34" charset="-122"/>
@@ -1794,9 +1941,9 @@
               <a:t>1</a:t>
             </a:r>
             <a:r>
-              <a:rPr lang="en-US" sz="1200" b="1" dirty="0">
-                <a:solidFill>
-                  <a:srgbClr val="FFFFFF"/>
+              <a:rPr lang="en-US" sz="1150" b="1" dirty="0">
+                <a:solidFill>
+                  <a:srgbClr val="F0C05A"/>
                 </a:solidFill>
                 <a:latin typeface="Yu Gothic" pitchFamily="34" charset="0"/>
                 <a:ea typeface="Yu Gothic" pitchFamily="34" charset="-122"/>
@@ -1804,20 +1951,20 @@
               </a:rPr>
               <a:t> 年</a:t>
             </a:r>
-            <a:endParaRPr lang="en-US" sz="2600" dirty="0"/>
-          </a:p>
-        </p:txBody>
-      </p:sp>
-      <p:sp>
-        <p:nvSpPr>
-          <p:cNvPr id="11" name="Text 7"/>
-          <p:cNvSpPr/>
-          <p:nvPr/>
-        </p:nvSpPr>
-        <p:spPr>
-          <a:xfrm>
-            <a:off x="812902" y="6144768"/>
-            <a:ext cx="3291840" cy="165506"/>
+            <a:endParaRPr lang="en-US" sz="2400" dirty="0"/>
+          </a:p>
+        </p:txBody>
+      </p:sp>
+      <p:sp>
+        <p:nvSpPr>
+          <p:cNvPr id="15" name="Text 10"/>
+          <p:cNvSpPr/>
+          <p:nvPr/>
+        </p:nvSpPr>
+        <p:spPr>
+          <a:xfrm>
+            <a:off x="812902" y="6236208"/>
+            <a:ext cx="2286000" cy="165506"/>
           </a:xfrm>
           <a:prstGeom prst="rect">
             <a:avLst/>
@@ -1833,7 +1980,7 @@
               <a:buNone/>
             </a:pPr>
             <a:r>
-              <a:rPr lang="en-US" sz="950" dirty="0">
+              <a:rPr lang="en-US" sz="900" dirty="0">
                 <a:solidFill>
                   <a:srgbClr val="8FA398"/>
                 </a:solidFill>
@@ -1843,20 +1990,20 @@
               </a:rPr>
               <a:t>トライアルの契約期間</a:t>
             </a:r>
-            <a:endParaRPr lang="en-US" sz="950" dirty="0"/>
-          </a:p>
-        </p:txBody>
-      </p:sp>
-      <p:sp>
-        <p:nvSpPr>
-          <p:cNvPr id="12" name="Text 8"/>
-          <p:cNvSpPr/>
-          <p:nvPr/>
-        </p:nvSpPr>
-        <p:spPr>
-          <a:xfrm>
-            <a:off x="4114800" y="5742432"/>
-            <a:ext cx="2926080" cy="381305"/>
+            <a:endParaRPr lang="en-US" sz="900" dirty="0"/>
+          </a:p>
+        </p:txBody>
+      </p:sp>
+      <p:sp>
+        <p:nvSpPr>
+          <p:cNvPr id="16" name="Text 11"/>
+          <p:cNvSpPr/>
+          <p:nvPr/>
+        </p:nvSpPr>
+        <p:spPr>
+          <a:xfrm>
+            <a:off x="3035808" y="5852160"/>
+            <a:ext cx="2011680" cy="365760"/>
           </a:xfrm>
           <a:prstGeom prst="rect">
             <a:avLst/>
@@ -1872,9 +2019,9 @@
               <a:buNone/>
             </a:pPr>
             <a:r>
-              <a:rPr lang="en-US" sz="2600" b="1" dirty="0">
-                <a:solidFill>
-                  <a:srgbClr val="FFFFFF"/>
+              <a:rPr lang="en-US" sz="2400" b="1" dirty="0">
+                <a:solidFill>
+                  <a:srgbClr val="F0C05A"/>
                 </a:solidFill>
                 <a:latin typeface="Arial" pitchFamily="34" charset="0"/>
                 <a:ea typeface="Arial" pitchFamily="34" charset="-122"/>
@@ -1883,9 +2030,9 @@
               <a:t>25</a:t>
             </a:r>
             <a:r>
-              <a:rPr lang="en-US" sz="1200" b="1" dirty="0">
-                <a:solidFill>
-                  <a:srgbClr val="FFFFFF"/>
+              <a:rPr lang="en-US" sz="1150" b="1" dirty="0">
+                <a:solidFill>
+                  <a:srgbClr val="F0C05A"/>
                 </a:solidFill>
                 <a:latin typeface="Yu Gothic" pitchFamily="34" charset="0"/>
                 <a:ea typeface="Yu Gothic" pitchFamily="34" charset="-122"/>
@@ -1893,20 +2040,20 @@
               </a:rPr>
               <a:t> ％</a:t>
             </a:r>
-            <a:endParaRPr lang="en-US" sz="2600" dirty="0"/>
-          </a:p>
-        </p:txBody>
-      </p:sp>
-      <p:sp>
-        <p:nvSpPr>
-          <p:cNvPr id="13" name="Text 9"/>
-          <p:cNvSpPr/>
-          <p:nvPr/>
-        </p:nvSpPr>
-        <p:spPr>
-          <a:xfrm>
-            <a:off x="4114800" y="6144768"/>
-            <a:ext cx="3291840" cy="165506"/>
+            <a:endParaRPr lang="en-US" sz="2400" dirty="0"/>
+          </a:p>
+        </p:txBody>
+      </p:sp>
+      <p:sp>
+        <p:nvSpPr>
+          <p:cNvPr id="17" name="Text 12"/>
+          <p:cNvSpPr/>
+          <p:nvPr/>
+        </p:nvSpPr>
+        <p:spPr>
+          <a:xfrm>
+            <a:off x="3035808" y="6236208"/>
+            <a:ext cx="2286000" cy="165506"/>
           </a:xfrm>
           <a:prstGeom prst="rect">
             <a:avLst/>
@@ -1922,7 +2069,7 @@
               <a:buNone/>
             </a:pPr>
             <a:r>
-              <a:rPr lang="en-US" sz="950" dirty="0">
+              <a:rPr lang="en-US" sz="900" dirty="0">
                 <a:solidFill>
                   <a:srgbClr val="8FA398"/>
                 </a:solidFill>
@@ -1932,20 +2079,20 @@
               </a:rPr>
               <a:t>売上からのお受取</a:t>
             </a:r>
-            <a:endParaRPr lang="en-US" sz="950" dirty="0"/>
-          </a:p>
-        </p:txBody>
-      </p:sp>
-      <p:sp>
-        <p:nvSpPr>
-          <p:cNvPr id="14" name="Text 10"/>
-          <p:cNvSpPr/>
-          <p:nvPr/>
-        </p:nvSpPr>
-        <p:spPr>
-          <a:xfrm>
-            <a:off x="7406640" y="5742432"/>
-            <a:ext cx="2926080" cy="381305"/>
+            <a:endParaRPr lang="en-US" sz="900" dirty="0"/>
+          </a:p>
+        </p:txBody>
+      </p:sp>
+      <p:sp>
+        <p:nvSpPr>
+          <p:cNvPr id="18" name="Text 13"/>
+          <p:cNvSpPr/>
+          <p:nvPr/>
+        </p:nvSpPr>
+        <p:spPr>
+          <a:xfrm>
+            <a:off x="5257800" y="5852160"/>
+            <a:ext cx="2011680" cy="365760"/>
           </a:xfrm>
           <a:prstGeom prst="rect">
             <a:avLst/>
@@ -1961,9 +2108,9 @@
               <a:buNone/>
             </a:pPr>
             <a:r>
-              <a:rPr lang="en-US" sz="2600" b="1" dirty="0">
-                <a:solidFill>
-                  <a:srgbClr val="FFFFFF"/>
+              <a:rPr lang="en-US" sz="2400" b="1" dirty="0">
+                <a:solidFill>
+                  <a:srgbClr val="F0C05A"/>
                 </a:solidFill>
                 <a:latin typeface="Arial" pitchFamily="34" charset="0"/>
                 <a:ea typeface="Arial" pitchFamily="34" charset="-122"/>
@@ -1972,9 +2119,9 @@
               <a:t>0</a:t>
             </a:r>
             <a:r>
-              <a:rPr lang="en-US" sz="1200" b="1" dirty="0">
-                <a:solidFill>
-                  <a:srgbClr val="FFFFFF"/>
+              <a:rPr lang="en-US" sz="1150" b="1" dirty="0">
+                <a:solidFill>
+                  <a:srgbClr val="F0C05A"/>
                 </a:solidFill>
                 <a:latin typeface="Yu Gothic" pitchFamily="34" charset="0"/>
                 <a:ea typeface="Yu Gothic" pitchFamily="34" charset="-122"/>
@@ -1982,20 +2129,20 @@
               </a:rPr>
               <a:t> 円</a:t>
             </a:r>
-            <a:endParaRPr lang="en-US" sz="2600" dirty="0"/>
-          </a:p>
-        </p:txBody>
-      </p:sp>
-      <p:sp>
-        <p:nvSpPr>
-          <p:cNvPr id="15" name="Text 11"/>
-          <p:cNvSpPr/>
-          <p:nvPr/>
-        </p:nvSpPr>
-        <p:spPr>
-          <a:xfrm>
-            <a:off x="7406640" y="6144768"/>
-            <a:ext cx="3291840" cy="165506"/>
+            <a:endParaRPr lang="en-US" sz="2400" dirty="0"/>
+          </a:p>
+        </p:txBody>
+      </p:sp>
+      <p:sp>
+        <p:nvSpPr>
+          <p:cNvPr id="19" name="Text 14"/>
+          <p:cNvSpPr/>
+          <p:nvPr/>
+        </p:nvSpPr>
+        <p:spPr>
+          <a:xfrm>
+            <a:off x="5257800" y="6236208"/>
+            <a:ext cx="2286000" cy="165506"/>
           </a:xfrm>
           <a:prstGeom prst="rect">
             <a:avLst/>
@@ -2011,7 +2158,7 @@
               <a:buNone/>
             </a:pPr>
             <a:r>
-              <a:rPr lang="en-US" sz="950" dirty="0">
+              <a:rPr lang="en-US" sz="900" dirty="0">
                 <a:solidFill>
                   <a:srgbClr val="8FA398"/>
                 </a:solidFill>
@@ -2021,20 +2168,20 @@
               </a:rPr>
               <a:t>内装工事費のご負担</a:t>
             </a:r>
-            <a:endParaRPr lang="en-US" sz="950" dirty="0"/>
-          </a:p>
-        </p:txBody>
-      </p:sp>
-      <p:sp>
-        <p:nvSpPr>
-          <p:cNvPr id="16" name="Shape 12"/>
-          <p:cNvSpPr/>
-          <p:nvPr/>
-        </p:nvSpPr>
-        <p:spPr>
-          <a:xfrm>
-            <a:off x="3712464" y="5769864"/>
-            <a:ext cx="11887" cy="533095"/>
+            <a:endParaRPr lang="en-US" sz="900" dirty="0"/>
+          </a:p>
+        </p:txBody>
+      </p:sp>
+      <p:sp>
+        <p:nvSpPr>
+          <p:cNvPr id="20" name="Shape 15"/>
+          <p:cNvSpPr/>
+          <p:nvPr/>
+        </p:nvSpPr>
+        <p:spPr>
+          <a:xfrm>
+            <a:off x="2798064" y="5879592"/>
+            <a:ext cx="11887" cy="512064"/>
           </a:xfrm>
           <a:prstGeom prst="rect">
             <a:avLst/>
@@ -2047,14 +2194,14 @@
       </p:sp>
       <p:sp>
         <p:nvSpPr>
-          <p:cNvPr id="17" name="Shape 13"/>
-          <p:cNvSpPr/>
-          <p:nvPr/>
-        </p:nvSpPr>
-        <p:spPr>
-          <a:xfrm>
-            <a:off x="7004304" y="5769864"/>
-            <a:ext cx="11887" cy="533095"/>
+          <p:cNvPr id="21" name="Shape 16"/>
+          <p:cNvSpPr/>
+          <p:nvPr/>
+        </p:nvSpPr>
+        <p:spPr>
+          <a:xfrm>
+            <a:off x="5020056" y="5879592"/>
+            <a:ext cx="11887" cy="512064"/>
           </a:xfrm>
           <a:prstGeom prst="rect">
             <a:avLst/>
@@ -2064,45 +2211,6 @@
           </a:solidFill>
           <a:ln/>
         </p:spPr>
-      </p:sp>
-      <p:sp>
-        <p:nvSpPr>
-          <p:cNvPr id="18" name="Text 14"/>
-          <p:cNvSpPr/>
-          <p:nvPr/>
-        </p:nvSpPr>
-        <p:spPr>
-          <a:xfrm>
-            <a:off x="8889797" y="6309360"/>
-            <a:ext cx="2641702" cy="177394"/>
-          </a:xfrm>
-          <a:prstGeom prst="rect">
-            <a:avLst/>
-          </a:prstGeom>
-          <a:noFill/>
-          <a:ln/>
-        </p:spPr>
-        <p:txBody>
-          <a:bodyPr wrap="square" lIns="0" tIns="0" rIns="0" bIns="0" rtlCol="0" anchor="ctr"/>
-          <a:lstStyle/>
-          <a:p>
-            <a:pPr algn="r" indent="0" marL="0">
-              <a:buNone/>
-            </a:pPr>
-            <a:r>
-              <a:rPr lang="en-US" sz="950" dirty="0">
-                <a:solidFill>
-                  <a:srgbClr val="8FA398"/>
-                </a:solidFill>
-                <a:latin typeface="Yu Gothic" pitchFamily="34" charset="0"/>
-                <a:ea typeface="Yu Gothic" pitchFamily="34" charset="-122"/>
-                <a:cs typeface="Yu Gothic" pitchFamily="34" charset="-120"/>
-              </a:rPr>
-              <a:t>セルフカフェ株式会社</a:t>
-            </a:r>
-            <a:endParaRPr lang="en-US" sz="950" dirty="0"/>
-          </a:p>
-        </p:txBody>
       </p:sp>
     </p:spTree>
   </p:cSld>
@@ -2200,7 +2308,7 @@
                 <a:ea typeface="Yu Gothic" pitchFamily="34" charset="-122"/>
                 <a:cs typeface="Yu Gothic" pitchFamily="34" charset="-120"/>
               </a:rPr>
-              <a:t>   トライアル条件</a:t>
+              <a:t>   内装イメージ（ご参考）</a:t>
             </a:r>
             <a:endParaRPr lang="en-US" sz="1050" dirty="0"/>
           </a:p>
@@ -2239,7 +2347,7 @@
                 <a:ea typeface="Yu Gothic" pitchFamily="34" charset="-122"/>
                 <a:cs typeface="Yu Gothic" pitchFamily="34" charset="-120"/>
               </a:rPr>
-              <a:t>トライアル導入の条件をご提案します。</a:t>
+              <a:t>プレミアム仕様なら、こんな仕上がりになります。</a:t>
             </a:r>
             <a:endParaRPr lang="en-US" sz="2900" dirty="0"/>
           </a:p>
@@ -2278,7 +2386,7 @@
                 <a:ea typeface="Yu Gothic" pitchFamily="34" charset="-122"/>
                 <a:cs typeface="Yu Gothic" pitchFamily="34" charset="-120"/>
               </a:rPr>
-              <a:t>メールにてご提示した内容を、あらためて整理したものです。</a:t>
+              <a:t>ご要望をいただいたプレミアム仕様の完成イメージです。木製書架と間接照明でまとめた書店一体型の仕様です。</a:t>
             </a:r>
             <a:endParaRPr lang="en-US" sz="1250" dirty="0"/>
           </a:p>
@@ -2395,11 +2503,569 @@
         <p:spPr>
           <a:xfrm>
             <a:off x="660197" y="1651406"/>
-            <a:ext cx="6858000" cy="621792"/>
+            <a:ext cx="2194560" cy="237744"/>
           </a:xfrm>
           <a:prstGeom prst="roundRect">
             <a:avLst>
-              <a:gd name="adj" fmla="val 8824"/>
+              <a:gd name="adj" fmla="val 19231"/>
+            </a:avLst>
+          </a:prstGeom>
+          <a:solidFill>
+            <a:srgbClr val="106838"/>
+          </a:solidFill>
+          <a:ln/>
+        </p:spPr>
+      </p:sp>
+      <p:sp>
+        <p:nvSpPr>
+          <p:cNvPr id="10" name="Text 7"/>
+          <p:cNvSpPr/>
+          <p:nvPr/>
+        </p:nvSpPr>
+        <p:spPr>
+          <a:xfrm>
+            <a:off x="660197" y="1651406"/>
+            <a:ext cx="2194560" cy="237744"/>
+          </a:xfrm>
+          <a:prstGeom prst="rect">
+            <a:avLst/>
+          </a:prstGeom>
+          <a:noFill/>
+          <a:ln/>
+        </p:spPr>
+        <p:txBody>
+          <a:bodyPr wrap="square" lIns="0" tIns="0" rIns="0" bIns="0" rtlCol="0" anchor="ctr"/>
+          <a:lstStyle/>
+          <a:p>
+            <a:pPr algn="ctr" indent="0" marL="0">
+              <a:buNone/>
+            </a:pPr>
+            <a:r>
+              <a:rPr lang="en-US" sz="950" b="1" dirty="0">
+                <a:solidFill>
+                  <a:srgbClr val="FFFFFF"/>
+                </a:solidFill>
+                <a:latin typeface="Yu Gothic" pitchFamily="34" charset="0"/>
+                <a:ea typeface="Yu Gothic" pitchFamily="34" charset="-122"/>
+                <a:cs typeface="Yu Gothic" pitchFamily="34" charset="-120"/>
+              </a:rPr>
+              <a:t>N案：ライトフロア</a:t>
+            </a:r>
+            <a:endParaRPr lang="en-US" sz="950" dirty="0"/>
+          </a:p>
+        </p:txBody>
+      </p:sp>
+      <p:sp>
+        <p:nvSpPr>
+          <p:cNvPr id="11" name="Shape 8"/>
+          <p:cNvSpPr/>
+          <p:nvPr/>
+        </p:nvSpPr>
+        <p:spPr>
+          <a:xfrm>
+            <a:off x="4345229" y="1651406"/>
+            <a:ext cx="2194560" cy="237744"/>
+          </a:xfrm>
+          <a:prstGeom prst="roundRect">
+            <a:avLst>
+              <a:gd name="adj" fmla="val 19231"/>
+            </a:avLst>
+          </a:prstGeom>
+          <a:solidFill>
+            <a:srgbClr val="106838"/>
+          </a:solidFill>
+          <a:ln/>
+        </p:spPr>
+      </p:sp>
+      <p:sp>
+        <p:nvSpPr>
+          <p:cNvPr id="12" name="Text 9"/>
+          <p:cNvSpPr/>
+          <p:nvPr/>
+        </p:nvSpPr>
+        <p:spPr>
+          <a:xfrm>
+            <a:off x="4345229" y="1651406"/>
+            <a:ext cx="2194560" cy="237744"/>
+          </a:xfrm>
+          <a:prstGeom prst="rect">
+            <a:avLst/>
+          </a:prstGeom>
+          <a:noFill/>
+          <a:ln/>
+        </p:spPr>
+        <p:txBody>
+          <a:bodyPr wrap="square" lIns="0" tIns="0" rIns="0" bIns="0" rtlCol="0" anchor="ctr"/>
+          <a:lstStyle/>
+          <a:p>
+            <a:pPr algn="ctr" indent="0" marL="0">
+              <a:buNone/>
+            </a:pPr>
+            <a:r>
+              <a:rPr lang="en-US" sz="950" b="1" dirty="0">
+                <a:solidFill>
+                  <a:srgbClr val="FFFFFF"/>
+                </a:solidFill>
+                <a:latin typeface="Yu Gothic" pitchFamily="34" charset="0"/>
+                <a:ea typeface="Yu Gothic" pitchFamily="34" charset="-122"/>
+                <a:cs typeface="Yu Gothic" pitchFamily="34" charset="-120"/>
+              </a:rPr>
+              <a:t>G案：グリーンフロア</a:t>
+            </a:r>
+            <a:endParaRPr lang="en-US" sz="950" dirty="0"/>
+          </a:p>
+        </p:txBody>
+      </p:sp>
+      <p:pic>
+        <p:nvPicPr>
+          <p:cNvPr id="13" name="Image 1" descr="/home/user/suzuki-ceo/selfcafe-miraiya-trial-deck/assets/photos/.crops/tsuchiura-premium-n-375x211.jpg">    </p:cNvPr>
+          <p:cNvPicPr>
+            <a:picLocks noChangeAspect="1"/>
+          </p:cNvPicPr>
+          <p:nvPr/>
+        </p:nvPicPr>
+        <p:blipFill>
+          <a:blip r:embed="rId2"/>
+          <a:stretch>
+            <a:fillRect/>
+          </a:stretch>
+        </p:blipFill>
+        <p:spPr>
+          <a:xfrm>
+            <a:off x="660197" y="1920240"/>
+            <a:ext cx="3429000" cy="1928813"/>
+          </a:xfrm>
+          <a:prstGeom prst="rect">
+            <a:avLst/>
+          </a:prstGeom>
+        </p:spPr>
+      </p:pic>
+      <p:sp>
+        <p:nvSpPr>
+          <p:cNvPr id="14" name="Shape 10"/>
+          <p:cNvSpPr/>
+          <p:nvPr/>
+        </p:nvSpPr>
+        <p:spPr>
+          <a:xfrm>
+            <a:off x="660197" y="1920240"/>
+            <a:ext cx="3429000" cy="1928813"/>
+          </a:xfrm>
+          <a:prstGeom prst="rect">
+            <a:avLst/>
+          </a:prstGeom>
+          <a:ln w="12700">
+            <a:solidFill>
+              <a:srgbClr val="D8D2C6"/>
+            </a:solidFill>
+            <a:prstDash val="solid"/>
+          </a:ln>
+        </p:spPr>
+      </p:sp>
+      <p:sp>
+        <p:nvSpPr>
+          <p:cNvPr id="15" name="Shape 11"/>
+          <p:cNvSpPr/>
+          <p:nvPr/>
+        </p:nvSpPr>
+        <p:spPr>
+          <a:xfrm>
+            <a:off x="788213" y="3391852"/>
+            <a:ext cx="749427" cy="329184"/>
+          </a:xfrm>
+          <a:prstGeom prst="roundRect">
+            <a:avLst>
+              <a:gd name="adj" fmla="val 13889"/>
+            </a:avLst>
+          </a:prstGeom>
+          <a:solidFill>
+            <a:srgbClr val="FFFFFF">
+              <a:alpha val="90000"/>
+            </a:srgbClr>
+          </a:solidFill>
+          <a:ln/>
+        </p:spPr>
+      </p:sp>
+      <p:sp>
+        <p:nvSpPr>
+          <p:cNvPr id="16" name="Text 12"/>
+          <p:cNvSpPr/>
+          <p:nvPr/>
+        </p:nvSpPr>
+        <p:spPr>
+          <a:xfrm>
+            <a:off x="952805" y="3391852"/>
+            <a:ext cx="475107" cy="329184"/>
+          </a:xfrm>
+          <a:prstGeom prst="rect">
+            <a:avLst/>
+          </a:prstGeom>
+          <a:noFill/>
+          <a:ln/>
+        </p:spPr>
+        <p:txBody>
+          <a:bodyPr wrap="square" lIns="0" tIns="0" rIns="0" bIns="0" rtlCol="0" anchor="ctr"/>
+          <a:lstStyle/>
+          <a:p>
+            <a:pPr indent="0" marL="0">
+              <a:buNone/>
+            </a:pPr>
+            <a:r>
+              <a:rPr lang="en-US" sz="950" b="1" dirty="0">
+                <a:solidFill>
+                  <a:srgbClr val="0A3D23"/>
+                </a:solidFill>
+                <a:latin typeface="Yu Gothic" pitchFamily="34" charset="0"/>
+                <a:ea typeface="Yu Gothic" pitchFamily="34" charset="-122"/>
+                <a:cs typeface="Yu Gothic" pitchFamily="34" charset="-120"/>
+              </a:rPr>
+              <a:t>土浦店</a:t>
+            </a:r>
+            <a:endParaRPr lang="en-US" sz="950" dirty="0"/>
+          </a:p>
+        </p:txBody>
+      </p:sp>
+      <p:pic>
+        <p:nvPicPr>
+          <p:cNvPr id="17" name="Image 2" descr="/home/user/suzuki-ceo/selfcafe-miraiya-trial-deck/assets/photos/.crops/tsuchiura-premium-g-375x211.jpg">    </p:cNvPr>
+          <p:cNvPicPr>
+            <a:picLocks noChangeAspect="1"/>
+          </p:cNvPicPr>
+          <p:nvPr/>
+        </p:nvPicPr>
+        <p:blipFill>
+          <a:blip r:embed="rId3"/>
+          <a:stretch>
+            <a:fillRect/>
+          </a:stretch>
+        </p:blipFill>
+        <p:spPr>
+          <a:xfrm>
+            <a:off x="4345229" y="1920240"/>
+            <a:ext cx="3429000" cy="1928813"/>
+          </a:xfrm>
+          <a:prstGeom prst="rect">
+            <a:avLst/>
+          </a:prstGeom>
+        </p:spPr>
+      </p:pic>
+      <p:sp>
+        <p:nvSpPr>
+          <p:cNvPr id="18" name="Shape 13"/>
+          <p:cNvSpPr/>
+          <p:nvPr/>
+        </p:nvSpPr>
+        <p:spPr>
+          <a:xfrm>
+            <a:off x="4345229" y="1920240"/>
+            <a:ext cx="3429000" cy="1928813"/>
+          </a:xfrm>
+          <a:prstGeom prst="rect">
+            <a:avLst/>
+          </a:prstGeom>
+          <a:ln w="12700">
+            <a:solidFill>
+              <a:srgbClr val="D8D2C6"/>
+            </a:solidFill>
+            <a:prstDash val="solid"/>
+          </a:ln>
+        </p:spPr>
+      </p:sp>
+      <p:sp>
+        <p:nvSpPr>
+          <p:cNvPr id="19" name="Shape 14"/>
+          <p:cNvSpPr/>
+          <p:nvPr/>
+        </p:nvSpPr>
+        <p:spPr>
+          <a:xfrm>
+            <a:off x="4473245" y="3391852"/>
+            <a:ext cx="749427" cy="329184"/>
+          </a:xfrm>
+          <a:prstGeom prst="roundRect">
+            <a:avLst>
+              <a:gd name="adj" fmla="val 13889"/>
+            </a:avLst>
+          </a:prstGeom>
+          <a:solidFill>
+            <a:srgbClr val="FFFFFF">
+              <a:alpha val="90000"/>
+            </a:srgbClr>
+          </a:solidFill>
+          <a:ln/>
+        </p:spPr>
+      </p:sp>
+      <p:sp>
+        <p:nvSpPr>
+          <p:cNvPr id="20" name="Text 15"/>
+          <p:cNvSpPr/>
+          <p:nvPr/>
+        </p:nvSpPr>
+        <p:spPr>
+          <a:xfrm>
+            <a:off x="4637837" y="3391852"/>
+            <a:ext cx="475107" cy="329184"/>
+          </a:xfrm>
+          <a:prstGeom prst="rect">
+            <a:avLst/>
+          </a:prstGeom>
+          <a:noFill/>
+          <a:ln/>
+        </p:spPr>
+        <p:txBody>
+          <a:bodyPr wrap="square" lIns="0" tIns="0" rIns="0" bIns="0" rtlCol="0" anchor="ctr"/>
+          <a:lstStyle/>
+          <a:p>
+            <a:pPr indent="0" marL="0">
+              <a:buNone/>
+            </a:pPr>
+            <a:r>
+              <a:rPr lang="en-US" sz="950" b="1" dirty="0">
+                <a:solidFill>
+                  <a:srgbClr val="0A3D23"/>
+                </a:solidFill>
+                <a:latin typeface="Yu Gothic" pitchFamily="34" charset="0"/>
+                <a:ea typeface="Yu Gothic" pitchFamily="34" charset="-122"/>
+                <a:cs typeface="Yu Gothic" pitchFamily="34" charset="-120"/>
+              </a:rPr>
+              <a:t>土浦店</a:t>
+            </a:r>
+            <a:endParaRPr lang="en-US" sz="950" dirty="0"/>
+          </a:p>
+        </p:txBody>
+      </p:sp>
+      <p:pic>
+        <p:nvPicPr>
+          <p:cNvPr id="21" name="Image 3" descr="/home/user/suzuki-ceo/selfcafe-miraiya-trial-deck/assets/photos/.crops/akita-premium-n-375x211.jpg">    </p:cNvPr>
+          <p:cNvPicPr>
+            <a:picLocks noChangeAspect="1"/>
+          </p:cNvPicPr>
+          <p:nvPr/>
+        </p:nvPicPr>
+        <p:blipFill>
+          <a:blip r:embed="rId4"/>
+          <a:stretch>
+            <a:fillRect/>
+          </a:stretch>
+        </p:blipFill>
+        <p:spPr>
+          <a:xfrm>
+            <a:off x="660197" y="4324540"/>
+            <a:ext cx="3429000" cy="1928813"/>
+          </a:xfrm>
+          <a:prstGeom prst="rect">
+            <a:avLst/>
+          </a:prstGeom>
+        </p:spPr>
+      </p:pic>
+      <p:sp>
+        <p:nvSpPr>
+          <p:cNvPr id="22" name="Shape 16"/>
+          <p:cNvSpPr/>
+          <p:nvPr/>
+        </p:nvSpPr>
+        <p:spPr>
+          <a:xfrm>
+            <a:off x="660197" y="4324540"/>
+            <a:ext cx="3429000" cy="1928813"/>
+          </a:xfrm>
+          <a:prstGeom prst="rect">
+            <a:avLst/>
+          </a:prstGeom>
+          <a:ln w="12700">
+            <a:solidFill>
+              <a:srgbClr val="D8D2C6"/>
+            </a:solidFill>
+            <a:prstDash val="solid"/>
+          </a:ln>
+        </p:spPr>
+      </p:sp>
+      <p:sp>
+        <p:nvSpPr>
+          <p:cNvPr id="23" name="Shape 17"/>
+          <p:cNvSpPr/>
+          <p:nvPr/>
+        </p:nvSpPr>
+        <p:spPr>
+          <a:xfrm>
+            <a:off x="788213" y="5796153"/>
+            <a:ext cx="749427" cy="329184"/>
+          </a:xfrm>
+          <a:prstGeom prst="roundRect">
+            <a:avLst>
+              <a:gd name="adj" fmla="val 13889"/>
+            </a:avLst>
+          </a:prstGeom>
+          <a:solidFill>
+            <a:srgbClr val="FFFFFF">
+              <a:alpha val="90000"/>
+            </a:srgbClr>
+          </a:solidFill>
+          <a:ln/>
+        </p:spPr>
+      </p:sp>
+      <p:sp>
+        <p:nvSpPr>
+          <p:cNvPr id="24" name="Text 18"/>
+          <p:cNvSpPr/>
+          <p:nvPr/>
+        </p:nvSpPr>
+        <p:spPr>
+          <a:xfrm>
+            <a:off x="952805" y="5796153"/>
+            <a:ext cx="475107" cy="329184"/>
+          </a:xfrm>
+          <a:prstGeom prst="rect">
+            <a:avLst/>
+          </a:prstGeom>
+          <a:noFill/>
+          <a:ln/>
+        </p:spPr>
+        <p:txBody>
+          <a:bodyPr wrap="square" lIns="0" tIns="0" rIns="0" bIns="0" rtlCol="0" anchor="ctr"/>
+          <a:lstStyle/>
+          <a:p>
+            <a:pPr indent="0" marL="0">
+              <a:buNone/>
+            </a:pPr>
+            <a:r>
+              <a:rPr lang="en-US" sz="950" b="1" dirty="0">
+                <a:solidFill>
+                  <a:srgbClr val="0A3D23"/>
+                </a:solidFill>
+                <a:latin typeface="Yu Gothic" pitchFamily="34" charset="0"/>
+                <a:ea typeface="Yu Gothic" pitchFamily="34" charset="-122"/>
+                <a:cs typeface="Yu Gothic" pitchFamily="34" charset="-120"/>
+              </a:rPr>
+              <a:t>秋田店</a:t>
+            </a:r>
+            <a:endParaRPr lang="en-US" sz="950" dirty="0"/>
+          </a:p>
+        </p:txBody>
+      </p:sp>
+      <p:pic>
+        <p:nvPicPr>
+          <p:cNvPr id="25" name="Image 4" descr="/home/user/suzuki-ceo/selfcafe-miraiya-trial-deck/assets/photos/.crops/akita-premium-g-375x211.jpg">    </p:cNvPr>
+          <p:cNvPicPr>
+            <a:picLocks noChangeAspect="1"/>
+          </p:cNvPicPr>
+          <p:nvPr/>
+        </p:nvPicPr>
+        <p:blipFill>
+          <a:blip r:embed="rId5"/>
+          <a:stretch>
+            <a:fillRect/>
+          </a:stretch>
+        </p:blipFill>
+        <p:spPr>
+          <a:xfrm>
+            <a:off x="4345229" y="4324540"/>
+            <a:ext cx="3429000" cy="1928813"/>
+          </a:xfrm>
+          <a:prstGeom prst="rect">
+            <a:avLst/>
+          </a:prstGeom>
+        </p:spPr>
+      </p:pic>
+      <p:sp>
+        <p:nvSpPr>
+          <p:cNvPr id="26" name="Shape 19"/>
+          <p:cNvSpPr/>
+          <p:nvPr/>
+        </p:nvSpPr>
+        <p:spPr>
+          <a:xfrm>
+            <a:off x="4345229" y="4324540"/>
+            <a:ext cx="3429000" cy="1928813"/>
+          </a:xfrm>
+          <a:prstGeom prst="rect">
+            <a:avLst/>
+          </a:prstGeom>
+          <a:ln w="12700">
+            <a:solidFill>
+              <a:srgbClr val="D8D2C6"/>
+            </a:solidFill>
+            <a:prstDash val="solid"/>
+          </a:ln>
+        </p:spPr>
+      </p:sp>
+      <p:sp>
+        <p:nvSpPr>
+          <p:cNvPr id="27" name="Shape 20"/>
+          <p:cNvSpPr/>
+          <p:nvPr/>
+        </p:nvSpPr>
+        <p:spPr>
+          <a:xfrm>
+            <a:off x="4473245" y="5796153"/>
+            <a:ext cx="749427" cy="329184"/>
+          </a:xfrm>
+          <a:prstGeom prst="roundRect">
+            <a:avLst>
+              <a:gd name="adj" fmla="val 13889"/>
+            </a:avLst>
+          </a:prstGeom>
+          <a:solidFill>
+            <a:srgbClr val="FFFFFF">
+              <a:alpha val="90000"/>
+            </a:srgbClr>
+          </a:solidFill>
+          <a:ln/>
+        </p:spPr>
+      </p:sp>
+      <p:sp>
+        <p:nvSpPr>
+          <p:cNvPr id="28" name="Text 21"/>
+          <p:cNvSpPr/>
+          <p:nvPr/>
+        </p:nvSpPr>
+        <p:spPr>
+          <a:xfrm>
+            <a:off x="4637837" y="5796153"/>
+            <a:ext cx="475107" cy="329184"/>
+          </a:xfrm>
+          <a:prstGeom prst="rect">
+            <a:avLst/>
+          </a:prstGeom>
+          <a:noFill/>
+          <a:ln/>
+        </p:spPr>
+        <p:txBody>
+          <a:bodyPr wrap="square" lIns="0" tIns="0" rIns="0" bIns="0" rtlCol="0" anchor="ctr"/>
+          <a:lstStyle/>
+          <a:p>
+            <a:pPr indent="0" marL="0">
+              <a:buNone/>
+            </a:pPr>
+            <a:r>
+              <a:rPr lang="en-US" sz="950" b="1" dirty="0">
+                <a:solidFill>
+                  <a:srgbClr val="0A3D23"/>
+                </a:solidFill>
+                <a:latin typeface="Yu Gothic" pitchFamily="34" charset="0"/>
+                <a:ea typeface="Yu Gothic" pitchFamily="34" charset="-122"/>
+                <a:cs typeface="Yu Gothic" pitchFamily="34" charset="-120"/>
+              </a:rPr>
+              <a:t>秋田店</a:t>
+            </a:r>
+            <a:endParaRPr lang="en-US" sz="950" dirty="0"/>
+          </a:p>
+        </p:txBody>
+      </p:sp>
+      <p:sp>
+        <p:nvSpPr>
+          <p:cNvPr id="29" name="Shape 22"/>
+          <p:cNvSpPr/>
+          <p:nvPr/>
+        </p:nvSpPr>
+        <p:spPr>
+          <a:xfrm>
+            <a:off x="8048549" y="1920240"/>
+            <a:ext cx="3482950" cy="1928813"/>
+          </a:xfrm>
+          <a:prstGeom prst="roundRect">
+            <a:avLst>
+              <a:gd name="adj" fmla="val 2844"/>
             </a:avLst>
           </a:prstGeom>
           <a:solidFill>
@@ -2413,40 +3079,16 @@
           </a:ln>
         </p:spPr>
       </p:sp>
-      <p:pic>
-        <p:nvPicPr>
-          <p:cNvPr id="10" name="Image 1" descr="/home/user/suzuki-ceo/selfcafe-miraiya-trial-deck/assets/icons/LuSparkles-green.png">    </p:cNvPr>
-          <p:cNvPicPr>
-            <a:picLocks noChangeAspect="1"/>
-          </p:cNvPicPr>
-          <p:nvPr/>
-        </p:nvPicPr>
-        <p:blipFill>
-          <a:blip r:embed="rId2"/>
-          <a:stretch>
-            <a:fillRect/>
-          </a:stretch>
-        </p:blipFill>
-        <p:spPr>
-          <a:xfrm>
-            <a:off x="916229" y="1797710"/>
-            <a:ext cx="329184" cy="329184"/>
-          </a:xfrm>
-          <a:prstGeom prst="rect">
-            <a:avLst/>
-          </a:prstGeom>
-        </p:spPr>
-      </p:pic>
-      <p:sp>
-        <p:nvSpPr>
-          <p:cNvPr id="11" name="Text 7"/>
-          <p:cNvSpPr/>
-          <p:nvPr/>
-        </p:nvSpPr>
-        <p:spPr>
-          <a:xfrm>
-            <a:off x="1373429" y="1706270"/>
-            <a:ext cx="5888736" cy="237744"/>
+      <p:sp>
+        <p:nvSpPr>
+          <p:cNvPr id="30" name="Text 23"/>
+          <p:cNvSpPr/>
+          <p:nvPr/>
+        </p:nvSpPr>
+        <p:spPr>
+          <a:xfrm>
+            <a:off x="8286293" y="2066544"/>
+            <a:ext cx="3007462" cy="237744"/>
           </a:xfrm>
           <a:prstGeom prst="rect">
             <a:avLst/>
@@ -2462,7 +3104,7 @@
               <a:buNone/>
             </a:pPr>
             <a:r>
-              <a:rPr lang="en-US" sz="1150" b="1" dirty="0">
+              <a:rPr lang="en-US" sz="1050" b="1" dirty="0">
                 <a:solidFill>
                   <a:srgbClr val="106838"/>
                 </a:solidFill>
@@ -2470,468 +3112,15 @@
                 <a:ea typeface="Yu Gothic" pitchFamily="34" charset="-122"/>
                 <a:cs typeface="Yu Gothic" pitchFamily="34" charset="-120"/>
               </a:rPr>
-              <a:t>内装仕様</a:t>
-            </a:r>
-            <a:endParaRPr lang="en-US" sz="1150" dirty="0"/>
-          </a:p>
-        </p:txBody>
-      </p:sp>
-      <p:sp>
-        <p:nvSpPr>
-          <p:cNvPr id="12" name="Text 8"/>
-          <p:cNvSpPr/>
-          <p:nvPr/>
-        </p:nvSpPr>
-        <p:spPr>
-          <a:xfrm>
-            <a:off x="1373429" y="1962302"/>
-            <a:ext cx="5888736" cy="256032"/>
-          </a:xfrm>
-          <a:prstGeom prst="rect">
-            <a:avLst/>
-          </a:prstGeom>
-          <a:noFill/>
-          <a:ln/>
-        </p:spPr>
-        <p:txBody>
-          <a:bodyPr wrap="square" lIns="0" tIns="0" rIns="0" bIns="0" rtlCol="0" anchor="ctr"/>
-          <a:lstStyle/>
-          <a:p>
-            <a:pPr indent="0" marL="0">
-              <a:buNone/>
-            </a:pPr>
-            <a:r>
-              <a:rPr lang="en-US" sz="1050" dirty="0">
-                <a:solidFill>
-                  <a:srgbClr val="0A3D23"/>
-                </a:solidFill>
-                <a:latin typeface="Yu Gothic" pitchFamily="34" charset="0"/>
-                <a:ea typeface="Yu Gothic" pitchFamily="34" charset="-122"/>
-                <a:cs typeface="Yu Gothic" pitchFamily="34" charset="-120"/>
-              </a:rPr>
-              <a:t>プレミアム仕様（木製書架・間接照明の書店一体型）</a:t>
+              <a:t>プレミアム仕様の特徴</a:t>
             </a:r>
             <a:endParaRPr lang="en-US" sz="1050" dirty="0"/>
           </a:p>
         </p:txBody>
-      </p:sp>
-      <p:sp>
-        <p:nvSpPr>
-          <p:cNvPr id="13" name="Shape 9"/>
-          <p:cNvSpPr/>
-          <p:nvPr/>
-        </p:nvSpPr>
-        <p:spPr>
-          <a:xfrm>
-            <a:off x="660197" y="2364638"/>
-            <a:ext cx="6858000" cy="621792"/>
-          </a:xfrm>
-          <a:prstGeom prst="roundRect">
-            <a:avLst>
-              <a:gd name="adj" fmla="val 8824"/>
-            </a:avLst>
-          </a:prstGeom>
-          <a:solidFill>
-            <a:srgbClr val="F1F8F3"/>
-          </a:solidFill>
-          <a:ln w="9525">
-            <a:solidFill>
-              <a:srgbClr val="D2E7DA"/>
-            </a:solidFill>
-            <a:prstDash val="solid"/>
-          </a:ln>
-        </p:spPr>
       </p:sp>
       <p:pic>
         <p:nvPicPr>
-          <p:cNvPr id="14" name="Image 2" descr="/home/user/suzuki-ceo/selfcafe-miraiya-trial-deck/assets/icons/LuHammer-green.png">    </p:cNvPr>
-          <p:cNvPicPr>
-            <a:picLocks noChangeAspect="1"/>
-          </p:cNvPicPr>
-          <p:nvPr/>
-        </p:nvPicPr>
-        <p:blipFill>
-          <a:blip r:embed="rId3"/>
-          <a:stretch>
-            <a:fillRect/>
-          </a:stretch>
-        </p:blipFill>
-        <p:spPr>
-          <a:xfrm>
-            <a:off x="916229" y="2510942"/>
-            <a:ext cx="329184" cy="329184"/>
-          </a:xfrm>
-          <a:prstGeom prst="rect">
-            <a:avLst/>
-          </a:prstGeom>
-        </p:spPr>
-      </p:pic>
-      <p:sp>
-        <p:nvSpPr>
-          <p:cNvPr id="15" name="Text 10"/>
-          <p:cNvSpPr/>
-          <p:nvPr/>
-        </p:nvSpPr>
-        <p:spPr>
-          <a:xfrm>
-            <a:off x="1373429" y="2419502"/>
-            <a:ext cx="5888736" cy="237744"/>
-          </a:xfrm>
-          <a:prstGeom prst="rect">
-            <a:avLst/>
-          </a:prstGeom>
-          <a:noFill/>
-          <a:ln/>
-        </p:spPr>
-        <p:txBody>
-          <a:bodyPr wrap="square" lIns="0" tIns="0" rIns="0" bIns="0" rtlCol="0" anchor="ctr"/>
-          <a:lstStyle/>
-          <a:p>
-            <a:pPr indent="0" marL="0">
-              <a:buNone/>
-            </a:pPr>
-            <a:r>
-              <a:rPr lang="en-US" sz="1150" b="1" dirty="0">
-                <a:solidFill>
-                  <a:srgbClr val="106838"/>
-                </a:solidFill>
-                <a:latin typeface="Yu Gothic" pitchFamily="34" charset="0"/>
-                <a:ea typeface="Yu Gothic" pitchFamily="34" charset="-122"/>
-                <a:cs typeface="Yu Gothic" pitchFamily="34" charset="-120"/>
-              </a:rPr>
-              <a:t>工事部分</a:t>
-            </a:r>
-            <a:endParaRPr lang="en-US" sz="1150" dirty="0"/>
-          </a:p>
-        </p:txBody>
-      </p:sp>
-      <p:sp>
-        <p:nvSpPr>
-          <p:cNvPr id="16" name="Text 11"/>
-          <p:cNvSpPr/>
-          <p:nvPr/>
-        </p:nvSpPr>
-        <p:spPr>
-          <a:xfrm>
-            <a:off x="1373429" y="2675534"/>
-            <a:ext cx="5888736" cy="256032"/>
-          </a:xfrm>
-          <a:prstGeom prst="rect">
-            <a:avLst/>
-          </a:prstGeom>
-          <a:noFill/>
-          <a:ln/>
-        </p:spPr>
-        <p:txBody>
-          <a:bodyPr wrap="square" lIns="0" tIns="0" rIns="0" bIns="0" rtlCol="0" anchor="ctr"/>
-          <a:lstStyle/>
-          <a:p>
-            <a:pPr indent="0" marL="0">
-              <a:buNone/>
-            </a:pPr>
-            <a:r>
-              <a:rPr lang="en-US" sz="1050" dirty="0">
-                <a:solidFill>
-                  <a:srgbClr val="0A3D23"/>
-                </a:solidFill>
-                <a:latin typeface="Yu Gothic" pitchFamily="34" charset="0"/>
-                <a:ea typeface="Yu Gothic" pitchFamily="34" charset="-122"/>
-                <a:cs typeface="Yu Gothic" pitchFamily="34" charset="-120"/>
-              </a:rPr>
-              <a:t>セルフカフェが負担します（御社のご負担なし）</a:t>
-            </a:r>
-            <a:endParaRPr lang="en-US" sz="1050" dirty="0"/>
-          </a:p>
-        </p:txBody>
-      </p:sp>
-      <p:sp>
-        <p:nvSpPr>
-          <p:cNvPr id="17" name="Shape 12"/>
-          <p:cNvSpPr/>
-          <p:nvPr/>
-        </p:nvSpPr>
-        <p:spPr>
-          <a:xfrm>
-            <a:off x="660197" y="3077870"/>
-            <a:ext cx="6858000" cy="621792"/>
-          </a:xfrm>
-          <a:prstGeom prst="roundRect">
-            <a:avLst>
-              <a:gd name="adj" fmla="val 8824"/>
-            </a:avLst>
-          </a:prstGeom>
-          <a:solidFill>
-            <a:srgbClr val="F1F8F3"/>
-          </a:solidFill>
-          <a:ln w="9525">
-            <a:solidFill>
-              <a:srgbClr val="D2E7DA"/>
-            </a:solidFill>
-            <a:prstDash val="solid"/>
-          </a:ln>
-        </p:spPr>
-      </p:sp>
-      <p:pic>
-        <p:nvPicPr>
-          <p:cNvPr id="18" name="Image 3" descr="/home/user/suzuki-ceo/selfcafe-miraiya-trial-deck/assets/icons/LuLandPlot-green.png">    </p:cNvPr>
-          <p:cNvPicPr>
-            <a:picLocks noChangeAspect="1"/>
-          </p:cNvPicPr>
-          <p:nvPr/>
-        </p:nvPicPr>
-        <p:blipFill>
-          <a:blip r:embed="rId4"/>
-          <a:stretch>
-            <a:fillRect/>
-          </a:stretch>
-        </p:blipFill>
-        <p:spPr>
-          <a:xfrm>
-            <a:off x="916229" y="3224174"/>
-            <a:ext cx="329184" cy="329184"/>
-          </a:xfrm>
-          <a:prstGeom prst="rect">
-            <a:avLst/>
-          </a:prstGeom>
-        </p:spPr>
-      </p:pic>
-      <p:sp>
-        <p:nvSpPr>
-          <p:cNvPr id="19" name="Text 13"/>
-          <p:cNvSpPr/>
-          <p:nvPr/>
-        </p:nvSpPr>
-        <p:spPr>
-          <a:xfrm>
-            <a:off x="1373429" y="3132734"/>
-            <a:ext cx="5888736" cy="237744"/>
-          </a:xfrm>
-          <a:prstGeom prst="rect">
-            <a:avLst/>
-          </a:prstGeom>
-          <a:noFill/>
-          <a:ln/>
-        </p:spPr>
-        <p:txBody>
-          <a:bodyPr wrap="square" lIns="0" tIns="0" rIns="0" bIns="0" rtlCol="0" anchor="ctr"/>
-          <a:lstStyle/>
-          <a:p>
-            <a:pPr indent="0" marL="0">
-              <a:buNone/>
-            </a:pPr>
-            <a:r>
-              <a:rPr lang="en-US" sz="1150" b="1" dirty="0">
-                <a:solidFill>
-                  <a:srgbClr val="106838"/>
-                </a:solidFill>
-                <a:latin typeface="Yu Gothic" pitchFamily="34" charset="0"/>
-                <a:ea typeface="Yu Gothic" pitchFamily="34" charset="-122"/>
-                <a:cs typeface="Yu Gothic" pitchFamily="34" charset="-120"/>
-              </a:rPr>
-              <a:t>家具・什器</a:t>
-            </a:r>
-            <a:endParaRPr lang="en-US" sz="1150" dirty="0"/>
-          </a:p>
-        </p:txBody>
-      </p:sp>
-      <p:sp>
-        <p:nvSpPr>
-          <p:cNvPr id="20" name="Text 14"/>
-          <p:cNvSpPr/>
-          <p:nvPr/>
-        </p:nvSpPr>
-        <p:spPr>
-          <a:xfrm>
-            <a:off x="1373429" y="3388766"/>
-            <a:ext cx="5888736" cy="256032"/>
-          </a:xfrm>
-          <a:prstGeom prst="rect">
-            <a:avLst/>
-          </a:prstGeom>
-          <a:noFill/>
-          <a:ln/>
-        </p:spPr>
-        <p:txBody>
-          <a:bodyPr wrap="square" lIns="0" tIns="0" rIns="0" bIns="0" rtlCol="0" anchor="ctr"/>
-          <a:lstStyle/>
-          <a:p>
-            <a:pPr indent="0" marL="0">
-              <a:buNone/>
-            </a:pPr>
-            <a:r>
-              <a:rPr lang="en-US" sz="1050" dirty="0">
-                <a:solidFill>
-                  <a:srgbClr val="0A3D23"/>
-                </a:solidFill>
-                <a:latin typeface="Yu Gothic" pitchFamily="34" charset="0"/>
-                <a:ea typeface="Yu Gothic" pitchFamily="34" charset="-122"/>
-                <a:cs typeface="Yu Gothic" pitchFamily="34" charset="-120"/>
-              </a:rPr>
-              <a:t>御社にてご手配いただきます（御社の所有となります）</a:t>
-            </a:r>
-            <a:endParaRPr lang="en-US" sz="1050" dirty="0"/>
-          </a:p>
-        </p:txBody>
-      </p:sp>
-      <p:sp>
-        <p:nvSpPr>
-          <p:cNvPr id="21" name="Shape 15"/>
-          <p:cNvSpPr/>
-          <p:nvPr/>
-        </p:nvSpPr>
-        <p:spPr>
-          <a:xfrm>
-            <a:off x="660197" y="3791102"/>
-            <a:ext cx="6858000" cy="621792"/>
-          </a:xfrm>
-          <a:prstGeom prst="roundRect">
-            <a:avLst>
-              <a:gd name="adj" fmla="val 8824"/>
-            </a:avLst>
-          </a:prstGeom>
-          <a:solidFill>
-            <a:srgbClr val="F1F8F3"/>
-          </a:solidFill>
-          <a:ln w="9525">
-            <a:solidFill>
-              <a:srgbClr val="D2E7DA"/>
-            </a:solidFill>
-            <a:prstDash val="solid"/>
-          </a:ln>
-        </p:spPr>
-      </p:sp>
-      <p:pic>
-        <p:nvPicPr>
-          <p:cNvPr id="22" name="Image 4" descr="/home/user/suzuki-ceo/selfcafe-miraiya-trial-deck/assets/icons/LuHandCoins-green.png">    </p:cNvPr>
-          <p:cNvPicPr>
-            <a:picLocks noChangeAspect="1"/>
-          </p:cNvPicPr>
-          <p:nvPr/>
-        </p:nvPicPr>
-        <p:blipFill>
-          <a:blip r:embed="rId5"/>
-          <a:stretch>
-            <a:fillRect/>
-          </a:stretch>
-        </p:blipFill>
-        <p:spPr>
-          <a:xfrm>
-            <a:off x="916229" y="3937406"/>
-            <a:ext cx="329184" cy="329184"/>
-          </a:xfrm>
-          <a:prstGeom prst="rect">
-            <a:avLst/>
-          </a:prstGeom>
-        </p:spPr>
-      </p:pic>
-      <p:sp>
-        <p:nvSpPr>
-          <p:cNvPr id="23" name="Text 16"/>
-          <p:cNvSpPr/>
-          <p:nvPr/>
-        </p:nvSpPr>
-        <p:spPr>
-          <a:xfrm>
-            <a:off x="1373429" y="3845966"/>
-            <a:ext cx="5888736" cy="237744"/>
-          </a:xfrm>
-          <a:prstGeom prst="rect">
-            <a:avLst/>
-          </a:prstGeom>
-          <a:noFill/>
-          <a:ln/>
-        </p:spPr>
-        <p:txBody>
-          <a:bodyPr wrap="square" lIns="0" tIns="0" rIns="0" bIns="0" rtlCol="0" anchor="ctr"/>
-          <a:lstStyle/>
-          <a:p>
-            <a:pPr indent="0" marL="0">
-              <a:buNone/>
-            </a:pPr>
-            <a:r>
-              <a:rPr lang="en-US" sz="1150" b="1" dirty="0">
-                <a:solidFill>
-                  <a:srgbClr val="106838"/>
-                </a:solidFill>
-                <a:latin typeface="Yu Gothic" pitchFamily="34" charset="0"/>
-                <a:ea typeface="Yu Gothic" pitchFamily="34" charset="-122"/>
-                <a:cs typeface="Yu Gothic" pitchFamily="34" charset="-120"/>
-              </a:rPr>
-              <a:t>お支払い</a:t>
-            </a:r>
-            <a:endParaRPr lang="en-US" sz="1150" dirty="0"/>
-          </a:p>
-        </p:txBody>
-      </p:sp>
-      <p:sp>
-        <p:nvSpPr>
-          <p:cNvPr id="24" name="Text 17"/>
-          <p:cNvSpPr/>
-          <p:nvPr/>
-        </p:nvSpPr>
-        <p:spPr>
-          <a:xfrm>
-            <a:off x="1373429" y="4101998"/>
-            <a:ext cx="5888736" cy="256032"/>
-          </a:xfrm>
-          <a:prstGeom prst="rect">
-            <a:avLst/>
-          </a:prstGeom>
-          <a:noFill/>
-          <a:ln/>
-        </p:spPr>
-        <p:txBody>
-          <a:bodyPr wrap="square" lIns="0" tIns="0" rIns="0" bIns="0" rtlCol="0" anchor="ctr"/>
-          <a:lstStyle/>
-          <a:p>
-            <a:pPr indent="0" marL="0">
-              <a:buNone/>
-            </a:pPr>
-            <a:r>
-              <a:rPr lang="en-US" sz="1050" dirty="0">
-                <a:solidFill>
-                  <a:srgbClr val="0A3D23"/>
-                </a:solidFill>
-                <a:latin typeface="Yu Gothic" pitchFamily="34" charset="0"/>
-                <a:ea typeface="Yu Gothic" pitchFamily="34" charset="-122"/>
-                <a:cs typeface="Yu Gothic" pitchFamily="34" charset="-120"/>
-              </a:rPr>
-              <a:t>セルフカフェ売上の25％を毎月お支払いします</a:t>
-            </a:r>
-            <a:endParaRPr lang="en-US" sz="1050" dirty="0"/>
-          </a:p>
-        </p:txBody>
-      </p:sp>
-      <p:sp>
-        <p:nvSpPr>
-          <p:cNvPr id="25" name="Shape 18"/>
-          <p:cNvSpPr/>
-          <p:nvPr/>
-        </p:nvSpPr>
-        <p:spPr>
-          <a:xfrm>
-            <a:off x="660197" y="4504334"/>
-            <a:ext cx="6858000" cy="621792"/>
-          </a:xfrm>
-          <a:prstGeom prst="roundRect">
-            <a:avLst>
-              <a:gd name="adj" fmla="val 8824"/>
-            </a:avLst>
-          </a:prstGeom>
-          <a:solidFill>
-            <a:srgbClr val="F1F8F3"/>
-          </a:solidFill>
-          <a:ln w="9525">
-            <a:solidFill>
-              <a:srgbClr val="D2E7DA"/>
-            </a:solidFill>
-            <a:prstDash val="solid"/>
-          </a:ln>
-        </p:spPr>
-      </p:sp>
-      <p:pic>
-        <p:nvPicPr>
-          <p:cNvPr id="26" name="Image 5" descr="/home/user/suzuki-ceo/selfcafe-miraiya-trial-deck/assets/icons/LuCalendarCheck-green.png">    </p:cNvPr>
+          <p:cNvPr id="31" name="Image 5" descr="/home/user/suzuki-ceo/selfcafe-miraiya-trial-deck/assets/icons/LuCheck-green.png">    </p:cNvPr>
           <p:cNvPicPr>
             <a:picLocks noChangeAspect="1"/>
           </p:cNvPicPr>
@@ -2945,8 +3134,8 @@
         </p:blipFill>
         <p:spPr>
           <a:xfrm>
-            <a:off x="916229" y="4650638"/>
-            <a:ext cx="329184" cy="329184"/>
+            <a:off x="8304581" y="2423160"/>
+            <a:ext cx="164592" cy="164592"/>
           </a:xfrm>
           <a:prstGeom prst="rect">
             <a:avLst/>
@@ -2955,14 +3144,14 @@
       </p:pic>
       <p:sp>
         <p:nvSpPr>
-          <p:cNvPr id="27" name="Text 19"/>
-          <p:cNvSpPr/>
-          <p:nvPr/>
-        </p:nvSpPr>
-        <p:spPr>
-          <a:xfrm>
-            <a:off x="1373429" y="4559198"/>
-            <a:ext cx="5888736" cy="237744"/>
+          <p:cNvPr id="32" name="Text 24"/>
+          <p:cNvSpPr/>
+          <p:nvPr/>
+        </p:nvSpPr>
+        <p:spPr>
+          <a:xfrm>
+            <a:off x="8578901" y="2377440"/>
+            <a:ext cx="2696566" cy="274320"/>
           </a:xfrm>
           <a:prstGeom prst="rect">
             <a:avLst/>
@@ -2978,89 +3167,23 @@
               <a:buNone/>
             </a:pPr>
             <a:r>
-              <a:rPr lang="en-US" sz="1150" b="1" dirty="0">
-                <a:solidFill>
-                  <a:srgbClr val="106838"/>
+              <a:rPr lang="en-US" sz="900" dirty="0">
+                <a:solidFill>
+                  <a:srgbClr val="0A3D23"/>
                 </a:solidFill>
                 <a:latin typeface="Yu Gothic" pitchFamily="34" charset="0"/>
                 <a:ea typeface="Yu Gothic" pitchFamily="34" charset="-122"/>
                 <a:cs typeface="Yu Gothic" pitchFamily="34" charset="-120"/>
               </a:rPr>
-              <a:t>契約期間</a:t>
-            </a:r>
-            <a:endParaRPr lang="en-US" sz="1150" dirty="0"/>
-          </a:p>
-        </p:txBody>
-      </p:sp>
-      <p:sp>
-        <p:nvSpPr>
-          <p:cNvPr id="28" name="Text 20"/>
-          <p:cNvSpPr/>
-          <p:nvPr/>
-        </p:nvSpPr>
-        <p:spPr>
-          <a:xfrm>
-            <a:off x="1373429" y="4815230"/>
-            <a:ext cx="5888736" cy="256032"/>
-          </a:xfrm>
-          <a:prstGeom prst="rect">
-            <a:avLst/>
-          </a:prstGeom>
-          <a:noFill/>
-          <a:ln/>
-        </p:spPr>
-        <p:txBody>
-          <a:bodyPr wrap="square" lIns="0" tIns="0" rIns="0" bIns="0" rtlCol="0" anchor="ctr"/>
-          <a:lstStyle/>
-          <a:p>
-            <a:pPr indent="0" marL="0">
-              <a:buNone/>
-            </a:pPr>
-            <a:r>
-              <a:rPr lang="en-US" sz="1050" dirty="0">
-                <a:solidFill>
-                  <a:srgbClr val="0A3D23"/>
-                </a:solidFill>
-                <a:latin typeface="Yu Gothic" pitchFamily="34" charset="0"/>
-                <a:ea typeface="Yu Gothic" pitchFamily="34" charset="-122"/>
-                <a:cs typeface="Yu Gothic" pitchFamily="34" charset="-120"/>
-              </a:rPr>
-              <a:t>1年（通常は3年以上のところ、今回は1年で）</a:t>
-            </a:r>
-            <a:endParaRPr lang="en-US" sz="1050" dirty="0"/>
-          </a:p>
-        </p:txBody>
-      </p:sp>
-      <p:sp>
-        <p:nvSpPr>
-          <p:cNvPr id="29" name="Shape 21"/>
-          <p:cNvSpPr/>
-          <p:nvPr/>
-        </p:nvSpPr>
-        <p:spPr>
-          <a:xfrm>
-            <a:off x="660197" y="5217566"/>
-            <a:ext cx="6858000" cy="621792"/>
-          </a:xfrm>
-          <a:prstGeom prst="roundRect">
-            <a:avLst>
-              <a:gd name="adj" fmla="val 8824"/>
-            </a:avLst>
-          </a:prstGeom>
-          <a:solidFill>
-            <a:srgbClr val="F1F8F3"/>
-          </a:solidFill>
-          <a:ln w="9525">
-            <a:solidFill>
-              <a:srgbClr val="D2E7DA"/>
-            </a:solidFill>
-            <a:prstDash val="solid"/>
-          </a:ln>
-        </p:spPr>
+              <a:t>木製書架と一体の造作</a:t>
+            </a:r>
+            <a:endParaRPr lang="en-US" sz="900" dirty="0"/>
+          </a:p>
+        </p:txBody>
       </p:sp>
       <p:pic>
         <p:nvPicPr>
-          <p:cNvPr id="30" name="Image 6" descr="/home/user/suzuki-ceo/selfcafe-miraiya-trial-deck/assets/icons/LuKeyRound-green.png">    </p:cNvPr>
+          <p:cNvPr id="33" name="Image 6" descr="/home/user/suzuki-ceo/selfcafe-miraiya-trial-deck/assets/icons/LuCheck-green.png">    </p:cNvPr>
           <p:cNvPicPr>
             <a:picLocks noChangeAspect="1"/>
           </p:cNvPicPr>
@@ -3074,8 +3197,8 @@
         </p:blipFill>
         <p:spPr>
           <a:xfrm>
-            <a:off x="916229" y="5363870"/>
-            <a:ext cx="329184" cy="329184"/>
+            <a:off x="8304581" y="2752344"/>
+            <a:ext cx="164592" cy="164592"/>
           </a:xfrm>
           <a:prstGeom prst="rect">
             <a:avLst/>
@@ -3084,14 +3207,14 @@
       </p:pic>
       <p:sp>
         <p:nvSpPr>
-          <p:cNvPr id="31" name="Text 22"/>
-          <p:cNvSpPr/>
-          <p:nvPr/>
-        </p:nvSpPr>
-        <p:spPr>
-          <a:xfrm>
-            <a:off x="1373429" y="5272430"/>
-            <a:ext cx="5888736" cy="237744"/>
+          <p:cNvPr id="34" name="Text 25"/>
+          <p:cNvSpPr/>
+          <p:nvPr/>
+        </p:nvSpPr>
+        <p:spPr>
+          <a:xfrm>
+            <a:off x="8578901" y="2706624"/>
+            <a:ext cx="2696566" cy="274320"/>
           </a:xfrm>
           <a:prstGeom prst="rect">
             <a:avLst/>
@@ -3107,30 +3230,54 @@
               <a:buNone/>
             </a:pPr>
             <a:r>
-              <a:rPr lang="en-US" sz="1150" b="1" dirty="0">
-                <a:solidFill>
-                  <a:srgbClr val="106838"/>
+              <a:rPr lang="en-US" sz="900" dirty="0">
+                <a:solidFill>
+                  <a:srgbClr val="0A3D23"/>
                 </a:solidFill>
                 <a:latin typeface="Yu Gothic" pitchFamily="34" charset="0"/>
                 <a:ea typeface="Yu Gothic" pitchFamily="34" charset="-122"/>
                 <a:cs typeface="Yu Gothic" pitchFamily="34" charset="-120"/>
               </a:rPr>
-              <a:t>原状回復義務</a:t>
-            </a:r>
-            <a:endParaRPr lang="en-US" sz="1150" dirty="0"/>
-          </a:p>
-        </p:txBody>
-      </p:sp>
-      <p:sp>
-        <p:nvSpPr>
-          <p:cNvPr id="32" name="Text 23"/>
-          <p:cNvSpPr/>
-          <p:nvPr/>
-        </p:nvSpPr>
-        <p:spPr>
-          <a:xfrm>
-            <a:off x="1373429" y="5528462"/>
-            <a:ext cx="5888736" cy="256032"/>
+              <a:t>間接照明・スタンドライト</a:t>
+            </a:r>
+            <a:endParaRPr lang="en-US" sz="900" dirty="0"/>
+          </a:p>
+        </p:txBody>
+      </p:sp>
+      <p:pic>
+        <p:nvPicPr>
+          <p:cNvPr id="35" name="Image 7" descr="/home/user/suzuki-ceo/selfcafe-miraiya-trial-deck/assets/icons/LuCheck-green.png">    </p:cNvPr>
+          <p:cNvPicPr>
+            <a:picLocks noChangeAspect="1"/>
+          </p:cNvPicPr>
+          <p:nvPr/>
+        </p:nvPicPr>
+        <p:blipFill>
+          <a:blip r:embed="rId8"/>
+          <a:stretch>
+            <a:fillRect/>
+          </a:stretch>
+        </p:blipFill>
+        <p:spPr>
+          <a:xfrm>
+            <a:off x="8304581" y="3081528"/>
+            <a:ext cx="164592" cy="164592"/>
+          </a:xfrm>
+          <a:prstGeom prst="rect">
+            <a:avLst/>
+          </a:prstGeom>
+        </p:spPr>
+      </p:pic>
+      <p:sp>
+        <p:nvSpPr>
+          <p:cNvPr id="36" name="Text 26"/>
+          <p:cNvSpPr/>
+          <p:nvPr/>
+        </p:nvSpPr>
+        <p:spPr>
+          <a:xfrm>
+            <a:off x="8578901" y="3035808"/>
+            <a:ext cx="2696566" cy="274320"/>
           </a:xfrm>
           <a:prstGeom prst="rect">
             <a:avLst/>
@@ -3146,7 +3293,7 @@
               <a:buNone/>
             </a:pPr>
             <a:r>
-              <a:rPr lang="en-US" sz="1050" dirty="0">
+              <a:rPr lang="en-US" sz="900" dirty="0">
                 <a:solidFill>
                   <a:srgbClr val="0A3D23"/>
                 </a:solidFill>
@@ -3154,44 +3301,46 @@
                 <a:ea typeface="Yu Gothic" pitchFamily="34" charset="-122"/>
                 <a:cs typeface="Yu Gothic" pitchFamily="34" charset="-120"/>
               </a:rPr>
-              <a:t>なし（当社のマシン・カメラ等のみ撤去します）</a:t>
-            </a:r>
-            <a:endParaRPr lang="en-US" sz="1050" dirty="0"/>
-          </a:p>
-        </p:txBody>
-      </p:sp>
-      <p:sp>
-        <p:nvSpPr>
-          <p:cNvPr id="33" name="Shape 24"/>
-          <p:cNvSpPr/>
-          <p:nvPr/>
-        </p:nvSpPr>
-        <p:spPr>
-          <a:xfrm>
-            <a:off x="7902245" y="1651406"/>
-            <a:ext cx="3629254" cy="2103120"/>
-          </a:xfrm>
-          <a:prstGeom prst="roundRect">
-            <a:avLst>
-              <a:gd name="adj" fmla="val 2609"/>
-            </a:avLst>
-          </a:prstGeom>
-          <a:solidFill>
-            <a:srgbClr val="0C5230"/>
-          </a:solidFill>
-          <a:ln/>
-        </p:spPr>
-      </p:sp>
-      <p:sp>
-        <p:nvSpPr>
-          <p:cNvPr id="34" name="Text 25"/>
-          <p:cNvSpPr/>
-          <p:nvPr/>
-        </p:nvSpPr>
-        <p:spPr>
-          <a:xfrm>
-            <a:off x="8158277" y="1870862"/>
-            <a:ext cx="2377440" cy="164592"/>
+              <a:t>落ち着いたダークトーンのサイン</a:t>
+            </a:r>
+            <a:endParaRPr lang="en-US" sz="900" dirty="0"/>
+          </a:p>
+        </p:txBody>
+      </p:sp>
+      <p:pic>
+        <p:nvPicPr>
+          <p:cNvPr id="37" name="Image 8" descr="/home/user/suzuki-ceo/selfcafe-miraiya-trial-deck/assets/icons/LuCheck-green.png">    </p:cNvPr>
+          <p:cNvPicPr>
+            <a:picLocks noChangeAspect="1"/>
+          </p:cNvPicPr>
+          <p:nvPr/>
+        </p:nvPicPr>
+        <p:blipFill>
+          <a:blip r:embed="rId9"/>
+          <a:stretch>
+            <a:fillRect/>
+          </a:stretch>
+        </p:blipFill>
+        <p:spPr>
+          <a:xfrm>
+            <a:off x="8304581" y="3410712"/>
+            <a:ext cx="164592" cy="164592"/>
+          </a:xfrm>
+          <a:prstGeom prst="rect">
+            <a:avLst/>
+          </a:prstGeom>
+        </p:spPr>
+      </p:pic>
+      <p:sp>
+        <p:nvSpPr>
+          <p:cNvPr id="38" name="Text 27"/>
+          <p:cNvSpPr/>
+          <p:nvPr/>
+        </p:nvSpPr>
+        <p:spPr>
+          <a:xfrm>
+            <a:off x="8578901" y="3364992"/>
+            <a:ext cx="2696566" cy="274320"/>
           </a:xfrm>
           <a:prstGeom prst="rect">
             <a:avLst/>
@@ -3207,301 +3356,34 @@
               <a:buNone/>
             </a:pPr>
             <a:r>
-              <a:rPr lang="en-US" sz="900" b="1" spc="150" kern="0" dirty="0">
-                <a:solidFill>
-                  <a:srgbClr val="8CC5A5"/>
-                </a:solidFill>
-                <a:latin typeface="Arial" pitchFamily="34" charset="0"/>
-                <a:ea typeface="Arial" pitchFamily="34" charset="-122"/>
-                <a:cs typeface="Arial" pitchFamily="34" charset="-120"/>
-              </a:rPr>
-              <a:t>REVENUE SHARE</a:t>
-            </a:r>
-            <a:endParaRPr lang="en-US" sz="900" dirty="0"/>
-          </a:p>
-        </p:txBody>
-      </p:sp>
-      <p:sp>
-        <p:nvSpPr>
-          <p:cNvPr id="35" name="Text 26"/>
-          <p:cNvSpPr/>
-          <p:nvPr/>
-        </p:nvSpPr>
-        <p:spPr>
-          <a:xfrm>
-            <a:off x="8158277" y="2145182"/>
-            <a:ext cx="3117190" cy="256032"/>
-          </a:xfrm>
-          <a:prstGeom prst="rect">
-            <a:avLst/>
-          </a:prstGeom>
-          <a:noFill/>
-          <a:ln/>
-        </p:spPr>
-        <p:txBody>
-          <a:bodyPr wrap="square" lIns="0" tIns="0" rIns="0" bIns="0" rtlCol="0" anchor="ctr"/>
-          <a:lstStyle/>
-          <a:p>
-            <a:pPr indent="0" marL="0">
-              <a:buNone/>
-            </a:pPr>
-            <a:r>
-              <a:rPr lang="en-US" sz="1100" dirty="0">
-                <a:solidFill>
-                  <a:srgbClr val="AFC2B8"/>
+              <a:rPr lang="en-US" sz="900" dirty="0">
+                <a:solidFill>
+                  <a:srgbClr val="0A3D23"/>
                 </a:solidFill>
                 <a:latin typeface="Yu Gothic" pitchFamily="34" charset="0"/>
                 <a:ea typeface="Yu Gothic" pitchFamily="34" charset="-122"/>
                 <a:cs typeface="Yu Gothic" pitchFamily="34" charset="-120"/>
               </a:rPr>
-              <a:t>御社へのお支払い</a:t>
-            </a:r>
-            <a:endParaRPr lang="en-US" sz="1100" dirty="0"/>
-          </a:p>
-        </p:txBody>
-      </p:sp>
-      <p:sp>
-        <p:nvSpPr>
-          <p:cNvPr id="36" name="Text 27"/>
-          <p:cNvSpPr/>
-          <p:nvPr/>
-        </p:nvSpPr>
-        <p:spPr>
-          <a:xfrm>
-            <a:off x="8158277" y="2474366"/>
-            <a:ext cx="3117190" cy="731520"/>
-          </a:xfrm>
-          <a:prstGeom prst="rect">
-            <a:avLst/>
-          </a:prstGeom>
-          <a:noFill/>
-          <a:ln/>
-        </p:spPr>
-        <p:txBody>
-          <a:bodyPr wrap="square" lIns="0" tIns="0" rIns="0" bIns="0" rtlCol="0" anchor="ctr"/>
-          <a:lstStyle/>
-          <a:p>
-            <a:pPr indent="0" marL="0">
-              <a:buNone/>
-            </a:pPr>
-            <a:r>
-              <a:rPr lang="en-US" sz="1400" dirty="0">
-                <a:solidFill>
-                  <a:srgbClr val="FFFFFF"/>
-                </a:solidFill>
-                <a:latin typeface="Yu Gothic" pitchFamily="34" charset="0"/>
-                <a:ea typeface="Yu Gothic" pitchFamily="34" charset="-122"/>
-                <a:cs typeface="Yu Gothic" pitchFamily="34" charset="-120"/>
-              </a:rPr>
-              <a:t>売上の </a:t>
-            </a:r>
-            <a:r>
-              <a:rPr lang="en-US" sz="4000" b="1" dirty="0">
-                <a:solidFill>
-                  <a:srgbClr val="F0C05A"/>
-                </a:solidFill>
-                <a:latin typeface="Arial" pitchFamily="34" charset="0"/>
-                <a:ea typeface="Arial" pitchFamily="34" charset="-122"/>
-                <a:cs typeface="Arial" pitchFamily="34" charset="-120"/>
-              </a:rPr>
-              <a:t>25</a:t>
-            </a:r>
-            <a:r>
-              <a:rPr lang="en-US" sz="1700" b="1" dirty="0">
-                <a:solidFill>
-                  <a:srgbClr val="F0C05A"/>
-                </a:solidFill>
-                <a:latin typeface="Yu Gothic" pitchFamily="34" charset="0"/>
-                <a:ea typeface="Yu Gothic" pitchFamily="34" charset="-122"/>
-                <a:cs typeface="Yu Gothic" pitchFamily="34" charset="-120"/>
-              </a:rPr>
-              <a:t> ％</a:t>
-            </a:r>
-            <a:endParaRPr lang="en-US" sz="1400" dirty="0"/>
-          </a:p>
-        </p:txBody>
-      </p:sp>
-      <p:sp>
-        <p:nvSpPr>
-          <p:cNvPr id="37" name="Text 28"/>
-          <p:cNvSpPr/>
-          <p:nvPr/>
-        </p:nvSpPr>
-        <p:spPr>
-          <a:xfrm>
-            <a:off x="8158277" y="3279038"/>
-            <a:ext cx="3117190" cy="274320"/>
-          </a:xfrm>
-          <a:prstGeom prst="rect">
-            <a:avLst/>
-          </a:prstGeom>
-          <a:noFill/>
-          <a:ln/>
-        </p:spPr>
-        <p:txBody>
-          <a:bodyPr wrap="square" lIns="0" tIns="0" rIns="0" bIns="0" rtlCol="0" anchor="ctr"/>
-          <a:lstStyle/>
-          <a:p>
-            <a:pPr indent="0" marL="0">
-              <a:buNone/>
-            </a:pPr>
-            <a:r>
-              <a:rPr lang="en-US" sz="950" dirty="0">
-                <a:solidFill>
-                  <a:srgbClr val="AFC2B8"/>
-                </a:solidFill>
-                <a:latin typeface="Yu Gothic" pitchFamily="34" charset="0"/>
-                <a:ea typeface="Yu Gothic" pitchFamily="34" charset="-122"/>
-                <a:cs typeface="Yu Gothic" pitchFamily="34" charset="-120"/>
-              </a:rPr>
-              <a:t>毎月お支払いします（税抜）</a:t>
-            </a:r>
-            <a:endParaRPr lang="en-US" sz="950" dirty="0"/>
-          </a:p>
-        </p:txBody>
-      </p:sp>
-      <p:sp>
-        <p:nvSpPr>
-          <p:cNvPr id="38" name="Shape 29"/>
-          <p:cNvSpPr/>
-          <p:nvPr/>
-        </p:nvSpPr>
-        <p:spPr>
-          <a:xfrm>
-            <a:off x="7902245" y="3882542"/>
-            <a:ext cx="3629254" cy="1060704"/>
+              <a:t>「MIRAIYA Book &amp; Cafe」併記</a:t>
+            </a:r>
+            <a:endParaRPr lang="en-US" sz="900" dirty="0"/>
+          </a:p>
+        </p:txBody>
+      </p:sp>
+      <p:sp>
+        <p:nvSpPr>
+          <p:cNvPr id="39" name="Shape 28"/>
+          <p:cNvSpPr/>
+          <p:nvPr/>
+        </p:nvSpPr>
+        <p:spPr>
+          <a:xfrm>
+            <a:off x="8048549" y="4324540"/>
+            <a:ext cx="3482950" cy="1928813"/>
           </a:xfrm>
           <a:prstGeom prst="roundRect">
             <a:avLst>
-              <a:gd name="adj" fmla="val 5172"/>
-            </a:avLst>
-          </a:prstGeom>
-          <a:solidFill>
-            <a:srgbClr val="F1F8F3"/>
-          </a:solidFill>
-          <a:ln w="9525">
-            <a:solidFill>
-              <a:srgbClr val="D2E7DA"/>
-            </a:solidFill>
-            <a:prstDash val="solid"/>
-          </a:ln>
-        </p:spPr>
-      </p:sp>
-      <p:sp>
-        <p:nvSpPr>
-          <p:cNvPr id="39" name="Text 30"/>
-          <p:cNvSpPr/>
-          <p:nvPr/>
-        </p:nvSpPr>
-        <p:spPr>
-          <a:xfrm>
-            <a:off x="8158277" y="4010558"/>
-            <a:ext cx="3117190" cy="237744"/>
-          </a:xfrm>
-          <a:prstGeom prst="rect">
-            <a:avLst/>
-          </a:prstGeom>
-          <a:noFill/>
-          <a:ln/>
-        </p:spPr>
-        <p:txBody>
-          <a:bodyPr wrap="square" lIns="0" tIns="0" rIns="0" bIns="0" rtlCol="0" anchor="ctr"/>
-          <a:lstStyle/>
-          <a:p>
-            <a:pPr indent="0" marL="0">
-              <a:buNone/>
-            </a:pPr>
-            <a:r>
-              <a:rPr lang="en-US" sz="1050" b="1" dirty="0">
-                <a:solidFill>
-                  <a:srgbClr val="106838"/>
-                </a:solidFill>
-                <a:latin typeface="Yu Gothic" pitchFamily="34" charset="0"/>
-                <a:ea typeface="Yu Gothic" pitchFamily="34" charset="-122"/>
-                <a:cs typeface="Yu Gothic" pitchFamily="34" charset="-120"/>
-              </a:rPr>
-              <a:t>御社のご負担</a:t>
-            </a:r>
-            <a:endParaRPr lang="en-US" sz="1050" dirty="0"/>
-          </a:p>
-        </p:txBody>
-      </p:sp>
-      <p:sp>
-        <p:nvSpPr>
-          <p:cNvPr id="40" name="Text 31"/>
-          <p:cNvSpPr/>
-          <p:nvPr/>
-        </p:nvSpPr>
-        <p:spPr>
-          <a:xfrm>
-            <a:off x="8158277" y="4266590"/>
-            <a:ext cx="3117190" cy="585216"/>
-          </a:xfrm>
-          <a:prstGeom prst="rect">
-            <a:avLst/>
-          </a:prstGeom>
-          <a:noFill/>
-          <a:ln/>
-        </p:spPr>
-        <p:txBody>
-          <a:bodyPr wrap="square" lIns="0" tIns="0" rIns="0" bIns="0" rtlCol="0" anchor="t"/>
-          <a:lstStyle/>
-          <a:p>
-            <a:pPr indent="0" marL="0">
-              <a:lnSpc>
-                <a:spcPct val="130000"/>
-              </a:lnSpc>
-              <a:buNone/>
-            </a:pPr>
-            <a:r>
-              <a:rPr lang="en-US" sz="1000" dirty="0">
-                <a:solidFill>
-                  <a:srgbClr val="0A3D23"/>
-                </a:solidFill>
-                <a:latin typeface="Yu Gothic" pitchFamily="34" charset="0"/>
-                <a:ea typeface="Yu Gothic" pitchFamily="34" charset="-122"/>
-                <a:cs typeface="Yu Gothic" pitchFamily="34" charset="-120"/>
-              </a:rPr>
-              <a:t>家具・什器のご手配のみです。</a:t>
-            </a:r>
-            <a:endParaRPr lang="en-US" sz="1000" dirty="0"/>
-          </a:p>
-          <a:p>
-            <a:pPr indent="0" marL="0">
-              <a:lnSpc>
-                <a:spcPct val="130000"/>
-              </a:lnSpc>
-              <a:buNone/>
-            </a:pPr>
-            <a:r>
-              <a:rPr lang="en-US" sz="1000" dirty="0">
-                <a:solidFill>
-                  <a:srgbClr val="0A3D23"/>
-                </a:solidFill>
-                <a:latin typeface="Yu Gothic" pitchFamily="34" charset="0"/>
-                <a:ea typeface="Yu Gothic" pitchFamily="34" charset="-122"/>
-                <a:cs typeface="Yu Gothic" pitchFamily="34" charset="-120"/>
-              </a:rPr>
-              <a:t>内装工事費のご負担はありません。</a:t>
-            </a:r>
-            <a:endParaRPr lang="en-US" sz="1000" dirty="0"/>
-          </a:p>
-        </p:txBody>
-      </p:sp>
-      <p:sp>
-        <p:nvSpPr>
-          <p:cNvPr id="41" name="Shape 32"/>
-          <p:cNvSpPr/>
-          <p:nvPr/>
-        </p:nvSpPr>
-        <p:spPr>
-          <a:xfrm>
-            <a:off x="7902245" y="5071262"/>
-            <a:ext cx="3629254" cy="768096"/>
-          </a:xfrm>
-          <a:prstGeom prst="roundRect">
-            <a:avLst>
-              <a:gd name="adj" fmla="val 7143"/>
+              <a:gd name="adj" fmla="val 2844"/>
             </a:avLst>
           </a:prstGeom>
           <a:solidFill>
@@ -3515,40 +3397,16 @@
           </a:ln>
         </p:spPr>
       </p:sp>
-      <p:pic>
-        <p:nvPicPr>
-          <p:cNvPr id="42" name="Image 7" descr="/home/user/suzuki-ceo/selfcafe-miraiya-trial-deck/assets/icons/LuShieldCheck-green.png">    </p:cNvPr>
-          <p:cNvPicPr>
-            <a:picLocks noChangeAspect="1"/>
-          </p:cNvPicPr>
-          <p:nvPr/>
-        </p:nvPicPr>
-        <p:blipFill>
-          <a:blip r:embed="rId8"/>
-          <a:stretch>
-            <a:fillRect/>
-          </a:stretch>
-        </p:blipFill>
-        <p:spPr>
-          <a:xfrm>
-            <a:off x="8139989" y="5217566"/>
-            <a:ext cx="292608" cy="292608"/>
-          </a:xfrm>
-          <a:prstGeom prst="rect">
-            <a:avLst/>
-          </a:prstGeom>
-        </p:spPr>
-      </p:pic>
-      <p:sp>
-        <p:nvSpPr>
-          <p:cNvPr id="43" name="Text 33"/>
-          <p:cNvSpPr/>
-          <p:nvPr/>
-        </p:nvSpPr>
-        <p:spPr>
-          <a:xfrm>
-            <a:off x="8524037" y="5144414"/>
-            <a:ext cx="2769718" cy="237744"/>
+      <p:sp>
+        <p:nvSpPr>
+          <p:cNvPr id="40" name="Text 29"/>
+          <p:cNvSpPr/>
+          <p:nvPr/>
+        </p:nvSpPr>
+        <p:spPr>
+          <a:xfrm>
+            <a:off x="8286293" y="4470844"/>
+            <a:ext cx="3007462" cy="237744"/>
           </a:xfrm>
           <a:prstGeom prst="rect">
             <a:avLst/>
@@ -3564,7 +3422,7 @@
               <a:buNone/>
             </a:pPr>
             <a:r>
-              <a:rPr lang="en-US" sz="1100" b="1" dirty="0">
+              <a:rPr lang="en-US" sz="1050" b="1" dirty="0">
                 <a:solidFill>
                   <a:srgbClr val="A8761F"/>
                 </a:solidFill>
@@ -3572,22 +3430,61 @@
                 <a:ea typeface="Yu Gothic" pitchFamily="34" charset="-122"/>
                 <a:cs typeface="Yu Gothic" pitchFamily="34" charset="-120"/>
               </a:rPr>
-              <a:t>原状回復義務なし</a:t>
-            </a:r>
-            <a:endParaRPr lang="en-US" sz="1100" dirty="0"/>
-          </a:p>
-        </p:txBody>
-      </p:sp>
-      <p:sp>
-        <p:nvSpPr>
-          <p:cNvPr id="44" name="Text 34"/>
-          <p:cNvSpPr/>
-          <p:nvPr/>
-        </p:nvSpPr>
-        <p:spPr>
-          <a:xfrm>
-            <a:off x="8524037" y="5382158"/>
-            <a:ext cx="2769718" cy="365760"/>
+              <a:t>床仕上げの違い</a:t>
+            </a:r>
+            <a:endParaRPr lang="en-US" sz="1050" dirty="0"/>
+          </a:p>
+        </p:txBody>
+      </p:sp>
+      <p:sp>
+        <p:nvSpPr>
+          <p:cNvPr id="41" name="Text 30"/>
+          <p:cNvSpPr/>
+          <p:nvPr/>
+        </p:nvSpPr>
+        <p:spPr>
+          <a:xfrm>
+            <a:off x="8286293" y="4800028"/>
+            <a:ext cx="3007462" cy="219456"/>
+          </a:xfrm>
+          <a:prstGeom prst="rect">
+            <a:avLst/>
+          </a:prstGeom>
+          <a:noFill/>
+          <a:ln/>
+        </p:spPr>
+        <p:txBody>
+          <a:bodyPr wrap="square" lIns="0" tIns="0" rIns="0" bIns="0" rtlCol="0" anchor="ctr"/>
+          <a:lstStyle/>
+          <a:p>
+            <a:pPr indent="0" marL="0">
+              <a:buNone/>
+            </a:pPr>
+            <a:r>
+              <a:rPr lang="en-US" sz="950" b="1" dirty="0">
+                <a:solidFill>
+                  <a:srgbClr val="0A3D23"/>
+                </a:solidFill>
+                <a:latin typeface="Yu Gothic" pitchFamily="34" charset="0"/>
+                <a:ea typeface="Yu Gothic" pitchFamily="34" charset="-122"/>
+                <a:cs typeface="Yu Gothic" pitchFamily="34" charset="-120"/>
+              </a:rPr>
+              <a:t>N案</a:t>
+            </a:r>
+            <a:endParaRPr lang="en-US" sz="950" dirty="0"/>
+          </a:p>
+        </p:txBody>
+      </p:sp>
+      <p:sp>
+        <p:nvSpPr>
+          <p:cNvPr id="42" name="Text 31"/>
+          <p:cNvSpPr/>
+          <p:nvPr/>
+        </p:nvSpPr>
+        <p:spPr>
+          <a:xfrm>
+            <a:off x="8286293" y="5001196"/>
+            <a:ext cx="3007462" cy="420624"/>
           </a:xfrm>
           <a:prstGeom prst="rect">
             <a:avLst/>
@@ -3608,13 +3505,13 @@
             <a:r>
               <a:rPr lang="en-US" sz="900" dirty="0">
                 <a:solidFill>
-                  <a:srgbClr val="0A3D23"/>
+                  <a:srgbClr val="4B5550"/>
                 </a:solidFill>
                 <a:latin typeface="Yu Gothic" pitchFamily="34" charset="0"/>
                 <a:ea typeface="Yu Gothic" pitchFamily="34" charset="-122"/>
                 <a:cs typeface="Yu Gothic" pitchFamily="34" charset="-120"/>
               </a:rPr>
-              <a:t>終了時も内装を元に戻す必要はありません。</a:t>
+              <a:t>書店売場の床と連続し、区画が広く開放的に見えます。</a:t>
             </a:r>
             <a:endParaRPr lang="en-US" sz="900" dirty="0"/>
           </a:p>
@@ -3622,14 +3519,14 @@
       </p:sp>
       <p:sp>
         <p:nvSpPr>
-          <p:cNvPr id="45" name="Text 35"/>
-          <p:cNvSpPr/>
-          <p:nvPr/>
-        </p:nvSpPr>
-        <p:spPr>
-          <a:xfrm>
-            <a:off x="660197" y="6053328"/>
-            <a:ext cx="10871302" cy="182880"/>
+          <p:cNvPr id="43" name="Text 32"/>
+          <p:cNvSpPr/>
+          <p:nvPr/>
+        </p:nvSpPr>
+        <p:spPr>
+          <a:xfrm>
+            <a:off x="8286293" y="5494972"/>
+            <a:ext cx="3007462" cy="219456"/>
           </a:xfrm>
           <a:prstGeom prst="rect">
             <a:avLst/>
@@ -3645,15 +3542,96 @@
               <a:buNone/>
             </a:pPr>
             <a:r>
-              <a:rPr lang="en-US" sz="850" dirty="0">
-                <a:solidFill>
-                  <a:srgbClr val="A8B0AA"/>
+              <a:rPr lang="en-US" sz="950" b="1" dirty="0">
+                <a:solidFill>
+                  <a:srgbClr val="0A3D23"/>
                 </a:solidFill>
                 <a:latin typeface="Yu Gothic" pitchFamily="34" charset="0"/>
                 <a:ea typeface="Yu Gothic" pitchFamily="34" charset="-122"/>
                 <a:cs typeface="Yu Gothic" pitchFamily="34" charset="-120"/>
               </a:rPr>
-              <a:t>※ 金額はすべて税抜。通常のご契約との違いは次ページに整理しています。対象店舗はご相談のうえ決定させていただきます。</a:t>
+              <a:t>G案</a:t>
+            </a:r>
+            <a:endParaRPr lang="en-US" sz="950" dirty="0"/>
+          </a:p>
+        </p:txBody>
+      </p:sp>
+      <p:sp>
+        <p:nvSpPr>
+          <p:cNvPr id="44" name="Text 33"/>
+          <p:cNvSpPr/>
+          <p:nvPr/>
+        </p:nvSpPr>
+        <p:spPr>
+          <a:xfrm>
+            <a:off x="8286293" y="5696140"/>
+            <a:ext cx="3007462" cy="420624"/>
+          </a:xfrm>
+          <a:prstGeom prst="rect">
+            <a:avLst/>
+          </a:prstGeom>
+          <a:noFill/>
+          <a:ln/>
+        </p:spPr>
+        <p:txBody>
+          <a:bodyPr wrap="square" lIns="0" tIns="0" rIns="0" bIns="0" rtlCol="0" anchor="t"/>
+          <a:lstStyle/>
+          <a:p>
+            <a:pPr indent="0" marL="0">
+              <a:lnSpc>
+                <a:spcPct val="120000"/>
+              </a:lnSpc>
+              <a:buNone/>
+            </a:pPr>
+            <a:r>
+              <a:rPr lang="en-US" sz="900" dirty="0">
+                <a:solidFill>
+                  <a:srgbClr val="4B5550"/>
+                </a:solidFill>
+                <a:latin typeface="Yu Gothic" pitchFamily="34" charset="0"/>
+                <a:ea typeface="Yu Gothic" pitchFamily="34" charset="-122"/>
+                <a:cs typeface="Yu Gothic" pitchFamily="34" charset="-120"/>
+              </a:rPr>
+              <a:t>カフェ区画が明確に分かれ、落ち着いた印象になります。</a:t>
+            </a:r>
+            <a:endParaRPr lang="en-US" sz="900" dirty="0"/>
+          </a:p>
+        </p:txBody>
+      </p:sp>
+      <p:sp>
+        <p:nvSpPr>
+          <p:cNvPr id="45" name="Text 34"/>
+          <p:cNvSpPr/>
+          <p:nvPr/>
+        </p:nvSpPr>
+        <p:spPr>
+          <a:xfrm>
+            <a:off x="660197" y="6254496"/>
+            <a:ext cx="10871302" cy="182880"/>
+          </a:xfrm>
+          <a:prstGeom prst="rect">
+            <a:avLst/>
+          </a:prstGeom>
+          <a:noFill/>
+          <a:ln/>
+        </p:spPr>
+        <p:txBody>
+          <a:bodyPr wrap="square" lIns="0" tIns="0" rIns="0" bIns="0" rtlCol="0" anchor="ctr"/>
+          <a:lstStyle/>
+          <a:p>
+            <a:pPr indent="0" marL="0">
+              <a:buNone/>
+            </a:pPr>
+            <a:r>
+              <a:rPr lang="en-US" sz="850" dirty="0">
+                <a:solidFill>
+                  <a:srgbClr val="A8B0AA"/>
+                </a:solidFill>
+                <a:latin typeface="Yu Gothic" pitchFamily="34" charset="0"/>
+                <a:ea typeface="Yu Gothic" pitchFamily="34" charset="-122"/>
+                <a:cs typeface="Yu Gothic" pitchFamily="34" charset="-120"/>
+              </a:rPr>
+              <a:t>※ パースは完成予想図です。本ご提案の内装はスタンダード仕様（既存の書店併設店と同じ設え）です。プレミアム仕様をご希望の場合は、工事範囲と費用をあらためてご相談させてください。</a:t>
             </a:r>
             <a:endParaRPr lang="en-US" sz="850" dirty="0"/>
           </a:p>
@@ -3755,7 +3733,7 @@
                 <a:ea typeface="Yu Gothic" pitchFamily="34" charset="-122"/>
                 <a:cs typeface="Yu Gothic" pitchFamily="34" charset="-120"/>
               </a:rPr>
-              <a:t>   通常契約との比較</a:t>
+              <a:t>   トライアル条件</a:t>
             </a:r>
             <a:endParaRPr lang="en-US" sz="1050" dirty="0"/>
           </a:p>
@@ -3794,7 +3772,7 @@
                 <a:ea typeface="Yu Gothic" pitchFamily="34" charset="-122"/>
                 <a:cs typeface="Yu Gothic" pitchFamily="34" charset="-120"/>
               </a:rPr>
-              <a:t>違いは、契約期間と月額5万円だけです。</a:t>
+              <a:t>トライアル導入の条件をご提案します。</a:t>
             </a:r>
             <a:endParaRPr lang="en-US" sz="2900" dirty="0"/>
           </a:p>
@@ -3833,7 +3811,7 @@
                 <a:ea typeface="Yu Gothic" pitchFamily="34" charset="-122"/>
                 <a:cs typeface="Yu Gothic" pitchFamily="34" charset="-120"/>
               </a:rPr>
-              <a:t>通常は3年以上でお願いしていますが、今回は1年のトライアルとしてご提案します。</a:t>
+              <a:t>メールにてご提示した内容を、あらためて整理したものです。</a:t>
             </a:r>
             <a:endParaRPr lang="en-US" sz="1250" dirty="0"/>
           </a:p>
@@ -3949,6 +3927,1561 @@
         </p:nvSpPr>
         <p:spPr>
           <a:xfrm>
+            <a:off x="660197" y="1651406"/>
+            <a:ext cx="6858000" cy="621792"/>
+          </a:xfrm>
+          <a:prstGeom prst="roundRect">
+            <a:avLst>
+              <a:gd name="adj" fmla="val 8824"/>
+            </a:avLst>
+          </a:prstGeom>
+          <a:solidFill>
+            <a:srgbClr val="F1F8F3"/>
+          </a:solidFill>
+          <a:ln w="9525">
+            <a:solidFill>
+              <a:srgbClr val="D2E7DA"/>
+            </a:solidFill>
+            <a:prstDash val="solid"/>
+          </a:ln>
+        </p:spPr>
+      </p:sp>
+      <p:pic>
+        <p:nvPicPr>
+          <p:cNvPr id="10" name="Image 1" descr="/home/user/suzuki-ceo/selfcafe-miraiya-trial-deck/assets/icons/LuSparkles-green.png">    </p:cNvPr>
+          <p:cNvPicPr>
+            <a:picLocks noChangeAspect="1"/>
+          </p:cNvPicPr>
+          <p:nvPr/>
+        </p:nvPicPr>
+        <p:blipFill>
+          <a:blip r:embed="rId2"/>
+          <a:stretch>
+            <a:fillRect/>
+          </a:stretch>
+        </p:blipFill>
+        <p:spPr>
+          <a:xfrm>
+            <a:off x="916229" y="1797710"/>
+            <a:ext cx="329184" cy="329184"/>
+          </a:xfrm>
+          <a:prstGeom prst="rect">
+            <a:avLst/>
+          </a:prstGeom>
+        </p:spPr>
+      </p:pic>
+      <p:sp>
+        <p:nvSpPr>
+          <p:cNvPr id="11" name="Text 7"/>
+          <p:cNvSpPr/>
+          <p:nvPr/>
+        </p:nvSpPr>
+        <p:spPr>
+          <a:xfrm>
+            <a:off x="1373429" y="1706270"/>
+            <a:ext cx="5888736" cy="237744"/>
+          </a:xfrm>
+          <a:prstGeom prst="rect">
+            <a:avLst/>
+          </a:prstGeom>
+          <a:noFill/>
+          <a:ln/>
+        </p:spPr>
+        <p:txBody>
+          <a:bodyPr wrap="square" lIns="0" tIns="0" rIns="0" bIns="0" rtlCol="0" anchor="ctr"/>
+          <a:lstStyle/>
+          <a:p>
+            <a:pPr indent="0" marL="0">
+              <a:buNone/>
+            </a:pPr>
+            <a:r>
+              <a:rPr lang="en-US" sz="1150" b="1" dirty="0">
+                <a:solidFill>
+                  <a:srgbClr val="106838"/>
+                </a:solidFill>
+                <a:latin typeface="Yu Gothic" pitchFamily="34" charset="0"/>
+                <a:ea typeface="Yu Gothic" pitchFamily="34" charset="-122"/>
+                <a:cs typeface="Yu Gothic" pitchFamily="34" charset="-120"/>
+              </a:rPr>
+              <a:t>内装仕様</a:t>
+            </a:r>
+            <a:endParaRPr lang="en-US" sz="1150" dirty="0"/>
+          </a:p>
+        </p:txBody>
+      </p:sp>
+      <p:sp>
+        <p:nvSpPr>
+          <p:cNvPr id="12" name="Text 8"/>
+          <p:cNvSpPr/>
+          <p:nvPr/>
+        </p:nvSpPr>
+        <p:spPr>
+          <a:xfrm>
+            <a:off x="1373429" y="1962302"/>
+            <a:ext cx="5888736" cy="256032"/>
+          </a:xfrm>
+          <a:prstGeom prst="rect">
+            <a:avLst/>
+          </a:prstGeom>
+          <a:noFill/>
+          <a:ln/>
+        </p:spPr>
+        <p:txBody>
+          <a:bodyPr wrap="square" lIns="0" tIns="0" rIns="0" bIns="0" rtlCol="0" anchor="ctr"/>
+          <a:lstStyle/>
+          <a:p>
+            <a:pPr indent="0" marL="0">
+              <a:buNone/>
+            </a:pPr>
+            <a:r>
+              <a:rPr lang="en-US" sz="1050" dirty="0">
+                <a:solidFill>
+                  <a:srgbClr val="0A3D23"/>
+                </a:solidFill>
+                <a:latin typeface="Yu Gothic" pitchFamily="34" charset="0"/>
+                <a:ea typeface="Yu Gothic" pitchFamily="34" charset="-122"/>
+                <a:cs typeface="Yu Gothic" pitchFamily="34" charset="-120"/>
+              </a:rPr>
+              <a:t>スタンダード仕様（既存の書店併設店と同じ設え）</a:t>
+            </a:r>
+            <a:endParaRPr lang="en-US" sz="1050" dirty="0"/>
+          </a:p>
+        </p:txBody>
+      </p:sp>
+      <p:sp>
+        <p:nvSpPr>
+          <p:cNvPr id="13" name="Shape 9"/>
+          <p:cNvSpPr/>
+          <p:nvPr/>
+        </p:nvSpPr>
+        <p:spPr>
+          <a:xfrm>
+            <a:off x="660197" y="2364638"/>
+            <a:ext cx="6858000" cy="621792"/>
+          </a:xfrm>
+          <a:prstGeom prst="roundRect">
+            <a:avLst>
+              <a:gd name="adj" fmla="val 8824"/>
+            </a:avLst>
+          </a:prstGeom>
+          <a:solidFill>
+            <a:srgbClr val="F1F8F3"/>
+          </a:solidFill>
+          <a:ln w="9525">
+            <a:solidFill>
+              <a:srgbClr val="D2E7DA"/>
+            </a:solidFill>
+            <a:prstDash val="solid"/>
+          </a:ln>
+        </p:spPr>
+      </p:sp>
+      <p:pic>
+        <p:nvPicPr>
+          <p:cNvPr id="14" name="Image 2" descr="/home/user/suzuki-ceo/selfcafe-miraiya-trial-deck/assets/icons/LuHammer-green.png">    </p:cNvPr>
+          <p:cNvPicPr>
+            <a:picLocks noChangeAspect="1"/>
+          </p:cNvPicPr>
+          <p:nvPr/>
+        </p:nvPicPr>
+        <p:blipFill>
+          <a:blip r:embed="rId3"/>
+          <a:stretch>
+            <a:fillRect/>
+          </a:stretch>
+        </p:blipFill>
+        <p:spPr>
+          <a:xfrm>
+            <a:off x="916229" y="2510942"/>
+            <a:ext cx="329184" cy="329184"/>
+          </a:xfrm>
+          <a:prstGeom prst="rect">
+            <a:avLst/>
+          </a:prstGeom>
+        </p:spPr>
+      </p:pic>
+      <p:sp>
+        <p:nvSpPr>
+          <p:cNvPr id="15" name="Text 10"/>
+          <p:cNvSpPr/>
+          <p:nvPr/>
+        </p:nvSpPr>
+        <p:spPr>
+          <a:xfrm>
+            <a:off x="1373429" y="2419502"/>
+            <a:ext cx="5888736" cy="237744"/>
+          </a:xfrm>
+          <a:prstGeom prst="rect">
+            <a:avLst/>
+          </a:prstGeom>
+          <a:noFill/>
+          <a:ln/>
+        </p:spPr>
+        <p:txBody>
+          <a:bodyPr wrap="square" lIns="0" tIns="0" rIns="0" bIns="0" rtlCol="0" anchor="ctr"/>
+          <a:lstStyle/>
+          <a:p>
+            <a:pPr indent="0" marL="0">
+              <a:buNone/>
+            </a:pPr>
+            <a:r>
+              <a:rPr lang="en-US" sz="1150" b="1" dirty="0">
+                <a:solidFill>
+                  <a:srgbClr val="106838"/>
+                </a:solidFill>
+                <a:latin typeface="Yu Gothic" pitchFamily="34" charset="0"/>
+                <a:ea typeface="Yu Gothic" pitchFamily="34" charset="-122"/>
+                <a:cs typeface="Yu Gothic" pitchFamily="34" charset="-120"/>
+              </a:rPr>
+              <a:t>工事部分</a:t>
+            </a:r>
+            <a:endParaRPr lang="en-US" sz="1150" dirty="0"/>
+          </a:p>
+        </p:txBody>
+      </p:sp>
+      <p:sp>
+        <p:nvSpPr>
+          <p:cNvPr id="16" name="Text 11"/>
+          <p:cNvSpPr/>
+          <p:nvPr/>
+        </p:nvSpPr>
+        <p:spPr>
+          <a:xfrm>
+            <a:off x="1373429" y="2675534"/>
+            <a:ext cx="5888736" cy="256032"/>
+          </a:xfrm>
+          <a:prstGeom prst="rect">
+            <a:avLst/>
+          </a:prstGeom>
+          <a:noFill/>
+          <a:ln/>
+        </p:spPr>
+        <p:txBody>
+          <a:bodyPr wrap="square" lIns="0" tIns="0" rIns="0" bIns="0" rtlCol="0" anchor="ctr"/>
+          <a:lstStyle/>
+          <a:p>
+            <a:pPr indent="0" marL="0">
+              <a:buNone/>
+            </a:pPr>
+            <a:r>
+              <a:rPr lang="en-US" sz="1050" dirty="0">
+                <a:solidFill>
+                  <a:srgbClr val="0A3D23"/>
+                </a:solidFill>
+                <a:latin typeface="Yu Gothic" pitchFamily="34" charset="0"/>
+                <a:ea typeface="Yu Gothic" pitchFamily="34" charset="-122"/>
+                <a:cs typeface="Yu Gothic" pitchFamily="34" charset="-120"/>
+              </a:rPr>
+              <a:t>セルフカフェが負担します（御社のご負担なし）</a:t>
+            </a:r>
+            <a:endParaRPr lang="en-US" sz="1050" dirty="0"/>
+          </a:p>
+        </p:txBody>
+      </p:sp>
+      <p:sp>
+        <p:nvSpPr>
+          <p:cNvPr id="17" name="Shape 12"/>
+          <p:cNvSpPr/>
+          <p:nvPr/>
+        </p:nvSpPr>
+        <p:spPr>
+          <a:xfrm>
+            <a:off x="660197" y="3077870"/>
+            <a:ext cx="6858000" cy="621792"/>
+          </a:xfrm>
+          <a:prstGeom prst="roundRect">
+            <a:avLst>
+              <a:gd name="adj" fmla="val 8824"/>
+            </a:avLst>
+          </a:prstGeom>
+          <a:solidFill>
+            <a:srgbClr val="F1F8F3"/>
+          </a:solidFill>
+          <a:ln w="9525">
+            <a:solidFill>
+              <a:srgbClr val="D2E7DA"/>
+            </a:solidFill>
+            <a:prstDash val="solid"/>
+          </a:ln>
+        </p:spPr>
+      </p:sp>
+      <p:pic>
+        <p:nvPicPr>
+          <p:cNvPr id="18" name="Image 3" descr="/home/user/suzuki-ceo/selfcafe-miraiya-trial-deck/assets/icons/LuLandPlot-green.png">    </p:cNvPr>
+          <p:cNvPicPr>
+            <a:picLocks noChangeAspect="1"/>
+          </p:cNvPicPr>
+          <p:nvPr/>
+        </p:nvPicPr>
+        <p:blipFill>
+          <a:blip r:embed="rId4"/>
+          <a:stretch>
+            <a:fillRect/>
+          </a:stretch>
+        </p:blipFill>
+        <p:spPr>
+          <a:xfrm>
+            <a:off x="916229" y="3224174"/>
+            <a:ext cx="329184" cy="329184"/>
+          </a:xfrm>
+          <a:prstGeom prst="rect">
+            <a:avLst/>
+          </a:prstGeom>
+        </p:spPr>
+      </p:pic>
+      <p:sp>
+        <p:nvSpPr>
+          <p:cNvPr id="19" name="Text 13"/>
+          <p:cNvSpPr/>
+          <p:nvPr/>
+        </p:nvSpPr>
+        <p:spPr>
+          <a:xfrm>
+            <a:off x="1373429" y="3132734"/>
+            <a:ext cx="5888736" cy="237744"/>
+          </a:xfrm>
+          <a:prstGeom prst="rect">
+            <a:avLst/>
+          </a:prstGeom>
+          <a:noFill/>
+          <a:ln/>
+        </p:spPr>
+        <p:txBody>
+          <a:bodyPr wrap="square" lIns="0" tIns="0" rIns="0" bIns="0" rtlCol="0" anchor="ctr"/>
+          <a:lstStyle/>
+          <a:p>
+            <a:pPr indent="0" marL="0">
+              <a:buNone/>
+            </a:pPr>
+            <a:r>
+              <a:rPr lang="en-US" sz="1150" b="1" dirty="0">
+                <a:solidFill>
+                  <a:srgbClr val="106838"/>
+                </a:solidFill>
+                <a:latin typeface="Yu Gothic" pitchFamily="34" charset="0"/>
+                <a:ea typeface="Yu Gothic" pitchFamily="34" charset="-122"/>
+                <a:cs typeface="Yu Gothic" pitchFamily="34" charset="-120"/>
+              </a:rPr>
+              <a:t>家具・什器</a:t>
+            </a:r>
+            <a:endParaRPr lang="en-US" sz="1150" dirty="0"/>
+          </a:p>
+        </p:txBody>
+      </p:sp>
+      <p:sp>
+        <p:nvSpPr>
+          <p:cNvPr id="20" name="Text 14"/>
+          <p:cNvSpPr/>
+          <p:nvPr/>
+        </p:nvSpPr>
+        <p:spPr>
+          <a:xfrm>
+            <a:off x="1373429" y="3388766"/>
+            <a:ext cx="5888736" cy="256032"/>
+          </a:xfrm>
+          <a:prstGeom prst="rect">
+            <a:avLst/>
+          </a:prstGeom>
+          <a:noFill/>
+          <a:ln/>
+        </p:spPr>
+        <p:txBody>
+          <a:bodyPr wrap="square" lIns="0" tIns="0" rIns="0" bIns="0" rtlCol="0" anchor="ctr"/>
+          <a:lstStyle/>
+          <a:p>
+            <a:pPr indent="0" marL="0">
+              <a:buNone/>
+            </a:pPr>
+            <a:r>
+              <a:rPr lang="en-US" sz="1050" dirty="0">
+                <a:solidFill>
+                  <a:srgbClr val="0A3D23"/>
+                </a:solidFill>
+                <a:latin typeface="Yu Gothic" pitchFamily="34" charset="0"/>
+                <a:ea typeface="Yu Gothic" pitchFamily="34" charset="-122"/>
+                <a:cs typeface="Yu Gothic" pitchFamily="34" charset="-120"/>
+              </a:rPr>
+              <a:t>御社にてご手配いただきます（御社の所有となります）</a:t>
+            </a:r>
+            <a:endParaRPr lang="en-US" sz="1050" dirty="0"/>
+          </a:p>
+        </p:txBody>
+      </p:sp>
+      <p:sp>
+        <p:nvSpPr>
+          <p:cNvPr id="21" name="Shape 15"/>
+          <p:cNvSpPr/>
+          <p:nvPr/>
+        </p:nvSpPr>
+        <p:spPr>
+          <a:xfrm>
+            <a:off x="660197" y="3791102"/>
+            <a:ext cx="6858000" cy="621792"/>
+          </a:xfrm>
+          <a:prstGeom prst="roundRect">
+            <a:avLst>
+              <a:gd name="adj" fmla="val 8824"/>
+            </a:avLst>
+          </a:prstGeom>
+          <a:solidFill>
+            <a:srgbClr val="F1F8F3"/>
+          </a:solidFill>
+          <a:ln w="9525">
+            <a:solidFill>
+              <a:srgbClr val="D2E7DA"/>
+            </a:solidFill>
+            <a:prstDash val="solid"/>
+          </a:ln>
+        </p:spPr>
+      </p:sp>
+      <p:pic>
+        <p:nvPicPr>
+          <p:cNvPr id="22" name="Image 4" descr="/home/user/suzuki-ceo/selfcafe-miraiya-trial-deck/assets/icons/LuHandCoins-green.png">    </p:cNvPr>
+          <p:cNvPicPr>
+            <a:picLocks noChangeAspect="1"/>
+          </p:cNvPicPr>
+          <p:nvPr/>
+        </p:nvPicPr>
+        <p:blipFill>
+          <a:blip r:embed="rId5"/>
+          <a:stretch>
+            <a:fillRect/>
+          </a:stretch>
+        </p:blipFill>
+        <p:spPr>
+          <a:xfrm>
+            <a:off x="916229" y="3937406"/>
+            <a:ext cx="329184" cy="329184"/>
+          </a:xfrm>
+          <a:prstGeom prst="rect">
+            <a:avLst/>
+          </a:prstGeom>
+        </p:spPr>
+      </p:pic>
+      <p:sp>
+        <p:nvSpPr>
+          <p:cNvPr id="23" name="Text 16"/>
+          <p:cNvSpPr/>
+          <p:nvPr/>
+        </p:nvSpPr>
+        <p:spPr>
+          <a:xfrm>
+            <a:off x="1373429" y="3845966"/>
+            <a:ext cx="5888736" cy="237744"/>
+          </a:xfrm>
+          <a:prstGeom prst="rect">
+            <a:avLst/>
+          </a:prstGeom>
+          <a:noFill/>
+          <a:ln/>
+        </p:spPr>
+        <p:txBody>
+          <a:bodyPr wrap="square" lIns="0" tIns="0" rIns="0" bIns="0" rtlCol="0" anchor="ctr"/>
+          <a:lstStyle/>
+          <a:p>
+            <a:pPr indent="0" marL="0">
+              <a:buNone/>
+            </a:pPr>
+            <a:r>
+              <a:rPr lang="en-US" sz="1150" b="1" dirty="0">
+                <a:solidFill>
+                  <a:srgbClr val="106838"/>
+                </a:solidFill>
+                <a:latin typeface="Yu Gothic" pitchFamily="34" charset="0"/>
+                <a:ea typeface="Yu Gothic" pitchFamily="34" charset="-122"/>
+                <a:cs typeface="Yu Gothic" pitchFamily="34" charset="-120"/>
+              </a:rPr>
+              <a:t>お支払い</a:t>
+            </a:r>
+            <a:endParaRPr lang="en-US" sz="1150" dirty="0"/>
+          </a:p>
+        </p:txBody>
+      </p:sp>
+      <p:sp>
+        <p:nvSpPr>
+          <p:cNvPr id="24" name="Text 17"/>
+          <p:cNvSpPr/>
+          <p:nvPr/>
+        </p:nvSpPr>
+        <p:spPr>
+          <a:xfrm>
+            <a:off x="1373429" y="4101998"/>
+            <a:ext cx="5888736" cy="256032"/>
+          </a:xfrm>
+          <a:prstGeom prst="rect">
+            <a:avLst/>
+          </a:prstGeom>
+          <a:noFill/>
+          <a:ln/>
+        </p:spPr>
+        <p:txBody>
+          <a:bodyPr wrap="square" lIns="0" tIns="0" rIns="0" bIns="0" rtlCol="0" anchor="ctr"/>
+          <a:lstStyle/>
+          <a:p>
+            <a:pPr indent="0" marL="0">
+              <a:buNone/>
+            </a:pPr>
+            <a:r>
+              <a:rPr lang="en-US" sz="1050" dirty="0">
+                <a:solidFill>
+                  <a:srgbClr val="0A3D23"/>
+                </a:solidFill>
+                <a:latin typeface="Yu Gothic" pitchFamily="34" charset="0"/>
+                <a:ea typeface="Yu Gothic" pitchFamily="34" charset="-122"/>
+                <a:cs typeface="Yu Gothic" pitchFamily="34" charset="-120"/>
+              </a:rPr>
+              <a:t>セルフカフェ売上の25％を毎月お支払いします</a:t>
+            </a:r>
+            <a:endParaRPr lang="en-US" sz="1050" dirty="0"/>
+          </a:p>
+        </p:txBody>
+      </p:sp>
+      <p:sp>
+        <p:nvSpPr>
+          <p:cNvPr id="25" name="Shape 18"/>
+          <p:cNvSpPr/>
+          <p:nvPr/>
+        </p:nvSpPr>
+        <p:spPr>
+          <a:xfrm>
+            <a:off x="660197" y="4504334"/>
+            <a:ext cx="6858000" cy="621792"/>
+          </a:xfrm>
+          <a:prstGeom prst="roundRect">
+            <a:avLst>
+              <a:gd name="adj" fmla="val 8824"/>
+            </a:avLst>
+          </a:prstGeom>
+          <a:solidFill>
+            <a:srgbClr val="F1F8F3"/>
+          </a:solidFill>
+          <a:ln w="9525">
+            <a:solidFill>
+              <a:srgbClr val="D2E7DA"/>
+            </a:solidFill>
+            <a:prstDash val="solid"/>
+          </a:ln>
+        </p:spPr>
+      </p:sp>
+      <p:pic>
+        <p:nvPicPr>
+          <p:cNvPr id="26" name="Image 5" descr="/home/user/suzuki-ceo/selfcafe-miraiya-trial-deck/assets/icons/LuCalendarCheck-green.png">    </p:cNvPr>
+          <p:cNvPicPr>
+            <a:picLocks noChangeAspect="1"/>
+          </p:cNvPicPr>
+          <p:nvPr/>
+        </p:nvPicPr>
+        <p:blipFill>
+          <a:blip r:embed="rId6"/>
+          <a:stretch>
+            <a:fillRect/>
+          </a:stretch>
+        </p:blipFill>
+        <p:spPr>
+          <a:xfrm>
+            <a:off x="916229" y="4650638"/>
+            <a:ext cx="329184" cy="329184"/>
+          </a:xfrm>
+          <a:prstGeom prst="rect">
+            <a:avLst/>
+          </a:prstGeom>
+        </p:spPr>
+      </p:pic>
+      <p:sp>
+        <p:nvSpPr>
+          <p:cNvPr id="27" name="Text 19"/>
+          <p:cNvSpPr/>
+          <p:nvPr/>
+        </p:nvSpPr>
+        <p:spPr>
+          <a:xfrm>
+            <a:off x="1373429" y="4559198"/>
+            <a:ext cx="5888736" cy="237744"/>
+          </a:xfrm>
+          <a:prstGeom prst="rect">
+            <a:avLst/>
+          </a:prstGeom>
+          <a:noFill/>
+          <a:ln/>
+        </p:spPr>
+        <p:txBody>
+          <a:bodyPr wrap="square" lIns="0" tIns="0" rIns="0" bIns="0" rtlCol="0" anchor="ctr"/>
+          <a:lstStyle/>
+          <a:p>
+            <a:pPr indent="0" marL="0">
+              <a:buNone/>
+            </a:pPr>
+            <a:r>
+              <a:rPr lang="en-US" sz="1150" b="1" dirty="0">
+                <a:solidFill>
+                  <a:srgbClr val="106838"/>
+                </a:solidFill>
+                <a:latin typeface="Yu Gothic" pitchFamily="34" charset="0"/>
+                <a:ea typeface="Yu Gothic" pitchFamily="34" charset="-122"/>
+                <a:cs typeface="Yu Gothic" pitchFamily="34" charset="-120"/>
+              </a:rPr>
+              <a:t>契約期間</a:t>
+            </a:r>
+            <a:endParaRPr lang="en-US" sz="1150" dirty="0"/>
+          </a:p>
+        </p:txBody>
+      </p:sp>
+      <p:sp>
+        <p:nvSpPr>
+          <p:cNvPr id="28" name="Text 20"/>
+          <p:cNvSpPr/>
+          <p:nvPr/>
+        </p:nvSpPr>
+        <p:spPr>
+          <a:xfrm>
+            <a:off x="1373429" y="4815230"/>
+            <a:ext cx="5888736" cy="256032"/>
+          </a:xfrm>
+          <a:prstGeom prst="rect">
+            <a:avLst/>
+          </a:prstGeom>
+          <a:noFill/>
+          <a:ln/>
+        </p:spPr>
+        <p:txBody>
+          <a:bodyPr wrap="square" lIns="0" tIns="0" rIns="0" bIns="0" rtlCol="0" anchor="ctr"/>
+          <a:lstStyle/>
+          <a:p>
+            <a:pPr indent="0" marL="0">
+              <a:buNone/>
+            </a:pPr>
+            <a:r>
+              <a:rPr lang="en-US" sz="1050" dirty="0">
+                <a:solidFill>
+                  <a:srgbClr val="0A3D23"/>
+                </a:solidFill>
+                <a:latin typeface="Yu Gothic" pitchFamily="34" charset="0"/>
+                <a:ea typeface="Yu Gothic" pitchFamily="34" charset="-122"/>
+                <a:cs typeface="Yu Gothic" pitchFamily="34" charset="-120"/>
+              </a:rPr>
+              <a:t>1年（通常は3年以上のところ、今回は1年で）</a:t>
+            </a:r>
+            <a:endParaRPr lang="en-US" sz="1050" dirty="0"/>
+          </a:p>
+        </p:txBody>
+      </p:sp>
+      <p:sp>
+        <p:nvSpPr>
+          <p:cNvPr id="29" name="Shape 21"/>
+          <p:cNvSpPr/>
+          <p:nvPr/>
+        </p:nvSpPr>
+        <p:spPr>
+          <a:xfrm>
+            <a:off x="660197" y="5217566"/>
+            <a:ext cx="6858000" cy="621792"/>
+          </a:xfrm>
+          <a:prstGeom prst="roundRect">
+            <a:avLst>
+              <a:gd name="adj" fmla="val 8824"/>
+            </a:avLst>
+          </a:prstGeom>
+          <a:solidFill>
+            <a:srgbClr val="F1F8F3"/>
+          </a:solidFill>
+          <a:ln w="9525">
+            <a:solidFill>
+              <a:srgbClr val="D2E7DA"/>
+            </a:solidFill>
+            <a:prstDash val="solid"/>
+          </a:ln>
+        </p:spPr>
+      </p:sp>
+      <p:pic>
+        <p:nvPicPr>
+          <p:cNvPr id="30" name="Image 6" descr="/home/user/suzuki-ceo/selfcafe-miraiya-trial-deck/assets/icons/LuKeyRound-green.png">    </p:cNvPr>
+          <p:cNvPicPr>
+            <a:picLocks noChangeAspect="1"/>
+          </p:cNvPicPr>
+          <p:nvPr/>
+        </p:nvPicPr>
+        <p:blipFill>
+          <a:blip r:embed="rId7"/>
+          <a:stretch>
+            <a:fillRect/>
+          </a:stretch>
+        </p:blipFill>
+        <p:spPr>
+          <a:xfrm>
+            <a:off x="916229" y="5363870"/>
+            <a:ext cx="329184" cy="329184"/>
+          </a:xfrm>
+          <a:prstGeom prst="rect">
+            <a:avLst/>
+          </a:prstGeom>
+        </p:spPr>
+      </p:pic>
+      <p:sp>
+        <p:nvSpPr>
+          <p:cNvPr id="31" name="Text 22"/>
+          <p:cNvSpPr/>
+          <p:nvPr/>
+        </p:nvSpPr>
+        <p:spPr>
+          <a:xfrm>
+            <a:off x="1373429" y="5272430"/>
+            <a:ext cx="5888736" cy="237744"/>
+          </a:xfrm>
+          <a:prstGeom prst="rect">
+            <a:avLst/>
+          </a:prstGeom>
+          <a:noFill/>
+          <a:ln/>
+        </p:spPr>
+        <p:txBody>
+          <a:bodyPr wrap="square" lIns="0" tIns="0" rIns="0" bIns="0" rtlCol="0" anchor="ctr"/>
+          <a:lstStyle/>
+          <a:p>
+            <a:pPr indent="0" marL="0">
+              <a:buNone/>
+            </a:pPr>
+            <a:r>
+              <a:rPr lang="en-US" sz="1150" b="1" dirty="0">
+                <a:solidFill>
+                  <a:srgbClr val="106838"/>
+                </a:solidFill>
+                <a:latin typeface="Yu Gothic" pitchFamily="34" charset="0"/>
+                <a:ea typeface="Yu Gothic" pitchFamily="34" charset="-122"/>
+                <a:cs typeface="Yu Gothic" pitchFamily="34" charset="-120"/>
+              </a:rPr>
+              <a:t>原状回復義務</a:t>
+            </a:r>
+            <a:endParaRPr lang="en-US" sz="1150" dirty="0"/>
+          </a:p>
+        </p:txBody>
+      </p:sp>
+      <p:sp>
+        <p:nvSpPr>
+          <p:cNvPr id="32" name="Text 23"/>
+          <p:cNvSpPr/>
+          <p:nvPr/>
+        </p:nvSpPr>
+        <p:spPr>
+          <a:xfrm>
+            <a:off x="1373429" y="5528462"/>
+            <a:ext cx="5888736" cy="256032"/>
+          </a:xfrm>
+          <a:prstGeom prst="rect">
+            <a:avLst/>
+          </a:prstGeom>
+          <a:noFill/>
+          <a:ln/>
+        </p:spPr>
+        <p:txBody>
+          <a:bodyPr wrap="square" lIns="0" tIns="0" rIns="0" bIns="0" rtlCol="0" anchor="ctr"/>
+          <a:lstStyle/>
+          <a:p>
+            <a:pPr indent="0" marL="0">
+              <a:buNone/>
+            </a:pPr>
+            <a:r>
+              <a:rPr lang="en-US" sz="1050" dirty="0">
+                <a:solidFill>
+                  <a:srgbClr val="0A3D23"/>
+                </a:solidFill>
+                <a:latin typeface="Yu Gothic" pitchFamily="34" charset="0"/>
+                <a:ea typeface="Yu Gothic" pitchFamily="34" charset="-122"/>
+                <a:cs typeface="Yu Gothic" pitchFamily="34" charset="-120"/>
+              </a:rPr>
+              <a:t>なし（当社のマシン・カメラ等のみ撤去します）</a:t>
+            </a:r>
+            <a:endParaRPr lang="en-US" sz="1050" dirty="0"/>
+          </a:p>
+        </p:txBody>
+      </p:sp>
+      <p:sp>
+        <p:nvSpPr>
+          <p:cNvPr id="33" name="Shape 24"/>
+          <p:cNvSpPr/>
+          <p:nvPr/>
+        </p:nvSpPr>
+        <p:spPr>
+          <a:xfrm>
+            <a:off x="7902245" y="1651406"/>
+            <a:ext cx="3629254" cy="2103120"/>
+          </a:xfrm>
+          <a:prstGeom prst="roundRect">
+            <a:avLst>
+              <a:gd name="adj" fmla="val 2609"/>
+            </a:avLst>
+          </a:prstGeom>
+          <a:solidFill>
+            <a:srgbClr val="0C5230"/>
+          </a:solidFill>
+          <a:ln/>
+        </p:spPr>
+      </p:sp>
+      <p:sp>
+        <p:nvSpPr>
+          <p:cNvPr id="34" name="Text 25"/>
+          <p:cNvSpPr/>
+          <p:nvPr/>
+        </p:nvSpPr>
+        <p:spPr>
+          <a:xfrm>
+            <a:off x="8158277" y="1870862"/>
+            <a:ext cx="2377440" cy="164592"/>
+          </a:xfrm>
+          <a:prstGeom prst="rect">
+            <a:avLst/>
+          </a:prstGeom>
+          <a:noFill/>
+          <a:ln/>
+        </p:spPr>
+        <p:txBody>
+          <a:bodyPr wrap="square" lIns="0" tIns="0" rIns="0" bIns="0" rtlCol="0" anchor="ctr"/>
+          <a:lstStyle/>
+          <a:p>
+            <a:pPr indent="0" marL="0">
+              <a:buNone/>
+            </a:pPr>
+            <a:r>
+              <a:rPr lang="en-US" sz="900" b="1" spc="150" kern="0" dirty="0">
+                <a:solidFill>
+                  <a:srgbClr val="8CC5A5"/>
+                </a:solidFill>
+                <a:latin typeface="Arial" pitchFamily="34" charset="0"/>
+                <a:ea typeface="Arial" pitchFamily="34" charset="-122"/>
+                <a:cs typeface="Arial" pitchFamily="34" charset="-120"/>
+              </a:rPr>
+              <a:t>REVENUE SHARE</a:t>
+            </a:r>
+            <a:endParaRPr lang="en-US" sz="900" dirty="0"/>
+          </a:p>
+        </p:txBody>
+      </p:sp>
+      <p:sp>
+        <p:nvSpPr>
+          <p:cNvPr id="35" name="Text 26"/>
+          <p:cNvSpPr/>
+          <p:nvPr/>
+        </p:nvSpPr>
+        <p:spPr>
+          <a:xfrm>
+            <a:off x="8158277" y="2145182"/>
+            <a:ext cx="3117190" cy="256032"/>
+          </a:xfrm>
+          <a:prstGeom prst="rect">
+            <a:avLst/>
+          </a:prstGeom>
+          <a:noFill/>
+          <a:ln/>
+        </p:spPr>
+        <p:txBody>
+          <a:bodyPr wrap="square" lIns="0" tIns="0" rIns="0" bIns="0" rtlCol="0" anchor="ctr"/>
+          <a:lstStyle/>
+          <a:p>
+            <a:pPr indent="0" marL="0">
+              <a:buNone/>
+            </a:pPr>
+            <a:r>
+              <a:rPr lang="en-US" sz="1100" dirty="0">
+                <a:solidFill>
+                  <a:srgbClr val="AFC2B8"/>
+                </a:solidFill>
+                <a:latin typeface="Yu Gothic" pitchFamily="34" charset="0"/>
+                <a:ea typeface="Yu Gothic" pitchFamily="34" charset="-122"/>
+                <a:cs typeface="Yu Gothic" pitchFamily="34" charset="-120"/>
+              </a:rPr>
+              <a:t>御社へのお支払い</a:t>
+            </a:r>
+            <a:endParaRPr lang="en-US" sz="1100" dirty="0"/>
+          </a:p>
+        </p:txBody>
+      </p:sp>
+      <p:sp>
+        <p:nvSpPr>
+          <p:cNvPr id="36" name="Text 27"/>
+          <p:cNvSpPr/>
+          <p:nvPr/>
+        </p:nvSpPr>
+        <p:spPr>
+          <a:xfrm>
+            <a:off x="8158277" y="2474366"/>
+            <a:ext cx="3117190" cy="731520"/>
+          </a:xfrm>
+          <a:prstGeom prst="rect">
+            <a:avLst/>
+          </a:prstGeom>
+          <a:noFill/>
+          <a:ln/>
+        </p:spPr>
+        <p:txBody>
+          <a:bodyPr wrap="square" lIns="0" tIns="0" rIns="0" bIns="0" rtlCol="0" anchor="ctr"/>
+          <a:lstStyle/>
+          <a:p>
+            <a:pPr indent="0" marL="0">
+              <a:buNone/>
+            </a:pPr>
+            <a:r>
+              <a:rPr lang="en-US" sz="1400" dirty="0">
+                <a:solidFill>
+                  <a:srgbClr val="FFFFFF"/>
+                </a:solidFill>
+                <a:latin typeface="Yu Gothic" pitchFamily="34" charset="0"/>
+                <a:ea typeface="Yu Gothic" pitchFamily="34" charset="-122"/>
+                <a:cs typeface="Yu Gothic" pitchFamily="34" charset="-120"/>
+              </a:rPr>
+              <a:t>売上の </a:t>
+            </a:r>
+            <a:r>
+              <a:rPr lang="en-US" sz="4000" b="1" dirty="0">
+                <a:solidFill>
+                  <a:srgbClr val="F0C05A"/>
+                </a:solidFill>
+                <a:latin typeface="Arial" pitchFamily="34" charset="0"/>
+                <a:ea typeface="Arial" pitchFamily="34" charset="-122"/>
+                <a:cs typeface="Arial" pitchFamily="34" charset="-120"/>
+              </a:rPr>
+              <a:t>25</a:t>
+            </a:r>
+            <a:r>
+              <a:rPr lang="en-US" sz="1700" b="1" dirty="0">
+                <a:solidFill>
+                  <a:srgbClr val="F0C05A"/>
+                </a:solidFill>
+                <a:latin typeface="Yu Gothic" pitchFamily="34" charset="0"/>
+                <a:ea typeface="Yu Gothic" pitchFamily="34" charset="-122"/>
+                <a:cs typeface="Yu Gothic" pitchFamily="34" charset="-120"/>
+              </a:rPr>
+              <a:t> ％</a:t>
+            </a:r>
+            <a:endParaRPr lang="en-US" sz="1400" dirty="0"/>
+          </a:p>
+        </p:txBody>
+      </p:sp>
+      <p:sp>
+        <p:nvSpPr>
+          <p:cNvPr id="37" name="Text 28"/>
+          <p:cNvSpPr/>
+          <p:nvPr/>
+        </p:nvSpPr>
+        <p:spPr>
+          <a:xfrm>
+            <a:off x="8158277" y="3279038"/>
+            <a:ext cx="3117190" cy="274320"/>
+          </a:xfrm>
+          <a:prstGeom prst="rect">
+            <a:avLst/>
+          </a:prstGeom>
+          <a:noFill/>
+          <a:ln/>
+        </p:spPr>
+        <p:txBody>
+          <a:bodyPr wrap="square" lIns="0" tIns="0" rIns="0" bIns="0" rtlCol="0" anchor="ctr"/>
+          <a:lstStyle/>
+          <a:p>
+            <a:pPr indent="0" marL="0">
+              <a:buNone/>
+            </a:pPr>
+            <a:r>
+              <a:rPr lang="en-US" sz="950" dirty="0">
+                <a:solidFill>
+                  <a:srgbClr val="AFC2B8"/>
+                </a:solidFill>
+                <a:latin typeface="Yu Gothic" pitchFamily="34" charset="0"/>
+                <a:ea typeface="Yu Gothic" pitchFamily="34" charset="-122"/>
+                <a:cs typeface="Yu Gothic" pitchFamily="34" charset="-120"/>
+              </a:rPr>
+              <a:t>毎月お支払いします（税抜）</a:t>
+            </a:r>
+            <a:endParaRPr lang="en-US" sz="950" dirty="0"/>
+          </a:p>
+        </p:txBody>
+      </p:sp>
+      <p:sp>
+        <p:nvSpPr>
+          <p:cNvPr id="38" name="Shape 29"/>
+          <p:cNvSpPr/>
+          <p:nvPr/>
+        </p:nvSpPr>
+        <p:spPr>
+          <a:xfrm>
+            <a:off x="7902245" y="3882542"/>
+            <a:ext cx="3629254" cy="1060704"/>
+          </a:xfrm>
+          <a:prstGeom prst="roundRect">
+            <a:avLst>
+              <a:gd name="adj" fmla="val 5172"/>
+            </a:avLst>
+          </a:prstGeom>
+          <a:solidFill>
+            <a:srgbClr val="F1F8F3"/>
+          </a:solidFill>
+          <a:ln w="9525">
+            <a:solidFill>
+              <a:srgbClr val="D2E7DA"/>
+            </a:solidFill>
+            <a:prstDash val="solid"/>
+          </a:ln>
+        </p:spPr>
+      </p:sp>
+      <p:sp>
+        <p:nvSpPr>
+          <p:cNvPr id="39" name="Text 30"/>
+          <p:cNvSpPr/>
+          <p:nvPr/>
+        </p:nvSpPr>
+        <p:spPr>
+          <a:xfrm>
+            <a:off x="8158277" y="4010558"/>
+            <a:ext cx="3117190" cy="237744"/>
+          </a:xfrm>
+          <a:prstGeom prst="rect">
+            <a:avLst/>
+          </a:prstGeom>
+          <a:noFill/>
+          <a:ln/>
+        </p:spPr>
+        <p:txBody>
+          <a:bodyPr wrap="square" lIns="0" tIns="0" rIns="0" bIns="0" rtlCol="0" anchor="ctr"/>
+          <a:lstStyle/>
+          <a:p>
+            <a:pPr indent="0" marL="0">
+              <a:buNone/>
+            </a:pPr>
+            <a:r>
+              <a:rPr lang="en-US" sz="1050" b="1" dirty="0">
+                <a:solidFill>
+                  <a:srgbClr val="106838"/>
+                </a:solidFill>
+                <a:latin typeface="Yu Gothic" pitchFamily="34" charset="0"/>
+                <a:ea typeface="Yu Gothic" pitchFamily="34" charset="-122"/>
+                <a:cs typeface="Yu Gothic" pitchFamily="34" charset="-120"/>
+              </a:rPr>
+              <a:t>御社のご負担</a:t>
+            </a:r>
+            <a:endParaRPr lang="en-US" sz="1050" dirty="0"/>
+          </a:p>
+        </p:txBody>
+      </p:sp>
+      <p:sp>
+        <p:nvSpPr>
+          <p:cNvPr id="40" name="Text 31"/>
+          <p:cNvSpPr/>
+          <p:nvPr/>
+        </p:nvSpPr>
+        <p:spPr>
+          <a:xfrm>
+            <a:off x="8158277" y="4266590"/>
+            <a:ext cx="3117190" cy="585216"/>
+          </a:xfrm>
+          <a:prstGeom prst="rect">
+            <a:avLst/>
+          </a:prstGeom>
+          <a:noFill/>
+          <a:ln/>
+        </p:spPr>
+        <p:txBody>
+          <a:bodyPr wrap="square" lIns="0" tIns="0" rIns="0" bIns="0" rtlCol="0" anchor="t"/>
+          <a:lstStyle/>
+          <a:p>
+            <a:pPr indent="0" marL="0">
+              <a:lnSpc>
+                <a:spcPct val="130000"/>
+              </a:lnSpc>
+              <a:buNone/>
+            </a:pPr>
+            <a:r>
+              <a:rPr lang="en-US" sz="1000" dirty="0">
+                <a:solidFill>
+                  <a:srgbClr val="0A3D23"/>
+                </a:solidFill>
+                <a:latin typeface="Yu Gothic" pitchFamily="34" charset="0"/>
+                <a:ea typeface="Yu Gothic" pitchFamily="34" charset="-122"/>
+                <a:cs typeface="Yu Gothic" pitchFamily="34" charset="-120"/>
+              </a:rPr>
+              <a:t>家具・什器のご手配のみです。</a:t>
+            </a:r>
+            <a:endParaRPr lang="en-US" sz="1000" dirty="0"/>
+          </a:p>
+          <a:p>
+            <a:pPr indent="0" marL="0">
+              <a:lnSpc>
+                <a:spcPct val="130000"/>
+              </a:lnSpc>
+              <a:buNone/>
+            </a:pPr>
+            <a:r>
+              <a:rPr lang="en-US" sz="1000" dirty="0">
+                <a:solidFill>
+                  <a:srgbClr val="0A3D23"/>
+                </a:solidFill>
+                <a:latin typeface="Yu Gothic" pitchFamily="34" charset="0"/>
+                <a:ea typeface="Yu Gothic" pitchFamily="34" charset="-122"/>
+                <a:cs typeface="Yu Gothic" pitchFamily="34" charset="-120"/>
+              </a:rPr>
+              <a:t>内装工事費のご負担はありません。</a:t>
+            </a:r>
+            <a:endParaRPr lang="en-US" sz="1000" dirty="0"/>
+          </a:p>
+        </p:txBody>
+      </p:sp>
+      <p:sp>
+        <p:nvSpPr>
+          <p:cNvPr id="41" name="Shape 32"/>
+          <p:cNvSpPr/>
+          <p:nvPr/>
+        </p:nvSpPr>
+        <p:spPr>
+          <a:xfrm>
+            <a:off x="7902245" y="5071262"/>
+            <a:ext cx="3629254" cy="768096"/>
+          </a:xfrm>
+          <a:prstGeom prst="roundRect">
+            <a:avLst>
+              <a:gd name="adj" fmla="val 7143"/>
+            </a:avLst>
+          </a:prstGeom>
+          <a:solidFill>
+            <a:srgbClr val="FFFFFF"/>
+          </a:solidFill>
+          <a:ln w="9525">
+            <a:solidFill>
+              <a:srgbClr val="EFEAE0"/>
+            </a:solidFill>
+            <a:prstDash val="solid"/>
+          </a:ln>
+        </p:spPr>
+      </p:sp>
+      <p:pic>
+        <p:nvPicPr>
+          <p:cNvPr id="42" name="Image 7" descr="/home/user/suzuki-ceo/selfcafe-miraiya-trial-deck/assets/icons/LuShieldCheck-green.png">    </p:cNvPr>
+          <p:cNvPicPr>
+            <a:picLocks noChangeAspect="1"/>
+          </p:cNvPicPr>
+          <p:nvPr/>
+        </p:nvPicPr>
+        <p:blipFill>
+          <a:blip r:embed="rId8"/>
+          <a:stretch>
+            <a:fillRect/>
+          </a:stretch>
+        </p:blipFill>
+        <p:spPr>
+          <a:xfrm>
+            <a:off x="8139989" y="5217566"/>
+            <a:ext cx="292608" cy="292608"/>
+          </a:xfrm>
+          <a:prstGeom prst="rect">
+            <a:avLst/>
+          </a:prstGeom>
+        </p:spPr>
+      </p:pic>
+      <p:sp>
+        <p:nvSpPr>
+          <p:cNvPr id="43" name="Text 33"/>
+          <p:cNvSpPr/>
+          <p:nvPr/>
+        </p:nvSpPr>
+        <p:spPr>
+          <a:xfrm>
+            <a:off x="8524037" y="5144414"/>
+            <a:ext cx="2769718" cy="237744"/>
+          </a:xfrm>
+          <a:prstGeom prst="rect">
+            <a:avLst/>
+          </a:prstGeom>
+          <a:noFill/>
+          <a:ln/>
+        </p:spPr>
+        <p:txBody>
+          <a:bodyPr wrap="square" lIns="0" tIns="0" rIns="0" bIns="0" rtlCol="0" anchor="ctr"/>
+          <a:lstStyle/>
+          <a:p>
+            <a:pPr indent="0" marL="0">
+              <a:buNone/>
+            </a:pPr>
+            <a:r>
+              <a:rPr lang="en-US" sz="1100" b="1" dirty="0">
+                <a:solidFill>
+                  <a:srgbClr val="A8761F"/>
+                </a:solidFill>
+                <a:latin typeface="Yu Gothic" pitchFamily="34" charset="0"/>
+                <a:ea typeface="Yu Gothic" pitchFamily="34" charset="-122"/>
+                <a:cs typeface="Yu Gothic" pitchFamily="34" charset="-120"/>
+              </a:rPr>
+              <a:t>原状回復義務なし</a:t>
+            </a:r>
+            <a:endParaRPr lang="en-US" sz="1100" dirty="0"/>
+          </a:p>
+        </p:txBody>
+      </p:sp>
+      <p:sp>
+        <p:nvSpPr>
+          <p:cNvPr id="44" name="Text 34"/>
+          <p:cNvSpPr/>
+          <p:nvPr/>
+        </p:nvSpPr>
+        <p:spPr>
+          <a:xfrm>
+            <a:off x="8524037" y="5382158"/>
+            <a:ext cx="2769718" cy="365760"/>
+          </a:xfrm>
+          <a:prstGeom prst="rect">
+            <a:avLst/>
+          </a:prstGeom>
+          <a:noFill/>
+          <a:ln/>
+        </p:spPr>
+        <p:txBody>
+          <a:bodyPr wrap="square" lIns="0" tIns="0" rIns="0" bIns="0" rtlCol="0" anchor="t"/>
+          <a:lstStyle/>
+          <a:p>
+            <a:pPr indent="0" marL="0">
+              <a:lnSpc>
+                <a:spcPct val="120000"/>
+              </a:lnSpc>
+              <a:buNone/>
+            </a:pPr>
+            <a:r>
+              <a:rPr lang="en-US" sz="900" dirty="0">
+                <a:solidFill>
+                  <a:srgbClr val="0A3D23"/>
+                </a:solidFill>
+                <a:latin typeface="Yu Gothic" pitchFamily="34" charset="0"/>
+                <a:ea typeface="Yu Gothic" pitchFamily="34" charset="-122"/>
+                <a:cs typeface="Yu Gothic" pitchFamily="34" charset="-120"/>
+              </a:rPr>
+              <a:t>終了時も内装を元に戻す必要はありません。</a:t>
+            </a:r>
+            <a:endParaRPr lang="en-US" sz="900" dirty="0"/>
+          </a:p>
+        </p:txBody>
+      </p:sp>
+      <p:sp>
+        <p:nvSpPr>
+          <p:cNvPr id="45" name="Text 35"/>
+          <p:cNvSpPr/>
+          <p:nvPr/>
+        </p:nvSpPr>
+        <p:spPr>
+          <a:xfrm>
+            <a:off x="660197" y="6053328"/>
+            <a:ext cx="10871302" cy="182880"/>
+          </a:xfrm>
+          <a:prstGeom prst="rect">
+            <a:avLst/>
+          </a:prstGeom>
+          <a:noFill/>
+          <a:ln/>
+        </p:spPr>
+        <p:txBody>
+          <a:bodyPr wrap="square" lIns="0" tIns="0" rIns="0" bIns="0" rtlCol="0" anchor="ctr"/>
+          <a:lstStyle/>
+          <a:p>
+            <a:pPr indent="0" marL="0">
+              <a:buNone/>
+            </a:pPr>
+            <a:r>
+              <a:rPr lang="en-US" sz="850" dirty="0">
+                <a:solidFill>
+                  <a:srgbClr val="A8B0AA"/>
+                </a:solidFill>
+                <a:latin typeface="Yu Gothic" pitchFamily="34" charset="0"/>
+                <a:ea typeface="Yu Gothic" pitchFamily="34" charset="-122"/>
+                <a:cs typeface="Yu Gothic" pitchFamily="34" charset="-120"/>
+              </a:rPr>
+              <a:t>※ 金額はすべて税抜。通常のご契約との違いは次ページに整理しています。対象店舗はご相談のうえ決定させていただきます。</a:t>
+            </a:r>
+            <a:endParaRPr lang="en-US" sz="850" dirty="0"/>
+          </a:p>
+        </p:txBody>
+      </p:sp>
+    </p:spTree>
+  </p:cSld>
+  <p:clrMapOvr>
+    <a:masterClrMapping/>
+  </p:clrMapOvr>
+</p:sld>
+</file>
+
+<file path=ppt/slides/slide4.xml><?xml version="1.0" encoding="utf-8"?>
+<p:sld xmlns:a="http://schemas.openxmlformats.org/drawingml/2006/main" xmlns:r="http://schemas.openxmlformats.org/officeDocument/2006/relationships" xmlns:p="http://schemas.openxmlformats.org/presentationml/2006/main">
+  <p:cSld name="Slide 4">
+    <p:bg>
+      <p:bgPr>
+        <a:solidFill>
+          <a:srgbClr val="FFFDF7"/>
+        </a:solidFill>
+      </p:bgPr>
+    </p:bg>
+    <p:spTree>
+      <p:nvGrpSpPr>
+        <p:cNvPr id="1" name=""/>
+        <p:cNvGrpSpPr/>
+        <p:nvPr/>
+      </p:nvGrpSpPr>
+      <p:grpSpPr>
+        <a:xfrm>
+          <a:off x="0" y="0"/>
+          <a:ext cx="0" cy="0"/>
+          <a:chOff x="0" y="0"/>
+          <a:chExt cx="0" cy="0"/>
+        </a:xfrm>
+      </p:grpSpPr>
+      <p:sp>
+        <p:nvSpPr>
+          <p:cNvPr id="2" name="Shape 0"/>
+          <p:cNvSpPr/>
+          <p:nvPr/>
+        </p:nvSpPr>
+        <p:spPr>
+          <a:xfrm>
+            <a:off x="660197" y="545897"/>
+            <a:ext cx="202997" cy="25603"/>
+          </a:xfrm>
+          <a:prstGeom prst="rect">
+            <a:avLst/>
+          </a:prstGeom>
+          <a:solidFill>
+            <a:srgbClr val="106838"/>
+          </a:solidFill>
+          <a:ln/>
+        </p:spPr>
+      </p:sp>
+      <p:sp>
+        <p:nvSpPr>
+          <p:cNvPr id="3" name="Text 1"/>
+          <p:cNvSpPr/>
+          <p:nvPr/>
+        </p:nvSpPr>
+        <p:spPr>
+          <a:xfrm>
+            <a:off x="952805" y="444398"/>
+            <a:ext cx="6400800" cy="177394"/>
+          </a:xfrm>
+          <a:prstGeom prst="rect">
+            <a:avLst/>
+          </a:prstGeom>
+          <a:noFill/>
+          <a:ln/>
+        </p:spPr>
+        <p:txBody>
+          <a:bodyPr wrap="square" lIns="0" tIns="0" rIns="0" bIns="0" rtlCol="0" anchor="ctr"/>
+          <a:lstStyle/>
+          <a:p>
+            <a:pPr indent="0" marL="0">
+              <a:buNone/>
+            </a:pPr>
+            <a:r>
+              <a:rPr lang="en-US" sz="1050" b="1" dirty="0">
+                <a:solidFill>
+                  <a:srgbClr val="A8761F"/>
+                </a:solidFill>
+                <a:latin typeface="Arial" pitchFamily="34" charset="0"/>
+                <a:ea typeface="Arial" pitchFamily="34" charset="-122"/>
+                <a:cs typeface="Arial" pitchFamily="34" charset="-120"/>
+              </a:rPr>
+              <a:t>03</a:t>
+            </a:r>
+            <a:r>
+              <a:rPr lang="en-US" sz="1050" b="1" dirty="0">
+                <a:solidFill>
+                  <a:srgbClr val="1B8149"/>
+                </a:solidFill>
+                <a:latin typeface="Yu Gothic" pitchFamily="34" charset="0"/>
+                <a:ea typeface="Yu Gothic" pitchFamily="34" charset="-122"/>
+                <a:cs typeface="Yu Gothic" pitchFamily="34" charset="-120"/>
+              </a:rPr>
+              <a:t>   通常契約との比較</a:t>
+            </a:r>
+            <a:endParaRPr lang="en-US" sz="1050" dirty="0"/>
+          </a:p>
+        </p:txBody>
+      </p:sp>
+      <p:sp>
+        <p:nvSpPr>
+          <p:cNvPr id="4" name="Text 2"/>
+          <p:cNvSpPr/>
+          <p:nvPr/>
+        </p:nvSpPr>
+        <p:spPr>
+          <a:xfrm>
+            <a:off x="660197" y="660197"/>
+            <a:ext cx="8889797" cy="508406"/>
+          </a:xfrm>
+          <a:prstGeom prst="rect">
+            <a:avLst/>
+          </a:prstGeom>
+          <a:noFill/>
+          <a:ln/>
+        </p:spPr>
+        <p:txBody>
+          <a:bodyPr wrap="square" lIns="0" tIns="0" rIns="0" bIns="0" rtlCol="0" anchor="ctr"/>
+          <a:lstStyle/>
+          <a:p>
+            <a:pPr indent="0" marL="0">
+              <a:buNone/>
+            </a:pPr>
+            <a:r>
+              <a:rPr lang="en-US" sz="2900" b="1" dirty="0">
+                <a:solidFill>
+                  <a:srgbClr val="0A3D23"/>
+                </a:solidFill>
+                <a:latin typeface="Yu Gothic" pitchFamily="34" charset="0"/>
+                <a:ea typeface="Yu Gothic" pitchFamily="34" charset="-122"/>
+                <a:cs typeface="Yu Gothic" pitchFamily="34" charset="-120"/>
+              </a:rPr>
+              <a:t>違いは3点。それ以外は通常と同じです。</a:t>
+            </a:r>
+            <a:endParaRPr lang="en-US" sz="2900" dirty="0"/>
+          </a:p>
+        </p:txBody>
+      </p:sp>
+      <p:sp>
+        <p:nvSpPr>
+          <p:cNvPr id="5" name="Text 3"/>
+          <p:cNvSpPr/>
+          <p:nvPr/>
+        </p:nvSpPr>
+        <p:spPr>
+          <a:xfrm>
+            <a:off x="660197" y="1308506"/>
+            <a:ext cx="10032797" cy="228600"/>
+          </a:xfrm>
+          <a:prstGeom prst="rect">
+            <a:avLst/>
+          </a:prstGeom>
+          <a:noFill/>
+          <a:ln/>
+        </p:spPr>
+        <p:txBody>
+          <a:bodyPr wrap="square" lIns="0" tIns="0" rIns="0" bIns="0" rtlCol="0" anchor="ctr"/>
+          <a:lstStyle/>
+          <a:p>
+            <a:pPr indent="0" marL="0">
+              <a:buNone/>
+            </a:pPr>
+            <a:r>
+              <a:rPr lang="en-US" sz="1250" dirty="0">
+                <a:solidFill>
+                  <a:srgbClr val="4B5550"/>
+                </a:solidFill>
+                <a:latin typeface="Yu Gothic" pitchFamily="34" charset="0"/>
+                <a:ea typeface="Yu Gothic" pitchFamily="34" charset="-122"/>
+                <a:cs typeface="Yu Gothic" pitchFamily="34" charset="-120"/>
+              </a:rPr>
+              <a:t>通常は3年以上でお願いしていますが、今回は1年のトライアルとしてご提案します。</a:t>
+            </a:r>
+            <a:endParaRPr lang="en-US" sz="1250" dirty="0"/>
+          </a:p>
+        </p:txBody>
+      </p:sp>
+      <p:pic>
+        <p:nvPicPr>
+          <p:cNvPr id="6" name="Image 0" descr="/home/user/suzuki-ceo/selfcafe-miraiya-trial-deck/assets/logo-green.png">    </p:cNvPr>
+          <p:cNvPicPr>
+            <a:picLocks noChangeAspect="1"/>
+          </p:cNvPicPr>
+          <p:nvPr/>
+        </p:nvPicPr>
+        <p:blipFill>
+          <a:blip r:embed="rId1"/>
+          <a:stretch>
+            <a:fillRect/>
+          </a:stretch>
+        </p:blipFill>
+        <p:spPr>
+          <a:xfrm>
+            <a:off x="9855403" y="482803"/>
+            <a:ext cx="1676095" cy="238658"/>
+          </a:xfrm>
+          <a:prstGeom prst="rect">
+            <a:avLst/>
+          </a:prstGeom>
+        </p:spPr>
+      </p:pic>
+      <p:sp>
+        <p:nvSpPr>
+          <p:cNvPr id="7" name="Text 4"/>
+          <p:cNvSpPr/>
+          <p:nvPr/>
+        </p:nvSpPr>
+        <p:spPr>
+          <a:xfrm>
+            <a:off x="660197" y="6476695"/>
+            <a:ext cx="5080406" cy="152705"/>
+          </a:xfrm>
+          <a:prstGeom prst="rect">
+            <a:avLst/>
+          </a:prstGeom>
+          <a:noFill/>
+          <a:ln/>
+        </p:spPr>
+        <p:txBody>
+          <a:bodyPr wrap="square" lIns="0" tIns="0" rIns="0" bIns="0" rtlCol="0" anchor="ctr"/>
+          <a:lstStyle/>
+          <a:p>
+            <a:pPr indent="0" marL="0">
+              <a:buNone/>
+            </a:pPr>
+            <a:r>
+              <a:rPr lang="en-US" sz="900" dirty="0">
+                <a:solidFill>
+                  <a:srgbClr val="A8B0AA"/>
+                </a:solidFill>
+                <a:latin typeface="Yu Gothic" pitchFamily="34" charset="0"/>
+                <a:ea typeface="Yu Gothic" pitchFamily="34" charset="-122"/>
+                <a:cs typeface="Yu Gothic" pitchFamily="34" charset="-120"/>
+              </a:rPr>
+              <a:t>セルフカフェ × 未来屋書店 トライアル導入のご提案</a:t>
+            </a:r>
+            <a:endParaRPr lang="en-US" sz="900" dirty="0"/>
+          </a:p>
+        </p:txBody>
+      </p:sp>
+      <p:sp>
+        <p:nvSpPr>
+          <p:cNvPr id="8" name="Text 5"/>
+          <p:cNvSpPr/>
+          <p:nvPr/>
+        </p:nvSpPr>
+        <p:spPr>
+          <a:xfrm>
+            <a:off x="10261397" y="6463894"/>
+            <a:ext cx="1270102" cy="152705"/>
+          </a:xfrm>
+          <a:prstGeom prst="rect">
+            <a:avLst/>
+          </a:prstGeom>
+          <a:noFill/>
+          <a:ln/>
+        </p:spPr>
+        <p:txBody>
+          <a:bodyPr wrap="square" lIns="0" tIns="0" rIns="0" bIns="0" rtlCol="0" anchor="ctr"/>
+          <a:lstStyle/>
+          <a:p>
+            <a:pPr algn="r" indent="0" marL="0">
+              <a:buNone/>
+            </a:pPr>
+            <a:r>
+              <a:rPr lang="en-US" sz="1000" b="1" dirty="0">
+                <a:solidFill>
+                  <a:srgbClr val="7E8882"/>
+                </a:solidFill>
+                <a:latin typeface="Arial" pitchFamily="34" charset="0"/>
+                <a:ea typeface="Arial" pitchFamily="34" charset="-122"/>
+                <a:cs typeface="Arial" pitchFamily="34" charset="-120"/>
+              </a:rPr>
+              <a:t>04</a:t>
+            </a:r>
+            <a:endParaRPr lang="en-US" sz="1000" dirty="0"/>
+          </a:p>
+        </p:txBody>
+      </p:sp>
+      <p:sp>
+        <p:nvSpPr>
+          <p:cNvPr id="9" name="Shape 6"/>
+          <p:cNvSpPr/>
+          <p:nvPr/>
+        </p:nvSpPr>
+        <p:spPr>
+          <a:xfrm>
             <a:off x="7518197" y="1706270"/>
             <a:ext cx="4013302" cy="274320"/>
           </a:xfrm>
@@ -4004,7 +5537,7 @@
       </p:sp>
       <p:graphicFrame>
         <p:nvGraphicFramePr>
-          <p:cNvPr id="4" name="Table 0"/>
+          <p:cNvPr id="5" name="Table 0"/>
           <p:cNvGraphicFramePr>
             <a:graphicFrameLocks noGrp="1"/>
           </p:cNvGraphicFramePr>
@@ -4029,7 +5562,7 @@
                 <a:gridCol w="3931920"/>
                 <a:gridCol w="4013302"/>
               </a:tblGrid>
-              <a:tr h="347472">
+              <a:tr h="384048">
                 <a:tc>
                   <a:txBody>
                     <a:bodyPr/>
@@ -4235,7 +5768,7 @@
                   </a:tcPr>
                 </a:tc>
               </a:tr>
-              <a:tr h="384048">
+              <a:tr h="457200">
                 <a:tc>
                   <a:txBody>
                     <a:bodyPr/>
@@ -4441,7 +5974,7 @@
                   </a:tcPr>
                 </a:tc>
               </a:tr>
-              <a:tr h="384048">
+              <a:tr h="438912">
                 <a:tc>
                   <a:txBody>
                     <a:bodyPr/>
@@ -4527,7 +6060,7 @@
                           <a:ea typeface="Yu Gothic" pitchFamily="34" charset="-122"/>
                           <a:cs typeface="Yu Gothic" pitchFamily="34" charset="-120"/>
                         </a:rPr>
-                        <a:t>プレミアム仕様</a:t>
+                        <a:t>スタンダード仕様</a:t>
                       </a:r>
                       <a:endParaRPr lang="en-US" sz="1100" dirty="0">
                         <a:latin typeface="Yu Gothic" charset="0"/>
@@ -4595,7 +6128,7 @@
                           <a:ea typeface="Yu Gothic" pitchFamily="34" charset="-122"/>
                           <a:cs typeface="Yu Gothic" pitchFamily="34" charset="-120"/>
                         </a:rPr>
-                        <a:t>プレミアム仕様（同じ）</a:t>
+                        <a:t>スタンダード仕様（同じ）</a:t>
                       </a:r>
                       <a:endParaRPr lang="en-US" sz="1100" dirty="0">
                         <a:latin typeface="Yu Gothic" charset="0"/>
@@ -4647,7 +6180,7 @@
                   </a:tcPr>
                 </a:tc>
               </a:tr>
-              <a:tr h="384048">
+              <a:tr h="438912">
                 <a:tc>
                   <a:txBody>
                     <a:bodyPr/>
@@ -4853,7 +6386,7 @@
                   </a:tcPr>
                 </a:tc>
               </a:tr>
-              <a:tr h="384048">
+              <a:tr h="457200">
                 <a:tc>
                   <a:txBody>
                     <a:bodyPr/>
@@ -4939,7 +6472,7 @@
                           <a:ea typeface="Yu Gothic" pitchFamily="34" charset="-122"/>
                           <a:cs typeface="Yu Gothic" pitchFamily="34" charset="-120"/>
                         </a:rPr>
-                        <a:t>御社にてご手配（御社の所有）</a:t>
+                        <a:t>セルフカフェが準備</a:t>
                       </a:r>
                       <a:endParaRPr lang="en-US" sz="1100" dirty="0">
                         <a:latin typeface="Yu Gothic" charset="0"/>
@@ -4999,17 +6532,17 @@
                         <a:buNone/>
                       </a:pPr>
                       <a:r>
-                        <a:rPr lang="en-US" sz="1100" b="1" dirty="0">
+                        <a:rPr lang="en-US" sz="1200" b="1" dirty="0">
                           <a:solidFill>
-                            <a:srgbClr val="0A3D23"/>
+                            <a:srgbClr val="A8761F"/>
                           </a:solidFill>
                           <a:latin typeface="Yu Gothic" pitchFamily="34" charset="0"/>
                           <a:ea typeface="Yu Gothic" pitchFamily="34" charset="-122"/>
                           <a:cs typeface="Yu Gothic" pitchFamily="34" charset="-120"/>
                         </a:rPr>
-                        <a:t>御社にてご手配（同じ）</a:t>
+                        <a:t>御社にてご手配（御社の所有）</a:t>
                       </a:r>
-                      <a:endParaRPr lang="en-US" sz="1100" dirty="0">
+                      <a:endParaRPr lang="en-US" sz="1200" dirty="0">
                         <a:latin typeface="Yu Gothic" charset="0"/>
                         <a:ea typeface="Yu Gothic" charset="0"/>
                         <a:cs typeface="Yu Gothic" charset="0"/>
@@ -5054,218 +6587,12 @@
                       <a:tailEnd type="none" w="med" len="med"/>
                     </a:lnB>
                     <a:solidFill>
-                      <a:srgbClr val="F1F8F3"/>
+                      <a:srgbClr val="FBF4E4"/>
                     </a:solidFill>
                   </a:tcPr>
                 </a:tc>
               </a:tr>
-              <a:tr h="384048">
-                <a:tc>
-                  <a:txBody>
-                    <a:bodyPr/>
-                    <a:lstStyle/>
-                    <a:p>
-                      <a:pPr indent="0" marL="0">
-                        <a:buNone/>
-                      </a:pPr>
-                      <a:r>
-                        <a:rPr lang="en-US" sz="1200" b="1" dirty="0">
-                          <a:solidFill>
-                            <a:srgbClr val="0A3D23"/>
-                          </a:solidFill>
-                          <a:latin typeface="Yu Gothic" pitchFamily="34" charset="0"/>
-                          <a:ea typeface="Yu Gothic" pitchFamily="34" charset="-122"/>
-                          <a:cs typeface="Yu Gothic" pitchFamily="34" charset="-120"/>
-                        </a:rPr>
-                        <a:t>御社のご負担</a:t>
-                      </a:r>
-                      <a:endParaRPr lang="en-US" sz="1200" dirty="0">
-                        <a:latin typeface="Yu Gothic" charset="0"/>
-                        <a:ea typeface="Yu Gothic" charset="0"/>
-                        <a:cs typeface="Yu Gothic" charset="0"/>
-                      </a:endParaRPr>
-                    </a:p>
-                  </a:txBody>
-                  <a:tcPr marL="128016" marR="128016" marT="45720" marB="45720" anchor="ctr">
-                    <a:lnL w="9525" cap="flat" cmpd="sng" algn="ctr">
-                      <a:solidFill>
-                        <a:srgbClr val="EFEAE0"/>
-                      </a:solidFill>
-                      <a:prstDash val="solid"/>
-                      <a:round/>
-                      <a:headEnd type="none" w="med" len="med"/>
-                      <a:tailEnd type="none" w="med" len="med"/>
-                    </a:lnL>
-                    <a:lnR w="9525" cap="flat" cmpd="sng" algn="ctr">
-                      <a:solidFill>
-                        <a:srgbClr val="EFEAE0"/>
-                      </a:solidFill>
-                      <a:prstDash val="solid"/>
-                      <a:round/>
-                      <a:headEnd type="none" w="med" len="med"/>
-                      <a:tailEnd type="none" w="med" len="med"/>
-                    </a:lnR>
-                    <a:lnT w="9525" cap="flat" cmpd="sng" algn="ctr">
-                      <a:solidFill>
-                        <a:srgbClr val="EFEAE0"/>
-                      </a:solidFill>
-                      <a:prstDash val="solid"/>
-                      <a:round/>
-                      <a:headEnd type="none" w="med" len="med"/>
-                      <a:tailEnd type="none" w="med" len="med"/>
-                    </a:lnT>
-                    <a:lnB w="9525" cap="flat" cmpd="sng" algn="ctr">
-                      <a:solidFill>
-                        <a:srgbClr val="EFEAE0"/>
-                      </a:solidFill>
-                      <a:prstDash val="solid"/>
-                      <a:round/>
-                      <a:headEnd type="none" w="med" len="med"/>
-                      <a:tailEnd type="none" w="med" len="med"/>
-                    </a:lnB>
-                    <a:solidFill>
-                      <a:srgbClr val="F4F2EE"/>
-                    </a:solidFill>
-                  </a:tcPr>
-                </a:tc>
-                <a:tc>
-                  <a:txBody>
-                    <a:bodyPr/>
-                    <a:lstStyle/>
-                    <a:p>
-                      <a:pPr indent="0" marL="0">
-                        <a:buNone/>
-                      </a:pPr>
-                      <a:r>
-                        <a:rPr lang="en-US" sz="1100" dirty="0">
-                          <a:solidFill>
-                            <a:srgbClr val="6E6A61"/>
-                          </a:solidFill>
-                          <a:latin typeface="Yu Gothic" pitchFamily="34" charset="0"/>
-                          <a:ea typeface="Yu Gothic" pitchFamily="34" charset="-122"/>
-                          <a:cs typeface="Yu Gothic" pitchFamily="34" charset="-120"/>
-                        </a:rPr>
-                        <a:t>家具・什器のご手配のみ</a:t>
-                      </a:r>
-                      <a:endParaRPr lang="en-US" sz="1100" dirty="0">
-                        <a:latin typeface="Yu Gothic" charset="0"/>
-                        <a:ea typeface="Yu Gothic" charset="0"/>
-                        <a:cs typeface="Yu Gothic" charset="0"/>
-                      </a:endParaRPr>
-                    </a:p>
-                  </a:txBody>
-                  <a:tcPr marL="146304" marR="146304" marT="54864" marB="54864" anchor="ctr">
-                    <a:lnL w="9525" cap="flat" cmpd="sng" algn="ctr">
-                      <a:solidFill>
-                        <a:srgbClr val="EFEAE0"/>
-                      </a:solidFill>
-                      <a:prstDash val="solid"/>
-                      <a:round/>
-                      <a:headEnd type="none" w="med" len="med"/>
-                      <a:tailEnd type="none" w="med" len="med"/>
-                    </a:lnL>
-                    <a:lnR w="9525" cap="flat" cmpd="sng" algn="ctr">
-                      <a:solidFill>
-                        <a:srgbClr val="EFEAE0"/>
-                      </a:solidFill>
-                      <a:prstDash val="solid"/>
-                      <a:round/>
-                      <a:headEnd type="none" w="med" len="med"/>
-                      <a:tailEnd type="none" w="med" len="med"/>
-                    </a:lnR>
-                    <a:lnT w="9525" cap="flat" cmpd="sng" algn="ctr">
-                      <a:solidFill>
-                        <a:srgbClr val="EFEAE0"/>
-                      </a:solidFill>
-                      <a:prstDash val="solid"/>
-                      <a:round/>
-                      <a:headEnd type="none" w="med" len="med"/>
-                      <a:tailEnd type="none" w="med" len="med"/>
-                    </a:lnT>
-                    <a:lnB w="9525" cap="flat" cmpd="sng" algn="ctr">
-                      <a:solidFill>
-                        <a:srgbClr val="EFEAE0"/>
-                      </a:solidFill>
-                      <a:prstDash val="solid"/>
-                      <a:round/>
-                      <a:headEnd type="none" w="med" len="med"/>
-                      <a:tailEnd type="none" w="med" len="med"/>
-                    </a:lnB>
-                    <a:solidFill>
-                      <a:srgbClr val="FFFFFF"/>
-                    </a:solidFill>
-                  </a:tcPr>
-                </a:tc>
-                <a:tc>
-                  <a:txBody>
-                    <a:bodyPr/>
-                    <a:lstStyle/>
-                    <a:p>
-                      <a:pPr indent="0" marL="0">
-                        <a:buNone/>
-                      </a:pPr>
-                      <a:r>
-                        <a:rPr lang="en-US" sz="1100" b="1" dirty="0">
-                          <a:solidFill>
-                            <a:srgbClr val="0A3D23"/>
-                          </a:solidFill>
-                          <a:latin typeface="Yu Gothic" pitchFamily="34" charset="0"/>
-                          <a:ea typeface="Yu Gothic" pitchFamily="34" charset="-122"/>
-                          <a:cs typeface="Yu Gothic" pitchFamily="34" charset="-120"/>
-                        </a:rPr>
-                        <a:t>家具・什器のご手配のみ（同じ）</a:t>
-                      </a:r>
-                      <a:endParaRPr lang="en-US" sz="1100" dirty="0">
-                        <a:latin typeface="Yu Gothic" charset="0"/>
-                        <a:ea typeface="Yu Gothic" charset="0"/>
-                        <a:cs typeface="Yu Gothic" charset="0"/>
-                      </a:endParaRPr>
-                    </a:p>
-                  </a:txBody>
-                  <a:tcPr marL="146304" marR="146304" marT="54864" marB="54864" anchor="ctr">
-                    <a:lnL w="9525" cap="flat" cmpd="sng" algn="ctr">
-                      <a:solidFill>
-                        <a:srgbClr val="EFEAE0"/>
-                      </a:solidFill>
-                      <a:prstDash val="solid"/>
-                      <a:round/>
-                      <a:headEnd type="none" w="med" len="med"/>
-                      <a:tailEnd type="none" w="med" len="med"/>
-                    </a:lnL>
-                    <a:lnR w="9525" cap="flat" cmpd="sng" algn="ctr">
-                      <a:solidFill>
-                        <a:srgbClr val="EFEAE0"/>
-                      </a:solidFill>
-                      <a:prstDash val="solid"/>
-                      <a:round/>
-                      <a:headEnd type="none" w="med" len="med"/>
-                      <a:tailEnd type="none" w="med" len="med"/>
-                    </a:lnR>
-                    <a:lnT w="9525" cap="flat" cmpd="sng" algn="ctr">
-                      <a:solidFill>
-                        <a:srgbClr val="EFEAE0"/>
-                      </a:solidFill>
-                      <a:prstDash val="solid"/>
-                      <a:round/>
-                      <a:headEnd type="none" w="med" len="med"/>
-                      <a:tailEnd type="none" w="med" len="med"/>
-                    </a:lnT>
-                    <a:lnB w="9525" cap="flat" cmpd="sng" algn="ctr">
-                      <a:solidFill>
-                        <a:srgbClr val="EFEAE0"/>
-                      </a:solidFill>
-                      <a:prstDash val="solid"/>
-                      <a:round/>
-                      <a:headEnd type="none" w="med" len="med"/>
-                      <a:tailEnd type="none" w="med" len="med"/>
-                    </a:lnB>
-                    <a:solidFill>
-                      <a:srgbClr val="F1F8F3"/>
-                    </a:solidFill>
-                  </a:tcPr>
-                </a:tc>
-              </a:tr>
-              <a:tr h="420624">
+              <a:tr h="457200">
                 <a:tc>
                   <a:txBody>
                     <a:bodyPr/>
@@ -5471,7 +6798,7 @@
                   </a:tcPr>
                 </a:tc>
               </a:tr>
-              <a:tr h="384048">
+              <a:tr h="438912">
                 <a:tc>
                   <a:txBody>
                     <a:bodyPr/>
@@ -5755,7 +7082,7 @@
               <a:buNone/>
             </a:pPr>
             <a:r>
-              <a:rPr lang="en-US" sz="1300" b="1" dirty="0">
+              <a:rPr lang="en-US" sz="1250" b="1" dirty="0">
                 <a:solidFill>
                   <a:srgbClr val="FFFFFF"/>
                 </a:solidFill>
@@ -5763,9 +7090,9 @@
                 <a:ea typeface="Yu Gothic" pitchFamily="34" charset="-122"/>
                 <a:cs typeface="Yu Gothic" pitchFamily="34" charset="-120"/>
               </a:rPr>
-              <a:t>契約期間を1年に短縮する分、月額固定5万円はお付けしていません。</a:t>
-            </a:r>
-            <a:endParaRPr lang="en-US" sz="1300" dirty="0"/>
+              <a:t>1年でご判断いただける代わりに、家具・什器のご手配と月額5万円の2点をご調整ください。</a:t>
+            </a:r>
+            <a:endParaRPr lang="en-US" sz="1250" dirty="0"/>
           </a:p>
           <a:p>
             <a:pPr indent="0" marL="0">
@@ -5775,7 +7102,7 @@
               <a:buNone/>
             </a:pPr>
             <a:r>
-              <a:rPr lang="en-US" sz="1100" dirty="0">
+              <a:rPr lang="en-US" sz="1050" dirty="0">
                 <a:solidFill>
                   <a:srgbClr val="AFC2B8"/>
                 </a:solidFill>
@@ -5783,9 +7110,9 @@
                 <a:ea typeface="Yu Gothic" pitchFamily="34" charset="-122"/>
                 <a:cs typeface="Yu Gothic" pitchFamily="34" charset="-120"/>
               </a:rPr>
-              <a:t>それ以外の条件は、通常のご契約とすべて同じです。</a:t>
-            </a:r>
-            <a:endParaRPr lang="en-US" sz="1300" dirty="0"/>
+              <a:t>家具・什器は御社の資産として残ります。それ以外の条件は通常のご契約とすべて同じです。</a:t>
+            </a:r>
+            <a:endParaRPr lang="en-US" sz="1250" dirty="0"/>
           </a:p>
         </p:txBody>
       </p:sp>
@@ -5823,1431 +7150,6 @@
                 <a:cs typeface="Yu Gothic" pitchFamily="34" charset="-120"/>
               </a:rPr>
               <a:t>※ 金額はすべて税抜。内装工事費は当社が負担し、原状回復義務もいただかないため、1年でご判断いただく形でも御社側の持ち出しは家具・什器のみです。</a:t>
-            </a:r>
-            <a:endParaRPr lang="en-US" sz="850" dirty="0"/>
-          </a:p>
-        </p:txBody>
-      </p:sp>
-    </p:spTree>
-  </p:cSld>
-  <p:clrMapOvr>
-    <a:masterClrMapping/>
-  </p:clrMapOvr>
-</p:sld>
-</file>
-
-<file path=ppt/slides/slide4.xml><?xml version="1.0" encoding="utf-8"?>
-<p:sld xmlns:a="http://schemas.openxmlformats.org/drawingml/2006/main" xmlns:r="http://schemas.openxmlformats.org/officeDocument/2006/relationships" xmlns:p="http://schemas.openxmlformats.org/presentationml/2006/main">
-  <p:cSld name="Slide 4">
-    <p:bg>
-      <p:bgPr>
-        <a:solidFill>
-          <a:srgbClr val="FFFDF7"/>
-        </a:solidFill>
-      </p:bgPr>
-    </p:bg>
-    <p:spTree>
-      <p:nvGrpSpPr>
-        <p:cNvPr id="1" name=""/>
-        <p:cNvGrpSpPr/>
-        <p:nvPr/>
-      </p:nvGrpSpPr>
-      <p:grpSpPr>
-        <a:xfrm>
-          <a:off x="0" y="0"/>
-          <a:ext cx="0" cy="0"/>
-          <a:chOff x="0" y="0"/>
-          <a:chExt cx="0" cy="0"/>
-        </a:xfrm>
-      </p:grpSpPr>
-      <p:sp>
-        <p:nvSpPr>
-          <p:cNvPr id="2" name="Shape 0"/>
-          <p:cNvSpPr/>
-          <p:nvPr/>
-        </p:nvSpPr>
-        <p:spPr>
-          <a:xfrm>
-            <a:off x="660197" y="545897"/>
-            <a:ext cx="202997" cy="25603"/>
-          </a:xfrm>
-          <a:prstGeom prst="rect">
-            <a:avLst/>
-          </a:prstGeom>
-          <a:solidFill>
-            <a:srgbClr val="106838"/>
-          </a:solidFill>
-          <a:ln/>
-        </p:spPr>
-      </p:sp>
-      <p:sp>
-        <p:nvSpPr>
-          <p:cNvPr id="3" name="Text 1"/>
-          <p:cNvSpPr/>
-          <p:nvPr/>
-        </p:nvSpPr>
-        <p:spPr>
-          <a:xfrm>
-            <a:off x="952805" y="444398"/>
-            <a:ext cx="6400800" cy="177394"/>
-          </a:xfrm>
-          <a:prstGeom prst="rect">
-            <a:avLst/>
-          </a:prstGeom>
-          <a:noFill/>
-          <a:ln/>
-        </p:spPr>
-        <p:txBody>
-          <a:bodyPr wrap="square" lIns="0" tIns="0" rIns="0" bIns="0" rtlCol="0" anchor="ctr"/>
-          <a:lstStyle/>
-          <a:p>
-            <a:pPr indent="0" marL="0">
-              <a:buNone/>
-            </a:pPr>
-            <a:r>
-              <a:rPr lang="en-US" sz="1050" b="1" dirty="0">
-                <a:solidFill>
-                  <a:srgbClr val="A8761F"/>
-                </a:solidFill>
-                <a:latin typeface="Arial" pitchFamily="34" charset="0"/>
-                <a:ea typeface="Arial" pitchFamily="34" charset="-122"/>
-                <a:cs typeface="Arial" pitchFamily="34" charset="-120"/>
-              </a:rPr>
-              <a:t>03</a:t>
-            </a:r>
-            <a:r>
-              <a:rPr lang="en-US" sz="1050" b="1" dirty="0">
-                <a:solidFill>
-                  <a:srgbClr val="1B8149"/>
-                </a:solidFill>
-                <a:latin typeface="Yu Gothic" pitchFamily="34" charset="0"/>
-                <a:ea typeface="Yu Gothic" pitchFamily="34" charset="-122"/>
-                <a:cs typeface="Yu Gothic" pitchFamily="34" charset="-120"/>
-              </a:rPr>
-              <a:t>   内装仕様</a:t>
-            </a:r>
-            <a:endParaRPr lang="en-US" sz="1050" dirty="0"/>
-          </a:p>
-        </p:txBody>
-      </p:sp>
-      <p:sp>
-        <p:nvSpPr>
-          <p:cNvPr id="4" name="Text 2"/>
-          <p:cNvSpPr/>
-          <p:nvPr/>
-        </p:nvSpPr>
-        <p:spPr>
-          <a:xfrm>
-            <a:off x="660197" y="660197"/>
-            <a:ext cx="8889797" cy="508406"/>
-          </a:xfrm>
-          <a:prstGeom prst="rect">
-            <a:avLst/>
-          </a:prstGeom>
-          <a:noFill/>
-          <a:ln/>
-        </p:spPr>
-        <p:txBody>
-          <a:bodyPr wrap="square" lIns="0" tIns="0" rIns="0" bIns="0" rtlCol="0" anchor="ctr"/>
-          <a:lstStyle/>
-          <a:p>
-            <a:pPr indent="0" marL="0">
-              <a:buNone/>
-            </a:pPr>
-            <a:r>
-              <a:rPr lang="en-US" sz="2900" b="1" dirty="0">
-                <a:solidFill>
-                  <a:srgbClr val="0A3D23"/>
-                </a:solidFill>
-                <a:latin typeface="Yu Gothic" pitchFamily="34" charset="0"/>
-                <a:ea typeface="Yu Gothic" pitchFamily="34" charset="-122"/>
-                <a:cs typeface="Yu Gothic" pitchFamily="34" charset="-120"/>
-              </a:rPr>
-              <a:t>内装はプレミアム仕様でご提案します。</a:t>
-            </a:r>
-            <a:endParaRPr lang="en-US" sz="2900" dirty="0"/>
-          </a:p>
-        </p:txBody>
-      </p:sp>
-      <p:sp>
-        <p:nvSpPr>
-          <p:cNvPr id="5" name="Text 3"/>
-          <p:cNvSpPr/>
-          <p:nvPr/>
-        </p:nvSpPr>
-        <p:spPr>
-          <a:xfrm>
-            <a:off x="660197" y="1308506"/>
-            <a:ext cx="10032797" cy="228600"/>
-          </a:xfrm>
-          <a:prstGeom prst="rect">
-            <a:avLst/>
-          </a:prstGeom>
-          <a:noFill/>
-          <a:ln/>
-        </p:spPr>
-        <p:txBody>
-          <a:bodyPr wrap="square" lIns="0" tIns="0" rIns="0" bIns="0" rtlCol="0" anchor="ctr"/>
-          <a:lstStyle/>
-          <a:p>
-            <a:pPr indent="0" marL="0">
-              <a:buNone/>
-            </a:pPr>
-            <a:r>
-              <a:rPr lang="en-US" sz="1250" dirty="0">
-                <a:solidFill>
-                  <a:srgbClr val="4B5550"/>
-                </a:solidFill>
-                <a:latin typeface="Yu Gothic" pitchFamily="34" charset="0"/>
-                <a:ea typeface="Yu Gothic" pitchFamily="34" charset="-122"/>
-                <a:cs typeface="Yu Gothic" pitchFamily="34" charset="-120"/>
-              </a:rPr>
-              <a:t>木製書架と間接照明でまとめた書店一体型の仕様です。床仕上げは2案からお選びいただけます。</a:t>
-            </a:r>
-            <a:endParaRPr lang="en-US" sz="1250" dirty="0"/>
-          </a:p>
-        </p:txBody>
-      </p:sp>
-      <p:pic>
-        <p:nvPicPr>
-          <p:cNvPr id="6" name="Image 0" descr="/home/user/suzuki-ceo/selfcafe-miraiya-trial-deck/assets/logo-green.png">    </p:cNvPr>
-          <p:cNvPicPr>
-            <a:picLocks noChangeAspect="1"/>
-          </p:cNvPicPr>
-          <p:nvPr/>
-        </p:nvPicPr>
-        <p:blipFill>
-          <a:blip r:embed="rId1"/>
-          <a:stretch>
-            <a:fillRect/>
-          </a:stretch>
-        </p:blipFill>
-        <p:spPr>
-          <a:xfrm>
-            <a:off x="9855403" y="482803"/>
-            <a:ext cx="1676095" cy="238658"/>
-          </a:xfrm>
-          <a:prstGeom prst="rect">
-            <a:avLst/>
-          </a:prstGeom>
-        </p:spPr>
-      </p:pic>
-      <p:sp>
-        <p:nvSpPr>
-          <p:cNvPr id="7" name="Text 4"/>
-          <p:cNvSpPr/>
-          <p:nvPr/>
-        </p:nvSpPr>
-        <p:spPr>
-          <a:xfrm>
-            <a:off x="660197" y="6476695"/>
-            <a:ext cx="5080406" cy="152705"/>
-          </a:xfrm>
-          <a:prstGeom prst="rect">
-            <a:avLst/>
-          </a:prstGeom>
-          <a:noFill/>
-          <a:ln/>
-        </p:spPr>
-        <p:txBody>
-          <a:bodyPr wrap="square" lIns="0" tIns="0" rIns="0" bIns="0" rtlCol="0" anchor="ctr"/>
-          <a:lstStyle/>
-          <a:p>
-            <a:pPr indent="0" marL="0">
-              <a:buNone/>
-            </a:pPr>
-            <a:r>
-              <a:rPr lang="en-US" sz="900" dirty="0">
-                <a:solidFill>
-                  <a:srgbClr val="A8B0AA"/>
-                </a:solidFill>
-                <a:latin typeface="Yu Gothic" pitchFamily="34" charset="0"/>
-                <a:ea typeface="Yu Gothic" pitchFamily="34" charset="-122"/>
-                <a:cs typeface="Yu Gothic" pitchFamily="34" charset="-120"/>
-              </a:rPr>
-              <a:t>セルフカフェ × 未来屋書店 トライアル導入のご提案</a:t>
-            </a:r>
-            <a:endParaRPr lang="en-US" sz="900" dirty="0"/>
-          </a:p>
-        </p:txBody>
-      </p:sp>
-      <p:sp>
-        <p:nvSpPr>
-          <p:cNvPr id="8" name="Text 5"/>
-          <p:cNvSpPr/>
-          <p:nvPr/>
-        </p:nvSpPr>
-        <p:spPr>
-          <a:xfrm>
-            <a:off x="10261397" y="6463894"/>
-            <a:ext cx="1270102" cy="152705"/>
-          </a:xfrm>
-          <a:prstGeom prst="rect">
-            <a:avLst/>
-          </a:prstGeom>
-          <a:noFill/>
-          <a:ln/>
-        </p:spPr>
-        <p:txBody>
-          <a:bodyPr wrap="square" lIns="0" tIns="0" rIns="0" bIns="0" rtlCol="0" anchor="ctr"/>
-          <a:lstStyle/>
-          <a:p>
-            <a:pPr algn="r" indent="0" marL="0">
-              <a:buNone/>
-            </a:pPr>
-            <a:r>
-              <a:rPr lang="en-US" sz="1000" b="1" dirty="0">
-                <a:solidFill>
-                  <a:srgbClr val="7E8882"/>
-                </a:solidFill>
-                <a:latin typeface="Arial" pitchFamily="34" charset="0"/>
-                <a:ea typeface="Arial" pitchFamily="34" charset="-122"/>
-                <a:cs typeface="Arial" pitchFamily="34" charset="-120"/>
-              </a:rPr>
-              <a:t>04</a:t>
-            </a:r>
-            <a:endParaRPr lang="en-US" sz="1000" dirty="0"/>
-          </a:p>
-        </p:txBody>
-      </p:sp>
-      <p:sp>
-        <p:nvSpPr>
-          <p:cNvPr id="9" name="Shape 6"/>
-          <p:cNvSpPr/>
-          <p:nvPr/>
-        </p:nvSpPr>
-        <p:spPr>
-          <a:xfrm>
-            <a:off x="660197" y="1651406"/>
-            <a:ext cx="2194560" cy="237744"/>
-          </a:xfrm>
-          <a:prstGeom prst="roundRect">
-            <a:avLst>
-              <a:gd name="adj" fmla="val 19231"/>
-            </a:avLst>
-          </a:prstGeom>
-          <a:solidFill>
-            <a:srgbClr val="106838"/>
-          </a:solidFill>
-          <a:ln/>
-        </p:spPr>
-      </p:sp>
-      <p:sp>
-        <p:nvSpPr>
-          <p:cNvPr id="10" name="Text 7"/>
-          <p:cNvSpPr/>
-          <p:nvPr/>
-        </p:nvSpPr>
-        <p:spPr>
-          <a:xfrm>
-            <a:off x="660197" y="1651406"/>
-            <a:ext cx="2194560" cy="237744"/>
-          </a:xfrm>
-          <a:prstGeom prst="rect">
-            <a:avLst/>
-          </a:prstGeom>
-          <a:noFill/>
-          <a:ln/>
-        </p:spPr>
-        <p:txBody>
-          <a:bodyPr wrap="square" lIns="0" tIns="0" rIns="0" bIns="0" rtlCol="0" anchor="ctr"/>
-          <a:lstStyle/>
-          <a:p>
-            <a:pPr algn="ctr" indent="0" marL="0">
-              <a:buNone/>
-            </a:pPr>
-            <a:r>
-              <a:rPr lang="en-US" sz="950" b="1" dirty="0">
-                <a:solidFill>
-                  <a:srgbClr val="FFFFFF"/>
-                </a:solidFill>
-                <a:latin typeface="Yu Gothic" pitchFamily="34" charset="0"/>
-                <a:ea typeface="Yu Gothic" pitchFamily="34" charset="-122"/>
-                <a:cs typeface="Yu Gothic" pitchFamily="34" charset="-120"/>
-              </a:rPr>
-              <a:t>N案：ライトフロア</a:t>
-            </a:r>
-            <a:endParaRPr lang="en-US" sz="950" dirty="0"/>
-          </a:p>
-        </p:txBody>
-      </p:sp>
-      <p:sp>
-        <p:nvSpPr>
-          <p:cNvPr id="11" name="Shape 8"/>
-          <p:cNvSpPr/>
-          <p:nvPr/>
-        </p:nvSpPr>
-        <p:spPr>
-          <a:xfrm>
-            <a:off x="4345229" y="1651406"/>
-            <a:ext cx="2194560" cy="237744"/>
-          </a:xfrm>
-          <a:prstGeom prst="roundRect">
-            <a:avLst>
-              <a:gd name="adj" fmla="val 19231"/>
-            </a:avLst>
-          </a:prstGeom>
-          <a:solidFill>
-            <a:srgbClr val="106838"/>
-          </a:solidFill>
-          <a:ln/>
-        </p:spPr>
-      </p:sp>
-      <p:sp>
-        <p:nvSpPr>
-          <p:cNvPr id="12" name="Text 9"/>
-          <p:cNvSpPr/>
-          <p:nvPr/>
-        </p:nvSpPr>
-        <p:spPr>
-          <a:xfrm>
-            <a:off x="4345229" y="1651406"/>
-            <a:ext cx="2194560" cy="237744"/>
-          </a:xfrm>
-          <a:prstGeom prst="rect">
-            <a:avLst/>
-          </a:prstGeom>
-          <a:noFill/>
-          <a:ln/>
-        </p:spPr>
-        <p:txBody>
-          <a:bodyPr wrap="square" lIns="0" tIns="0" rIns="0" bIns="0" rtlCol="0" anchor="ctr"/>
-          <a:lstStyle/>
-          <a:p>
-            <a:pPr algn="ctr" indent="0" marL="0">
-              <a:buNone/>
-            </a:pPr>
-            <a:r>
-              <a:rPr lang="en-US" sz="950" b="1" dirty="0">
-                <a:solidFill>
-                  <a:srgbClr val="FFFFFF"/>
-                </a:solidFill>
-                <a:latin typeface="Yu Gothic" pitchFamily="34" charset="0"/>
-                <a:ea typeface="Yu Gothic" pitchFamily="34" charset="-122"/>
-                <a:cs typeface="Yu Gothic" pitchFamily="34" charset="-120"/>
-              </a:rPr>
-              <a:t>G案：グリーンフロア</a:t>
-            </a:r>
-            <a:endParaRPr lang="en-US" sz="950" dirty="0"/>
-          </a:p>
-        </p:txBody>
-      </p:sp>
-      <p:pic>
-        <p:nvPicPr>
-          <p:cNvPr id="13" name="Image 1" descr="/home/user/suzuki-ceo/selfcafe-miraiya-trial-deck/assets/photos/.crops/tsuchiura-premium-n-375x211.jpg">    </p:cNvPr>
-          <p:cNvPicPr>
-            <a:picLocks noChangeAspect="1"/>
-          </p:cNvPicPr>
-          <p:nvPr/>
-        </p:nvPicPr>
-        <p:blipFill>
-          <a:blip r:embed="rId2"/>
-          <a:stretch>
-            <a:fillRect/>
-          </a:stretch>
-        </p:blipFill>
-        <p:spPr>
-          <a:xfrm>
-            <a:off x="660197" y="1920240"/>
-            <a:ext cx="3429000" cy="1928813"/>
-          </a:xfrm>
-          <a:prstGeom prst="rect">
-            <a:avLst/>
-          </a:prstGeom>
-        </p:spPr>
-      </p:pic>
-      <p:sp>
-        <p:nvSpPr>
-          <p:cNvPr id="14" name="Shape 10"/>
-          <p:cNvSpPr/>
-          <p:nvPr/>
-        </p:nvSpPr>
-        <p:spPr>
-          <a:xfrm>
-            <a:off x="660197" y="1920240"/>
-            <a:ext cx="3429000" cy="1928813"/>
-          </a:xfrm>
-          <a:prstGeom prst="rect">
-            <a:avLst/>
-          </a:prstGeom>
-          <a:ln w="12700">
-            <a:solidFill>
-              <a:srgbClr val="D8D2C6"/>
-            </a:solidFill>
-            <a:prstDash val="solid"/>
-          </a:ln>
-        </p:spPr>
-      </p:sp>
-      <p:sp>
-        <p:nvSpPr>
-          <p:cNvPr id="15" name="Shape 11"/>
-          <p:cNvSpPr/>
-          <p:nvPr/>
-        </p:nvSpPr>
-        <p:spPr>
-          <a:xfrm>
-            <a:off x="788213" y="3391852"/>
-            <a:ext cx="749427" cy="329184"/>
-          </a:xfrm>
-          <a:prstGeom prst="roundRect">
-            <a:avLst>
-              <a:gd name="adj" fmla="val 13889"/>
-            </a:avLst>
-          </a:prstGeom>
-          <a:solidFill>
-            <a:srgbClr val="FFFFFF">
-              <a:alpha val="90000"/>
-            </a:srgbClr>
-          </a:solidFill>
-          <a:ln/>
-        </p:spPr>
-      </p:sp>
-      <p:sp>
-        <p:nvSpPr>
-          <p:cNvPr id="16" name="Text 12"/>
-          <p:cNvSpPr/>
-          <p:nvPr/>
-        </p:nvSpPr>
-        <p:spPr>
-          <a:xfrm>
-            <a:off x="952805" y="3391852"/>
-            <a:ext cx="475107" cy="329184"/>
-          </a:xfrm>
-          <a:prstGeom prst="rect">
-            <a:avLst/>
-          </a:prstGeom>
-          <a:noFill/>
-          <a:ln/>
-        </p:spPr>
-        <p:txBody>
-          <a:bodyPr wrap="square" lIns="0" tIns="0" rIns="0" bIns="0" rtlCol="0" anchor="ctr"/>
-          <a:lstStyle/>
-          <a:p>
-            <a:pPr indent="0" marL="0">
-              <a:buNone/>
-            </a:pPr>
-            <a:r>
-              <a:rPr lang="en-US" sz="950" b="1" dirty="0">
-                <a:solidFill>
-                  <a:srgbClr val="0A3D23"/>
-                </a:solidFill>
-                <a:latin typeface="Yu Gothic" pitchFamily="34" charset="0"/>
-                <a:ea typeface="Yu Gothic" pitchFamily="34" charset="-122"/>
-                <a:cs typeface="Yu Gothic" pitchFamily="34" charset="-120"/>
-              </a:rPr>
-              <a:t>土浦店</a:t>
-            </a:r>
-            <a:endParaRPr lang="en-US" sz="950" dirty="0"/>
-          </a:p>
-        </p:txBody>
-      </p:sp>
-      <p:pic>
-        <p:nvPicPr>
-          <p:cNvPr id="17" name="Image 2" descr="/home/user/suzuki-ceo/selfcafe-miraiya-trial-deck/assets/photos/.crops/tsuchiura-premium-g-375x211.jpg">    </p:cNvPr>
-          <p:cNvPicPr>
-            <a:picLocks noChangeAspect="1"/>
-          </p:cNvPicPr>
-          <p:nvPr/>
-        </p:nvPicPr>
-        <p:blipFill>
-          <a:blip r:embed="rId3"/>
-          <a:stretch>
-            <a:fillRect/>
-          </a:stretch>
-        </p:blipFill>
-        <p:spPr>
-          <a:xfrm>
-            <a:off x="4345229" y="1920240"/>
-            <a:ext cx="3429000" cy="1928813"/>
-          </a:xfrm>
-          <a:prstGeom prst="rect">
-            <a:avLst/>
-          </a:prstGeom>
-        </p:spPr>
-      </p:pic>
-      <p:sp>
-        <p:nvSpPr>
-          <p:cNvPr id="18" name="Shape 13"/>
-          <p:cNvSpPr/>
-          <p:nvPr/>
-        </p:nvSpPr>
-        <p:spPr>
-          <a:xfrm>
-            <a:off x="4345229" y="1920240"/>
-            <a:ext cx="3429000" cy="1928813"/>
-          </a:xfrm>
-          <a:prstGeom prst="rect">
-            <a:avLst/>
-          </a:prstGeom>
-          <a:ln w="12700">
-            <a:solidFill>
-              <a:srgbClr val="D8D2C6"/>
-            </a:solidFill>
-            <a:prstDash val="solid"/>
-          </a:ln>
-        </p:spPr>
-      </p:sp>
-      <p:sp>
-        <p:nvSpPr>
-          <p:cNvPr id="19" name="Shape 14"/>
-          <p:cNvSpPr/>
-          <p:nvPr/>
-        </p:nvSpPr>
-        <p:spPr>
-          <a:xfrm>
-            <a:off x="4473245" y="3391852"/>
-            <a:ext cx="749427" cy="329184"/>
-          </a:xfrm>
-          <a:prstGeom prst="roundRect">
-            <a:avLst>
-              <a:gd name="adj" fmla="val 13889"/>
-            </a:avLst>
-          </a:prstGeom>
-          <a:solidFill>
-            <a:srgbClr val="FFFFFF">
-              <a:alpha val="90000"/>
-            </a:srgbClr>
-          </a:solidFill>
-          <a:ln/>
-        </p:spPr>
-      </p:sp>
-      <p:sp>
-        <p:nvSpPr>
-          <p:cNvPr id="20" name="Text 15"/>
-          <p:cNvSpPr/>
-          <p:nvPr/>
-        </p:nvSpPr>
-        <p:spPr>
-          <a:xfrm>
-            <a:off x="4637837" y="3391852"/>
-            <a:ext cx="475107" cy="329184"/>
-          </a:xfrm>
-          <a:prstGeom prst="rect">
-            <a:avLst/>
-          </a:prstGeom>
-          <a:noFill/>
-          <a:ln/>
-        </p:spPr>
-        <p:txBody>
-          <a:bodyPr wrap="square" lIns="0" tIns="0" rIns="0" bIns="0" rtlCol="0" anchor="ctr"/>
-          <a:lstStyle/>
-          <a:p>
-            <a:pPr indent="0" marL="0">
-              <a:buNone/>
-            </a:pPr>
-            <a:r>
-              <a:rPr lang="en-US" sz="950" b="1" dirty="0">
-                <a:solidFill>
-                  <a:srgbClr val="0A3D23"/>
-                </a:solidFill>
-                <a:latin typeface="Yu Gothic" pitchFamily="34" charset="0"/>
-                <a:ea typeface="Yu Gothic" pitchFamily="34" charset="-122"/>
-                <a:cs typeface="Yu Gothic" pitchFamily="34" charset="-120"/>
-              </a:rPr>
-              <a:t>土浦店</a:t>
-            </a:r>
-            <a:endParaRPr lang="en-US" sz="950" dirty="0"/>
-          </a:p>
-        </p:txBody>
-      </p:sp>
-      <p:pic>
-        <p:nvPicPr>
-          <p:cNvPr id="21" name="Image 3" descr="/home/user/suzuki-ceo/selfcafe-miraiya-trial-deck/assets/photos/.crops/akita-premium-n-375x211.jpg">    </p:cNvPr>
-          <p:cNvPicPr>
-            <a:picLocks noChangeAspect="1"/>
-          </p:cNvPicPr>
-          <p:nvPr/>
-        </p:nvPicPr>
-        <p:blipFill>
-          <a:blip r:embed="rId4"/>
-          <a:stretch>
-            <a:fillRect/>
-          </a:stretch>
-        </p:blipFill>
-        <p:spPr>
-          <a:xfrm>
-            <a:off x="660197" y="4324540"/>
-            <a:ext cx="3429000" cy="1928813"/>
-          </a:xfrm>
-          <a:prstGeom prst="rect">
-            <a:avLst/>
-          </a:prstGeom>
-        </p:spPr>
-      </p:pic>
-      <p:sp>
-        <p:nvSpPr>
-          <p:cNvPr id="22" name="Shape 16"/>
-          <p:cNvSpPr/>
-          <p:nvPr/>
-        </p:nvSpPr>
-        <p:spPr>
-          <a:xfrm>
-            <a:off x="660197" y="4324540"/>
-            <a:ext cx="3429000" cy="1928813"/>
-          </a:xfrm>
-          <a:prstGeom prst="rect">
-            <a:avLst/>
-          </a:prstGeom>
-          <a:ln w="12700">
-            <a:solidFill>
-              <a:srgbClr val="D8D2C6"/>
-            </a:solidFill>
-            <a:prstDash val="solid"/>
-          </a:ln>
-        </p:spPr>
-      </p:sp>
-      <p:sp>
-        <p:nvSpPr>
-          <p:cNvPr id="23" name="Shape 17"/>
-          <p:cNvSpPr/>
-          <p:nvPr/>
-        </p:nvSpPr>
-        <p:spPr>
-          <a:xfrm>
-            <a:off x="788213" y="5796153"/>
-            <a:ext cx="749427" cy="329184"/>
-          </a:xfrm>
-          <a:prstGeom prst="roundRect">
-            <a:avLst>
-              <a:gd name="adj" fmla="val 13889"/>
-            </a:avLst>
-          </a:prstGeom>
-          <a:solidFill>
-            <a:srgbClr val="FFFFFF">
-              <a:alpha val="90000"/>
-            </a:srgbClr>
-          </a:solidFill>
-          <a:ln/>
-        </p:spPr>
-      </p:sp>
-      <p:sp>
-        <p:nvSpPr>
-          <p:cNvPr id="24" name="Text 18"/>
-          <p:cNvSpPr/>
-          <p:nvPr/>
-        </p:nvSpPr>
-        <p:spPr>
-          <a:xfrm>
-            <a:off x="952805" y="5796153"/>
-            <a:ext cx="475107" cy="329184"/>
-          </a:xfrm>
-          <a:prstGeom prst="rect">
-            <a:avLst/>
-          </a:prstGeom>
-          <a:noFill/>
-          <a:ln/>
-        </p:spPr>
-        <p:txBody>
-          <a:bodyPr wrap="square" lIns="0" tIns="0" rIns="0" bIns="0" rtlCol="0" anchor="ctr"/>
-          <a:lstStyle/>
-          <a:p>
-            <a:pPr indent="0" marL="0">
-              <a:buNone/>
-            </a:pPr>
-            <a:r>
-              <a:rPr lang="en-US" sz="950" b="1" dirty="0">
-                <a:solidFill>
-                  <a:srgbClr val="0A3D23"/>
-                </a:solidFill>
-                <a:latin typeface="Yu Gothic" pitchFamily="34" charset="0"/>
-                <a:ea typeface="Yu Gothic" pitchFamily="34" charset="-122"/>
-                <a:cs typeface="Yu Gothic" pitchFamily="34" charset="-120"/>
-              </a:rPr>
-              <a:t>秋田店</a:t>
-            </a:r>
-            <a:endParaRPr lang="en-US" sz="950" dirty="0"/>
-          </a:p>
-        </p:txBody>
-      </p:sp>
-      <p:pic>
-        <p:nvPicPr>
-          <p:cNvPr id="25" name="Image 4" descr="/home/user/suzuki-ceo/selfcafe-miraiya-trial-deck/assets/photos/.crops/akita-premium-g-375x211.jpg">    </p:cNvPr>
-          <p:cNvPicPr>
-            <a:picLocks noChangeAspect="1"/>
-          </p:cNvPicPr>
-          <p:nvPr/>
-        </p:nvPicPr>
-        <p:blipFill>
-          <a:blip r:embed="rId5"/>
-          <a:stretch>
-            <a:fillRect/>
-          </a:stretch>
-        </p:blipFill>
-        <p:spPr>
-          <a:xfrm>
-            <a:off x="4345229" y="4324540"/>
-            <a:ext cx="3429000" cy="1928813"/>
-          </a:xfrm>
-          <a:prstGeom prst="rect">
-            <a:avLst/>
-          </a:prstGeom>
-        </p:spPr>
-      </p:pic>
-      <p:sp>
-        <p:nvSpPr>
-          <p:cNvPr id="26" name="Shape 19"/>
-          <p:cNvSpPr/>
-          <p:nvPr/>
-        </p:nvSpPr>
-        <p:spPr>
-          <a:xfrm>
-            <a:off x="4345229" y="4324540"/>
-            <a:ext cx="3429000" cy="1928813"/>
-          </a:xfrm>
-          <a:prstGeom prst="rect">
-            <a:avLst/>
-          </a:prstGeom>
-          <a:ln w="12700">
-            <a:solidFill>
-              <a:srgbClr val="D8D2C6"/>
-            </a:solidFill>
-            <a:prstDash val="solid"/>
-          </a:ln>
-        </p:spPr>
-      </p:sp>
-      <p:sp>
-        <p:nvSpPr>
-          <p:cNvPr id="27" name="Shape 20"/>
-          <p:cNvSpPr/>
-          <p:nvPr/>
-        </p:nvSpPr>
-        <p:spPr>
-          <a:xfrm>
-            <a:off x="4473245" y="5796153"/>
-            <a:ext cx="749427" cy="329184"/>
-          </a:xfrm>
-          <a:prstGeom prst="roundRect">
-            <a:avLst>
-              <a:gd name="adj" fmla="val 13889"/>
-            </a:avLst>
-          </a:prstGeom>
-          <a:solidFill>
-            <a:srgbClr val="FFFFFF">
-              <a:alpha val="90000"/>
-            </a:srgbClr>
-          </a:solidFill>
-          <a:ln/>
-        </p:spPr>
-      </p:sp>
-      <p:sp>
-        <p:nvSpPr>
-          <p:cNvPr id="28" name="Text 21"/>
-          <p:cNvSpPr/>
-          <p:nvPr/>
-        </p:nvSpPr>
-        <p:spPr>
-          <a:xfrm>
-            <a:off x="4637837" y="5796153"/>
-            <a:ext cx="475107" cy="329184"/>
-          </a:xfrm>
-          <a:prstGeom prst="rect">
-            <a:avLst/>
-          </a:prstGeom>
-          <a:noFill/>
-          <a:ln/>
-        </p:spPr>
-        <p:txBody>
-          <a:bodyPr wrap="square" lIns="0" tIns="0" rIns="0" bIns="0" rtlCol="0" anchor="ctr"/>
-          <a:lstStyle/>
-          <a:p>
-            <a:pPr indent="0" marL="0">
-              <a:buNone/>
-            </a:pPr>
-            <a:r>
-              <a:rPr lang="en-US" sz="950" b="1" dirty="0">
-                <a:solidFill>
-                  <a:srgbClr val="0A3D23"/>
-                </a:solidFill>
-                <a:latin typeface="Yu Gothic" pitchFamily="34" charset="0"/>
-                <a:ea typeface="Yu Gothic" pitchFamily="34" charset="-122"/>
-                <a:cs typeface="Yu Gothic" pitchFamily="34" charset="-120"/>
-              </a:rPr>
-              <a:t>秋田店</a:t>
-            </a:r>
-            <a:endParaRPr lang="en-US" sz="950" dirty="0"/>
-          </a:p>
-        </p:txBody>
-      </p:sp>
-      <p:sp>
-        <p:nvSpPr>
-          <p:cNvPr id="29" name="Shape 22"/>
-          <p:cNvSpPr/>
-          <p:nvPr/>
-        </p:nvSpPr>
-        <p:spPr>
-          <a:xfrm>
-            <a:off x="8048549" y="1920240"/>
-            <a:ext cx="3482950" cy="1928813"/>
-          </a:xfrm>
-          <a:prstGeom prst="roundRect">
-            <a:avLst>
-              <a:gd name="adj" fmla="val 2844"/>
-            </a:avLst>
-          </a:prstGeom>
-          <a:solidFill>
-            <a:srgbClr val="F1F8F3"/>
-          </a:solidFill>
-          <a:ln w="9525">
-            <a:solidFill>
-              <a:srgbClr val="D2E7DA"/>
-            </a:solidFill>
-            <a:prstDash val="solid"/>
-          </a:ln>
-        </p:spPr>
-      </p:sp>
-      <p:sp>
-        <p:nvSpPr>
-          <p:cNvPr id="30" name="Text 23"/>
-          <p:cNvSpPr/>
-          <p:nvPr/>
-        </p:nvSpPr>
-        <p:spPr>
-          <a:xfrm>
-            <a:off x="8286293" y="2066544"/>
-            <a:ext cx="3007462" cy="237744"/>
-          </a:xfrm>
-          <a:prstGeom prst="rect">
-            <a:avLst/>
-          </a:prstGeom>
-          <a:noFill/>
-          <a:ln/>
-        </p:spPr>
-        <p:txBody>
-          <a:bodyPr wrap="square" lIns="0" tIns="0" rIns="0" bIns="0" rtlCol="0" anchor="ctr"/>
-          <a:lstStyle/>
-          <a:p>
-            <a:pPr indent="0" marL="0">
-              <a:buNone/>
-            </a:pPr>
-            <a:r>
-              <a:rPr lang="en-US" sz="1050" b="1" dirty="0">
-                <a:solidFill>
-                  <a:srgbClr val="106838"/>
-                </a:solidFill>
-                <a:latin typeface="Yu Gothic" pitchFamily="34" charset="0"/>
-                <a:ea typeface="Yu Gothic" pitchFamily="34" charset="-122"/>
-                <a:cs typeface="Yu Gothic" pitchFamily="34" charset="-120"/>
-              </a:rPr>
-              <a:t>プレミアム仕様の特徴</a:t>
-            </a:r>
-            <a:endParaRPr lang="en-US" sz="1050" dirty="0"/>
-          </a:p>
-        </p:txBody>
-      </p:sp>
-      <p:pic>
-        <p:nvPicPr>
-          <p:cNvPr id="31" name="Image 5" descr="/home/user/suzuki-ceo/selfcafe-miraiya-trial-deck/assets/icons/LuCheck-green.png">    </p:cNvPr>
-          <p:cNvPicPr>
-            <a:picLocks noChangeAspect="1"/>
-          </p:cNvPicPr>
-          <p:nvPr/>
-        </p:nvPicPr>
-        <p:blipFill>
-          <a:blip r:embed="rId6"/>
-          <a:stretch>
-            <a:fillRect/>
-          </a:stretch>
-        </p:blipFill>
-        <p:spPr>
-          <a:xfrm>
-            <a:off x="8304581" y="2423160"/>
-            <a:ext cx="164592" cy="164592"/>
-          </a:xfrm>
-          <a:prstGeom prst="rect">
-            <a:avLst/>
-          </a:prstGeom>
-        </p:spPr>
-      </p:pic>
-      <p:sp>
-        <p:nvSpPr>
-          <p:cNvPr id="32" name="Text 24"/>
-          <p:cNvSpPr/>
-          <p:nvPr/>
-        </p:nvSpPr>
-        <p:spPr>
-          <a:xfrm>
-            <a:off x="8578901" y="2377440"/>
-            <a:ext cx="2696566" cy="274320"/>
-          </a:xfrm>
-          <a:prstGeom prst="rect">
-            <a:avLst/>
-          </a:prstGeom>
-          <a:noFill/>
-          <a:ln/>
-        </p:spPr>
-        <p:txBody>
-          <a:bodyPr wrap="square" lIns="0" tIns="0" rIns="0" bIns="0" rtlCol="0" anchor="ctr"/>
-          <a:lstStyle/>
-          <a:p>
-            <a:pPr indent="0" marL="0">
-              <a:buNone/>
-            </a:pPr>
-            <a:r>
-              <a:rPr lang="en-US" sz="900" dirty="0">
-                <a:solidFill>
-                  <a:srgbClr val="0A3D23"/>
-                </a:solidFill>
-                <a:latin typeface="Yu Gothic" pitchFamily="34" charset="0"/>
-                <a:ea typeface="Yu Gothic" pitchFamily="34" charset="-122"/>
-                <a:cs typeface="Yu Gothic" pitchFamily="34" charset="-120"/>
-              </a:rPr>
-              <a:t>木製書架と一体の造作</a:t>
-            </a:r>
-            <a:endParaRPr lang="en-US" sz="900" dirty="0"/>
-          </a:p>
-        </p:txBody>
-      </p:sp>
-      <p:pic>
-        <p:nvPicPr>
-          <p:cNvPr id="33" name="Image 6" descr="/home/user/suzuki-ceo/selfcafe-miraiya-trial-deck/assets/icons/LuCheck-green.png">    </p:cNvPr>
-          <p:cNvPicPr>
-            <a:picLocks noChangeAspect="1"/>
-          </p:cNvPicPr>
-          <p:nvPr/>
-        </p:nvPicPr>
-        <p:blipFill>
-          <a:blip r:embed="rId7"/>
-          <a:stretch>
-            <a:fillRect/>
-          </a:stretch>
-        </p:blipFill>
-        <p:spPr>
-          <a:xfrm>
-            <a:off x="8304581" y="2752344"/>
-            <a:ext cx="164592" cy="164592"/>
-          </a:xfrm>
-          <a:prstGeom prst="rect">
-            <a:avLst/>
-          </a:prstGeom>
-        </p:spPr>
-      </p:pic>
-      <p:sp>
-        <p:nvSpPr>
-          <p:cNvPr id="34" name="Text 25"/>
-          <p:cNvSpPr/>
-          <p:nvPr/>
-        </p:nvSpPr>
-        <p:spPr>
-          <a:xfrm>
-            <a:off x="8578901" y="2706624"/>
-            <a:ext cx="2696566" cy="274320"/>
-          </a:xfrm>
-          <a:prstGeom prst="rect">
-            <a:avLst/>
-          </a:prstGeom>
-          <a:noFill/>
-          <a:ln/>
-        </p:spPr>
-        <p:txBody>
-          <a:bodyPr wrap="square" lIns="0" tIns="0" rIns="0" bIns="0" rtlCol="0" anchor="ctr"/>
-          <a:lstStyle/>
-          <a:p>
-            <a:pPr indent="0" marL="0">
-              <a:buNone/>
-            </a:pPr>
-            <a:r>
-              <a:rPr lang="en-US" sz="900" dirty="0">
-                <a:solidFill>
-                  <a:srgbClr val="0A3D23"/>
-                </a:solidFill>
-                <a:latin typeface="Yu Gothic" pitchFamily="34" charset="0"/>
-                <a:ea typeface="Yu Gothic" pitchFamily="34" charset="-122"/>
-                <a:cs typeface="Yu Gothic" pitchFamily="34" charset="-120"/>
-              </a:rPr>
-              <a:t>間接照明・スタンドライト</a:t>
-            </a:r>
-            <a:endParaRPr lang="en-US" sz="900" dirty="0"/>
-          </a:p>
-        </p:txBody>
-      </p:sp>
-      <p:pic>
-        <p:nvPicPr>
-          <p:cNvPr id="35" name="Image 7" descr="/home/user/suzuki-ceo/selfcafe-miraiya-trial-deck/assets/icons/LuCheck-green.png">    </p:cNvPr>
-          <p:cNvPicPr>
-            <a:picLocks noChangeAspect="1"/>
-          </p:cNvPicPr>
-          <p:nvPr/>
-        </p:nvPicPr>
-        <p:blipFill>
-          <a:blip r:embed="rId8"/>
-          <a:stretch>
-            <a:fillRect/>
-          </a:stretch>
-        </p:blipFill>
-        <p:spPr>
-          <a:xfrm>
-            <a:off x="8304581" y="3081528"/>
-            <a:ext cx="164592" cy="164592"/>
-          </a:xfrm>
-          <a:prstGeom prst="rect">
-            <a:avLst/>
-          </a:prstGeom>
-        </p:spPr>
-      </p:pic>
-      <p:sp>
-        <p:nvSpPr>
-          <p:cNvPr id="36" name="Text 26"/>
-          <p:cNvSpPr/>
-          <p:nvPr/>
-        </p:nvSpPr>
-        <p:spPr>
-          <a:xfrm>
-            <a:off x="8578901" y="3035808"/>
-            <a:ext cx="2696566" cy="274320"/>
-          </a:xfrm>
-          <a:prstGeom prst="rect">
-            <a:avLst/>
-          </a:prstGeom>
-          <a:noFill/>
-          <a:ln/>
-        </p:spPr>
-        <p:txBody>
-          <a:bodyPr wrap="square" lIns="0" tIns="0" rIns="0" bIns="0" rtlCol="0" anchor="ctr"/>
-          <a:lstStyle/>
-          <a:p>
-            <a:pPr indent="0" marL="0">
-              <a:buNone/>
-            </a:pPr>
-            <a:r>
-              <a:rPr lang="en-US" sz="900" dirty="0">
-                <a:solidFill>
-                  <a:srgbClr val="0A3D23"/>
-                </a:solidFill>
-                <a:latin typeface="Yu Gothic" pitchFamily="34" charset="0"/>
-                <a:ea typeface="Yu Gothic" pitchFamily="34" charset="-122"/>
-                <a:cs typeface="Yu Gothic" pitchFamily="34" charset="-120"/>
-              </a:rPr>
-              <a:t>落ち着いたダークトーンのサイン</a:t>
-            </a:r>
-            <a:endParaRPr lang="en-US" sz="900" dirty="0"/>
-          </a:p>
-        </p:txBody>
-      </p:sp>
-      <p:pic>
-        <p:nvPicPr>
-          <p:cNvPr id="37" name="Image 8" descr="/home/user/suzuki-ceo/selfcafe-miraiya-trial-deck/assets/icons/LuCheck-green.png">    </p:cNvPr>
-          <p:cNvPicPr>
-            <a:picLocks noChangeAspect="1"/>
-          </p:cNvPicPr>
-          <p:nvPr/>
-        </p:nvPicPr>
-        <p:blipFill>
-          <a:blip r:embed="rId9"/>
-          <a:stretch>
-            <a:fillRect/>
-          </a:stretch>
-        </p:blipFill>
-        <p:spPr>
-          <a:xfrm>
-            <a:off x="8304581" y="3410712"/>
-            <a:ext cx="164592" cy="164592"/>
-          </a:xfrm>
-          <a:prstGeom prst="rect">
-            <a:avLst/>
-          </a:prstGeom>
-        </p:spPr>
-      </p:pic>
-      <p:sp>
-        <p:nvSpPr>
-          <p:cNvPr id="38" name="Text 27"/>
-          <p:cNvSpPr/>
-          <p:nvPr/>
-        </p:nvSpPr>
-        <p:spPr>
-          <a:xfrm>
-            <a:off x="8578901" y="3364992"/>
-            <a:ext cx="2696566" cy="274320"/>
-          </a:xfrm>
-          <a:prstGeom prst="rect">
-            <a:avLst/>
-          </a:prstGeom>
-          <a:noFill/>
-          <a:ln/>
-        </p:spPr>
-        <p:txBody>
-          <a:bodyPr wrap="square" lIns="0" tIns="0" rIns="0" bIns="0" rtlCol="0" anchor="ctr"/>
-          <a:lstStyle/>
-          <a:p>
-            <a:pPr indent="0" marL="0">
-              <a:buNone/>
-            </a:pPr>
-            <a:r>
-              <a:rPr lang="en-US" sz="900" dirty="0">
-                <a:solidFill>
-                  <a:srgbClr val="0A3D23"/>
-                </a:solidFill>
-                <a:latin typeface="Yu Gothic" pitchFamily="34" charset="0"/>
-                <a:ea typeface="Yu Gothic" pitchFamily="34" charset="-122"/>
-                <a:cs typeface="Yu Gothic" pitchFamily="34" charset="-120"/>
-              </a:rPr>
-              <a:t>「MIRAIYA Book &amp; Cafe」併記</a:t>
-            </a:r>
-            <a:endParaRPr lang="en-US" sz="900" dirty="0"/>
-          </a:p>
-        </p:txBody>
-      </p:sp>
-      <p:sp>
-        <p:nvSpPr>
-          <p:cNvPr id="39" name="Shape 28"/>
-          <p:cNvSpPr/>
-          <p:nvPr/>
-        </p:nvSpPr>
-        <p:spPr>
-          <a:xfrm>
-            <a:off x="8048549" y="4324540"/>
-            <a:ext cx="3482950" cy="1928813"/>
-          </a:xfrm>
-          <a:prstGeom prst="roundRect">
-            <a:avLst>
-              <a:gd name="adj" fmla="val 2844"/>
-            </a:avLst>
-          </a:prstGeom>
-          <a:solidFill>
-            <a:srgbClr val="FFFFFF"/>
-          </a:solidFill>
-          <a:ln w="9525">
-            <a:solidFill>
-              <a:srgbClr val="EFEAE0"/>
-            </a:solidFill>
-            <a:prstDash val="solid"/>
-          </a:ln>
-        </p:spPr>
-      </p:sp>
-      <p:sp>
-        <p:nvSpPr>
-          <p:cNvPr id="40" name="Text 29"/>
-          <p:cNvSpPr/>
-          <p:nvPr/>
-        </p:nvSpPr>
-        <p:spPr>
-          <a:xfrm>
-            <a:off x="8286293" y="4470844"/>
-            <a:ext cx="3007462" cy="237744"/>
-          </a:xfrm>
-          <a:prstGeom prst="rect">
-            <a:avLst/>
-          </a:prstGeom>
-          <a:noFill/>
-          <a:ln/>
-        </p:spPr>
-        <p:txBody>
-          <a:bodyPr wrap="square" lIns="0" tIns="0" rIns="0" bIns="0" rtlCol="0" anchor="ctr"/>
-          <a:lstStyle/>
-          <a:p>
-            <a:pPr indent="0" marL="0">
-              <a:buNone/>
-            </a:pPr>
-            <a:r>
-              <a:rPr lang="en-US" sz="1050" b="1" dirty="0">
-                <a:solidFill>
-                  <a:srgbClr val="A8761F"/>
-                </a:solidFill>
-                <a:latin typeface="Yu Gothic" pitchFamily="34" charset="0"/>
-                <a:ea typeface="Yu Gothic" pitchFamily="34" charset="-122"/>
-                <a:cs typeface="Yu Gothic" pitchFamily="34" charset="-120"/>
-              </a:rPr>
-              <a:t>床仕上げの違い</a:t>
-            </a:r>
-            <a:endParaRPr lang="en-US" sz="1050" dirty="0"/>
-          </a:p>
-        </p:txBody>
-      </p:sp>
-      <p:sp>
-        <p:nvSpPr>
-          <p:cNvPr id="41" name="Text 30"/>
-          <p:cNvSpPr/>
-          <p:nvPr/>
-        </p:nvSpPr>
-        <p:spPr>
-          <a:xfrm>
-            <a:off x="8286293" y="4800028"/>
-            <a:ext cx="3007462" cy="219456"/>
-          </a:xfrm>
-          <a:prstGeom prst="rect">
-            <a:avLst/>
-          </a:prstGeom>
-          <a:noFill/>
-          <a:ln/>
-        </p:spPr>
-        <p:txBody>
-          <a:bodyPr wrap="square" lIns="0" tIns="0" rIns="0" bIns="0" rtlCol="0" anchor="ctr"/>
-          <a:lstStyle/>
-          <a:p>
-            <a:pPr indent="0" marL="0">
-              <a:buNone/>
-            </a:pPr>
-            <a:r>
-              <a:rPr lang="en-US" sz="950" b="1" dirty="0">
-                <a:solidFill>
-                  <a:srgbClr val="0A3D23"/>
-                </a:solidFill>
-                <a:latin typeface="Yu Gothic" pitchFamily="34" charset="0"/>
-                <a:ea typeface="Yu Gothic" pitchFamily="34" charset="-122"/>
-                <a:cs typeface="Yu Gothic" pitchFamily="34" charset="-120"/>
-              </a:rPr>
-              <a:t>N案</a:t>
-            </a:r>
-            <a:endParaRPr lang="en-US" sz="950" dirty="0"/>
-          </a:p>
-        </p:txBody>
-      </p:sp>
-      <p:sp>
-        <p:nvSpPr>
-          <p:cNvPr id="42" name="Text 31"/>
-          <p:cNvSpPr/>
-          <p:nvPr/>
-        </p:nvSpPr>
-        <p:spPr>
-          <a:xfrm>
-            <a:off x="8286293" y="5001196"/>
-            <a:ext cx="3007462" cy="420624"/>
-          </a:xfrm>
-          <a:prstGeom prst="rect">
-            <a:avLst/>
-          </a:prstGeom>
-          <a:noFill/>
-          <a:ln/>
-        </p:spPr>
-        <p:txBody>
-          <a:bodyPr wrap="square" lIns="0" tIns="0" rIns="0" bIns="0" rtlCol="0" anchor="t"/>
-          <a:lstStyle/>
-          <a:p>
-            <a:pPr indent="0" marL="0">
-              <a:lnSpc>
-                <a:spcPct val="120000"/>
-              </a:lnSpc>
-              <a:buNone/>
-            </a:pPr>
-            <a:r>
-              <a:rPr lang="en-US" sz="900" dirty="0">
-                <a:solidFill>
-                  <a:srgbClr val="4B5550"/>
-                </a:solidFill>
-                <a:latin typeface="Yu Gothic" pitchFamily="34" charset="0"/>
-                <a:ea typeface="Yu Gothic" pitchFamily="34" charset="-122"/>
-                <a:cs typeface="Yu Gothic" pitchFamily="34" charset="-120"/>
-              </a:rPr>
-              <a:t>書店売場の床と連続し、区画が広く開放的に見えます。</a:t>
-            </a:r>
-            <a:endParaRPr lang="en-US" sz="900" dirty="0"/>
-          </a:p>
-        </p:txBody>
-      </p:sp>
-      <p:sp>
-        <p:nvSpPr>
-          <p:cNvPr id="43" name="Text 32"/>
-          <p:cNvSpPr/>
-          <p:nvPr/>
-        </p:nvSpPr>
-        <p:spPr>
-          <a:xfrm>
-            <a:off x="8286293" y="5494972"/>
-            <a:ext cx="3007462" cy="219456"/>
-          </a:xfrm>
-          <a:prstGeom prst="rect">
-            <a:avLst/>
-          </a:prstGeom>
-          <a:noFill/>
-          <a:ln/>
-        </p:spPr>
-        <p:txBody>
-          <a:bodyPr wrap="square" lIns="0" tIns="0" rIns="0" bIns="0" rtlCol="0" anchor="ctr"/>
-          <a:lstStyle/>
-          <a:p>
-            <a:pPr indent="0" marL="0">
-              <a:buNone/>
-            </a:pPr>
-            <a:r>
-              <a:rPr lang="en-US" sz="950" b="1" dirty="0">
-                <a:solidFill>
-                  <a:srgbClr val="0A3D23"/>
-                </a:solidFill>
-                <a:latin typeface="Yu Gothic" pitchFamily="34" charset="0"/>
-                <a:ea typeface="Yu Gothic" pitchFamily="34" charset="-122"/>
-                <a:cs typeface="Yu Gothic" pitchFamily="34" charset="-120"/>
-              </a:rPr>
-              <a:t>G案</a:t>
-            </a:r>
-            <a:endParaRPr lang="en-US" sz="950" dirty="0"/>
-          </a:p>
-        </p:txBody>
-      </p:sp>
-      <p:sp>
-        <p:nvSpPr>
-          <p:cNvPr id="44" name="Text 33"/>
-          <p:cNvSpPr/>
-          <p:nvPr/>
-        </p:nvSpPr>
-        <p:spPr>
-          <a:xfrm>
-            <a:off x="8286293" y="5696140"/>
-            <a:ext cx="3007462" cy="420624"/>
-          </a:xfrm>
-          <a:prstGeom prst="rect">
-            <a:avLst/>
-          </a:prstGeom>
-          <a:noFill/>
-          <a:ln/>
-        </p:spPr>
-        <p:txBody>
-          <a:bodyPr wrap="square" lIns="0" tIns="0" rIns="0" bIns="0" rtlCol="0" anchor="t"/>
-          <a:lstStyle/>
-          <a:p>
-            <a:pPr indent="0" marL="0">
-              <a:lnSpc>
-                <a:spcPct val="120000"/>
-              </a:lnSpc>
-              <a:buNone/>
-            </a:pPr>
-            <a:r>
-              <a:rPr lang="en-US" sz="900" dirty="0">
-                <a:solidFill>
-                  <a:srgbClr val="4B5550"/>
-                </a:solidFill>
-                <a:latin typeface="Yu Gothic" pitchFamily="34" charset="0"/>
-                <a:ea typeface="Yu Gothic" pitchFamily="34" charset="-122"/>
-                <a:cs typeface="Yu Gothic" pitchFamily="34" charset="-120"/>
-              </a:rPr>
-              <a:t>カフェ区画が明確に分かれ、落ち着いた印象になります。</a:t>
-            </a:r>
-            <a:endParaRPr lang="en-US" sz="900" dirty="0"/>
-          </a:p>
-        </p:txBody>
-      </p:sp>
-      <p:sp>
-        <p:nvSpPr>
-          <p:cNvPr id="45" name="Text 34"/>
-          <p:cNvSpPr/>
-          <p:nvPr/>
-        </p:nvSpPr>
-        <p:spPr>
-          <a:xfrm>
-            <a:off x="660197" y="6254496"/>
-            <a:ext cx="10871302" cy="182880"/>
-          </a:xfrm>
-          <a:prstGeom prst="rect">
-            <a:avLst/>
-          </a:prstGeom>
-          <a:noFill/>
-          <a:ln/>
-        </p:spPr>
-        <p:txBody>
-          <a:bodyPr wrap="square" lIns="0" tIns="0" rIns="0" bIns="0" rtlCol="0" anchor="ctr"/>
-          <a:lstStyle/>
-          <a:p>
-            <a:pPr indent="0" marL="0">
-              <a:buNone/>
-            </a:pPr>
-            <a:r>
-              <a:rPr lang="en-US" sz="850" dirty="0">
-                <a:solidFill>
-                  <a:srgbClr val="A8B0AA"/>
-                </a:solidFill>
-                <a:latin typeface="Yu Gothic" pitchFamily="34" charset="0"/>
-                <a:ea typeface="Yu Gothic" pitchFamily="34" charset="-122"/>
-                <a:cs typeface="Yu Gothic" pitchFamily="34" charset="-120"/>
-              </a:rPr>
-              <a:t>※ パースは完成予想図です。内装工事は当社が負担して施工します。什器・造作の再利用可否および工事範囲は現地確認のうえ確定し、実際の仕上がりは設計内容により異なります。</a:t>
             </a:r>
             <a:endParaRPr lang="en-US" sz="850" dirty="0"/>
           </a:p>
@@ -10610,7 +10512,7 @@
                 <a:ea typeface="Yu Gothic" pitchFamily="34" charset="-122"/>
                 <a:cs typeface="Yu Gothic" pitchFamily="34" charset="-120"/>
               </a:rPr>
-              <a:t>トライアル後もそのまま残す前提で考えると、御社の資産にしておくのが最も無駄がありません。</a:t>
+              <a:t>家具・什器は本来当社でご用意しますが、そのまま残す前提では御社の資産にしておくのが最も無駄がありません。</a:t>
             </a:r>
             <a:endParaRPr lang="en-US" sz="1250" dirty="0"/>
           </a:p>
@@ -11270,7 +11172,7 @@
                 <a:ea typeface="Yu Gothic" pitchFamily="34" charset="-122"/>
                 <a:cs typeface="Yu Gothic" pitchFamily="34" charset="-120"/>
               </a:rPr>
-              <a:t>当社側で家具・什器を手配することも可能です。その場合は当社の資産となるため、トライアル終了時に引き上げ・買取のご相談が必要になります。ご希望があればその形でもお受けします。</a:t>
+              <a:t>通常のご契約と同じく当社側で家具・什器を手配することも可能です。その場合は当社の資産となるため、終了時に引き上げ・買取のご相談が必要になります。ご希望があればその形でもお受けします。</a:t>
             </a:r>
             <a:endParaRPr lang="en-US" sz="1050" dirty="0"/>
           </a:p>

--- a/selfcafe-miraiya-trial-deck/selfcafe-miraiya-trial-deck.pptx
+++ b/selfcafe-miraiya-trial-deck/selfcafe-miraiya-trial-deck.pptx
@@ -12,10 +12,9 @@
     <p:sldId id="260" r:id="rId6"/>
     <p:sldId id="261" r:id="rId7"/>
     <p:sldId id="262" r:id="rId8"/>
-    <p:sldId id="263" r:id="rId9"/>
   </p:sldIdLst>
   <p:notesMasterIdLst>
-    <p:notesMasterId r:id="rId10"/>
+    <p:notesMasterId r:id="rId9"/>
   </p:notesMasterIdLst>
   <p:sldSz cx="12192000" cy="6858000"/>
   <p:notesSz cx="6858000" cy="12192000"/>
@@ -1061,94 +1060,6 @@
             <a:fld id="{F7021451-1387-4CA6-816F-3879F97B5CBC}" type="slidenum">
               <a:rPr lang="en-US"/>
               <a:t>7</a:t>
-            </a:fld>
-            <a:endParaRPr lang="en-US"/>
-          </a:p>
-        </p:txBody>
-      </p:sp>
-    </p:spTree>
-    <p:extLst>
-      <p:ext uri="{BB962C8B-B14F-4D97-AF65-F5344CB8AC3E}">
-        <p14:creationId xmlns:p14="http://schemas.microsoft.com/office/powerpoint/2010/main" val="1024086991"/>
-      </p:ext>
-    </p:extLst>
-  </p:cSld>
-  <p:clrMapOvr>
-    <a:masterClrMapping/>
-  </p:clrMapOvr>
-</p:notes>
-</file>
-
-<file path=ppt/notesSlides/notesSlide8.xml><?xml version="1.0" encoding="utf-8"?>
-<p:notes xmlns:a="http://schemas.openxmlformats.org/drawingml/2006/main" xmlns:r="http://schemas.openxmlformats.org/officeDocument/2006/relationships" xmlns:p="http://schemas.openxmlformats.org/presentationml/2006/main">
-  <p:cSld>
-    <p:spTree>
-      <p:nvGrpSpPr>
-        <p:cNvPr id="1" name=""/>
-        <p:cNvGrpSpPr/>
-        <p:nvPr/>
-      </p:nvGrpSpPr>
-      <p:grpSpPr>
-        <a:xfrm>
-          <a:off x="0" y="0"/>
-          <a:ext cx="0" cy="0"/>
-          <a:chOff x="0" y="0"/>
-          <a:chExt cx="0" cy="0"/>
-        </a:xfrm>
-      </p:grpSpPr>
-      <p:sp>
-        <p:nvSpPr>
-          <p:cNvPr id="2" name="Slide Image Placeholder 1"/>
-          <p:cNvSpPr>
-            <a:spLocks noGrp="1" noRot="1" noChangeAspect="1"/>
-          </p:cNvSpPr>
-          <p:nvPr>
-            <p:ph type="sldImg"/>
-          </p:nvPr>
-        </p:nvSpPr>
-        <p:spPr/>
-      </p:sp>
-      <p:sp>
-        <p:nvSpPr>
-          <p:cNvPr id="3" name="Notes Placeholder 2"/>
-          <p:cNvSpPr>
-            <a:spLocks noGrp="1"/>
-          </p:cNvSpPr>
-          <p:nvPr>
-            <p:ph type="body" idx="1"/>
-          </p:nvPr>
-        </p:nvSpPr>
-        <p:spPr/>
-        <p:txBody>
-          <a:bodyPr/>
-          <a:lstStyle/>
-          <a:p>
-            <a:r>
-              <a:rPr lang="en-US" dirty="0"/>
-              <a:t/>
-            </a:r>
-            <a:endParaRPr lang="en-US" dirty="0"/>
-          </a:p>
-        </p:txBody>
-      </p:sp>
-      <p:sp>
-        <p:nvSpPr>
-          <p:cNvPr id="4" name="Slide Number Placeholder 3"/>
-          <p:cNvSpPr>
-            <a:spLocks noGrp="1"/>
-          </p:cNvSpPr>
-          <p:nvPr>
-            <p:ph type="sldNum" sz="quarter" idx="10"/>
-          </p:nvPr>
-        </p:nvSpPr>
-        <p:spPr/>
-        <p:txBody>
-          <a:bodyPr/>
-          <a:lstStyle/>
-          <a:p>
-            <a:fld id="{F7021451-1387-4CA6-816F-3879F97B5CBC}" type="slidenum">
-              <a:rPr lang="en-US"/>
-              <a:t>8</a:t>
             </a:fld>
             <a:endParaRPr lang="en-US"/>
           </a:p>
@@ -10434,7 +10345,7 @@
                 <a:ea typeface="Yu Gothic" pitchFamily="34" charset="-122"/>
                 <a:cs typeface="Yu Gothic" pitchFamily="34" charset="-120"/>
               </a:rPr>
-              <a:t>   家具・什器の考え方</a:t>
+              <a:t>   今後の進め方</a:t>
             </a:r>
             <a:endParaRPr lang="en-US" sz="1050" dirty="0"/>
           </a:p>
@@ -10473,7 +10384,7 @@
                 <a:ea typeface="Yu Gothic" pitchFamily="34" charset="-122"/>
                 <a:cs typeface="Yu Gothic" pitchFamily="34" charset="-120"/>
               </a:rPr>
-              <a:t>家具は御社ご所有のほうがよい、と判断しました。</a:t>
+              <a:t>現地確認から、最短2〜3ヶ月で開始できます。</a:t>
             </a:r>
             <a:endParaRPr lang="en-US" sz="2900" dirty="0"/>
           </a:p>
@@ -10512,7 +10423,7 @@
                 <a:ea typeface="Yu Gothic" pitchFamily="34" charset="-122"/>
                 <a:cs typeface="Yu Gothic" pitchFamily="34" charset="-120"/>
               </a:rPr>
-              <a:t>家具・什器は本来当社でご用意しますが、そのまま残す前提では御社の資産にしておくのが最も無駄がありません。</a:t>
+              <a:t>まずは対象店舗と期間のすり合わせ、現地確認からお願いできればと存じます。</a:t>
             </a:r>
             <a:endParaRPr lang="en-US" sz="1250" dirty="0"/>
           </a:p>
@@ -10615,885 +10526,6 @@
                 <a:cs typeface="Arial" pitchFamily="34" charset="-120"/>
               </a:rPr>
               <a:t>07</a:t>
-            </a:r>
-            <a:endParaRPr lang="en-US" sz="1000" dirty="0"/>
-          </a:p>
-        </p:txBody>
-      </p:sp>
-      <p:sp>
-        <p:nvSpPr>
-          <p:cNvPr id="9" name="Shape 6"/>
-          <p:cNvSpPr/>
-          <p:nvPr/>
-        </p:nvSpPr>
-        <p:spPr>
-          <a:xfrm>
-            <a:off x="660197" y="1651406"/>
-            <a:ext cx="3440887" cy="3017520"/>
-          </a:xfrm>
-          <a:prstGeom prst="roundRect">
-            <a:avLst>
-              <a:gd name="adj" fmla="val 1818"/>
-            </a:avLst>
-          </a:prstGeom>
-          <a:solidFill>
-            <a:srgbClr val="FFFFFF"/>
-          </a:solidFill>
-          <a:ln w="9525">
-            <a:solidFill>
-              <a:srgbClr val="EFEAE0"/>
-            </a:solidFill>
-            <a:prstDash val="solid"/>
-          </a:ln>
-        </p:spPr>
-      </p:sp>
-      <p:pic>
-        <p:nvPicPr>
-          <p:cNvPr id="10" name="Image 1" descr="/home/user/suzuki-ceo/selfcafe-miraiya-trial-deck/assets/icons/LuStore-green.png">    </p:cNvPr>
-          <p:cNvPicPr>
-            <a:picLocks noChangeAspect="1"/>
-          </p:cNvPicPr>
-          <p:nvPr/>
-        </p:nvPicPr>
-        <p:blipFill>
-          <a:blip r:embed="rId2"/>
-          <a:stretch>
-            <a:fillRect/>
-          </a:stretch>
-        </p:blipFill>
-        <p:spPr>
-          <a:xfrm>
-            <a:off x="934517" y="1925726"/>
-            <a:ext cx="365760" cy="365760"/>
-          </a:xfrm>
-          <a:prstGeom prst="rect">
-            <a:avLst/>
-          </a:prstGeom>
-        </p:spPr>
-      </p:pic>
-      <p:sp>
-        <p:nvSpPr>
-          <p:cNvPr id="11" name="Text 7"/>
-          <p:cNvSpPr/>
-          <p:nvPr/>
-        </p:nvSpPr>
-        <p:spPr>
-          <a:xfrm>
-            <a:off x="934517" y="2456078"/>
-            <a:ext cx="2892247" cy="548640"/>
-          </a:xfrm>
-          <a:prstGeom prst="rect">
-            <a:avLst/>
-          </a:prstGeom>
-          <a:noFill/>
-          <a:ln/>
-        </p:spPr>
-        <p:txBody>
-          <a:bodyPr wrap="square" lIns="0" tIns="0" rIns="0" bIns="0" rtlCol="0" anchor="t"/>
-          <a:lstStyle/>
-          <a:p>
-            <a:pPr indent="0" marL="0">
-              <a:lnSpc>
-                <a:spcPct val="120000"/>
-              </a:lnSpc>
-              <a:buNone/>
-            </a:pPr>
-            <a:r>
-              <a:rPr lang="en-US" sz="1300" b="1" dirty="0">
-                <a:solidFill>
-                  <a:srgbClr val="0A3D23"/>
-                </a:solidFill>
-                <a:latin typeface="Yu Gothic" pitchFamily="34" charset="0"/>
-                <a:ea typeface="Yu Gothic" pitchFamily="34" charset="-122"/>
-                <a:cs typeface="Yu Gothic" pitchFamily="34" charset="-120"/>
-              </a:rPr>
-              <a:t>そのまま使い続けられる</a:t>
-            </a:r>
-            <a:endParaRPr lang="en-US" sz="1300" dirty="0"/>
-          </a:p>
-        </p:txBody>
-      </p:sp>
-      <p:sp>
-        <p:nvSpPr>
-          <p:cNvPr id="12" name="Shape 8"/>
-          <p:cNvSpPr/>
-          <p:nvPr/>
-        </p:nvSpPr>
-        <p:spPr>
-          <a:xfrm>
-            <a:off x="934517" y="3096158"/>
-            <a:ext cx="2892247" cy="10058"/>
-          </a:xfrm>
-          <a:prstGeom prst="rect">
-            <a:avLst/>
-          </a:prstGeom>
-          <a:solidFill>
-            <a:srgbClr val="EFEAE0"/>
-          </a:solidFill>
-          <a:ln/>
-        </p:spPr>
-      </p:sp>
-      <p:sp>
-        <p:nvSpPr>
-          <p:cNvPr id="13" name="Text 9"/>
-          <p:cNvSpPr/>
-          <p:nvPr/>
-        </p:nvSpPr>
-        <p:spPr>
-          <a:xfrm>
-            <a:off x="934517" y="3242462"/>
-            <a:ext cx="2892247" cy="1280160"/>
-          </a:xfrm>
-          <a:prstGeom prst="rect">
-            <a:avLst/>
-          </a:prstGeom>
-          <a:noFill/>
-          <a:ln/>
-        </p:spPr>
-        <p:txBody>
-          <a:bodyPr wrap="square" lIns="0" tIns="0" rIns="0" bIns="0" rtlCol="0" anchor="t"/>
-          <a:lstStyle/>
-          <a:p>
-            <a:pPr indent="0" marL="0">
-              <a:lnSpc>
-                <a:spcPct val="140000"/>
-              </a:lnSpc>
-              <a:buNone/>
-            </a:pPr>
-            <a:r>
-              <a:rPr lang="en-US" sz="1000" dirty="0">
-                <a:solidFill>
-                  <a:srgbClr val="4B5550"/>
-                </a:solidFill>
-                <a:latin typeface="Yu Gothic" pitchFamily="34" charset="0"/>
-                <a:ea typeface="Yu Gothic" pitchFamily="34" charset="-122"/>
-                <a:cs typeface="Yu Gothic" pitchFamily="34" charset="-120"/>
-              </a:rPr>
-              <a:t>トライアル後に継続される場合、什器の入れ替えも買い直しも発生しません。設えを変えずに運営を続けられます。</a:t>
-            </a:r>
-            <a:endParaRPr lang="en-US" sz="1000" dirty="0"/>
-          </a:p>
-        </p:txBody>
-      </p:sp>
-      <p:sp>
-        <p:nvSpPr>
-          <p:cNvPr id="14" name="Shape 10"/>
-          <p:cNvSpPr/>
-          <p:nvPr/>
-        </p:nvSpPr>
-        <p:spPr>
-          <a:xfrm>
-            <a:off x="4375404" y="1651406"/>
-            <a:ext cx="3440887" cy="3017520"/>
-          </a:xfrm>
-          <a:prstGeom prst="roundRect">
-            <a:avLst>
-              <a:gd name="adj" fmla="val 1818"/>
-            </a:avLst>
-          </a:prstGeom>
-          <a:solidFill>
-            <a:srgbClr val="FFFFFF"/>
-          </a:solidFill>
-          <a:ln w="9525">
-            <a:solidFill>
-              <a:srgbClr val="EFEAE0"/>
-            </a:solidFill>
-            <a:prstDash val="solid"/>
-          </a:ln>
-        </p:spPr>
-      </p:sp>
-      <p:pic>
-        <p:nvPicPr>
-          <p:cNvPr id="15" name="Image 2" descr="/home/user/suzuki-ceo/selfcafe-miraiya-trial-deck/assets/icons/LuShieldCheck-green.png">    </p:cNvPr>
-          <p:cNvPicPr>
-            <a:picLocks noChangeAspect="1"/>
-          </p:cNvPicPr>
-          <p:nvPr/>
-        </p:nvPicPr>
-        <p:blipFill>
-          <a:blip r:embed="rId3"/>
-          <a:stretch>
-            <a:fillRect/>
-          </a:stretch>
-        </p:blipFill>
-        <p:spPr>
-          <a:xfrm>
-            <a:off x="4649724" y="1925726"/>
-            <a:ext cx="365760" cy="365760"/>
-          </a:xfrm>
-          <a:prstGeom prst="rect">
-            <a:avLst/>
-          </a:prstGeom>
-        </p:spPr>
-      </p:pic>
-      <p:sp>
-        <p:nvSpPr>
-          <p:cNvPr id="16" name="Text 11"/>
-          <p:cNvSpPr/>
-          <p:nvPr/>
-        </p:nvSpPr>
-        <p:spPr>
-          <a:xfrm>
-            <a:off x="4649724" y="2456078"/>
-            <a:ext cx="2892247" cy="548640"/>
-          </a:xfrm>
-          <a:prstGeom prst="rect">
-            <a:avLst/>
-          </a:prstGeom>
-          <a:noFill/>
-          <a:ln/>
-        </p:spPr>
-        <p:txBody>
-          <a:bodyPr wrap="square" lIns="0" tIns="0" rIns="0" bIns="0" rtlCol="0" anchor="t"/>
-          <a:lstStyle/>
-          <a:p>
-            <a:pPr indent="0" marL="0">
-              <a:lnSpc>
-                <a:spcPct val="120000"/>
-              </a:lnSpc>
-              <a:buNone/>
-            </a:pPr>
-            <a:r>
-              <a:rPr lang="en-US" sz="1300" b="1" dirty="0">
-                <a:solidFill>
-                  <a:srgbClr val="0A3D23"/>
-                </a:solidFill>
-                <a:latin typeface="Yu Gothic" pitchFamily="34" charset="0"/>
-                <a:ea typeface="Yu Gothic" pitchFamily="34" charset="-122"/>
-                <a:cs typeface="Yu Gothic" pitchFamily="34" charset="-120"/>
-              </a:rPr>
-              <a:t>御社の資産として残る</a:t>
-            </a:r>
-            <a:endParaRPr lang="en-US" sz="1300" dirty="0"/>
-          </a:p>
-        </p:txBody>
-      </p:sp>
-      <p:sp>
-        <p:nvSpPr>
-          <p:cNvPr id="17" name="Shape 12"/>
-          <p:cNvSpPr/>
-          <p:nvPr/>
-        </p:nvSpPr>
-        <p:spPr>
-          <a:xfrm>
-            <a:off x="4649724" y="3096158"/>
-            <a:ext cx="2892247" cy="10058"/>
-          </a:xfrm>
-          <a:prstGeom prst="rect">
-            <a:avLst/>
-          </a:prstGeom>
-          <a:solidFill>
-            <a:srgbClr val="EFEAE0"/>
-          </a:solidFill>
-          <a:ln/>
-        </p:spPr>
-      </p:sp>
-      <p:sp>
-        <p:nvSpPr>
-          <p:cNvPr id="18" name="Text 13"/>
-          <p:cNvSpPr/>
-          <p:nvPr/>
-        </p:nvSpPr>
-        <p:spPr>
-          <a:xfrm>
-            <a:off x="4649724" y="3242462"/>
-            <a:ext cx="2892247" cy="1280160"/>
-          </a:xfrm>
-          <a:prstGeom prst="rect">
-            <a:avLst/>
-          </a:prstGeom>
-          <a:noFill/>
-          <a:ln/>
-        </p:spPr>
-        <p:txBody>
-          <a:bodyPr wrap="square" lIns="0" tIns="0" rIns="0" bIns="0" rtlCol="0" anchor="t"/>
-          <a:lstStyle/>
-          <a:p>
-            <a:pPr indent="0" marL="0">
-              <a:lnSpc>
-                <a:spcPct val="140000"/>
-              </a:lnSpc>
-              <a:buNone/>
-            </a:pPr>
-            <a:r>
-              <a:rPr lang="en-US" sz="1000" dirty="0">
-                <a:solidFill>
-                  <a:srgbClr val="4B5550"/>
-                </a:solidFill>
-                <a:latin typeface="Yu Gothic" pitchFamily="34" charset="0"/>
-                <a:ea typeface="Yu Gothic" pitchFamily="34" charset="-122"/>
-                <a:cs typeface="Yu Gothic" pitchFamily="34" charset="-120"/>
-              </a:rPr>
-              <a:t>当社所有にすると、契約が終わる際に引き上げか買取かの整理が必要になります。はじめから御社ご所有であれば、その論点自体がなくなります。</a:t>
-            </a:r>
-            <a:endParaRPr lang="en-US" sz="1000" dirty="0"/>
-          </a:p>
-        </p:txBody>
-      </p:sp>
-      <p:sp>
-        <p:nvSpPr>
-          <p:cNvPr id="19" name="Shape 14"/>
-          <p:cNvSpPr/>
-          <p:nvPr/>
-        </p:nvSpPr>
-        <p:spPr>
-          <a:xfrm>
-            <a:off x="8090611" y="1651406"/>
-            <a:ext cx="3440887" cy="3017520"/>
-          </a:xfrm>
-          <a:prstGeom prst="roundRect">
-            <a:avLst>
-              <a:gd name="adj" fmla="val 1818"/>
-            </a:avLst>
-          </a:prstGeom>
-          <a:solidFill>
-            <a:srgbClr val="FFFFFF"/>
-          </a:solidFill>
-          <a:ln w="9525">
-            <a:solidFill>
-              <a:srgbClr val="EFEAE0"/>
-            </a:solidFill>
-            <a:prstDash val="solid"/>
-          </a:ln>
-        </p:spPr>
-      </p:sp>
-      <p:pic>
-        <p:nvPicPr>
-          <p:cNvPr id="20" name="Image 3" descr="/home/user/suzuki-ceo/selfcafe-miraiya-trial-deck/assets/icons/LuPenLine-green.png">    </p:cNvPr>
-          <p:cNvPicPr>
-            <a:picLocks noChangeAspect="1"/>
-          </p:cNvPicPr>
-          <p:nvPr/>
-        </p:nvPicPr>
-        <p:blipFill>
-          <a:blip r:embed="rId4"/>
-          <a:stretch>
-            <a:fillRect/>
-          </a:stretch>
-        </p:blipFill>
-        <p:spPr>
-          <a:xfrm>
-            <a:off x="8364931" y="1925726"/>
-            <a:ext cx="365760" cy="365760"/>
-          </a:xfrm>
-          <a:prstGeom prst="rect">
-            <a:avLst/>
-          </a:prstGeom>
-        </p:spPr>
-      </p:pic>
-      <p:sp>
-        <p:nvSpPr>
-          <p:cNvPr id="21" name="Text 15"/>
-          <p:cNvSpPr/>
-          <p:nvPr/>
-        </p:nvSpPr>
-        <p:spPr>
-          <a:xfrm>
-            <a:off x="8364931" y="2456078"/>
-            <a:ext cx="2892247" cy="548640"/>
-          </a:xfrm>
-          <a:prstGeom prst="rect">
-            <a:avLst/>
-          </a:prstGeom>
-          <a:noFill/>
-          <a:ln/>
-        </p:spPr>
-        <p:txBody>
-          <a:bodyPr wrap="square" lIns="0" tIns="0" rIns="0" bIns="0" rtlCol="0" anchor="t"/>
-          <a:lstStyle/>
-          <a:p>
-            <a:pPr indent="0" marL="0">
-              <a:lnSpc>
-                <a:spcPct val="120000"/>
-              </a:lnSpc>
-              <a:buNone/>
-            </a:pPr>
-            <a:r>
-              <a:rPr lang="en-US" sz="1300" b="1" dirty="0">
-                <a:solidFill>
-                  <a:srgbClr val="0A3D23"/>
-                </a:solidFill>
-                <a:latin typeface="Yu Gothic" pitchFamily="34" charset="0"/>
-                <a:ea typeface="Yu Gothic" pitchFamily="34" charset="-122"/>
-                <a:cs typeface="Yu Gothic" pitchFamily="34" charset="-120"/>
-              </a:rPr>
-              <a:t>仕様を御社で選べる</a:t>
-            </a:r>
-            <a:endParaRPr lang="en-US" sz="1300" dirty="0"/>
-          </a:p>
-        </p:txBody>
-      </p:sp>
-      <p:sp>
-        <p:nvSpPr>
-          <p:cNvPr id="22" name="Shape 16"/>
-          <p:cNvSpPr/>
-          <p:nvPr/>
-        </p:nvSpPr>
-        <p:spPr>
-          <a:xfrm>
-            <a:off x="8364931" y="3096158"/>
-            <a:ext cx="2892247" cy="10058"/>
-          </a:xfrm>
-          <a:prstGeom prst="rect">
-            <a:avLst/>
-          </a:prstGeom>
-          <a:solidFill>
-            <a:srgbClr val="EFEAE0"/>
-          </a:solidFill>
-          <a:ln/>
-        </p:spPr>
-      </p:sp>
-      <p:sp>
-        <p:nvSpPr>
-          <p:cNvPr id="23" name="Text 17"/>
-          <p:cNvSpPr/>
-          <p:nvPr/>
-        </p:nvSpPr>
-        <p:spPr>
-          <a:xfrm>
-            <a:off x="8364931" y="3242462"/>
-            <a:ext cx="2892247" cy="1280160"/>
-          </a:xfrm>
-          <a:prstGeom prst="rect">
-            <a:avLst/>
-          </a:prstGeom>
-          <a:noFill/>
-          <a:ln/>
-        </p:spPr>
-        <p:txBody>
-          <a:bodyPr wrap="square" lIns="0" tIns="0" rIns="0" bIns="0" rtlCol="0" anchor="t"/>
-          <a:lstStyle/>
-          <a:p>
-            <a:pPr indent="0" marL="0">
-              <a:lnSpc>
-                <a:spcPct val="140000"/>
-              </a:lnSpc>
-              <a:buNone/>
-            </a:pPr>
-            <a:r>
-              <a:rPr lang="en-US" sz="1000" dirty="0">
-                <a:solidFill>
-                  <a:srgbClr val="4B5550"/>
-                </a:solidFill>
-                <a:latin typeface="Yu Gothic" pitchFamily="34" charset="0"/>
-                <a:ea typeface="Yu Gothic" pitchFamily="34" charset="-122"/>
-                <a:cs typeface="Yu Gothic" pitchFamily="34" charset="-120"/>
-              </a:rPr>
-              <a:t>テーブル・椅子・植栽は店舗の雰囲気を大きく左右します。書店の売場に合わせて御社側でお選びいただけます。</a:t>
-            </a:r>
-            <a:endParaRPr lang="en-US" sz="1000" dirty="0"/>
-          </a:p>
-        </p:txBody>
-      </p:sp>
-      <p:sp>
-        <p:nvSpPr>
-          <p:cNvPr id="24" name="Shape 18"/>
-          <p:cNvSpPr/>
-          <p:nvPr/>
-        </p:nvSpPr>
-        <p:spPr>
-          <a:xfrm>
-            <a:off x="660197" y="4809744"/>
-            <a:ext cx="10871302" cy="914400"/>
-          </a:xfrm>
-          <a:prstGeom prst="roundRect">
-            <a:avLst>
-              <a:gd name="adj" fmla="val 6000"/>
-            </a:avLst>
-          </a:prstGeom>
-          <a:solidFill>
-            <a:srgbClr val="F1F8F3"/>
-          </a:solidFill>
-          <a:ln w="9525">
-            <a:solidFill>
-              <a:srgbClr val="D2E7DA"/>
-            </a:solidFill>
-            <a:prstDash val="solid"/>
-          </a:ln>
-        </p:spPr>
-      </p:sp>
-      <p:pic>
-        <p:nvPicPr>
-          <p:cNvPr id="25" name="Image 4" descr="/home/user/suzuki-ceo/selfcafe-miraiya-trial-deck/assets/icons/LuMessagesSquare-green.png">    </p:cNvPr>
-          <p:cNvPicPr>
-            <a:picLocks noChangeAspect="1"/>
-          </p:cNvPicPr>
-          <p:nvPr/>
-        </p:nvPicPr>
-        <p:blipFill>
-          <a:blip r:embed="rId5"/>
-          <a:stretch>
-            <a:fillRect/>
-          </a:stretch>
-        </p:blipFill>
-        <p:spPr>
-          <a:xfrm>
-            <a:off x="971093" y="5084064"/>
-            <a:ext cx="365760" cy="365760"/>
-          </a:xfrm>
-          <a:prstGeom prst="rect">
-            <a:avLst/>
-          </a:prstGeom>
-        </p:spPr>
-      </p:pic>
-      <p:sp>
-        <p:nvSpPr>
-          <p:cNvPr id="26" name="Text 19"/>
-          <p:cNvSpPr/>
-          <p:nvPr/>
-        </p:nvSpPr>
-        <p:spPr>
-          <a:xfrm>
-            <a:off x="1501445" y="4809744"/>
-            <a:ext cx="9682582" cy="914400"/>
-          </a:xfrm>
-          <a:prstGeom prst="rect">
-            <a:avLst/>
-          </a:prstGeom>
-          <a:noFill/>
-          <a:ln/>
-        </p:spPr>
-        <p:txBody>
-          <a:bodyPr wrap="square" lIns="0" tIns="0" rIns="0" bIns="0" rtlCol="0" anchor="ctr"/>
-          <a:lstStyle/>
-          <a:p>
-            <a:pPr indent="0" marL="0">
-              <a:lnSpc>
-                <a:spcPct val="135000"/>
-              </a:lnSpc>
-              <a:buNone/>
-            </a:pPr>
-            <a:r>
-              <a:rPr lang="en-US" sz="1050" dirty="0">
-                <a:solidFill>
-                  <a:srgbClr val="0A3D23"/>
-                </a:solidFill>
-                <a:latin typeface="Yu Gothic" pitchFamily="34" charset="0"/>
-                <a:ea typeface="Yu Gothic" pitchFamily="34" charset="-122"/>
-                <a:cs typeface="Yu Gothic" pitchFamily="34" charset="-120"/>
-              </a:rPr>
-              <a:t>通常のご契約と同じく当社側で家具・什器を手配することも可能です。その場合は当社の資産となるため、終了時に引き上げ・買取のご相談が必要になります。ご希望があればその形でもお受けします。</a:t>
-            </a:r>
-            <a:endParaRPr lang="en-US" sz="1050" dirty="0"/>
-          </a:p>
-        </p:txBody>
-      </p:sp>
-      <p:sp>
-        <p:nvSpPr>
-          <p:cNvPr id="27" name="Text 20"/>
-          <p:cNvSpPr/>
-          <p:nvPr/>
-        </p:nvSpPr>
-        <p:spPr>
-          <a:xfrm>
-            <a:off x="660197" y="5888736"/>
-            <a:ext cx="10871302" cy="182880"/>
-          </a:xfrm>
-          <a:prstGeom prst="rect">
-            <a:avLst/>
-          </a:prstGeom>
-          <a:noFill/>
-          <a:ln/>
-        </p:spPr>
-        <p:txBody>
-          <a:bodyPr wrap="square" lIns="0" tIns="0" rIns="0" bIns="0" rtlCol="0" anchor="ctr"/>
-          <a:lstStyle/>
-          <a:p>
-            <a:pPr indent="0" marL="0">
-              <a:buNone/>
-            </a:pPr>
-            <a:r>
-              <a:rPr lang="en-US" sz="850" dirty="0">
-                <a:solidFill>
-                  <a:srgbClr val="A8B0AA"/>
-                </a:solidFill>
-                <a:latin typeface="Yu Gothic" pitchFamily="34" charset="0"/>
-                <a:ea typeface="Yu Gothic" pitchFamily="34" charset="-122"/>
-                <a:cs typeface="Yu Gothic" pitchFamily="34" charset="-120"/>
-              </a:rPr>
-              <a:t>※ 什器の概算費用は、レイアウト確定後にお見積りをお出しします。既存什器を再利用できる場合は、その分ご負担が減ります。</a:t>
-            </a:r>
-            <a:endParaRPr lang="en-US" sz="850" dirty="0"/>
-          </a:p>
-        </p:txBody>
-      </p:sp>
-    </p:spTree>
-  </p:cSld>
-  <p:clrMapOvr>
-    <a:masterClrMapping/>
-  </p:clrMapOvr>
-</p:sld>
-</file>
-
-<file path=ppt/slides/slide8.xml><?xml version="1.0" encoding="utf-8"?>
-<p:sld xmlns:a="http://schemas.openxmlformats.org/drawingml/2006/main" xmlns:r="http://schemas.openxmlformats.org/officeDocument/2006/relationships" xmlns:p="http://schemas.openxmlformats.org/presentationml/2006/main">
-  <p:cSld name="Slide 8">
-    <p:bg>
-      <p:bgPr>
-        <a:solidFill>
-          <a:srgbClr val="FFFDF7"/>
-        </a:solidFill>
-      </p:bgPr>
-    </p:bg>
-    <p:spTree>
-      <p:nvGrpSpPr>
-        <p:cNvPr id="1" name=""/>
-        <p:cNvGrpSpPr/>
-        <p:nvPr/>
-      </p:nvGrpSpPr>
-      <p:grpSpPr>
-        <a:xfrm>
-          <a:off x="0" y="0"/>
-          <a:ext cx="0" cy="0"/>
-          <a:chOff x="0" y="0"/>
-          <a:chExt cx="0" cy="0"/>
-        </a:xfrm>
-      </p:grpSpPr>
-      <p:sp>
-        <p:nvSpPr>
-          <p:cNvPr id="2" name="Shape 0"/>
-          <p:cNvSpPr/>
-          <p:nvPr/>
-        </p:nvSpPr>
-        <p:spPr>
-          <a:xfrm>
-            <a:off x="660197" y="545897"/>
-            <a:ext cx="202997" cy="25603"/>
-          </a:xfrm>
-          <a:prstGeom prst="rect">
-            <a:avLst/>
-          </a:prstGeom>
-          <a:solidFill>
-            <a:srgbClr val="106838"/>
-          </a:solidFill>
-          <a:ln/>
-        </p:spPr>
-      </p:sp>
-      <p:sp>
-        <p:nvSpPr>
-          <p:cNvPr id="3" name="Text 1"/>
-          <p:cNvSpPr/>
-          <p:nvPr/>
-        </p:nvSpPr>
-        <p:spPr>
-          <a:xfrm>
-            <a:off x="952805" y="444398"/>
-            <a:ext cx="6400800" cy="177394"/>
-          </a:xfrm>
-          <a:prstGeom prst="rect">
-            <a:avLst/>
-          </a:prstGeom>
-          <a:noFill/>
-          <a:ln/>
-        </p:spPr>
-        <p:txBody>
-          <a:bodyPr wrap="square" lIns="0" tIns="0" rIns="0" bIns="0" rtlCol="0" anchor="ctr"/>
-          <a:lstStyle/>
-          <a:p>
-            <a:pPr indent="0" marL="0">
-              <a:buNone/>
-            </a:pPr>
-            <a:r>
-              <a:rPr lang="en-US" sz="1050" b="1" dirty="0">
-                <a:solidFill>
-                  <a:srgbClr val="A8761F"/>
-                </a:solidFill>
-                <a:latin typeface="Arial" pitchFamily="34" charset="0"/>
-                <a:ea typeface="Arial" pitchFamily="34" charset="-122"/>
-                <a:cs typeface="Arial" pitchFamily="34" charset="-120"/>
-              </a:rPr>
-              <a:t>07</a:t>
-            </a:r>
-            <a:r>
-              <a:rPr lang="en-US" sz="1050" b="1" dirty="0">
-                <a:solidFill>
-                  <a:srgbClr val="1B8149"/>
-                </a:solidFill>
-                <a:latin typeface="Yu Gothic" pitchFamily="34" charset="0"/>
-                <a:ea typeface="Yu Gothic" pitchFamily="34" charset="-122"/>
-                <a:cs typeface="Yu Gothic" pitchFamily="34" charset="-120"/>
-              </a:rPr>
-              <a:t>   今後の進め方</a:t>
-            </a:r>
-            <a:endParaRPr lang="en-US" sz="1050" dirty="0"/>
-          </a:p>
-        </p:txBody>
-      </p:sp>
-      <p:sp>
-        <p:nvSpPr>
-          <p:cNvPr id="4" name="Text 2"/>
-          <p:cNvSpPr/>
-          <p:nvPr/>
-        </p:nvSpPr>
-        <p:spPr>
-          <a:xfrm>
-            <a:off x="660197" y="660197"/>
-            <a:ext cx="8889797" cy="508406"/>
-          </a:xfrm>
-          <a:prstGeom prst="rect">
-            <a:avLst/>
-          </a:prstGeom>
-          <a:noFill/>
-          <a:ln/>
-        </p:spPr>
-        <p:txBody>
-          <a:bodyPr wrap="square" lIns="0" tIns="0" rIns="0" bIns="0" rtlCol="0" anchor="ctr"/>
-          <a:lstStyle/>
-          <a:p>
-            <a:pPr indent="0" marL="0">
-              <a:buNone/>
-            </a:pPr>
-            <a:r>
-              <a:rPr lang="en-US" sz="2900" b="1" dirty="0">
-                <a:solidFill>
-                  <a:srgbClr val="0A3D23"/>
-                </a:solidFill>
-                <a:latin typeface="Yu Gothic" pitchFamily="34" charset="0"/>
-                <a:ea typeface="Yu Gothic" pitchFamily="34" charset="-122"/>
-                <a:cs typeface="Yu Gothic" pitchFamily="34" charset="-120"/>
-              </a:rPr>
-              <a:t>現地確認から、最短2〜3ヶ月で開始できます。</a:t>
-            </a:r>
-            <a:endParaRPr lang="en-US" sz="2900" dirty="0"/>
-          </a:p>
-        </p:txBody>
-      </p:sp>
-      <p:sp>
-        <p:nvSpPr>
-          <p:cNvPr id="5" name="Text 3"/>
-          <p:cNvSpPr/>
-          <p:nvPr/>
-        </p:nvSpPr>
-        <p:spPr>
-          <a:xfrm>
-            <a:off x="660197" y="1308506"/>
-            <a:ext cx="10032797" cy="228600"/>
-          </a:xfrm>
-          <a:prstGeom prst="rect">
-            <a:avLst/>
-          </a:prstGeom>
-          <a:noFill/>
-          <a:ln/>
-        </p:spPr>
-        <p:txBody>
-          <a:bodyPr wrap="square" lIns="0" tIns="0" rIns="0" bIns="0" rtlCol="0" anchor="ctr"/>
-          <a:lstStyle/>
-          <a:p>
-            <a:pPr indent="0" marL="0">
-              <a:buNone/>
-            </a:pPr>
-            <a:r>
-              <a:rPr lang="en-US" sz="1250" dirty="0">
-                <a:solidFill>
-                  <a:srgbClr val="4B5550"/>
-                </a:solidFill>
-                <a:latin typeface="Yu Gothic" pitchFamily="34" charset="0"/>
-                <a:ea typeface="Yu Gothic" pitchFamily="34" charset="-122"/>
-                <a:cs typeface="Yu Gothic" pitchFamily="34" charset="-120"/>
-              </a:rPr>
-              <a:t>まずは対象店舗と期間のすり合わせ、現地確認からお願いできればと存じます。</a:t>
-            </a:r>
-            <a:endParaRPr lang="en-US" sz="1250" dirty="0"/>
-          </a:p>
-        </p:txBody>
-      </p:sp>
-      <p:pic>
-        <p:nvPicPr>
-          <p:cNvPr id="6" name="Image 0" descr="/home/user/suzuki-ceo/selfcafe-miraiya-trial-deck/assets/logo-green.png">    </p:cNvPr>
-          <p:cNvPicPr>
-            <a:picLocks noChangeAspect="1"/>
-          </p:cNvPicPr>
-          <p:nvPr/>
-        </p:nvPicPr>
-        <p:blipFill>
-          <a:blip r:embed="rId1"/>
-          <a:stretch>
-            <a:fillRect/>
-          </a:stretch>
-        </p:blipFill>
-        <p:spPr>
-          <a:xfrm>
-            <a:off x="9855403" y="482803"/>
-            <a:ext cx="1676095" cy="238658"/>
-          </a:xfrm>
-          <a:prstGeom prst="rect">
-            <a:avLst/>
-          </a:prstGeom>
-        </p:spPr>
-      </p:pic>
-      <p:sp>
-        <p:nvSpPr>
-          <p:cNvPr id="7" name="Text 4"/>
-          <p:cNvSpPr/>
-          <p:nvPr/>
-        </p:nvSpPr>
-        <p:spPr>
-          <a:xfrm>
-            <a:off x="660197" y="6476695"/>
-            <a:ext cx="5080406" cy="152705"/>
-          </a:xfrm>
-          <a:prstGeom prst="rect">
-            <a:avLst/>
-          </a:prstGeom>
-          <a:noFill/>
-          <a:ln/>
-        </p:spPr>
-        <p:txBody>
-          <a:bodyPr wrap="square" lIns="0" tIns="0" rIns="0" bIns="0" rtlCol="0" anchor="ctr"/>
-          <a:lstStyle/>
-          <a:p>
-            <a:pPr indent="0" marL="0">
-              <a:buNone/>
-            </a:pPr>
-            <a:r>
-              <a:rPr lang="en-US" sz="900" dirty="0">
-                <a:solidFill>
-                  <a:srgbClr val="A8B0AA"/>
-                </a:solidFill>
-                <a:latin typeface="Yu Gothic" pitchFamily="34" charset="0"/>
-                <a:ea typeface="Yu Gothic" pitchFamily="34" charset="-122"/>
-                <a:cs typeface="Yu Gothic" pitchFamily="34" charset="-120"/>
-              </a:rPr>
-              <a:t>セルフカフェ × 未来屋書店 トライアル導入のご提案</a:t>
-            </a:r>
-            <a:endParaRPr lang="en-US" sz="900" dirty="0"/>
-          </a:p>
-        </p:txBody>
-      </p:sp>
-      <p:sp>
-        <p:nvSpPr>
-          <p:cNvPr id="8" name="Text 5"/>
-          <p:cNvSpPr/>
-          <p:nvPr/>
-        </p:nvSpPr>
-        <p:spPr>
-          <a:xfrm>
-            <a:off x="10261397" y="6463894"/>
-            <a:ext cx="1270102" cy="152705"/>
-          </a:xfrm>
-          <a:prstGeom prst="rect">
-            <a:avLst/>
-          </a:prstGeom>
-          <a:noFill/>
-          <a:ln/>
-        </p:spPr>
-        <p:txBody>
-          <a:bodyPr wrap="square" lIns="0" tIns="0" rIns="0" bIns="0" rtlCol="0" anchor="ctr"/>
-          <a:lstStyle/>
-          <a:p>
-            <a:pPr algn="r" indent="0" marL="0">
-              <a:buNone/>
-            </a:pPr>
-            <a:r>
-              <a:rPr lang="en-US" sz="1000" b="1" dirty="0">
-                <a:solidFill>
-                  <a:srgbClr val="7E8882"/>
-                </a:solidFill>
-                <a:latin typeface="Arial" pitchFamily="34" charset="0"/>
-                <a:ea typeface="Arial" pitchFamily="34" charset="-122"/>
-                <a:cs typeface="Arial" pitchFamily="34" charset="-120"/>
-              </a:rPr>
-              <a:t>08</a:t>
             </a:r>
             <a:endParaRPr lang="en-US" sz="1000" dirty="0"/>
           </a:p>
